--- a/seminar/slides/세션3_병렬성설계와_성능.pptx
+++ b/seminar/slides/세션3_병렬성설계와_성능.pptx
@@ -16,9 +16,10 @@
     <p:sldId id="264" r:id="rId10"/>
     <p:sldId id="265" r:id="rId11"/>
     <p:sldId id="266" r:id="rId12"/>
+    <p:sldId id="267" r:id="rId13"/>
   </p:sldIdLst>
   <p:notesMasterIdLst>
-    <p:notesMasterId r:id="rId13"/>
+    <p:notesMasterId r:id="rId14"/>
   </p:notesMasterIdLst>
   <p:sldSz cx="12192000" cy="6858000"/>
   <p:notesSz cx="6858000" cy="12192000"/>
@@ -600,7 +601,7 @@
           <a:p>
             <a:r>
               <a:rPr lang="en-US" dirty="0"/>
-              <a:t>네 가지 목표(슬라이드 2)로 돌아가 자가 점검을 유도하세요.</a:t>
+              <a:t>Ex 3의 블록 크기 스윕을 그래프로 그리게 하면 '최적점'을 스스로 발견합니다. 정답을 미리 주지 마세요.</a:t>
             </a:r>
             <a:endParaRPr lang="en-US" dirty="0"/>
           </a:p>
@@ -688,7 +689,7 @@
           <a:p>
             <a:r>
               <a:rPr lang="en-US" dirty="0"/>
-              <a:t>오늘 본 병렬 커널에서 여러 스레드가 하나의 카운터를 건드리는 문제가 세션 4의 출발점.</a:t>
+              <a:t>네 가지 목표(슬라이드 2)로 돌아가 자가 점검을 유도하세요.</a:t>
             </a:r>
             <a:endParaRPr lang="en-US" dirty="0"/>
           </a:p>
@@ -712,6 +713,94 @@
             <a:fld id="{F7021451-1387-4CA6-816F-3879F97B5CBC}" type="slidenum">
               <a:rPr lang="en-US"/>
               <a:t>11</a:t>
+            </a:fld>
+            <a:endParaRPr lang="en-US"/>
+          </a:p>
+        </p:txBody>
+      </p:sp>
+    </p:spTree>
+    <p:extLst>
+      <p:ext uri="{BB962C8B-B14F-4D97-AF65-F5344CB8AC3E}">
+        <p14:creationId xmlns:p14="http://schemas.microsoft.com/office/powerpoint/2010/main" val="1024086991"/>
+      </p:ext>
+    </p:extLst>
+  </p:cSld>
+  <p:clrMapOvr>
+    <a:masterClrMapping/>
+  </p:clrMapOvr>
+</p:notes>
+</file>
+
+<file path=ppt/notesSlides/notesSlide12.xml><?xml version="1.0" encoding="utf-8"?>
+<p:notes xmlns:a="http://schemas.openxmlformats.org/drawingml/2006/main" xmlns:r="http://schemas.openxmlformats.org/officeDocument/2006/relationships" xmlns:p="http://schemas.openxmlformats.org/presentationml/2006/main">
+  <p:cSld>
+    <p:spTree>
+      <p:nvGrpSpPr>
+        <p:cNvPr id="1" name=""/>
+        <p:cNvGrpSpPr/>
+        <p:nvPr/>
+      </p:nvGrpSpPr>
+      <p:grpSpPr>
+        <a:xfrm>
+          <a:off x="0" y="0"/>
+          <a:ext cx="0" cy="0"/>
+          <a:chOff x="0" y="0"/>
+          <a:chExt cx="0" cy="0"/>
+        </a:xfrm>
+      </p:grpSpPr>
+      <p:sp>
+        <p:nvSpPr>
+          <p:cNvPr id="2" name="Slide Image Placeholder 1"/>
+          <p:cNvSpPr>
+            <a:spLocks noGrp="1" noRot="1" noChangeAspect="1"/>
+          </p:cNvSpPr>
+          <p:nvPr>
+            <p:ph type="sldImg"/>
+          </p:nvPr>
+        </p:nvSpPr>
+        <p:spPr/>
+      </p:sp>
+      <p:sp>
+        <p:nvSpPr>
+          <p:cNvPr id="3" name="Notes Placeholder 2"/>
+          <p:cNvSpPr>
+            <a:spLocks noGrp="1"/>
+          </p:cNvSpPr>
+          <p:nvPr>
+            <p:ph type="body" idx="1"/>
+          </p:nvPr>
+        </p:nvSpPr>
+        <p:spPr/>
+        <p:txBody>
+          <a:bodyPr/>
+          <a:lstStyle/>
+          <a:p>
+            <a:r>
+              <a:rPr lang="en-US" dirty="0"/>
+              <a:t>오늘 본 병렬 커널에서 여러 스레드가 하나의 카운터를 건드리는 문제가 세션 4의 출발점.</a:t>
+            </a:r>
+            <a:endParaRPr lang="en-US" dirty="0"/>
+          </a:p>
+        </p:txBody>
+      </p:sp>
+      <p:sp>
+        <p:nvSpPr>
+          <p:cNvPr id="4" name="Slide Number Placeholder 3"/>
+          <p:cNvSpPr>
+            <a:spLocks noGrp="1"/>
+          </p:cNvSpPr>
+          <p:nvPr>
+            <p:ph type="sldNum" sz="quarter" idx="10"/>
+          </p:nvPr>
+        </p:nvSpPr>
+        <p:spPr/>
+        <p:txBody>
+          <a:bodyPr/>
+          <a:lstStyle/>
+          <a:p>
+            <a:fld id="{F7021451-1387-4CA6-816F-3879F97B5CBC}" type="slidenum">
+              <a:rPr lang="en-US"/>
+              <a:t>12</a:t>
             </a:fld>
             <a:endParaRPr lang="en-US"/>
           </a:p>
@@ -952,7 +1041,7 @@
           <a:p>
             <a:r>
               <a:rPr lang="en-US" dirty="0"/>
-              <a:t>index = i*blockDim.x + threadIdx.x 를 칠판에 그려가며 설명. 스레드 0,1,2,...가 주소 0,1,2,...를 맡음.</a:t>
+              <a:t>SM에 블록 배정 → 워프(32스레드) 단위 실행. blockDim이 32 배수여야 스레드가 낭비 없이 채워짐. 코얼레싱과도 연결.</a:t>
             </a:r>
             <a:endParaRPr lang="en-US" dirty="0"/>
           </a:p>
@@ -1040,7 +1129,7 @@
           <a:p>
             <a:r>
               <a:rPr lang="en-US" dirty="0"/>
-              <a:t>병합은 CUDA 성능 최적화의 1순위. T0~T3이 어느 칸을 가리키는지 눈으로 비교시키세요.</a:t>
+              <a:t>index = i*blockDim.x + threadIdx.x 를 칠판에 그려가며 설명. 스레드 0,1,2,...가 주소 0,1,2,...를 맡음.</a:t>
             </a:r>
             <a:endParaRPr lang="en-US" dirty="0"/>
           </a:p>
@@ -1128,7 +1217,7 @@
           <a:p>
             <a:r>
               <a:rPr lang="en-US" dirty="0"/>
-              <a:t>비동기 실행 개념이 핵심. cudaEventSynchronize가 왜 필요한지(GPU 완료 대기) 짚어주세요.</a:t>
+              <a:t>병합은 CUDA 성능 최적화의 1순위. T0~T3이 어느 칸을 가리키는지 눈으로 비교시키세요.</a:t>
             </a:r>
             <a:endParaRPr lang="en-US" dirty="0"/>
           </a:p>
@@ -1216,7 +1305,7 @@
           <a:p>
             <a:r>
               <a:rPr lang="en-US" dirty="0"/>
-              <a:t>단위 변환(MB/ms=GB/s)을 칠판에서 한 번 유도하면 학생들이 확실히 이해합니다.</a:t>
+              <a:t>비동기 실행 개념이 핵심. cudaEventSynchronize가 왜 필요한지(GPU 완료 대기) 짚어주세요.</a:t>
             </a:r>
             <a:endParaRPr lang="en-US" dirty="0"/>
           </a:p>
@@ -1304,7 +1393,7 @@
           <a:p>
             <a:r>
               <a:rPr lang="en-US" dirty="0"/>
-              <a:t>스트림은 심화 주제라 개념만. 여러 스트림으로 겹쳐 실행(overlap)하는 건 향후 주제로 남깁니다.</a:t>
+              <a:t>단위 변환(MB/ms=GB/s)을 칠판에서 한 번 유도하면 학생들이 확실히 이해합니다.</a:t>
             </a:r>
             <a:endParaRPr lang="en-US" dirty="0"/>
           </a:p>
@@ -1392,7 +1481,7 @@
           <a:p>
             <a:r>
               <a:rPr lang="en-US" dirty="0"/>
-              <a:t>Ex 3의 블록 크기 스윕을 그래프로 그리게 하면 '최적점'을 스스로 발견합니다. 정답을 미리 주지 마세요.</a:t>
+              <a:t>스트림은 심화 주제라 개념만. 여러 스트림으로 겹쳐 실행(overlap)하는 건 향후 주제로 남깁니다.</a:t>
             </a:r>
             <a:endParaRPr lang="en-US" dirty="0"/>
           </a:p>
@@ -2102,7 +2191,7 @@
                 <a:ea typeface="Courier New" pitchFamily="34" charset="-122"/>
                 <a:cs typeface="Courier New" pitchFamily="34" charset="-120"/>
               </a:rPr>
-              <a:t>9</a:t>
+              <a:t>8</a:t>
             </a:r>
             <a:endParaRPr lang="en-US" sz="2200" dirty="0"/>
           </a:p>
@@ -2141,7 +2230,7 @@
                 <a:ea typeface="Malgun Gothic" pitchFamily="34" charset="-122"/>
                 <a:cs typeface="Malgun Gothic" pitchFamily="34" charset="-120"/>
               </a:rPr>
-              <a:t>핵심 정리 &amp; 자주 하는 실수</a:t>
+              <a:t>실습 미리보기 · Lab 3</a:t>
             </a:r>
             <a:endParaRPr lang="en-US" sz="3000" dirty="0"/>
           </a:p>
@@ -2155,12 +2244,12 @@
         </p:nvSpPr>
         <p:spPr>
           <a:xfrm>
-            <a:off x="548640" y="1600200"/>
-            <a:ext cx="5349240" cy="4114800"/>
+            <a:off x="548640" y="1554480"/>
+            <a:ext cx="5303520" cy="1965960"/>
           </a:xfrm>
           <a:prstGeom prst="roundRect">
             <a:avLst>
-              <a:gd name="adj" fmla="val 1778"/>
+              <a:gd name="adj" fmla="val 3721"/>
             </a:avLst>
           </a:prstGeom>
           <a:solidFill>
@@ -2177,157 +2266,139 @@
         </p:nvSpPr>
         <p:spPr>
           <a:xfrm>
-            <a:off x="822960" y="1828800"/>
-            <a:ext cx="4800600" cy="457200"/>
-          </a:xfrm>
-          <a:prstGeom prst="rect">
-            <a:avLst/>
-          </a:prstGeom>
-          <a:noFill/>
-          <a:ln/>
-        </p:spPr>
-        <p:txBody>
-          <a:bodyPr wrap="square" lIns="0" tIns="0" rIns="0" bIns="0" rtlCol="0" anchor="ctr"/>
-          <a:lstStyle/>
-          <a:p>
-            <a:pPr indent="0" marL="0">
-              <a:buNone/>
-            </a:pPr>
-            <a:r>
-              <a:rPr lang="en-US" sz="2000" b="1" dirty="0">
-                <a:solidFill>
-                  <a:srgbClr val="8CC63F"/>
-                </a:solidFill>
-                <a:latin typeface="Malgun Gothic" pitchFamily="34" charset="0"/>
-                <a:ea typeface="Malgun Gothic" pitchFamily="34" charset="-122"/>
-                <a:cs typeface="Malgun Gothic" pitchFamily="34" charset="-120"/>
-              </a:rPr>
-              <a:t>기억할 것</a:t>
-            </a:r>
-            <a:endParaRPr lang="en-US" sz="2000" dirty="0"/>
-          </a:p>
-        </p:txBody>
-      </p:sp>
-      <p:sp>
-        <p:nvSpPr>
-          <p:cNvPr id="6" name="Text 4"/>
-          <p:cNvSpPr/>
-          <p:nvPr/>
-        </p:nvSpPr>
-        <p:spPr>
-          <a:xfrm>
-            <a:off x="822960" y="2423160"/>
-            <a:ext cx="4800600" cy="3108960"/>
-          </a:xfrm>
-          <a:prstGeom prst="rect">
-            <a:avLst/>
-          </a:prstGeom>
-          <a:noFill/>
-          <a:ln/>
-        </p:spPr>
-        <p:txBody>
-          <a:bodyPr wrap="square" lIns="0" tIns="0" rIns="0" bIns="0" rtlCol="0" anchor="t"/>
-          <a:lstStyle/>
-          <a:p>
-            <a:pPr marL="342900" indent="-342900">
-              <a:spcAft>
-                <a:spcPts val="1200"/>
-              </a:spcAft>
-              <a:buSzPct val="100000"/>
-              <a:buChar char="✓"/>
-            </a:pPr>
-            <a:r>
-              <a:rPr lang="en-US" sz="1550" dirty="0">
-                <a:solidFill>
-                  <a:srgbClr val="E8EDF2"/>
-                </a:solidFill>
-                <a:latin typeface="Malgun Gothic" pitchFamily="34" charset="0"/>
-                <a:ea typeface="Malgun Gothic" pitchFamily="34" charset="-122"/>
-                <a:cs typeface="Malgun Gothic" pitchFamily="34" charset="-120"/>
-              </a:rPr>
-              <a:t>총 스레드 = 블록수 × 블록당 스레드</a:t>
-            </a:r>
-            <a:endParaRPr lang="en-US" sz="1550" dirty="0"/>
-          </a:p>
-          <a:p>
-            <a:pPr marL="342900" indent="-342900">
-              <a:spcAft>
-                <a:spcPts val="1200"/>
-              </a:spcAft>
-              <a:buSzPct val="100000"/>
-              <a:buChar char="✓"/>
-            </a:pPr>
-            <a:r>
-              <a:rPr lang="en-US" sz="1550" dirty="0">
-                <a:solidFill>
-                  <a:srgbClr val="E8EDF2"/>
-                </a:solidFill>
-                <a:latin typeface="Malgun Gothic" pitchFamily="34" charset="0"/>
-                <a:ea typeface="Malgun Gothic" pitchFamily="34" charset="-122"/>
-                <a:cs typeface="Malgun Gothic" pitchFamily="34" charset="-120"/>
-              </a:rPr>
-              <a:t>index = i*blockDim.x + threadIdx.x → 병합</a:t>
-            </a:r>
-            <a:endParaRPr lang="en-US" sz="1550" dirty="0"/>
-          </a:p>
-          <a:p>
-            <a:pPr marL="342900" indent="-342900">
-              <a:spcAft>
-                <a:spcPts val="1200"/>
-              </a:spcAft>
-              <a:buSzPct val="100000"/>
-              <a:buChar char="✓"/>
-            </a:pPr>
-            <a:r>
-              <a:rPr lang="en-US" sz="1550" dirty="0">
-                <a:solidFill>
-                  <a:srgbClr val="E8EDF2"/>
-                </a:solidFill>
-                <a:latin typeface="Malgun Gothic" pitchFamily="34" charset="0"/>
-                <a:ea typeface="Malgun Gothic" pitchFamily="34" charset="-122"/>
-                <a:cs typeface="Malgun Gothic" pitchFamily="34" charset="-120"/>
-              </a:rPr>
-              <a:t>커널은 비동기 → 이벤트로 시간 측정</a:t>
-            </a:r>
-            <a:endParaRPr lang="en-US" sz="1550" dirty="0"/>
-          </a:p>
-          <a:p>
-            <a:pPr marL="342900" indent="-342900">
-              <a:buSzPct val="100000"/>
-              <a:buChar char="✓"/>
-            </a:pPr>
-            <a:r>
-              <a:rPr lang="en-US" sz="1550" dirty="0">
-                <a:solidFill>
-                  <a:srgbClr val="E8EDF2"/>
-                </a:solidFill>
-                <a:latin typeface="Malgun Gothic" pitchFamily="34" charset="0"/>
-                <a:ea typeface="Malgun Gothic" pitchFamily="34" charset="-122"/>
-                <a:cs typeface="Malgun Gothic" pitchFamily="34" charset="-120"/>
-              </a:rPr>
-              <a:t>대역폭 = 전송량 ÷ 시간 (GB/s)</a:t>
-            </a:r>
-            <a:endParaRPr lang="en-US" sz="1550" dirty="0"/>
-          </a:p>
-        </p:txBody>
-      </p:sp>
-      <p:sp>
-        <p:nvSpPr>
-          <p:cNvPr id="7" name="Shape 5"/>
-          <p:cNvSpPr/>
-          <p:nvPr/>
-        </p:nvSpPr>
-        <p:spPr>
-          <a:xfrm>
-            <a:off x="6263640" y="1600200"/>
-            <a:ext cx="5349240" cy="4114800"/>
+            <a:off x="804672" y="1755648"/>
+            <a:ext cx="1188720" cy="502920"/>
           </a:xfrm>
           <a:prstGeom prst="roundRect">
             <a:avLst>
-              <a:gd name="adj" fmla="val 1778"/>
+              <a:gd name="adj" fmla="val 14545"/>
             </a:avLst>
           </a:prstGeom>
           <a:solidFill>
+            <a:srgbClr val="8CC63F"/>
+          </a:solidFill>
+          <a:ln/>
+        </p:spPr>
+        <p:txBody>
+          <a:bodyPr wrap="square" rtlCol="0" anchor="ctr"/>
+          <a:lstStyle/>
+          <a:p>
+            <a:pPr algn="ctr" indent="0" marL="0">
+              <a:buNone/>
+            </a:pPr>
+            <a:r>
+              <a:rPr lang="en-US" sz="1700" b="1" dirty="0">
+                <a:solidFill>
+                  <a:srgbClr val="13161C"/>
+                </a:solidFill>
+                <a:latin typeface="Courier New" pitchFamily="34" charset="0"/>
+                <a:ea typeface="Courier New" pitchFamily="34" charset="-122"/>
+                <a:cs typeface="Courier New" pitchFamily="34" charset="-120"/>
+              </a:rPr>
+              <a:t>Ex 1</a:t>
+            </a:r>
+            <a:endParaRPr lang="en-US" sz="1700" dirty="0"/>
+          </a:p>
+        </p:txBody>
+      </p:sp>
+      <p:sp>
+        <p:nvSpPr>
+          <p:cNvPr id="6" name="Text 4"/>
+          <p:cNvSpPr/>
+          <p:nvPr/>
+        </p:nvSpPr>
+        <p:spPr>
+          <a:xfrm>
+            <a:off x="2148840" y="1773936"/>
+            <a:ext cx="3474720" cy="822960"/>
+          </a:xfrm>
+          <a:prstGeom prst="rect">
+            <a:avLst/>
+          </a:prstGeom>
+          <a:noFill/>
+          <a:ln/>
+        </p:spPr>
+        <p:txBody>
+          <a:bodyPr wrap="square" lIns="0" tIns="0" rIns="0" bIns="0" rtlCol="0" anchor="t"/>
+          <a:lstStyle/>
+          <a:p>
+            <a:pPr indent="0" marL="0">
+              <a:buNone/>
+            </a:pPr>
+            <a:r>
+              <a:rPr lang="en-US" sz="1700" b="1" dirty="0">
+                <a:solidFill>
+                  <a:srgbClr val="E8EDF2"/>
+                </a:solidFill>
+                <a:latin typeface="Malgun Gothic" pitchFamily="34" charset="0"/>
+                <a:ea typeface="Malgun Gothic" pitchFamily="34" charset="-122"/>
+                <a:cs typeface="Malgun Gothic" pitchFamily="34" charset="-120"/>
+              </a:rPr>
+              <a:t>느린 커널 vs 빠른 커널</a:t>
+            </a:r>
+            <a:endParaRPr lang="en-US" sz="1700" dirty="0"/>
+          </a:p>
+        </p:txBody>
+      </p:sp>
+      <p:sp>
+        <p:nvSpPr>
+          <p:cNvPr id="7" name="Text 5"/>
+          <p:cNvSpPr/>
+          <p:nvPr/>
+        </p:nvSpPr>
+        <p:spPr>
+          <a:xfrm>
+            <a:off x="804672" y="2651760"/>
+            <a:ext cx="4791456" cy="731520"/>
+          </a:xfrm>
+          <a:prstGeom prst="rect">
+            <a:avLst/>
+          </a:prstGeom>
+          <a:noFill/>
+          <a:ln/>
+        </p:spPr>
+        <p:txBody>
+          <a:bodyPr wrap="square" lIns="0" tIns="0" rIns="0" bIns="0" rtlCol="0" anchor="t"/>
+          <a:lstStyle/>
+          <a:p>
+            <a:pPr indent="0" marL="0">
+              <a:lnSpc>
+                <a:spcPct val="110000"/>
+              </a:lnSpc>
+              <a:buNone/>
+            </a:pPr>
+            <a:r>
+              <a:rPr lang="en-US" sz="1400" dirty="0">
+                <a:solidFill>
+                  <a:srgbClr val="9AA6B2"/>
+                </a:solidFill>
+                <a:latin typeface="Malgun Gothic" pitchFamily="34" charset="0"/>
+                <a:ea typeface="Malgun Gothic" pitchFamily="34" charset="-122"/>
+                <a:cs typeface="Malgun Gothic" pitchFamily="34" charset="-120"/>
+              </a:rPr>
+              <a:t>time으로 Test 3와 Test 10 실행 시간 비교</a:t>
+            </a:r>
+            <a:endParaRPr lang="en-US" sz="1400" dirty="0"/>
+          </a:p>
+        </p:txBody>
+      </p:sp>
+      <p:sp>
+        <p:nvSpPr>
+          <p:cNvPr id="8" name="Shape 6"/>
+          <p:cNvSpPr/>
+          <p:nvPr/>
+        </p:nvSpPr>
+        <p:spPr>
+          <a:xfrm>
+            <a:off x="6309360" y="1554480"/>
+            <a:ext cx="5303520" cy="1965960"/>
+          </a:xfrm>
+          <a:prstGeom prst="roundRect">
+            <a:avLst>
+              <a:gd name="adj" fmla="val 3721"/>
+            </a:avLst>
+          </a:prstGeom>
+          <a:solidFill>
             <a:srgbClr val="1E232C"/>
           </a:solidFill>
           <a:ln/>
@@ -2335,14 +2406,430 @@
       </p:sp>
       <p:sp>
         <p:nvSpPr>
-          <p:cNvPr id="8" name="Text 6"/>
-          <p:cNvSpPr/>
-          <p:nvPr/>
-        </p:nvSpPr>
-        <p:spPr>
-          <a:xfrm>
-            <a:off x="6537960" y="1828800"/>
-            <a:ext cx="4800600" cy="457200"/>
+          <p:cNvPr id="9" name="Text 7"/>
+          <p:cNvSpPr/>
+          <p:nvPr/>
+        </p:nvSpPr>
+        <p:spPr>
+          <a:xfrm>
+            <a:off x="6565392" y="1755648"/>
+            <a:ext cx="1188720" cy="502920"/>
+          </a:xfrm>
+          <a:prstGeom prst="roundRect">
+            <a:avLst>
+              <a:gd name="adj" fmla="val 14545"/>
+            </a:avLst>
+          </a:prstGeom>
+          <a:solidFill>
+            <a:srgbClr val="4FB0C6"/>
+          </a:solidFill>
+          <a:ln/>
+        </p:spPr>
+        <p:txBody>
+          <a:bodyPr wrap="square" rtlCol="0" anchor="ctr"/>
+          <a:lstStyle/>
+          <a:p>
+            <a:pPr algn="ctr" indent="0" marL="0">
+              <a:buNone/>
+            </a:pPr>
+            <a:r>
+              <a:rPr lang="en-US" sz="1700" b="1" dirty="0">
+                <a:solidFill>
+                  <a:srgbClr val="13161C"/>
+                </a:solidFill>
+                <a:latin typeface="Courier New" pitchFamily="34" charset="0"/>
+                <a:ea typeface="Courier New" pitchFamily="34" charset="-122"/>
+                <a:cs typeface="Courier New" pitchFamily="34" charset="-120"/>
+              </a:rPr>
+              <a:t>Ex 2</a:t>
+            </a:r>
+            <a:endParaRPr lang="en-US" sz="1700" dirty="0"/>
+          </a:p>
+        </p:txBody>
+      </p:sp>
+      <p:sp>
+        <p:nvSpPr>
+          <p:cNvPr id="10" name="Text 8"/>
+          <p:cNvSpPr/>
+          <p:nvPr/>
+        </p:nvSpPr>
+        <p:spPr>
+          <a:xfrm>
+            <a:off x="7909560" y="1773936"/>
+            <a:ext cx="3474720" cy="822960"/>
+          </a:xfrm>
+          <a:prstGeom prst="rect">
+            <a:avLst/>
+          </a:prstGeom>
+          <a:noFill/>
+          <a:ln/>
+        </p:spPr>
+        <p:txBody>
+          <a:bodyPr wrap="square" lIns="0" tIns="0" rIns="0" bIns="0" rtlCol="0" anchor="t"/>
+          <a:lstStyle/>
+          <a:p>
+            <a:pPr indent="0" marL="0">
+              <a:buNone/>
+            </a:pPr>
+            <a:r>
+              <a:rPr lang="en-US" sz="1700" b="1" dirty="0">
+                <a:solidFill>
+                  <a:srgbClr val="E8EDF2"/>
+                </a:solidFill>
+                <a:latin typeface="Malgun Gothic" pitchFamily="34" charset="0"/>
+                <a:ea typeface="Malgun Gothic" pitchFamily="34" charset="-122"/>
+                <a:cs typeface="Malgun Gothic" pitchFamily="34" charset="-120"/>
+              </a:rPr>
+              <a:t>대역폭을 눈으로 보기</a:t>
+            </a:r>
+            <a:endParaRPr lang="en-US" sz="1700" dirty="0"/>
+          </a:p>
+        </p:txBody>
+      </p:sp>
+      <p:sp>
+        <p:nvSpPr>
+          <p:cNvPr id="11" name="Text 9"/>
+          <p:cNvSpPr/>
+          <p:nvPr/>
+        </p:nvSpPr>
+        <p:spPr>
+          <a:xfrm>
+            <a:off x="6565392" y="2651760"/>
+            <a:ext cx="4791456" cy="731520"/>
+          </a:xfrm>
+          <a:prstGeom prst="rect">
+            <a:avLst/>
+          </a:prstGeom>
+          <a:noFill/>
+          <a:ln/>
+        </p:spPr>
+        <p:txBody>
+          <a:bodyPr wrap="square" lIns="0" tIns="0" rIns="0" bIns="0" rtlCol="0" anchor="t"/>
+          <a:lstStyle/>
+          <a:p>
+            <a:pPr indent="0" marL="0">
+              <a:lnSpc>
+                <a:spcPct val="110000"/>
+              </a:lnSpc>
+              <a:buNone/>
+            </a:pPr>
+            <a:r>
+              <a:rPr lang="en-US" sz="1400" dirty="0">
+                <a:solidFill>
+                  <a:srgbClr val="9AA6B2"/>
+                </a:solidFill>
+                <a:latin typeface="Malgun Gothic" pitchFamily="34" charset="0"/>
+                <a:ea typeface="Malgun Gothic" pitchFamily="34" charset="-122"/>
+                <a:cs typeface="Malgun Gothic" pitchFamily="34" charset="-120"/>
+              </a:rPr>
+              <a:t>--verbose 로 test10의 bandwidth 로그 확인</a:t>
+            </a:r>
+            <a:endParaRPr lang="en-US" sz="1400" dirty="0"/>
+          </a:p>
+        </p:txBody>
+      </p:sp>
+      <p:sp>
+        <p:nvSpPr>
+          <p:cNvPr id="12" name="Shape 10"/>
+          <p:cNvSpPr/>
+          <p:nvPr/>
+        </p:nvSpPr>
+        <p:spPr>
+          <a:xfrm>
+            <a:off x="548640" y="3840480"/>
+            <a:ext cx="5303520" cy="1965960"/>
+          </a:xfrm>
+          <a:prstGeom prst="roundRect">
+            <a:avLst>
+              <a:gd name="adj" fmla="val 3721"/>
+            </a:avLst>
+          </a:prstGeom>
+          <a:solidFill>
+            <a:srgbClr val="1E232C"/>
+          </a:solidFill>
+          <a:ln/>
+        </p:spPr>
+      </p:sp>
+      <p:sp>
+        <p:nvSpPr>
+          <p:cNvPr id="13" name="Text 11"/>
+          <p:cNvSpPr/>
+          <p:nvPr/>
+        </p:nvSpPr>
+        <p:spPr>
+          <a:xfrm>
+            <a:off x="804672" y="4041648"/>
+            <a:ext cx="1188720" cy="502920"/>
+          </a:xfrm>
+          <a:prstGeom prst="roundRect">
+            <a:avLst>
+              <a:gd name="adj" fmla="val 14545"/>
+            </a:avLst>
+          </a:prstGeom>
+          <a:solidFill>
+            <a:srgbClr val="E0A458"/>
+          </a:solidFill>
+          <a:ln/>
+        </p:spPr>
+        <p:txBody>
+          <a:bodyPr wrap="square" rtlCol="0" anchor="ctr"/>
+          <a:lstStyle/>
+          <a:p>
+            <a:pPr algn="ctr" indent="0" marL="0">
+              <a:buNone/>
+            </a:pPr>
+            <a:r>
+              <a:rPr lang="en-US" sz="1700" b="1" dirty="0">
+                <a:solidFill>
+                  <a:srgbClr val="13161C"/>
+                </a:solidFill>
+                <a:latin typeface="Courier New" pitchFamily="34" charset="0"/>
+                <a:ea typeface="Courier New" pitchFamily="34" charset="-122"/>
+                <a:cs typeface="Courier New" pitchFamily="34" charset="-120"/>
+              </a:rPr>
+              <a:t>Ex 3</a:t>
+            </a:r>
+            <a:endParaRPr lang="en-US" sz="1700" dirty="0"/>
+          </a:p>
+        </p:txBody>
+      </p:sp>
+      <p:sp>
+        <p:nvSpPr>
+          <p:cNvPr id="14" name="Text 12"/>
+          <p:cNvSpPr/>
+          <p:nvPr/>
+        </p:nvSpPr>
+        <p:spPr>
+          <a:xfrm>
+            <a:off x="2148840" y="4059936"/>
+            <a:ext cx="3474720" cy="822960"/>
+          </a:xfrm>
+          <a:prstGeom prst="rect">
+            <a:avLst/>
+          </a:prstGeom>
+          <a:noFill/>
+          <a:ln/>
+        </p:spPr>
+        <p:txBody>
+          <a:bodyPr wrap="square" lIns="0" tIns="0" rIns="0" bIns="0" rtlCol="0" anchor="t"/>
+          <a:lstStyle/>
+          <a:p>
+            <a:pPr indent="0" marL="0">
+              <a:buNone/>
+            </a:pPr>
+            <a:r>
+              <a:rPr lang="en-US" sz="1700" b="1" dirty="0">
+                <a:solidFill>
+                  <a:srgbClr val="E8EDF2"/>
+                </a:solidFill>
+                <a:latin typeface="Malgun Gothic" pitchFamily="34" charset="0"/>
+                <a:ea typeface="Malgun Gothic" pitchFamily="34" charset="-122"/>
+                <a:cs typeface="Malgun Gothic" pitchFamily="34" charset="-120"/>
+              </a:rPr>
+              <a:t>블록 크기를 바꿔 측정</a:t>
+            </a:r>
+            <a:endParaRPr lang="en-US" sz="1700" dirty="0"/>
+          </a:p>
+        </p:txBody>
+      </p:sp>
+      <p:sp>
+        <p:nvSpPr>
+          <p:cNvPr id="15" name="Text 13"/>
+          <p:cNvSpPr/>
+          <p:nvPr/>
+        </p:nvSpPr>
+        <p:spPr>
+          <a:xfrm>
+            <a:off x="804672" y="4937760"/>
+            <a:ext cx="4791456" cy="731520"/>
+          </a:xfrm>
+          <a:prstGeom prst="rect">
+            <a:avLst/>
+          </a:prstGeom>
+          <a:noFill/>
+          <a:ln/>
+        </p:spPr>
+        <p:txBody>
+          <a:bodyPr wrap="square" lIns="0" tIns="0" rIns="0" bIns="0" rtlCol="0" anchor="t"/>
+          <a:lstStyle/>
+          <a:p>
+            <a:pPr indent="0" marL="0">
+              <a:lnSpc>
+                <a:spcPct val="110000"/>
+              </a:lnSpc>
+              <a:buNone/>
+            </a:pPr>
+            <a:r>
+              <a:rPr lang="en-US" sz="1400" dirty="0">
+                <a:solidFill>
+                  <a:srgbClr val="9AA6B2"/>
+                </a:solidFill>
+                <a:latin typeface="Malgun Gothic" pitchFamily="34" charset="0"/>
+                <a:ea typeface="Malgun Gothic" pitchFamily="34" charset="-122"/>
+                <a:cs typeface="Malgun Gothic" pitchFamily="34" charset="-120"/>
+              </a:rPr>
+              <a:t>STRESS_BLOCKSIZE 32~256 별 대역폭 표 작성</a:t>
+            </a:r>
+            <a:endParaRPr lang="en-US" sz="1400" dirty="0"/>
+          </a:p>
+        </p:txBody>
+      </p:sp>
+      <p:sp>
+        <p:nvSpPr>
+          <p:cNvPr id="16" name="Shape 14"/>
+          <p:cNvSpPr/>
+          <p:nvPr/>
+        </p:nvSpPr>
+        <p:spPr>
+          <a:xfrm>
+            <a:off x="6309360" y="3840480"/>
+            <a:ext cx="5303520" cy="1965960"/>
+          </a:xfrm>
+          <a:prstGeom prst="roundRect">
+            <a:avLst>
+              <a:gd name="adj" fmla="val 3721"/>
+            </a:avLst>
+          </a:prstGeom>
+          <a:solidFill>
+            <a:srgbClr val="1E232C"/>
+          </a:solidFill>
+          <a:ln/>
+        </p:spPr>
+      </p:sp>
+      <p:sp>
+        <p:nvSpPr>
+          <p:cNvPr id="17" name="Text 15"/>
+          <p:cNvSpPr/>
+          <p:nvPr/>
+        </p:nvSpPr>
+        <p:spPr>
+          <a:xfrm>
+            <a:off x="6565392" y="4041648"/>
+            <a:ext cx="1188720" cy="502920"/>
+          </a:xfrm>
+          <a:prstGeom prst="roundRect">
+            <a:avLst>
+              <a:gd name="adj" fmla="val 14545"/>
+            </a:avLst>
+          </a:prstGeom>
+          <a:solidFill>
+            <a:srgbClr val="8CC63F"/>
+          </a:solidFill>
+          <a:ln/>
+        </p:spPr>
+        <p:txBody>
+          <a:bodyPr wrap="square" rtlCol="0" anchor="ctr"/>
+          <a:lstStyle/>
+          <a:p>
+            <a:pPr algn="ctr" indent="0" marL="0">
+              <a:buNone/>
+            </a:pPr>
+            <a:r>
+              <a:rPr lang="en-US" sz="1700" b="1" dirty="0">
+                <a:solidFill>
+                  <a:srgbClr val="13161C"/>
+                </a:solidFill>
+                <a:latin typeface="Courier New" pitchFamily="34" charset="0"/>
+                <a:ea typeface="Courier New" pitchFamily="34" charset="-122"/>
+                <a:cs typeface="Courier New" pitchFamily="34" charset="-120"/>
+              </a:rPr>
+              <a:t>Ex 4</a:t>
+            </a:r>
+            <a:endParaRPr lang="en-US" sz="1700" dirty="0"/>
+          </a:p>
+        </p:txBody>
+      </p:sp>
+      <p:sp>
+        <p:nvSpPr>
+          <p:cNvPr id="18" name="Text 16"/>
+          <p:cNvSpPr/>
+          <p:nvPr/>
+        </p:nvSpPr>
+        <p:spPr>
+          <a:xfrm>
+            <a:off x="7909560" y="4059936"/>
+            <a:ext cx="3474720" cy="822960"/>
+          </a:xfrm>
+          <a:prstGeom prst="rect">
+            <a:avLst/>
+          </a:prstGeom>
+          <a:noFill/>
+          <a:ln/>
+        </p:spPr>
+        <p:txBody>
+          <a:bodyPr wrap="square" lIns="0" tIns="0" rIns="0" bIns="0" rtlCol="0" anchor="t"/>
+          <a:lstStyle/>
+          <a:p>
+            <a:pPr indent="0" marL="0">
+              <a:buNone/>
+            </a:pPr>
+            <a:r>
+              <a:rPr lang="en-US" sz="1700" b="1" dirty="0">
+                <a:solidFill>
+                  <a:srgbClr val="E8EDF2"/>
+                </a:solidFill>
+                <a:latin typeface="Malgun Gothic" pitchFamily="34" charset="0"/>
+                <a:ea typeface="Malgun Gothic" pitchFamily="34" charset="-122"/>
+                <a:cs typeface="Malgun Gothic" pitchFamily="34" charset="-120"/>
+              </a:rPr>
+              <a:t>메모리 병합 깨뜨리기</a:t>
+            </a:r>
+            <a:endParaRPr lang="en-US" sz="1700" dirty="0"/>
+          </a:p>
+        </p:txBody>
+      </p:sp>
+      <p:sp>
+        <p:nvSpPr>
+          <p:cNvPr id="19" name="Text 17"/>
+          <p:cNvSpPr/>
+          <p:nvPr/>
+        </p:nvSpPr>
+        <p:spPr>
+          <a:xfrm>
+            <a:off x="6565392" y="4937760"/>
+            <a:ext cx="4791456" cy="731520"/>
+          </a:xfrm>
+          <a:prstGeom prst="rect">
+            <a:avLst/>
+          </a:prstGeom>
+          <a:noFill/>
+          <a:ln/>
+        </p:spPr>
+        <p:txBody>
+          <a:bodyPr wrap="square" lIns="0" tIns="0" rIns="0" bIns="0" rtlCol="0" anchor="t"/>
+          <a:lstStyle/>
+          <a:p>
+            <a:pPr indent="0" marL="0">
+              <a:lnSpc>
+                <a:spcPct val="110000"/>
+              </a:lnSpc>
+              <a:buNone/>
+            </a:pPr>
+            <a:r>
+              <a:rPr lang="en-US" sz="1400" dirty="0">
+                <a:solidFill>
+                  <a:srgbClr val="9AA6B2"/>
+                </a:solidFill>
+                <a:latin typeface="Malgun Gothic" pitchFamily="34" charset="0"/>
+                <a:ea typeface="Malgun Gothic" pitchFamily="34" charset="-122"/>
+                <a:cs typeface="Malgun Gothic" pitchFamily="34" charset="-120"/>
+              </a:rPr>
+              <a:t>인덱스를 비병합으로 바꿔 대역폭 급락 관찰</a:t>
+            </a:r>
+            <a:endParaRPr lang="en-US" sz="1400" dirty="0"/>
+          </a:p>
+        </p:txBody>
+      </p:sp>
+      <p:sp>
+        <p:nvSpPr>
+          <p:cNvPr id="20" name="Text 18"/>
+          <p:cNvSpPr/>
+          <p:nvPr/>
+        </p:nvSpPr>
+        <p:spPr>
+          <a:xfrm>
+            <a:off x="548640" y="5943600"/>
+            <a:ext cx="11064240" cy="365760"/>
           </a:xfrm>
           <a:prstGeom prst="rect">
             <a:avLst/>
@@ -2354,124 +2841,21 @@
           <a:bodyPr wrap="square" lIns="0" tIns="0" rIns="0" bIns="0" rtlCol="0" anchor="ctr"/>
           <a:lstStyle/>
           <a:p>
-            <a:pPr indent="0" marL="0">
-              <a:buNone/>
-            </a:pPr>
-            <a:r>
-              <a:rPr lang="en-US" sz="2000" b="1" dirty="0">
-                <a:solidFill>
-                  <a:srgbClr val="E0A458"/>
-                </a:solidFill>
-                <a:latin typeface="Malgun Gothic" pitchFamily="34" charset="0"/>
-                <a:ea typeface="Malgun Gothic" pitchFamily="34" charset="-122"/>
-                <a:cs typeface="Malgun Gothic" pitchFamily="34" charset="-120"/>
-              </a:rPr>
-              <a:t>입문자 함정</a:t>
-            </a:r>
-            <a:endParaRPr lang="en-US" sz="2000" dirty="0"/>
-          </a:p>
-        </p:txBody>
-      </p:sp>
-      <p:sp>
-        <p:nvSpPr>
-          <p:cNvPr id="9" name="Text 7"/>
-          <p:cNvSpPr/>
-          <p:nvPr/>
-        </p:nvSpPr>
-        <p:spPr>
-          <a:xfrm>
-            <a:off x="6537960" y="2423160"/>
-            <a:ext cx="4800600" cy="3108960"/>
-          </a:xfrm>
-          <a:prstGeom prst="rect">
-            <a:avLst/>
-          </a:prstGeom>
-          <a:noFill/>
-          <a:ln/>
-        </p:spPr>
-        <p:txBody>
-          <a:bodyPr wrap="square" lIns="0" tIns="0" rIns="0" bIns="0" rtlCol="0" anchor="t"/>
-          <a:lstStyle/>
-          <a:p>
-            <a:pPr marL="342900" indent="-342900">
-              <a:spcAft>
-                <a:spcPts val="1200"/>
-              </a:spcAft>
-              <a:buSzPct val="100000"/>
-              <a:buChar char="✗"/>
-            </a:pPr>
-            <a:r>
-              <a:rPr lang="en-US" sz="1550" dirty="0">
-                <a:solidFill>
-                  <a:srgbClr val="E8EDF2"/>
-                </a:solidFill>
-                <a:latin typeface="Malgun Gothic" pitchFamily="34" charset="0"/>
-                <a:ea typeface="Malgun Gothic" pitchFamily="34" charset="-122"/>
-                <a:cs typeface="Malgun Gothic" pitchFamily="34" charset="-120"/>
-              </a:rPr>
-              <a:t>스레드만 늘리면 무한히 빨라진다고 착각 → 포화점 존재</a:t>
-            </a:r>
-            <a:endParaRPr lang="en-US" sz="1550" dirty="0"/>
-          </a:p>
-          <a:p>
-            <a:pPr marL="342900" indent="-342900">
-              <a:spcAft>
-                <a:spcPts val="1200"/>
-              </a:spcAft>
-              <a:buSzPct val="100000"/>
-              <a:buChar char="✗"/>
-            </a:pPr>
-            <a:r>
-              <a:rPr lang="en-US" sz="1550" dirty="0">
-                <a:solidFill>
-                  <a:srgbClr val="E8EDF2"/>
-                </a:solidFill>
-                <a:latin typeface="Malgun Gothic" pitchFamily="34" charset="0"/>
-                <a:ea typeface="Malgun Gothic" pitchFamily="34" charset="-122"/>
-                <a:cs typeface="Malgun Gothic" pitchFamily="34" charset="-120"/>
-              </a:rPr>
-              <a:t>CPU 타이머로 커널 시간 측정 → 비동기라 부정확</a:t>
-            </a:r>
-            <a:endParaRPr lang="en-US" sz="1550" dirty="0"/>
-          </a:p>
-          <a:p>
-            <a:pPr marL="342900" indent="-342900">
-              <a:spcAft>
-                <a:spcPts val="1200"/>
-              </a:spcAft>
-              <a:buSzPct val="100000"/>
-              <a:buChar char="✗"/>
-            </a:pPr>
-            <a:r>
-              <a:rPr lang="en-US" sz="1550" dirty="0">
-                <a:solidFill>
-                  <a:srgbClr val="E8EDF2"/>
-                </a:solidFill>
-                <a:latin typeface="Malgun Gothic" pitchFamily="34" charset="0"/>
-                <a:ea typeface="Malgun Gothic" pitchFamily="34" charset="-122"/>
-                <a:cs typeface="Malgun Gothic" pitchFamily="34" charset="-120"/>
-              </a:rPr>
-              <a:t>접근 패턴을 흩뜨림 → 병합 깨져 대역폭 급락</a:t>
-            </a:r>
-            <a:endParaRPr lang="en-US" sz="1550" dirty="0"/>
-          </a:p>
-          <a:p>
-            <a:pPr marL="342900" indent="-342900">
-              <a:buSzPct val="100000"/>
-              <a:buChar char="✗"/>
-            </a:pPr>
-            <a:r>
-              <a:rPr lang="en-US" sz="1550" dirty="0">
-                <a:solidFill>
-                  <a:srgbClr val="E8EDF2"/>
-                </a:solidFill>
-                <a:latin typeface="Malgun Gothic" pitchFamily="34" charset="0"/>
-                <a:ea typeface="Malgun Gothic" pitchFamily="34" charset="-122"/>
-                <a:cs typeface="Malgun Gothic" pitchFamily="34" charset="-120"/>
-              </a:rPr>
-              <a:t>--verbose 안 줘서 대역폭 로그가 안 보임</a:t>
-            </a:r>
-            <a:endParaRPr lang="en-US" sz="1550" dirty="0"/>
+            <a:pPr algn="ctr" indent="0" marL="0">
+              <a:buNone/>
+            </a:pPr>
+            <a:r>
+              <a:rPr lang="en-US" sz="1300" i="1" dirty="0">
+                <a:solidFill>
+                  <a:srgbClr val="9AA6B2"/>
+                </a:solidFill>
+                <a:latin typeface="Malgun Gothic" pitchFamily="34" charset="0"/>
+                <a:ea typeface="Malgun Gothic" pitchFamily="34" charset="-122"/>
+                <a:cs typeface="Malgun Gothic" pitchFamily="34" charset="-120"/>
+              </a:rPr>
+              <a:t>측정이 핵심입니다 — 대역폭 로그는 --verbose 없이는 출력되지 않습니다.</a:t>
+            </a:r>
+            <a:endParaRPr lang="en-US" sz="1300" dirty="0"/>
           </a:p>
         </p:txBody>
       </p:sp>
@@ -2515,6 +2899,448 @@
         </p:nvSpPr>
         <p:spPr>
           <a:xfrm>
+            <a:off x="548640" y="411480"/>
+            <a:ext cx="640080" cy="640080"/>
+          </a:xfrm>
+          <a:prstGeom prst="roundRect">
+            <a:avLst>
+              <a:gd name="adj" fmla="val 12857"/>
+            </a:avLst>
+          </a:prstGeom>
+          <a:solidFill>
+            <a:srgbClr val="8CC63F"/>
+          </a:solidFill>
+          <a:ln/>
+        </p:spPr>
+        <p:txBody>
+          <a:bodyPr wrap="square" rtlCol="0" anchor="ctr"/>
+          <a:lstStyle/>
+          <a:p>
+            <a:pPr algn="ctr" indent="0" marL="0">
+              <a:buNone/>
+            </a:pPr>
+            <a:r>
+              <a:rPr lang="en-US" sz="2200" b="1" dirty="0">
+                <a:solidFill>
+                  <a:srgbClr val="13161C"/>
+                </a:solidFill>
+                <a:latin typeface="Courier New" pitchFamily="34" charset="0"/>
+                <a:ea typeface="Courier New" pitchFamily="34" charset="-122"/>
+                <a:cs typeface="Courier New" pitchFamily="34" charset="-120"/>
+              </a:rPr>
+              <a:t>9</a:t>
+            </a:r>
+            <a:endParaRPr lang="en-US" sz="2200" dirty="0"/>
+          </a:p>
+        </p:txBody>
+      </p:sp>
+      <p:sp>
+        <p:nvSpPr>
+          <p:cNvPr id="3" name="Text 1"/>
+          <p:cNvSpPr/>
+          <p:nvPr/>
+        </p:nvSpPr>
+        <p:spPr>
+          <a:xfrm>
+            <a:off x="1325880" y="384048"/>
+            <a:ext cx="10287000" cy="694944"/>
+          </a:xfrm>
+          <a:prstGeom prst="rect">
+            <a:avLst/>
+          </a:prstGeom>
+          <a:noFill/>
+          <a:ln/>
+        </p:spPr>
+        <p:txBody>
+          <a:bodyPr wrap="square" lIns="0" tIns="0" rIns="0" bIns="0" rtlCol="0" anchor="ctr"/>
+          <a:lstStyle/>
+          <a:p>
+            <a:pPr algn="l" indent="0" marL="0">
+              <a:buNone/>
+            </a:pPr>
+            <a:r>
+              <a:rPr lang="en-US" sz="3000" b="1" dirty="0">
+                <a:solidFill>
+                  <a:srgbClr val="E8EDF2"/>
+                </a:solidFill>
+                <a:latin typeface="Malgun Gothic" pitchFamily="34" charset="0"/>
+                <a:ea typeface="Malgun Gothic" pitchFamily="34" charset="-122"/>
+                <a:cs typeface="Malgun Gothic" pitchFamily="34" charset="-120"/>
+              </a:rPr>
+              <a:t>핵심 정리 &amp; 자주 하는 실수</a:t>
+            </a:r>
+            <a:endParaRPr lang="en-US" sz="3000" dirty="0"/>
+          </a:p>
+        </p:txBody>
+      </p:sp>
+      <p:sp>
+        <p:nvSpPr>
+          <p:cNvPr id="4" name="Shape 2"/>
+          <p:cNvSpPr/>
+          <p:nvPr/>
+        </p:nvSpPr>
+        <p:spPr>
+          <a:xfrm>
+            <a:off x="548640" y="1600200"/>
+            <a:ext cx="5349240" cy="4114800"/>
+          </a:xfrm>
+          <a:prstGeom prst="roundRect">
+            <a:avLst>
+              <a:gd name="adj" fmla="val 1778"/>
+            </a:avLst>
+          </a:prstGeom>
+          <a:solidFill>
+            <a:srgbClr val="1E232C"/>
+          </a:solidFill>
+          <a:ln/>
+        </p:spPr>
+      </p:sp>
+      <p:sp>
+        <p:nvSpPr>
+          <p:cNvPr id="5" name="Text 3"/>
+          <p:cNvSpPr/>
+          <p:nvPr/>
+        </p:nvSpPr>
+        <p:spPr>
+          <a:xfrm>
+            <a:off x="822960" y="1828800"/>
+            <a:ext cx="4800600" cy="457200"/>
+          </a:xfrm>
+          <a:prstGeom prst="rect">
+            <a:avLst/>
+          </a:prstGeom>
+          <a:noFill/>
+          <a:ln/>
+        </p:spPr>
+        <p:txBody>
+          <a:bodyPr wrap="square" lIns="0" tIns="0" rIns="0" bIns="0" rtlCol="0" anchor="ctr"/>
+          <a:lstStyle/>
+          <a:p>
+            <a:pPr indent="0" marL="0">
+              <a:buNone/>
+            </a:pPr>
+            <a:r>
+              <a:rPr lang="en-US" sz="2000" b="1" dirty="0">
+                <a:solidFill>
+                  <a:srgbClr val="8CC63F"/>
+                </a:solidFill>
+                <a:latin typeface="Malgun Gothic" pitchFamily="34" charset="0"/>
+                <a:ea typeface="Malgun Gothic" pitchFamily="34" charset="-122"/>
+                <a:cs typeface="Malgun Gothic" pitchFamily="34" charset="-120"/>
+              </a:rPr>
+              <a:t>기억할 것</a:t>
+            </a:r>
+            <a:endParaRPr lang="en-US" sz="2000" dirty="0"/>
+          </a:p>
+        </p:txBody>
+      </p:sp>
+      <p:sp>
+        <p:nvSpPr>
+          <p:cNvPr id="6" name="Text 4"/>
+          <p:cNvSpPr/>
+          <p:nvPr/>
+        </p:nvSpPr>
+        <p:spPr>
+          <a:xfrm>
+            <a:off x="822960" y="2423160"/>
+            <a:ext cx="4800600" cy="3108960"/>
+          </a:xfrm>
+          <a:prstGeom prst="rect">
+            <a:avLst/>
+          </a:prstGeom>
+          <a:noFill/>
+          <a:ln/>
+        </p:spPr>
+        <p:txBody>
+          <a:bodyPr wrap="square" lIns="0" tIns="0" rIns="0" bIns="0" rtlCol="0" anchor="t"/>
+          <a:lstStyle/>
+          <a:p>
+            <a:pPr marL="342900" indent="-342900">
+              <a:spcAft>
+                <a:spcPts val="1200"/>
+              </a:spcAft>
+              <a:buSzPct val="100000"/>
+              <a:buChar char="✓"/>
+            </a:pPr>
+            <a:r>
+              <a:rPr lang="en-US" sz="1550" dirty="0">
+                <a:solidFill>
+                  <a:srgbClr val="E8EDF2"/>
+                </a:solidFill>
+                <a:latin typeface="Malgun Gothic" pitchFamily="34" charset="0"/>
+                <a:ea typeface="Malgun Gothic" pitchFamily="34" charset="-122"/>
+                <a:cs typeface="Malgun Gothic" pitchFamily="34" charset="-120"/>
+              </a:rPr>
+              <a:t>총 스레드 = 블록수 × 블록당 스레드</a:t>
+            </a:r>
+            <a:endParaRPr lang="en-US" sz="1550" dirty="0"/>
+          </a:p>
+          <a:p>
+            <a:pPr marL="342900" indent="-342900">
+              <a:spcAft>
+                <a:spcPts val="1200"/>
+              </a:spcAft>
+              <a:buSzPct val="100000"/>
+              <a:buChar char="✓"/>
+            </a:pPr>
+            <a:r>
+              <a:rPr lang="en-US" sz="1550" dirty="0">
+                <a:solidFill>
+                  <a:srgbClr val="E8EDF2"/>
+                </a:solidFill>
+                <a:latin typeface="Malgun Gothic" pitchFamily="34" charset="0"/>
+                <a:ea typeface="Malgun Gothic" pitchFamily="34" charset="-122"/>
+                <a:cs typeface="Malgun Gothic" pitchFamily="34" charset="-120"/>
+              </a:rPr>
+              <a:t>index = i*blockDim.x + threadIdx.x → 병합</a:t>
+            </a:r>
+            <a:endParaRPr lang="en-US" sz="1550" dirty="0"/>
+          </a:p>
+          <a:p>
+            <a:pPr marL="342900" indent="-342900">
+              <a:spcAft>
+                <a:spcPts val="1200"/>
+              </a:spcAft>
+              <a:buSzPct val="100000"/>
+              <a:buChar char="✓"/>
+            </a:pPr>
+            <a:r>
+              <a:rPr lang="en-US" sz="1550" dirty="0">
+                <a:solidFill>
+                  <a:srgbClr val="E8EDF2"/>
+                </a:solidFill>
+                <a:latin typeface="Malgun Gothic" pitchFamily="34" charset="0"/>
+                <a:ea typeface="Malgun Gothic" pitchFamily="34" charset="-122"/>
+                <a:cs typeface="Malgun Gothic" pitchFamily="34" charset="-120"/>
+              </a:rPr>
+              <a:t>커널은 비동기 → 이벤트로 시간 측정</a:t>
+            </a:r>
+            <a:endParaRPr lang="en-US" sz="1550" dirty="0"/>
+          </a:p>
+          <a:p>
+            <a:pPr marL="342900" indent="-342900">
+              <a:buSzPct val="100000"/>
+              <a:buChar char="✓"/>
+            </a:pPr>
+            <a:r>
+              <a:rPr lang="en-US" sz="1550" dirty="0">
+                <a:solidFill>
+                  <a:srgbClr val="E8EDF2"/>
+                </a:solidFill>
+                <a:latin typeface="Malgun Gothic" pitchFamily="34" charset="0"/>
+                <a:ea typeface="Malgun Gothic" pitchFamily="34" charset="-122"/>
+                <a:cs typeface="Malgun Gothic" pitchFamily="34" charset="-120"/>
+              </a:rPr>
+              <a:t>대역폭 = 전송량 ÷ 시간 (GB/s)</a:t>
+            </a:r>
+            <a:endParaRPr lang="en-US" sz="1550" dirty="0"/>
+          </a:p>
+        </p:txBody>
+      </p:sp>
+      <p:sp>
+        <p:nvSpPr>
+          <p:cNvPr id="7" name="Shape 5"/>
+          <p:cNvSpPr/>
+          <p:nvPr/>
+        </p:nvSpPr>
+        <p:spPr>
+          <a:xfrm>
+            <a:off x="6263640" y="1600200"/>
+            <a:ext cx="5349240" cy="4114800"/>
+          </a:xfrm>
+          <a:prstGeom prst="roundRect">
+            <a:avLst>
+              <a:gd name="adj" fmla="val 1778"/>
+            </a:avLst>
+          </a:prstGeom>
+          <a:solidFill>
+            <a:srgbClr val="1E232C"/>
+          </a:solidFill>
+          <a:ln/>
+        </p:spPr>
+      </p:sp>
+      <p:sp>
+        <p:nvSpPr>
+          <p:cNvPr id="8" name="Text 6"/>
+          <p:cNvSpPr/>
+          <p:nvPr/>
+        </p:nvSpPr>
+        <p:spPr>
+          <a:xfrm>
+            <a:off x="6537960" y="1828800"/>
+            <a:ext cx="4800600" cy="457200"/>
+          </a:xfrm>
+          <a:prstGeom prst="rect">
+            <a:avLst/>
+          </a:prstGeom>
+          <a:noFill/>
+          <a:ln/>
+        </p:spPr>
+        <p:txBody>
+          <a:bodyPr wrap="square" lIns="0" tIns="0" rIns="0" bIns="0" rtlCol="0" anchor="ctr"/>
+          <a:lstStyle/>
+          <a:p>
+            <a:pPr indent="0" marL="0">
+              <a:buNone/>
+            </a:pPr>
+            <a:r>
+              <a:rPr lang="en-US" sz="2000" b="1" dirty="0">
+                <a:solidFill>
+                  <a:srgbClr val="E0A458"/>
+                </a:solidFill>
+                <a:latin typeface="Malgun Gothic" pitchFamily="34" charset="0"/>
+                <a:ea typeface="Malgun Gothic" pitchFamily="34" charset="-122"/>
+                <a:cs typeface="Malgun Gothic" pitchFamily="34" charset="-120"/>
+              </a:rPr>
+              <a:t>입문자 함정</a:t>
+            </a:r>
+            <a:endParaRPr lang="en-US" sz="2000" dirty="0"/>
+          </a:p>
+        </p:txBody>
+      </p:sp>
+      <p:sp>
+        <p:nvSpPr>
+          <p:cNvPr id="9" name="Text 7"/>
+          <p:cNvSpPr/>
+          <p:nvPr/>
+        </p:nvSpPr>
+        <p:spPr>
+          <a:xfrm>
+            <a:off x="6537960" y="2423160"/>
+            <a:ext cx="4800600" cy="3108960"/>
+          </a:xfrm>
+          <a:prstGeom prst="rect">
+            <a:avLst/>
+          </a:prstGeom>
+          <a:noFill/>
+          <a:ln/>
+        </p:spPr>
+        <p:txBody>
+          <a:bodyPr wrap="square" lIns="0" tIns="0" rIns="0" bIns="0" rtlCol="0" anchor="t"/>
+          <a:lstStyle/>
+          <a:p>
+            <a:pPr marL="342900" indent="-342900">
+              <a:spcAft>
+                <a:spcPts val="1200"/>
+              </a:spcAft>
+              <a:buSzPct val="100000"/>
+              <a:buChar char="✗"/>
+            </a:pPr>
+            <a:r>
+              <a:rPr lang="en-US" sz="1550" dirty="0">
+                <a:solidFill>
+                  <a:srgbClr val="E8EDF2"/>
+                </a:solidFill>
+                <a:latin typeface="Malgun Gothic" pitchFamily="34" charset="0"/>
+                <a:ea typeface="Malgun Gothic" pitchFamily="34" charset="-122"/>
+                <a:cs typeface="Malgun Gothic" pitchFamily="34" charset="-120"/>
+              </a:rPr>
+              <a:t>스레드만 늘리면 무한히 빨라진다고 착각 → 포화점 존재</a:t>
+            </a:r>
+            <a:endParaRPr lang="en-US" sz="1550" dirty="0"/>
+          </a:p>
+          <a:p>
+            <a:pPr marL="342900" indent="-342900">
+              <a:spcAft>
+                <a:spcPts val="1200"/>
+              </a:spcAft>
+              <a:buSzPct val="100000"/>
+              <a:buChar char="✗"/>
+            </a:pPr>
+            <a:r>
+              <a:rPr lang="en-US" sz="1550" dirty="0">
+                <a:solidFill>
+                  <a:srgbClr val="E8EDF2"/>
+                </a:solidFill>
+                <a:latin typeface="Malgun Gothic" pitchFamily="34" charset="0"/>
+                <a:ea typeface="Malgun Gothic" pitchFamily="34" charset="-122"/>
+                <a:cs typeface="Malgun Gothic" pitchFamily="34" charset="-120"/>
+              </a:rPr>
+              <a:t>CPU 타이머로 커널 시간 측정 → 비동기라 부정확</a:t>
+            </a:r>
+            <a:endParaRPr lang="en-US" sz="1550" dirty="0"/>
+          </a:p>
+          <a:p>
+            <a:pPr marL="342900" indent="-342900">
+              <a:spcAft>
+                <a:spcPts val="1200"/>
+              </a:spcAft>
+              <a:buSzPct val="100000"/>
+              <a:buChar char="✗"/>
+            </a:pPr>
+            <a:r>
+              <a:rPr lang="en-US" sz="1550" dirty="0">
+                <a:solidFill>
+                  <a:srgbClr val="E8EDF2"/>
+                </a:solidFill>
+                <a:latin typeface="Malgun Gothic" pitchFamily="34" charset="0"/>
+                <a:ea typeface="Malgun Gothic" pitchFamily="34" charset="-122"/>
+                <a:cs typeface="Malgun Gothic" pitchFamily="34" charset="-120"/>
+              </a:rPr>
+              <a:t>접근 패턴을 흩뜨림 → 병합 깨져 대역폭 급락</a:t>
+            </a:r>
+            <a:endParaRPr lang="en-US" sz="1550" dirty="0"/>
+          </a:p>
+          <a:p>
+            <a:pPr marL="342900" indent="-342900">
+              <a:buSzPct val="100000"/>
+              <a:buChar char="✗"/>
+            </a:pPr>
+            <a:r>
+              <a:rPr lang="en-US" sz="1550" dirty="0">
+                <a:solidFill>
+                  <a:srgbClr val="E8EDF2"/>
+                </a:solidFill>
+                <a:latin typeface="Malgun Gothic" pitchFamily="34" charset="0"/>
+                <a:ea typeface="Malgun Gothic" pitchFamily="34" charset="-122"/>
+                <a:cs typeface="Malgun Gothic" pitchFamily="34" charset="-120"/>
+              </a:rPr>
+              <a:t>--verbose 안 줘서 대역폭 로그가 안 보임</a:t>
+            </a:r>
+            <a:endParaRPr lang="en-US" sz="1550" dirty="0"/>
+          </a:p>
+        </p:txBody>
+      </p:sp>
+    </p:spTree>
+  </p:cSld>
+  <p:clrMapOvr>
+    <a:masterClrMapping/>
+  </p:clrMapOvr>
+</p:sld>
+</file>
+
+<file path=ppt/slides/slide12.xml><?xml version="1.0" encoding="utf-8"?>
+<p:sld xmlns:a="http://schemas.openxmlformats.org/drawingml/2006/main" xmlns:r="http://schemas.openxmlformats.org/officeDocument/2006/relationships" xmlns:p="http://schemas.openxmlformats.org/presentationml/2006/main">
+  <p:cSld name="Slide 12">
+    <p:bg>
+      <p:bgPr>
+        <a:solidFill>
+          <a:srgbClr val="13161C"/>
+        </a:solidFill>
+      </p:bgPr>
+    </p:bg>
+    <p:spTree>
+      <p:nvGrpSpPr>
+        <p:cNvPr id="1" name=""/>
+        <p:cNvGrpSpPr/>
+        <p:nvPr/>
+      </p:nvGrpSpPr>
+      <p:grpSpPr>
+        <a:xfrm>
+          <a:off x="0" y="0"/>
+          <a:ext cx="0" cy="0"/>
+          <a:chOff x="0" y="0"/>
+          <a:chExt cx="0" cy="0"/>
+        </a:xfrm>
+      </p:grpSpPr>
+      <p:sp>
+        <p:nvSpPr>
+          <p:cNvPr id="2" name="Text 0"/>
+          <p:cNvSpPr/>
+          <p:nvPr/>
+        </p:nvSpPr>
+        <p:spPr>
+          <a:xfrm>
             <a:off x="548640" y="1463040"/>
             <a:ext cx="9144000" cy="457200"/>
           </a:xfrm>
@@ -4158,7 +4984,7 @@
                 <a:ea typeface="Courier New" pitchFamily="34" charset="-122"/>
                 <a:cs typeface="Courier New" pitchFamily="34" charset="-120"/>
               </a:rPr>
-              <a:t>3</a:t>
+              <a:t>2</a:t>
             </a:r>
             <a:endParaRPr lang="en-US" sz="2200" dirty="0"/>
           </a:p>
@@ -4197,7 +5023,7 @@
                 <a:ea typeface="Malgun Gothic" pitchFamily="34" charset="-122"/>
                 <a:cs typeface="Malgun Gothic" pitchFamily="34" charset="-120"/>
               </a:rPr>
-              <a:t>스레드가 자기 몫을 계산하는 법</a:t>
+              <a:t>실행 하드웨어 · SM과 워프(warp)</a:t>
             </a:r>
             <a:endParaRPr lang="en-US" sz="3000" dirty="0"/>
           </a:p>
@@ -4205,18 +5031,251 @@
       </p:sp>
       <p:sp>
         <p:nvSpPr>
-          <p:cNvPr id="4" name="Shape 2"/>
-          <p:cNvSpPr/>
-          <p:nvPr/>
-        </p:nvSpPr>
-        <p:spPr>
-          <a:xfrm>
-            <a:off x="548640" y="1554480"/>
-            <a:ext cx="11064240" cy="3017520"/>
+          <p:cNvPr id="4" name="Text 2"/>
+          <p:cNvSpPr/>
+          <p:nvPr/>
+        </p:nvSpPr>
+        <p:spPr>
+          <a:xfrm>
+            <a:off x="548640" y="1371600"/>
+            <a:ext cx="11064240" cy="411480"/>
+          </a:xfrm>
+          <a:prstGeom prst="rect">
+            <a:avLst/>
+          </a:prstGeom>
+          <a:noFill/>
+          <a:ln/>
+        </p:spPr>
+        <p:txBody>
+          <a:bodyPr wrap="square" lIns="0" tIns="0" rIns="0" bIns="0" rtlCol="0" anchor="ctr"/>
+          <a:lstStyle/>
+          <a:p>
+            <a:pPr indent="0" marL="0">
+              <a:buNone/>
+            </a:pPr>
+            <a:r>
+              <a:rPr lang="en-US" sz="1500" dirty="0">
+                <a:solidFill>
+                  <a:srgbClr val="9AA6B2"/>
+                </a:solidFill>
+                <a:latin typeface="Malgun Gothic" pitchFamily="34" charset="0"/>
+                <a:ea typeface="Malgun Gothic" pitchFamily="34" charset="-122"/>
+                <a:cs typeface="Malgun Gothic" pitchFamily="34" charset="-120"/>
+              </a:rPr>
+              <a:t>블록은 SM(스트리밍 멀티프로세서)에 배정되고, 스레드는 32개씩 워프(warp)로 묶여 함께 실행됩니다.</a:t>
+            </a:r>
+            <a:endParaRPr lang="en-US" sz="1500" dirty="0"/>
+          </a:p>
+        </p:txBody>
+      </p:sp>
+      <p:sp>
+        <p:nvSpPr>
+          <p:cNvPr id="5" name="Shape 3"/>
+          <p:cNvSpPr/>
+          <p:nvPr/>
+        </p:nvSpPr>
+        <p:spPr>
+          <a:xfrm>
+            <a:off x="548640" y="1828800"/>
+            <a:ext cx="6126480" cy="3931920"/>
           </a:xfrm>
           <a:prstGeom prst="roundRect">
             <a:avLst>
-              <a:gd name="adj" fmla="val 1818"/>
+              <a:gd name="adj" fmla="val 1628"/>
+            </a:avLst>
+          </a:prstGeom>
+          <a:solidFill>
+            <a:srgbClr val="1E232C"/>
+          </a:solidFill>
+          <a:ln w="19050">
+            <a:solidFill>
+              <a:srgbClr val="8CC63F"/>
+            </a:solidFill>
+            <a:prstDash val="solid"/>
+          </a:ln>
+        </p:spPr>
+      </p:sp>
+      <p:sp>
+        <p:nvSpPr>
+          <p:cNvPr id="6" name="Text 4"/>
+          <p:cNvSpPr/>
+          <p:nvPr/>
+        </p:nvSpPr>
+        <p:spPr>
+          <a:xfrm>
+            <a:off x="777240" y="1956816"/>
+            <a:ext cx="5669280" cy="365760"/>
+          </a:xfrm>
+          <a:prstGeom prst="rect">
+            <a:avLst/>
+          </a:prstGeom>
+          <a:noFill/>
+          <a:ln/>
+        </p:spPr>
+        <p:txBody>
+          <a:bodyPr wrap="square" lIns="0" tIns="0" rIns="0" bIns="0" rtlCol="0" anchor="ctr"/>
+          <a:lstStyle/>
+          <a:p>
+            <a:pPr indent="0" marL="0">
+              <a:buNone/>
+            </a:pPr>
+            <a:r>
+              <a:rPr lang="en-US" sz="1400" b="1" dirty="0">
+                <a:solidFill>
+                  <a:srgbClr val="8CC63F"/>
+                </a:solidFill>
+                <a:latin typeface="Malgun Gothic" pitchFamily="34" charset="0"/>
+                <a:ea typeface="Malgun Gothic" pitchFamily="34" charset="-122"/>
+                <a:cs typeface="Malgun Gothic" pitchFamily="34" charset="-120"/>
+              </a:rPr>
+              <a:t>GPU · SM 수십 개</a:t>
+            </a:r>
+            <a:endParaRPr lang="en-US" sz="1400" dirty="0"/>
+          </a:p>
+        </p:txBody>
+      </p:sp>
+      <p:sp>
+        <p:nvSpPr>
+          <p:cNvPr id="7" name="Shape 5"/>
+          <p:cNvSpPr/>
+          <p:nvPr/>
+        </p:nvSpPr>
+        <p:spPr>
+          <a:xfrm>
+            <a:off x="841248" y="2468880"/>
+            <a:ext cx="1691640" cy="1371600"/>
+          </a:xfrm>
+          <a:prstGeom prst="roundRect">
+            <a:avLst>
+              <a:gd name="adj" fmla="val 3333"/>
+            </a:avLst>
+          </a:prstGeom>
+          <a:solidFill>
+            <a:srgbClr val="0E1116"/>
+          </a:solidFill>
+          <a:ln w="25400">
+            <a:solidFill>
+              <a:srgbClr val="4FB0C6"/>
+            </a:solidFill>
+            <a:prstDash val="solid"/>
+          </a:ln>
+        </p:spPr>
+      </p:sp>
+      <p:sp>
+        <p:nvSpPr>
+          <p:cNvPr id="8" name="Text 6"/>
+          <p:cNvSpPr/>
+          <p:nvPr/>
+        </p:nvSpPr>
+        <p:spPr>
+          <a:xfrm>
+            <a:off x="841248" y="2596896"/>
+            <a:ext cx="1691640" cy="292608"/>
+          </a:xfrm>
+          <a:prstGeom prst="rect">
+            <a:avLst/>
+          </a:prstGeom>
+          <a:noFill/>
+          <a:ln/>
+        </p:spPr>
+        <p:txBody>
+          <a:bodyPr wrap="square" lIns="0" tIns="0" rIns="0" bIns="0" rtlCol="0" anchor="ctr"/>
+          <a:lstStyle/>
+          <a:p>
+            <a:pPr algn="ctr" indent="0" marL="0">
+              <a:buNone/>
+            </a:pPr>
+            <a:r>
+              <a:rPr lang="en-US" sz="1200" b="1" dirty="0">
+                <a:solidFill>
+                  <a:srgbClr val="4FB0C6"/>
+                </a:solidFill>
+                <a:latin typeface="Courier New" pitchFamily="34" charset="0"/>
+                <a:ea typeface="Courier New" pitchFamily="34" charset="-122"/>
+                <a:cs typeface="Courier New" pitchFamily="34" charset="-120"/>
+              </a:rPr>
+              <a:t>SM 0</a:t>
+            </a:r>
+            <a:endParaRPr lang="en-US" sz="1200" dirty="0"/>
+          </a:p>
+        </p:txBody>
+      </p:sp>
+      <p:sp>
+        <p:nvSpPr>
+          <p:cNvPr id="9" name="Text 7"/>
+          <p:cNvSpPr/>
+          <p:nvPr/>
+        </p:nvSpPr>
+        <p:spPr>
+          <a:xfrm>
+            <a:off x="841248" y="2926080"/>
+            <a:ext cx="1691640" cy="777240"/>
+          </a:xfrm>
+          <a:prstGeom prst="rect">
+            <a:avLst/>
+          </a:prstGeom>
+          <a:noFill/>
+          <a:ln/>
+        </p:spPr>
+        <p:txBody>
+          <a:bodyPr wrap="square" lIns="0" tIns="0" rIns="0" bIns="0" rtlCol="0" anchor="ctr"/>
+          <a:lstStyle/>
+          <a:p>
+            <a:pPr algn="ctr" indent="0" marL="0">
+              <a:lnSpc>
+                <a:spcPct val="105000"/>
+              </a:lnSpc>
+              <a:buNone/>
+            </a:pPr>
+            <a:r>
+              <a:rPr lang="en-US" sz="1000" dirty="0">
+                <a:solidFill>
+                  <a:srgbClr val="9AA6B2"/>
+                </a:solidFill>
+                <a:latin typeface="Malgun Gothic" pitchFamily="34" charset="0"/>
+                <a:ea typeface="Malgun Gothic" pitchFamily="34" charset="-122"/>
+                <a:cs typeface="Malgun Gothic" pitchFamily="34" charset="-120"/>
+              </a:rPr>
+              <a:t>워프 스케줄러</a:t>
+            </a:r>
+            <a:endParaRPr lang="en-US" sz="1000" dirty="0"/>
+          </a:p>
+          <a:p>
+            <a:pPr algn="ctr" indent="0" marL="0">
+              <a:lnSpc>
+                <a:spcPct val="105000"/>
+              </a:lnSpc>
+              <a:buNone/>
+            </a:pPr>
+            <a:r>
+              <a:rPr lang="en-US" sz="1000" dirty="0">
+                <a:solidFill>
+                  <a:srgbClr val="9AA6B2"/>
+                </a:solidFill>
+                <a:latin typeface="Malgun Gothic" pitchFamily="34" charset="0"/>
+                <a:ea typeface="Malgun Gothic" pitchFamily="34" charset="-122"/>
+                <a:cs typeface="Malgun Gothic" pitchFamily="34" charset="-120"/>
+              </a:rPr>
+              <a:t>+ 코어 다수</a:t>
+            </a:r>
+            <a:endParaRPr lang="en-US" sz="1000" dirty="0"/>
+          </a:p>
+        </p:txBody>
+      </p:sp>
+      <p:sp>
+        <p:nvSpPr>
+          <p:cNvPr id="10" name="Shape 8"/>
+          <p:cNvSpPr/>
+          <p:nvPr/>
+        </p:nvSpPr>
+        <p:spPr>
+          <a:xfrm>
+            <a:off x="2752344" y="2468880"/>
+            <a:ext cx="1691640" cy="1371600"/>
+          </a:xfrm>
+          <a:prstGeom prst="roundRect">
+            <a:avLst>
+              <a:gd name="adj" fmla="val 3333"/>
             </a:avLst>
           </a:prstGeom>
           <a:solidFill>
@@ -4232,53 +5291,158 @@
       </p:sp>
       <p:sp>
         <p:nvSpPr>
-          <p:cNvPr id="5" name="Text 3"/>
-          <p:cNvSpPr/>
-          <p:nvPr/>
-        </p:nvSpPr>
-        <p:spPr>
-          <a:xfrm>
-            <a:off x="749808" y="1700784"/>
-            <a:ext cx="10661904" cy="2724912"/>
-          </a:xfrm>
-          <a:prstGeom prst="rect">
-            <a:avLst/>
-          </a:prstGeom>
-          <a:noFill/>
-          <a:ln/>
-        </p:spPr>
-        <p:txBody>
-          <a:bodyPr wrap="square" lIns="0" tIns="0" rIns="0" bIns="0" rtlCol="0" anchor="t"/>
-          <a:lstStyle/>
-          <a:p>
-            <a:pPr algn="l" indent="0" marL="0">
-              <a:lnSpc>
-                <a:spcPct val="108000"/>
-              </a:lnSpc>
-              <a:buNone/>
-            </a:pPr>
-            <a:r>
-              <a:rPr lang="en-US" sz="1350" dirty="0">
-                <a:solidFill>
-                  <a:srgbClr val="9AA6B2"/>
+          <p:cNvPr id="11" name="Text 9"/>
+          <p:cNvSpPr/>
+          <p:nvPr/>
+        </p:nvSpPr>
+        <p:spPr>
+          <a:xfrm>
+            <a:off x="2752344" y="2596896"/>
+            <a:ext cx="1691640" cy="292608"/>
+          </a:xfrm>
+          <a:prstGeom prst="rect">
+            <a:avLst/>
+          </a:prstGeom>
+          <a:noFill/>
+          <a:ln/>
+        </p:spPr>
+        <p:txBody>
+          <a:bodyPr wrap="square" lIns="0" tIns="0" rIns="0" bIns="0" rtlCol="0" anchor="ctr"/>
+          <a:lstStyle/>
+          <a:p>
+            <a:pPr algn="ctr" indent="0" marL="0">
+              <a:buNone/>
+            </a:pPr>
+            <a:r>
+              <a:rPr lang="en-US" sz="1200" b="1" dirty="0">
+                <a:solidFill>
+                  <a:srgbClr val="E8EDF2"/>
                 </a:solidFill>
                 <a:latin typeface="Courier New" pitchFamily="34" charset="0"/>
                 <a:ea typeface="Courier New" pitchFamily="34" charset="-122"/>
                 <a:cs typeface="Courier New" pitchFamily="34" charset="-120"/>
               </a:rPr>
-              <a:t>// test10_kernel_write   tests.cpp:1424</a:t>
-            </a:r>
-            <a:endParaRPr lang="en-US" sz="1350" dirty="0"/>
-          </a:p>
-          <a:p>
-            <a:pPr algn="l" indent="0" marL="0">
+              <a:t>SM 1</a:t>
+            </a:r>
+            <a:endParaRPr lang="en-US" sz="1200" dirty="0"/>
+          </a:p>
+        </p:txBody>
+      </p:sp>
+      <p:sp>
+        <p:nvSpPr>
+          <p:cNvPr id="12" name="Text 10"/>
+          <p:cNvSpPr/>
+          <p:nvPr/>
+        </p:nvSpPr>
+        <p:spPr>
+          <a:xfrm>
+            <a:off x="2752344" y="2926080"/>
+            <a:ext cx="1691640" cy="777240"/>
+          </a:xfrm>
+          <a:prstGeom prst="rect">
+            <a:avLst/>
+          </a:prstGeom>
+          <a:noFill/>
+          <a:ln/>
+        </p:spPr>
+        <p:txBody>
+          <a:bodyPr wrap="square" lIns="0" tIns="0" rIns="0" bIns="0" rtlCol="0" anchor="ctr"/>
+          <a:lstStyle/>
+          <a:p>
+            <a:pPr algn="ctr" indent="0" marL="0">
               <a:lnSpc>
-                <a:spcPct val="108000"/>
+                <a:spcPct val="105000"/>
               </a:lnSpc>
               <a:buNone/>
             </a:pPr>
             <a:r>
-              <a:rPr lang="en-US" sz="1350" dirty="0">
+              <a:rPr lang="en-US" sz="1000" dirty="0">
+                <a:solidFill>
+                  <a:srgbClr val="9AA6B2"/>
+                </a:solidFill>
+                <a:latin typeface="Malgun Gothic" pitchFamily="34" charset="0"/>
+                <a:ea typeface="Malgun Gothic" pitchFamily="34" charset="-122"/>
+                <a:cs typeface="Malgun Gothic" pitchFamily="34" charset="-120"/>
+              </a:rPr>
+              <a:t>워프 스케줄러</a:t>
+            </a:r>
+            <a:endParaRPr lang="en-US" sz="1000" dirty="0"/>
+          </a:p>
+          <a:p>
+            <a:pPr algn="ctr" indent="0" marL="0">
+              <a:lnSpc>
+                <a:spcPct val="105000"/>
+              </a:lnSpc>
+              <a:buNone/>
+            </a:pPr>
+            <a:r>
+              <a:rPr lang="en-US" sz="1000" dirty="0">
+                <a:solidFill>
+                  <a:srgbClr val="9AA6B2"/>
+                </a:solidFill>
+                <a:latin typeface="Malgun Gothic" pitchFamily="34" charset="0"/>
+                <a:ea typeface="Malgun Gothic" pitchFamily="34" charset="-122"/>
+                <a:cs typeface="Malgun Gothic" pitchFamily="34" charset="-120"/>
+              </a:rPr>
+              <a:t>+ 코어 다수</a:t>
+            </a:r>
+            <a:endParaRPr lang="en-US" sz="1000" dirty="0"/>
+          </a:p>
+        </p:txBody>
+      </p:sp>
+      <p:sp>
+        <p:nvSpPr>
+          <p:cNvPr id="13" name="Shape 11"/>
+          <p:cNvSpPr/>
+          <p:nvPr/>
+        </p:nvSpPr>
+        <p:spPr>
+          <a:xfrm>
+            <a:off x="4663440" y="2468880"/>
+            <a:ext cx="1691640" cy="1371600"/>
+          </a:xfrm>
+          <a:prstGeom prst="roundRect">
+            <a:avLst>
+              <a:gd name="adj" fmla="val 3333"/>
+            </a:avLst>
+          </a:prstGeom>
+          <a:solidFill>
+            <a:srgbClr val="0E1116"/>
+          </a:solidFill>
+          <a:ln w="12700">
+            <a:solidFill>
+              <a:srgbClr val="2C3440"/>
+            </a:solidFill>
+            <a:prstDash val="solid"/>
+          </a:ln>
+        </p:spPr>
+      </p:sp>
+      <p:sp>
+        <p:nvSpPr>
+          <p:cNvPr id="14" name="Text 12"/>
+          <p:cNvSpPr/>
+          <p:nvPr/>
+        </p:nvSpPr>
+        <p:spPr>
+          <a:xfrm>
+            <a:off x="4663440" y="2596896"/>
+            <a:ext cx="1691640" cy="292608"/>
+          </a:xfrm>
+          <a:prstGeom prst="rect">
+            <a:avLst/>
+          </a:prstGeom>
+          <a:noFill/>
+          <a:ln/>
+        </p:spPr>
+        <p:txBody>
+          <a:bodyPr wrap="square" lIns="0" tIns="0" rIns="0" bIns="0" rtlCol="0" anchor="ctr"/>
+          <a:lstStyle/>
+          <a:p>
+            <a:pPr algn="ctr" indent="0" marL="0">
+              <a:buNone/>
+            </a:pPr>
+            <a:r>
+              <a:rPr lang="en-US" sz="1200" b="1" dirty="0">
                 <a:solidFill>
                   <a:srgbClr val="E8EDF2"/>
                 </a:solidFill>
@@ -4286,19 +5450,127 @@
                 <a:ea typeface="Courier New" pitchFamily="34" charset="-122"/>
                 <a:cs typeface="Courier New" pitchFamily="34" charset="-120"/>
               </a:rPr>
-              <a:t>int avenumber = memsize/(gridDim.x*gridDim.y); // 블록 하나가 맡을 바이트</a:t>
-            </a:r>
-            <a:endParaRPr lang="en-US" sz="1350" dirty="0"/>
-          </a:p>
-          <a:p>
-            <a:pPr algn="l" indent="0" marL="0">
+              <a:t>SM 2</a:t>
+            </a:r>
+            <a:endParaRPr lang="en-US" sz="1200" dirty="0"/>
+          </a:p>
+        </p:txBody>
+      </p:sp>
+      <p:sp>
+        <p:nvSpPr>
+          <p:cNvPr id="15" name="Text 13"/>
+          <p:cNvSpPr/>
+          <p:nvPr/>
+        </p:nvSpPr>
+        <p:spPr>
+          <a:xfrm>
+            <a:off x="4663440" y="2926080"/>
+            <a:ext cx="1691640" cy="777240"/>
+          </a:xfrm>
+          <a:prstGeom prst="rect">
+            <a:avLst/>
+          </a:prstGeom>
+          <a:noFill/>
+          <a:ln/>
+        </p:spPr>
+        <p:txBody>
+          <a:bodyPr wrap="square" lIns="0" tIns="0" rIns="0" bIns="0" rtlCol="0" anchor="ctr"/>
+          <a:lstStyle/>
+          <a:p>
+            <a:pPr algn="ctr" indent="0" marL="0">
               <a:lnSpc>
-                <a:spcPct val="108000"/>
+                <a:spcPct val="105000"/>
               </a:lnSpc>
               <a:buNone/>
             </a:pPr>
             <a:r>
-              <a:rPr lang="en-US" sz="1350" dirty="0">
+              <a:rPr lang="en-US" sz="1000" dirty="0">
+                <a:solidFill>
+                  <a:srgbClr val="9AA6B2"/>
+                </a:solidFill>
+                <a:latin typeface="Malgun Gothic" pitchFamily="34" charset="0"/>
+                <a:ea typeface="Malgun Gothic" pitchFamily="34" charset="-122"/>
+                <a:cs typeface="Malgun Gothic" pitchFamily="34" charset="-120"/>
+              </a:rPr>
+              <a:t>워프 스케줄러</a:t>
+            </a:r>
+            <a:endParaRPr lang="en-US" sz="1000" dirty="0"/>
+          </a:p>
+          <a:p>
+            <a:pPr algn="ctr" indent="0" marL="0">
+              <a:lnSpc>
+                <a:spcPct val="105000"/>
+              </a:lnSpc>
+              <a:buNone/>
+            </a:pPr>
+            <a:r>
+              <a:rPr lang="en-US" sz="1000" dirty="0">
+                <a:solidFill>
+                  <a:srgbClr val="9AA6B2"/>
+                </a:solidFill>
+                <a:latin typeface="Malgun Gothic" pitchFamily="34" charset="0"/>
+                <a:ea typeface="Malgun Gothic" pitchFamily="34" charset="-122"/>
+                <a:cs typeface="Malgun Gothic" pitchFamily="34" charset="-120"/>
+              </a:rPr>
+              <a:t>+ 코어 다수</a:t>
+            </a:r>
+            <a:endParaRPr lang="en-US" sz="1000" dirty="0"/>
+          </a:p>
+        </p:txBody>
+      </p:sp>
+      <p:sp>
+        <p:nvSpPr>
+          <p:cNvPr id="16" name="Shape 14"/>
+          <p:cNvSpPr/>
+          <p:nvPr/>
+        </p:nvSpPr>
+        <p:spPr>
+          <a:xfrm>
+            <a:off x="841248" y="4096512"/>
+            <a:ext cx="1691640" cy="1371600"/>
+          </a:xfrm>
+          <a:prstGeom prst="roundRect">
+            <a:avLst>
+              <a:gd name="adj" fmla="val 3333"/>
+            </a:avLst>
+          </a:prstGeom>
+          <a:solidFill>
+            <a:srgbClr val="0E1116"/>
+          </a:solidFill>
+          <a:ln w="12700">
+            <a:solidFill>
+              <a:srgbClr val="2C3440"/>
+            </a:solidFill>
+            <a:prstDash val="solid"/>
+          </a:ln>
+        </p:spPr>
+      </p:sp>
+      <p:sp>
+        <p:nvSpPr>
+          <p:cNvPr id="17" name="Text 15"/>
+          <p:cNvSpPr/>
+          <p:nvPr/>
+        </p:nvSpPr>
+        <p:spPr>
+          <a:xfrm>
+            <a:off x="841248" y="4224528"/>
+            <a:ext cx="1691640" cy="292608"/>
+          </a:xfrm>
+          <a:prstGeom prst="rect">
+            <a:avLst/>
+          </a:prstGeom>
+          <a:noFill/>
+          <a:ln/>
+        </p:spPr>
+        <p:txBody>
+          <a:bodyPr wrap="square" lIns="0" tIns="0" rIns="0" bIns="0" rtlCol="0" anchor="ctr"/>
+          <a:lstStyle/>
+          <a:p>
+            <a:pPr algn="ctr" indent="0" marL="0">
+              <a:buNone/>
+            </a:pPr>
+            <a:r>
+              <a:rPr lang="en-US" sz="1200" b="1" dirty="0">
                 <a:solidFill>
                   <a:srgbClr val="E8EDF2"/>
                 </a:solidFill>
@@ -4306,19 +5578,127 @@
                 <a:ea typeface="Courier New" pitchFamily="34" charset="-122"/>
                 <a:cs typeface="Courier New" pitchFamily="34" charset="-120"/>
               </a:rPr>
-              <a:t>TYPE* mybuf = (TYPE*)(ptr + blockIdx.x*avenumber); // 이 블록의 시작</a:t>
-            </a:r>
-            <a:endParaRPr lang="en-US" sz="1350" dirty="0"/>
-          </a:p>
-          <a:p>
-            <a:pPr algn="l" indent="0" marL="0">
+              <a:t>SM 3</a:t>
+            </a:r>
+            <a:endParaRPr lang="en-US" sz="1200" dirty="0"/>
+          </a:p>
+        </p:txBody>
+      </p:sp>
+      <p:sp>
+        <p:nvSpPr>
+          <p:cNvPr id="18" name="Text 16"/>
+          <p:cNvSpPr/>
+          <p:nvPr/>
+        </p:nvSpPr>
+        <p:spPr>
+          <a:xfrm>
+            <a:off x="841248" y="4553712"/>
+            <a:ext cx="1691640" cy="777240"/>
+          </a:xfrm>
+          <a:prstGeom prst="rect">
+            <a:avLst/>
+          </a:prstGeom>
+          <a:noFill/>
+          <a:ln/>
+        </p:spPr>
+        <p:txBody>
+          <a:bodyPr wrap="square" lIns="0" tIns="0" rIns="0" bIns="0" rtlCol="0" anchor="ctr"/>
+          <a:lstStyle/>
+          <a:p>
+            <a:pPr algn="ctr" indent="0" marL="0">
               <a:lnSpc>
-                <a:spcPct val="108000"/>
+                <a:spcPct val="105000"/>
               </a:lnSpc>
               <a:buNone/>
             </a:pPr>
             <a:r>
-              <a:rPr lang="en-US" sz="1350" dirty="0">
+              <a:rPr lang="en-US" sz="1000" dirty="0">
+                <a:solidFill>
+                  <a:srgbClr val="9AA6B2"/>
+                </a:solidFill>
+                <a:latin typeface="Malgun Gothic" pitchFamily="34" charset="0"/>
+                <a:ea typeface="Malgun Gothic" pitchFamily="34" charset="-122"/>
+                <a:cs typeface="Malgun Gothic" pitchFamily="34" charset="-120"/>
+              </a:rPr>
+              <a:t>워프 스케줄러</a:t>
+            </a:r>
+            <a:endParaRPr lang="en-US" sz="1000" dirty="0"/>
+          </a:p>
+          <a:p>
+            <a:pPr algn="ctr" indent="0" marL="0">
+              <a:lnSpc>
+                <a:spcPct val="105000"/>
+              </a:lnSpc>
+              <a:buNone/>
+            </a:pPr>
+            <a:r>
+              <a:rPr lang="en-US" sz="1000" dirty="0">
+                <a:solidFill>
+                  <a:srgbClr val="9AA6B2"/>
+                </a:solidFill>
+                <a:latin typeface="Malgun Gothic" pitchFamily="34" charset="0"/>
+                <a:ea typeface="Malgun Gothic" pitchFamily="34" charset="-122"/>
+                <a:cs typeface="Malgun Gothic" pitchFamily="34" charset="-120"/>
+              </a:rPr>
+              <a:t>+ 코어 다수</a:t>
+            </a:r>
+            <a:endParaRPr lang="en-US" sz="1000" dirty="0"/>
+          </a:p>
+        </p:txBody>
+      </p:sp>
+      <p:sp>
+        <p:nvSpPr>
+          <p:cNvPr id="19" name="Shape 17"/>
+          <p:cNvSpPr/>
+          <p:nvPr/>
+        </p:nvSpPr>
+        <p:spPr>
+          <a:xfrm>
+            <a:off x="2752344" y="4096512"/>
+            <a:ext cx="1691640" cy="1371600"/>
+          </a:xfrm>
+          <a:prstGeom prst="roundRect">
+            <a:avLst>
+              <a:gd name="adj" fmla="val 3333"/>
+            </a:avLst>
+          </a:prstGeom>
+          <a:solidFill>
+            <a:srgbClr val="0E1116"/>
+          </a:solidFill>
+          <a:ln w="12700">
+            <a:solidFill>
+              <a:srgbClr val="2C3440"/>
+            </a:solidFill>
+            <a:prstDash val="solid"/>
+          </a:ln>
+        </p:spPr>
+      </p:sp>
+      <p:sp>
+        <p:nvSpPr>
+          <p:cNvPr id="20" name="Text 18"/>
+          <p:cNvSpPr/>
+          <p:nvPr/>
+        </p:nvSpPr>
+        <p:spPr>
+          <a:xfrm>
+            <a:off x="2752344" y="4224528"/>
+            <a:ext cx="1691640" cy="292608"/>
+          </a:xfrm>
+          <a:prstGeom prst="rect">
+            <a:avLst/>
+          </a:prstGeom>
+          <a:noFill/>
+          <a:ln/>
+        </p:spPr>
+        <p:txBody>
+          <a:bodyPr wrap="square" lIns="0" tIns="0" rIns="0" bIns="0" rtlCol="0" anchor="ctr"/>
+          <a:lstStyle/>
+          <a:p>
+            <a:pPr algn="ctr" indent="0" marL="0">
+              <a:buNone/>
+            </a:pPr>
+            <a:r>
+              <a:rPr lang="en-US" sz="1200" b="1" dirty="0">
                 <a:solidFill>
                   <a:srgbClr val="E8EDF2"/>
                 </a:solidFill>
@@ -4326,19 +5706,127 @@
                 <a:ea typeface="Courier New" pitchFamily="34" charset="-122"/>
                 <a:cs typeface="Courier New" pitchFamily="34" charset="-120"/>
               </a:rPr>
-              <a:t>int n = avenumber/(blockDim.x*sizeof(TYPE));   // 스레드당 반복 횟수</a:t>
-            </a:r>
-            <a:endParaRPr lang="en-US" sz="1350" dirty="0"/>
-          </a:p>
-          <a:p>
-            <a:pPr algn="l" indent="0" marL="0">
+              <a:t>SM 4</a:t>
+            </a:r>
+            <a:endParaRPr lang="en-US" sz="1200" dirty="0"/>
+          </a:p>
+        </p:txBody>
+      </p:sp>
+      <p:sp>
+        <p:nvSpPr>
+          <p:cNvPr id="21" name="Text 19"/>
+          <p:cNvSpPr/>
+          <p:nvPr/>
+        </p:nvSpPr>
+        <p:spPr>
+          <a:xfrm>
+            <a:off x="2752344" y="4553712"/>
+            <a:ext cx="1691640" cy="777240"/>
+          </a:xfrm>
+          <a:prstGeom prst="rect">
+            <a:avLst/>
+          </a:prstGeom>
+          <a:noFill/>
+          <a:ln/>
+        </p:spPr>
+        <p:txBody>
+          <a:bodyPr wrap="square" lIns="0" tIns="0" rIns="0" bIns="0" rtlCol="0" anchor="ctr"/>
+          <a:lstStyle/>
+          <a:p>
+            <a:pPr algn="ctr" indent="0" marL="0">
               <a:lnSpc>
-                <a:spcPct val="108000"/>
+                <a:spcPct val="105000"/>
               </a:lnSpc>
               <a:buNone/>
             </a:pPr>
             <a:r>
-              <a:rPr lang="en-US" sz="1350" dirty="0">
+              <a:rPr lang="en-US" sz="1000" dirty="0">
+                <a:solidFill>
+                  <a:srgbClr val="9AA6B2"/>
+                </a:solidFill>
+                <a:latin typeface="Malgun Gothic" pitchFamily="34" charset="0"/>
+                <a:ea typeface="Malgun Gothic" pitchFamily="34" charset="-122"/>
+                <a:cs typeface="Malgun Gothic" pitchFamily="34" charset="-120"/>
+              </a:rPr>
+              <a:t>워프 스케줄러</a:t>
+            </a:r>
+            <a:endParaRPr lang="en-US" sz="1000" dirty="0"/>
+          </a:p>
+          <a:p>
+            <a:pPr algn="ctr" indent="0" marL="0">
+              <a:lnSpc>
+                <a:spcPct val="105000"/>
+              </a:lnSpc>
+              <a:buNone/>
+            </a:pPr>
+            <a:r>
+              <a:rPr lang="en-US" sz="1000" dirty="0">
+                <a:solidFill>
+                  <a:srgbClr val="9AA6B2"/>
+                </a:solidFill>
+                <a:latin typeface="Malgun Gothic" pitchFamily="34" charset="0"/>
+                <a:ea typeface="Malgun Gothic" pitchFamily="34" charset="-122"/>
+                <a:cs typeface="Malgun Gothic" pitchFamily="34" charset="-120"/>
+              </a:rPr>
+              <a:t>+ 코어 다수</a:t>
+            </a:r>
+            <a:endParaRPr lang="en-US" sz="1000" dirty="0"/>
+          </a:p>
+        </p:txBody>
+      </p:sp>
+      <p:sp>
+        <p:nvSpPr>
+          <p:cNvPr id="22" name="Shape 20"/>
+          <p:cNvSpPr/>
+          <p:nvPr/>
+        </p:nvSpPr>
+        <p:spPr>
+          <a:xfrm>
+            <a:off x="4663440" y="4096512"/>
+            <a:ext cx="1691640" cy="1371600"/>
+          </a:xfrm>
+          <a:prstGeom prst="roundRect">
+            <a:avLst>
+              <a:gd name="adj" fmla="val 3333"/>
+            </a:avLst>
+          </a:prstGeom>
+          <a:solidFill>
+            <a:srgbClr val="0E1116"/>
+          </a:solidFill>
+          <a:ln w="12700">
+            <a:solidFill>
+              <a:srgbClr val="2C3440"/>
+            </a:solidFill>
+            <a:prstDash val="solid"/>
+          </a:ln>
+        </p:spPr>
+      </p:sp>
+      <p:sp>
+        <p:nvSpPr>
+          <p:cNvPr id="23" name="Text 21"/>
+          <p:cNvSpPr/>
+          <p:nvPr/>
+        </p:nvSpPr>
+        <p:spPr>
+          <a:xfrm>
+            <a:off x="4663440" y="4224528"/>
+            <a:ext cx="1691640" cy="292608"/>
+          </a:xfrm>
+          <a:prstGeom prst="rect">
+            <a:avLst/>
+          </a:prstGeom>
+          <a:noFill/>
+          <a:ln/>
+        </p:spPr>
+        <p:txBody>
+          <a:bodyPr wrap="square" lIns="0" tIns="0" rIns="0" bIns="0" rtlCol="0" anchor="ctr"/>
+          <a:lstStyle/>
+          <a:p>
+            <a:pPr algn="ctr" indent="0" marL="0">
+              <a:buNone/>
+            </a:pPr>
+            <a:r>
+              <a:rPr lang="en-US" sz="1200" b="1" dirty="0">
                 <a:solidFill>
                   <a:srgbClr val="E8EDF2"/>
                 </a:solidFill>
@@ -4346,175 +5834,1226 @@
                 <a:ea typeface="Courier New" pitchFamily="34" charset="-122"/>
                 <a:cs typeface="Courier New" pitchFamily="34" charset="-120"/>
               </a:rPr>
-              <a:t>for (i = 0; i &lt; n; i++){</a:t>
-            </a:r>
-            <a:endParaRPr lang="en-US" sz="1350" dirty="0"/>
-          </a:p>
-          <a:p>
-            <a:pPr algn="l" indent="0" marL="0">
+              <a:t>SM 5</a:t>
+            </a:r>
+            <a:endParaRPr lang="en-US" sz="1200" dirty="0"/>
+          </a:p>
+        </p:txBody>
+      </p:sp>
+      <p:sp>
+        <p:nvSpPr>
+          <p:cNvPr id="24" name="Text 22"/>
+          <p:cNvSpPr/>
+          <p:nvPr/>
+        </p:nvSpPr>
+        <p:spPr>
+          <a:xfrm>
+            <a:off x="4663440" y="4553712"/>
+            <a:ext cx="1691640" cy="777240"/>
+          </a:xfrm>
+          <a:prstGeom prst="rect">
+            <a:avLst/>
+          </a:prstGeom>
+          <a:noFill/>
+          <a:ln/>
+        </p:spPr>
+        <p:txBody>
+          <a:bodyPr wrap="square" lIns="0" tIns="0" rIns="0" bIns="0" rtlCol="0" anchor="ctr"/>
+          <a:lstStyle/>
+          <a:p>
+            <a:pPr algn="ctr" indent="0" marL="0">
               <a:lnSpc>
-                <a:spcPct val="108000"/>
+                <a:spcPct val="105000"/>
               </a:lnSpc>
               <a:buNone/>
             </a:pPr>
             <a:r>
-              <a:rPr lang="en-US" sz="1350" dirty="0">
-                <a:solidFill>
-                  <a:srgbClr val="8CC63F"/>
-                </a:solidFill>
-                <a:latin typeface="Courier New" pitchFamily="34" charset="0"/>
-                <a:ea typeface="Courier New" pitchFamily="34" charset="-122"/>
-                <a:cs typeface="Courier New" pitchFamily="34" charset="-120"/>
-              </a:rPr>
-              <a:t>    int index = i*blockDim.x + threadIdx.x;   // ★ 이웃 스레드 = 이웃 주소</a:t>
-            </a:r>
-            <a:endParaRPr lang="en-US" sz="1350" dirty="0"/>
-          </a:p>
-          <a:p>
-            <a:pPr algn="l" indent="0" marL="0">
+              <a:rPr lang="en-US" sz="1000" dirty="0">
+                <a:solidFill>
+                  <a:srgbClr val="9AA6B2"/>
+                </a:solidFill>
+                <a:latin typeface="Malgun Gothic" pitchFamily="34" charset="0"/>
+                <a:ea typeface="Malgun Gothic" pitchFamily="34" charset="-122"/>
+                <a:cs typeface="Malgun Gothic" pitchFamily="34" charset="-120"/>
+              </a:rPr>
+              <a:t>워프 스케줄러</a:t>
+            </a:r>
+            <a:endParaRPr lang="en-US" sz="1000" dirty="0"/>
+          </a:p>
+          <a:p>
+            <a:pPr algn="ctr" indent="0" marL="0">
               <a:lnSpc>
-                <a:spcPct val="108000"/>
+                <a:spcPct val="105000"/>
               </a:lnSpc>
               <a:buNone/>
             </a:pPr>
             <a:r>
-              <a:rPr lang="en-US" sz="1350" dirty="0">
+              <a:rPr lang="en-US" sz="1000" dirty="0">
+                <a:solidFill>
+                  <a:srgbClr val="9AA6B2"/>
+                </a:solidFill>
+                <a:latin typeface="Malgun Gothic" pitchFamily="34" charset="0"/>
+                <a:ea typeface="Malgun Gothic" pitchFamily="34" charset="-122"/>
+                <a:cs typeface="Malgun Gothic" pitchFamily="34" charset="-120"/>
+              </a:rPr>
+              <a:t>+ 코어 다수</a:t>
+            </a:r>
+            <a:endParaRPr lang="en-US" sz="1000" dirty="0"/>
+          </a:p>
+        </p:txBody>
+      </p:sp>
+      <p:sp>
+        <p:nvSpPr>
+          <p:cNvPr id="25" name="Shape 23"/>
+          <p:cNvSpPr/>
+          <p:nvPr/>
+        </p:nvSpPr>
+        <p:spPr>
+          <a:xfrm>
+            <a:off x="6702552" y="3657600"/>
+            <a:ext cx="640080" cy="0"/>
+          </a:xfrm>
+          <a:prstGeom prst="line">
+            <a:avLst/>
+          </a:prstGeom>
+          <a:noFill/>
+          <a:ln w="31750">
+            <a:solidFill>
+              <a:srgbClr val="4FB0C6"/>
+            </a:solidFill>
+            <a:prstDash val="solid"/>
+            <a:tailEnd type="triangle"/>
+          </a:ln>
+        </p:spPr>
+      </p:sp>
+      <p:sp>
+        <p:nvSpPr>
+          <p:cNvPr id="26" name="Text 24"/>
+          <p:cNvSpPr/>
+          <p:nvPr/>
+        </p:nvSpPr>
+        <p:spPr>
+          <a:xfrm>
+            <a:off x="6629400" y="3246120"/>
+            <a:ext cx="731520" cy="320040"/>
+          </a:xfrm>
+          <a:prstGeom prst="rect">
+            <a:avLst/>
+          </a:prstGeom>
+          <a:noFill/>
+          <a:ln/>
+        </p:spPr>
+        <p:txBody>
+          <a:bodyPr wrap="square" lIns="0" tIns="0" rIns="0" bIns="0" rtlCol="0" anchor="ctr"/>
+          <a:lstStyle/>
+          <a:p>
+            <a:pPr algn="ctr" indent="0" marL="0">
+              <a:buNone/>
+            </a:pPr>
+            <a:r>
+              <a:rPr lang="en-US" sz="1100" dirty="0">
+                <a:solidFill>
+                  <a:srgbClr val="4FB0C6"/>
+                </a:solidFill>
+                <a:latin typeface="Malgun Gothic" pitchFamily="34" charset="0"/>
+                <a:ea typeface="Malgun Gothic" pitchFamily="34" charset="-122"/>
+                <a:cs typeface="Malgun Gothic" pitchFamily="34" charset="-120"/>
+              </a:rPr>
+              <a:t>확대</a:t>
+            </a:r>
+            <a:endParaRPr lang="en-US" sz="1100" dirty="0"/>
+          </a:p>
+        </p:txBody>
+      </p:sp>
+      <p:sp>
+        <p:nvSpPr>
+          <p:cNvPr id="27" name="Shape 25"/>
+          <p:cNvSpPr/>
+          <p:nvPr/>
+        </p:nvSpPr>
+        <p:spPr>
+          <a:xfrm>
+            <a:off x="7406640" y="1828800"/>
+            <a:ext cx="4206240" cy="3931920"/>
+          </a:xfrm>
+          <a:prstGeom prst="roundRect">
+            <a:avLst>
+              <a:gd name="adj" fmla="val 1628"/>
+            </a:avLst>
+          </a:prstGeom>
+          <a:solidFill>
+            <a:srgbClr val="1E232C"/>
+          </a:solidFill>
+          <a:ln w="19050">
+            <a:solidFill>
+              <a:srgbClr val="4FB0C6"/>
+            </a:solidFill>
+            <a:prstDash val="solid"/>
+          </a:ln>
+        </p:spPr>
+      </p:sp>
+      <p:sp>
+        <p:nvSpPr>
+          <p:cNvPr id="28" name="Text 26"/>
+          <p:cNvSpPr/>
+          <p:nvPr/>
+        </p:nvSpPr>
+        <p:spPr>
+          <a:xfrm>
+            <a:off x="7635240" y="1956816"/>
+            <a:ext cx="3749040" cy="365760"/>
+          </a:xfrm>
+          <a:prstGeom prst="rect">
+            <a:avLst/>
+          </a:prstGeom>
+          <a:noFill/>
+          <a:ln/>
+        </p:spPr>
+        <p:txBody>
+          <a:bodyPr wrap="square" lIns="0" tIns="0" rIns="0" bIns="0" rtlCol="0" anchor="ctr"/>
+          <a:lstStyle/>
+          <a:p>
+            <a:pPr indent="0" marL="0">
+              <a:buNone/>
+            </a:pPr>
+            <a:r>
+              <a:rPr lang="en-US" sz="1500" b="1" dirty="0">
+                <a:solidFill>
+                  <a:srgbClr val="4FB0C6"/>
+                </a:solidFill>
+                <a:latin typeface="Malgun Gothic" pitchFamily="34" charset="0"/>
+                <a:ea typeface="Malgun Gothic" pitchFamily="34" charset="-122"/>
+                <a:cs typeface="Malgun Gothic" pitchFamily="34" charset="-120"/>
+              </a:rPr>
+              <a:t>워프(warp) = 32 스레드</a:t>
+            </a:r>
+            <a:endParaRPr lang="en-US" sz="1500" dirty="0"/>
+          </a:p>
+        </p:txBody>
+      </p:sp>
+      <p:sp>
+        <p:nvSpPr>
+          <p:cNvPr id="29" name="Text 27"/>
+          <p:cNvSpPr/>
+          <p:nvPr/>
+        </p:nvSpPr>
+        <p:spPr>
+          <a:xfrm>
+            <a:off x="7635240" y="2340864"/>
+            <a:ext cx="3749040" cy="292608"/>
+          </a:xfrm>
+          <a:prstGeom prst="rect">
+            <a:avLst/>
+          </a:prstGeom>
+          <a:noFill/>
+          <a:ln/>
+        </p:spPr>
+        <p:txBody>
+          <a:bodyPr wrap="square" lIns="0" tIns="0" rIns="0" bIns="0" rtlCol="0" anchor="ctr"/>
+          <a:lstStyle/>
+          <a:p>
+            <a:pPr indent="0" marL="0">
+              <a:buNone/>
+            </a:pPr>
+            <a:r>
+              <a:rPr lang="en-US" sz="1200" dirty="0">
+                <a:solidFill>
+                  <a:srgbClr val="9AA6B2"/>
+                </a:solidFill>
+                <a:latin typeface="Malgun Gothic" pitchFamily="34" charset="0"/>
+                <a:ea typeface="Malgun Gothic" pitchFamily="34" charset="-122"/>
+                <a:cs typeface="Malgun Gothic" pitchFamily="34" charset="-120"/>
+              </a:rPr>
+              <a:t>같은 명령을 동시에 실행 (lockstep)</a:t>
+            </a:r>
+            <a:endParaRPr lang="en-US" sz="1200" dirty="0"/>
+          </a:p>
+        </p:txBody>
+      </p:sp>
+      <p:sp>
+        <p:nvSpPr>
+          <p:cNvPr id="30" name="Shape 28"/>
+          <p:cNvSpPr/>
+          <p:nvPr/>
+        </p:nvSpPr>
+        <p:spPr>
+          <a:xfrm>
+            <a:off x="7680960" y="2788920"/>
+            <a:ext cx="377190" cy="384048"/>
+          </a:xfrm>
+          <a:prstGeom prst="roundRect">
+            <a:avLst>
+              <a:gd name="adj" fmla="val 7273"/>
+            </a:avLst>
+          </a:prstGeom>
+          <a:solidFill>
+            <a:srgbClr val="0E1116"/>
+          </a:solidFill>
+          <a:ln w="12700">
+            <a:solidFill>
+              <a:srgbClr val="2C3440"/>
+            </a:solidFill>
+            <a:prstDash val="solid"/>
+          </a:ln>
+        </p:spPr>
+      </p:sp>
+      <p:sp>
+        <p:nvSpPr>
+          <p:cNvPr id="31" name="Shape 29"/>
+          <p:cNvSpPr/>
+          <p:nvPr/>
+        </p:nvSpPr>
+        <p:spPr>
+          <a:xfrm>
+            <a:off x="8149590" y="2788920"/>
+            <a:ext cx="377190" cy="384048"/>
+          </a:xfrm>
+          <a:prstGeom prst="roundRect">
+            <a:avLst>
+              <a:gd name="adj" fmla="val 7273"/>
+            </a:avLst>
+          </a:prstGeom>
+          <a:solidFill>
+            <a:srgbClr val="0E1116"/>
+          </a:solidFill>
+          <a:ln w="12700">
+            <a:solidFill>
+              <a:srgbClr val="2C3440"/>
+            </a:solidFill>
+            <a:prstDash val="solid"/>
+          </a:ln>
+        </p:spPr>
+      </p:sp>
+      <p:sp>
+        <p:nvSpPr>
+          <p:cNvPr id="32" name="Shape 30"/>
+          <p:cNvSpPr/>
+          <p:nvPr/>
+        </p:nvSpPr>
+        <p:spPr>
+          <a:xfrm>
+            <a:off x="8618220" y="2788920"/>
+            <a:ext cx="377190" cy="384048"/>
+          </a:xfrm>
+          <a:prstGeom prst="roundRect">
+            <a:avLst>
+              <a:gd name="adj" fmla="val 7273"/>
+            </a:avLst>
+          </a:prstGeom>
+          <a:solidFill>
+            <a:srgbClr val="0E1116"/>
+          </a:solidFill>
+          <a:ln w="12700">
+            <a:solidFill>
+              <a:srgbClr val="2C3440"/>
+            </a:solidFill>
+            <a:prstDash val="solid"/>
+          </a:ln>
+        </p:spPr>
+      </p:sp>
+      <p:sp>
+        <p:nvSpPr>
+          <p:cNvPr id="33" name="Shape 31"/>
+          <p:cNvSpPr/>
+          <p:nvPr/>
+        </p:nvSpPr>
+        <p:spPr>
+          <a:xfrm>
+            <a:off x="9086850" y="2788920"/>
+            <a:ext cx="377190" cy="384048"/>
+          </a:xfrm>
+          <a:prstGeom prst="roundRect">
+            <a:avLst>
+              <a:gd name="adj" fmla="val 7273"/>
+            </a:avLst>
+          </a:prstGeom>
+          <a:solidFill>
+            <a:srgbClr val="0E1116"/>
+          </a:solidFill>
+          <a:ln w="12700">
+            <a:solidFill>
+              <a:srgbClr val="2C3440"/>
+            </a:solidFill>
+            <a:prstDash val="solid"/>
+          </a:ln>
+        </p:spPr>
+      </p:sp>
+      <p:sp>
+        <p:nvSpPr>
+          <p:cNvPr id="34" name="Shape 32"/>
+          <p:cNvSpPr/>
+          <p:nvPr/>
+        </p:nvSpPr>
+        <p:spPr>
+          <a:xfrm>
+            <a:off x="9555480" y="2788920"/>
+            <a:ext cx="377190" cy="384048"/>
+          </a:xfrm>
+          <a:prstGeom prst="roundRect">
+            <a:avLst>
+              <a:gd name="adj" fmla="val 7273"/>
+            </a:avLst>
+          </a:prstGeom>
+          <a:solidFill>
+            <a:srgbClr val="0E1116"/>
+          </a:solidFill>
+          <a:ln w="12700">
+            <a:solidFill>
+              <a:srgbClr val="2C3440"/>
+            </a:solidFill>
+            <a:prstDash val="solid"/>
+          </a:ln>
+        </p:spPr>
+      </p:sp>
+      <p:sp>
+        <p:nvSpPr>
+          <p:cNvPr id="35" name="Shape 33"/>
+          <p:cNvSpPr/>
+          <p:nvPr/>
+        </p:nvSpPr>
+        <p:spPr>
+          <a:xfrm>
+            <a:off x="10024110" y="2788920"/>
+            <a:ext cx="377190" cy="384048"/>
+          </a:xfrm>
+          <a:prstGeom prst="roundRect">
+            <a:avLst>
+              <a:gd name="adj" fmla="val 7273"/>
+            </a:avLst>
+          </a:prstGeom>
+          <a:solidFill>
+            <a:srgbClr val="0E1116"/>
+          </a:solidFill>
+          <a:ln w="12700">
+            <a:solidFill>
+              <a:srgbClr val="2C3440"/>
+            </a:solidFill>
+            <a:prstDash val="solid"/>
+          </a:ln>
+        </p:spPr>
+      </p:sp>
+      <p:sp>
+        <p:nvSpPr>
+          <p:cNvPr id="36" name="Shape 34"/>
+          <p:cNvSpPr/>
+          <p:nvPr/>
+        </p:nvSpPr>
+        <p:spPr>
+          <a:xfrm>
+            <a:off x="10492740" y="2788920"/>
+            <a:ext cx="377190" cy="384048"/>
+          </a:xfrm>
+          <a:prstGeom prst="roundRect">
+            <a:avLst>
+              <a:gd name="adj" fmla="val 7273"/>
+            </a:avLst>
+          </a:prstGeom>
+          <a:solidFill>
+            <a:srgbClr val="0E1116"/>
+          </a:solidFill>
+          <a:ln w="12700">
+            <a:solidFill>
+              <a:srgbClr val="2C3440"/>
+            </a:solidFill>
+            <a:prstDash val="solid"/>
+          </a:ln>
+        </p:spPr>
+      </p:sp>
+      <p:sp>
+        <p:nvSpPr>
+          <p:cNvPr id="37" name="Shape 35"/>
+          <p:cNvSpPr/>
+          <p:nvPr/>
+        </p:nvSpPr>
+        <p:spPr>
+          <a:xfrm>
+            <a:off x="10961370" y="2788920"/>
+            <a:ext cx="377190" cy="384048"/>
+          </a:xfrm>
+          <a:prstGeom prst="roundRect">
+            <a:avLst>
+              <a:gd name="adj" fmla="val 7273"/>
+            </a:avLst>
+          </a:prstGeom>
+          <a:solidFill>
+            <a:srgbClr val="0E1116"/>
+          </a:solidFill>
+          <a:ln w="12700">
+            <a:solidFill>
+              <a:srgbClr val="2C3440"/>
+            </a:solidFill>
+            <a:prstDash val="solid"/>
+          </a:ln>
+        </p:spPr>
+      </p:sp>
+      <p:sp>
+        <p:nvSpPr>
+          <p:cNvPr id="38" name="Shape 36"/>
+          <p:cNvSpPr/>
+          <p:nvPr/>
+        </p:nvSpPr>
+        <p:spPr>
+          <a:xfrm>
+            <a:off x="7680960" y="3300984"/>
+            <a:ext cx="377190" cy="384048"/>
+          </a:xfrm>
+          <a:prstGeom prst="roundRect">
+            <a:avLst>
+              <a:gd name="adj" fmla="val 7273"/>
+            </a:avLst>
+          </a:prstGeom>
+          <a:solidFill>
+            <a:srgbClr val="0E1116"/>
+          </a:solidFill>
+          <a:ln w="12700">
+            <a:solidFill>
+              <a:srgbClr val="2C3440"/>
+            </a:solidFill>
+            <a:prstDash val="solid"/>
+          </a:ln>
+        </p:spPr>
+      </p:sp>
+      <p:sp>
+        <p:nvSpPr>
+          <p:cNvPr id="39" name="Shape 37"/>
+          <p:cNvSpPr/>
+          <p:nvPr/>
+        </p:nvSpPr>
+        <p:spPr>
+          <a:xfrm>
+            <a:off x="8149590" y="3300984"/>
+            <a:ext cx="377190" cy="384048"/>
+          </a:xfrm>
+          <a:prstGeom prst="roundRect">
+            <a:avLst>
+              <a:gd name="adj" fmla="val 7273"/>
+            </a:avLst>
+          </a:prstGeom>
+          <a:solidFill>
+            <a:srgbClr val="0E1116"/>
+          </a:solidFill>
+          <a:ln w="12700">
+            <a:solidFill>
+              <a:srgbClr val="2C3440"/>
+            </a:solidFill>
+            <a:prstDash val="solid"/>
+          </a:ln>
+        </p:spPr>
+      </p:sp>
+      <p:sp>
+        <p:nvSpPr>
+          <p:cNvPr id="40" name="Shape 38"/>
+          <p:cNvSpPr/>
+          <p:nvPr/>
+        </p:nvSpPr>
+        <p:spPr>
+          <a:xfrm>
+            <a:off x="8618220" y="3300984"/>
+            <a:ext cx="377190" cy="384048"/>
+          </a:xfrm>
+          <a:prstGeom prst="roundRect">
+            <a:avLst>
+              <a:gd name="adj" fmla="val 7273"/>
+            </a:avLst>
+          </a:prstGeom>
+          <a:solidFill>
+            <a:srgbClr val="0E1116"/>
+          </a:solidFill>
+          <a:ln w="12700">
+            <a:solidFill>
+              <a:srgbClr val="2C3440"/>
+            </a:solidFill>
+            <a:prstDash val="solid"/>
+          </a:ln>
+        </p:spPr>
+      </p:sp>
+      <p:sp>
+        <p:nvSpPr>
+          <p:cNvPr id="41" name="Shape 39"/>
+          <p:cNvSpPr/>
+          <p:nvPr/>
+        </p:nvSpPr>
+        <p:spPr>
+          <a:xfrm>
+            <a:off x="9086850" y="3300984"/>
+            <a:ext cx="377190" cy="384048"/>
+          </a:xfrm>
+          <a:prstGeom prst="roundRect">
+            <a:avLst>
+              <a:gd name="adj" fmla="val 7273"/>
+            </a:avLst>
+          </a:prstGeom>
+          <a:solidFill>
+            <a:srgbClr val="0E1116"/>
+          </a:solidFill>
+          <a:ln w="12700">
+            <a:solidFill>
+              <a:srgbClr val="2C3440"/>
+            </a:solidFill>
+            <a:prstDash val="solid"/>
+          </a:ln>
+        </p:spPr>
+      </p:sp>
+      <p:sp>
+        <p:nvSpPr>
+          <p:cNvPr id="42" name="Shape 40"/>
+          <p:cNvSpPr/>
+          <p:nvPr/>
+        </p:nvSpPr>
+        <p:spPr>
+          <a:xfrm>
+            <a:off x="9555480" y="3300984"/>
+            <a:ext cx="377190" cy="384048"/>
+          </a:xfrm>
+          <a:prstGeom prst="roundRect">
+            <a:avLst>
+              <a:gd name="adj" fmla="val 7273"/>
+            </a:avLst>
+          </a:prstGeom>
+          <a:solidFill>
+            <a:srgbClr val="0E1116"/>
+          </a:solidFill>
+          <a:ln w="12700">
+            <a:solidFill>
+              <a:srgbClr val="2C3440"/>
+            </a:solidFill>
+            <a:prstDash val="solid"/>
+          </a:ln>
+        </p:spPr>
+      </p:sp>
+      <p:sp>
+        <p:nvSpPr>
+          <p:cNvPr id="43" name="Shape 41"/>
+          <p:cNvSpPr/>
+          <p:nvPr/>
+        </p:nvSpPr>
+        <p:spPr>
+          <a:xfrm>
+            <a:off x="10024110" y="3300984"/>
+            <a:ext cx="377190" cy="384048"/>
+          </a:xfrm>
+          <a:prstGeom prst="roundRect">
+            <a:avLst>
+              <a:gd name="adj" fmla="val 7273"/>
+            </a:avLst>
+          </a:prstGeom>
+          <a:solidFill>
+            <a:srgbClr val="0E1116"/>
+          </a:solidFill>
+          <a:ln w="12700">
+            <a:solidFill>
+              <a:srgbClr val="2C3440"/>
+            </a:solidFill>
+            <a:prstDash val="solid"/>
+          </a:ln>
+        </p:spPr>
+      </p:sp>
+      <p:sp>
+        <p:nvSpPr>
+          <p:cNvPr id="44" name="Shape 42"/>
+          <p:cNvSpPr/>
+          <p:nvPr/>
+        </p:nvSpPr>
+        <p:spPr>
+          <a:xfrm>
+            <a:off x="10492740" y="3300984"/>
+            <a:ext cx="377190" cy="384048"/>
+          </a:xfrm>
+          <a:prstGeom prst="roundRect">
+            <a:avLst>
+              <a:gd name="adj" fmla="val 7273"/>
+            </a:avLst>
+          </a:prstGeom>
+          <a:solidFill>
+            <a:srgbClr val="0E1116"/>
+          </a:solidFill>
+          <a:ln w="12700">
+            <a:solidFill>
+              <a:srgbClr val="2C3440"/>
+            </a:solidFill>
+            <a:prstDash val="solid"/>
+          </a:ln>
+        </p:spPr>
+      </p:sp>
+      <p:sp>
+        <p:nvSpPr>
+          <p:cNvPr id="45" name="Shape 43"/>
+          <p:cNvSpPr/>
+          <p:nvPr/>
+        </p:nvSpPr>
+        <p:spPr>
+          <a:xfrm>
+            <a:off x="10961370" y="3300984"/>
+            <a:ext cx="377190" cy="384048"/>
+          </a:xfrm>
+          <a:prstGeom prst="roundRect">
+            <a:avLst>
+              <a:gd name="adj" fmla="val 7273"/>
+            </a:avLst>
+          </a:prstGeom>
+          <a:solidFill>
+            <a:srgbClr val="0E1116"/>
+          </a:solidFill>
+          <a:ln w="12700">
+            <a:solidFill>
+              <a:srgbClr val="2C3440"/>
+            </a:solidFill>
+            <a:prstDash val="solid"/>
+          </a:ln>
+        </p:spPr>
+      </p:sp>
+      <p:sp>
+        <p:nvSpPr>
+          <p:cNvPr id="46" name="Shape 44"/>
+          <p:cNvSpPr/>
+          <p:nvPr/>
+        </p:nvSpPr>
+        <p:spPr>
+          <a:xfrm>
+            <a:off x="7680960" y="3813048"/>
+            <a:ext cx="377190" cy="384048"/>
+          </a:xfrm>
+          <a:prstGeom prst="roundRect">
+            <a:avLst>
+              <a:gd name="adj" fmla="val 7273"/>
+            </a:avLst>
+          </a:prstGeom>
+          <a:solidFill>
+            <a:srgbClr val="0E1116"/>
+          </a:solidFill>
+          <a:ln w="12700">
+            <a:solidFill>
+              <a:srgbClr val="2C3440"/>
+            </a:solidFill>
+            <a:prstDash val="solid"/>
+          </a:ln>
+        </p:spPr>
+      </p:sp>
+      <p:sp>
+        <p:nvSpPr>
+          <p:cNvPr id="47" name="Shape 45"/>
+          <p:cNvSpPr/>
+          <p:nvPr/>
+        </p:nvSpPr>
+        <p:spPr>
+          <a:xfrm>
+            <a:off x="8149590" y="3813048"/>
+            <a:ext cx="377190" cy="384048"/>
+          </a:xfrm>
+          <a:prstGeom prst="roundRect">
+            <a:avLst>
+              <a:gd name="adj" fmla="val 7273"/>
+            </a:avLst>
+          </a:prstGeom>
+          <a:solidFill>
+            <a:srgbClr val="0E1116"/>
+          </a:solidFill>
+          <a:ln w="12700">
+            <a:solidFill>
+              <a:srgbClr val="2C3440"/>
+            </a:solidFill>
+            <a:prstDash val="solid"/>
+          </a:ln>
+        </p:spPr>
+      </p:sp>
+      <p:sp>
+        <p:nvSpPr>
+          <p:cNvPr id="48" name="Shape 46"/>
+          <p:cNvSpPr/>
+          <p:nvPr/>
+        </p:nvSpPr>
+        <p:spPr>
+          <a:xfrm>
+            <a:off x="8618220" y="3813048"/>
+            <a:ext cx="377190" cy="384048"/>
+          </a:xfrm>
+          <a:prstGeom prst="roundRect">
+            <a:avLst>
+              <a:gd name="adj" fmla="val 7273"/>
+            </a:avLst>
+          </a:prstGeom>
+          <a:solidFill>
+            <a:srgbClr val="0E1116"/>
+          </a:solidFill>
+          <a:ln w="12700">
+            <a:solidFill>
+              <a:srgbClr val="2C3440"/>
+            </a:solidFill>
+            <a:prstDash val="solid"/>
+          </a:ln>
+        </p:spPr>
+      </p:sp>
+      <p:sp>
+        <p:nvSpPr>
+          <p:cNvPr id="49" name="Shape 47"/>
+          <p:cNvSpPr/>
+          <p:nvPr/>
+        </p:nvSpPr>
+        <p:spPr>
+          <a:xfrm>
+            <a:off x="9086850" y="3813048"/>
+            <a:ext cx="377190" cy="384048"/>
+          </a:xfrm>
+          <a:prstGeom prst="roundRect">
+            <a:avLst>
+              <a:gd name="adj" fmla="val 7273"/>
+            </a:avLst>
+          </a:prstGeom>
+          <a:solidFill>
+            <a:srgbClr val="0E1116"/>
+          </a:solidFill>
+          <a:ln w="12700">
+            <a:solidFill>
+              <a:srgbClr val="2C3440"/>
+            </a:solidFill>
+            <a:prstDash val="solid"/>
+          </a:ln>
+        </p:spPr>
+      </p:sp>
+      <p:sp>
+        <p:nvSpPr>
+          <p:cNvPr id="50" name="Shape 48"/>
+          <p:cNvSpPr/>
+          <p:nvPr/>
+        </p:nvSpPr>
+        <p:spPr>
+          <a:xfrm>
+            <a:off x="9555480" y="3813048"/>
+            <a:ext cx="377190" cy="384048"/>
+          </a:xfrm>
+          <a:prstGeom prst="roundRect">
+            <a:avLst>
+              <a:gd name="adj" fmla="val 7273"/>
+            </a:avLst>
+          </a:prstGeom>
+          <a:solidFill>
+            <a:srgbClr val="0E1116"/>
+          </a:solidFill>
+          <a:ln w="12700">
+            <a:solidFill>
+              <a:srgbClr val="2C3440"/>
+            </a:solidFill>
+            <a:prstDash val="solid"/>
+          </a:ln>
+        </p:spPr>
+      </p:sp>
+      <p:sp>
+        <p:nvSpPr>
+          <p:cNvPr id="51" name="Shape 49"/>
+          <p:cNvSpPr/>
+          <p:nvPr/>
+        </p:nvSpPr>
+        <p:spPr>
+          <a:xfrm>
+            <a:off x="10024110" y="3813048"/>
+            <a:ext cx="377190" cy="384048"/>
+          </a:xfrm>
+          <a:prstGeom prst="roundRect">
+            <a:avLst>
+              <a:gd name="adj" fmla="val 7273"/>
+            </a:avLst>
+          </a:prstGeom>
+          <a:solidFill>
+            <a:srgbClr val="0E1116"/>
+          </a:solidFill>
+          <a:ln w="12700">
+            <a:solidFill>
+              <a:srgbClr val="2C3440"/>
+            </a:solidFill>
+            <a:prstDash val="solid"/>
+          </a:ln>
+        </p:spPr>
+      </p:sp>
+      <p:sp>
+        <p:nvSpPr>
+          <p:cNvPr id="52" name="Shape 50"/>
+          <p:cNvSpPr/>
+          <p:nvPr/>
+        </p:nvSpPr>
+        <p:spPr>
+          <a:xfrm>
+            <a:off x="10492740" y="3813048"/>
+            <a:ext cx="377190" cy="384048"/>
+          </a:xfrm>
+          <a:prstGeom prst="roundRect">
+            <a:avLst>
+              <a:gd name="adj" fmla="val 7273"/>
+            </a:avLst>
+          </a:prstGeom>
+          <a:solidFill>
+            <a:srgbClr val="0E1116"/>
+          </a:solidFill>
+          <a:ln w="12700">
+            <a:solidFill>
+              <a:srgbClr val="2C3440"/>
+            </a:solidFill>
+            <a:prstDash val="solid"/>
+          </a:ln>
+        </p:spPr>
+      </p:sp>
+      <p:sp>
+        <p:nvSpPr>
+          <p:cNvPr id="53" name="Shape 51"/>
+          <p:cNvSpPr/>
+          <p:nvPr/>
+        </p:nvSpPr>
+        <p:spPr>
+          <a:xfrm>
+            <a:off x="10961370" y="3813048"/>
+            <a:ext cx="377190" cy="384048"/>
+          </a:xfrm>
+          <a:prstGeom prst="roundRect">
+            <a:avLst>
+              <a:gd name="adj" fmla="val 7273"/>
+            </a:avLst>
+          </a:prstGeom>
+          <a:solidFill>
+            <a:srgbClr val="0E1116"/>
+          </a:solidFill>
+          <a:ln w="12700">
+            <a:solidFill>
+              <a:srgbClr val="2C3440"/>
+            </a:solidFill>
+            <a:prstDash val="solid"/>
+          </a:ln>
+        </p:spPr>
+      </p:sp>
+      <p:sp>
+        <p:nvSpPr>
+          <p:cNvPr id="54" name="Shape 52"/>
+          <p:cNvSpPr/>
+          <p:nvPr/>
+        </p:nvSpPr>
+        <p:spPr>
+          <a:xfrm>
+            <a:off x="7680960" y="4325112"/>
+            <a:ext cx="377190" cy="384048"/>
+          </a:xfrm>
+          <a:prstGeom prst="roundRect">
+            <a:avLst>
+              <a:gd name="adj" fmla="val 7273"/>
+            </a:avLst>
+          </a:prstGeom>
+          <a:solidFill>
+            <a:srgbClr val="0E1116"/>
+          </a:solidFill>
+          <a:ln w="12700">
+            <a:solidFill>
+              <a:srgbClr val="2C3440"/>
+            </a:solidFill>
+            <a:prstDash val="solid"/>
+          </a:ln>
+        </p:spPr>
+      </p:sp>
+      <p:sp>
+        <p:nvSpPr>
+          <p:cNvPr id="55" name="Shape 53"/>
+          <p:cNvSpPr/>
+          <p:nvPr/>
+        </p:nvSpPr>
+        <p:spPr>
+          <a:xfrm>
+            <a:off x="8149590" y="4325112"/>
+            <a:ext cx="377190" cy="384048"/>
+          </a:xfrm>
+          <a:prstGeom prst="roundRect">
+            <a:avLst>
+              <a:gd name="adj" fmla="val 7273"/>
+            </a:avLst>
+          </a:prstGeom>
+          <a:solidFill>
+            <a:srgbClr val="0E1116"/>
+          </a:solidFill>
+          <a:ln w="12700">
+            <a:solidFill>
+              <a:srgbClr val="2C3440"/>
+            </a:solidFill>
+            <a:prstDash val="solid"/>
+          </a:ln>
+        </p:spPr>
+      </p:sp>
+      <p:sp>
+        <p:nvSpPr>
+          <p:cNvPr id="56" name="Shape 54"/>
+          <p:cNvSpPr/>
+          <p:nvPr/>
+        </p:nvSpPr>
+        <p:spPr>
+          <a:xfrm>
+            <a:off x="8618220" y="4325112"/>
+            <a:ext cx="377190" cy="384048"/>
+          </a:xfrm>
+          <a:prstGeom prst="roundRect">
+            <a:avLst>
+              <a:gd name="adj" fmla="val 7273"/>
+            </a:avLst>
+          </a:prstGeom>
+          <a:solidFill>
+            <a:srgbClr val="0E1116"/>
+          </a:solidFill>
+          <a:ln w="12700">
+            <a:solidFill>
+              <a:srgbClr val="2C3440"/>
+            </a:solidFill>
+            <a:prstDash val="solid"/>
+          </a:ln>
+        </p:spPr>
+      </p:sp>
+      <p:sp>
+        <p:nvSpPr>
+          <p:cNvPr id="57" name="Shape 55"/>
+          <p:cNvSpPr/>
+          <p:nvPr/>
+        </p:nvSpPr>
+        <p:spPr>
+          <a:xfrm>
+            <a:off x="9086850" y="4325112"/>
+            <a:ext cx="377190" cy="384048"/>
+          </a:xfrm>
+          <a:prstGeom prst="roundRect">
+            <a:avLst>
+              <a:gd name="adj" fmla="val 7273"/>
+            </a:avLst>
+          </a:prstGeom>
+          <a:solidFill>
+            <a:srgbClr val="0E1116"/>
+          </a:solidFill>
+          <a:ln w="12700">
+            <a:solidFill>
+              <a:srgbClr val="2C3440"/>
+            </a:solidFill>
+            <a:prstDash val="solid"/>
+          </a:ln>
+        </p:spPr>
+      </p:sp>
+      <p:sp>
+        <p:nvSpPr>
+          <p:cNvPr id="58" name="Shape 56"/>
+          <p:cNvSpPr/>
+          <p:nvPr/>
+        </p:nvSpPr>
+        <p:spPr>
+          <a:xfrm>
+            <a:off x="9555480" y="4325112"/>
+            <a:ext cx="377190" cy="384048"/>
+          </a:xfrm>
+          <a:prstGeom prst="roundRect">
+            <a:avLst>
+              <a:gd name="adj" fmla="val 7273"/>
+            </a:avLst>
+          </a:prstGeom>
+          <a:solidFill>
+            <a:srgbClr val="0E1116"/>
+          </a:solidFill>
+          <a:ln w="12700">
+            <a:solidFill>
+              <a:srgbClr val="2C3440"/>
+            </a:solidFill>
+            <a:prstDash val="solid"/>
+          </a:ln>
+        </p:spPr>
+      </p:sp>
+      <p:sp>
+        <p:nvSpPr>
+          <p:cNvPr id="59" name="Shape 57"/>
+          <p:cNvSpPr/>
+          <p:nvPr/>
+        </p:nvSpPr>
+        <p:spPr>
+          <a:xfrm>
+            <a:off x="10024110" y="4325112"/>
+            <a:ext cx="377190" cy="384048"/>
+          </a:xfrm>
+          <a:prstGeom prst="roundRect">
+            <a:avLst>
+              <a:gd name="adj" fmla="val 7273"/>
+            </a:avLst>
+          </a:prstGeom>
+          <a:solidFill>
+            <a:srgbClr val="0E1116"/>
+          </a:solidFill>
+          <a:ln w="12700">
+            <a:solidFill>
+              <a:srgbClr val="2C3440"/>
+            </a:solidFill>
+            <a:prstDash val="solid"/>
+          </a:ln>
+        </p:spPr>
+      </p:sp>
+      <p:sp>
+        <p:nvSpPr>
+          <p:cNvPr id="60" name="Shape 58"/>
+          <p:cNvSpPr/>
+          <p:nvPr/>
+        </p:nvSpPr>
+        <p:spPr>
+          <a:xfrm>
+            <a:off x="10492740" y="4325112"/>
+            <a:ext cx="377190" cy="384048"/>
+          </a:xfrm>
+          <a:prstGeom prst="roundRect">
+            <a:avLst>
+              <a:gd name="adj" fmla="val 7273"/>
+            </a:avLst>
+          </a:prstGeom>
+          <a:solidFill>
+            <a:srgbClr val="0E1116"/>
+          </a:solidFill>
+          <a:ln w="12700">
+            <a:solidFill>
+              <a:srgbClr val="2C3440"/>
+            </a:solidFill>
+            <a:prstDash val="solid"/>
+          </a:ln>
+        </p:spPr>
+      </p:sp>
+      <p:sp>
+        <p:nvSpPr>
+          <p:cNvPr id="61" name="Shape 59"/>
+          <p:cNvSpPr/>
+          <p:nvPr/>
+        </p:nvSpPr>
+        <p:spPr>
+          <a:xfrm>
+            <a:off x="10961370" y="4325112"/>
+            <a:ext cx="377190" cy="384048"/>
+          </a:xfrm>
+          <a:prstGeom prst="roundRect">
+            <a:avLst>
+              <a:gd name="adj" fmla="val 7273"/>
+            </a:avLst>
+          </a:prstGeom>
+          <a:solidFill>
+            <a:srgbClr val="0E1116"/>
+          </a:solidFill>
+          <a:ln w="12700">
+            <a:solidFill>
+              <a:srgbClr val="2C3440"/>
+            </a:solidFill>
+            <a:prstDash val="solid"/>
+          </a:ln>
+        </p:spPr>
+      </p:sp>
+      <p:sp>
+        <p:nvSpPr>
+          <p:cNvPr id="62" name="Text 60"/>
+          <p:cNvSpPr/>
+          <p:nvPr/>
+        </p:nvSpPr>
+        <p:spPr>
+          <a:xfrm>
+            <a:off x="7680960" y="4855464"/>
+            <a:ext cx="3657600" cy="292608"/>
+          </a:xfrm>
+          <a:prstGeom prst="rect">
+            <a:avLst/>
+          </a:prstGeom>
+          <a:noFill/>
+          <a:ln/>
+        </p:spPr>
+        <p:txBody>
+          <a:bodyPr wrap="square" lIns="0" tIns="0" rIns="0" bIns="0" rtlCol="0" anchor="ctr"/>
+          <a:lstStyle/>
+          <a:p>
+            <a:pPr indent="0" marL="0">
+              <a:buNone/>
+            </a:pPr>
+            <a:r>
+              <a:rPr lang="en-US" sz="1150" i="1" dirty="0">
+                <a:solidFill>
+                  <a:srgbClr val="9AA6B2"/>
+                </a:solidFill>
+                <a:latin typeface="Malgun Gothic" pitchFamily="34" charset="0"/>
+                <a:ea typeface="Malgun Gothic" pitchFamily="34" charset="-122"/>
+                <a:cs typeface="Malgun Gothic" pitchFamily="34" charset="-120"/>
+              </a:rPr>
+              <a:t>32개 스레드가 한 덩어리로 움직임</a:t>
+            </a:r>
+            <a:endParaRPr lang="en-US" sz="1150" dirty="0"/>
+          </a:p>
+        </p:txBody>
+      </p:sp>
+      <p:sp>
+        <p:nvSpPr>
+          <p:cNvPr id="63" name="Shape 61"/>
+          <p:cNvSpPr/>
+          <p:nvPr/>
+        </p:nvSpPr>
+        <p:spPr>
+          <a:xfrm>
+            <a:off x="7680960" y="4892040"/>
+            <a:ext cx="3657600" cy="713232"/>
+          </a:xfrm>
+          <a:prstGeom prst="roundRect">
+            <a:avLst>
+              <a:gd name="adj" fmla="val 6410"/>
+            </a:avLst>
+          </a:prstGeom>
+          <a:solidFill>
+            <a:srgbClr val="1A2418"/>
+          </a:solidFill>
+          <a:ln/>
+        </p:spPr>
+      </p:sp>
+      <p:sp>
+        <p:nvSpPr>
+          <p:cNvPr id="64" name="Text 62"/>
+          <p:cNvSpPr/>
+          <p:nvPr/>
+        </p:nvSpPr>
+        <p:spPr>
+          <a:xfrm>
+            <a:off x="7818120" y="4983480"/>
+            <a:ext cx="3383280" cy="548640"/>
+          </a:xfrm>
+          <a:prstGeom prst="rect">
+            <a:avLst/>
+          </a:prstGeom>
+          <a:noFill/>
+          <a:ln/>
+        </p:spPr>
+        <p:txBody>
+          <a:bodyPr wrap="square" lIns="0" tIns="0" rIns="0" bIns="0" rtlCol="0" anchor="t"/>
+          <a:lstStyle/>
+          <a:p>
+            <a:pPr indent="0" marL="0">
+              <a:lnSpc>
+                <a:spcPct val="105000"/>
+              </a:lnSpc>
+              <a:buNone/>
+            </a:pPr>
+            <a:r>
+              <a:rPr lang="en-US" sz="1150" b="1" dirty="0">
+                <a:solidFill>
+                  <a:srgbClr val="E0A458"/>
+                </a:solidFill>
+                <a:latin typeface="Malgun Gothic" pitchFamily="34" charset="0"/>
+                <a:ea typeface="Malgun Gothic" pitchFamily="34" charset="-122"/>
+                <a:cs typeface="Malgun Gothic" pitchFamily="34" charset="-120"/>
+              </a:rPr>
+              <a:t>그래서 blockDim은 32의 배수가 유리</a:t>
+            </a:r>
+            <a:endParaRPr lang="en-US" sz="1150" dirty="0"/>
+          </a:p>
+          <a:p>
+            <a:pPr indent="0" marL="0">
+              <a:lnSpc>
+                <a:spcPct val="105000"/>
+              </a:lnSpc>
+              <a:buNone/>
+            </a:pPr>
+            <a:r>
+              <a:rPr lang="en-US" sz="1150" dirty="0">
                 <a:solidFill>
                   <a:srgbClr val="E8EDF2"/>
                 </a:solidFill>
-                <a:latin typeface="Courier New" pitchFamily="34" charset="0"/>
-                <a:ea typeface="Courier New" pitchFamily="34" charset="-122"/>
-                <a:cs typeface="Courier New" pitchFamily="34" charset="-120"/>
-              </a:rPr>
-              <a:t>    mybuf[index] = p1;</a:t>
-            </a:r>
-            <a:endParaRPr lang="en-US" sz="1350" dirty="0"/>
-          </a:p>
-          <a:p>
-            <a:pPr algn="l" indent="0" marL="0">
-              <a:lnSpc>
-                <a:spcPct val="108000"/>
-              </a:lnSpc>
-              <a:buNone/>
-            </a:pPr>
-            <a:r>
-              <a:rPr lang="en-US" sz="1350" dirty="0">
-                <a:solidFill>
-                  <a:srgbClr val="E8EDF2"/>
-                </a:solidFill>
-                <a:latin typeface="Courier New" pitchFamily="34" charset="0"/>
-                <a:ea typeface="Courier New" pitchFamily="34" charset="-122"/>
-                <a:cs typeface="Courier New" pitchFamily="34" charset="-120"/>
-              </a:rPr>
-              <a:t>}</a:t>
-            </a:r>
-            <a:endParaRPr lang="en-US" sz="1350" dirty="0"/>
-          </a:p>
-        </p:txBody>
-      </p:sp>
-      <p:sp>
-        <p:nvSpPr>
-          <p:cNvPr id="6" name="Text 4"/>
-          <p:cNvSpPr/>
-          <p:nvPr/>
-        </p:nvSpPr>
-        <p:spPr>
-          <a:xfrm>
-            <a:off x="548640" y="4754880"/>
-            <a:ext cx="11064240" cy="640080"/>
-          </a:xfrm>
-          <a:prstGeom prst="rect">
-            <a:avLst/>
-          </a:prstGeom>
-          <a:noFill/>
-          <a:ln/>
-        </p:spPr>
-        <p:txBody>
-          <a:bodyPr wrap="square" lIns="0" tIns="0" rIns="0" bIns="0" rtlCol="0" anchor="t"/>
-          <a:lstStyle/>
-          <a:p>
-            <a:pPr indent="0" marL="0">
-              <a:buNone/>
-            </a:pPr>
-            <a:r>
-              <a:rPr lang="en-US" sz="1700" dirty="0">
-                <a:solidFill>
-                  <a:srgbClr val="E8EDF2"/>
-                </a:solidFill>
-                <a:latin typeface="Malgun Gothic" pitchFamily="34" charset="0"/>
-                <a:ea typeface="Malgun Gothic" pitchFamily="34" charset="-122"/>
-                <a:cs typeface="Malgun Gothic" pitchFamily="34" charset="-120"/>
-              </a:rPr>
-              <a:t>여기서 처음으로 </a:t>
-            </a:r>
-            <a:pPr indent="0" marL="0">
-              <a:buNone/>
-            </a:pPr>
-            <a:r>
-              <a:rPr lang="en-US" sz="1700" b="1" dirty="0">
-                <a:solidFill>
-                  <a:srgbClr val="4FB0C6"/>
-                </a:solidFill>
-                <a:latin typeface="Malgun Gothic" pitchFamily="34" charset="0"/>
-                <a:ea typeface="Malgun Gothic" pitchFamily="34" charset="-122"/>
-                <a:cs typeface="Malgun Gothic" pitchFamily="34" charset="-120"/>
-              </a:rPr>
-              <a:t>threadIdx.x · blockDim.x</a:t>
-            </a:r>
-            <a:pPr indent="0" marL="0">
-              <a:buNone/>
-            </a:pPr>
-            <a:r>
-              <a:rPr lang="en-US" sz="1700" dirty="0">
-                <a:solidFill>
-                  <a:srgbClr val="E8EDF2"/>
-                </a:solidFill>
-                <a:latin typeface="Malgun Gothic" pitchFamily="34" charset="0"/>
-                <a:ea typeface="Malgun Gothic" pitchFamily="34" charset="-122"/>
-                <a:cs typeface="Malgun Gothic" pitchFamily="34" charset="-120"/>
-              </a:rPr>
-              <a:t>가 등장합니다. 세션 1의 커널엔 없었죠(스레드가 1개였으니까).</a:t>
-            </a:r>
-            <a:endParaRPr lang="en-US" sz="1700" dirty="0"/>
-          </a:p>
-        </p:txBody>
-      </p:sp>
-      <p:sp>
-        <p:nvSpPr>
-          <p:cNvPr id="7" name="Text 5"/>
-          <p:cNvSpPr/>
-          <p:nvPr/>
-        </p:nvSpPr>
-        <p:spPr>
-          <a:xfrm>
-            <a:off x="548640" y="5532120"/>
-            <a:ext cx="11064240" cy="457200"/>
-          </a:xfrm>
-          <a:prstGeom prst="rect">
-            <a:avLst/>
-          </a:prstGeom>
-          <a:noFill/>
-          <a:ln/>
-        </p:spPr>
-        <p:txBody>
-          <a:bodyPr wrap="square" lIns="0" tIns="0" rIns="0" bIns="0" rtlCol="0" anchor="ctr"/>
-          <a:lstStyle/>
-          <a:p>
-            <a:pPr indent="0" marL="0">
-              <a:buNone/>
-            </a:pPr>
-            <a:r>
-              <a:rPr lang="en-US" sz="1400" i="1" dirty="0">
-                <a:solidFill>
-                  <a:srgbClr val="9AA6B2"/>
-                </a:solidFill>
-                <a:latin typeface="Malgun Gothic" pitchFamily="34" charset="0"/>
-                <a:ea typeface="Malgun Gothic" pitchFamily="34" charset="-122"/>
-                <a:cs typeface="Malgun Gothic" pitchFamily="34" charset="-120"/>
-              </a:rPr>
-              <a:t>TYPE = unsigned long (8바이트). blockIdx로 블록의 구역을, threadIdx로 그 안의 위치를 정합니다.</a:t>
-            </a:r>
-            <a:endParaRPr lang="en-US" sz="1400" dirty="0"/>
+                <a:latin typeface="Malgun Gothic" pitchFamily="34" charset="0"/>
+                <a:ea typeface="Malgun Gothic" pitchFamily="34" charset="-122"/>
+                <a:cs typeface="Malgun Gothic" pitchFamily="34" charset="-120"/>
+              </a:rPr>
+              <a:t>(실습 3에서 블록 크기별 대역폭 측정)</a:t>
+            </a:r>
+            <a:endParaRPr lang="en-US" sz="1150" dirty="0"/>
           </a:p>
         </p:txBody>
       </p:sp>
@@ -4587,7 +7126,7 @@
                 <a:ea typeface="Courier New" pitchFamily="34" charset="-122"/>
                 <a:cs typeface="Courier New" pitchFamily="34" charset="-120"/>
               </a:rPr>
-              <a:t>4</a:t>
+              <a:t>3</a:t>
             </a:r>
             <a:endParaRPr lang="en-US" sz="2200" dirty="0"/>
           </a:p>
@@ -4626,7 +7165,7 @@
                 <a:ea typeface="Malgun Gothic" pitchFamily="34" charset="-122"/>
                 <a:cs typeface="Malgun Gothic" pitchFamily="34" charset="-120"/>
               </a:rPr>
-              <a:t>메모리 병합(coalescing)</a:t>
+              <a:t>스레드가 자기 몫을 계산하는 법</a:t>
             </a:r>
             <a:endParaRPr lang="en-US" sz="3000" dirty="0"/>
           </a:p>
@@ -4634,96 +7173,18 @@
       </p:sp>
       <p:sp>
         <p:nvSpPr>
-          <p:cNvPr id="4" name="Text 2"/>
-          <p:cNvSpPr/>
-          <p:nvPr/>
-        </p:nvSpPr>
-        <p:spPr>
-          <a:xfrm>
-            <a:off x="548640" y="1417320"/>
-            <a:ext cx="11064240" cy="548640"/>
-          </a:xfrm>
-          <a:prstGeom prst="rect">
-            <a:avLst/>
-          </a:prstGeom>
-          <a:noFill/>
-          <a:ln/>
-        </p:spPr>
-        <p:txBody>
-          <a:bodyPr wrap="square" lIns="0" tIns="0" rIns="0" bIns="0" rtlCol="0" anchor="t"/>
-          <a:lstStyle/>
-          <a:p>
-            <a:pPr indent="0" marL="0">
-              <a:buNone/>
-            </a:pPr>
-            <a:r>
-              <a:rPr lang="en-US" sz="1600" dirty="0">
-                <a:solidFill>
-                  <a:srgbClr val="9AA6B2"/>
-                </a:solidFill>
-                <a:latin typeface="Malgun Gothic" pitchFamily="34" charset="0"/>
-                <a:ea typeface="Malgun Gothic" pitchFamily="34" charset="-122"/>
-                <a:cs typeface="Malgun Gothic" pitchFamily="34" charset="-120"/>
-              </a:rPr>
-              <a:t>한 워프(warp, 32스레드)가 접근하는 주소가 서로 붙어 있으면, 하드웨어가 하나의 큰 전송으로 묶습니다.</a:t>
-            </a:r>
-            <a:endParaRPr lang="en-US" sz="1600" dirty="0"/>
-          </a:p>
-        </p:txBody>
-      </p:sp>
-      <p:sp>
-        <p:nvSpPr>
-          <p:cNvPr id="5" name="Text 3"/>
-          <p:cNvSpPr/>
-          <p:nvPr/>
-        </p:nvSpPr>
-        <p:spPr>
-          <a:xfrm>
-            <a:off x="548640" y="2084832"/>
-            <a:ext cx="11064240" cy="365760"/>
-          </a:xfrm>
-          <a:prstGeom prst="rect">
-            <a:avLst/>
-          </a:prstGeom>
-          <a:noFill/>
-          <a:ln/>
-        </p:spPr>
-        <p:txBody>
-          <a:bodyPr wrap="square" lIns="0" tIns="0" rIns="0" bIns="0" rtlCol="0" anchor="ctr"/>
-          <a:lstStyle/>
-          <a:p>
-            <a:pPr indent="0" marL="0">
-              <a:buNone/>
-            </a:pPr>
-            <a:r>
-              <a:rPr lang="en-US" sz="1500" b="1" dirty="0">
-                <a:solidFill>
-                  <a:srgbClr val="8CC63F"/>
-                </a:solidFill>
-                <a:latin typeface="Malgun Gothic" pitchFamily="34" charset="0"/>
-                <a:ea typeface="Malgun Gothic" pitchFamily="34" charset="-122"/>
-                <a:cs typeface="Malgun Gothic" pitchFamily="34" charset="-120"/>
-              </a:rPr>
-              <a:t>✓ 병합됨 (index = i*blockDim.x + threadIdx.x)</a:t>
-            </a:r>
-            <a:endParaRPr lang="en-US" sz="1500" dirty="0"/>
-          </a:p>
-        </p:txBody>
-      </p:sp>
-      <p:sp>
-        <p:nvSpPr>
-          <p:cNvPr id="6" name="Shape 4"/>
-          <p:cNvSpPr/>
-          <p:nvPr/>
-        </p:nvSpPr>
-        <p:spPr>
-          <a:xfrm>
-            <a:off x="548640" y="2487168"/>
-            <a:ext cx="566928" cy="502920"/>
+          <p:cNvPr id="4" name="Shape 2"/>
+          <p:cNvSpPr/>
+          <p:nvPr/>
+        </p:nvSpPr>
+        <p:spPr>
+          <a:xfrm>
+            <a:off x="548640" y="1554480"/>
+            <a:ext cx="11064240" cy="3017520"/>
           </a:xfrm>
           <a:prstGeom prst="roundRect">
             <a:avLst>
-              <a:gd name="adj" fmla="val 7273"/>
+              <a:gd name="adj" fmla="val 1818"/>
             </a:avLst>
           </a:prstGeom>
           <a:solidFill>
@@ -4739,986 +7200,196 @@
       </p:sp>
       <p:sp>
         <p:nvSpPr>
-          <p:cNvPr id="7" name="Shape 5"/>
-          <p:cNvSpPr/>
-          <p:nvPr/>
-        </p:nvSpPr>
-        <p:spPr>
-          <a:xfrm>
-            <a:off x="1188720" y="2487168"/>
-            <a:ext cx="566928" cy="502920"/>
-          </a:xfrm>
-          <a:prstGeom prst="roundRect">
-            <a:avLst>
-              <a:gd name="adj" fmla="val 7273"/>
-            </a:avLst>
-          </a:prstGeom>
-          <a:solidFill>
-            <a:srgbClr val="0E1116"/>
-          </a:solidFill>
-          <a:ln w="12700">
-            <a:solidFill>
-              <a:srgbClr val="2C3440"/>
-            </a:solidFill>
-            <a:prstDash val="solid"/>
-          </a:ln>
-        </p:spPr>
-      </p:sp>
-      <p:sp>
-        <p:nvSpPr>
-          <p:cNvPr id="8" name="Shape 6"/>
-          <p:cNvSpPr/>
-          <p:nvPr/>
-        </p:nvSpPr>
-        <p:spPr>
-          <a:xfrm>
-            <a:off x="1828800" y="2487168"/>
-            <a:ext cx="566928" cy="502920"/>
-          </a:xfrm>
-          <a:prstGeom prst="roundRect">
-            <a:avLst>
-              <a:gd name="adj" fmla="val 7273"/>
-            </a:avLst>
-          </a:prstGeom>
-          <a:solidFill>
-            <a:srgbClr val="0E1116"/>
-          </a:solidFill>
-          <a:ln w="12700">
-            <a:solidFill>
-              <a:srgbClr val="2C3440"/>
-            </a:solidFill>
-            <a:prstDash val="solid"/>
-          </a:ln>
-        </p:spPr>
-      </p:sp>
-      <p:sp>
-        <p:nvSpPr>
-          <p:cNvPr id="9" name="Shape 7"/>
-          <p:cNvSpPr/>
-          <p:nvPr/>
-        </p:nvSpPr>
-        <p:spPr>
-          <a:xfrm>
-            <a:off x="2468880" y="2487168"/>
-            <a:ext cx="566928" cy="502920"/>
-          </a:xfrm>
-          <a:prstGeom prst="roundRect">
-            <a:avLst>
-              <a:gd name="adj" fmla="val 7273"/>
-            </a:avLst>
-          </a:prstGeom>
-          <a:solidFill>
-            <a:srgbClr val="0E1116"/>
-          </a:solidFill>
-          <a:ln w="12700">
-            <a:solidFill>
-              <a:srgbClr val="2C3440"/>
-            </a:solidFill>
-            <a:prstDash val="solid"/>
-          </a:ln>
-        </p:spPr>
-      </p:sp>
-      <p:sp>
-        <p:nvSpPr>
-          <p:cNvPr id="10" name="Shape 8"/>
-          <p:cNvSpPr/>
-          <p:nvPr/>
-        </p:nvSpPr>
-        <p:spPr>
-          <a:xfrm>
-            <a:off x="3108960" y="2487168"/>
-            <a:ext cx="566928" cy="502920"/>
-          </a:xfrm>
-          <a:prstGeom prst="roundRect">
-            <a:avLst>
-              <a:gd name="adj" fmla="val 7273"/>
-            </a:avLst>
-          </a:prstGeom>
-          <a:solidFill>
-            <a:srgbClr val="0E1116"/>
-          </a:solidFill>
-          <a:ln w="12700">
-            <a:solidFill>
-              <a:srgbClr val="2C3440"/>
-            </a:solidFill>
-            <a:prstDash val="solid"/>
-          </a:ln>
-        </p:spPr>
-      </p:sp>
-      <p:sp>
-        <p:nvSpPr>
-          <p:cNvPr id="11" name="Shape 9"/>
-          <p:cNvSpPr/>
-          <p:nvPr/>
-        </p:nvSpPr>
-        <p:spPr>
-          <a:xfrm>
-            <a:off x="3749040" y="2487168"/>
-            <a:ext cx="566928" cy="502920"/>
-          </a:xfrm>
-          <a:prstGeom prst="roundRect">
-            <a:avLst>
-              <a:gd name="adj" fmla="val 7273"/>
-            </a:avLst>
-          </a:prstGeom>
-          <a:solidFill>
-            <a:srgbClr val="0E1116"/>
-          </a:solidFill>
-          <a:ln w="12700">
-            <a:solidFill>
-              <a:srgbClr val="2C3440"/>
-            </a:solidFill>
-            <a:prstDash val="solid"/>
-          </a:ln>
-        </p:spPr>
-      </p:sp>
-      <p:sp>
-        <p:nvSpPr>
-          <p:cNvPr id="12" name="Shape 10"/>
-          <p:cNvSpPr/>
-          <p:nvPr/>
-        </p:nvSpPr>
-        <p:spPr>
-          <a:xfrm>
-            <a:off x="4389120" y="2487168"/>
-            <a:ext cx="566928" cy="502920"/>
-          </a:xfrm>
-          <a:prstGeom prst="roundRect">
-            <a:avLst>
-              <a:gd name="adj" fmla="val 7273"/>
-            </a:avLst>
-          </a:prstGeom>
-          <a:solidFill>
-            <a:srgbClr val="0E1116"/>
-          </a:solidFill>
-          <a:ln w="12700">
-            <a:solidFill>
-              <a:srgbClr val="2C3440"/>
-            </a:solidFill>
-            <a:prstDash val="solid"/>
-          </a:ln>
-        </p:spPr>
-      </p:sp>
-      <p:sp>
-        <p:nvSpPr>
-          <p:cNvPr id="13" name="Shape 11"/>
-          <p:cNvSpPr/>
-          <p:nvPr/>
-        </p:nvSpPr>
-        <p:spPr>
-          <a:xfrm>
-            <a:off x="5029200" y="2487168"/>
-            <a:ext cx="566928" cy="502920"/>
-          </a:xfrm>
-          <a:prstGeom prst="roundRect">
-            <a:avLst>
-              <a:gd name="adj" fmla="val 7273"/>
-            </a:avLst>
-          </a:prstGeom>
-          <a:solidFill>
-            <a:srgbClr val="0E1116"/>
-          </a:solidFill>
-          <a:ln w="12700">
-            <a:solidFill>
-              <a:srgbClr val="2C3440"/>
-            </a:solidFill>
-            <a:prstDash val="solid"/>
-          </a:ln>
-        </p:spPr>
-      </p:sp>
-      <p:sp>
-        <p:nvSpPr>
-          <p:cNvPr id="14" name="Shape 12"/>
-          <p:cNvSpPr/>
-          <p:nvPr/>
-        </p:nvSpPr>
-        <p:spPr>
-          <a:xfrm>
-            <a:off x="5669280" y="2487168"/>
-            <a:ext cx="566928" cy="502920"/>
-          </a:xfrm>
-          <a:prstGeom prst="roundRect">
-            <a:avLst>
-              <a:gd name="adj" fmla="val 7273"/>
-            </a:avLst>
-          </a:prstGeom>
-          <a:solidFill>
-            <a:srgbClr val="0E1116"/>
-          </a:solidFill>
-          <a:ln w="12700">
-            <a:solidFill>
-              <a:srgbClr val="2C3440"/>
-            </a:solidFill>
-            <a:prstDash val="solid"/>
-          </a:ln>
-        </p:spPr>
-      </p:sp>
-      <p:sp>
-        <p:nvSpPr>
-          <p:cNvPr id="15" name="Shape 13"/>
-          <p:cNvSpPr/>
-          <p:nvPr/>
-        </p:nvSpPr>
-        <p:spPr>
-          <a:xfrm>
-            <a:off x="6309360" y="2487168"/>
-            <a:ext cx="566928" cy="502920"/>
-          </a:xfrm>
-          <a:prstGeom prst="roundRect">
-            <a:avLst>
-              <a:gd name="adj" fmla="val 7273"/>
-            </a:avLst>
-          </a:prstGeom>
-          <a:solidFill>
-            <a:srgbClr val="0E1116"/>
-          </a:solidFill>
-          <a:ln w="12700">
-            <a:solidFill>
-              <a:srgbClr val="2C3440"/>
-            </a:solidFill>
-            <a:prstDash val="solid"/>
-          </a:ln>
-        </p:spPr>
-      </p:sp>
-      <p:sp>
-        <p:nvSpPr>
-          <p:cNvPr id="16" name="Shape 14"/>
-          <p:cNvSpPr/>
-          <p:nvPr/>
-        </p:nvSpPr>
-        <p:spPr>
-          <a:xfrm>
-            <a:off x="6949440" y="2487168"/>
-            <a:ext cx="566928" cy="502920"/>
-          </a:xfrm>
-          <a:prstGeom prst="roundRect">
-            <a:avLst>
-              <a:gd name="adj" fmla="val 7273"/>
-            </a:avLst>
-          </a:prstGeom>
-          <a:solidFill>
-            <a:srgbClr val="0E1116"/>
-          </a:solidFill>
-          <a:ln w="12700">
-            <a:solidFill>
-              <a:srgbClr val="2C3440"/>
-            </a:solidFill>
-            <a:prstDash val="solid"/>
-          </a:ln>
-        </p:spPr>
-      </p:sp>
-      <p:sp>
-        <p:nvSpPr>
-          <p:cNvPr id="17" name="Shape 15"/>
-          <p:cNvSpPr/>
-          <p:nvPr/>
-        </p:nvSpPr>
-        <p:spPr>
-          <a:xfrm>
-            <a:off x="7589520" y="2487168"/>
-            <a:ext cx="566928" cy="502920"/>
-          </a:xfrm>
-          <a:prstGeom prst="roundRect">
-            <a:avLst>
-              <a:gd name="adj" fmla="val 7273"/>
-            </a:avLst>
-          </a:prstGeom>
-          <a:solidFill>
-            <a:srgbClr val="0E1116"/>
-          </a:solidFill>
-          <a:ln w="12700">
-            <a:solidFill>
-              <a:srgbClr val="2C3440"/>
-            </a:solidFill>
-            <a:prstDash val="solid"/>
-          </a:ln>
-        </p:spPr>
-      </p:sp>
-      <p:sp>
-        <p:nvSpPr>
-          <p:cNvPr id="18" name="Text 16"/>
-          <p:cNvSpPr/>
-          <p:nvPr/>
-        </p:nvSpPr>
-        <p:spPr>
-          <a:xfrm>
-            <a:off x="548640" y="2596896"/>
-            <a:ext cx="566928" cy="274320"/>
-          </a:xfrm>
-          <a:prstGeom prst="rect">
-            <a:avLst/>
-          </a:prstGeom>
-          <a:noFill/>
-          <a:ln/>
-        </p:spPr>
-        <p:txBody>
-          <a:bodyPr wrap="square" lIns="0" tIns="0" rIns="0" bIns="0" rtlCol="0" anchor="ctr"/>
-          <a:lstStyle/>
-          <a:p>
-            <a:pPr algn="ctr" indent="0" marL="0">
-              <a:buNone/>
-            </a:pPr>
-            <a:r>
-              <a:rPr lang="en-US" sz="1100" b="1" dirty="0">
-                <a:solidFill>
-                  <a:srgbClr val="8CC63F"/>
+          <p:cNvPr id="5" name="Text 3"/>
+          <p:cNvSpPr/>
+          <p:nvPr/>
+        </p:nvSpPr>
+        <p:spPr>
+          <a:xfrm>
+            <a:off x="749808" y="1700784"/>
+            <a:ext cx="10661904" cy="2724912"/>
+          </a:xfrm>
+          <a:prstGeom prst="rect">
+            <a:avLst/>
+          </a:prstGeom>
+          <a:noFill/>
+          <a:ln/>
+        </p:spPr>
+        <p:txBody>
+          <a:bodyPr wrap="square" lIns="0" tIns="0" rIns="0" bIns="0" rtlCol="0" anchor="t"/>
+          <a:lstStyle/>
+          <a:p>
+            <a:pPr algn="l" indent="0" marL="0">
+              <a:lnSpc>
+                <a:spcPct val="108000"/>
+              </a:lnSpc>
+              <a:buNone/>
+            </a:pPr>
+            <a:r>
+              <a:rPr lang="en-US" sz="1350" dirty="0">
+                <a:solidFill>
+                  <a:srgbClr val="9AA6B2"/>
                 </a:solidFill>
                 <a:latin typeface="Courier New" pitchFamily="34" charset="0"/>
                 <a:ea typeface="Courier New" pitchFamily="34" charset="-122"/>
                 <a:cs typeface="Courier New" pitchFamily="34" charset="-120"/>
               </a:rPr>
-              <a:t>T0</a:t>
-            </a:r>
-            <a:endParaRPr lang="en-US" sz="1100" dirty="0"/>
-          </a:p>
-        </p:txBody>
-      </p:sp>
-      <p:sp>
-        <p:nvSpPr>
-          <p:cNvPr id="19" name="Text 17"/>
-          <p:cNvSpPr/>
-          <p:nvPr/>
-        </p:nvSpPr>
-        <p:spPr>
-          <a:xfrm>
-            <a:off x="1188720" y="2596896"/>
-            <a:ext cx="566928" cy="274320"/>
-          </a:xfrm>
-          <a:prstGeom prst="rect">
-            <a:avLst/>
-          </a:prstGeom>
-          <a:noFill/>
-          <a:ln/>
-        </p:spPr>
-        <p:txBody>
-          <a:bodyPr wrap="square" lIns="0" tIns="0" rIns="0" bIns="0" rtlCol="0" anchor="ctr"/>
-          <a:lstStyle/>
-          <a:p>
-            <a:pPr algn="ctr" indent="0" marL="0">
-              <a:buNone/>
-            </a:pPr>
-            <a:r>
-              <a:rPr lang="en-US" sz="1100" b="1" dirty="0">
-                <a:solidFill>
-                  <a:srgbClr val="8CC63F"/>
+              <a:t>// test10_kernel_write   tests.cpp:1424</a:t>
+            </a:r>
+            <a:endParaRPr lang="en-US" sz="1350" dirty="0"/>
+          </a:p>
+          <a:p>
+            <a:pPr algn="l" indent="0" marL="0">
+              <a:lnSpc>
+                <a:spcPct val="108000"/>
+              </a:lnSpc>
+              <a:buNone/>
+            </a:pPr>
+            <a:r>
+              <a:rPr lang="en-US" sz="1350" dirty="0">
+                <a:solidFill>
+                  <a:srgbClr val="E8EDF2"/>
                 </a:solidFill>
                 <a:latin typeface="Courier New" pitchFamily="34" charset="0"/>
                 <a:ea typeface="Courier New" pitchFamily="34" charset="-122"/>
                 <a:cs typeface="Courier New" pitchFamily="34" charset="-120"/>
               </a:rPr>
-              <a:t>T1</a:t>
-            </a:r>
-            <a:endParaRPr lang="en-US" sz="1100" dirty="0"/>
-          </a:p>
-        </p:txBody>
-      </p:sp>
-      <p:sp>
-        <p:nvSpPr>
-          <p:cNvPr id="20" name="Text 18"/>
-          <p:cNvSpPr/>
-          <p:nvPr/>
-        </p:nvSpPr>
-        <p:spPr>
-          <a:xfrm>
-            <a:off x="1828800" y="2596896"/>
-            <a:ext cx="566928" cy="274320"/>
-          </a:xfrm>
-          <a:prstGeom prst="rect">
-            <a:avLst/>
-          </a:prstGeom>
-          <a:noFill/>
-          <a:ln/>
-        </p:spPr>
-        <p:txBody>
-          <a:bodyPr wrap="square" lIns="0" tIns="0" rIns="0" bIns="0" rtlCol="0" anchor="ctr"/>
-          <a:lstStyle/>
-          <a:p>
-            <a:pPr algn="ctr" indent="0" marL="0">
-              <a:buNone/>
-            </a:pPr>
-            <a:r>
-              <a:rPr lang="en-US" sz="1100" b="1" dirty="0">
-                <a:solidFill>
-                  <a:srgbClr val="8CC63F"/>
+              <a:t>int avenumber = memsize/(gridDim.x*gridDim.y); // 블록 하나가 맡을 바이트</a:t>
+            </a:r>
+            <a:endParaRPr lang="en-US" sz="1350" dirty="0"/>
+          </a:p>
+          <a:p>
+            <a:pPr algn="l" indent="0" marL="0">
+              <a:lnSpc>
+                <a:spcPct val="108000"/>
+              </a:lnSpc>
+              <a:buNone/>
+            </a:pPr>
+            <a:r>
+              <a:rPr lang="en-US" sz="1350" dirty="0">
+                <a:solidFill>
+                  <a:srgbClr val="E8EDF2"/>
                 </a:solidFill>
                 <a:latin typeface="Courier New" pitchFamily="34" charset="0"/>
                 <a:ea typeface="Courier New" pitchFamily="34" charset="-122"/>
                 <a:cs typeface="Courier New" pitchFamily="34" charset="-120"/>
               </a:rPr>
-              <a:t>T2</a:t>
-            </a:r>
-            <a:endParaRPr lang="en-US" sz="1100" dirty="0"/>
-          </a:p>
-        </p:txBody>
-      </p:sp>
-      <p:sp>
-        <p:nvSpPr>
-          <p:cNvPr id="21" name="Text 19"/>
-          <p:cNvSpPr/>
-          <p:nvPr/>
-        </p:nvSpPr>
-        <p:spPr>
-          <a:xfrm>
-            <a:off x="2468880" y="2596896"/>
-            <a:ext cx="566928" cy="274320"/>
-          </a:xfrm>
-          <a:prstGeom prst="rect">
-            <a:avLst/>
-          </a:prstGeom>
-          <a:noFill/>
-          <a:ln/>
-        </p:spPr>
-        <p:txBody>
-          <a:bodyPr wrap="square" lIns="0" tIns="0" rIns="0" bIns="0" rtlCol="0" anchor="ctr"/>
-          <a:lstStyle/>
-          <a:p>
-            <a:pPr algn="ctr" indent="0" marL="0">
-              <a:buNone/>
-            </a:pPr>
-            <a:r>
-              <a:rPr lang="en-US" sz="1100" b="1" dirty="0">
-                <a:solidFill>
-                  <a:srgbClr val="8CC63F"/>
+              <a:t>TYPE* mybuf = (TYPE*)(ptr + blockIdx.x*avenumber); // 이 블록의 시작</a:t>
+            </a:r>
+            <a:endParaRPr lang="en-US" sz="1350" dirty="0"/>
+          </a:p>
+          <a:p>
+            <a:pPr algn="l" indent="0" marL="0">
+              <a:lnSpc>
+                <a:spcPct val="108000"/>
+              </a:lnSpc>
+              <a:buNone/>
+            </a:pPr>
+            <a:r>
+              <a:rPr lang="en-US" sz="1350" dirty="0">
+                <a:solidFill>
+                  <a:srgbClr val="E8EDF2"/>
                 </a:solidFill>
                 <a:latin typeface="Courier New" pitchFamily="34" charset="0"/>
                 <a:ea typeface="Courier New" pitchFamily="34" charset="-122"/>
                 <a:cs typeface="Courier New" pitchFamily="34" charset="-120"/>
               </a:rPr>
-              <a:t>T3</a:t>
-            </a:r>
-            <a:endParaRPr lang="en-US" sz="1100" dirty="0"/>
-          </a:p>
-        </p:txBody>
-      </p:sp>
-      <p:sp>
-        <p:nvSpPr>
-          <p:cNvPr id="22" name="Text 20"/>
-          <p:cNvSpPr/>
-          <p:nvPr/>
-        </p:nvSpPr>
-        <p:spPr>
-          <a:xfrm>
-            <a:off x="548640" y="3410712"/>
-            <a:ext cx="11064240" cy="365760"/>
-          </a:xfrm>
-          <a:prstGeom prst="rect">
-            <a:avLst/>
-          </a:prstGeom>
-          <a:noFill/>
-          <a:ln/>
-        </p:spPr>
-        <p:txBody>
-          <a:bodyPr wrap="square" lIns="0" tIns="0" rIns="0" bIns="0" rtlCol="0" anchor="ctr"/>
-          <a:lstStyle/>
-          <a:p>
-            <a:pPr indent="0" marL="0">
-              <a:buNone/>
-            </a:pPr>
-            <a:r>
-              <a:rPr lang="en-US" sz="1500" b="1" dirty="0">
-                <a:solidFill>
-                  <a:srgbClr val="E0A458"/>
-                </a:solidFill>
-                <a:latin typeface="Malgun Gothic" pitchFamily="34" charset="0"/>
-                <a:ea typeface="Malgun Gothic" pitchFamily="34" charset="-122"/>
-                <a:cs typeface="Malgun Gothic" pitchFamily="34" charset="-120"/>
-              </a:rPr>
-              <a:t>✗ 비병합 (index = threadIdx.x*n + i) — 스레드가 멀리 흩어짐</a:t>
-            </a:r>
-            <a:endParaRPr lang="en-US" sz="1500" dirty="0"/>
-          </a:p>
-        </p:txBody>
-      </p:sp>
-      <p:sp>
-        <p:nvSpPr>
-          <p:cNvPr id="23" name="Shape 21"/>
-          <p:cNvSpPr/>
-          <p:nvPr/>
-        </p:nvSpPr>
-        <p:spPr>
-          <a:xfrm>
-            <a:off x="548640" y="3813048"/>
-            <a:ext cx="566928" cy="502920"/>
-          </a:xfrm>
-          <a:prstGeom prst="roundRect">
-            <a:avLst>
-              <a:gd name="adj" fmla="val 7273"/>
-            </a:avLst>
-          </a:prstGeom>
-          <a:solidFill>
-            <a:srgbClr val="0E1116"/>
-          </a:solidFill>
-          <a:ln w="12700">
-            <a:solidFill>
-              <a:srgbClr val="2C3440"/>
-            </a:solidFill>
-            <a:prstDash val="solid"/>
-          </a:ln>
-        </p:spPr>
-      </p:sp>
-      <p:sp>
-        <p:nvSpPr>
-          <p:cNvPr id="24" name="Shape 22"/>
-          <p:cNvSpPr/>
-          <p:nvPr/>
-        </p:nvSpPr>
-        <p:spPr>
-          <a:xfrm>
-            <a:off x="1188720" y="3813048"/>
-            <a:ext cx="566928" cy="502920"/>
-          </a:xfrm>
-          <a:prstGeom prst="roundRect">
-            <a:avLst>
-              <a:gd name="adj" fmla="val 7273"/>
-            </a:avLst>
-          </a:prstGeom>
-          <a:solidFill>
-            <a:srgbClr val="0E1116"/>
-          </a:solidFill>
-          <a:ln w="12700">
-            <a:solidFill>
-              <a:srgbClr val="2C3440"/>
-            </a:solidFill>
-            <a:prstDash val="solid"/>
-          </a:ln>
-        </p:spPr>
-      </p:sp>
-      <p:sp>
-        <p:nvSpPr>
-          <p:cNvPr id="25" name="Shape 23"/>
-          <p:cNvSpPr/>
-          <p:nvPr/>
-        </p:nvSpPr>
-        <p:spPr>
-          <a:xfrm>
-            <a:off x="1828800" y="3813048"/>
-            <a:ext cx="566928" cy="502920"/>
-          </a:xfrm>
-          <a:prstGeom prst="roundRect">
-            <a:avLst>
-              <a:gd name="adj" fmla="val 7273"/>
-            </a:avLst>
-          </a:prstGeom>
-          <a:solidFill>
-            <a:srgbClr val="0E1116"/>
-          </a:solidFill>
-          <a:ln w="12700">
-            <a:solidFill>
-              <a:srgbClr val="2C3440"/>
-            </a:solidFill>
-            <a:prstDash val="solid"/>
-          </a:ln>
-        </p:spPr>
-      </p:sp>
-      <p:sp>
-        <p:nvSpPr>
-          <p:cNvPr id="26" name="Shape 24"/>
-          <p:cNvSpPr/>
-          <p:nvPr/>
-        </p:nvSpPr>
-        <p:spPr>
-          <a:xfrm>
-            <a:off x="2468880" y="3813048"/>
-            <a:ext cx="566928" cy="502920"/>
-          </a:xfrm>
-          <a:prstGeom prst="roundRect">
-            <a:avLst>
-              <a:gd name="adj" fmla="val 7273"/>
-            </a:avLst>
-          </a:prstGeom>
-          <a:solidFill>
-            <a:srgbClr val="0E1116"/>
-          </a:solidFill>
-          <a:ln w="12700">
-            <a:solidFill>
-              <a:srgbClr val="2C3440"/>
-            </a:solidFill>
-            <a:prstDash val="solid"/>
-          </a:ln>
-        </p:spPr>
-      </p:sp>
-      <p:sp>
-        <p:nvSpPr>
-          <p:cNvPr id="27" name="Shape 25"/>
-          <p:cNvSpPr/>
-          <p:nvPr/>
-        </p:nvSpPr>
-        <p:spPr>
-          <a:xfrm>
-            <a:off x="3108960" y="3813048"/>
-            <a:ext cx="566928" cy="502920"/>
-          </a:xfrm>
-          <a:prstGeom prst="roundRect">
-            <a:avLst>
-              <a:gd name="adj" fmla="val 7273"/>
-            </a:avLst>
-          </a:prstGeom>
-          <a:solidFill>
-            <a:srgbClr val="0E1116"/>
-          </a:solidFill>
-          <a:ln w="12700">
-            <a:solidFill>
-              <a:srgbClr val="2C3440"/>
-            </a:solidFill>
-            <a:prstDash val="solid"/>
-          </a:ln>
-        </p:spPr>
-      </p:sp>
-      <p:sp>
-        <p:nvSpPr>
-          <p:cNvPr id="28" name="Shape 26"/>
-          <p:cNvSpPr/>
-          <p:nvPr/>
-        </p:nvSpPr>
-        <p:spPr>
-          <a:xfrm>
-            <a:off x="3749040" y="3813048"/>
-            <a:ext cx="566928" cy="502920"/>
-          </a:xfrm>
-          <a:prstGeom prst="roundRect">
-            <a:avLst>
-              <a:gd name="adj" fmla="val 7273"/>
-            </a:avLst>
-          </a:prstGeom>
-          <a:solidFill>
-            <a:srgbClr val="0E1116"/>
-          </a:solidFill>
-          <a:ln w="12700">
-            <a:solidFill>
-              <a:srgbClr val="2C3440"/>
-            </a:solidFill>
-            <a:prstDash val="solid"/>
-          </a:ln>
-        </p:spPr>
-      </p:sp>
-      <p:sp>
-        <p:nvSpPr>
-          <p:cNvPr id="29" name="Shape 27"/>
-          <p:cNvSpPr/>
-          <p:nvPr/>
-        </p:nvSpPr>
-        <p:spPr>
-          <a:xfrm>
-            <a:off x="4389120" y="3813048"/>
-            <a:ext cx="566928" cy="502920"/>
-          </a:xfrm>
-          <a:prstGeom prst="roundRect">
-            <a:avLst>
-              <a:gd name="adj" fmla="val 7273"/>
-            </a:avLst>
-          </a:prstGeom>
-          <a:solidFill>
-            <a:srgbClr val="0E1116"/>
-          </a:solidFill>
-          <a:ln w="12700">
-            <a:solidFill>
-              <a:srgbClr val="2C3440"/>
-            </a:solidFill>
-            <a:prstDash val="solid"/>
-          </a:ln>
-        </p:spPr>
-      </p:sp>
-      <p:sp>
-        <p:nvSpPr>
-          <p:cNvPr id="30" name="Shape 28"/>
-          <p:cNvSpPr/>
-          <p:nvPr/>
-        </p:nvSpPr>
-        <p:spPr>
-          <a:xfrm>
-            <a:off x="5029200" y="3813048"/>
-            <a:ext cx="566928" cy="502920"/>
-          </a:xfrm>
-          <a:prstGeom prst="roundRect">
-            <a:avLst>
-              <a:gd name="adj" fmla="val 7273"/>
-            </a:avLst>
-          </a:prstGeom>
-          <a:solidFill>
-            <a:srgbClr val="0E1116"/>
-          </a:solidFill>
-          <a:ln w="12700">
-            <a:solidFill>
-              <a:srgbClr val="2C3440"/>
-            </a:solidFill>
-            <a:prstDash val="solid"/>
-          </a:ln>
-        </p:spPr>
-      </p:sp>
-      <p:sp>
-        <p:nvSpPr>
-          <p:cNvPr id="31" name="Shape 29"/>
-          <p:cNvSpPr/>
-          <p:nvPr/>
-        </p:nvSpPr>
-        <p:spPr>
-          <a:xfrm>
-            <a:off x="5669280" y="3813048"/>
-            <a:ext cx="566928" cy="502920"/>
-          </a:xfrm>
-          <a:prstGeom prst="roundRect">
-            <a:avLst>
-              <a:gd name="adj" fmla="val 7273"/>
-            </a:avLst>
-          </a:prstGeom>
-          <a:solidFill>
-            <a:srgbClr val="0E1116"/>
-          </a:solidFill>
-          <a:ln w="12700">
-            <a:solidFill>
-              <a:srgbClr val="2C3440"/>
-            </a:solidFill>
-            <a:prstDash val="solid"/>
-          </a:ln>
-        </p:spPr>
-      </p:sp>
-      <p:sp>
-        <p:nvSpPr>
-          <p:cNvPr id="32" name="Shape 30"/>
-          <p:cNvSpPr/>
-          <p:nvPr/>
-        </p:nvSpPr>
-        <p:spPr>
-          <a:xfrm>
-            <a:off x="6309360" y="3813048"/>
-            <a:ext cx="566928" cy="502920"/>
-          </a:xfrm>
-          <a:prstGeom prst="roundRect">
-            <a:avLst>
-              <a:gd name="adj" fmla="val 7273"/>
-            </a:avLst>
-          </a:prstGeom>
-          <a:solidFill>
-            <a:srgbClr val="0E1116"/>
-          </a:solidFill>
-          <a:ln w="12700">
-            <a:solidFill>
-              <a:srgbClr val="2C3440"/>
-            </a:solidFill>
-            <a:prstDash val="solid"/>
-          </a:ln>
-        </p:spPr>
-      </p:sp>
-      <p:sp>
-        <p:nvSpPr>
-          <p:cNvPr id="33" name="Shape 31"/>
-          <p:cNvSpPr/>
-          <p:nvPr/>
-        </p:nvSpPr>
-        <p:spPr>
-          <a:xfrm>
-            <a:off x="6949440" y="3813048"/>
-            <a:ext cx="566928" cy="502920"/>
-          </a:xfrm>
-          <a:prstGeom prst="roundRect">
-            <a:avLst>
-              <a:gd name="adj" fmla="val 7273"/>
-            </a:avLst>
-          </a:prstGeom>
-          <a:solidFill>
-            <a:srgbClr val="0E1116"/>
-          </a:solidFill>
-          <a:ln w="12700">
-            <a:solidFill>
-              <a:srgbClr val="2C3440"/>
-            </a:solidFill>
-            <a:prstDash val="solid"/>
-          </a:ln>
-        </p:spPr>
-      </p:sp>
-      <p:sp>
-        <p:nvSpPr>
-          <p:cNvPr id="34" name="Shape 32"/>
-          <p:cNvSpPr/>
-          <p:nvPr/>
-        </p:nvSpPr>
-        <p:spPr>
-          <a:xfrm>
-            <a:off x="7589520" y="3813048"/>
-            <a:ext cx="566928" cy="502920"/>
-          </a:xfrm>
-          <a:prstGeom prst="roundRect">
-            <a:avLst>
-              <a:gd name="adj" fmla="val 7273"/>
-            </a:avLst>
-          </a:prstGeom>
-          <a:solidFill>
-            <a:srgbClr val="0E1116"/>
-          </a:solidFill>
-          <a:ln w="12700">
-            <a:solidFill>
-              <a:srgbClr val="2C3440"/>
-            </a:solidFill>
-            <a:prstDash val="solid"/>
-          </a:ln>
-        </p:spPr>
-      </p:sp>
-      <p:sp>
-        <p:nvSpPr>
-          <p:cNvPr id="35" name="Text 33"/>
-          <p:cNvSpPr/>
-          <p:nvPr/>
-        </p:nvSpPr>
-        <p:spPr>
-          <a:xfrm>
-            <a:off x="548640" y="3922776"/>
-            <a:ext cx="566928" cy="274320"/>
-          </a:xfrm>
-          <a:prstGeom prst="rect">
-            <a:avLst/>
-          </a:prstGeom>
-          <a:noFill/>
-          <a:ln/>
-        </p:spPr>
-        <p:txBody>
-          <a:bodyPr wrap="square" lIns="0" tIns="0" rIns="0" bIns="0" rtlCol="0" anchor="ctr"/>
-          <a:lstStyle/>
-          <a:p>
-            <a:pPr algn="ctr" indent="0" marL="0">
-              <a:buNone/>
-            </a:pPr>
-            <a:r>
-              <a:rPr lang="en-US" sz="1100" b="1" dirty="0">
-                <a:solidFill>
-                  <a:srgbClr val="E0A458"/>
+              <a:t>int n = avenumber/(blockDim.x*sizeof(TYPE));   // 스레드당 반복 횟수</a:t>
+            </a:r>
+            <a:endParaRPr lang="en-US" sz="1350" dirty="0"/>
+          </a:p>
+          <a:p>
+            <a:pPr algn="l" indent="0" marL="0">
+              <a:lnSpc>
+                <a:spcPct val="108000"/>
+              </a:lnSpc>
+              <a:buNone/>
+            </a:pPr>
+            <a:r>
+              <a:rPr lang="en-US" sz="1350" dirty="0">
+                <a:solidFill>
+                  <a:srgbClr val="E8EDF2"/>
                 </a:solidFill>
                 <a:latin typeface="Courier New" pitchFamily="34" charset="0"/>
                 <a:ea typeface="Courier New" pitchFamily="34" charset="-122"/>
                 <a:cs typeface="Courier New" pitchFamily="34" charset="-120"/>
               </a:rPr>
-              <a:t>T0</a:t>
-            </a:r>
-            <a:endParaRPr lang="en-US" sz="1100" dirty="0"/>
-          </a:p>
-        </p:txBody>
-      </p:sp>
-      <p:sp>
-        <p:nvSpPr>
-          <p:cNvPr id="36" name="Text 34"/>
-          <p:cNvSpPr/>
-          <p:nvPr/>
-        </p:nvSpPr>
-        <p:spPr>
-          <a:xfrm>
-            <a:off x="3108960" y="3922776"/>
-            <a:ext cx="566928" cy="274320"/>
-          </a:xfrm>
-          <a:prstGeom prst="rect">
-            <a:avLst/>
-          </a:prstGeom>
-          <a:noFill/>
-          <a:ln/>
-        </p:spPr>
-        <p:txBody>
-          <a:bodyPr wrap="square" lIns="0" tIns="0" rIns="0" bIns="0" rtlCol="0" anchor="ctr"/>
-          <a:lstStyle/>
-          <a:p>
-            <a:pPr algn="ctr" indent="0" marL="0">
-              <a:buNone/>
-            </a:pPr>
-            <a:r>
-              <a:rPr lang="en-US" sz="1100" b="1" dirty="0">
-                <a:solidFill>
-                  <a:srgbClr val="E0A458"/>
+              <a:t>for (i = 0; i &lt; n; i++){</a:t>
+            </a:r>
+            <a:endParaRPr lang="en-US" sz="1350" dirty="0"/>
+          </a:p>
+          <a:p>
+            <a:pPr algn="l" indent="0" marL="0">
+              <a:lnSpc>
+                <a:spcPct val="108000"/>
+              </a:lnSpc>
+              <a:buNone/>
+            </a:pPr>
+            <a:r>
+              <a:rPr lang="en-US" sz="1350" dirty="0">
+                <a:solidFill>
+                  <a:srgbClr val="8CC63F"/>
                 </a:solidFill>
                 <a:latin typeface="Courier New" pitchFamily="34" charset="0"/>
                 <a:ea typeface="Courier New" pitchFamily="34" charset="-122"/>
                 <a:cs typeface="Courier New" pitchFamily="34" charset="-120"/>
               </a:rPr>
-              <a:t>T1</a:t>
-            </a:r>
-            <a:endParaRPr lang="en-US" sz="1100" dirty="0"/>
-          </a:p>
-        </p:txBody>
-      </p:sp>
-      <p:sp>
-        <p:nvSpPr>
-          <p:cNvPr id="37" name="Text 35"/>
-          <p:cNvSpPr/>
-          <p:nvPr/>
-        </p:nvSpPr>
-        <p:spPr>
-          <a:xfrm>
-            <a:off x="5669280" y="3922776"/>
-            <a:ext cx="566928" cy="274320"/>
-          </a:xfrm>
-          <a:prstGeom prst="rect">
-            <a:avLst/>
-          </a:prstGeom>
-          <a:noFill/>
-          <a:ln/>
-        </p:spPr>
-        <p:txBody>
-          <a:bodyPr wrap="square" lIns="0" tIns="0" rIns="0" bIns="0" rtlCol="0" anchor="ctr"/>
-          <a:lstStyle/>
-          <a:p>
-            <a:pPr algn="ctr" indent="0" marL="0">
-              <a:buNone/>
-            </a:pPr>
-            <a:r>
-              <a:rPr lang="en-US" sz="1100" b="1" dirty="0">
-                <a:solidFill>
-                  <a:srgbClr val="E0A458"/>
+              <a:t>    int index = i*blockDim.x + threadIdx.x;   // ★ 이웃 스레드 = 이웃 주소</a:t>
+            </a:r>
+            <a:endParaRPr lang="en-US" sz="1350" dirty="0"/>
+          </a:p>
+          <a:p>
+            <a:pPr algn="l" indent="0" marL="0">
+              <a:lnSpc>
+                <a:spcPct val="108000"/>
+              </a:lnSpc>
+              <a:buNone/>
+            </a:pPr>
+            <a:r>
+              <a:rPr lang="en-US" sz="1350" dirty="0">
+                <a:solidFill>
+                  <a:srgbClr val="E8EDF2"/>
                 </a:solidFill>
                 <a:latin typeface="Courier New" pitchFamily="34" charset="0"/>
                 <a:ea typeface="Courier New" pitchFamily="34" charset="-122"/>
                 <a:cs typeface="Courier New" pitchFamily="34" charset="-120"/>
               </a:rPr>
-              <a:t>T2</a:t>
-            </a:r>
-            <a:endParaRPr lang="en-US" sz="1100" dirty="0"/>
-          </a:p>
-        </p:txBody>
-      </p:sp>
-      <p:sp>
-        <p:nvSpPr>
-          <p:cNvPr id="38" name="Text 36"/>
-          <p:cNvSpPr/>
-          <p:nvPr/>
-        </p:nvSpPr>
-        <p:spPr>
-          <a:xfrm>
-            <a:off x="7589520" y="3922776"/>
-            <a:ext cx="566928" cy="274320"/>
-          </a:xfrm>
-          <a:prstGeom prst="rect">
-            <a:avLst/>
-          </a:prstGeom>
-          <a:noFill/>
-          <a:ln/>
-        </p:spPr>
-        <p:txBody>
-          <a:bodyPr wrap="square" lIns="0" tIns="0" rIns="0" bIns="0" rtlCol="0" anchor="ctr"/>
-          <a:lstStyle/>
-          <a:p>
-            <a:pPr algn="ctr" indent="0" marL="0">
-              <a:buNone/>
-            </a:pPr>
-            <a:r>
-              <a:rPr lang="en-US" sz="1100" b="1" dirty="0">
-                <a:solidFill>
-                  <a:srgbClr val="E0A458"/>
+              <a:t>    mybuf[index] = p1;</a:t>
+            </a:r>
+            <a:endParaRPr lang="en-US" sz="1350" dirty="0"/>
+          </a:p>
+          <a:p>
+            <a:pPr algn="l" indent="0" marL="0">
+              <a:lnSpc>
+                <a:spcPct val="108000"/>
+              </a:lnSpc>
+              <a:buNone/>
+            </a:pPr>
+            <a:r>
+              <a:rPr lang="en-US" sz="1350" dirty="0">
+                <a:solidFill>
+                  <a:srgbClr val="E8EDF2"/>
                 </a:solidFill>
                 <a:latin typeface="Courier New" pitchFamily="34" charset="0"/>
                 <a:ea typeface="Courier New" pitchFamily="34" charset="-122"/>
                 <a:cs typeface="Courier New" pitchFamily="34" charset="-120"/>
               </a:rPr>
-              <a:t>T3</a:t>
-            </a:r>
-            <a:endParaRPr lang="en-US" sz="1100" dirty="0"/>
-          </a:p>
-        </p:txBody>
-      </p:sp>
-      <p:sp>
-        <p:nvSpPr>
-          <p:cNvPr id="39" name="Text 37"/>
-          <p:cNvSpPr/>
-          <p:nvPr/>
-        </p:nvSpPr>
-        <p:spPr>
-          <a:xfrm>
-            <a:off x="548640" y="4709160"/>
-            <a:ext cx="5349240" cy="1097280"/>
+              <a:t>}</a:t>
+            </a:r>
+            <a:endParaRPr lang="en-US" sz="1350" dirty="0"/>
+          </a:p>
+        </p:txBody>
+      </p:sp>
+      <p:sp>
+        <p:nvSpPr>
+          <p:cNvPr id="6" name="Text 4"/>
+          <p:cNvSpPr/>
+          <p:nvPr/>
+        </p:nvSpPr>
+        <p:spPr>
+          <a:xfrm>
+            <a:off x="548640" y="4754880"/>
+            <a:ext cx="11064240" cy="640080"/>
           </a:xfrm>
           <a:prstGeom prst="rect">
             <a:avLst/>
@@ -5730,33 +7401,11 @@
           <a:bodyPr wrap="square" lIns="0" tIns="0" rIns="0" bIns="0" rtlCol="0" anchor="t"/>
           <a:lstStyle/>
           <a:p>
-            <a:pPr marL="342900" indent="-342900">
-              <a:spcAft>
-                <a:spcPts val="800"/>
-              </a:spcAft>
-              <a:buSzPct val="100000"/>
-              <a:buChar char="•"/>
-            </a:pPr>
-            <a:r>
-              <a:rPr lang="en-US" sz="1550" dirty="0">
-                <a:solidFill>
-                  <a:srgbClr val="8CC63F"/>
-                </a:solidFill>
-                <a:latin typeface="Malgun Gothic" pitchFamily="34" charset="0"/>
-                <a:ea typeface="Malgun Gothic" pitchFamily="34" charset="-122"/>
-                <a:cs typeface="Malgun Gothic" pitchFamily="34" charset="-120"/>
-              </a:rPr>
-              <a:t>병합 → 큰 전송 1번 → 대역폭 최대</a:t>
-            </a:r>
-            <a:endParaRPr lang="en-US" sz="1550" dirty="0"/>
-          </a:p>
-          <a:p>
-            <a:pPr marL="342900" indent="-342900">
-              <a:buSzPct val="100000"/>
-              <a:buChar char="•"/>
-            </a:pPr>
-            <a:r>
-              <a:rPr lang="en-US" sz="1550" dirty="0">
+            <a:pPr indent="0" marL="0">
+              <a:buNone/>
+            </a:pPr>
+            <a:r>
+              <a:rPr lang="en-US" sz="1700" dirty="0">
                 <a:solidFill>
                   <a:srgbClr val="E8EDF2"/>
                 </a:solidFill>
@@ -5764,60 +7413,27 @@
                 <a:ea typeface="Malgun Gothic" pitchFamily="34" charset="-122"/>
                 <a:cs typeface="Malgun Gothic" pitchFamily="34" charset="-120"/>
               </a:rPr>
-              <a:t>이웃 스레드가 이웃 주소를 읽음</a:t>
-            </a:r>
-            <a:endParaRPr lang="en-US" sz="1550" dirty="0"/>
-          </a:p>
-        </p:txBody>
-      </p:sp>
-      <p:sp>
-        <p:nvSpPr>
-          <p:cNvPr id="40" name="Text 38"/>
-          <p:cNvSpPr/>
-          <p:nvPr/>
-        </p:nvSpPr>
-        <p:spPr>
-          <a:xfrm>
-            <a:off x="6263640" y="4709160"/>
-            <a:ext cx="5349240" cy="1097280"/>
-          </a:xfrm>
-          <a:prstGeom prst="rect">
-            <a:avLst/>
-          </a:prstGeom>
-          <a:noFill/>
-          <a:ln/>
-        </p:spPr>
-        <p:txBody>
-          <a:bodyPr wrap="square" lIns="0" tIns="0" rIns="0" bIns="0" rtlCol="0" anchor="t"/>
-          <a:lstStyle/>
-          <a:p>
-            <a:pPr marL="342900" indent="-342900">
-              <a:spcAft>
-                <a:spcPts val="800"/>
-              </a:spcAft>
-              <a:buSzPct val="100000"/>
-              <a:buChar char="•"/>
-            </a:pPr>
-            <a:r>
-              <a:rPr lang="en-US" sz="1550" dirty="0">
-                <a:solidFill>
-                  <a:srgbClr val="E0A458"/>
-                </a:solidFill>
-                <a:latin typeface="Malgun Gothic" pitchFamily="34" charset="0"/>
-                <a:ea typeface="Malgun Gothic" pitchFamily="34" charset="-122"/>
-                <a:cs typeface="Malgun Gothic" pitchFamily="34" charset="-120"/>
-              </a:rPr>
-              <a:t>비병합 → 작은 전송 여러 번 → 급락</a:t>
-            </a:r>
-            <a:endParaRPr lang="en-US" sz="1550" dirty="0"/>
-          </a:p>
-          <a:p>
-            <a:pPr marL="342900" indent="-342900">
-              <a:buSzPct val="100000"/>
-              <a:buChar char="•"/>
-            </a:pPr>
-            <a:r>
-              <a:rPr lang="en-US" sz="1550" dirty="0">
+              <a:t>여기서 처음으로 </a:t>
+            </a:r>
+            <a:pPr indent="0" marL="0">
+              <a:buNone/>
+            </a:pPr>
+            <a:r>
+              <a:rPr lang="en-US" sz="1700" b="1" dirty="0">
+                <a:solidFill>
+                  <a:srgbClr val="4FB0C6"/>
+                </a:solidFill>
+                <a:latin typeface="Malgun Gothic" pitchFamily="34" charset="0"/>
+                <a:ea typeface="Malgun Gothic" pitchFamily="34" charset="-122"/>
+                <a:cs typeface="Malgun Gothic" pitchFamily="34" charset="-120"/>
+              </a:rPr>
+              <a:t>threadIdx.x · blockDim.x</a:t>
+            </a:r>
+            <a:pPr indent="0" marL="0">
+              <a:buNone/>
+            </a:pPr>
+            <a:r>
+              <a:rPr lang="en-US" sz="1700" dirty="0">
                 <a:solidFill>
                   <a:srgbClr val="E8EDF2"/>
                 </a:solidFill>
@@ -5825,9 +7441,48 @@
                 <a:ea typeface="Malgun Gothic" pitchFamily="34" charset="-122"/>
                 <a:cs typeface="Malgun Gothic" pitchFamily="34" charset="-120"/>
               </a:rPr>
-              <a:t>실습 4에서 직접 깨뜨려 측정합니다</a:t>
-            </a:r>
-            <a:endParaRPr lang="en-US" sz="1550" dirty="0"/>
+              <a:t>가 등장합니다. 세션 1의 커널엔 없었죠(스레드가 1개였으니까).</a:t>
+            </a:r>
+            <a:endParaRPr lang="en-US" sz="1700" dirty="0"/>
+          </a:p>
+        </p:txBody>
+      </p:sp>
+      <p:sp>
+        <p:nvSpPr>
+          <p:cNvPr id="7" name="Text 5"/>
+          <p:cNvSpPr/>
+          <p:nvPr/>
+        </p:nvSpPr>
+        <p:spPr>
+          <a:xfrm>
+            <a:off x="548640" y="5532120"/>
+            <a:ext cx="11064240" cy="457200"/>
+          </a:xfrm>
+          <a:prstGeom prst="rect">
+            <a:avLst/>
+          </a:prstGeom>
+          <a:noFill/>
+          <a:ln/>
+        </p:spPr>
+        <p:txBody>
+          <a:bodyPr wrap="square" lIns="0" tIns="0" rIns="0" bIns="0" rtlCol="0" anchor="ctr"/>
+          <a:lstStyle/>
+          <a:p>
+            <a:pPr indent="0" marL="0">
+              <a:buNone/>
+            </a:pPr>
+            <a:r>
+              <a:rPr lang="en-US" sz="1400" i="1" dirty="0">
+                <a:solidFill>
+                  <a:srgbClr val="9AA6B2"/>
+                </a:solidFill>
+                <a:latin typeface="Malgun Gothic" pitchFamily="34" charset="0"/>
+                <a:ea typeface="Malgun Gothic" pitchFamily="34" charset="-122"/>
+                <a:cs typeface="Malgun Gothic" pitchFamily="34" charset="-120"/>
+              </a:rPr>
+              <a:t>TYPE = unsigned long (8바이트). blockIdx로 블록의 구역을, threadIdx로 그 안의 위치를 정합니다.</a:t>
+            </a:r>
+            <a:endParaRPr lang="en-US" sz="1400" dirty="0"/>
           </a:p>
         </p:txBody>
       </p:sp>
@@ -5900,7 +7555,7 @@
                 <a:ea typeface="Courier New" pitchFamily="34" charset="-122"/>
                 <a:cs typeface="Courier New" pitchFamily="34" charset="-120"/>
               </a:rPr>
-              <a:t>5</a:t>
+              <a:t>4</a:t>
             </a:r>
             <a:endParaRPr lang="en-US" sz="2200" dirty="0"/>
           </a:p>
@@ -5939,7 +7594,7 @@
                 <a:ea typeface="Malgun Gothic" pitchFamily="34" charset="-122"/>
                 <a:cs typeface="Malgun Gothic" pitchFamily="34" charset="-120"/>
               </a:rPr>
-              <a:t>CUDA 이벤트로 시간 재기</a:t>
+              <a:t>메모리 병합(coalescing)</a:t>
             </a:r>
             <a:endParaRPr lang="en-US" sz="3000" dirty="0"/>
           </a:p>
@@ -5947,18 +7602,96 @@
       </p:sp>
       <p:sp>
         <p:nvSpPr>
-          <p:cNvPr id="4" name="Shape 2"/>
-          <p:cNvSpPr/>
-          <p:nvPr/>
-        </p:nvSpPr>
-        <p:spPr>
-          <a:xfrm>
-            <a:off x="548640" y="1554480"/>
-            <a:ext cx="11064240" cy="2743200"/>
+          <p:cNvPr id="4" name="Text 2"/>
+          <p:cNvSpPr/>
+          <p:nvPr/>
+        </p:nvSpPr>
+        <p:spPr>
+          <a:xfrm>
+            <a:off x="548640" y="1417320"/>
+            <a:ext cx="11064240" cy="548640"/>
+          </a:xfrm>
+          <a:prstGeom prst="rect">
+            <a:avLst/>
+          </a:prstGeom>
+          <a:noFill/>
+          <a:ln/>
+        </p:spPr>
+        <p:txBody>
+          <a:bodyPr wrap="square" lIns="0" tIns="0" rIns="0" bIns="0" rtlCol="0" anchor="t"/>
+          <a:lstStyle/>
+          <a:p>
+            <a:pPr indent="0" marL="0">
+              <a:buNone/>
+            </a:pPr>
+            <a:r>
+              <a:rPr lang="en-US" sz="1600" dirty="0">
+                <a:solidFill>
+                  <a:srgbClr val="9AA6B2"/>
+                </a:solidFill>
+                <a:latin typeface="Malgun Gothic" pitchFamily="34" charset="0"/>
+                <a:ea typeface="Malgun Gothic" pitchFamily="34" charset="-122"/>
+                <a:cs typeface="Malgun Gothic" pitchFamily="34" charset="-120"/>
+              </a:rPr>
+              <a:t>한 워프(warp, 32스레드)가 접근하는 주소가 서로 붙어 있으면, 하드웨어가 하나의 큰 전송으로 묶습니다.</a:t>
+            </a:r>
+            <a:endParaRPr lang="en-US" sz="1600" dirty="0"/>
+          </a:p>
+        </p:txBody>
+      </p:sp>
+      <p:sp>
+        <p:nvSpPr>
+          <p:cNvPr id="5" name="Text 3"/>
+          <p:cNvSpPr/>
+          <p:nvPr/>
+        </p:nvSpPr>
+        <p:spPr>
+          <a:xfrm>
+            <a:off x="548640" y="2084832"/>
+            <a:ext cx="11064240" cy="365760"/>
+          </a:xfrm>
+          <a:prstGeom prst="rect">
+            <a:avLst/>
+          </a:prstGeom>
+          <a:noFill/>
+          <a:ln/>
+        </p:spPr>
+        <p:txBody>
+          <a:bodyPr wrap="square" lIns="0" tIns="0" rIns="0" bIns="0" rtlCol="0" anchor="ctr"/>
+          <a:lstStyle/>
+          <a:p>
+            <a:pPr indent="0" marL="0">
+              <a:buNone/>
+            </a:pPr>
+            <a:r>
+              <a:rPr lang="en-US" sz="1500" b="1" dirty="0">
+                <a:solidFill>
+                  <a:srgbClr val="8CC63F"/>
+                </a:solidFill>
+                <a:latin typeface="Malgun Gothic" pitchFamily="34" charset="0"/>
+                <a:ea typeface="Malgun Gothic" pitchFamily="34" charset="-122"/>
+                <a:cs typeface="Malgun Gothic" pitchFamily="34" charset="-120"/>
+              </a:rPr>
+              <a:t>✓ 병합됨 (index = i*blockDim.x + threadIdx.x)</a:t>
+            </a:r>
+            <a:endParaRPr lang="en-US" sz="1500" dirty="0"/>
+          </a:p>
+        </p:txBody>
+      </p:sp>
+      <p:sp>
+        <p:nvSpPr>
+          <p:cNvPr id="6" name="Shape 4"/>
+          <p:cNvSpPr/>
+          <p:nvPr/>
+        </p:nvSpPr>
+        <p:spPr>
+          <a:xfrm>
+            <a:off x="548640" y="2487168"/>
+            <a:ext cx="566928" cy="502920"/>
           </a:xfrm>
           <a:prstGeom prst="roundRect">
             <a:avLst>
-              <a:gd name="adj" fmla="val 2000"/>
+              <a:gd name="adj" fmla="val 7273"/>
             </a:avLst>
           </a:prstGeom>
           <a:solidFill>
@@ -5974,73 +7707,405 @@
       </p:sp>
       <p:sp>
         <p:nvSpPr>
-          <p:cNvPr id="5" name="Text 3"/>
-          <p:cNvSpPr/>
-          <p:nvPr/>
-        </p:nvSpPr>
-        <p:spPr>
-          <a:xfrm>
-            <a:off x="749808" y="1700784"/>
-            <a:ext cx="10661904" cy="2450592"/>
-          </a:xfrm>
-          <a:prstGeom prst="rect">
-            <a:avLst/>
-          </a:prstGeom>
-          <a:noFill/>
-          <a:ln/>
-        </p:spPr>
-        <p:txBody>
-          <a:bodyPr wrap="square" lIns="0" tIns="0" rIns="0" bIns="0" rtlCol="0" anchor="t"/>
-          <a:lstStyle/>
-          <a:p>
-            <a:pPr algn="l" indent="0" marL="0">
-              <a:lnSpc>
-                <a:spcPct val="108000"/>
-              </a:lnSpc>
-              <a:buNone/>
-            </a:pPr>
-            <a:r>
-              <a:rPr lang="en-US" sz="1300" dirty="0">
-                <a:solidFill>
-                  <a:srgbClr val="9AA6B2"/>
+          <p:cNvPr id="7" name="Shape 5"/>
+          <p:cNvSpPr/>
+          <p:nvPr/>
+        </p:nvSpPr>
+        <p:spPr>
+          <a:xfrm>
+            <a:off x="1188720" y="2487168"/>
+            <a:ext cx="566928" cy="502920"/>
+          </a:xfrm>
+          <a:prstGeom prst="roundRect">
+            <a:avLst>
+              <a:gd name="adj" fmla="val 7273"/>
+            </a:avLst>
+          </a:prstGeom>
+          <a:solidFill>
+            <a:srgbClr val="0E1116"/>
+          </a:solidFill>
+          <a:ln w="12700">
+            <a:solidFill>
+              <a:srgbClr val="2C3440"/>
+            </a:solidFill>
+            <a:prstDash val="solid"/>
+          </a:ln>
+        </p:spPr>
+      </p:sp>
+      <p:sp>
+        <p:nvSpPr>
+          <p:cNvPr id="8" name="Shape 6"/>
+          <p:cNvSpPr/>
+          <p:nvPr/>
+        </p:nvSpPr>
+        <p:spPr>
+          <a:xfrm>
+            <a:off x="1828800" y="2487168"/>
+            <a:ext cx="566928" cy="502920"/>
+          </a:xfrm>
+          <a:prstGeom prst="roundRect">
+            <a:avLst>
+              <a:gd name="adj" fmla="val 7273"/>
+            </a:avLst>
+          </a:prstGeom>
+          <a:solidFill>
+            <a:srgbClr val="0E1116"/>
+          </a:solidFill>
+          <a:ln w="12700">
+            <a:solidFill>
+              <a:srgbClr val="2C3440"/>
+            </a:solidFill>
+            <a:prstDash val="solid"/>
+          </a:ln>
+        </p:spPr>
+      </p:sp>
+      <p:sp>
+        <p:nvSpPr>
+          <p:cNvPr id="9" name="Shape 7"/>
+          <p:cNvSpPr/>
+          <p:nvPr/>
+        </p:nvSpPr>
+        <p:spPr>
+          <a:xfrm>
+            <a:off x="2468880" y="2487168"/>
+            <a:ext cx="566928" cy="502920"/>
+          </a:xfrm>
+          <a:prstGeom prst="roundRect">
+            <a:avLst>
+              <a:gd name="adj" fmla="val 7273"/>
+            </a:avLst>
+          </a:prstGeom>
+          <a:solidFill>
+            <a:srgbClr val="0E1116"/>
+          </a:solidFill>
+          <a:ln w="12700">
+            <a:solidFill>
+              <a:srgbClr val="2C3440"/>
+            </a:solidFill>
+            <a:prstDash val="solid"/>
+          </a:ln>
+        </p:spPr>
+      </p:sp>
+      <p:sp>
+        <p:nvSpPr>
+          <p:cNvPr id="10" name="Shape 8"/>
+          <p:cNvSpPr/>
+          <p:nvPr/>
+        </p:nvSpPr>
+        <p:spPr>
+          <a:xfrm>
+            <a:off x="3108960" y="2487168"/>
+            <a:ext cx="566928" cy="502920"/>
+          </a:xfrm>
+          <a:prstGeom prst="roundRect">
+            <a:avLst>
+              <a:gd name="adj" fmla="val 7273"/>
+            </a:avLst>
+          </a:prstGeom>
+          <a:solidFill>
+            <a:srgbClr val="0E1116"/>
+          </a:solidFill>
+          <a:ln w="12700">
+            <a:solidFill>
+              <a:srgbClr val="2C3440"/>
+            </a:solidFill>
+            <a:prstDash val="solid"/>
+          </a:ln>
+        </p:spPr>
+      </p:sp>
+      <p:sp>
+        <p:nvSpPr>
+          <p:cNvPr id="11" name="Shape 9"/>
+          <p:cNvSpPr/>
+          <p:nvPr/>
+        </p:nvSpPr>
+        <p:spPr>
+          <a:xfrm>
+            <a:off x="3749040" y="2487168"/>
+            <a:ext cx="566928" cy="502920"/>
+          </a:xfrm>
+          <a:prstGeom prst="roundRect">
+            <a:avLst>
+              <a:gd name="adj" fmla="val 7273"/>
+            </a:avLst>
+          </a:prstGeom>
+          <a:solidFill>
+            <a:srgbClr val="0E1116"/>
+          </a:solidFill>
+          <a:ln w="12700">
+            <a:solidFill>
+              <a:srgbClr val="2C3440"/>
+            </a:solidFill>
+            <a:prstDash val="solid"/>
+          </a:ln>
+        </p:spPr>
+      </p:sp>
+      <p:sp>
+        <p:nvSpPr>
+          <p:cNvPr id="12" name="Shape 10"/>
+          <p:cNvSpPr/>
+          <p:nvPr/>
+        </p:nvSpPr>
+        <p:spPr>
+          <a:xfrm>
+            <a:off x="4389120" y="2487168"/>
+            <a:ext cx="566928" cy="502920"/>
+          </a:xfrm>
+          <a:prstGeom prst="roundRect">
+            <a:avLst>
+              <a:gd name="adj" fmla="val 7273"/>
+            </a:avLst>
+          </a:prstGeom>
+          <a:solidFill>
+            <a:srgbClr val="0E1116"/>
+          </a:solidFill>
+          <a:ln w="12700">
+            <a:solidFill>
+              <a:srgbClr val="2C3440"/>
+            </a:solidFill>
+            <a:prstDash val="solid"/>
+          </a:ln>
+        </p:spPr>
+      </p:sp>
+      <p:sp>
+        <p:nvSpPr>
+          <p:cNvPr id="13" name="Shape 11"/>
+          <p:cNvSpPr/>
+          <p:nvPr/>
+        </p:nvSpPr>
+        <p:spPr>
+          <a:xfrm>
+            <a:off x="5029200" y="2487168"/>
+            <a:ext cx="566928" cy="502920"/>
+          </a:xfrm>
+          <a:prstGeom prst="roundRect">
+            <a:avLst>
+              <a:gd name="adj" fmla="val 7273"/>
+            </a:avLst>
+          </a:prstGeom>
+          <a:solidFill>
+            <a:srgbClr val="0E1116"/>
+          </a:solidFill>
+          <a:ln w="12700">
+            <a:solidFill>
+              <a:srgbClr val="2C3440"/>
+            </a:solidFill>
+            <a:prstDash val="solid"/>
+          </a:ln>
+        </p:spPr>
+      </p:sp>
+      <p:sp>
+        <p:nvSpPr>
+          <p:cNvPr id="14" name="Shape 12"/>
+          <p:cNvSpPr/>
+          <p:nvPr/>
+        </p:nvSpPr>
+        <p:spPr>
+          <a:xfrm>
+            <a:off x="5669280" y="2487168"/>
+            <a:ext cx="566928" cy="502920"/>
+          </a:xfrm>
+          <a:prstGeom prst="roundRect">
+            <a:avLst>
+              <a:gd name="adj" fmla="val 7273"/>
+            </a:avLst>
+          </a:prstGeom>
+          <a:solidFill>
+            <a:srgbClr val="0E1116"/>
+          </a:solidFill>
+          <a:ln w="12700">
+            <a:solidFill>
+              <a:srgbClr val="2C3440"/>
+            </a:solidFill>
+            <a:prstDash val="solid"/>
+          </a:ln>
+        </p:spPr>
+      </p:sp>
+      <p:sp>
+        <p:nvSpPr>
+          <p:cNvPr id="15" name="Shape 13"/>
+          <p:cNvSpPr/>
+          <p:nvPr/>
+        </p:nvSpPr>
+        <p:spPr>
+          <a:xfrm>
+            <a:off x="6309360" y="2487168"/>
+            <a:ext cx="566928" cy="502920"/>
+          </a:xfrm>
+          <a:prstGeom prst="roundRect">
+            <a:avLst>
+              <a:gd name="adj" fmla="val 7273"/>
+            </a:avLst>
+          </a:prstGeom>
+          <a:solidFill>
+            <a:srgbClr val="0E1116"/>
+          </a:solidFill>
+          <a:ln w="12700">
+            <a:solidFill>
+              <a:srgbClr val="2C3440"/>
+            </a:solidFill>
+            <a:prstDash val="solid"/>
+          </a:ln>
+        </p:spPr>
+      </p:sp>
+      <p:sp>
+        <p:nvSpPr>
+          <p:cNvPr id="16" name="Shape 14"/>
+          <p:cNvSpPr/>
+          <p:nvPr/>
+        </p:nvSpPr>
+        <p:spPr>
+          <a:xfrm>
+            <a:off x="6949440" y="2487168"/>
+            <a:ext cx="566928" cy="502920"/>
+          </a:xfrm>
+          <a:prstGeom prst="roundRect">
+            <a:avLst>
+              <a:gd name="adj" fmla="val 7273"/>
+            </a:avLst>
+          </a:prstGeom>
+          <a:solidFill>
+            <a:srgbClr val="0E1116"/>
+          </a:solidFill>
+          <a:ln w="12700">
+            <a:solidFill>
+              <a:srgbClr val="2C3440"/>
+            </a:solidFill>
+            <a:prstDash val="solid"/>
+          </a:ln>
+        </p:spPr>
+      </p:sp>
+      <p:sp>
+        <p:nvSpPr>
+          <p:cNvPr id="17" name="Shape 15"/>
+          <p:cNvSpPr/>
+          <p:nvPr/>
+        </p:nvSpPr>
+        <p:spPr>
+          <a:xfrm>
+            <a:off x="7589520" y="2487168"/>
+            <a:ext cx="566928" cy="502920"/>
+          </a:xfrm>
+          <a:prstGeom prst="roundRect">
+            <a:avLst>
+              <a:gd name="adj" fmla="val 7273"/>
+            </a:avLst>
+          </a:prstGeom>
+          <a:solidFill>
+            <a:srgbClr val="0E1116"/>
+          </a:solidFill>
+          <a:ln w="12700">
+            <a:solidFill>
+              <a:srgbClr val="2C3440"/>
+            </a:solidFill>
+            <a:prstDash val="solid"/>
+          </a:ln>
+        </p:spPr>
+      </p:sp>
+      <p:sp>
+        <p:nvSpPr>
+          <p:cNvPr id="18" name="Text 16"/>
+          <p:cNvSpPr/>
+          <p:nvPr/>
+        </p:nvSpPr>
+        <p:spPr>
+          <a:xfrm>
+            <a:off x="548640" y="2596896"/>
+            <a:ext cx="566928" cy="274320"/>
+          </a:xfrm>
+          <a:prstGeom prst="rect">
+            <a:avLst/>
+          </a:prstGeom>
+          <a:noFill/>
+          <a:ln/>
+        </p:spPr>
+        <p:txBody>
+          <a:bodyPr wrap="square" lIns="0" tIns="0" rIns="0" bIns="0" rtlCol="0" anchor="ctr"/>
+          <a:lstStyle/>
+          <a:p>
+            <a:pPr algn="ctr" indent="0" marL="0">
+              <a:buNone/>
+            </a:pPr>
+            <a:r>
+              <a:rPr lang="en-US" sz="1100" b="1" dirty="0">
+                <a:solidFill>
+                  <a:srgbClr val="8CC63F"/>
                 </a:solidFill>
                 <a:latin typeface="Courier New" pitchFamily="34" charset="0"/>
                 <a:ea typeface="Courier New" pitchFamily="34" charset="-122"/>
                 <a:cs typeface="Courier New" pitchFamily="34" charset="-120"/>
               </a:rPr>
-              <a:t>// test10   tests.cpp:1510~1524</a:t>
-            </a:r>
-            <a:endParaRPr lang="en-US" sz="1300" dirty="0"/>
-          </a:p>
-          <a:p>
-            <a:pPr algn="l" indent="0" marL="0">
-              <a:lnSpc>
-                <a:spcPct val="108000"/>
-              </a:lnSpc>
-              <a:buNone/>
-            </a:pPr>
-            <a:r>
-              <a:rPr lang="en-US" sz="1300" dirty="0">
-                <a:solidFill>
-                  <a:srgbClr val="E8EDF2"/>
+              <a:t>T0</a:t>
+            </a:r>
+            <a:endParaRPr lang="en-US" sz="1100" dirty="0"/>
+          </a:p>
+        </p:txBody>
+      </p:sp>
+      <p:sp>
+        <p:nvSpPr>
+          <p:cNvPr id="19" name="Text 17"/>
+          <p:cNvSpPr/>
+          <p:nvPr/>
+        </p:nvSpPr>
+        <p:spPr>
+          <a:xfrm>
+            <a:off x="1188720" y="2596896"/>
+            <a:ext cx="566928" cy="274320"/>
+          </a:xfrm>
+          <a:prstGeom prst="rect">
+            <a:avLst/>
+          </a:prstGeom>
+          <a:noFill/>
+          <a:ln/>
+        </p:spPr>
+        <p:txBody>
+          <a:bodyPr wrap="square" lIns="0" tIns="0" rIns="0" bIns="0" rtlCol="0" anchor="ctr"/>
+          <a:lstStyle/>
+          <a:p>
+            <a:pPr algn="ctr" indent="0" marL="0">
+              <a:buNone/>
+            </a:pPr>
+            <a:r>
+              <a:rPr lang="en-US" sz="1100" b="1" dirty="0">
+                <a:solidFill>
+                  <a:srgbClr val="8CC63F"/>
                 </a:solidFill>
                 <a:latin typeface="Courier New" pitchFamily="34" charset="0"/>
                 <a:ea typeface="Courier New" pitchFamily="34" charset="-122"/>
                 <a:cs typeface="Courier New" pitchFamily="34" charset="-120"/>
               </a:rPr>
-              <a:t>cudaEventRecord(start, stream);</a:t>
-            </a:r>
-            <a:endParaRPr lang="en-US" sz="1300" dirty="0"/>
-          </a:p>
-          <a:p>
-            <a:pPr algn="l" indent="0" marL="0">
-              <a:lnSpc>
-                <a:spcPct val="108000"/>
-              </a:lnSpc>
-              <a:buNone/>
-            </a:pPr>
-            <a:r>
-              <a:rPr lang="en-US" sz="1300" dirty="0">
+              <a:t>T1</a:t>
+            </a:r>
+            <a:endParaRPr lang="en-US" sz="1100" dirty="0"/>
+          </a:p>
+        </p:txBody>
+      </p:sp>
+      <p:sp>
+        <p:nvSpPr>
+          <p:cNvPr id="20" name="Text 18"/>
+          <p:cNvSpPr/>
+          <p:nvPr/>
+        </p:nvSpPr>
+        <p:spPr>
+          <a:xfrm>
+            <a:off x="1828800" y="2596896"/>
+            <a:ext cx="566928" cy="274320"/>
+          </a:xfrm>
+          <a:prstGeom prst="rect">
+            <a:avLst/>
+          </a:prstGeom>
+          <a:noFill/>
+          <a:ln/>
+        </p:spPr>
+        <p:txBody>
+          <a:bodyPr wrap="square" lIns="0" tIns="0" rIns="0" bIns="0" rtlCol="0" anchor="ctr"/>
+          <a:lstStyle/>
+          <a:p>
+            <a:pPr algn="ctr" indent="0" marL="0">
+              <a:buNone/>
+            </a:pPr>
+            <a:r>
+              <a:rPr lang="en-US" sz="1100" b="1" dirty="0">
                 <a:solidFill>
                   <a:srgbClr val="8CC63F"/>
                 </a:solidFill>
@@ -6048,19 +8113,38 @@
                 <a:ea typeface="Courier New" pitchFamily="34" charset="-122"/>
                 <a:cs typeface="Courier New" pitchFamily="34" charset="-120"/>
               </a:rPr>
-              <a:t>test10_kernel_write&lt;&lt;&lt;...&gt;&gt;&gt;(...);          // 쓰기</a:t>
-            </a:r>
-            <a:endParaRPr lang="en-US" sz="1300" dirty="0"/>
-          </a:p>
-          <a:p>
-            <a:pPr algn="l" indent="0" marL="0">
-              <a:lnSpc>
-                <a:spcPct val="108000"/>
-              </a:lnSpc>
-              <a:buNone/>
-            </a:pPr>
-            <a:r>
-              <a:rPr lang="en-US" sz="1300" dirty="0">
+              <a:t>T2</a:t>
+            </a:r>
+            <a:endParaRPr lang="en-US" sz="1100" dirty="0"/>
+          </a:p>
+        </p:txBody>
+      </p:sp>
+      <p:sp>
+        <p:nvSpPr>
+          <p:cNvPr id="21" name="Text 19"/>
+          <p:cNvSpPr/>
+          <p:nvPr/>
+        </p:nvSpPr>
+        <p:spPr>
+          <a:xfrm>
+            <a:off x="2468880" y="2596896"/>
+            <a:ext cx="566928" cy="274320"/>
+          </a:xfrm>
+          <a:prstGeom prst="rect">
+            <a:avLst/>
+          </a:prstGeom>
+          <a:noFill/>
+          <a:ln/>
+        </p:spPr>
+        <p:txBody>
+          <a:bodyPr wrap="square" lIns="0" tIns="0" rIns="0" bIns="0" rtlCol="0" anchor="ctr"/>
+          <a:lstStyle/>
+          <a:p>
+            <a:pPr algn="ctr" indent="0" marL="0">
+              <a:buNone/>
+            </a:pPr>
+            <a:r>
+              <a:rPr lang="en-US" sz="1100" b="1" dirty="0">
                 <a:solidFill>
                   <a:srgbClr val="8CC63F"/>
                 </a:solidFill>
@@ -6068,39 +8152,440 @@
                 <a:ea typeface="Courier New" pitchFamily="34" charset="-122"/>
                 <a:cs typeface="Courier New" pitchFamily="34" charset="-120"/>
               </a:rPr>
-              <a:t>for (i=0;i&lt;n;i++) test10_kernel_readwrite&lt;&lt;&lt;...&gt;&gt;&gt;(...); // 읽고쓰기 n회</a:t>
-            </a:r>
-            <a:endParaRPr lang="en-US" sz="1300" dirty="0"/>
-          </a:p>
-          <a:p>
-            <a:pPr algn="l" indent="0" marL="0">
-              <a:lnSpc>
-                <a:spcPct val="108000"/>
-              </a:lnSpc>
-              <a:buNone/>
-            </a:pPr>
-            <a:r>
-              <a:rPr lang="en-US" sz="1300" dirty="0">
-                <a:solidFill>
-                  <a:srgbClr val="E8EDF2"/>
+              <a:t>T3</a:t>
+            </a:r>
+            <a:endParaRPr lang="en-US" sz="1100" dirty="0"/>
+          </a:p>
+        </p:txBody>
+      </p:sp>
+      <p:sp>
+        <p:nvSpPr>
+          <p:cNvPr id="22" name="Text 20"/>
+          <p:cNvSpPr/>
+          <p:nvPr/>
+        </p:nvSpPr>
+        <p:spPr>
+          <a:xfrm>
+            <a:off x="548640" y="3410712"/>
+            <a:ext cx="11064240" cy="365760"/>
+          </a:xfrm>
+          <a:prstGeom prst="rect">
+            <a:avLst/>
+          </a:prstGeom>
+          <a:noFill/>
+          <a:ln/>
+        </p:spPr>
+        <p:txBody>
+          <a:bodyPr wrap="square" lIns="0" tIns="0" rIns="0" bIns="0" rtlCol="0" anchor="ctr"/>
+          <a:lstStyle/>
+          <a:p>
+            <a:pPr indent="0" marL="0">
+              <a:buNone/>
+            </a:pPr>
+            <a:r>
+              <a:rPr lang="en-US" sz="1500" b="1" dirty="0">
+                <a:solidFill>
+                  <a:srgbClr val="E0A458"/>
+                </a:solidFill>
+                <a:latin typeface="Malgun Gothic" pitchFamily="34" charset="0"/>
+                <a:ea typeface="Malgun Gothic" pitchFamily="34" charset="-122"/>
+                <a:cs typeface="Malgun Gothic" pitchFamily="34" charset="-120"/>
+              </a:rPr>
+              <a:t>✗ 비병합 (index = threadIdx.x*n + i) — 스레드가 멀리 흩어짐</a:t>
+            </a:r>
+            <a:endParaRPr lang="en-US" sz="1500" dirty="0"/>
+          </a:p>
+        </p:txBody>
+      </p:sp>
+      <p:sp>
+        <p:nvSpPr>
+          <p:cNvPr id="23" name="Shape 21"/>
+          <p:cNvSpPr/>
+          <p:nvPr/>
+        </p:nvSpPr>
+        <p:spPr>
+          <a:xfrm>
+            <a:off x="548640" y="3813048"/>
+            <a:ext cx="566928" cy="502920"/>
+          </a:xfrm>
+          <a:prstGeom prst="roundRect">
+            <a:avLst>
+              <a:gd name="adj" fmla="val 7273"/>
+            </a:avLst>
+          </a:prstGeom>
+          <a:solidFill>
+            <a:srgbClr val="0E1116"/>
+          </a:solidFill>
+          <a:ln w="12700">
+            <a:solidFill>
+              <a:srgbClr val="2C3440"/>
+            </a:solidFill>
+            <a:prstDash val="solid"/>
+          </a:ln>
+        </p:spPr>
+      </p:sp>
+      <p:sp>
+        <p:nvSpPr>
+          <p:cNvPr id="24" name="Shape 22"/>
+          <p:cNvSpPr/>
+          <p:nvPr/>
+        </p:nvSpPr>
+        <p:spPr>
+          <a:xfrm>
+            <a:off x="1188720" y="3813048"/>
+            <a:ext cx="566928" cy="502920"/>
+          </a:xfrm>
+          <a:prstGeom prst="roundRect">
+            <a:avLst>
+              <a:gd name="adj" fmla="val 7273"/>
+            </a:avLst>
+          </a:prstGeom>
+          <a:solidFill>
+            <a:srgbClr val="0E1116"/>
+          </a:solidFill>
+          <a:ln w="12700">
+            <a:solidFill>
+              <a:srgbClr val="2C3440"/>
+            </a:solidFill>
+            <a:prstDash val="solid"/>
+          </a:ln>
+        </p:spPr>
+      </p:sp>
+      <p:sp>
+        <p:nvSpPr>
+          <p:cNvPr id="25" name="Shape 23"/>
+          <p:cNvSpPr/>
+          <p:nvPr/>
+        </p:nvSpPr>
+        <p:spPr>
+          <a:xfrm>
+            <a:off x="1828800" y="3813048"/>
+            <a:ext cx="566928" cy="502920"/>
+          </a:xfrm>
+          <a:prstGeom prst="roundRect">
+            <a:avLst>
+              <a:gd name="adj" fmla="val 7273"/>
+            </a:avLst>
+          </a:prstGeom>
+          <a:solidFill>
+            <a:srgbClr val="0E1116"/>
+          </a:solidFill>
+          <a:ln w="12700">
+            <a:solidFill>
+              <a:srgbClr val="2C3440"/>
+            </a:solidFill>
+            <a:prstDash val="solid"/>
+          </a:ln>
+        </p:spPr>
+      </p:sp>
+      <p:sp>
+        <p:nvSpPr>
+          <p:cNvPr id="26" name="Shape 24"/>
+          <p:cNvSpPr/>
+          <p:nvPr/>
+        </p:nvSpPr>
+        <p:spPr>
+          <a:xfrm>
+            <a:off x="2468880" y="3813048"/>
+            <a:ext cx="566928" cy="502920"/>
+          </a:xfrm>
+          <a:prstGeom prst="roundRect">
+            <a:avLst>
+              <a:gd name="adj" fmla="val 7273"/>
+            </a:avLst>
+          </a:prstGeom>
+          <a:solidFill>
+            <a:srgbClr val="0E1116"/>
+          </a:solidFill>
+          <a:ln w="12700">
+            <a:solidFill>
+              <a:srgbClr val="2C3440"/>
+            </a:solidFill>
+            <a:prstDash val="solid"/>
+          </a:ln>
+        </p:spPr>
+      </p:sp>
+      <p:sp>
+        <p:nvSpPr>
+          <p:cNvPr id="27" name="Shape 25"/>
+          <p:cNvSpPr/>
+          <p:nvPr/>
+        </p:nvSpPr>
+        <p:spPr>
+          <a:xfrm>
+            <a:off x="3108960" y="3813048"/>
+            <a:ext cx="566928" cy="502920"/>
+          </a:xfrm>
+          <a:prstGeom prst="roundRect">
+            <a:avLst>
+              <a:gd name="adj" fmla="val 7273"/>
+            </a:avLst>
+          </a:prstGeom>
+          <a:solidFill>
+            <a:srgbClr val="0E1116"/>
+          </a:solidFill>
+          <a:ln w="12700">
+            <a:solidFill>
+              <a:srgbClr val="2C3440"/>
+            </a:solidFill>
+            <a:prstDash val="solid"/>
+          </a:ln>
+        </p:spPr>
+      </p:sp>
+      <p:sp>
+        <p:nvSpPr>
+          <p:cNvPr id="28" name="Shape 26"/>
+          <p:cNvSpPr/>
+          <p:nvPr/>
+        </p:nvSpPr>
+        <p:spPr>
+          <a:xfrm>
+            <a:off x="3749040" y="3813048"/>
+            <a:ext cx="566928" cy="502920"/>
+          </a:xfrm>
+          <a:prstGeom prst="roundRect">
+            <a:avLst>
+              <a:gd name="adj" fmla="val 7273"/>
+            </a:avLst>
+          </a:prstGeom>
+          <a:solidFill>
+            <a:srgbClr val="0E1116"/>
+          </a:solidFill>
+          <a:ln w="12700">
+            <a:solidFill>
+              <a:srgbClr val="2C3440"/>
+            </a:solidFill>
+            <a:prstDash val="solid"/>
+          </a:ln>
+        </p:spPr>
+      </p:sp>
+      <p:sp>
+        <p:nvSpPr>
+          <p:cNvPr id="29" name="Shape 27"/>
+          <p:cNvSpPr/>
+          <p:nvPr/>
+        </p:nvSpPr>
+        <p:spPr>
+          <a:xfrm>
+            <a:off x="4389120" y="3813048"/>
+            <a:ext cx="566928" cy="502920"/>
+          </a:xfrm>
+          <a:prstGeom prst="roundRect">
+            <a:avLst>
+              <a:gd name="adj" fmla="val 7273"/>
+            </a:avLst>
+          </a:prstGeom>
+          <a:solidFill>
+            <a:srgbClr val="0E1116"/>
+          </a:solidFill>
+          <a:ln w="12700">
+            <a:solidFill>
+              <a:srgbClr val="2C3440"/>
+            </a:solidFill>
+            <a:prstDash val="solid"/>
+          </a:ln>
+        </p:spPr>
+      </p:sp>
+      <p:sp>
+        <p:nvSpPr>
+          <p:cNvPr id="30" name="Shape 28"/>
+          <p:cNvSpPr/>
+          <p:nvPr/>
+        </p:nvSpPr>
+        <p:spPr>
+          <a:xfrm>
+            <a:off x="5029200" y="3813048"/>
+            <a:ext cx="566928" cy="502920"/>
+          </a:xfrm>
+          <a:prstGeom prst="roundRect">
+            <a:avLst>
+              <a:gd name="adj" fmla="val 7273"/>
+            </a:avLst>
+          </a:prstGeom>
+          <a:solidFill>
+            <a:srgbClr val="0E1116"/>
+          </a:solidFill>
+          <a:ln w="12700">
+            <a:solidFill>
+              <a:srgbClr val="2C3440"/>
+            </a:solidFill>
+            <a:prstDash val="solid"/>
+          </a:ln>
+        </p:spPr>
+      </p:sp>
+      <p:sp>
+        <p:nvSpPr>
+          <p:cNvPr id="31" name="Shape 29"/>
+          <p:cNvSpPr/>
+          <p:nvPr/>
+        </p:nvSpPr>
+        <p:spPr>
+          <a:xfrm>
+            <a:off x="5669280" y="3813048"/>
+            <a:ext cx="566928" cy="502920"/>
+          </a:xfrm>
+          <a:prstGeom prst="roundRect">
+            <a:avLst>
+              <a:gd name="adj" fmla="val 7273"/>
+            </a:avLst>
+          </a:prstGeom>
+          <a:solidFill>
+            <a:srgbClr val="0E1116"/>
+          </a:solidFill>
+          <a:ln w="12700">
+            <a:solidFill>
+              <a:srgbClr val="2C3440"/>
+            </a:solidFill>
+            <a:prstDash val="solid"/>
+          </a:ln>
+        </p:spPr>
+      </p:sp>
+      <p:sp>
+        <p:nvSpPr>
+          <p:cNvPr id="32" name="Shape 30"/>
+          <p:cNvSpPr/>
+          <p:nvPr/>
+        </p:nvSpPr>
+        <p:spPr>
+          <a:xfrm>
+            <a:off x="6309360" y="3813048"/>
+            <a:ext cx="566928" cy="502920"/>
+          </a:xfrm>
+          <a:prstGeom prst="roundRect">
+            <a:avLst>
+              <a:gd name="adj" fmla="val 7273"/>
+            </a:avLst>
+          </a:prstGeom>
+          <a:solidFill>
+            <a:srgbClr val="0E1116"/>
+          </a:solidFill>
+          <a:ln w="12700">
+            <a:solidFill>
+              <a:srgbClr val="2C3440"/>
+            </a:solidFill>
+            <a:prstDash val="solid"/>
+          </a:ln>
+        </p:spPr>
+      </p:sp>
+      <p:sp>
+        <p:nvSpPr>
+          <p:cNvPr id="33" name="Shape 31"/>
+          <p:cNvSpPr/>
+          <p:nvPr/>
+        </p:nvSpPr>
+        <p:spPr>
+          <a:xfrm>
+            <a:off x="6949440" y="3813048"/>
+            <a:ext cx="566928" cy="502920"/>
+          </a:xfrm>
+          <a:prstGeom prst="roundRect">
+            <a:avLst>
+              <a:gd name="adj" fmla="val 7273"/>
+            </a:avLst>
+          </a:prstGeom>
+          <a:solidFill>
+            <a:srgbClr val="0E1116"/>
+          </a:solidFill>
+          <a:ln w="12700">
+            <a:solidFill>
+              <a:srgbClr val="2C3440"/>
+            </a:solidFill>
+            <a:prstDash val="solid"/>
+          </a:ln>
+        </p:spPr>
+      </p:sp>
+      <p:sp>
+        <p:nvSpPr>
+          <p:cNvPr id="34" name="Shape 32"/>
+          <p:cNvSpPr/>
+          <p:nvPr/>
+        </p:nvSpPr>
+        <p:spPr>
+          <a:xfrm>
+            <a:off x="7589520" y="3813048"/>
+            <a:ext cx="566928" cy="502920"/>
+          </a:xfrm>
+          <a:prstGeom prst="roundRect">
+            <a:avLst>
+              <a:gd name="adj" fmla="val 7273"/>
+            </a:avLst>
+          </a:prstGeom>
+          <a:solidFill>
+            <a:srgbClr val="0E1116"/>
+          </a:solidFill>
+          <a:ln w="12700">
+            <a:solidFill>
+              <a:srgbClr val="2C3440"/>
+            </a:solidFill>
+            <a:prstDash val="solid"/>
+          </a:ln>
+        </p:spPr>
+      </p:sp>
+      <p:sp>
+        <p:nvSpPr>
+          <p:cNvPr id="35" name="Text 33"/>
+          <p:cNvSpPr/>
+          <p:nvPr/>
+        </p:nvSpPr>
+        <p:spPr>
+          <a:xfrm>
+            <a:off x="548640" y="3922776"/>
+            <a:ext cx="566928" cy="274320"/>
+          </a:xfrm>
+          <a:prstGeom prst="rect">
+            <a:avLst/>
+          </a:prstGeom>
+          <a:noFill/>
+          <a:ln/>
+        </p:spPr>
+        <p:txBody>
+          <a:bodyPr wrap="square" lIns="0" tIns="0" rIns="0" bIns="0" rtlCol="0" anchor="ctr"/>
+          <a:lstStyle/>
+          <a:p>
+            <a:pPr algn="ctr" indent="0" marL="0">
+              <a:buNone/>
+            </a:pPr>
+            <a:r>
+              <a:rPr lang="en-US" sz="1100" b="1" dirty="0">
+                <a:solidFill>
+                  <a:srgbClr val="E0A458"/>
                 </a:solidFill>
                 <a:latin typeface="Courier New" pitchFamily="34" charset="0"/>
                 <a:ea typeface="Courier New" pitchFamily="34" charset="-122"/>
                 <a:cs typeface="Courier New" pitchFamily="34" charset="-120"/>
               </a:rPr>
-              <a:t>cudaEventRecord(stop, stream);</a:t>
-            </a:r>
-            <a:endParaRPr lang="en-US" sz="1300" dirty="0"/>
-          </a:p>
-          <a:p>
-            <a:pPr algn="l" indent="0" marL="0">
-              <a:lnSpc>
-                <a:spcPct val="108000"/>
-              </a:lnSpc>
-              <a:buNone/>
-            </a:pPr>
-            <a:r>
-              <a:rPr lang="en-US" sz="1300" dirty="0">
+              <a:t>T0</a:t>
+            </a:r>
+            <a:endParaRPr lang="en-US" sz="1100" dirty="0"/>
+          </a:p>
+        </p:txBody>
+      </p:sp>
+      <p:sp>
+        <p:nvSpPr>
+          <p:cNvPr id="36" name="Text 34"/>
+          <p:cNvSpPr/>
+          <p:nvPr/>
+        </p:nvSpPr>
+        <p:spPr>
+          <a:xfrm>
+            <a:off x="3108960" y="3922776"/>
+            <a:ext cx="566928" cy="274320"/>
+          </a:xfrm>
+          <a:prstGeom prst="rect">
+            <a:avLst/>
+          </a:prstGeom>
+          <a:noFill/>
+          <a:ln/>
+        </p:spPr>
+        <p:txBody>
+          <a:bodyPr wrap="square" lIns="0" tIns="0" rIns="0" bIns="0" rtlCol="0" anchor="ctr"/>
+          <a:lstStyle/>
+          <a:p>
+            <a:pPr algn="ctr" indent="0" marL="0">
+              <a:buNone/>
+            </a:pPr>
+            <a:r>
+              <a:rPr lang="en-US" sz="1100" b="1" dirty="0">
                 <a:solidFill>
                   <a:srgbClr val="E0A458"/>
                 </a:solidFill>
@@ -6108,42 +8593,100 @@
                 <a:ea typeface="Courier New" pitchFamily="34" charset="-122"/>
                 <a:cs typeface="Courier New" pitchFamily="34" charset="-120"/>
               </a:rPr>
-              <a:t>cudaEventSynchronize(stop);                 // GPU가 끝날 때까지 대기</a:t>
-            </a:r>
-            <a:endParaRPr lang="en-US" sz="1300" dirty="0"/>
-          </a:p>
-          <a:p>
-            <a:pPr algn="l" indent="0" marL="0">
-              <a:lnSpc>
-                <a:spcPct val="108000"/>
-              </a:lnSpc>
-              <a:buNone/>
-            </a:pPr>
-            <a:r>
-              <a:rPr lang="en-US" sz="1300" dirty="0">
-                <a:solidFill>
-                  <a:srgbClr val="4FB0C6"/>
+              <a:t>T1</a:t>
+            </a:r>
+            <a:endParaRPr lang="en-US" sz="1100" dirty="0"/>
+          </a:p>
+        </p:txBody>
+      </p:sp>
+      <p:sp>
+        <p:nvSpPr>
+          <p:cNvPr id="37" name="Text 35"/>
+          <p:cNvSpPr/>
+          <p:nvPr/>
+        </p:nvSpPr>
+        <p:spPr>
+          <a:xfrm>
+            <a:off x="5669280" y="3922776"/>
+            <a:ext cx="566928" cy="274320"/>
+          </a:xfrm>
+          <a:prstGeom prst="rect">
+            <a:avLst/>
+          </a:prstGeom>
+          <a:noFill/>
+          <a:ln/>
+        </p:spPr>
+        <p:txBody>
+          <a:bodyPr wrap="square" lIns="0" tIns="0" rIns="0" bIns="0" rtlCol="0" anchor="ctr"/>
+          <a:lstStyle/>
+          <a:p>
+            <a:pPr algn="ctr" indent="0" marL="0">
+              <a:buNone/>
+            </a:pPr>
+            <a:r>
+              <a:rPr lang="en-US" sz="1100" b="1" dirty="0">
+                <a:solidFill>
+                  <a:srgbClr val="E0A458"/>
                 </a:solidFill>
                 <a:latin typeface="Courier New" pitchFamily="34" charset="0"/>
                 <a:ea typeface="Courier New" pitchFamily="34" charset="-122"/>
                 <a:cs typeface="Courier New" pitchFamily="34" charset="-120"/>
               </a:rPr>
-              <a:t>cudaEventElapsedTime(&amp;elapsedtime, start, stop); // 밀리초 경과시간</a:t>
-            </a:r>
-            <a:endParaRPr lang="en-US" sz="1300" dirty="0"/>
-          </a:p>
-        </p:txBody>
-      </p:sp>
-      <p:sp>
-        <p:nvSpPr>
-          <p:cNvPr id="6" name="Text 4"/>
-          <p:cNvSpPr/>
-          <p:nvPr/>
-        </p:nvSpPr>
-        <p:spPr>
-          <a:xfrm>
-            <a:off x="548640" y="4572000"/>
-            <a:ext cx="11064240" cy="1371600"/>
+              <a:t>T2</a:t>
+            </a:r>
+            <a:endParaRPr lang="en-US" sz="1100" dirty="0"/>
+          </a:p>
+        </p:txBody>
+      </p:sp>
+      <p:sp>
+        <p:nvSpPr>
+          <p:cNvPr id="38" name="Text 36"/>
+          <p:cNvSpPr/>
+          <p:nvPr/>
+        </p:nvSpPr>
+        <p:spPr>
+          <a:xfrm>
+            <a:off x="7589520" y="3922776"/>
+            <a:ext cx="566928" cy="274320"/>
+          </a:xfrm>
+          <a:prstGeom prst="rect">
+            <a:avLst/>
+          </a:prstGeom>
+          <a:noFill/>
+          <a:ln/>
+        </p:spPr>
+        <p:txBody>
+          <a:bodyPr wrap="square" lIns="0" tIns="0" rIns="0" bIns="0" rtlCol="0" anchor="ctr"/>
+          <a:lstStyle/>
+          <a:p>
+            <a:pPr algn="ctr" indent="0" marL="0">
+              <a:buNone/>
+            </a:pPr>
+            <a:r>
+              <a:rPr lang="en-US" sz="1100" b="1" dirty="0">
+                <a:solidFill>
+                  <a:srgbClr val="E0A458"/>
+                </a:solidFill>
+                <a:latin typeface="Courier New" pitchFamily="34" charset="0"/>
+                <a:ea typeface="Courier New" pitchFamily="34" charset="-122"/>
+                <a:cs typeface="Courier New" pitchFamily="34" charset="-120"/>
+              </a:rPr>
+              <a:t>T3</a:t>
+            </a:r>
+            <a:endParaRPr lang="en-US" sz="1100" dirty="0"/>
+          </a:p>
+        </p:txBody>
+      </p:sp>
+      <p:sp>
+        <p:nvSpPr>
+          <p:cNvPr id="39" name="Text 37"/>
+          <p:cNvSpPr/>
+          <p:nvPr/>
+        </p:nvSpPr>
+        <p:spPr>
+          <a:xfrm>
+            <a:off x="548640" y="4709160"/>
+            <a:ext cx="5349240" cy="1097280"/>
           </a:xfrm>
           <a:prstGeom prst="rect">
             <a:avLst/>
@@ -6155,14 +8698,33 @@
           <a:bodyPr wrap="square" lIns="0" tIns="0" rIns="0" bIns="0" rtlCol="0" anchor="t"/>
           <a:lstStyle/>
           <a:p>
-            <a:pPr indent="0" marL="0">
+            <a:pPr marL="342900" indent="-342900">
               <a:spcAft>
-                <a:spcPts val="600"/>
+                <a:spcPts val="800"/>
               </a:spcAft>
-              <a:buNone/>
-            </a:pPr>
-            <a:r>
-              <a:rPr lang="en-US" sz="1600" b="1" dirty="0">
+              <a:buSzPct val="100000"/>
+              <a:buChar char="•"/>
+            </a:pPr>
+            <a:r>
+              <a:rPr lang="en-US" sz="1550" dirty="0">
+                <a:solidFill>
+                  <a:srgbClr val="8CC63F"/>
+                </a:solidFill>
+                <a:latin typeface="Malgun Gothic" pitchFamily="34" charset="0"/>
+                <a:ea typeface="Malgun Gothic" pitchFamily="34" charset="-122"/>
+                <a:cs typeface="Malgun Gothic" pitchFamily="34" charset="-120"/>
+              </a:rPr>
+              <a:t>병합 → 큰 전송 1번 → 대역폭 최대</a:t>
+            </a:r>
+            <a:endParaRPr lang="en-US" sz="1550" dirty="0"/>
+          </a:p>
+          <a:p>
+            <a:pPr marL="342900" indent="-342900">
+              <a:buSzPct val="100000"/>
+              <a:buChar char="•"/>
+            </a:pPr>
+            <a:r>
+              <a:rPr lang="en-US" sz="1550" dirty="0">
                 <a:solidFill>
                   <a:srgbClr val="E8EDF2"/>
                 </a:solidFill>
@@ -6170,54 +8732,70 @@
                 <a:ea typeface="Malgun Gothic" pitchFamily="34" charset="-122"/>
                 <a:cs typeface="Malgun Gothic" pitchFamily="34" charset="-120"/>
               </a:rPr>
-              <a:t>왜 CPU 타이머가 아니라 GPU 이벤트?</a:t>
-            </a:r>
-            <a:endParaRPr lang="en-US" sz="1600" dirty="0"/>
-          </a:p>
-          <a:p>
-            <a:pPr indent="0" marL="0">
-              <a:buNone/>
-            </a:pPr>
-            <a:r>
-              <a:rPr lang="en-US" sz="1600" dirty="0">
-                <a:solidFill>
-                  <a:srgbClr val="9AA6B2"/>
-                </a:solidFill>
-                <a:latin typeface="Malgun Gothic" pitchFamily="34" charset="0"/>
-                <a:ea typeface="Malgun Gothic" pitchFamily="34" charset="-122"/>
-                <a:cs typeface="Malgun Gothic" pitchFamily="34" charset="-120"/>
-              </a:rPr>
-              <a:t>커널은 비동기(asynchronous) 실행 — CPU는 커널을 던지고 바로 다음 줄로 갑니다. GPU 타임라인 위에 </a:t>
-            </a:r>
-            <a:pPr indent="0" marL="0">
-              <a:buNone/>
-            </a:pPr>
-            <a:r>
-              <a:rPr lang="en-US" sz="1600" b="1" dirty="0">
-                <a:solidFill>
-                  <a:srgbClr val="4FB0C6"/>
-                </a:solidFill>
-                <a:latin typeface="Malgun Gothic" pitchFamily="34" charset="0"/>
-                <a:ea typeface="Malgun Gothic" pitchFamily="34" charset="-122"/>
-                <a:cs typeface="Malgun Gothic" pitchFamily="34" charset="-120"/>
-              </a:rPr>
-              <a:t>이벤트를 찍어야</a:t>
-            </a:r>
-            <a:pPr indent="0" marL="0">
-              <a:buNone/>
-            </a:pPr>
-            <a:r>
-              <a:rPr lang="en-US" sz="1600" dirty="0">
-                <a:solidFill>
-                  <a:srgbClr val="9AA6B2"/>
-                </a:solidFill>
-                <a:latin typeface="Malgun Gothic" pitchFamily="34" charset="0"/>
-                <a:ea typeface="Malgun Gothic" pitchFamily="34" charset="-122"/>
-                <a:cs typeface="Malgun Gothic" pitchFamily="34" charset="-120"/>
-              </a:rPr>
-              <a:t> 진짜 커널 시간을 잴 수 있습니다.</a:t>
-            </a:r>
-            <a:endParaRPr lang="en-US" sz="1600" dirty="0"/>
+              <a:t>이웃 스레드가 이웃 주소를 읽음</a:t>
+            </a:r>
+            <a:endParaRPr lang="en-US" sz="1550" dirty="0"/>
+          </a:p>
+        </p:txBody>
+      </p:sp>
+      <p:sp>
+        <p:nvSpPr>
+          <p:cNvPr id="40" name="Text 38"/>
+          <p:cNvSpPr/>
+          <p:nvPr/>
+        </p:nvSpPr>
+        <p:spPr>
+          <a:xfrm>
+            <a:off x="6263640" y="4709160"/>
+            <a:ext cx="5349240" cy="1097280"/>
+          </a:xfrm>
+          <a:prstGeom prst="rect">
+            <a:avLst/>
+          </a:prstGeom>
+          <a:noFill/>
+          <a:ln/>
+        </p:spPr>
+        <p:txBody>
+          <a:bodyPr wrap="square" lIns="0" tIns="0" rIns="0" bIns="0" rtlCol="0" anchor="t"/>
+          <a:lstStyle/>
+          <a:p>
+            <a:pPr marL="342900" indent="-342900">
+              <a:spcAft>
+                <a:spcPts val="800"/>
+              </a:spcAft>
+              <a:buSzPct val="100000"/>
+              <a:buChar char="•"/>
+            </a:pPr>
+            <a:r>
+              <a:rPr lang="en-US" sz="1550" dirty="0">
+                <a:solidFill>
+                  <a:srgbClr val="E0A458"/>
+                </a:solidFill>
+                <a:latin typeface="Malgun Gothic" pitchFamily="34" charset="0"/>
+                <a:ea typeface="Malgun Gothic" pitchFamily="34" charset="-122"/>
+                <a:cs typeface="Malgun Gothic" pitchFamily="34" charset="-120"/>
+              </a:rPr>
+              <a:t>비병합 → 작은 전송 여러 번 → 급락</a:t>
+            </a:r>
+            <a:endParaRPr lang="en-US" sz="1550" dirty="0"/>
+          </a:p>
+          <a:p>
+            <a:pPr marL="342900" indent="-342900">
+              <a:buSzPct val="100000"/>
+              <a:buChar char="•"/>
+            </a:pPr>
+            <a:r>
+              <a:rPr lang="en-US" sz="1550" dirty="0">
+                <a:solidFill>
+                  <a:srgbClr val="E8EDF2"/>
+                </a:solidFill>
+                <a:latin typeface="Malgun Gothic" pitchFamily="34" charset="0"/>
+                <a:ea typeface="Malgun Gothic" pitchFamily="34" charset="-122"/>
+                <a:cs typeface="Malgun Gothic" pitchFamily="34" charset="-120"/>
+              </a:rPr>
+              <a:t>실습 4에서 직접 깨뜨려 측정합니다</a:t>
+            </a:r>
+            <a:endParaRPr lang="en-US" sz="1550" dirty="0"/>
           </a:p>
         </p:txBody>
       </p:sp>
@@ -6290,7 +8868,7 @@
                 <a:ea typeface="Courier New" pitchFamily="34" charset="-122"/>
                 <a:cs typeface="Courier New" pitchFamily="34" charset="-120"/>
               </a:rPr>
-              <a:t>6</a:t>
+              <a:t>5</a:t>
             </a:r>
             <a:endParaRPr lang="en-US" sz="2200" dirty="0"/>
           </a:p>
@@ -6329,7 +8907,7 @@
                 <a:ea typeface="Malgun Gothic" pitchFamily="34" charset="-122"/>
                 <a:cs typeface="Malgun Gothic" pitchFamily="34" charset="-120"/>
               </a:rPr>
-              <a:t>대역폭(bandwidth) 계산 뜯어보기</a:t>
+              <a:t>CUDA 이벤트로 시간 재기</a:t>
             </a:r>
             <a:endParaRPr lang="en-US" sz="3000" dirty="0"/>
           </a:p>
@@ -6344,11 +8922,11 @@
         <p:spPr>
           <a:xfrm>
             <a:off x="548640" y="1554480"/>
-            <a:ext cx="11064240" cy="1188720"/>
+            <a:ext cx="11064240" cy="2743200"/>
           </a:xfrm>
           <a:prstGeom prst="roundRect">
             <a:avLst>
-              <a:gd name="adj" fmla="val 4615"/>
+              <a:gd name="adj" fmla="val 2000"/>
             </a:avLst>
           </a:prstGeom>
           <a:solidFill>
@@ -6371,7 +8949,7 @@
         <p:spPr>
           <a:xfrm>
             <a:off x="749808" y="1700784"/>
-            <a:ext cx="10661904" cy="896112"/>
+            <a:ext cx="10661904" cy="2450592"/>
           </a:xfrm>
           <a:prstGeom prst="rect">
             <a:avLst/>
@@ -6390,17 +8968,17 @@
               <a:buNone/>
             </a:pPr>
             <a:r>
-              <a:rPr lang="en-US" sz="1400" dirty="0">
-                <a:solidFill>
-                  <a:srgbClr val="8CC63F"/>
+              <a:rPr lang="en-US" sz="1300" dirty="0">
+                <a:solidFill>
+                  <a:srgbClr val="9AA6B2"/>
                 </a:solidFill>
                 <a:latin typeface="Courier New" pitchFamily="34" charset="0"/>
                 <a:ea typeface="Courier New" pitchFamily="34" charset="-122"/>
                 <a:cs typeface="Courier New" pitchFamily="34" charset="-120"/>
               </a:rPr>
-              <a:t>bandwidth = (2*n + 1) * tot_num_blocks / elapsedtime   // GB/s</a:t>
-            </a:r>
-            <a:endParaRPr lang="en-US" sz="1400" dirty="0"/>
+              <a:t>// test10   tests.cpp:1510~1524</a:t>
+            </a:r>
+            <a:endParaRPr lang="en-US" sz="1300" dirty="0"/>
           </a:p>
           <a:p>
             <a:pPr algn="l" indent="0" marL="0">
@@ -6410,68 +8988,27 @@
               <a:buNone/>
             </a:pPr>
             <a:r>
-              <a:rPr lang="en-US" sz="1400" dirty="0">
-                <a:solidFill>
-                  <a:srgbClr val="9AA6B2"/>
+              <a:rPr lang="en-US" sz="1300" dirty="0">
+                <a:solidFill>
+                  <a:srgbClr val="E8EDF2"/>
                 </a:solidFill>
                 <a:latin typeface="Courier New" pitchFamily="34" charset="0"/>
                 <a:ea typeface="Courier New" pitchFamily="34" charset="-122"/>
                 <a:cs typeface="Courier New" pitchFamily="34" charset="-120"/>
               </a:rPr>
-              <a:t>//           └ 접근 횟수 ┘   └ MB 단위 ┘   └ ms 단위 ┘</a:t>
-            </a:r>
-            <a:endParaRPr lang="en-US" sz="1400" dirty="0"/>
-          </a:p>
-        </p:txBody>
-      </p:sp>
-      <p:sp>
-        <p:nvSpPr>
-          <p:cNvPr id="6" name="Shape 4"/>
-          <p:cNvSpPr/>
-          <p:nvPr/>
-        </p:nvSpPr>
-        <p:spPr>
-          <a:xfrm>
-            <a:off x="548640" y="3017520"/>
-            <a:ext cx="3444240" cy="2194560"/>
-          </a:xfrm>
-          <a:prstGeom prst="roundRect">
-            <a:avLst>
-              <a:gd name="adj" fmla="val 3333"/>
-            </a:avLst>
-          </a:prstGeom>
-          <a:solidFill>
-            <a:srgbClr val="1E232C"/>
-          </a:solidFill>
-          <a:ln/>
-        </p:spPr>
-      </p:sp>
-      <p:sp>
-        <p:nvSpPr>
-          <p:cNvPr id="7" name="Text 5"/>
-          <p:cNvSpPr/>
-          <p:nvPr/>
-        </p:nvSpPr>
-        <p:spPr>
-          <a:xfrm>
-            <a:off x="777240" y="3200400"/>
-            <a:ext cx="2987040" cy="457200"/>
-          </a:xfrm>
-          <a:prstGeom prst="rect">
-            <a:avLst/>
-          </a:prstGeom>
-          <a:noFill/>
-          <a:ln/>
-        </p:spPr>
-        <p:txBody>
-          <a:bodyPr wrap="square" lIns="0" tIns="0" rIns="0" bIns="0" rtlCol="0" anchor="ctr"/>
-          <a:lstStyle/>
-          <a:p>
-            <a:pPr indent="0" marL="0">
-              <a:buNone/>
-            </a:pPr>
-            <a:r>
-              <a:rPr lang="en-US" sz="1700" b="1" dirty="0">
+              <a:t>cudaEventRecord(start, stream);</a:t>
+            </a:r>
+            <a:endParaRPr lang="en-US" sz="1300" dirty="0"/>
+          </a:p>
+          <a:p>
+            <a:pPr algn="l" indent="0" marL="0">
+              <a:lnSpc>
+                <a:spcPct val="108000"/>
+              </a:lnSpc>
+              <a:buNone/>
+            </a:pPr>
+            <a:r>
+              <a:rPr lang="en-US" sz="1300" dirty="0">
                 <a:solidFill>
                   <a:srgbClr val="8CC63F"/>
                 </a:solidFill>
@@ -6479,322 +9016,121 @@
                 <a:ea typeface="Courier New" pitchFamily="34" charset="-122"/>
                 <a:cs typeface="Courier New" pitchFamily="34" charset="-120"/>
               </a:rPr>
-              <a:t>(2n + 1)</a:t>
-            </a:r>
-            <a:endParaRPr lang="en-US" sz="1700" dirty="0"/>
-          </a:p>
-        </p:txBody>
-      </p:sp>
-      <p:sp>
-        <p:nvSpPr>
-          <p:cNvPr id="8" name="Text 6"/>
-          <p:cNvSpPr/>
-          <p:nvPr/>
-        </p:nvSpPr>
-        <p:spPr>
-          <a:xfrm>
-            <a:off x="777240" y="3703320"/>
-            <a:ext cx="2987040" cy="411480"/>
-          </a:xfrm>
-          <a:prstGeom prst="rect">
-            <a:avLst/>
-          </a:prstGeom>
-          <a:noFill/>
-          <a:ln/>
-        </p:spPr>
-        <p:txBody>
-          <a:bodyPr wrap="square" lIns="0" tIns="0" rIns="0" bIns="0" rtlCol="0" anchor="ctr"/>
-          <a:lstStyle/>
-          <a:p>
-            <a:pPr indent="0" marL="0">
-              <a:buNone/>
-            </a:pPr>
-            <a:r>
-              <a:rPr lang="en-US" sz="1500" b="1" dirty="0">
-                <a:solidFill>
-                  <a:srgbClr val="E8EDF2"/>
-                </a:solidFill>
-                <a:latin typeface="Malgun Gothic" pitchFamily="34" charset="0"/>
-                <a:ea typeface="Malgun Gothic" pitchFamily="34" charset="-122"/>
-                <a:cs typeface="Malgun Gothic" pitchFamily="34" charset="-120"/>
-              </a:rPr>
-              <a:t>접근 패스 수</a:t>
-            </a:r>
-            <a:endParaRPr lang="en-US" sz="1500" dirty="0"/>
-          </a:p>
-        </p:txBody>
-      </p:sp>
-      <p:sp>
-        <p:nvSpPr>
-          <p:cNvPr id="9" name="Text 7"/>
-          <p:cNvSpPr/>
-          <p:nvPr/>
-        </p:nvSpPr>
-        <p:spPr>
-          <a:xfrm>
-            <a:off x="777240" y="4160520"/>
-            <a:ext cx="2987040" cy="914400"/>
-          </a:xfrm>
-          <a:prstGeom prst="rect">
-            <a:avLst/>
-          </a:prstGeom>
-          <a:noFill/>
-          <a:ln/>
-        </p:spPr>
-        <p:txBody>
-          <a:bodyPr wrap="square" lIns="0" tIns="0" rIns="0" bIns="0" rtlCol="0" anchor="t"/>
-          <a:lstStyle/>
-          <a:p>
-            <a:pPr indent="0" marL="0">
+              <a:t>test10_kernel_write&lt;&lt;&lt;...&gt;&gt;&gt;(...);          // 쓰기</a:t>
+            </a:r>
+            <a:endParaRPr lang="en-US" sz="1300" dirty="0"/>
+          </a:p>
+          <a:p>
+            <a:pPr algn="l" indent="0" marL="0">
               <a:lnSpc>
-                <a:spcPct val="115000"/>
+                <a:spcPct val="108000"/>
               </a:lnSpc>
               <a:buNone/>
             </a:pPr>
             <a:r>
-              <a:rPr lang="en-US" sz="1400" dirty="0">
-                <a:solidFill>
-                  <a:srgbClr val="9AA6B2"/>
-                </a:solidFill>
-                <a:latin typeface="Malgun Gothic" pitchFamily="34" charset="0"/>
-                <a:ea typeface="Malgun Gothic" pitchFamily="34" charset="-122"/>
-                <a:cs typeface="Malgun Gothic" pitchFamily="34" charset="-120"/>
-              </a:rPr>
-              <a:t>쓰기 1회 + 읽고쓰기 n회(각 읽기+쓰기=2)</a:t>
-            </a:r>
-            <a:endParaRPr lang="en-US" sz="1400" dirty="0"/>
-          </a:p>
-        </p:txBody>
-      </p:sp>
-      <p:sp>
-        <p:nvSpPr>
-          <p:cNvPr id="10" name="Shape 8"/>
-          <p:cNvSpPr/>
-          <p:nvPr/>
-        </p:nvSpPr>
-        <p:spPr>
-          <a:xfrm>
-            <a:off x="4358640" y="3017520"/>
-            <a:ext cx="3444240" cy="2194560"/>
-          </a:xfrm>
-          <a:prstGeom prst="roundRect">
-            <a:avLst>
-              <a:gd name="adj" fmla="val 3333"/>
-            </a:avLst>
-          </a:prstGeom>
-          <a:solidFill>
-            <a:srgbClr val="1E232C"/>
-          </a:solidFill>
-          <a:ln/>
-        </p:spPr>
-      </p:sp>
-      <p:sp>
-        <p:nvSpPr>
-          <p:cNvPr id="11" name="Text 9"/>
-          <p:cNvSpPr/>
-          <p:nvPr/>
-        </p:nvSpPr>
-        <p:spPr>
-          <a:xfrm>
-            <a:off x="4587240" y="3200400"/>
-            <a:ext cx="2987040" cy="457200"/>
-          </a:xfrm>
-          <a:prstGeom prst="rect">
-            <a:avLst/>
-          </a:prstGeom>
-          <a:noFill/>
-          <a:ln/>
-        </p:spPr>
-        <p:txBody>
-          <a:bodyPr wrap="square" lIns="0" tIns="0" rIns="0" bIns="0" rtlCol="0" anchor="ctr"/>
-          <a:lstStyle/>
-          <a:p>
-            <a:pPr indent="0" marL="0">
-              <a:buNone/>
-            </a:pPr>
-            <a:r>
-              <a:rPr lang="en-US" sz="1700" b="1" dirty="0">
-                <a:solidFill>
-                  <a:srgbClr val="4FB0C6"/>
+              <a:rPr lang="en-US" sz="1300" dirty="0">
+                <a:solidFill>
+                  <a:srgbClr val="8CC63F"/>
                 </a:solidFill>
                 <a:latin typeface="Courier New" pitchFamily="34" charset="0"/>
                 <a:ea typeface="Courier New" pitchFamily="34" charset="-122"/>
                 <a:cs typeface="Courier New" pitchFamily="34" charset="-120"/>
               </a:rPr>
-              <a:t>tot_num_blocks</a:t>
-            </a:r>
-            <a:endParaRPr lang="en-US" sz="1700" dirty="0"/>
-          </a:p>
-        </p:txBody>
-      </p:sp>
-      <p:sp>
-        <p:nvSpPr>
-          <p:cNvPr id="12" name="Text 10"/>
-          <p:cNvSpPr/>
-          <p:nvPr/>
-        </p:nvSpPr>
-        <p:spPr>
-          <a:xfrm>
-            <a:off x="4587240" y="3703320"/>
-            <a:ext cx="2987040" cy="411480"/>
-          </a:xfrm>
-          <a:prstGeom prst="rect">
-            <a:avLst/>
-          </a:prstGeom>
-          <a:noFill/>
-          <a:ln/>
-        </p:spPr>
-        <p:txBody>
-          <a:bodyPr wrap="square" lIns="0" tIns="0" rIns="0" bIns="0" rtlCol="0" anchor="ctr"/>
-          <a:lstStyle/>
-          <a:p>
-            <a:pPr indent="0" marL="0">
-              <a:buNone/>
-            </a:pPr>
-            <a:r>
-              <a:rPr lang="en-US" sz="1500" b="1" dirty="0">
+              <a:t>for (i=0;i&lt;n;i++) test10_kernel_readwrite&lt;&lt;&lt;...&gt;&gt;&gt;(...); // 읽고쓰기 n회</a:t>
+            </a:r>
+            <a:endParaRPr lang="en-US" sz="1300" dirty="0"/>
+          </a:p>
+          <a:p>
+            <a:pPr algn="l" indent="0" marL="0">
+              <a:lnSpc>
+                <a:spcPct val="108000"/>
+              </a:lnSpc>
+              <a:buNone/>
+            </a:pPr>
+            <a:r>
+              <a:rPr lang="en-US" sz="1300" dirty="0">
                 <a:solidFill>
                   <a:srgbClr val="E8EDF2"/>
-                </a:solidFill>
-                <a:latin typeface="Malgun Gothic" pitchFamily="34" charset="0"/>
-                <a:ea typeface="Malgun Gothic" pitchFamily="34" charset="-122"/>
-                <a:cs typeface="Malgun Gothic" pitchFamily="34" charset="-120"/>
-              </a:rPr>
-              <a:t>전송량 (MB)</a:t>
-            </a:r>
-            <a:endParaRPr lang="en-US" sz="1500" dirty="0"/>
-          </a:p>
-        </p:txBody>
-      </p:sp>
-      <p:sp>
-        <p:nvSpPr>
-          <p:cNvPr id="13" name="Text 11"/>
-          <p:cNvSpPr/>
-          <p:nvPr/>
-        </p:nvSpPr>
-        <p:spPr>
-          <a:xfrm>
-            <a:off x="4587240" y="4160520"/>
-            <a:ext cx="2987040" cy="914400"/>
-          </a:xfrm>
-          <a:prstGeom prst="rect">
-            <a:avLst/>
-          </a:prstGeom>
-          <a:noFill/>
-          <a:ln/>
-        </p:spPr>
-        <p:txBody>
-          <a:bodyPr wrap="square" lIns="0" tIns="0" rIns="0" bIns="0" rtlCol="0" anchor="t"/>
-          <a:lstStyle/>
-          <a:p>
-            <a:pPr indent="0" marL="0">
-              <a:lnSpc>
-                <a:spcPct val="115000"/>
-              </a:lnSpc>
-              <a:buNone/>
-            </a:pPr>
-            <a:r>
-              <a:rPr lang="en-US" sz="1400" dirty="0">
-                <a:solidFill>
-                  <a:srgbClr val="9AA6B2"/>
-                </a:solidFill>
-                <a:latin typeface="Malgun Gothic" pitchFamily="34" charset="0"/>
-                <a:ea typeface="Malgun Gothic" pitchFamily="34" charset="-122"/>
-                <a:cs typeface="Malgun Gothic" pitchFamily="34" charset="-120"/>
-              </a:rPr>
-              <a:t>블록 하나 = BLOCKSIZE = 1 MB</a:t>
-            </a:r>
-            <a:endParaRPr lang="en-US" sz="1400" dirty="0"/>
-          </a:p>
-        </p:txBody>
-      </p:sp>
-      <p:sp>
-        <p:nvSpPr>
-          <p:cNvPr id="14" name="Shape 12"/>
-          <p:cNvSpPr/>
-          <p:nvPr/>
-        </p:nvSpPr>
-        <p:spPr>
-          <a:xfrm>
-            <a:off x="8168640" y="3017520"/>
-            <a:ext cx="3444240" cy="2194560"/>
-          </a:xfrm>
-          <a:prstGeom prst="roundRect">
-            <a:avLst>
-              <a:gd name="adj" fmla="val 3333"/>
-            </a:avLst>
-          </a:prstGeom>
-          <a:solidFill>
-            <a:srgbClr val="1E232C"/>
-          </a:solidFill>
-          <a:ln/>
-        </p:spPr>
-      </p:sp>
-      <p:sp>
-        <p:nvSpPr>
-          <p:cNvPr id="15" name="Text 13"/>
-          <p:cNvSpPr/>
-          <p:nvPr/>
-        </p:nvSpPr>
-        <p:spPr>
-          <a:xfrm>
-            <a:off x="8397240" y="3200400"/>
-            <a:ext cx="2987040" cy="457200"/>
-          </a:xfrm>
-          <a:prstGeom prst="rect">
-            <a:avLst/>
-          </a:prstGeom>
-          <a:noFill/>
-          <a:ln/>
-        </p:spPr>
-        <p:txBody>
-          <a:bodyPr wrap="square" lIns="0" tIns="0" rIns="0" bIns="0" rtlCol="0" anchor="ctr"/>
-          <a:lstStyle/>
-          <a:p>
-            <a:pPr indent="0" marL="0">
-              <a:buNone/>
-            </a:pPr>
-            <a:r>
-              <a:rPr lang="en-US" sz="1700" b="1" dirty="0">
-                <a:solidFill>
-                  <a:srgbClr val="E0A458"/>
                 </a:solidFill>
                 <a:latin typeface="Courier New" pitchFamily="34" charset="0"/>
                 <a:ea typeface="Courier New" pitchFamily="34" charset="-122"/>
                 <a:cs typeface="Courier New" pitchFamily="34" charset="-120"/>
               </a:rPr>
-              <a:t>elapsedtime</a:t>
-            </a:r>
-            <a:endParaRPr lang="en-US" sz="1700" dirty="0"/>
-          </a:p>
-        </p:txBody>
-      </p:sp>
-      <p:sp>
-        <p:nvSpPr>
-          <p:cNvPr id="16" name="Text 14"/>
-          <p:cNvSpPr/>
-          <p:nvPr/>
-        </p:nvSpPr>
-        <p:spPr>
-          <a:xfrm>
-            <a:off x="8397240" y="3703320"/>
-            <a:ext cx="2987040" cy="411480"/>
-          </a:xfrm>
-          <a:prstGeom prst="rect">
-            <a:avLst/>
-          </a:prstGeom>
-          <a:noFill/>
-          <a:ln/>
-        </p:spPr>
-        <p:txBody>
-          <a:bodyPr wrap="square" lIns="0" tIns="0" rIns="0" bIns="0" rtlCol="0" anchor="ctr"/>
+              <a:t>cudaEventRecord(stop, stream);</a:t>
+            </a:r>
+            <a:endParaRPr lang="en-US" sz="1300" dirty="0"/>
+          </a:p>
+          <a:p>
+            <a:pPr algn="l" indent="0" marL="0">
+              <a:lnSpc>
+                <a:spcPct val="108000"/>
+              </a:lnSpc>
+              <a:buNone/>
+            </a:pPr>
+            <a:r>
+              <a:rPr lang="en-US" sz="1300" dirty="0">
+                <a:solidFill>
+                  <a:srgbClr val="E0A458"/>
+                </a:solidFill>
+                <a:latin typeface="Courier New" pitchFamily="34" charset="0"/>
+                <a:ea typeface="Courier New" pitchFamily="34" charset="-122"/>
+                <a:cs typeface="Courier New" pitchFamily="34" charset="-120"/>
+              </a:rPr>
+              <a:t>cudaEventSynchronize(stop);                 // GPU가 끝날 때까지 대기</a:t>
+            </a:r>
+            <a:endParaRPr lang="en-US" sz="1300" dirty="0"/>
+          </a:p>
+          <a:p>
+            <a:pPr algn="l" indent="0" marL="0">
+              <a:lnSpc>
+                <a:spcPct val="108000"/>
+              </a:lnSpc>
+              <a:buNone/>
+            </a:pPr>
+            <a:r>
+              <a:rPr lang="en-US" sz="1300" dirty="0">
+                <a:solidFill>
+                  <a:srgbClr val="4FB0C6"/>
+                </a:solidFill>
+                <a:latin typeface="Courier New" pitchFamily="34" charset="0"/>
+                <a:ea typeface="Courier New" pitchFamily="34" charset="-122"/>
+                <a:cs typeface="Courier New" pitchFamily="34" charset="-120"/>
+              </a:rPr>
+              <a:t>cudaEventElapsedTime(&amp;elapsedtime, start, stop); // 밀리초 경과시간</a:t>
+            </a:r>
+            <a:endParaRPr lang="en-US" sz="1300" dirty="0"/>
+          </a:p>
+        </p:txBody>
+      </p:sp>
+      <p:sp>
+        <p:nvSpPr>
+          <p:cNvPr id="6" name="Text 4"/>
+          <p:cNvSpPr/>
+          <p:nvPr/>
+        </p:nvSpPr>
+        <p:spPr>
+          <a:xfrm>
+            <a:off x="548640" y="4572000"/>
+            <a:ext cx="11064240" cy="1371600"/>
+          </a:xfrm>
+          <a:prstGeom prst="rect">
+            <a:avLst/>
+          </a:prstGeom>
+          <a:noFill/>
+          <a:ln/>
+        </p:spPr>
+        <p:txBody>
+          <a:bodyPr wrap="square" lIns="0" tIns="0" rIns="0" bIns="0" rtlCol="0" anchor="t"/>
           <a:lstStyle/>
           <a:p>
             <a:pPr indent="0" marL="0">
-              <a:buNone/>
-            </a:pPr>
-            <a:r>
-              <a:rPr lang="en-US" sz="1500" b="1" dirty="0">
+              <a:spcAft>
+                <a:spcPts val="600"/>
+              </a:spcAft>
+              <a:buNone/>
+            </a:pPr>
+            <a:r>
+              <a:rPr lang="en-US" sz="1600" b="1" dirty="0">
                 <a:solidFill>
                   <a:srgbClr val="E8EDF2"/>
                 </a:solidFill>
@@ -6802,41 +9138,16 @@
                 <a:ea typeface="Malgun Gothic" pitchFamily="34" charset="-122"/>
                 <a:cs typeface="Malgun Gothic" pitchFamily="34" charset="-120"/>
               </a:rPr>
-              <a:t>경과 시간 (ms)</a:t>
-            </a:r>
-            <a:endParaRPr lang="en-US" sz="1500" dirty="0"/>
-          </a:p>
-        </p:txBody>
-      </p:sp>
-      <p:sp>
-        <p:nvSpPr>
-          <p:cNvPr id="17" name="Text 15"/>
-          <p:cNvSpPr/>
-          <p:nvPr/>
-        </p:nvSpPr>
-        <p:spPr>
-          <a:xfrm>
-            <a:off x="8397240" y="4160520"/>
-            <a:ext cx="2987040" cy="914400"/>
-          </a:xfrm>
-          <a:prstGeom prst="rect">
-            <a:avLst/>
-          </a:prstGeom>
-          <a:noFill/>
-          <a:ln/>
-        </p:spPr>
-        <p:txBody>
-          <a:bodyPr wrap="square" lIns="0" tIns="0" rIns="0" bIns="0" rtlCol="0" anchor="t"/>
-          <a:lstStyle/>
+              <a:t>왜 CPU 타이머가 아니라 GPU 이벤트?</a:t>
+            </a:r>
+            <a:endParaRPr lang="en-US" sz="1600" dirty="0"/>
+          </a:p>
           <a:p>
             <a:pPr indent="0" marL="0">
-              <a:lnSpc>
-                <a:spcPct val="115000"/>
-              </a:lnSpc>
-              <a:buNone/>
-            </a:pPr>
-            <a:r>
-              <a:rPr lang="en-US" sz="1400" dirty="0">
+              <a:buNone/>
+            </a:pPr>
+            <a:r>
+              <a:rPr lang="en-US" sz="1600" dirty="0">
                 <a:solidFill>
                   <a:srgbClr val="9AA6B2"/>
                 </a:solidFill>
@@ -6844,38 +9155,27 @@
                 <a:ea typeface="Malgun Gothic" pitchFamily="34" charset="-122"/>
                 <a:cs typeface="Malgun Gothic" pitchFamily="34" charset="-120"/>
               </a:rPr>
-              <a:t>이벤트로 잰 밀리초</a:t>
-            </a:r>
-            <a:endParaRPr lang="en-US" sz="1400" dirty="0"/>
-          </a:p>
-        </p:txBody>
-      </p:sp>
-      <p:sp>
-        <p:nvSpPr>
-          <p:cNvPr id="18" name="Text 16"/>
-          <p:cNvSpPr/>
-          <p:nvPr/>
-        </p:nvSpPr>
-        <p:spPr>
-          <a:xfrm>
-            <a:off x="548640" y="5440680"/>
-            <a:ext cx="11064240" cy="457200"/>
-          </a:xfrm>
-          <a:prstGeom prst="rect">
-            <a:avLst/>
-          </a:prstGeom>
-          <a:noFill/>
-          <a:ln/>
-        </p:spPr>
-        <p:txBody>
-          <a:bodyPr wrap="square" lIns="0" tIns="0" rIns="0" bIns="0" rtlCol="0" anchor="ctr"/>
-          <a:lstStyle/>
-          <a:p>
+              <a:t>커널은 비동기(asynchronous) 실행 — CPU는 커널을 던지고 바로 다음 줄로 갑니다. GPU 타임라인 위에 </a:t>
+            </a:r>
             <a:pPr indent="0" marL="0">
               <a:buNone/>
             </a:pPr>
             <a:r>
-              <a:rPr lang="en-US" sz="1400" i="1" dirty="0">
+              <a:rPr lang="en-US" sz="1600" b="1" dirty="0">
+                <a:solidFill>
+                  <a:srgbClr val="4FB0C6"/>
+                </a:solidFill>
+                <a:latin typeface="Malgun Gothic" pitchFamily="34" charset="0"/>
+                <a:ea typeface="Malgun Gothic" pitchFamily="34" charset="-122"/>
+                <a:cs typeface="Malgun Gothic" pitchFamily="34" charset="-120"/>
+              </a:rPr>
+              <a:t>이벤트를 찍어야</a:t>
+            </a:r>
+            <a:pPr indent="0" marL="0">
+              <a:buNone/>
+            </a:pPr>
+            <a:r>
+              <a:rPr lang="en-US" sz="1600" dirty="0">
                 <a:solidFill>
                   <a:srgbClr val="9AA6B2"/>
                 </a:solidFill>
@@ -6883,9 +9183,9 @@
                 <a:ea typeface="Malgun Gothic" pitchFamily="34" charset="-122"/>
                 <a:cs typeface="Malgun Gothic" pitchFamily="34" charset="-120"/>
               </a:rPr>
-              <a:t>MB ÷ ms = GB/s. 실측값을 GPU 스펙의 이론 대역폭과 비교하면 보통 60~90% 수준입니다.</a:t>
-            </a:r>
-            <a:endParaRPr lang="en-US" sz="1400" dirty="0"/>
+              <a:t> 진짜 커널 시간을 잴 수 있습니다.</a:t>
+            </a:r>
+            <a:endParaRPr lang="en-US" sz="1600" dirty="0"/>
           </a:p>
         </p:txBody>
       </p:sp>
@@ -6958,7 +9258,7 @@
                 <a:ea typeface="Courier New" pitchFamily="34" charset="-122"/>
                 <a:cs typeface="Courier New" pitchFamily="34" charset="-120"/>
               </a:rPr>
-              <a:t>7</a:t>
+              <a:t>6</a:t>
             </a:r>
             <a:endParaRPr lang="en-US" sz="2200" dirty="0"/>
           </a:p>
@@ -6997,7 +9297,7 @@
                 <a:ea typeface="Malgun Gothic" pitchFamily="34" charset="-122"/>
                 <a:cs typeface="Malgun Gothic" pitchFamily="34" charset="-120"/>
               </a:rPr>
-              <a:t>스트림(stream) 맛보기</a:t>
+              <a:t>대역폭(bandwidth) 계산 뜯어보기</a:t>
             </a:r>
             <a:endParaRPr lang="en-US" sz="3000" dirty="0"/>
           </a:p>
@@ -7012,11 +9312,11 @@
         <p:spPr>
           <a:xfrm>
             <a:off x="548640" y="1554480"/>
-            <a:ext cx="11064240" cy="1371600"/>
+            <a:ext cx="11064240" cy="1188720"/>
           </a:xfrm>
           <a:prstGeom prst="roundRect">
             <a:avLst>
-              <a:gd name="adj" fmla="val 4000"/>
+              <a:gd name="adj" fmla="val 4615"/>
             </a:avLst>
           </a:prstGeom>
           <a:solidFill>
@@ -7039,7 +9339,7 @@
         <p:spPr>
           <a:xfrm>
             <a:off x="749808" y="1700784"/>
-            <a:ext cx="10661904" cy="1078992"/>
+            <a:ext cx="10661904" cy="896112"/>
           </a:xfrm>
           <a:prstGeom prst="rect">
             <a:avLst/>
@@ -7058,17 +9358,17 @@
               <a:buNone/>
             </a:pPr>
             <a:r>
-              <a:rPr lang="en-US" sz="1350" dirty="0">
-                <a:solidFill>
-                  <a:srgbClr val="E8EDF2"/>
+              <a:rPr lang="en-US" sz="1400" dirty="0">
+                <a:solidFill>
+                  <a:srgbClr val="8CC63F"/>
                 </a:solidFill>
                 <a:latin typeface="Courier New" pitchFamily="34" charset="0"/>
                 <a:ea typeface="Courier New" pitchFamily="34" charset="-122"/>
                 <a:cs typeface="Courier New" pitchFamily="34" charset="-120"/>
               </a:rPr>
-              <a:t>cudaStreamCreate(&amp;stream);</a:t>
-            </a:r>
-            <a:endParaRPr lang="en-US" sz="1350" dirty="0"/>
+              <a:t>bandwidth = (2*n + 1) * tot_num_blocks / elapsedtime   // GB/s</a:t>
+            </a:r>
+            <a:endParaRPr lang="en-US" sz="1400" dirty="0"/>
           </a:p>
           <a:p>
             <a:pPr algn="l" indent="0" marL="0">
@@ -7078,100 +9378,107 @@
               <a:buNone/>
             </a:pPr>
             <a:r>
-              <a:rPr lang="en-US" sz="1350" dirty="0">
-                <a:solidFill>
-                  <a:srgbClr val="8CC63F"/>
+              <a:rPr lang="en-US" sz="1400" dirty="0">
+                <a:solidFill>
+                  <a:srgbClr val="9AA6B2"/>
                 </a:solidFill>
                 <a:latin typeface="Courier New" pitchFamily="34" charset="0"/>
                 <a:ea typeface="Courier New" pitchFamily="34" charset="-122"/>
                 <a:cs typeface="Courier New" pitchFamily="34" charset="-120"/>
               </a:rPr>
-              <a:t>test10_kernel_write&lt;&lt;&lt;gridDim, blockDim, 0, stream&gt;&gt;&gt;(...);</a:t>
-            </a:r>
-            <a:endParaRPr lang="en-US" sz="1350" dirty="0"/>
-          </a:p>
-          <a:p>
-            <a:pPr algn="l" indent="0" marL="0">
-              <a:lnSpc>
-                <a:spcPct val="108000"/>
-              </a:lnSpc>
-              <a:buNone/>
-            </a:pPr>
-            <a:r>
-              <a:rPr lang="en-US" sz="1350" dirty="0">
-                <a:solidFill>
-                  <a:srgbClr val="9AA6B2"/>
+              <a:t>//           └ 접근 횟수 ┘   └ MB 단위 ┘   └ ms 단위 ┘</a:t>
+            </a:r>
+            <a:endParaRPr lang="en-US" sz="1400" dirty="0"/>
+          </a:p>
+        </p:txBody>
+      </p:sp>
+      <p:sp>
+        <p:nvSpPr>
+          <p:cNvPr id="6" name="Shape 4"/>
+          <p:cNvSpPr/>
+          <p:nvPr/>
+        </p:nvSpPr>
+        <p:spPr>
+          <a:xfrm>
+            <a:off x="548640" y="3017520"/>
+            <a:ext cx="3444240" cy="2194560"/>
+          </a:xfrm>
+          <a:prstGeom prst="roundRect">
+            <a:avLst>
+              <a:gd name="adj" fmla="val 3333"/>
+            </a:avLst>
+          </a:prstGeom>
+          <a:solidFill>
+            <a:srgbClr val="1E232C"/>
+          </a:solidFill>
+          <a:ln/>
+        </p:spPr>
+      </p:sp>
+      <p:sp>
+        <p:nvSpPr>
+          <p:cNvPr id="7" name="Text 5"/>
+          <p:cNvSpPr/>
+          <p:nvPr/>
+        </p:nvSpPr>
+        <p:spPr>
+          <a:xfrm>
+            <a:off x="777240" y="3200400"/>
+            <a:ext cx="2987040" cy="457200"/>
+          </a:xfrm>
+          <a:prstGeom prst="rect">
+            <a:avLst/>
+          </a:prstGeom>
+          <a:noFill/>
+          <a:ln/>
+        </p:spPr>
+        <p:txBody>
+          <a:bodyPr wrap="square" lIns="0" tIns="0" rIns="0" bIns="0" rtlCol="0" anchor="ctr"/>
+          <a:lstStyle/>
+          <a:p>
+            <a:pPr indent="0" marL="0">
+              <a:buNone/>
+            </a:pPr>
+            <a:r>
+              <a:rPr lang="en-US" sz="1700" b="1" dirty="0">
+                <a:solidFill>
+                  <a:srgbClr val="8CC63F"/>
                 </a:solidFill>
                 <a:latin typeface="Courier New" pitchFamily="34" charset="0"/>
                 <a:ea typeface="Courier New" pitchFamily="34" charset="-122"/>
                 <a:cs typeface="Courier New" pitchFamily="34" charset="-120"/>
               </a:rPr>
-              <a:t>//                                    ▲          ▲</a:t>
-            </a:r>
-            <a:endParaRPr lang="en-US" sz="1350" dirty="0"/>
-          </a:p>
-          <a:p>
-            <a:pPr algn="l" indent="0" marL="0">
-              <a:lnSpc>
-                <a:spcPct val="108000"/>
-              </a:lnSpc>
-              <a:buNone/>
-            </a:pPr>
-            <a:r>
-              <a:rPr lang="en-US" sz="1350" dirty="0">
-                <a:solidFill>
-                  <a:srgbClr val="9AA6B2"/>
-                </a:solidFill>
-                <a:latin typeface="Courier New" pitchFamily="34" charset="0"/>
-                <a:ea typeface="Courier New" pitchFamily="34" charset="-122"/>
-                <a:cs typeface="Courier New" pitchFamily="34" charset="-120"/>
-              </a:rPr>
-              <a:t>//                          공유메모리 크기   스트림</a:t>
-            </a:r>
-            <a:endParaRPr lang="en-US" sz="1350" dirty="0"/>
-          </a:p>
-        </p:txBody>
-      </p:sp>
-      <p:sp>
-        <p:nvSpPr>
-          <p:cNvPr id="6" name="Text 4"/>
-          <p:cNvSpPr/>
-          <p:nvPr/>
-        </p:nvSpPr>
-        <p:spPr>
-          <a:xfrm>
-            <a:off x="548640" y="3108960"/>
-            <a:ext cx="11064240" cy="914400"/>
-          </a:xfrm>
-          <a:prstGeom prst="rect">
-            <a:avLst/>
-          </a:prstGeom>
-          <a:noFill/>
-          <a:ln/>
-        </p:spPr>
-        <p:txBody>
-          <a:bodyPr wrap="square" lIns="0" tIns="0" rIns="0" bIns="0" rtlCol="0" anchor="t"/>
+              <a:t>(2n + 1)</a:t>
+            </a:r>
+            <a:endParaRPr lang="en-US" sz="1700" dirty="0"/>
+          </a:p>
+        </p:txBody>
+      </p:sp>
+      <p:sp>
+        <p:nvSpPr>
+          <p:cNvPr id="8" name="Text 6"/>
+          <p:cNvSpPr/>
+          <p:nvPr/>
+        </p:nvSpPr>
+        <p:spPr>
+          <a:xfrm>
+            <a:off x="777240" y="3703320"/>
+            <a:ext cx="2987040" cy="411480"/>
+          </a:xfrm>
+          <a:prstGeom prst="rect">
+            <a:avLst/>
+          </a:prstGeom>
+          <a:noFill/>
+          <a:ln/>
+        </p:spPr>
+        <p:txBody>
+          <a:bodyPr wrap="square" lIns="0" tIns="0" rIns="0" bIns="0" rtlCol="0" anchor="ctr"/>
           <a:lstStyle/>
           <a:p>
             <a:pPr indent="0" marL="0">
               <a:buNone/>
             </a:pPr>
             <a:r>
-              <a:rPr lang="en-US" sz="1700" b="1" dirty="0">
-                <a:solidFill>
-                  <a:srgbClr val="4FB0C6"/>
-                </a:solidFill>
-                <a:latin typeface="Malgun Gothic" pitchFamily="34" charset="0"/>
-                <a:ea typeface="Malgun Gothic" pitchFamily="34" charset="-122"/>
-                <a:cs typeface="Malgun Gothic" pitchFamily="34" charset="-120"/>
-              </a:rPr>
-              <a:t>스트림(stream)</a:t>
-            </a:r>
-            <a:pPr indent="0" marL="0">
-              <a:buNone/>
-            </a:pPr>
-            <a:r>
-              <a:rPr lang="en-US" sz="1700" dirty="0">
+              <a:rPr lang="en-US" sz="1500" b="1" dirty="0">
                 <a:solidFill>
                   <a:srgbClr val="E8EDF2"/>
                 </a:solidFill>
@@ -7179,70 +9486,9 @@
                 <a:ea typeface="Malgun Gothic" pitchFamily="34" charset="-122"/>
                 <a:cs typeface="Malgun Gothic" pitchFamily="34" charset="-120"/>
               </a:rPr>
-              <a:t>은 GPU 작업을 순서대로 처리하는 "작업 큐"입니다. Test 10은 하나의 스트림에 쓰기·읽기 커널을 순서대로 넣습니다.</a:t>
-            </a:r>
-            <a:endParaRPr lang="en-US" sz="1700" dirty="0"/>
-          </a:p>
-        </p:txBody>
-      </p:sp>
-      <p:sp>
-        <p:nvSpPr>
-          <p:cNvPr id="7" name="Shape 5"/>
-          <p:cNvSpPr/>
-          <p:nvPr/>
-        </p:nvSpPr>
-        <p:spPr>
-          <a:xfrm>
-            <a:off x="548640" y="4114800"/>
-            <a:ext cx="5349240" cy="1554480"/>
-          </a:xfrm>
-          <a:prstGeom prst="roundRect">
-            <a:avLst>
-              <a:gd name="adj" fmla="val 4706"/>
-            </a:avLst>
-          </a:prstGeom>
-          <a:solidFill>
-            <a:srgbClr val="1E232C"/>
-          </a:solidFill>
-          <a:ln/>
-        </p:spPr>
-      </p:sp>
-      <p:sp>
-        <p:nvSpPr>
-          <p:cNvPr id="8" name="Text 6"/>
-          <p:cNvSpPr/>
-          <p:nvPr/>
-        </p:nvSpPr>
-        <p:spPr>
-          <a:xfrm>
-            <a:off x="777240" y="4297680"/>
-            <a:ext cx="4892040" cy="457200"/>
-          </a:xfrm>
-          <a:prstGeom prst="rect">
-            <a:avLst/>
-          </a:prstGeom>
-          <a:noFill/>
-          <a:ln/>
-        </p:spPr>
-        <p:txBody>
-          <a:bodyPr wrap="square" lIns="0" tIns="0" rIns="0" bIns="0" rtlCol="0" anchor="ctr"/>
-          <a:lstStyle/>
-          <a:p>
-            <a:pPr indent="0" marL="0">
-              <a:buNone/>
-            </a:pPr>
-            <a:r>
-              <a:rPr lang="en-US" sz="1400" b="1" dirty="0">
-                <a:solidFill>
-                  <a:srgbClr val="8CC63F"/>
-                </a:solidFill>
-                <a:latin typeface="Courier New" pitchFamily="34" charset="0"/>
-                <a:ea typeface="Courier New" pitchFamily="34" charset="-122"/>
-                <a:cs typeface="Courier New" pitchFamily="34" charset="-120"/>
-              </a:rPr>
-              <a:t>&lt;&lt;&lt;grid, block, 0, stream&gt;&gt;&gt;</a:t>
-            </a:r>
-            <a:endParaRPr lang="en-US" sz="1400" dirty="0"/>
+              <a:t>접근 패스 수</a:t>
+            </a:r>
+            <a:endParaRPr lang="en-US" sz="1500" dirty="0"/>
           </a:p>
         </p:txBody>
       </p:sp>
@@ -7254,8 +9500,8 @@
         </p:nvSpPr>
         <p:spPr>
           <a:xfrm>
-            <a:off x="777240" y="4754880"/>
-            <a:ext cx="4892040" cy="822960"/>
+            <a:off x="777240" y="4160520"/>
+            <a:ext cx="2987040" cy="914400"/>
           </a:xfrm>
           <a:prstGeom prst="rect">
             <a:avLst/>
@@ -7276,13 +9522,13 @@
             <a:r>
               <a:rPr lang="en-US" sz="1400" dirty="0">
                 <a:solidFill>
-                  <a:srgbClr val="E8EDF2"/>
-                </a:solidFill>
-                <a:latin typeface="Malgun Gothic" pitchFamily="34" charset="0"/>
-                <a:ea typeface="Malgun Gothic" pitchFamily="34" charset="-122"/>
-                <a:cs typeface="Malgun Gothic" pitchFamily="34" charset="-120"/>
-              </a:rPr>
-              <a:t>실행 구성의 3·4번째 인자: 공유 메모리 크기(0), 스트림. 세션 1에선 생략했던 부분입니다.</a:t>
+                  <a:srgbClr val="9AA6B2"/>
+                </a:solidFill>
+                <a:latin typeface="Malgun Gothic" pitchFamily="34" charset="0"/>
+                <a:ea typeface="Malgun Gothic" pitchFamily="34" charset="-122"/>
+                <a:cs typeface="Malgun Gothic" pitchFamily="34" charset="-120"/>
+              </a:rPr>
+              <a:t>쓰기 1회 + 읽고쓰기 n회(각 읽기+쓰기=2)</a:t>
             </a:r>
             <a:endParaRPr lang="en-US" sz="1400" dirty="0"/>
           </a:p>
@@ -7296,12 +9542,12 @@
         </p:nvSpPr>
         <p:spPr>
           <a:xfrm>
-            <a:off x="6263640" y="4114800"/>
-            <a:ext cx="5349240" cy="1554480"/>
+            <a:off x="4358640" y="3017520"/>
+            <a:ext cx="3444240" cy="2194560"/>
           </a:xfrm>
           <a:prstGeom prst="roundRect">
             <a:avLst>
-              <a:gd name="adj" fmla="val 4706"/>
+              <a:gd name="adj" fmla="val 3333"/>
             </a:avLst>
           </a:prstGeom>
           <a:solidFill>
@@ -7318,8 +9564,8 @@
         </p:nvSpPr>
         <p:spPr>
           <a:xfrm>
-            <a:off x="6492240" y="4297680"/>
-            <a:ext cx="4892040" cy="457200"/>
+            <a:off x="4587240" y="3200400"/>
+            <a:ext cx="2987040" cy="457200"/>
           </a:xfrm>
           <a:prstGeom prst="rect">
             <a:avLst/>
@@ -7335,15 +9581,54 @@
               <a:buNone/>
             </a:pPr>
             <a:r>
+              <a:rPr lang="en-US" sz="1700" b="1" dirty="0">
+                <a:solidFill>
+                  <a:srgbClr val="4FB0C6"/>
+                </a:solidFill>
+                <a:latin typeface="Courier New" pitchFamily="34" charset="0"/>
+                <a:ea typeface="Courier New" pitchFamily="34" charset="-122"/>
+                <a:cs typeface="Courier New" pitchFamily="34" charset="-120"/>
+              </a:rPr>
+              <a:t>tot_num_blocks</a:t>
+            </a:r>
+            <a:endParaRPr lang="en-US" sz="1700" dirty="0"/>
+          </a:p>
+        </p:txBody>
+      </p:sp>
+      <p:sp>
+        <p:nvSpPr>
+          <p:cNvPr id="12" name="Text 10"/>
+          <p:cNvSpPr/>
+          <p:nvPr/>
+        </p:nvSpPr>
+        <p:spPr>
+          <a:xfrm>
+            <a:off x="4587240" y="3703320"/>
+            <a:ext cx="2987040" cy="411480"/>
+          </a:xfrm>
+          <a:prstGeom prst="rect">
+            <a:avLst/>
+          </a:prstGeom>
+          <a:noFill/>
+          <a:ln/>
+        </p:spPr>
+        <p:txBody>
+          <a:bodyPr wrap="square" lIns="0" tIns="0" rIns="0" bIns="0" rtlCol="0" anchor="ctr"/>
+          <a:lstStyle/>
+          <a:p>
+            <a:pPr indent="0" marL="0">
+              <a:buNone/>
+            </a:pPr>
+            <a:r>
               <a:rPr lang="en-US" sz="1500" b="1" dirty="0">
                 <a:solidFill>
-                  <a:srgbClr val="4FB0C6"/>
-                </a:solidFill>
-                <a:latin typeface="Malgun Gothic" pitchFamily="34" charset="0"/>
-                <a:ea typeface="Malgun Gothic" pitchFamily="34" charset="-122"/>
-                <a:cs typeface="Malgun Gothic" pitchFamily="34" charset="-120"/>
-              </a:rPr>
-              <a:t>왜 이벤트도 스트림에?</a:t>
+                  <a:srgbClr val="E8EDF2"/>
+                </a:solidFill>
+                <a:latin typeface="Malgun Gothic" pitchFamily="34" charset="0"/>
+                <a:ea typeface="Malgun Gothic" pitchFamily="34" charset="-122"/>
+                <a:cs typeface="Malgun Gothic" pitchFamily="34" charset="-120"/>
+              </a:rPr>
+              <a:t>전송량 (MB)</a:t>
             </a:r>
             <a:endParaRPr lang="en-US" sz="1500" dirty="0"/>
           </a:p>
@@ -7351,14 +9636,14 @@
       </p:sp>
       <p:sp>
         <p:nvSpPr>
-          <p:cNvPr id="12" name="Text 10"/>
-          <p:cNvSpPr/>
-          <p:nvPr/>
-        </p:nvSpPr>
-        <p:spPr>
-          <a:xfrm>
-            <a:off x="6492240" y="4754880"/>
-            <a:ext cx="4892040" cy="822960"/>
+          <p:cNvPr id="13" name="Text 11"/>
+          <p:cNvSpPr/>
+          <p:nvPr/>
+        </p:nvSpPr>
+        <p:spPr>
+          <a:xfrm>
+            <a:off x="4587240" y="4160520"/>
+            <a:ext cx="2987040" cy="914400"/>
           </a:xfrm>
           <a:prstGeom prst="rect">
             <a:avLst/>
@@ -7379,13 +9664,194 @@
             <a:r>
               <a:rPr lang="en-US" sz="1400" dirty="0">
                 <a:solidFill>
+                  <a:srgbClr val="9AA6B2"/>
+                </a:solidFill>
+                <a:latin typeface="Malgun Gothic" pitchFamily="34" charset="0"/>
+                <a:ea typeface="Malgun Gothic" pitchFamily="34" charset="-122"/>
+                <a:cs typeface="Malgun Gothic" pitchFamily="34" charset="-120"/>
+              </a:rPr>
+              <a:t>블록 하나 = BLOCKSIZE = 1 MB</a:t>
+            </a:r>
+            <a:endParaRPr lang="en-US" sz="1400" dirty="0"/>
+          </a:p>
+        </p:txBody>
+      </p:sp>
+      <p:sp>
+        <p:nvSpPr>
+          <p:cNvPr id="14" name="Shape 12"/>
+          <p:cNvSpPr/>
+          <p:nvPr/>
+        </p:nvSpPr>
+        <p:spPr>
+          <a:xfrm>
+            <a:off x="8168640" y="3017520"/>
+            <a:ext cx="3444240" cy="2194560"/>
+          </a:xfrm>
+          <a:prstGeom prst="roundRect">
+            <a:avLst>
+              <a:gd name="adj" fmla="val 3333"/>
+            </a:avLst>
+          </a:prstGeom>
+          <a:solidFill>
+            <a:srgbClr val="1E232C"/>
+          </a:solidFill>
+          <a:ln/>
+        </p:spPr>
+      </p:sp>
+      <p:sp>
+        <p:nvSpPr>
+          <p:cNvPr id="15" name="Text 13"/>
+          <p:cNvSpPr/>
+          <p:nvPr/>
+        </p:nvSpPr>
+        <p:spPr>
+          <a:xfrm>
+            <a:off x="8397240" y="3200400"/>
+            <a:ext cx="2987040" cy="457200"/>
+          </a:xfrm>
+          <a:prstGeom prst="rect">
+            <a:avLst/>
+          </a:prstGeom>
+          <a:noFill/>
+          <a:ln/>
+        </p:spPr>
+        <p:txBody>
+          <a:bodyPr wrap="square" lIns="0" tIns="0" rIns="0" bIns="0" rtlCol="0" anchor="ctr"/>
+          <a:lstStyle/>
+          <a:p>
+            <a:pPr indent="0" marL="0">
+              <a:buNone/>
+            </a:pPr>
+            <a:r>
+              <a:rPr lang="en-US" sz="1700" b="1" dirty="0">
+                <a:solidFill>
+                  <a:srgbClr val="E0A458"/>
+                </a:solidFill>
+                <a:latin typeface="Courier New" pitchFamily="34" charset="0"/>
+                <a:ea typeface="Courier New" pitchFamily="34" charset="-122"/>
+                <a:cs typeface="Courier New" pitchFamily="34" charset="-120"/>
+              </a:rPr>
+              <a:t>elapsedtime</a:t>
+            </a:r>
+            <a:endParaRPr lang="en-US" sz="1700" dirty="0"/>
+          </a:p>
+        </p:txBody>
+      </p:sp>
+      <p:sp>
+        <p:nvSpPr>
+          <p:cNvPr id="16" name="Text 14"/>
+          <p:cNvSpPr/>
+          <p:nvPr/>
+        </p:nvSpPr>
+        <p:spPr>
+          <a:xfrm>
+            <a:off x="8397240" y="3703320"/>
+            <a:ext cx="2987040" cy="411480"/>
+          </a:xfrm>
+          <a:prstGeom prst="rect">
+            <a:avLst/>
+          </a:prstGeom>
+          <a:noFill/>
+          <a:ln/>
+        </p:spPr>
+        <p:txBody>
+          <a:bodyPr wrap="square" lIns="0" tIns="0" rIns="0" bIns="0" rtlCol="0" anchor="ctr"/>
+          <a:lstStyle/>
+          <a:p>
+            <a:pPr indent="0" marL="0">
+              <a:buNone/>
+            </a:pPr>
+            <a:r>
+              <a:rPr lang="en-US" sz="1500" b="1" dirty="0">
+                <a:solidFill>
                   <a:srgbClr val="E8EDF2"/>
                 </a:solidFill>
                 <a:latin typeface="Malgun Gothic" pitchFamily="34" charset="0"/>
                 <a:ea typeface="Malgun Gothic" pitchFamily="34" charset="-122"/>
                 <a:cs typeface="Malgun Gothic" pitchFamily="34" charset="-120"/>
               </a:rPr>
-              <a:t>이벤트를 같은 스트림에 기록해야 그 스트림의 커널들 시간을 정확히 잽니다.</a:t>
+              <a:t>경과 시간 (ms)</a:t>
+            </a:r>
+            <a:endParaRPr lang="en-US" sz="1500" dirty="0"/>
+          </a:p>
+        </p:txBody>
+      </p:sp>
+      <p:sp>
+        <p:nvSpPr>
+          <p:cNvPr id="17" name="Text 15"/>
+          <p:cNvSpPr/>
+          <p:nvPr/>
+        </p:nvSpPr>
+        <p:spPr>
+          <a:xfrm>
+            <a:off x="8397240" y="4160520"/>
+            <a:ext cx="2987040" cy="914400"/>
+          </a:xfrm>
+          <a:prstGeom prst="rect">
+            <a:avLst/>
+          </a:prstGeom>
+          <a:noFill/>
+          <a:ln/>
+        </p:spPr>
+        <p:txBody>
+          <a:bodyPr wrap="square" lIns="0" tIns="0" rIns="0" bIns="0" rtlCol="0" anchor="t"/>
+          <a:lstStyle/>
+          <a:p>
+            <a:pPr indent="0" marL="0">
+              <a:lnSpc>
+                <a:spcPct val="115000"/>
+              </a:lnSpc>
+              <a:buNone/>
+            </a:pPr>
+            <a:r>
+              <a:rPr lang="en-US" sz="1400" dirty="0">
+                <a:solidFill>
+                  <a:srgbClr val="9AA6B2"/>
+                </a:solidFill>
+                <a:latin typeface="Malgun Gothic" pitchFamily="34" charset="0"/>
+                <a:ea typeface="Malgun Gothic" pitchFamily="34" charset="-122"/>
+                <a:cs typeface="Malgun Gothic" pitchFamily="34" charset="-120"/>
+              </a:rPr>
+              <a:t>이벤트로 잰 밀리초</a:t>
+            </a:r>
+            <a:endParaRPr lang="en-US" sz="1400" dirty="0"/>
+          </a:p>
+        </p:txBody>
+      </p:sp>
+      <p:sp>
+        <p:nvSpPr>
+          <p:cNvPr id="18" name="Text 16"/>
+          <p:cNvSpPr/>
+          <p:nvPr/>
+        </p:nvSpPr>
+        <p:spPr>
+          <a:xfrm>
+            <a:off x="548640" y="5440680"/>
+            <a:ext cx="11064240" cy="457200"/>
+          </a:xfrm>
+          <a:prstGeom prst="rect">
+            <a:avLst/>
+          </a:prstGeom>
+          <a:noFill/>
+          <a:ln/>
+        </p:spPr>
+        <p:txBody>
+          <a:bodyPr wrap="square" lIns="0" tIns="0" rIns="0" bIns="0" rtlCol="0" anchor="ctr"/>
+          <a:lstStyle/>
+          <a:p>
+            <a:pPr indent="0" marL="0">
+              <a:buNone/>
+            </a:pPr>
+            <a:r>
+              <a:rPr lang="en-US" sz="1400" i="1" dirty="0">
+                <a:solidFill>
+                  <a:srgbClr val="9AA6B2"/>
+                </a:solidFill>
+                <a:latin typeface="Malgun Gothic" pitchFamily="34" charset="0"/>
+                <a:ea typeface="Malgun Gothic" pitchFamily="34" charset="-122"/>
+                <a:cs typeface="Malgun Gothic" pitchFamily="34" charset="-120"/>
+              </a:rPr>
+              <a:t>MB ÷ ms = GB/s. 실측값을 GPU 스펙의 이론 대역폭과 비교하면 보통 60~90% 수준입니다.</a:t>
             </a:r>
             <a:endParaRPr lang="en-US" sz="1400" dirty="0"/>
           </a:p>
@@ -7460,7 +9926,7 @@
                 <a:ea typeface="Courier New" pitchFamily="34" charset="-122"/>
                 <a:cs typeface="Courier New" pitchFamily="34" charset="-120"/>
               </a:rPr>
-              <a:t>8</a:t>
+              <a:t>7</a:t>
             </a:r>
             <a:endParaRPr lang="en-US" sz="2200" dirty="0"/>
           </a:p>
@@ -7499,7 +9965,7 @@
                 <a:ea typeface="Malgun Gothic" pitchFamily="34" charset="-122"/>
                 <a:cs typeface="Malgun Gothic" pitchFamily="34" charset="-120"/>
               </a:rPr>
-              <a:t>실습 미리보기 · Lab 3</a:t>
+              <a:t>스트림(stream) 맛보기</a:t>
             </a:r>
             <a:endParaRPr lang="en-US" sz="3000" dirty="0"/>
           </a:p>
@@ -7514,17 +9980,22 @@
         <p:spPr>
           <a:xfrm>
             <a:off x="548640" y="1554480"/>
-            <a:ext cx="5303520" cy="1965960"/>
+            <a:ext cx="11064240" cy="1371600"/>
           </a:xfrm>
           <a:prstGeom prst="roundRect">
             <a:avLst>
-              <a:gd name="adj" fmla="val 3721"/>
+              <a:gd name="adj" fmla="val 4000"/>
             </a:avLst>
           </a:prstGeom>
           <a:solidFill>
-            <a:srgbClr val="1E232C"/>
-          </a:solidFill>
-          <a:ln/>
+            <a:srgbClr val="0E1116"/>
+          </a:solidFill>
+          <a:ln w="12700">
+            <a:solidFill>
+              <a:srgbClr val="2C3440"/>
+            </a:solidFill>
+            <a:prstDash val="solid"/>
+          </a:ln>
         </p:spPr>
       </p:sp>
       <p:sp>
@@ -7535,474 +10006,148 @@
         </p:nvSpPr>
         <p:spPr>
           <a:xfrm>
-            <a:off x="804672" y="1755648"/>
-            <a:ext cx="1188720" cy="502920"/>
-          </a:xfrm>
-          <a:prstGeom prst="roundRect">
-            <a:avLst>
-              <a:gd name="adj" fmla="val 14545"/>
-            </a:avLst>
-          </a:prstGeom>
-          <a:solidFill>
-            <a:srgbClr val="8CC63F"/>
-          </a:solidFill>
-          <a:ln/>
-        </p:spPr>
-        <p:txBody>
-          <a:bodyPr wrap="square" rtlCol="0" anchor="ctr"/>
-          <a:lstStyle/>
-          <a:p>
-            <a:pPr algn="ctr" indent="0" marL="0">
-              <a:buNone/>
-            </a:pPr>
-            <a:r>
-              <a:rPr lang="en-US" sz="1700" b="1" dirty="0">
-                <a:solidFill>
-                  <a:srgbClr val="13161C"/>
+            <a:off x="749808" y="1700784"/>
+            <a:ext cx="10661904" cy="1078992"/>
+          </a:xfrm>
+          <a:prstGeom prst="rect">
+            <a:avLst/>
+          </a:prstGeom>
+          <a:noFill/>
+          <a:ln/>
+        </p:spPr>
+        <p:txBody>
+          <a:bodyPr wrap="square" lIns="0" tIns="0" rIns="0" bIns="0" rtlCol="0" anchor="t"/>
+          <a:lstStyle/>
+          <a:p>
+            <a:pPr algn="l" indent="0" marL="0">
+              <a:lnSpc>
+                <a:spcPct val="108000"/>
+              </a:lnSpc>
+              <a:buNone/>
+            </a:pPr>
+            <a:r>
+              <a:rPr lang="en-US" sz="1350" dirty="0">
+                <a:solidFill>
+                  <a:srgbClr val="E8EDF2"/>
                 </a:solidFill>
                 <a:latin typeface="Courier New" pitchFamily="34" charset="0"/>
                 <a:ea typeface="Courier New" pitchFamily="34" charset="-122"/>
                 <a:cs typeface="Courier New" pitchFamily="34" charset="-120"/>
               </a:rPr>
-              <a:t>Ex 1</a:t>
-            </a:r>
-            <a:endParaRPr lang="en-US" sz="1700" dirty="0"/>
-          </a:p>
-        </p:txBody>
-      </p:sp>
-      <p:sp>
-        <p:nvSpPr>
-          <p:cNvPr id="6" name="Text 4"/>
-          <p:cNvSpPr/>
-          <p:nvPr/>
-        </p:nvSpPr>
-        <p:spPr>
-          <a:xfrm>
-            <a:off x="2148840" y="1773936"/>
-            <a:ext cx="3474720" cy="822960"/>
-          </a:xfrm>
-          <a:prstGeom prst="rect">
-            <a:avLst/>
-          </a:prstGeom>
-          <a:noFill/>
-          <a:ln/>
-        </p:spPr>
-        <p:txBody>
-          <a:bodyPr wrap="square" lIns="0" tIns="0" rIns="0" bIns="0" rtlCol="0" anchor="t"/>
-          <a:lstStyle/>
-          <a:p>
-            <a:pPr indent="0" marL="0">
-              <a:buNone/>
-            </a:pPr>
-            <a:r>
-              <a:rPr lang="en-US" sz="1700" b="1" dirty="0">
-                <a:solidFill>
-                  <a:srgbClr val="E8EDF2"/>
-                </a:solidFill>
-                <a:latin typeface="Malgun Gothic" pitchFamily="34" charset="0"/>
-                <a:ea typeface="Malgun Gothic" pitchFamily="34" charset="-122"/>
-                <a:cs typeface="Malgun Gothic" pitchFamily="34" charset="-120"/>
-              </a:rPr>
-              <a:t>느린 커널 vs 빠른 커널</a:t>
-            </a:r>
-            <a:endParaRPr lang="en-US" sz="1700" dirty="0"/>
-          </a:p>
-        </p:txBody>
-      </p:sp>
-      <p:sp>
-        <p:nvSpPr>
-          <p:cNvPr id="7" name="Text 5"/>
-          <p:cNvSpPr/>
-          <p:nvPr/>
-        </p:nvSpPr>
-        <p:spPr>
-          <a:xfrm>
-            <a:off x="804672" y="2651760"/>
-            <a:ext cx="4791456" cy="731520"/>
-          </a:xfrm>
-          <a:prstGeom prst="rect">
-            <a:avLst/>
-          </a:prstGeom>
-          <a:noFill/>
-          <a:ln/>
-        </p:spPr>
-        <p:txBody>
-          <a:bodyPr wrap="square" lIns="0" tIns="0" rIns="0" bIns="0" rtlCol="0" anchor="t"/>
-          <a:lstStyle/>
-          <a:p>
-            <a:pPr indent="0" marL="0">
+              <a:t>cudaStreamCreate(&amp;stream);</a:t>
+            </a:r>
+            <a:endParaRPr lang="en-US" sz="1350" dirty="0"/>
+          </a:p>
+          <a:p>
+            <a:pPr algn="l" indent="0" marL="0">
               <a:lnSpc>
-                <a:spcPct val="110000"/>
+                <a:spcPct val="108000"/>
               </a:lnSpc>
               <a:buNone/>
             </a:pPr>
             <a:r>
-              <a:rPr lang="en-US" sz="1400" dirty="0">
-                <a:solidFill>
-                  <a:srgbClr val="9AA6B2"/>
-                </a:solidFill>
-                <a:latin typeface="Malgun Gothic" pitchFamily="34" charset="0"/>
-                <a:ea typeface="Malgun Gothic" pitchFamily="34" charset="-122"/>
-                <a:cs typeface="Malgun Gothic" pitchFamily="34" charset="-120"/>
-              </a:rPr>
-              <a:t>time으로 Test 3와 Test 10 실행 시간 비교</a:t>
-            </a:r>
-            <a:endParaRPr lang="en-US" sz="1400" dirty="0"/>
-          </a:p>
-        </p:txBody>
-      </p:sp>
-      <p:sp>
-        <p:nvSpPr>
-          <p:cNvPr id="8" name="Shape 6"/>
-          <p:cNvSpPr/>
-          <p:nvPr/>
-        </p:nvSpPr>
-        <p:spPr>
-          <a:xfrm>
-            <a:off x="6309360" y="1554480"/>
-            <a:ext cx="5303520" cy="1965960"/>
-          </a:xfrm>
-          <a:prstGeom prst="roundRect">
-            <a:avLst>
-              <a:gd name="adj" fmla="val 3721"/>
-            </a:avLst>
-          </a:prstGeom>
-          <a:solidFill>
-            <a:srgbClr val="1E232C"/>
-          </a:solidFill>
-          <a:ln/>
-        </p:spPr>
-      </p:sp>
-      <p:sp>
-        <p:nvSpPr>
-          <p:cNvPr id="9" name="Text 7"/>
-          <p:cNvSpPr/>
-          <p:nvPr/>
-        </p:nvSpPr>
-        <p:spPr>
-          <a:xfrm>
-            <a:off x="6565392" y="1755648"/>
-            <a:ext cx="1188720" cy="502920"/>
-          </a:xfrm>
-          <a:prstGeom prst="roundRect">
-            <a:avLst>
-              <a:gd name="adj" fmla="val 14545"/>
-            </a:avLst>
-          </a:prstGeom>
-          <a:solidFill>
-            <a:srgbClr val="4FB0C6"/>
-          </a:solidFill>
-          <a:ln/>
-        </p:spPr>
-        <p:txBody>
-          <a:bodyPr wrap="square" rtlCol="0" anchor="ctr"/>
-          <a:lstStyle/>
-          <a:p>
-            <a:pPr algn="ctr" indent="0" marL="0">
-              <a:buNone/>
-            </a:pPr>
-            <a:r>
-              <a:rPr lang="en-US" sz="1700" b="1" dirty="0">
-                <a:solidFill>
-                  <a:srgbClr val="13161C"/>
+              <a:rPr lang="en-US" sz="1350" dirty="0">
+                <a:solidFill>
+                  <a:srgbClr val="8CC63F"/>
                 </a:solidFill>
                 <a:latin typeface="Courier New" pitchFamily="34" charset="0"/>
                 <a:ea typeface="Courier New" pitchFamily="34" charset="-122"/>
                 <a:cs typeface="Courier New" pitchFamily="34" charset="-120"/>
               </a:rPr>
-              <a:t>Ex 2</a:t>
-            </a:r>
-            <a:endParaRPr lang="en-US" sz="1700" dirty="0"/>
-          </a:p>
-        </p:txBody>
-      </p:sp>
-      <p:sp>
-        <p:nvSpPr>
-          <p:cNvPr id="10" name="Text 8"/>
-          <p:cNvSpPr/>
-          <p:nvPr/>
-        </p:nvSpPr>
-        <p:spPr>
-          <a:xfrm>
-            <a:off x="7909560" y="1773936"/>
-            <a:ext cx="3474720" cy="822960"/>
-          </a:xfrm>
-          <a:prstGeom prst="rect">
-            <a:avLst/>
-          </a:prstGeom>
-          <a:noFill/>
-          <a:ln/>
-        </p:spPr>
-        <p:txBody>
-          <a:bodyPr wrap="square" lIns="0" tIns="0" rIns="0" bIns="0" rtlCol="0" anchor="t"/>
-          <a:lstStyle/>
-          <a:p>
-            <a:pPr indent="0" marL="0">
-              <a:buNone/>
-            </a:pPr>
-            <a:r>
-              <a:rPr lang="en-US" sz="1700" b="1" dirty="0">
-                <a:solidFill>
-                  <a:srgbClr val="E8EDF2"/>
-                </a:solidFill>
-                <a:latin typeface="Malgun Gothic" pitchFamily="34" charset="0"/>
-                <a:ea typeface="Malgun Gothic" pitchFamily="34" charset="-122"/>
-                <a:cs typeface="Malgun Gothic" pitchFamily="34" charset="-120"/>
-              </a:rPr>
-              <a:t>대역폭을 눈으로 보기</a:t>
-            </a:r>
-            <a:endParaRPr lang="en-US" sz="1700" dirty="0"/>
-          </a:p>
-        </p:txBody>
-      </p:sp>
-      <p:sp>
-        <p:nvSpPr>
-          <p:cNvPr id="11" name="Text 9"/>
-          <p:cNvSpPr/>
-          <p:nvPr/>
-        </p:nvSpPr>
-        <p:spPr>
-          <a:xfrm>
-            <a:off x="6565392" y="2651760"/>
-            <a:ext cx="4791456" cy="731520"/>
-          </a:xfrm>
-          <a:prstGeom prst="rect">
-            <a:avLst/>
-          </a:prstGeom>
-          <a:noFill/>
-          <a:ln/>
-        </p:spPr>
-        <p:txBody>
-          <a:bodyPr wrap="square" lIns="0" tIns="0" rIns="0" bIns="0" rtlCol="0" anchor="t"/>
-          <a:lstStyle/>
-          <a:p>
-            <a:pPr indent="0" marL="0">
+              <a:t>test10_kernel_write&lt;&lt;&lt;gridDim, blockDim, 0, stream&gt;&gt;&gt;(...);</a:t>
+            </a:r>
+            <a:endParaRPr lang="en-US" sz="1350" dirty="0"/>
+          </a:p>
+          <a:p>
+            <a:pPr algn="l" indent="0" marL="0">
               <a:lnSpc>
-                <a:spcPct val="110000"/>
+                <a:spcPct val="108000"/>
               </a:lnSpc>
               <a:buNone/>
             </a:pPr>
             <a:r>
-              <a:rPr lang="en-US" sz="1400" dirty="0">
+              <a:rPr lang="en-US" sz="1350" dirty="0">
                 <a:solidFill>
                   <a:srgbClr val="9AA6B2"/>
-                </a:solidFill>
-                <a:latin typeface="Malgun Gothic" pitchFamily="34" charset="0"/>
-                <a:ea typeface="Malgun Gothic" pitchFamily="34" charset="-122"/>
-                <a:cs typeface="Malgun Gothic" pitchFamily="34" charset="-120"/>
-              </a:rPr>
-              <a:t>--verbose 로 test10의 bandwidth 로그 확인</a:t>
-            </a:r>
-            <a:endParaRPr lang="en-US" sz="1400" dirty="0"/>
-          </a:p>
-        </p:txBody>
-      </p:sp>
-      <p:sp>
-        <p:nvSpPr>
-          <p:cNvPr id="12" name="Shape 10"/>
-          <p:cNvSpPr/>
-          <p:nvPr/>
-        </p:nvSpPr>
-        <p:spPr>
-          <a:xfrm>
-            <a:off x="548640" y="3840480"/>
-            <a:ext cx="5303520" cy="1965960"/>
-          </a:xfrm>
-          <a:prstGeom prst="roundRect">
-            <a:avLst>
-              <a:gd name="adj" fmla="val 3721"/>
-            </a:avLst>
-          </a:prstGeom>
-          <a:solidFill>
-            <a:srgbClr val="1E232C"/>
-          </a:solidFill>
-          <a:ln/>
-        </p:spPr>
-      </p:sp>
-      <p:sp>
-        <p:nvSpPr>
-          <p:cNvPr id="13" name="Text 11"/>
-          <p:cNvSpPr/>
-          <p:nvPr/>
-        </p:nvSpPr>
-        <p:spPr>
-          <a:xfrm>
-            <a:off x="804672" y="4041648"/>
-            <a:ext cx="1188720" cy="502920"/>
-          </a:xfrm>
-          <a:prstGeom prst="roundRect">
-            <a:avLst>
-              <a:gd name="adj" fmla="val 14545"/>
-            </a:avLst>
-          </a:prstGeom>
-          <a:solidFill>
-            <a:srgbClr val="E0A458"/>
-          </a:solidFill>
-          <a:ln/>
-        </p:spPr>
-        <p:txBody>
-          <a:bodyPr wrap="square" rtlCol="0" anchor="ctr"/>
-          <a:lstStyle/>
-          <a:p>
-            <a:pPr algn="ctr" indent="0" marL="0">
-              <a:buNone/>
-            </a:pPr>
-            <a:r>
-              <a:rPr lang="en-US" sz="1700" b="1" dirty="0">
-                <a:solidFill>
-                  <a:srgbClr val="13161C"/>
                 </a:solidFill>
                 <a:latin typeface="Courier New" pitchFamily="34" charset="0"/>
                 <a:ea typeface="Courier New" pitchFamily="34" charset="-122"/>
                 <a:cs typeface="Courier New" pitchFamily="34" charset="-120"/>
               </a:rPr>
-              <a:t>Ex 3</a:t>
-            </a:r>
-            <a:endParaRPr lang="en-US" sz="1700" dirty="0"/>
-          </a:p>
-        </p:txBody>
-      </p:sp>
-      <p:sp>
-        <p:nvSpPr>
-          <p:cNvPr id="14" name="Text 12"/>
-          <p:cNvSpPr/>
-          <p:nvPr/>
-        </p:nvSpPr>
-        <p:spPr>
-          <a:xfrm>
-            <a:off x="2148840" y="4059936"/>
-            <a:ext cx="3474720" cy="822960"/>
-          </a:xfrm>
-          <a:prstGeom prst="rect">
-            <a:avLst/>
-          </a:prstGeom>
-          <a:noFill/>
-          <a:ln/>
-        </p:spPr>
-        <p:txBody>
-          <a:bodyPr wrap="square" lIns="0" tIns="0" rIns="0" bIns="0" rtlCol="0" anchor="t"/>
-          <a:lstStyle/>
-          <a:p>
-            <a:pPr indent="0" marL="0">
-              <a:buNone/>
-            </a:pPr>
-            <a:r>
-              <a:rPr lang="en-US" sz="1700" b="1" dirty="0">
-                <a:solidFill>
-                  <a:srgbClr val="E8EDF2"/>
-                </a:solidFill>
-                <a:latin typeface="Malgun Gothic" pitchFamily="34" charset="0"/>
-                <a:ea typeface="Malgun Gothic" pitchFamily="34" charset="-122"/>
-                <a:cs typeface="Malgun Gothic" pitchFamily="34" charset="-120"/>
-              </a:rPr>
-              <a:t>블록 크기를 바꿔 측정</a:t>
-            </a:r>
-            <a:endParaRPr lang="en-US" sz="1700" dirty="0"/>
-          </a:p>
-        </p:txBody>
-      </p:sp>
-      <p:sp>
-        <p:nvSpPr>
-          <p:cNvPr id="15" name="Text 13"/>
-          <p:cNvSpPr/>
-          <p:nvPr/>
-        </p:nvSpPr>
-        <p:spPr>
-          <a:xfrm>
-            <a:off x="804672" y="4937760"/>
-            <a:ext cx="4791456" cy="731520"/>
-          </a:xfrm>
-          <a:prstGeom prst="rect">
-            <a:avLst/>
-          </a:prstGeom>
-          <a:noFill/>
-          <a:ln/>
-        </p:spPr>
-        <p:txBody>
-          <a:bodyPr wrap="square" lIns="0" tIns="0" rIns="0" bIns="0" rtlCol="0" anchor="t"/>
-          <a:lstStyle/>
-          <a:p>
-            <a:pPr indent="0" marL="0">
+              <a:t>//                                    ▲          ▲</a:t>
+            </a:r>
+            <a:endParaRPr lang="en-US" sz="1350" dirty="0"/>
+          </a:p>
+          <a:p>
+            <a:pPr algn="l" indent="0" marL="0">
               <a:lnSpc>
-                <a:spcPct val="110000"/>
+                <a:spcPct val="108000"/>
               </a:lnSpc>
               <a:buNone/>
             </a:pPr>
             <a:r>
-              <a:rPr lang="en-US" sz="1400" dirty="0">
+              <a:rPr lang="en-US" sz="1350" dirty="0">
                 <a:solidFill>
                   <a:srgbClr val="9AA6B2"/>
-                </a:solidFill>
-                <a:latin typeface="Malgun Gothic" pitchFamily="34" charset="0"/>
-                <a:ea typeface="Malgun Gothic" pitchFamily="34" charset="-122"/>
-                <a:cs typeface="Malgun Gothic" pitchFamily="34" charset="-120"/>
-              </a:rPr>
-              <a:t>STRESS_BLOCKSIZE 32~256 별 대역폭 표 작성</a:t>
-            </a:r>
-            <a:endParaRPr lang="en-US" sz="1400" dirty="0"/>
-          </a:p>
-        </p:txBody>
-      </p:sp>
-      <p:sp>
-        <p:nvSpPr>
-          <p:cNvPr id="16" name="Shape 14"/>
-          <p:cNvSpPr/>
-          <p:nvPr/>
-        </p:nvSpPr>
-        <p:spPr>
-          <a:xfrm>
-            <a:off x="6309360" y="3840480"/>
-            <a:ext cx="5303520" cy="1965960"/>
-          </a:xfrm>
-          <a:prstGeom prst="roundRect">
-            <a:avLst>
-              <a:gd name="adj" fmla="val 3721"/>
-            </a:avLst>
-          </a:prstGeom>
-          <a:solidFill>
-            <a:srgbClr val="1E232C"/>
-          </a:solidFill>
-          <a:ln/>
-        </p:spPr>
-      </p:sp>
-      <p:sp>
-        <p:nvSpPr>
-          <p:cNvPr id="17" name="Text 15"/>
-          <p:cNvSpPr/>
-          <p:nvPr/>
-        </p:nvSpPr>
-        <p:spPr>
-          <a:xfrm>
-            <a:off x="6565392" y="4041648"/>
-            <a:ext cx="1188720" cy="502920"/>
-          </a:xfrm>
-          <a:prstGeom prst="roundRect">
-            <a:avLst>
-              <a:gd name="adj" fmla="val 14545"/>
-            </a:avLst>
-          </a:prstGeom>
-          <a:solidFill>
-            <a:srgbClr val="8CC63F"/>
-          </a:solidFill>
-          <a:ln/>
-        </p:spPr>
-        <p:txBody>
-          <a:bodyPr wrap="square" rtlCol="0" anchor="ctr"/>
-          <a:lstStyle/>
-          <a:p>
-            <a:pPr algn="ctr" indent="0" marL="0">
-              <a:buNone/>
-            </a:pPr>
-            <a:r>
-              <a:rPr lang="en-US" sz="1700" b="1" dirty="0">
-                <a:solidFill>
-                  <a:srgbClr val="13161C"/>
                 </a:solidFill>
                 <a:latin typeface="Courier New" pitchFamily="34" charset="0"/>
                 <a:ea typeface="Courier New" pitchFamily="34" charset="-122"/>
                 <a:cs typeface="Courier New" pitchFamily="34" charset="-120"/>
               </a:rPr>
-              <a:t>Ex 4</a:t>
+              <a:t>//                          공유메모리 크기   스트림</a:t>
+            </a:r>
+            <a:endParaRPr lang="en-US" sz="1350" dirty="0"/>
+          </a:p>
+        </p:txBody>
+      </p:sp>
+      <p:sp>
+        <p:nvSpPr>
+          <p:cNvPr id="6" name="Text 4"/>
+          <p:cNvSpPr/>
+          <p:nvPr/>
+        </p:nvSpPr>
+        <p:spPr>
+          <a:xfrm>
+            <a:off x="548640" y="3108960"/>
+            <a:ext cx="11064240" cy="914400"/>
+          </a:xfrm>
+          <a:prstGeom prst="rect">
+            <a:avLst/>
+          </a:prstGeom>
+          <a:noFill/>
+          <a:ln/>
+        </p:spPr>
+        <p:txBody>
+          <a:bodyPr wrap="square" lIns="0" tIns="0" rIns="0" bIns="0" rtlCol="0" anchor="t"/>
+          <a:lstStyle/>
+          <a:p>
+            <a:pPr indent="0" marL="0">
+              <a:buNone/>
+            </a:pPr>
+            <a:r>
+              <a:rPr lang="en-US" sz="1700" b="1" dirty="0">
+                <a:solidFill>
+                  <a:srgbClr val="4FB0C6"/>
+                </a:solidFill>
+                <a:latin typeface="Malgun Gothic" pitchFamily="34" charset="0"/>
+                <a:ea typeface="Malgun Gothic" pitchFamily="34" charset="-122"/>
+                <a:cs typeface="Malgun Gothic" pitchFamily="34" charset="-120"/>
+              </a:rPr>
+              <a:t>스트림(stream)</a:t>
+            </a:r>
+            <a:pPr indent="0" marL="0">
+              <a:buNone/>
+            </a:pPr>
+            <a:r>
+              <a:rPr lang="en-US" sz="1700" dirty="0">
+                <a:solidFill>
+                  <a:srgbClr val="E8EDF2"/>
+                </a:solidFill>
+                <a:latin typeface="Malgun Gothic" pitchFamily="34" charset="0"/>
+                <a:ea typeface="Malgun Gothic" pitchFamily="34" charset="-122"/>
+                <a:cs typeface="Malgun Gothic" pitchFamily="34" charset="-120"/>
+              </a:rPr>
+              <a:t>은 GPU 작업을 순서대로 처리하는 "작업 큐"입니다. Test 10은 하나의 스트림에 쓰기·읽기 커널을 순서대로 넣습니다.</a:t>
             </a:r>
             <a:endParaRPr lang="en-US" sz="1700" dirty="0"/>
           </a:p>
@@ -8010,53 +10155,75 @@
       </p:sp>
       <p:sp>
         <p:nvSpPr>
-          <p:cNvPr id="18" name="Text 16"/>
-          <p:cNvSpPr/>
-          <p:nvPr/>
-        </p:nvSpPr>
-        <p:spPr>
-          <a:xfrm>
-            <a:off x="7909560" y="4059936"/>
-            <a:ext cx="3474720" cy="822960"/>
-          </a:xfrm>
-          <a:prstGeom prst="rect">
-            <a:avLst/>
-          </a:prstGeom>
-          <a:noFill/>
-          <a:ln/>
-        </p:spPr>
-        <p:txBody>
-          <a:bodyPr wrap="square" lIns="0" tIns="0" rIns="0" bIns="0" rtlCol="0" anchor="t"/>
+          <p:cNvPr id="7" name="Shape 5"/>
+          <p:cNvSpPr/>
+          <p:nvPr/>
+        </p:nvSpPr>
+        <p:spPr>
+          <a:xfrm>
+            <a:off x="548640" y="4114800"/>
+            <a:ext cx="5349240" cy="1554480"/>
+          </a:xfrm>
+          <a:prstGeom prst="roundRect">
+            <a:avLst>
+              <a:gd name="adj" fmla="val 4706"/>
+            </a:avLst>
+          </a:prstGeom>
+          <a:solidFill>
+            <a:srgbClr val="1E232C"/>
+          </a:solidFill>
+          <a:ln/>
+        </p:spPr>
+      </p:sp>
+      <p:sp>
+        <p:nvSpPr>
+          <p:cNvPr id="8" name="Text 6"/>
+          <p:cNvSpPr/>
+          <p:nvPr/>
+        </p:nvSpPr>
+        <p:spPr>
+          <a:xfrm>
+            <a:off x="777240" y="4297680"/>
+            <a:ext cx="4892040" cy="457200"/>
+          </a:xfrm>
+          <a:prstGeom prst="rect">
+            <a:avLst/>
+          </a:prstGeom>
+          <a:noFill/>
+          <a:ln/>
+        </p:spPr>
+        <p:txBody>
+          <a:bodyPr wrap="square" lIns="0" tIns="0" rIns="0" bIns="0" rtlCol="0" anchor="ctr"/>
           <a:lstStyle/>
           <a:p>
             <a:pPr indent="0" marL="0">
               <a:buNone/>
             </a:pPr>
             <a:r>
-              <a:rPr lang="en-US" sz="1700" b="1" dirty="0">
-                <a:solidFill>
-                  <a:srgbClr val="E8EDF2"/>
-                </a:solidFill>
-                <a:latin typeface="Malgun Gothic" pitchFamily="34" charset="0"/>
-                <a:ea typeface="Malgun Gothic" pitchFamily="34" charset="-122"/>
-                <a:cs typeface="Malgun Gothic" pitchFamily="34" charset="-120"/>
-              </a:rPr>
-              <a:t>메모리 병합 깨뜨리기</a:t>
-            </a:r>
-            <a:endParaRPr lang="en-US" sz="1700" dirty="0"/>
-          </a:p>
-        </p:txBody>
-      </p:sp>
-      <p:sp>
-        <p:nvSpPr>
-          <p:cNvPr id="19" name="Text 17"/>
-          <p:cNvSpPr/>
-          <p:nvPr/>
-        </p:nvSpPr>
-        <p:spPr>
-          <a:xfrm>
-            <a:off x="6565392" y="4937760"/>
-            <a:ext cx="4791456" cy="731520"/>
+              <a:rPr lang="en-US" sz="1400" b="1" dirty="0">
+                <a:solidFill>
+                  <a:srgbClr val="8CC63F"/>
+                </a:solidFill>
+                <a:latin typeface="Courier New" pitchFamily="34" charset="0"/>
+                <a:ea typeface="Courier New" pitchFamily="34" charset="-122"/>
+                <a:cs typeface="Courier New" pitchFamily="34" charset="-120"/>
+              </a:rPr>
+              <a:t>&lt;&lt;&lt;grid, block, 0, stream&gt;&gt;&gt;</a:t>
+            </a:r>
+            <a:endParaRPr lang="en-US" sz="1400" dirty="0"/>
+          </a:p>
+        </p:txBody>
+      </p:sp>
+      <p:sp>
+        <p:nvSpPr>
+          <p:cNvPr id="9" name="Text 7"/>
+          <p:cNvSpPr/>
+          <p:nvPr/>
+        </p:nvSpPr>
+        <p:spPr>
+          <a:xfrm>
+            <a:off x="777240" y="4754880"/>
+            <a:ext cx="4892040" cy="822960"/>
           </a:xfrm>
           <a:prstGeom prst="rect">
             <a:avLst/>
@@ -8070,20 +10237,20 @@
           <a:p>
             <a:pPr indent="0" marL="0">
               <a:lnSpc>
-                <a:spcPct val="110000"/>
+                <a:spcPct val="115000"/>
               </a:lnSpc>
               <a:buNone/>
             </a:pPr>
             <a:r>
               <a:rPr lang="en-US" sz="1400" dirty="0">
                 <a:solidFill>
-                  <a:srgbClr val="9AA6B2"/>
-                </a:solidFill>
-                <a:latin typeface="Malgun Gothic" pitchFamily="34" charset="0"/>
-                <a:ea typeface="Malgun Gothic" pitchFamily="34" charset="-122"/>
-                <a:cs typeface="Malgun Gothic" pitchFamily="34" charset="-120"/>
-              </a:rPr>
-              <a:t>인덱스를 비병합으로 바꿔 대역폭 급락 관찰</a:t>
+                  <a:srgbClr val="E8EDF2"/>
+                </a:solidFill>
+                <a:latin typeface="Malgun Gothic" pitchFamily="34" charset="0"/>
+                <a:ea typeface="Malgun Gothic" pitchFamily="34" charset="-122"/>
+                <a:cs typeface="Malgun Gothic" pitchFamily="34" charset="-120"/>
+              </a:rPr>
+              <a:t>실행 구성의 3·4번째 인자: 공유 메모리 크기(0), 스트림. 세션 1에선 생략했던 부분입니다.</a:t>
             </a:r>
             <a:endParaRPr lang="en-US" sz="1400" dirty="0"/>
           </a:p>
@@ -8091,14 +10258,36 @@
       </p:sp>
       <p:sp>
         <p:nvSpPr>
-          <p:cNvPr id="20" name="Text 18"/>
-          <p:cNvSpPr/>
-          <p:nvPr/>
-        </p:nvSpPr>
-        <p:spPr>
-          <a:xfrm>
-            <a:off x="548640" y="5943600"/>
-            <a:ext cx="11064240" cy="365760"/>
+          <p:cNvPr id="10" name="Shape 8"/>
+          <p:cNvSpPr/>
+          <p:nvPr/>
+        </p:nvSpPr>
+        <p:spPr>
+          <a:xfrm>
+            <a:off x="6263640" y="4114800"/>
+            <a:ext cx="5349240" cy="1554480"/>
+          </a:xfrm>
+          <a:prstGeom prst="roundRect">
+            <a:avLst>
+              <a:gd name="adj" fmla="val 4706"/>
+            </a:avLst>
+          </a:prstGeom>
+          <a:solidFill>
+            <a:srgbClr val="1E232C"/>
+          </a:solidFill>
+          <a:ln/>
+        </p:spPr>
+      </p:sp>
+      <p:sp>
+        <p:nvSpPr>
+          <p:cNvPr id="11" name="Text 9"/>
+          <p:cNvSpPr/>
+          <p:nvPr/>
+        </p:nvSpPr>
+        <p:spPr>
+          <a:xfrm>
+            <a:off x="6492240" y="4297680"/>
+            <a:ext cx="4892040" cy="457200"/>
           </a:xfrm>
           <a:prstGeom prst="rect">
             <a:avLst/>
@@ -8110,21 +10299,63 @@
           <a:bodyPr wrap="square" lIns="0" tIns="0" rIns="0" bIns="0" rtlCol="0" anchor="ctr"/>
           <a:lstStyle/>
           <a:p>
-            <a:pPr algn="ctr" indent="0" marL="0">
-              <a:buNone/>
-            </a:pPr>
-            <a:r>
-              <a:rPr lang="en-US" sz="1300" i="1" dirty="0">
-                <a:solidFill>
-                  <a:srgbClr val="9AA6B2"/>
-                </a:solidFill>
-                <a:latin typeface="Malgun Gothic" pitchFamily="34" charset="0"/>
-                <a:ea typeface="Malgun Gothic" pitchFamily="34" charset="-122"/>
-                <a:cs typeface="Malgun Gothic" pitchFamily="34" charset="-120"/>
-              </a:rPr>
-              <a:t>측정이 핵심입니다 — 대역폭 로그는 --verbose 없이는 출력되지 않습니다.</a:t>
-            </a:r>
-            <a:endParaRPr lang="en-US" sz="1300" dirty="0"/>
+            <a:pPr indent="0" marL="0">
+              <a:buNone/>
+            </a:pPr>
+            <a:r>
+              <a:rPr lang="en-US" sz="1500" b="1" dirty="0">
+                <a:solidFill>
+                  <a:srgbClr val="4FB0C6"/>
+                </a:solidFill>
+                <a:latin typeface="Malgun Gothic" pitchFamily="34" charset="0"/>
+                <a:ea typeface="Malgun Gothic" pitchFamily="34" charset="-122"/>
+                <a:cs typeface="Malgun Gothic" pitchFamily="34" charset="-120"/>
+              </a:rPr>
+              <a:t>왜 이벤트도 스트림에?</a:t>
+            </a:r>
+            <a:endParaRPr lang="en-US" sz="1500" dirty="0"/>
+          </a:p>
+        </p:txBody>
+      </p:sp>
+      <p:sp>
+        <p:nvSpPr>
+          <p:cNvPr id="12" name="Text 10"/>
+          <p:cNvSpPr/>
+          <p:nvPr/>
+        </p:nvSpPr>
+        <p:spPr>
+          <a:xfrm>
+            <a:off x="6492240" y="4754880"/>
+            <a:ext cx="4892040" cy="822960"/>
+          </a:xfrm>
+          <a:prstGeom prst="rect">
+            <a:avLst/>
+          </a:prstGeom>
+          <a:noFill/>
+          <a:ln/>
+        </p:spPr>
+        <p:txBody>
+          <a:bodyPr wrap="square" lIns="0" tIns="0" rIns="0" bIns="0" rtlCol="0" anchor="t"/>
+          <a:lstStyle/>
+          <a:p>
+            <a:pPr indent="0" marL="0">
+              <a:lnSpc>
+                <a:spcPct val="115000"/>
+              </a:lnSpc>
+              <a:buNone/>
+            </a:pPr>
+            <a:r>
+              <a:rPr lang="en-US" sz="1400" dirty="0">
+                <a:solidFill>
+                  <a:srgbClr val="E8EDF2"/>
+                </a:solidFill>
+                <a:latin typeface="Malgun Gothic" pitchFamily="34" charset="0"/>
+                <a:ea typeface="Malgun Gothic" pitchFamily="34" charset="-122"/>
+                <a:cs typeface="Malgun Gothic" pitchFamily="34" charset="-120"/>
+              </a:rPr>
+              <a:t>이벤트를 같은 스트림에 기록해야 그 스트림의 커널들 시간을 정확히 잽니다.</a:t>
+            </a:r>
+            <a:endParaRPr lang="en-US" sz="1400" dirty="0"/>
           </a:p>
         </p:txBody>
       </p:sp>

--- a/seminar/slides/세션3_병렬성설계와_성능.pptx
+++ b/seminar/slides/세션3_병렬성설계와_성능.pptx
@@ -17,9 +17,10 @@
     <p:sldId id="265" r:id="rId11"/>
     <p:sldId id="266" r:id="rId12"/>
     <p:sldId id="267" r:id="rId13"/>
+    <p:sldId id="268" r:id="rId14"/>
   </p:sldIdLst>
   <p:notesMasterIdLst>
-    <p:notesMasterId r:id="rId14"/>
+    <p:notesMasterId r:id="rId15"/>
   </p:notesMasterIdLst>
   <p:sldSz cx="12192000" cy="6858000"/>
   <p:notesSz cx="6858000" cy="12192000"/>
@@ -601,7 +602,7 @@
           <a:p>
             <a:r>
               <a:rPr lang="en-US" dirty="0"/>
-              <a:t>Ex 3의 블록 크기 스윕을 그래프로 그리게 하면 '최적점'을 스스로 발견합니다. 정답을 미리 주지 마세요.</a:t>
+              <a:t>스트림은 심화 주제라 개념만. 여러 스트림으로 겹쳐 실행(overlap)하는 건 향후 주제로 남깁니다.</a:t>
             </a:r>
             <a:endParaRPr lang="en-US" dirty="0"/>
           </a:p>
@@ -689,7 +690,7 @@
           <a:p>
             <a:r>
               <a:rPr lang="en-US" dirty="0"/>
-              <a:t>네 가지 목표(슬라이드 2)로 돌아가 자가 점검을 유도하세요.</a:t>
+              <a:t>Ex 3의 블록 크기 스윕을 그래프로 그리게 하면 '최적점'을 스스로 발견합니다. 정답을 미리 주지 마세요.</a:t>
             </a:r>
             <a:endParaRPr lang="en-US" dirty="0"/>
           </a:p>
@@ -777,7 +778,7 @@
           <a:p>
             <a:r>
               <a:rPr lang="en-US" dirty="0"/>
-              <a:t>오늘 본 병렬 커널에서 여러 스레드가 하나의 카운터를 건드리는 문제가 세션 4의 출발점.</a:t>
+              <a:t>네 가지 목표(슬라이드 2)로 돌아가 자가 점검을 유도하세요.</a:t>
             </a:r>
             <a:endParaRPr lang="en-US" dirty="0"/>
           </a:p>
@@ -801,6 +802,94 @@
             <a:fld id="{F7021451-1387-4CA6-816F-3879F97B5CBC}" type="slidenum">
               <a:rPr lang="en-US"/>
               <a:t>12</a:t>
+            </a:fld>
+            <a:endParaRPr lang="en-US"/>
+          </a:p>
+        </p:txBody>
+      </p:sp>
+    </p:spTree>
+    <p:extLst>
+      <p:ext uri="{BB962C8B-B14F-4D97-AF65-F5344CB8AC3E}">
+        <p14:creationId xmlns:p14="http://schemas.microsoft.com/office/powerpoint/2010/main" val="1024086991"/>
+      </p:ext>
+    </p:extLst>
+  </p:cSld>
+  <p:clrMapOvr>
+    <a:masterClrMapping/>
+  </p:clrMapOvr>
+</p:notes>
+</file>
+
+<file path=ppt/notesSlides/notesSlide13.xml><?xml version="1.0" encoding="utf-8"?>
+<p:notes xmlns:a="http://schemas.openxmlformats.org/drawingml/2006/main" xmlns:r="http://schemas.openxmlformats.org/officeDocument/2006/relationships" xmlns:p="http://schemas.openxmlformats.org/presentationml/2006/main">
+  <p:cSld>
+    <p:spTree>
+      <p:nvGrpSpPr>
+        <p:cNvPr id="1" name=""/>
+        <p:cNvGrpSpPr/>
+        <p:nvPr/>
+      </p:nvGrpSpPr>
+      <p:grpSpPr>
+        <a:xfrm>
+          <a:off x="0" y="0"/>
+          <a:ext cx="0" cy="0"/>
+          <a:chOff x="0" y="0"/>
+          <a:chExt cx="0" cy="0"/>
+        </a:xfrm>
+      </p:grpSpPr>
+      <p:sp>
+        <p:nvSpPr>
+          <p:cNvPr id="2" name="Slide Image Placeholder 1"/>
+          <p:cNvSpPr>
+            <a:spLocks noGrp="1" noRot="1" noChangeAspect="1"/>
+          </p:cNvSpPr>
+          <p:nvPr>
+            <p:ph type="sldImg"/>
+          </p:nvPr>
+        </p:nvSpPr>
+        <p:spPr/>
+      </p:sp>
+      <p:sp>
+        <p:nvSpPr>
+          <p:cNvPr id="3" name="Notes Placeholder 2"/>
+          <p:cNvSpPr>
+            <a:spLocks noGrp="1"/>
+          </p:cNvSpPr>
+          <p:nvPr>
+            <p:ph type="body" idx="1"/>
+          </p:nvPr>
+        </p:nvSpPr>
+        <p:spPr/>
+        <p:txBody>
+          <a:bodyPr/>
+          <a:lstStyle/>
+          <a:p>
+            <a:r>
+              <a:rPr lang="en-US" dirty="0"/>
+              <a:t>오늘 본 병렬 커널에서 여러 스레드가 하나의 카운터를 건드리는 문제가 세션 4의 출발점.</a:t>
+            </a:r>
+            <a:endParaRPr lang="en-US" dirty="0"/>
+          </a:p>
+        </p:txBody>
+      </p:sp>
+      <p:sp>
+        <p:nvSpPr>
+          <p:cNvPr id="4" name="Slide Number Placeholder 3"/>
+          <p:cNvSpPr>
+            <a:spLocks noGrp="1"/>
+          </p:cNvSpPr>
+          <p:nvPr>
+            <p:ph type="sldNum" sz="quarter" idx="10"/>
+          </p:nvPr>
+        </p:nvSpPr>
+        <p:spPr/>
+        <p:txBody>
+          <a:bodyPr/>
+          <a:lstStyle/>
+          <a:p>
+            <a:fld id="{F7021451-1387-4CA6-816F-3879F97B5CBC}" type="slidenum">
+              <a:rPr lang="en-US"/>
+              <a:t>13</a:t>
             </a:fld>
             <a:endParaRPr lang="en-US"/>
           </a:p>
@@ -1305,7 +1394,7 @@
           <a:p>
             <a:r>
               <a:rPr lang="en-US" dirty="0"/>
-              <a:t>비동기 실행 개념이 핵심. cudaEventSynchronize가 왜 필요한지(GPU 완료 대기) 짚어주세요.</a:t>
+              <a:t>한 워프 안에서 분기가 갈리면 GPU가 두 경로를 직렬 실행(마스킹). 데이터로 나눈 분기, 균일한 조건이 유리.</a:t>
             </a:r>
             <a:endParaRPr lang="en-US" dirty="0"/>
           </a:p>
@@ -1393,7 +1482,7 @@
           <a:p>
             <a:r>
               <a:rPr lang="en-US" dirty="0"/>
-              <a:t>단위 변환(MB/ms=GB/s)을 칠판에서 한 번 유도하면 학생들이 확실히 이해합니다.</a:t>
+              <a:t>비동기 실행 개념이 핵심. cudaEventSynchronize가 왜 필요한지(GPU 완료 대기) 짚어주세요.</a:t>
             </a:r>
             <a:endParaRPr lang="en-US" dirty="0"/>
           </a:p>
@@ -1481,7 +1570,7 @@
           <a:p>
             <a:r>
               <a:rPr lang="en-US" dirty="0"/>
-              <a:t>스트림은 심화 주제라 개념만. 여러 스트림으로 겹쳐 실행(overlap)하는 건 향후 주제로 남깁니다.</a:t>
+              <a:t>단위 변환(MB/ms=GB/s)을 칠판에서 한 번 유도하면 학생들이 확실히 이해합니다.</a:t>
             </a:r>
             <a:endParaRPr lang="en-US" dirty="0"/>
           </a:p>
@@ -2191,7 +2280,7 @@
                 <a:ea typeface="Courier New" pitchFamily="34" charset="-122"/>
                 <a:cs typeface="Courier New" pitchFamily="34" charset="-120"/>
               </a:rPr>
-              <a:t>8</a:t>
+              <a:t>7</a:t>
             </a:r>
             <a:endParaRPr lang="en-US" sz="2200" dirty="0"/>
           </a:p>
@@ -2230,7 +2319,7 @@
                 <a:ea typeface="Malgun Gothic" pitchFamily="34" charset="-122"/>
                 <a:cs typeface="Malgun Gothic" pitchFamily="34" charset="-120"/>
               </a:rPr>
-              <a:t>실습 미리보기 · Lab 3</a:t>
+              <a:t>스트림(stream) 맛보기</a:t>
             </a:r>
             <a:endParaRPr lang="en-US" sz="3000" dirty="0"/>
           </a:p>
@@ -2245,17 +2334,22 @@
         <p:spPr>
           <a:xfrm>
             <a:off x="548640" y="1554480"/>
-            <a:ext cx="5303520" cy="1965960"/>
-          </a:xfrm>
-          <a:prstGeom prst="roundRect">
-            <a:avLst>
-              <a:gd name="adj" fmla="val 3721"/>
-            </a:avLst>
-          </a:prstGeom>
-          <a:solidFill>
-            <a:srgbClr val="1E232C"/>
-          </a:solidFill>
-          <a:ln/>
+            <a:ext cx="11064240" cy="1371600"/>
+          </a:xfrm>
+          <a:prstGeom prst="roundRect">
+            <a:avLst>
+              <a:gd name="adj" fmla="val 4000"/>
+            </a:avLst>
+          </a:prstGeom>
+          <a:solidFill>
+            <a:srgbClr val="0E1116"/>
+          </a:solidFill>
+          <a:ln w="12700">
+            <a:solidFill>
+              <a:srgbClr val="2C3440"/>
+            </a:solidFill>
+            <a:prstDash val="solid"/>
+          </a:ln>
         </p:spPr>
       </p:sp>
       <p:sp>
@@ -2266,38 +2360,97 @@
         </p:nvSpPr>
         <p:spPr>
           <a:xfrm>
-            <a:off x="804672" y="1755648"/>
-            <a:ext cx="1188720" cy="502920"/>
-          </a:xfrm>
-          <a:prstGeom prst="roundRect">
-            <a:avLst>
-              <a:gd name="adj" fmla="val 14545"/>
-            </a:avLst>
-          </a:prstGeom>
-          <a:solidFill>
-            <a:srgbClr val="8CC63F"/>
-          </a:solidFill>
-          <a:ln/>
-        </p:spPr>
-        <p:txBody>
-          <a:bodyPr wrap="square" rtlCol="0" anchor="ctr"/>
-          <a:lstStyle/>
-          <a:p>
-            <a:pPr algn="ctr" indent="0" marL="0">
-              <a:buNone/>
-            </a:pPr>
-            <a:r>
-              <a:rPr lang="en-US" sz="1700" b="1" dirty="0">
-                <a:solidFill>
-                  <a:srgbClr val="13161C"/>
+            <a:off x="749808" y="1700784"/>
+            <a:ext cx="10661904" cy="1078992"/>
+          </a:xfrm>
+          <a:prstGeom prst="rect">
+            <a:avLst/>
+          </a:prstGeom>
+          <a:noFill/>
+          <a:ln/>
+        </p:spPr>
+        <p:txBody>
+          <a:bodyPr wrap="square" lIns="0" tIns="0" rIns="0" bIns="0" rtlCol="0" anchor="t"/>
+          <a:lstStyle/>
+          <a:p>
+            <a:pPr algn="l" indent="0" marL="0">
+              <a:lnSpc>
+                <a:spcPct val="108000"/>
+              </a:lnSpc>
+              <a:buNone/>
+            </a:pPr>
+            <a:r>
+              <a:rPr lang="en-US" sz="1350" dirty="0">
+                <a:solidFill>
+                  <a:srgbClr val="E8EDF2"/>
                 </a:solidFill>
                 <a:latin typeface="Courier New" pitchFamily="34" charset="0"/>
                 <a:ea typeface="Courier New" pitchFamily="34" charset="-122"/>
                 <a:cs typeface="Courier New" pitchFamily="34" charset="-120"/>
               </a:rPr>
-              <a:t>Ex 1</a:t>
-            </a:r>
-            <a:endParaRPr lang="en-US" sz="1700" dirty="0"/>
+              <a:t>cudaStreamCreate(&amp;stream);</a:t>
+            </a:r>
+            <a:endParaRPr lang="en-US" sz="1350" dirty="0"/>
+          </a:p>
+          <a:p>
+            <a:pPr algn="l" indent="0" marL="0">
+              <a:lnSpc>
+                <a:spcPct val="108000"/>
+              </a:lnSpc>
+              <a:buNone/>
+            </a:pPr>
+            <a:r>
+              <a:rPr lang="en-US" sz="1350" dirty="0">
+                <a:solidFill>
+                  <a:srgbClr val="8CC63F"/>
+                </a:solidFill>
+                <a:latin typeface="Courier New" pitchFamily="34" charset="0"/>
+                <a:ea typeface="Courier New" pitchFamily="34" charset="-122"/>
+                <a:cs typeface="Courier New" pitchFamily="34" charset="-120"/>
+              </a:rPr>
+              <a:t>test10_kernel_write&lt;&lt;&lt;gridDim, blockDim, 0, stream&gt;&gt;&gt;(...);</a:t>
+            </a:r>
+            <a:endParaRPr lang="en-US" sz="1350" dirty="0"/>
+          </a:p>
+          <a:p>
+            <a:pPr algn="l" indent="0" marL="0">
+              <a:lnSpc>
+                <a:spcPct val="108000"/>
+              </a:lnSpc>
+              <a:buNone/>
+            </a:pPr>
+            <a:r>
+              <a:rPr lang="en-US" sz="1350" dirty="0">
+                <a:solidFill>
+                  <a:srgbClr val="9AA6B2"/>
+                </a:solidFill>
+                <a:latin typeface="Courier New" pitchFamily="34" charset="0"/>
+                <a:ea typeface="Courier New" pitchFamily="34" charset="-122"/>
+                <a:cs typeface="Courier New" pitchFamily="34" charset="-120"/>
+              </a:rPr>
+              <a:t>//                                    ▲          ▲</a:t>
+            </a:r>
+            <a:endParaRPr lang="en-US" sz="1350" dirty="0"/>
+          </a:p>
+          <a:p>
+            <a:pPr algn="l" indent="0" marL="0">
+              <a:lnSpc>
+                <a:spcPct val="108000"/>
+              </a:lnSpc>
+              <a:buNone/>
+            </a:pPr>
+            <a:r>
+              <a:rPr lang="en-US" sz="1350" dirty="0">
+                <a:solidFill>
+                  <a:srgbClr val="9AA6B2"/>
+                </a:solidFill>
+                <a:latin typeface="Courier New" pitchFamily="34" charset="0"/>
+                <a:ea typeface="Courier New" pitchFamily="34" charset="-122"/>
+                <a:cs typeface="Courier New" pitchFamily="34" charset="-120"/>
+              </a:rPr>
+              <a:t>//                          공유메모리 크기   스트림</a:t>
+            </a:r>
+            <a:endParaRPr lang="en-US" sz="1350" dirty="0"/>
           </a:p>
         </p:txBody>
       </p:sp>
@@ -2309,8 +2462,8 @@
         </p:nvSpPr>
         <p:spPr>
           <a:xfrm>
-            <a:off x="2148840" y="1773936"/>
-            <a:ext cx="3474720" cy="822960"/>
+            <a:off x="548640" y="3108960"/>
+            <a:ext cx="11064240" cy="914400"/>
           </a:xfrm>
           <a:prstGeom prst="rect">
             <a:avLst/>
@@ -2328,74 +2481,46 @@
             <a:r>
               <a:rPr lang="en-US" sz="1700" b="1" dirty="0">
                 <a:solidFill>
-                  <a:srgbClr val="E8EDF2"/>
+                  <a:srgbClr val="4FB0C6"/>
                 </a:solidFill>
                 <a:latin typeface="Malgun Gothic" pitchFamily="34" charset="0"/>
                 <a:ea typeface="Malgun Gothic" pitchFamily="34" charset="-122"/>
                 <a:cs typeface="Malgun Gothic" pitchFamily="34" charset="-120"/>
               </a:rPr>
-              <a:t>느린 커널 vs 빠른 커널</a:t>
-            </a:r>
-            <a:endParaRPr lang="en-US" sz="1700" dirty="0"/>
-          </a:p>
-        </p:txBody>
-      </p:sp>
-      <p:sp>
-        <p:nvSpPr>
-          <p:cNvPr id="7" name="Text 5"/>
-          <p:cNvSpPr/>
-          <p:nvPr/>
-        </p:nvSpPr>
-        <p:spPr>
-          <a:xfrm>
-            <a:off x="804672" y="2651760"/>
-            <a:ext cx="4791456" cy="731520"/>
-          </a:xfrm>
-          <a:prstGeom prst="rect">
-            <a:avLst/>
-          </a:prstGeom>
-          <a:noFill/>
-          <a:ln/>
-        </p:spPr>
-        <p:txBody>
-          <a:bodyPr wrap="square" lIns="0" tIns="0" rIns="0" bIns="0" rtlCol="0" anchor="t"/>
-          <a:lstStyle/>
-          <a:p>
+              <a:t>스트림(stream)</a:t>
+            </a:r>
             <a:pPr indent="0" marL="0">
-              <a:lnSpc>
-                <a:spcPct val="110000"/>
-              </a:lnSpc>
-              <a:buNone/>
-            </a:pPr>
-            <a:r>
-              <a:rPr lang="en-US" sz="1400" dirty="0">
-                <a:solidFill>
-                  <a:srgbClr val="9AA6B2"/>
+              <a:buNone/>
+            </a:pPr>
+            <a:r>
+              <a:rPr lang="en-US" sz="1700" dirty="0">
+                <a:solidFill>
+                  <a:srgbClr val="E8EDF2"/>
                 </a:solidFill>
                 <a:latin typeface="Malgun Gothic" pitchFamily="34" charset="0"/>
                 <a:ea typeface="Malgun Gothic" pitchFamily="34" charset="-122"/>
                 <a:cs typeface="Malgun Gothic" pitchFamily="34" charset="-120"/>
               </a:rPr>
-              <a:t>time으로 Test 3와 Test 10 실행 시간 비교</a:t>
-            </a:r>
-            <a:endParaRPr lang="en-US" sz="1400" dirty="0"/>
-          </a:p>
-        </p:txBody>
-      </p:sp>
-      <p:sp>
-        <p:nvSpPr>
-          <p:cNvPr id="8" name="Shape 6"/>
-          <p:cNvSpPr/>
-          <p:nvPr/>
-        </p:nvSpPr>
-        <p:spPr>
-          <a:xfrm>
-            <a:off x="6309360" y="1554480"/>
-            <a:ext cx="5303520" cy="1965960"/>
-          </a:xfrm>
-          <a:prstGeom prst="roundRect">
-            <a:avLst>
-              <a:gd name="adj" fmla="val 3721"/>
+              <a:t>은 GPU 작업을 순서대로 처리하는 "작업 큐"입니다. Test 10은 하나의 스트림에 쓰기·읽기 커널을 순서대로 넣습니다.</a:t>
+            </a:r>
+            <a:endParaRPr lang="en-US" sz="1700" dirty="0"/>
+          </a:p>
+        </p:txBody>
+      </p:sp>
+      <p:sp>
+        <p:nvSpPr>
+          <p:cNvPr id="7" name="Shape 5"/>
+          <p:cNvSpPr/>
+          <p:nvPr/>
+        </p:nvSpPr>
+        <p:spPr>
+          <a:xfrm>
+            <a:off x="548640" y="4114800"/>
+            <a:ext cx="5349240" cy="1554480"/>
+          </a:xfrm>
+          <a:prstGeom prst="roundRect">
+            <a:avLst>
+              <a:gd name="adj" fmla="val 4706"/>
             </a:avLst>
           </a:prstGeom>
           <a:solidFill>
@@ -2406,57 +2531,53 @@
       </p:sp>
       <p:sp>
         <p:nvSpPr>
-          <p:cNvPr id="9" name="Text 7"/>
-          <p:cNvSpPr/>
-          <p:nvPr/>
-        </p:nvSpPr>
-        <p:spPr>
-          <a:xfrm>
-            <a:off x="6565392" y="1755648"/>
-            <a:ext cx="1188720" cy="502920"/>
-          </a:xfrm>
-          <a:prstGeom prst="roundRect">
-            <a:avLst>
-              <a:gd name="adj" fmla="val 14545"/>
-            </a:avLst>
-          </a:prstGeom>
-          <a:solidFill>
-            <a:srgbClr val="4FB0C6"/>
-          </a:solidFill>
-          <a:ln/>
-        </p:spPr>
-        <p:txBody>
-          <a:bodyPr wrap="square" rtlCol="0" anchor="ctr"/>
-          <a:lstStyle/>
-          <a:p>
-            <a:pPr algn="ctr" indent="0" marL="0">
-              <a:buNone/>
-            </a:pPr>
-            <a:r>
-              <a:rPr lang="en-US" sz="1700" b="1" dirty="0">
-                <a:solidFill>
-                  <a:srgbClr val="13161C"/>
+          <p:cNvPr id="8" name="Text 6"/>
+          <p:cNvSpPr/>
+          <p:nvPr/>
+        </p:nvSpPr>
+        <p:spPr>
+          <a:xfrm>
+            <a:off x="777240" y="4297680"/>
+            <a:ext cx="4892040" cy="457200"/>
+          </a:xfrm>
+          <a:prstGeom prst="rect">
+            <a:avLst/>
+          </a:prstGeom>
+          <a:noFill/>
+          <a:ln/>
+        </p:spPr>
+        <p:txBody>
+          <a:bodyPr wrap="square" lIns="0" tIns="0" rIns="0" bIns="0" rtlCol="0" anchor="ctr"/>
+          <a:lstStyle/>
+          <a:p>
+            <a:pPr indent="0" marL="0">
+              <a:buNone/>
+            </a:pPr>
+            <a:r>
+              <a:rPr lang="en-US" sz="1400" b="1" dirty="0">
+                <a:solidFill>
+                  <a:srgbClr val="8CC63F"/>
                 </a:solidFill>
                 <a:latin typeface="Courier New" pitchFamily="34" charset="0"/>
                 <a:ea typeface="Courier New" pitchFamily="34" charset="-122"/>
                 <a:cs typeface="Courier New" pitchFamily="34" charset="-120"/>
               </a:rPr>
-              <a:t>Ex 2</a:t>
-            </a:r>
-            <a:endParaRPr lang="en-US" sz="1700" dirty="0"/>
-          </a:p>
-        </p:txBody>
-      </p:sp>
-      <p:sp>
-        <p:nvSpPr>
-          <p:cNvPr id="10" name="Text 8"/>
-          <p:cNvSpPr/>
-          <p:nvPr/>
-        </p:nvSpPr>
-        <p:spPr>
-          <a:xfrm>
-            <a:off x="7909560" y="1773936"/>
-            <a:ext cx="3474720" cy="822960"/>
+              <a:t>&lt;&lt;&lt;grid, block, 0, stream&gt;&gt;&gt;</a:t>
+            </a:r>
+            <a:endParaRPr lang="en-US" sz="1400" dirty="0"/>
+          </a:p>
+        </p:txBody>
+      </p:sp>
+      <p:sp>
+        <p:nvSpPr>
+          <p:cNvPr id="9" name="Text 7"/>
+          <p:cNvSpPr/>
+          <p:nvPr/>
+        </p:nvSpPr>
+        <p:spPr>
+          <a:xfrm>
+            <a:off x="777240" y="4754880"/>
+            <a:ext cx="4892040" cy="822960"/>
           </a:xfrm>
           <a:prstGeom prst="rect">
             <a:avLst/>
@@ -2469,10 +2590,13 @@
           <a:lstStyle/>
           <a:p>
             <a:pPr indent="0" marL="0">
-              <a:buNone/>
-            </a:pPr>
-            <a:r>
-              <a:rPr lang="en-US" sz="1700" b="1" dirty="0">
+              <a:lnSpc>
+                <a:spcPct val="115000"/>
+              </a:lnSpc>
+              <a:buNone/>
+            </a:pPr>
+            <a:r>
+              <a:rPr lang="en-US" sz="1400" dirty="0">
                 <a:solidFill>
                   <a:srgbClr val="E8EDF2"/>
                 </a:solidFill>
@@ -2480,11 +2604,33 @@
                 <a:ea typeface="Malgun Gothic" pitchFamily="34" charset="-122"/>
                 <a:cs typeface="Malgun Gothic" pitchFamily="34" charset="-120"/>
               </a:rPr>
-              <a:t>대역폭을 눈으로 보기</a:t>
-            </a:r>
-            <a:endParaRPr lang="en-US" sz="1700" dirty="0"/>
-          </a:p>
-        </p:txBody>
+              <a:t>실행 구성의 3·4번째 인자: 공유 메모리 크기(0), 스트림. 세션 1에선 생략했던 부분입니다.</a:t>
+            </a:r>
+            <a:endParaRPr lang="en-US" sz="1400" dirty="0"/>
+          </a:p>
+        </p:txBody>
+      </p:sp>
+      <p:sp>
+        <p:nvSpPr>
+          <p:cNvPr id="10" name="Shape 8"/>
+          <p:cNvSpPr/>
+          <p:nvPr/>
+        </p:nvSpPr>
+        <p:spPr>
+          <a:xfrm>
+            <a:off x="6263640" y="4114800"/>
+            <a:ext cx="5349240" cy="1554480"/>
+          </a:xfrm>
+          <a:prstGeom prst="roundRect">
+            <a:avLst>
+              <a:gd name="adj" fmla="val 4706"/>
+            </a:avLst>
+          </a:prstGeom>
+          <a:solidFill>
+            <a:srgbClr val="1E232C"/>
+          </a:solidFill>
+          <a:ln/>
+        </p:spPr>
       </p:sp>
       <p:sp>
         <p:nvSpPr>
@@ -2494,115 +2640,47 @@
         </p:nvSpPr>
         <p:spPr>
           <a:xfrm>
-            <a:off x="6565392" y="2651760"/>
-            <a:ext cx="4791456" cy="731520"/>
-          </a:xfrm>
-          <a:prstGeom prst="rect">
-            <a:avLst/>
-          </a:prstGeom>
-          <a:noFill/>
-          <a:ln/>
-        </p:spPr>
-        <p:txBody>
-          <a:bodyPr wrap="square" lIns="0" tIns="0" rIns="0" bIns="0" rtlCol="0" anchor="t"/>
+            <a:off x="6492240" y="4297680"/>
+            <a:ext cx="4892040" cy="457200"/>
+          </a:xfrm>
+          <a:prstGeom prst="rect">
+            <a:avLst/>
+          </a:prstGeom>
+          <a:noFill/>
+          <a:ln/>
+        </p:spPr>
+        <p:txBody>
+          <a:bodyPr wrap="square" lIns="0" tIns="0" rIns="0" bIns="0" rtlCol="0" anchor="ctr"/>
           <a:lstStyle/>
           <a:p>
             <a:pPr indent="0" marL="0">
-              <a:lnSpc>
-                <a:spcPct val="110000"/>
-              </a:lnSpc>
-              <a:buNone/>
-            </a:pPr>
-            <a:r>
-              <a:rPr lang="en-US" sz="1400" dirty="0">
-                <a:solidFill>
-                  <a:srgbClr val="9AA6B2"/>
+              <a:buNone/>
+            </a:pPr>
+            <a:r>
+              <a:rPr lang="en-US" sz="1500" b="1" dirty="0">
+                <a:solidFill>
+                  <a:srgbClr val="4FB0C6"/>
                 </a:solidFill>
                 <a:latin typeface="Malgun Gothic" pitchFamily="34" charset="0"/>
                 <a:ea typeface="Malgun Gothic" pitchFamily="34" charset="-122"/>
                 <a:cs typeface="Malgun Gothic" pitchFamily="34" charset="-120"/>
               </a:rPr>
-              <a:t>--verbose 로 test10의 bandwidth 로그 확인</a:t>
-            </a:r>
-            <a:endParaRPr lang="en-US" sz="1400" dirty="0"/>
-          </a:p>
-        </p:txBody>
-      </p:sp>
-      <p:sp>
-        <p:nvSpPr>
-          <p:cNvPr id="12" name="Shape 10"/>
-          <p:cNvSpPr/>
-          <p:nvPr/>
-        </p:nvSpPr>
-        <p:spPr>
-          <a:xfrm>
-            <a:off x="548640" y="3840480"/>
-            <a:ext cx="5303520" cy="1965960"/>
-          </a:xfrm>
-          <a:prstGeom prst="roundRect">
-            <a:avLst>
-              <a:gd name="adj" fmla="val 3721"/>
-            </a:avLst>
-          </a:prstGeom>
-          <a:solidFill>
-            <a:srgbClr val="1E232C"/>
-          </a:solidFill>
-          <a:ln/>
-        </p:spPr>
-      </p:sp>
-      <p:sp>
-        <p:nvSpPr>
-          <p:cNvPr id="13" name="Text 11"/>
-          <p:cNvSpPr/>
-          <p:nvPr/>
-        </p:nvSpPr>
-        <p:spPr>
-          <a:xfrm>
-            <a:off x="804672" y="4041648"/>
-            <a:ext cx="1188720" cy="502920"/>
-          </a:xfrm>
-          <a:prstGeom prst="roundRect">
-            <a:avLst>
-              <a:gd name="adj" fmla="val 14545"/>
-            </a:avLst>
-          </a:prstGeom>
-          <a:solidFill>
-            <a:srgbClr val="E0A458"/>
-          </a:solidFill>
-          <a:ln/>
-        </p:spPr>
-        <p:txBody>
-          <a:bodyPr wrap="square" rtlCol="0" anchor="ctr"/>
-          <a:lstStyle/>
-          <a:p>
-            <a:pPr algn="ctr" indent="0" marL="0">
-              <a:buNone/>
-            </a:pPr>
-            <a:r>
-              <a:rPr lang="en-US" sz="1700" b="1" dirty="0">
-                <a:solidFill>
-                  <a:srgbClr val="13161C"/>
-                </a:solidFill>
-                <a:latin typeface="Courier New" pitchFamily="34" charset="0"/>
-                <a:ea typeface="Courier New" pitchFamily="34" charset="-122"/>
-                <a:cs typeface="Courier New" pitchFamily="34" charset="-120"/>
-              </a:rPr>
-              <a:t>Ex 3</a:t>
-            </a:r>
-            <a:endParaRPr lang="en-US" sz="1700" dirty="0"/>
-          </a:p>
-        </p:txBody>
-      </p:sp>
-      <p:sp>
-        <p:nvSpPr>
-          <p:cNvPr id="14" name="Text 12"/>
-          <p:cNvSpPr/>
-          <p:nvPr/>
-        </p:nvSpPr>
-        <p:spPr>
-          <a:xfrm>
-            <a:off x="2148840" y="4059936"/>
-            <a:ext cx="3474720" cy="822960"/>
+              <a:t>왜 이벤트도 스트림에?</a:t>
+            </a:r>
+            <a:endParaRPr lang="en-US" sz="1500" dirty="0"/>
+          </a:p>
+        </p:txBody>
+      </p:sp>
+      <p:sp>
+        <p:nvSpPr>
+          <p:cNvPr id="12" name="Text 10"/>
+          <p:cNvSpPr/>
+          <p:nvPr/>
+        </p:nvSpPr>
+        <p:spPr>
+          <a:xfrm>
+            <a:off x="6492240" y="4754880"/>
+            <a:ext cx="4892040" cy="822960"/>
           </a:xfrm>
           <a:prstGeom prst="rect">
             <a:avLst/>
@@ -2615,10 +2693,13 @@
           <a:lstStyle/>
           <a:p>
             <a:pPr indent="0" marL="0">
-              <a:buNone/>
-            </a:pPr>
-            <a:r>
-              <a:rPr lang="en-US" sz="1700" b="1" dirty="0">
+              <a:lnSpc>
+                <a:spcPct val="115000"/>
+              </a:lnSpc>
+              <a:buNone/>
+            </a:pPr>
+            <a:r>
+              <a:rPr lang="en-US" sz="1400" dirty="0">
                 <a:solidFill>
                   <a:srgbClr val="E8EDF2"/>
                 </a:solidFill>
@@ -2626,236 +2707,9 @@
                 <a:ea typeface="Malgun Gothic" pitchFamily="34" charset="-122"/>
                 <a:cs typeface="Malgun Gothic" pitchFamily="34" charset="-120"/>
               </a:rPr>
-              <a:t>블록 크기를 바꿔 측정</a:t>
-            </a:r>
-            <a:endParaRPr lang="en-US" sz="1700" dirty="0"/>
-          </a:p>
-        </p:txBody>
-      </p:sp>
-      <p:sp>
-        <p:nvSpPr>
-          <p:cNvPr id="15" name="Text 13"/>
-          <p:cNvSpPr/>
-          <p:nvPr/>
-        </p:nvSpPr>
-        <p:spPr>
-          <a:xfrm>
-            <a:off x="804672" y="4937760"/>
-            <a:ext cx="4791456" cy="731520"/>
-          </a:xfrm>
-          <a:prstGeom prst="rect">
-            <a:avLst/>
-          </a:prstGeom>
-          <a:noFill/>
-          <a:ln/>
-        </p:spPr>
-        <p:txBody>
-          <a:bodyPr wrap="square" lIns="0" tIns="0" rIns="0" bIns="0" rtlCol="0" anchor="t"/>
-          <a:lstStyle/>
-          <a:p>
-            <a:pPr indent="0" marL="0">
-              <a:lnSpc>
-                <a:spcPct val="110000"/>
-              </a:lnSpc>
-              <a:buNone/>
-            </a:pPr>
-            <a:r>
-              <a:rPr lang="en-US" sz="1400" dirty="0">
-                <a:solidFill>
-                  <a:srgbClr val="9AA6B2"/>
-                </a:solidFill>
-                <a:latin typeface="Malgun Gothic" pitchFamily="34" charset="0"/>
-                <a:ea typeface="Malgun Gothic" pitchFamily="34" charset="-122"/>
-                <a:cs typeface="Malgun Gothic" pitchFamily="34" charset="-120"/>
-              </a:rPr>
-              <a:t>STRESS_BLOCKSIZE 32~256 별 대역폭 표 작성</a:t>
+              <a:t>이벤트를 같은 스트림에 기록해야 그 스트림의 커널들 시간을 정확히 잽니다.</a:t>
             </a:r>
             <a:endParaRPr lang="en-US" sz="1400" dirty="0"/>
-          </a:p>
-        </p:txBody>
-      </p:sp>
-      <p:sp>
-        <p:nvSpPr>
-          <p:cNvPr id="16" name="Shape 14"/>
-          <p:cNvSpPr/>
-          <p:nvPr/>
-        </p:nvSpPr>
-        <p:spPr>
-          <a:xfrm>
-            <a:off x="6309360" y="3840480"/>
-            <a:ext cx="5303520" cy="1965960"/>
-          </a:xfrm>
-          <a:prstGeom prst="roundRect">
-            <a:avLst>
-              <a:gd name="adj" fmla="val 3721"/>
-            </a:avLst>
-          </a:prstGeom>
-          <a:solidFill>
-            <a:srgbClr val="1E232C"/>
-          </a:solidFill>
-          <a:ln/>
-        </p:spPr>
-      </p:sp>
-      <p:sp>
-        <p:nvSpPr>
-          <p:cNvPr id="17" name="Text 15"/>
-          <p:cNvSpPr/>
-          <p:nvPr/>
-        </p:nvSpPr>
-        <p:spPr>
-          <a:xfrm>
-            <a:off x="6565392" y="4041648"/>
-            <a:ext cx="1188720" cy="502920"/>
-          </a:xfrm>
-          <a:prstGeom prst="roundRect">
-            <a:avLst>
-              <a:gd name="adj" fmla="val 14545"/>
-            </a:avLst>
-          </a:prstGeom>
-          <a:solidFill>
-            <a:srgbClr val="8CC63F"/>
-          </a:solidFill>
-          <a:ln/>
-        </p:spPr>
-        <p:txBody>
-          <a:bodyPr wrap="square" rtlCol="0" anchor="ctr"/>
-          <a:lstStyle/>
-          <a:p>
-            <a:pPr algn="ctr" indent="0" marL="0">
-              <a:buNone/>
-            </a:pPr>
-            <a:r>
-              <a:rPr lang="en-US" sz="1700" b="1" dirty="0">
-                <a:solidFill>
-                  <a:srgbClr val="13161C"/>
-                </a:solidFill>
-                <a:latin typeface="Courier New" pitchFamily="34" charset="0"/>
-                <a:ea typeface="Courier New" pitchFamily="34" charset="-122"/>
-                <a:cs typeface="Courier New" pitchFamily="34" charset="-120"/>
-              </a:rPr>
-              <a:t>Ex 4</a:t>
-            </a:r>
-            <a:endParaRPr lang="en-US" sz="1700" dirty="0"/>
-          </a:p>
-        </p:txBody>
-      </p:sp>
-      <p:sp>
-        <p:nvSpPr>
-          <p:cNvPr id="18" name="Text 16"/>
-          <p:cNvSpPr/>
-          <p:nvPr/>
-        </p:nvSpPr>
-        <p:spPr>
-          <a:xfrm>
-            <a:off x="7909560" y="4059936"/>
-            <a:ext cx="3474720" cy="822960"/>
-          </a:xfrm>
-          <a:prstGeom prst="rect">
-            <a:avLst/>
-          </a:prstGeom>
-          <a:noFill/>
-          <a:ln/>
-        </p:spPr>
-        <p:txBody>
-          <a:bodyPr wrap="square" lIns="0" tIns="0" rIns="0" bIns="0" rtlCol="0" anchor="t"/>
-          <a:lstStyle/>
-          <a:p>
-            <a:pPr indent="0" marL="0">
-              <a:buNone/>
-            </a:pPr>
-            <a:r>
-              <a:rPr lang="en-US" sz="1700" b="1" dirty="0">
-                <a:solidFill>
-                  <a:srgbClr val="E8EDF2"/>
-                </a:solidFill>
-                <a:latin typeface="Malgun Gothic" pitchFamily="34" charset="0"/>
-                <a:ea typeface="Malgun Gothic" pitchFamily="34" charset="-122"/>
-                <a:cs typeface="Malgun Gothic" pitchFamily="34" charset="-120"/>
-              </a:rPr>
-              <a:t>메모리 병합 깨뜨리기</a:t>
-            </a:r>
-            <a:endParaRPr lang="en-US" sz="1700" dirty="0"/>
-          </a:p>
-        </p:txBody>
-      </p:sp>
-      <p:sp>
-        <p:nvSpPr>
-          <p:cNvPr id="19" name="Text 17"/>
-          <p:cNvSpPr/>
-          <p:nvPr/>
-        </p:nvSpPr>
-        <p:spPr>
-          <a:xfrm>
-            <a:off x="6565392" y="4937760"/>
-            <a:ext cx="4791456" cy="731520"/>
-          </a:xfrm>
-          <a:prstGeom prst="rect">
-            <a:avLst/>
-          </a:prstGeom>
-          <a:noFill/>
-          <a:ln/>
-        </p:spPr>
-        <p:txBody>
-          <a:bodyPr wrap="square" lIns="0" tIns="0" rIns="0" bIns="0" rtlCol="0" anchor="t"/>
-          <a:lstStyle/>
-          <a:p>
-            <a:pPr indent="0" marL="0">
-              <a:lnSpc>
-                <a:spcPct val="110000"/>
-              </a:lnSpc>
-              <a:buNone/>
-            </a:pPr>
-            <a:r>
-              <a:rPr lang="en-US" sz="1400" dirty="0">
-                <a:solidFill>
-                  <a:srgbClr val="9AA6B2"/>
-                </a:solidFill>
-                <a:latin typeface="Malgun Gothic" pitchFamily="34" charset="0"/>
-                <a:ea typeface="Malgun Gothic" pitchFamily="34" charset="-122"/>
-                <a:cs typeface="Malgun Gothic" pitchFamily="34" charset="-120"/>
-              </a:rPr>
-              <a:t>인덱스를 비병합으로 바꿔 대역폭 급락 관찰</a:t>
-            </a:r>
-            <a:endParaRPr lang="en-US" sz="1400" dirty="0"/>
-          </a:p>
-        </p:txBody>
-      </p:sp>
-      <p:sp>
-        <p:nvSpPr>
-          <p:cNvPr id="20" name="Text 18"/>
-          <p:cNvSpPr/>
-          <p:nvPr/>
-        </p:nvSpPr>
-        <p:spPr>
-          <a:xfrm>
-            <a:off x="548640" y="5943600"/>
-            <a:ext cx="11064240" cy="365760"/>
-          </a:xfrm>
-          <a:prstGeom prst="rect">
-            <a:avLst/>
-          </a:prstGeom>
-          <a:noFill/>
-          <a:ln/>
-        </p:spPr>
-        <p:txBody>
-          <a:bodyPr wrap="square" lIns="0" tIns="0" rIns="0" bIns="0" rtlCol="0" anchor="ctr"/>
-          <a:lstStyle/>
-          <a:p>
-            <a:pPr algn="ctr" indent="0" marL="0">
-              <a:buNone/>
-            </a:pPr>
-            <a:r>
-              <a:rPr lang="en-US" sz="1300" i="1" dirty="0">
-                <a:solidFill>
-                  <a:srgbClr val="9AA6B2"/>
-                </a:solidFill>
-                <a:latin typeface="Malgun Gothic" pitchFamily="34" charset="0"/>
-                <a:ea typeface="Malgun Gothic" pitchFamily="34" charset="-122"/>
-                <a:cs typeface="Malgun Gothic" pitchFamily="34" charset="-120"/>
-              </a:rPr>
-              <a:t>측정이 핵심입니다 — 대역폭 로그는 --verbose 없이는 출력되지 않습니다.</a:t>
-            </a:r>
-            <a:endParaRPr lang="en-US" sz="1300" dirty="0"/>
           </a:p>
         </p:txBody>
       </p:sp>
@@ -2928,7 +2782,7 @@
                 <a:ea typeface="Courier New" pitchFamily="34" charset="-122"/>
                 <a:cs typeface="Courier New" pitchFamily="34" charset="-120"/>
               </a:rPr>
-              <a:t>9</a:t>
+              <a:t>8</a:t>
             </a:r>
             <a:endParaRPr lang="en-US" sz="2200" dirty="0"/>
           </a:p>
@@ -2967,7 +2821,7 @@
                 <a:ea typeface="Malgun Gothic" pitchFamily="34" charset="-122"/>
                 <a:cs typeface="Malgun Gothic" pitchFamily="34" charset="-120"/>
               </a:rPr>
-              <a:t>핵심 정리 &amp; 자주 하는 실수</a:t>
+              <a:t>실습 미리보기 · Lab 3</a:t>
             </a:r>
             <a:endParaRPr lang="en-US" sz="3000" dirty="0"/>
           </a:p>
@@ -2981,12 +2835,12 @@
         </p:nvSpPr>
         <p:spPr>
           <a:xfrm>
-            <a:off x="548640" y="1600200"/>
-            <a:ext cx="5349240" cy="4114800"/>
-          </a:xfrm>
-          <a:prstGeom prst="roundRect">
-            <a:avLst>
-              <a:gd name="adj" fmla="val 1778"/>
+            <a:off x="548640" y="1554480"/>
+            <a:ext cx="5303520" cy="1965960"/>
+          </a:xfrm>
+          <a:prstGeom prst="roundRect">
+            <a:avLst>
+              <a:gd name="adj" fmla="val 3721"/>
             </a:avLst>
           </a:prstGeom>
           <a:solidFill>
@@ -3003,47 +2857,90 @@
         </p:nvSpPr>
         <p:spPr>
           <a:xfrm>
-            <a:off x="822960" y="1828800"/>
-            <a:ext cx="4800600" cy="457200"/>
-          </a:xfrm>
-          <a:prstGeom prst="rect">
-            <a:avLst/>
-          </a:prstGeom>
-          <a:noFill/>
-          <a:ln/>
-        </p:spPr>
-        <p:txBody>
-          <a:bodyPr wrap="square" lIns="0" tIns="0" rIns="0" bIns="0" rtlCol="0" anchor="ctr"/>
+            <a:off x="804672" y="1755648"/>
+            <a:ext cx="1188720" cy="502920"/>
+          </a:xfrm>
+          <a:prstGeom prst="roundRect">
+            <a:avLst>
+              <a:gd name="adj" fmla="val 14545"/>
+            </a:avLst>
+          </a:prstGeom>
+          <a:solidFill>
+            <a:srgbClr val="8CC63F"/>
+          </a:solidFill>
+          <a:ln/>
+        </p:spPr>
+        <p:txBody>
+          <a:bodyPr wrap="square" rtlCol="0" anchor="ctr"/>
+          <a:lstStyle/>
+          <a:p>
+            <a:pPr algn="ctr" indent="0" marL="0">
+              <a:buNone/>
+            </a:pPr>
+            <a:r>
+              <a:rPr lang="en-US" sz="1700" b="1" dirty="0">
+                <a:solidFill>
+                  <a:srgbClr val="13161C"/>
+                </a:solidFill>
+                <a:latin typeface="Courier New" pitchFamily="34" charset="0"/>
+                <a:ea typeface="Courier New" pitchFamily="34" charset="-122"/>
+                <a:cs typeface="Courier New" pitchFamily="34" charset="-120"/>
+              </a:rPr>
+              <a:t>Ex 1</a:t>
+            </a:r>
+            <a:endParaRPr lang="en-US" sz="1700" dirty="0"/>
+          </a:p>
+        </p:txBody>
+      </p:sp>
+      <p:sp>
+        <p:nvSpPr>
+          <p:cNvPr id="6" name="Text 4"/>
+          <p:cNvSpPr/>
+          <p:nvPr/>
+        </p:nvSpPr>
+        <p:spPr>
+          <a:xfrm>
+            <a:off x="2148840" y="1773936"/>
+            <a:ext cx="3474720" cy="822960"/>
+          </a:xfrm>
+          <a:prstGeom prst="rect">
+            <a:avLst/>
+          </a:prstGeom>
+          <a:noFill/>
+          <a:ln/>
+        </p:spPr>
+        <p:txBody>
+          <a:bodyPr wrap="square" lIns="0" tIns="0" rIns="0" bIns="0" rtlCol="0" anchor="t"/>
           <a:lstStyle/>
           <a:p>
             <a:pPr indent="0" marL="0">
               <a:buNone/>
             </a:pPr>
             <a:r>
-              <a:rPr lang="en-US" sz="2000" b="1" dirty="0">
-                <a:solidFill>
-                  <a:srgbClr val="8CC63F"/>
+              <a:rPr lang="en-US" sz="1700" b="1" dirty="0">
+                <a:solidFill>
+                  <a:srgbClr val="E8EDF2"/>
                 </a:solidFill>
                 <a:latin typeface="Malgun Gothic" pitchFamily="34" charset="0"/>
                 <a:ea typeface="Malgun Gothic" pitchFamily="34" charset="-122"/>
                 <a:cs typeface="Malgun Gothic" pitchFamily="34" charset="-120"/>
               </a:rPr>
-              <a:t>기억할 것</a:t>
-            </a:r>
-            <a:endParaRPr lang="en-US" sz="2000" dirty="0"/>
-          </a:p>
-        </p:txBody>
-      </p:sp>
-      <p:sp>
-        <p:nvSpPr>
-          <p:cNvPr id="6" name="Text 4"/>
-          <p:cNvSpPr/>
-          <p:nvPr/>
-        </p:nvSpPr>
-        <p:spPr>
-          <a:xfrm>
-            <a:off x="822960" y="2423160"/>
-            <a:ext cx="4800600" cy="3108960"/>
+              <a:t>느린 커널 vs 빠른 커널</a:t>
+            </a:r>
+            <a:endParaRPr lang="en-US" sz="1700" dirty="0"/>
+          </a:p>
+        </p:txBody>
+      </p:sp>
+      <p:sp>
+        <p:nvSpPr>
+          <p:cNvPr id="7" name="Text 5"/>
+          <p:cNvSpPr/>
+          <p:nvPr/>
+        </p:nvSpPr>
+        <p:spPr>
+          <a:xfrm>
+            <a:off x="804672" y="2651760"/>
+            <a:ext cx="4791456" cy="731520"/>
           </a:xfrm>
           <a:prstGeom prst="rect">
             <a:avLst/>
@@ -3055,36 +2952,118 @@
           <a:bodyPr wrap="square" lIns="0" tIns="0" rIns="0" bIns="0" rtlCol="0" anchor="t"/>
           <a:lstStyle/>
           <a:p>
-            <a:pPr marL="342900" indent="-342900">
-              <a:spcAft>
-                <a:spcPts val="1200"/>
-              </a:spcAft>
-              <a:buSzPct val="100000"/>
-              <a:buChar char="✓"/>
-            </a:pPr>
-            <a:r>
-              <a:rPr lang="en-US" sz="1550" dirty="0">
-                <a:solidFill>
-                  <a:srgbClr val="E8EDF2"/>
+            <a:pPr indent="0" marL="0">
+              <a:lnSpc>
+                <a:spcPct val="110000"/>
+              </a:lnSpc>
+              <a:buNone/>
+            </a:pPr>
+            <a:r>
+              <a:rPr lang="en-US" sz="1400" dirty="0">
+                <a:solidFill>
+                  <a:srgbClr val="9AA6B2"/>
                 </a:solidFill>
                 <a:latin typeface="Malgun Gothic" pitchFamily="34" charset="0"/>
                 <a:ea typeface="Malgun Gothic" pitchFamily="34" charset="-122"/>
                 <a:cs typeface="Malgun Gothic" pitchFamily="34" charset="-120"/>
               </a:rPr>
-              <a:t>총 스레드 = 블록수 × 블록당 스레드</a:t>
-            </a:r>
-            <a:endParaRPr lang="en-US" sz="1550" dirty="0"/>
-          </a:p>
-          <a:p>
-            <a:pPr marL="342900" indent="-342900">
-              <a:spcAft>
-                <a:spcPts val="1200"/>
-              </a:spcAft>
-              <a:buSzPct val="100000"/>
-              <a:buChar char="✓"/>
-            </a:pPr>
-            <a:r>
-              <a:rPr lang="en-US" sz="1550" dirty="0">
+              <a:t>time으로 Test 3와 Test 10 실행 시간 비교</a:t>
+            </a:r>
+            <a:endParaRPr lang="en-US" sz="1400" dirty="0"/>
+          </a:p>
+        </p:txBody>
+      </p:sp>
+      <p:sp>
+        <p:nvSpPr>
+          <p:cNvPr id="8" name="Shape 6"/>
+          <p:cNvSpPr/>
+          <p:nvPr/>
+        </p:nvSpPr>
+        <p:spPr>
+          <a:xfrm>
+            <a:off x="6309360" y="1554480"/>
+            <a:ext cx="5303520" cy="1965960"/>
+          </a:xfrm>
+          <a:prstGeom prst="roundRect">
+            <a:avLst>
+              <a:gd name="adj" fmla="val 3721"/>
+            </a:avLst>
+          </a:prstGeom>
+          <a:solidFill>
+            <a:srgbClr val="1E232C"/>
+          </a:solidFill>
+          <a:ln/>
+        </p:spPr>
+      </p:sp>
+      <p:sp>
+        <p:nvSpPr>
+          <p:cNvPr id="9" name="Text 7"/>
+          <p:cNvSpPr/>
+          <p:nvPr/>
+        </p:nvSpPr>
+        <p:spPr>
+          <a:xfrm>
+            <a:off x="6565392" y="1755648"/>
+            <a:ext cx="1188720" cy="502920"/>
+          </a:xfrm>
+          <a:prstGeom prst="roundRect">
+            <a:avLst>
+              <a:gd name="adj" fmla="val 14545"/>
+            </a:avLst>
+          </a:prstGeom>
+          <a:solidFill>
+            <a:srgbClr val="4FB0C6"/>
+          </a:solidFill>
+          <a:ln/>
+        </p:spPr>
+        <p:txBody>
+          <a:bodyPr wrap="square" rtlCol="0" anchor="ctr"/>
+          <a:lstStyle/>
+          <a:p>
+            <a:pPr algn="ctr" indent="0" marL="0">
+              <a:buNone/>
+            </a:pPr>
+            <a:r>
+              <a:rPr lang="en-US" sz="1700" b="1" dirty="0">
+                <a:solidFill>
+                  <a:srgbClr val="13161C"/>
+                </a:solidFill>
+                <a:latin typeface="Courier New" pitchFamily="34" charset="0"/>
+                <a:ea typeface="Courier New" pitchFamily="34" charset="-122"/>
+                <a:cs typeface="Courier New" pitchFamily="34" charset="-120"/>
+              </a:rPr>
+              <a:t>Ex 2</a:t>
+            </a:r>
+            <a:endParaRPr lang="en-US" sz="1700" dirty="0"/>
+          </a:p>
+        </p:txBody>
+      </p:sp>
+      <p:sp>
+        <p:nvSpPr>
+          <p:cNvPr id="10" name="Text 8"/>
+          <p:cNvSpPr/>
+          <p:nvPr/>
+        </p:nvSpPr>
+        <p:spPr>
+          <a:xfrm>
+            <a:off x="7909560" y="1773936"/>
+            <a:ext cx="3474720" cy="822960"/>
+          </a:xfrm>
+          <a:prstGeom prst="rect">
+            <a:avLst/>
+          </a:prstGeom>
+          <a:noFill/>
+          <a:ln/>
+        </p:spPr>
+        <p:txBody>
+          <a:bodyPr wrap="square" lIns="0" tIns="0" rIns="0" bIns="0" rtlCol="0" anchor="t"/>
+          <a:lstStyle/>
+          <a:p>
+            <a:pPr indent="0" marL="0">
+              <a:buNone/>
+            </a:pPr>
+            <a:r>
+              <a:rPr lang="en-US" sz="1700" b="1" dirty="0">
                 <a:solidFill>
                   <a:srgbClr val="E8EDF2"/>
                 </a:solidFill>
@@ -3092,38 +3071,145 @@
                 <a:ea typeface="Malgun Gothic" pitchFamily="34" charset="-122"/>
                 <a:cs typeface="Malgun Gothic" pitchFamily="34" charset="-120"/>
               </a:rPr>
-              <a:t>index = i*blockDim.x + threadIdx.x → 병합</a:t>
-            </a:r>
-            <a:endParaRPr lang="en-US" sz="1550" dirty="0"/>
-          </a:p>
-          <a:p>
-            <a:pPr marL="342900" indent="-342900">
-              <a:spcAft>
-                <a:spcPts val="1200"/>
-              </a:spcAft>
-              <a:buSzPct val="100000"/>
-              <a:buChar char="✓"/>
-            </a:pPr>
-            <a:r>
-              <a:rPr lang="en-US" sz="1550" dirty="0">
-                <a:solidFill>
-                  <a:srgbClr val="E8EDF2"/>
+              <a:t>대역폭을 눈으로 보기</a:t>
+            </a:r>
+            <a:endParaRPr lang="en-US" sz="1700" dirty="0"/>
+          </a:p>
+        </p:txBody>
+      </p:sp>
+      <p:sp>
+        <p:nvSpPr>
+          <p:cNvPr id="11" name="Text 9"/>
+          <p:cNvSpPr/>
+          <p:nvPr/>
+        </p:nvSpPr>
+        <p:spPr>
+          <a:xfrm>
+            <a:off x="6565392" y="2651760"/>
+            <a:ext cx="4791456" cy="731520"/>
+          </a:xfrm>
+          <a:prstGeom prst="rect">
+            <a:avLst/>
+          </a:prstGeom>
+          <a:noFill/>
+          <a:ln/>
+        </p:spPr>
+        <p:txBody>
+          <a:bodyPr wrap="square" lIns="0" tIns="0" rIns="0" bIns="0" rtlCol="0" anchor="t"/>
+          <a:lstStyle/>
+          <a:p>
+            <a:pPr indent="0" marL="0">
+              <a:lnSpc>
+                <a:spcPct val="110000"/>
+              </a:lnSpc>
+              <a:buNone/>
+            </a:pPr>
+            <a:r>
+              <a:rPr lang="en-US" sz="1400" dirty="0">
+                <a:solidFill>
+                  <a:srgbClr val="9AA6B2"/>
                 </a:solidFill>
                 <a:latin typeface="Malgun Gothic" pitchFamily="34" charset="0"/>
                 <a:ea typeface="Malgun Gothic" pitchFamily="34" charset="-122"/>
                 <a:cs typeface="Malgun Gothic" pitchFamily="34" charset="-120"/>
               </a:rPr>
-              <a:t>커널은 비동기 → 이벤트로 시간 측정</a:t>
-            </a:r>
-            <a:endParaRPr lang="en-US" sz="1550" dirty="0"/>
-          </a:p>
-          <a:p>
-            <a:pPr marL="342900" indent="-342900">
-              <a:buSzPct val="100000"/>
-              <a:buChar char="✓"/>
-            </a:pPr>
-            <a:r>
-              <a:rPr lang="en-US" sz="1550" dirty="0">
+              <a:t>--verbose 로 test10의 bandwidth 로그 확인</a:t>
+            </a:r>
+            <a:endParaRPr lang="en-US" sz="1400" dirty="0"/>
+          </a:p>
+        </p:txBody>
+      </p:sp>
+      <p:sp>
+        <p:nvSpPr>
+          <p:cNvPr id="12" name="Shape 10"/>
+          <p:cNvSpPr/>
+          <p:nvPr/>
+        </p:nvSpPr>
+        <p:spPr>
+          <a:xfrm>
+            <a:off x="548640" y="3840480"/>
+            <a:ext cx="5303520" cy="1965960"/>
+          </a:xfrm>
+          <a:prstGeom prst="roundRect">
+            <a:avLst>
+              <a:gd name="adj" fmla="val 3721"/>
+            </a:avLst>
+          </a:prstGeom>
+          <a:solidFill>
+            <a:srgbClr val="1E232C"/>
+          </a:solidFill>
+          <a:ln/>
+        </p:spPr>
+      </p:sp>
+      <p:sp>
+        <p:nvSpPr>
+          <p:cNvPr id="13" name="Text 11"/>
+          <p:cNvSpPr/>
+          <p:nvPr/>
+        </p:nvSpPr>
+        <p:spPr>
+          <a:xfrm>
+            <a:off x="804672" y="4041648"/>
+            <a:ext cx="1188720" cy="502920"/>
+          </a:xfrm>
+          <a:prstGeom prst="roundRect">
+            <a:avLst>
+              <a:gd name="adj" fmla="val 14545"/>
+            </a:avLst>
+          </a:prstGeom>
+          <a:solidFill>
+            <a:srgbClr val="E0A458"/>
+          </a:solidFill>
+          <a:ln/>
+        </p:spPr>
+        <p:txBody>
+          <a:bodyPr wrap="square" rtlCol="0" anchor="ctr"/>
+          <a:lstStyle/>
+          <a:p>
+            <a:pPr algn="ctr" indent="0" marL="0">
+              <a:buNone/>
+            </a:pPr>
+            <a:r>
+              <a:rPr lang="en-US" sz="1700" b="1" dirty="0">
+                <a:solidFill>
+                  <a:srgbClr val="13161C"/>
+                </a:solidFill>
+                <a:latin typeface="Courier New" pitchFamily="34" charset="0"/>
+                <a:ea typeface="Courier New" pitchFamily="34" charset="-122"/>
+                <a:cs typeface="Courier New" pitchFamily="34" charset="-120"/>
+              </a:rPr>
+              <a:t>Ex 3</a:t>
+            </a:r>
+            <a:endParaRPr lang="en-US" sz="1700" dirty="0"/>
+          </a:p>
+        </p:txBody>
+      </p:sp>
+      <p:sp>
+        <p:nvSpPr>
+          <p:cNvPr id="14" name="Text 12"/>
+          <p:cNvSpPr/>
+          <p:nvPr/>
+        </p:nvSpPr>
+        <p:spPr>
+          <a:xfrm>
+            <a:off x="2148840" y="4059936"/>
+            <a:ext cx="3474720" cy="822960"/>
+          </a:xfrm>
+          <a:prstGeom prst="rect">
+            <a:avLst/>
+          </a:prstGeom>
+          <a:noFill/>
+          <a:ln/>
+        </p:spPr>
+        <p:txBody>
+          <a:bodyPr wrap="square" lIns="0" tIns="0" rIns="0" bIns="0" rtlCol="0" anchor="t"/>
+          <a:lstStyle/>
+          <a:p>
+            <a:pPr indent="0" marL="0">
+              <a:buNone/>
+            </a:pPr>
+            <a:r>
+              <a:rPr lang="en-US" sz="1700" b="1" dirty="0">
                 <a:solidFill>
                   <a:srgbClr val="E8EDF2"/>
                 </a:solidFill>
@@ -3131,83 +3217,129 @@
                 <a:ea typeface="Malgun Gothic" pitchFamily="34" charset="-122"/>
                 <a:cs typeface="Malgun Gothic" pitchFamily="34" charset="-120"/>
               </a:rPr>
-              <a:t>대역폭 = 전송량 ÷ 시간 (GB/s)</a:t>
-            </a:r>
-            <a:endParaRPr lang="en-US" sz="1550" dirty="0"/>
-          </a:p>
-        </p:txBody>
-      </p:sp>
-      <p:sp>
-        <p:nvSpPr>
-          <p:cNvPr id="7" name="Shape 5"/>
-          <p:cNvSpPr/>
-          <p:nvPr/>
-        </p:nvSpPr>
-        <p:spPr>
-          <a:xfrm>
-            <a:off x="6263640" y="1600200"/>
-            <a:ext cx="5349240" cy="4114800"/>
-          </a:xfrm>
-          <a:prstGeom prst="roundRect">
-            <a:avLst>
-              <a:gd name="adj" fmla="val 1778"/>
-            </a:avLst>
-          </a:prstGeom>
-          <a:solidFill>
-            <a:srgbClr val="1E232C"/>
-          </a:solidFill>
-          <a:ln/>
-        </p:spPr>
-      </p:sp>
-      <p:sp>
-        <p:nvSpPr>
-          <p:cNvPr id="8" name="Text 6"/>
-          <p:cNvSpPr/>
-          <p:nvPr/>
-        </p:nvSpPr>
-        <p:spPr>
-          <a:xfrm>
-            <a:off x="6537960" y="1828800"/>
-            <a:ext cx="4800600" cy="457200"/>
-          </a:xfrm>
-          <a:prstGeom prst="rect">
-            <a:avLst/>
-          </a:prstGeom>
-          <a:noFill/>
-          <a:ln/>
-        </p:spPr>
-        <p:txBody>
-          <a:bodyPr wrap="square" lIns="0" tIns="0" rIns="0" bIns="0" rtlCol="0" anchor="ctr"/>
+              <a:t>블록 크기를 바꿔 측정</a:t>
+            </a:r>
+            <a:endParaRPr lang="en-US" sz="1700" dirty="0"/>
+          </a:p>
+        </p:txBody>
+      </p:sp>
+      <p:sp>
+        <p:nvSpPr>
+          <p:cNvPr id="15" name="Text 13"/>
+          <p:cNvSpPr/>
+          <p:nvPr/>
+        </p:nvSpPr>
+        <p:spPr>
+          <a:xfrm>
+            <a:off x="804672" y="4937760"/>
+            <a:ext cx="4791456" cy="731520"/>
+          </a:xfrm>
+          <a:prstGeom prst="rect">
+            <a:avLst/>
+          </a:prstGeom>
+          <a:noFill/>
+          <a:ln/>
+        </p:spPr>
+        <p:txBody>
+          <a:bodyPr wrap="square" lIns="0" tIns="0" rIns="0" bIns="0" rtlCol="0" anchor="t"/>
           <a:lstStyle/>
           <a:p>
             <a:pPr indent="0" marL="0">
-              <a:buNone/>
-            </a:pPr>
-            <a:r>
-              <a:rPr lang="en-US" sz="2000" b="1" dirty="0">
-                <a:solidFill>
-                  <a:srgbClr val="E0A458"/>
+              <a:lnSpc>
+                <a:spcPct val="110000"/>
+              </a:lnSpc>
+              <a:buNone/>
+            </a:pPr>
+            <a:r>
+              <a:rPr lang="en-US" sz="1400" dirty="0">
+                <a:solidFill>
+                  <a:srgbClr val="9AA6B2"/>
                 </a:solidFill>
                 <a:latin typeface="Malgun Gothic" pitchFamily="34" charset="0"/>
                 <a:ea typeface="Malgun Gothic" pitchFamily="34" charset="-122"/>
                 <a:cs typeface="Malgun Gothic" pitchFamily="34" charset="-120"/>
               </a:rPr>
-              <a:t>입문자 함정</a:t>
-            </a:r>
-            <a:endParaRPr lang="en-US" sz="2000" dirty="0"/>
-          </a:p>
-        </p:txBody>
-      </p:sp>
-      <p:sp>
-        <p:nvSpPr>
-          <p:cNvPr id="9" name="Text 7"/>
-          <p:cNvSpPr/>
-          <p:nvPr/>
-        </p:nvSpPr>
-        <p:spPr>
-          <a:xfrm>
-            <a:off x="6537960" y="2423160"/>
-            <a:ext cx="4800600" cy="3108960"/>
+              <a:t>STRESS_BLOCKSIZE 32~256 별 대역폭 표 작성</a:t>
+            </a:r>
+            <a:endParaRPr lang="en-US" sz="1400" dirty="0"/>
+          </a:p>
+        </p:txBody>
+      </p:sp>
+      <p:sp>
+        <p:nvSpPr>
+          <p:cNvPr id="16" name="Shape 14"/>
+          <p:cNvSpPr/>
+          <p:nvPr/>
+        </p:nvSpPr>
+        <p:spPr>
+          <a:xfrm>
+            <a:off x="6309360" y="3840480"/>
+            <a:ext cx="5303520" cy="1965960"/>
+          </a:xfrm>
+          <a:prstGeom prst="roundRect">
+            <a:avLst>
+              <a:gd name="adj" fmla="val 3721"/>
+            </a:avLst>
+          </a:prstGeom>
+          <a:solidFill>
+            <a:srgbClr val="1E232C"/>
+          </a:solidFill>
+          <a:ln/>
+        </p:spPr>
+      </p:sp>
+      <p:sp>
+        <p:nvSpPr>
+          <p:cNvPr id="17" name="Text 15"/>
+          <p:cNvSpPr/>
+          <p:nvPr/>
+        </p:nvSpPr>
+        <p:spPr>
+          <a:xfrm>
+            <a:off x="6565392" y="4041648"/>
+            <a:ext cx="1188720" cy="502920"/>
+          </a:xfrm>
+          <a:prstGeom prst="roundRect">
+            <a:avLst>
+              <a:gd name="adj" fmla="val 14545"/>
+            </a:avLst>
+          </a:prstGeom>
+          <a:solidFill>
+            <a:srgbClr val="8CC63F"/>
+          </a:solidFill>
+          <a:ln/>
+        </p:spPr>
+        <p:txBody>
+          <a:bodyPr wrap="square" rtlCol="0" anchor="ctr"/>
+          <a:lstStyle/>
+          <a:p>
+            <a:pPr algn="ctr" indent="0" marL="0">
+              <a:buNone/>
+            </a:pPr>
+            <a:r>
+              <a:rPr lang="en-US" sz="1700" b="1" dirty="0">
+                <a:solidFill>
+                  <a:srgbClr val="13161C"/>
+                </a:solidFill>
+                <a:latin typeface="Courier New" pitchFamily="34" charset="0"/>
+                <a:ea typeface="Courier New" pitchFamily="34" charset="-122"/>
+                <a:cs typeface="Courier New" pitchFamily="34" charset="-120"/>
+              </a:rPr>
+              <a:t>Ex 4</a:t>
+            </a:r>
+            <a:endParaRPr lang="en-US" sz="1700" dirty="0"/>
+          </a:p>
+        </p:txBody>
+      </p:sp>
+      <p:sp>
+        <p:nvSpPr>
+          <p:cNvPr id="18" name="Text 16"/>
+          <p:cNvSpPr/>
+          <p:nvPr/>
+        </p:nvSpPr>
+        <p:spPr>
+          <a:xfrm>
+            <a:off x="7909560" y="4059936"/>
+            <a:ext cx="3474720" cy="822960"/>
           </a:xfrm>
           <a:prstGeom prst="rect">
             <a:avLst/>
@@ -3219,15 +3351,11 @@
           <a:bodyPr wrap="square" lIns="0" tIns="0" rIns="0" bIns="0" rtlCol="0" anchor="t"/>
           <a:lstStyle/>
           <a:p>
-            <a:pPr marL="342900" indent="-342900">
-              <a:spcAft>
-                <a:spcPts val="1200"/>
-              </a:spcAft>
-              <a:buSzPct val="100000"/>
-              <a:buChar char="✗"/>
-            </a:pPr>
-            <a:r>
-              <a:rPr lang="en-US" sz="1550" dirty="0">
+            <a:pPr indent="0" marL="0">
+              <a:buNone/>
+            </a:pPr>
+            <a:r>
+              <a:rPr lang="en-US" sz="1700" b="1" dirty="0">
                 <a:solidFill>
                   <a:srgbClr val="E8EDF2"/>
                 </a:solidFill>
@@ -3235,69 +3363,90 @@
                 <a:ea typeface="Malgun Gothic" pitchFamily="34" charset="-122"/>
                 <a:cs typeface="Malgun Gothic" pitchFamily="34" charset="-120"/>
               </a:rPr>
-              <a:t>스레드만 늘리면 무한히 빨라진다고 착각 → 포화점 존재</a:t>
-            </a:r>
-            <a:endParaRPr lang="en-US" sz="1550" dirty="0"/>
-          </a:p>
-          <a:p>
-            <a:pPr marL="342900" indent="-342900">
-              <a:spcAft>
-                <a:spcPts val="1200"/>
-              </a:spcAft>
-              <a:buSzPct val="100000"/>
-              <a:buChar char="✗"/>
-            </a:pPr>
-            <a:r>
-              <a:rPr lang="en-US" sz="1550" dirty="0">
-                <a:solidFill>
-                  <a:srgbClr val="E8EDF2"/>
+              <a:t>메모리 병합 깨뜨리기</a:t>
+            </a:r>
+            <a:endParaRPr lang="en-US" sz="1700" dirty="0"/>
+          </a:p>
+        </p:txBody>
+      </p:sp>
+      <p:sp>
+        <p:nvSpPr>
+          <p:cNvPr id="19" name="Text 17"/>
+          <p:cNvSpPr/>
+          <p:nvPr/>
+        </p:nvSpPr>
+        <p:spPr>
+          <a:xfrm>
+            <a:off x="6565392" y="4937760"/>
+            <a:ext cx="4791456" cy="731520"/>
+          </a:xfrm>
+          <a:prstGeom prst="rect">
+            <a:avLst/>
+          </a:prstGeom>
+          <a:noFill/>
+          <a:ln/>
+        </p:spPr>
+        <p:txBody>
+          <a:bodyPr wrap="square" lIns="0" tIns="0" rIns="0" bIns="0" rtlCol="0" anchor="t"/>
+          <a:lstStyle/>
+          <a:p>
+            <a:pPr indent="0" marL="0">
+              <a:lnSpc>
+                <a:spcPct val="110000"/>
+              </a:lnSpc>
+              <a:buNone/>
+            </a:pPr>
+            <a:r>
+              <a:rPr lang="en-US" sz="1400" dirty="0">
+                <a:solidFill>
+                  <a:srgbClr val="9AA6B2"/>
                 </a:solidFill>
                 <a:latin typeface="Malgun Gothic" pitchFamily="34" charset="0"/>
                 <a:ea typeface="Malgun Gothic" pitchFamily="34" charset="-122"/>
                 <a:cs typeface="Malgun Gothic" pitchFamily="34" charset="-120"/>
               </a:rPr>
-              <a:t>CPU 타이머로 커널 시간 측정 → 비동기라 부정확</a:t>
-            </a:r>
-            <a:endParaRPr lang="en-US" sz="1550" dirty="0"/>
-          </a:p>
-          <a:p>
-            <a:pPr marL="342900" indent="-342900">
-              <a:spcAft>
-                <a:spcPts val="1200"/>
-              </a:spcAft>
-              <a:buSzPct val="100000"/>
-              <a:buChar char="✗"/>
-            </a:pPr>
-            <a:r>
-              <a:rPr lang="en-US" sz="1550" dirty="0">
-                <a:solidFill>
-                  <a:srgbClr val="E8EDF2"/>
+              <a:t>인덱스를 비병합으로 바꿔 대역폭 급락 관찰</a:t>
+            </a:r>
+            <a:endParaRPr lang="en-US" sz="1400" dirty="0"/>
+          </a:p>
+        </p:txBody>
+      </p:sp>
+      <p:sp>
+        <p:nvSpPr>
+          <p:cNvPr id="20" name="Text 18"/>
+          <p:cNvSpPr/>
+          <p:nvPr/>
+        </p:nvSpPr>
+        <p:spPr>
+          <a:xfrm>
+            <a:off x="548640" y="5943600"/>
+            <a:ext cx="11064240" cy="365760"/>
+          </a:xfrm>
+          <a:prstGeom prst="rect">
+            <a:avLst/>
+          </a:prstGeom>
+          <a:noFill/>
+          <a:ln/>
+        </p:spPr>
+        <p:txBody>
+          <a:bodyPr wrap="square" lIns="0" tIns="0" rIns="0" bIns="0" rtlCol="0" anchor="ctr"/>
+          <a:lstStyle/>
+          <a:p>
+            <a:pPr algn="ctr" indent="0" marL="0">
+              <a:buNone/>
+            </a:pPr>
+            <a:r>
+              <a:rPr lang="en-US" sz="1300" i="1" dirty="0">
+                <a:solidFill>
+                  <a:srgbClr val="9AA6B2"/>
                 </a:solidFill>
                 <a:latin typeface="Malgun Gothic" pitchFamily="34" charset="0"/>
                 <a:ea typeface="Malgun Gothic" pitchFamily="34" charset="-122"/>
                 <a:cs typeface="Malgun Gothic" pitchFamily="34" charset="-120"/>
               </a:rPr>
-              <a:t>접근 패턴을 흩뜨림 → 병합 깨져 대역폭 급락</a:t>
-            </a:r>
-            <a:endParaRPr lang="en-US" sz="1550" dirty="0"/>
-          </a:p>
-          <a:p>
-            <a:pPr marL="342900" indent="-342900">
-              <a:buSzPct val="100000"/>
-              <a:buChar char="✗"/>
-            </a:pPr>
-            <a:r>
-              <a:rPr lang="en-US" sz="1550" dirty="0">
-                <a:solidFill>
-                  <a:srgbClr val="E8EDF2"/>
-                </a:solidFill>
-                <a:latin typeface="Malgun Gothic" pitchFamily="34" charset="0"/>
-                <a:ea typeface="Malgun Gothic" pitchFamily="34" charset="-122"/>
-                <a:cs typeface="Malgun Gothic" pitchFamily="34" charset="-120"/>
-              </a:rPr>
-              <a:t>--verbose 안 줘서 대역폭 로그가 안 보임</a:t>
-            </a:r>
-            <a:endParaRPr lang="en-US" sz="1550" dirty="0"/>
+              <a:t>측정이 핵심입니다 — 대역폭 로그는 --verbose 없이는 출력되지 않습니다.</a:t>
+            </a:r>
+            <a:endParaRPr lang="en-US" sz="1300" dirty="0"/>
           </a:p>
         </p:txBody>
       </p:sp>
@@ -3341,6 +3490,448 @@
         </p:nvSpPr>
         <p:spPr>
           <a:xfrm>
+            <a:off x="548640" y="411480"/>
+            <a:ext cx="640080" cy="640080"/>
+          </a:xfrm>
+          <a:prstGeom prst="roundRect">
+            <a:avLst>
+              <a:gd name="adj" fmla="val 12857"/>
+            </a:avLst>
+          </a:prstGeom>
+          <a:solidFill>
+            <a:srgbClr val="8CC63F"/>
+          </a:solidFill>
+          <a:ln/>
+        </p:spPr>
+        <p:txBody>
+          <a:bodyPr wrap="square" rtlCol="0" anchor="ctr"/>
+          <a:lstStyle/>
+          <a:p>
+            <a:pPr algn="ctr" indent="0" marL="0">
+              <a:buNone/>
+            </a:pPr>
+            <a:r>
+              <a:rPr lang="en-US" sz="2200" b="1" dirty="0">
+                <a:solidFill>
+                  <a:srgbClr val="13161C"/>
+                </a:solidFill>
+                <a:latin typeface="Courier New" pitchFamily="34" charset="0"/>
+                <a:ea typeface="Courier New" pitchFamily="34" charset="-122"/>
+                <a:cs typeface="Courier New" pitchFamily="34" charset="-120"/>
+              </a:rPr>
+              <a:t>9</a:t>
+            </a:r>
+            <a:endParaRPr lang="en-US" sz="2200" dirty="0"/>
+          </a:p>
+        </p:txBody>
+      </p:sp>
+      <p:sp>
+        <p:nvSpPr>
+          <p:cNvPr id="3" name="Text 1"/>
+          <p:cNvSpPr/>
+          <p:nvPr/>
+        </p:nvSpPr>
+        <p:spPr>
+          <a:xfrm>
+            <a:off x="1325880" y="384048"/>
+            <a:ext cx="10287000" cy="694944"/>
+          </a:xfrm>
+          <a:prstGeom prst="rect">
+            <a:avLst/>
+          </a:prstGeom>
+          <a:noFill/>
+          <a:ln/>
+        </p:spPr>
+        <p:txBody>
+          <a:bodyPr wrap="square" lIns="0" tIns="0" rIns="0" bIns="0" rtlCol="0" anchor="ctr"/>
+          <a:lstStyle/>
+          <a:p>
+            <a:pPr algn="l" indent="0" marL="0">
+              <a:buNone/>
+            </a:pPr>
+            <a:r>
+              <a:rPr lang="en-US" sz="3000" b="1" dirty="0">
+                <a:solidFill>
+                  <a:srgbClr val="E8EDF2"/>
+                </a:solidFill>
+                <a:latin typeface="Malgun Gothic" pitchFamily="34" charset="0"/>
+                <a:ea typeface="Malgun Gothic" pitchFamily="34" charset="-122"/>
+                <a:cs typeface="Malgun Gothic" pitchFamily="34" charset="-120"/>
+              </a:rPr>
+              <a:t>핵심 정리 &amp; 자주 하는 실수</a:t>
+            </a:r>
+            <a:endParaRPr lang="en-US" sz="3000" dirty="0"/>
+          </a:p>
+        </p:txBody>
+      </p:sp>
+      <p:sp>
+        <p:nvSpPr>
+          <p:cNvPr id="4" name="Shape 2"/>
+          <p:cNvSpPr/>
+          <p:nvPr/>
+        </p:nvSpPr>
+        <p:spPr>
+          <a:xfrm>
+            <a:off x="548640" y="1600200"/>
+            <a:ext cx="5349240" cy="4114800"/>
+          </a:xfrm>
+          <a:prstGeom prst="roundRect">
+            <a:avLst>
+              <a:gd name="adj" fmla="val 1778"/>
+            </a:avLst>
+          </a:prstGeom>
+          <a:solidFill>
+            <a:srgbClr val="1E232C"/>
+          </a:solidFill>
+          <a:ln/>
+        </p:spPr>
+      </p:sp>
+      <p:sp>
+        <p:nvSpPr>
+          <p:cNvPr id="5" name="Text 3"/>
+          <p:cNvSpPr/>
+          <p:nvPr/>
+        </p:nvSpPr>
+        <p:spPr>
+          <a:xfrm>
+            <a:off x="822960" y="1828800"/>
+            <a:ext cx="4800600" cy="457200"/>
+          </a:xfrm>
+          <a:prstGeom prst="rect">
+            <a:avLst/>
+          </a:prstGeom>
+          <a:noFill/>
+          <a:ln/>
+        </p:spPr>
+        <p:txBody>
+          <a:bodyPr wrap="square" lIns="0" tIns="0" rIns="0" bIns="0" rtlCol="0" anchor="ctr"/>
+          <a:lstStyle/>
+          <a:p>
+            <a:pPr indent="0" marL="0">
+              <a:buNone/>
+            </a:pPr>
+            <a:r>
+              <a:rPr lang="en-US" sz="2000" b="1" dirty="0">
+                <a:solidFill>
+                  <a:srgbClr val="8CC63F"/>
+                </a:solidFill>
+                <a:latin typeface="Malgun Gothic" pitchFamily="34" charset="0"/>
+                <a:ea typeface="Malgun Gothic" pitchFamily="34" charset="-122"/>
+                <a:cs typeface="Malgun Gothic" pitchFamily="34" charset="-120"/>
+              </a:rPr>
+              <a:t>기억할 것</a:t>
+            </a:r>
+            <a:endParaRPr lang="en-US" sz="2000" dirty="0"/>
+          </a:p>
+        </p:txBody>
+      </p:sp>
+      <p:sp>
+        <p:nvSpPr>
+          <p:cNvPr id="6" name="Text 4"/>
+          <p:cNvSpPr/>
+          <p:nvPr/>
+        </p:nvSpPr>
+        <p:spPr>
+          <a:xfrm>
+            <a:off x="822960" y="2423160"/>
+            <a:ext cx="4800600" cy="3108960"/>
+          </a:xfrm>
+          <a:prstGeom prst="rect">
+            <a:avLst/>
+          </a:prstGeom>
+          <a:noFill/>
+          <a:ln/>
+        </p:spPr>
+        <p:txBody>
+          <a:bodyPr wrap="square" lIns="0" tIns="0" rIns="0" bIns="0" rtlCol="0" anchor="t"/>
+          <a:lstStyle/>
+          <a:p>
+            <a:pPr marL="342900" indent="-342900">
+              <a:spcAft>
+                <a:spcPts val="1200"/>
+              </a:spcAft>
+              <a:buSzPct val="100000"/>
+              <a:buChar char="✓"/>
+            </a:pPr>
+            <a:r>
+              <a:rPr lang="en-US" sz="1550" dirty="0">
+                <a:solidFill>
+                  <a:srgbClr val="E8EDF2"/>
+                </a:solidFill>
+                <a:latin typeface="Malgun Gothic" pitchFamily="34" charset="0"/>
+                <a:ea typeface="Malgun Gothic" pitchFamily="34" charset="-122"/>
+                <a:cs typeface="Malgun Gothic" pitchFamily="34" charset="-120"/>
+              </a:rPr>
+              <a:t>총 스레드 = 블록수 × 블록당 스레드</a:t>
+            </a:r>
+            <a:endParaRPr lang="en-US" sz="1550" dirty="0"/>
+          </a:p>
+          <a:p>
+            <a:pPr marL="342900" indent="-342900">
+              <a:spcAft>
+                <a:spcPts val="1200"/>
+              </a:spcAft>
+              <a:buSzPct val="100000"/>
+              <a:buChar char="✓"/>
+            </a:pPr>
+            <a:r>
+              <a:rPr lang="en-US" sz="1550" dirty="0">
+                <a:solidFill>
+                  <a:srgbClr val="E8EDF2"/>
+                </a:solidFill>
+                <a:latin typeface="Malgun Gothic" pitchFamily="34" charset="0"/>
+                <a:ea typeface="Malgun Gothic" pitchFamily="34" charset="-122"/>
+                <a:cs typeface="Malgun Gothic" pitchFamily="34" charset="-120"/>
+              </a:rPr>
+              <a:t>index = i*blockDim.x + threadIdx.x → 병합</a:t>
+            </a:r>
+            <a:endParaRPr lang="en-US" sz="1550" dirty="0"/>
+          </a:p>
+          <a:p>
+            <a:pPr marL="342900" indent="-342900">
+              <a:spcAft>
+                <a:spcPts val="1200"/>
+              </a:spcAft>
+              <a:buSzPct val="100000"/>
+              <a:buChar char="✓"/>
+            </a:pPr>
+            <a:r>
+              <a:rPr lang="en-US" sz="1550" dirty="0">
+                <a:solidFill>
+                  <a:srgbClr val="E8EDF2"/>
+                </a:solidFill>
+                <a:latin typeface="Malgun Gothic" pitchFamily="34" charset="0"/>
+                <a:ea typeface="Malgun Gothic" pitchFamily="34" charset="-122"/>
+                <a:cs typeface="Malgun Gothic" pitchFamily="34" charset="-120"/>
+              </a:rPr>
+              <a:t>커널은 비동기 → 이벤트로 시간 측정</a:t>
+            </a:r>
+            <a:endParaRPr lang="en-US" sz="1550" dirty="0"/>
+          </a:p>
+          <a:p>
+            <a:pPr marL="342900" indent="-342900">
+              <a:buSzPct val="100000"/>
+              <a:buChar char="✓"/>
+            </a:pPr>
+            <a:r>
+              <a:rPr lang="en-US" sz="1550" dirty="0">
+                <a:solidFill>
+                  <a:srgbClr val="E8EDF2"/>
+                </a:solidFill>
+                <a:latin typeface="Malgun Gothic" pitchFamily="34" charset="0"/>
+                <a:ea typeface="Malgun Gothic" pitchFamily="34" charset="-122"/>
+                <a:cs typeface="Malgun Gothic" pitchFamily="34" charset="-120"/>
+              </a:rPr>
+              <a:t>대역폭 = 전송량 ÷ 시간 (GB/s)</a:t>
+            </a:r>
+            <a:endParaRPr lang="en-US" sz="1550" dirty="0"/>
+          </a:p>
+        </p:txBody>
+      </p:sp>
+      <p:sp>
+        <p:nvSpPr>
+          <p:cNvPr id="7" name="Shape 5"/>
+          <p:cNvSpPr/>
+          <p:nvPr/>
+        </p:nvSpPr>
+        <p:spPr>
+          <a:xfrm>
+            <a:off x="6263640" y="1600200"/>
+            <a:ext cx="5349240" cy="4114800"/>
+          </a:xfrm>
+          <a:prstGeom prst="roundRect">
+            <a:avLst>
+              <a:gd name="adj" fmla="val 1778"/>
+            </a:avLst>
+          </a:prstGeom>
+          <a:solidFill>
+            <a:srgbClr val="1E232C"/>
+          </a:solidFill>
+          <a:ln/>
+        </p:spPr>
+      </p:sp>
+      <p:sp>
+        <p:nvSpPr>
+          <p:cNvPr id="8" name="Text 6"/>
+          <p:cNvSpPr/>
+          <p:nvPr/>
+        </p:nvSpPr>
+        <p:spPr>
+          <a:xfrm>
+            <a:off x="6537960" y="1828800"/>
+            <a:ext cx="4800600" cy="457200"/>
+          </a:xfrm>
+          <a:prstGeom prst="rect">
+            <a:avLst/>
+          </a:prstGeom>
+          <a:noFill/>
+          <a:ln/>
+        </p:spPr>
+        <p:txBody>
+          <a:bodyPr wrap="square" lIns="0" tIns="0" rIns="0" bIns="0" rtlCol="0" anchor="ctr"/>
+          <a:lstStyle/>
+          <a:p>
+            <a:pPr indent="0" marL="0">
+              <a:buNone/>
+            </a:pPr>
+            <a:r>
+              <a:rPr lang="en-US" sz="2000" b="1" dirty="0">
+                <a:solidFill>
+                  <a:srgbClr val="E0A458"/>
+                </a:solidFill>
+                <a:latin typeface="Malgun Gothic" pitchFamily="34" charset="0"/>
+                <a:ea typeface="Malgun Gothic" pitchFamily="34" charset="-122"/>
+                <a:cs typeface="Malgun Gothic" pitchFamily="34" charset="-120"/>
+              </a:rPr>
+              <a:t>입문자 함정</a:t>
+            </a:r>
+            <a:endParaRPr lang="en-US" sz="2000" dirty="0"/>
+          </a:p>
+        </p:txBody>
+      </p:sp>
+      <p:sp>
+        <p:nvSpPr>
+          <p:cNvPr id="9" name="Text 7"/>
+          <p:cNvSpPr/>
+          <p:nvPr/>
+        </p:nvSpPr>
+        <p:spPr>
+          <a:xfrm>
+            <a:off x="6537960" y="2423160"/>
+            <a:ext cx="4800600" cy="3108960"/>
+          </a:xfrm>
+          <a:prstGeom prst="rect">
+            <a:avLst/>
+          </a:prstGeom>
+          <a:noFill/>
+          <a:ln/>
+        </p:spPr>
+        <p:txBody>
+          <a:bodyPr wrap="square" lIns="0" tIns="0" rIns="0" bIns="0" rtlCol="0" anchor="t"/>
+          <a:lstStyle/>
+          <a:p>
+            <a:pPr marL="342900" indent="-342900">
+              <a:spcAft>
+                <a:spcPts val="1200"/>
+              </a:spcAft>
+              <a:buSzPct val="100000"/>
+              <a:buChar char="✗"/>
+            </a:pPr>
+            <a:r>
+              <a:rPr lang="en-US" sz="1550" dirty="0">
+                <a:solidFill>
+                  <a:srgbClr val="E8EDF2"/>
+                </a:solidFill>
+                <a:latin typeface="Malgun Gothic" pitchFamily="34" charset="0"/>
+                <a:ea typeface="Malgun Gothic" pitchFamily="34" charset="-122"/>
+                <a:cs typeface="Malgun Gothic" pitchFamily="34" charset="-120"/>
+              </a:rPr>
+              <a:t>스레드만 늘리면 무한히 빨라진다고 착각 → 포화점 존재</a:t>
+            </a:r>
+            <a:endParaRPr lang="en-US" sz="1550" dirty="0"/>
+          </a:p>
+          <a:p>
+            <a:pPr marL="342900" indent="-342900">
+              <a:spcAft>
+                <a:spcPts val="1200"/>
+              </a:spcAft>
+              <a:buSzPct val="100000"/>
+              <a:buChar char="✗"/>
+            </a:pPr>
+            <a:r>
+              <a:rPr lang="en-US" sz="1550" dirty="0">
+                <a:solidFill>
+                  <a:srgbClr val="E8EDF2"/>
+                </a:solidFill>
+                <a:latin typeface="Malgun Gothic" pitchFamily="34" charset="0"/>
+                <a:ea typeface="Malgun Gothic" pitchFamily="34" charset="-122"/>
+                <a:cs typeface="Malgun Gothic" pitchFamily="34" charset="-120"/>
+              </a:rPr>
+              <a:t>CPU 타이머로 커널 시간 측정 → 비동기라 부정확</a:t>
+            </a:r>
+            <a:endParaRPr lang="en-US" sz="1550" dirty="0"/>
+          </a:p>
+          <a:p>
+            <a:pPr marL="342900" indent="-342900">
+              <a:spcAft>
+                <a:spcPts val="1200"/>
+              </a:spcAft>
+              <a:buSzPct val="100000"/>
+              <a:buChar char="✗"/>
+            </a:pPr>
+            <a:r>
+              <a:rPr lang="en-US" sz="1550" dirty="0">
+                <a:solidFill>
+                  <a:srgbClr val="E8EDF2"/>
+                </a:solidFill>
+                <a:latin typeface="Malgun Gothic" pitchFamily="34" charset="0"/>
+                <a:ea typeface="Malgun Gothic" pitchFamily="34" charset="-122"/>
+                <a:cs typeface="Malgun Gothic" pitchFamily="34" charset="-120"/>
+              </a:rPr>
+              <a:t>접근 패턴을 흩뜨림 → 병합 깨져 대역폭 급락</a:t>
+            </a:r>
+            <a:endParaRPr lang="en-US" sz="1550" dirty="0"/>
+          </a:p>
+          <a:p>
+            <a:pPr marL="342900" indent="-342900">
+              <a:buSzPct val="100000"/>
+              <a:buChar char="✗"/>
+            </a:pPr>
+            <a:r>
+              <a:rPr lang="en-US" sz="1550" dirty="0">
+                <a:solidFill>
+                  <a:srgbClr val="E8EDF2"/>
+                </a:solidFill>
+                <a:latin typeface="Malgun Gothic" pitchFamily="34" charset="0"/>
+                <a:ea typeface="Malgun Gothic" pitchFamily="34" charset="-122"/>
+                <a:cs typeface="Malgun Gothic" pitchFamily="34" charset="-120"/>
+              </a:rPr>
+              <a:t>--verbose 안 줘서 대역폭 로그가 안 보임</a:t>
+            </a:r>
+            <a:endParaRPr lang="en-US" sz="1550" dirty="0"/>
+          </a:p>
+        </p:txBody>
+      </p:sp>
+    </p:spTree>
+  </p:cSld>
+  <p:clrMapOvr>
+    <a:masterClrMapping/>
+  </p:clrMapOvr>
+</p:sld>
+</file>
+
+<file path=ppt/slides/slide13.xml><?xml version="1.0" encoding="utf-8"?>
+<p:sld xmlns:a="http://schemas.openxmlformats.org/drawingml/2006/main" xmlns:r="http://schemas.openxmlformats.org/officeDocument/2006/relationships" xmlns:p="http://schemas.openxmlformats.org/presentationml/2006/main">
+  <p:cSld name="Slide 13">
+    <p:bg>
+      <p:bgPr>
+        <a:solidFill>
+          <a:srgbClr val="13161C"/>
+        </a:solidFill>
+      </p:bgPr>
+    </p:bg>
+    <p:spTree>
+      <p:nvGrpSpPr>
+        <p:cNvPr id="1" name=""/>
+        <p:cNvGrpSpPr/>
+        <p:nvPr/>
+      </p:nvGrpSpPr>
+      <p:grpSpPr>
+        <a:xfrm>
+          <a:off x="0" y="0"/>
+          <a:ext cx="0" cy="0"/>
+          <a:chOff x="0" y="0"/>
+          <a:chExt cx="0" cy="0"/>
+        </a:xfrm>
+      </p:grpSpPr>
+      <p:sp>
+        <p:nvSpPr>
+          <p:cNvPr id="2" name="Text 0"/>
+          <p:cNvSpPr/>
+          <p:nvPr/>
+        </p:nvSpPr>
+        <p:spPr>
+          <a:xfrm>
             <a:off x="548640" y="1463040"/>
             <a:ext cx="9144000" cy="457200"/>
           </a:xfrm>
@@ -8868,7 +9459,7 @@
                 <a:ea typeface="Courier New" pitchFamily="34" charset="-122"/>
                 <a:cs typeface="Courier New" pitchFamily="34" charset="-120"/>
               </a:rPr>
-              <a:t>5</a:t>
+              <a:t>4</a:t>
             </a:r>
             <a:endParaRPr lang="en-US" sz="2200" dirty="0"/>
           </a:p>
@@ -8907,7 +9498,7 @@
                 <a:ea typeface="Malgun Gothic" pitchFamily="34" charset="-122"/>
                 <a:cs typeface="Malgun Gothic" pitchFamily="34" charset="-120"/>
               </a:rPr>
-              <a:t>CUDA 이벤트로 시간 재기</a:t>
+              <a:t>워프 다이버전스(warp divergence)</a:t>
             </a:r>
             <a:endParaRPr lang="en-US" sz="3000" dirty="0"/>
           </a:p>
@@ -8915,18 +9506,57 @@
       </p:sp>
       <p:sp>
         <p:nvSpPr>
-          <p:cNvPr id="4" name="Shape 2"/>
-          <p:cNvSpPr/>
-          <p:nvPr/>
-        </p:nvSpPr>
-        <p:spPr>
-          <a:xfrm>
-            <a:off x="548640" y="1554480"/>
-            <a:ext cx="11064240" cy="2743200"/>
-          </a:xfrm>
-          <a:prstGeom prst="roundRect">
-            <a:avLst>
-              <a:gd name="adj" fmla="val 2000"/>
+          <p:cNvPr id="4" name="Text 2"/>
+          <p:cNvSpPr/>
+          <p:nvPr/>
+        </p:nvSpPr>
+        <p:spPr>
+          <a:xfrm>
+            <a:off x="548640" y="1371600"/>
+            <a:ext cx="11064240" cy="411480"/>
+          </a:xfrm>
+          <a:prstGeom prst="rect">
+            <a:avLst/>
+          </a:prstGeom>
+          <a:noFill/>
+          <a:ln/>
+        </p:spPr>
+        <p:txBody>
+          <a:bodyPr wrap="square" lIns="0" tIns="0" rIns="0" bIns="0" rtlCol="0" anchor="ctr"/>
+          <a:lstStyle/>
+          <a:p>
+            <a:pPr indent="0" marL="0">
+              <a:buNone/>
+            </a:pPr>
+            <a:r>
+              <a:rPr lang="en-US" sz="1500" dirty="0">
+                <a:solidFill>
+                  <a:srgbClr val="9AA6B2"/>
+                </a:solidFill>
+                <a:latin typeface="Malgun Gothic" pitchFamily="34" charset="0"/>
+                <a:ea typeface="Malgun Gothic" pitchFamily="34" charset="-122"/>
+                <a:cs typeface="Malgun Gothic" pitchFamily="34" charset="-120"/>
+              </a:rPr>
+              <a:t>한 워프(32 스레드)가 if/else로 갈리면, GPU는 두 경로를 순차로 실행합니다 (동시에 못 함).</a:t>
+            </a:r>
+            <a:endParaRPr lang="en-US" sz="1500" dirty="0"/>
+          </a:p>
+        </p:txBody>
+      </p:sp>
+      <p:sp>
+        <p:nvSpPr>
+          <p:cNvPr id="5" name="Shape 3"/>
+          <p:cNvSpPr/>
+          <p:nvPr/>
+        </p:nvSpPr>
+        <p:spPr>
+          <a:xfrm>
+            <a:off x="548640" y="1828800"/>
+            <a:ext cx="11064240" cy="640080"/>
+          </a:xfrm>
+          <a:prstGeom prst="roundRect">
+            <a:avLst>
+              <a:gd name="adj" fmla="val 8571"/>
             </a:avLst>
           </a:prstGeom>
           <a:solidFill>
@@ -8942,14 +9572,14 @@
       </p:sp>
       <p:sp>
         <p:nvSpPr>
-          <p:cNvPr id="5" name="Text 3"/>
-          <p:cNvSpPr/>
-          <p:nvPr/>
-        </p:nvSpPr>
-        <p:spPr>
-          <a:xfrm>
-            <a:off x="749808" y="1700784"/>
-            <a:ext cx="10661904" cy="2450592"/>
+          <p:cNvPr id="6" name="Text 4"/>
+          <p:cNvSpPr/>
+          <p:nvPr/>
+        </p:nvSpPr>
+        <p:spPr>
+          <a:xfrm>
+            <a:off x="749808" y="1975104"/>
+            <a:ext cx="10661904" cy="347472"/>
           </a:xfrm>
           <a:prstGeom prst="rect">
             <a:avLst/>
@@ -8970,222 +9600,1438 @@
             <a:r>
               <a:rPr lang="en-US" sz="1300" dirty="0">
                 <a:solidFill>
-                  <a:srgbClr val="9AA6B2"/>
+                  <a:srgbClr val="E8EDF2"/>
                 </a:solidFill>
                 <a:latin typeface="Courier New" pitchFamily="34" charset="0"/>
                 <a:ea typeface="Courier New" pitchFamily="34" charset="-122"/>
                 <a:cs typeface="Courier New" pitchFamily="34" charset="-120"/>
               </a:rPr>
-              <a:t>// test10   tests.cpp:1510~1524</a:t>
+              <a:t>if (cond) { A; } else { B; }   // 워프 안에서 cond가 스레드마다 다르면?</a:t>
             </a:r>
             <a:endParaRPr lang="en-US" sz="1300" dirty="0"/>
           </a:p>
-          <a:p>
-            <a:pPr algn="l" indent="0" marL="0">
-              <a:lnSpc>
-                <a:spcPct val="108000"/>
-              </a:lnSpc>
-              <a:buNone/>
-            </a:pPr>
-            <a:r>
-              <a:rPr lang="en-US" sz="1300" dirty="0">
+        </p:txBody>
+      </p:sp>
+      <p:sp>
+        <p:nvSpPr>
+          <p:cNvPr id="7" name="Text 5"/>
+          <p:cNvSpPr/>
+          <p:nvPr/>
+        </p:nvSpPr>
+        <p:spPr>
+          <a:xfrm>
+            <a:off x="548640" y="2697480"/>
+            <a:ext cx="11064240" cy="274320"/>
+          </a:xfrm>
+          <a:prstGeom prst="rect">
+            <a:avLst/>
+          </a:prstGeom>
+          <a:noFill/>
+          <a:ln/>
+        </p:spPr>
+        <p:txBody>
+          <a:bodyPr wrap="square" lIns="0" tIns="0" rIns="0" bIns="0" rtlCol="0" anchor="ctr"/>
+          <a:lstStyle/>
+          <a:p>
+            <a:pPr indent="0" marL="0">
+              <a:buNone/>
+            </a:pPr>
+            <a:r>
+              <a:rPr lang="en-US" sz="1200" i="1" dirty="0">
+                <a:solidFill>
+                  <a:srgbClr val="9AA6B2"/>
+                </a:solidFill>
+                <a:latin typeface="Malgun Gothic" pitchFamily="34" charset="0"/>
+                <a:ea typeface="Malgun Gothic" pitchFamily="34" charset="-122"/>
+                <a:cs typeface="Malgun Gothic" pitchFamily="34" charset="-120"/>
+              </a:rPr>
+              <a:t>워프의 스레드 (A=if경로, B=else경로)</a:t>
+            </a:r>
+            <a:endParaRPr lang="en-US" sz="1200" dirty="0"/>
+          </a:p>
+        </p:txBody>
+      </p:sp>
+      <p:sp>
+        <p:nvSpPr>
+          <p:cNvPr id="8" name="Text 6"/>
+          <p:cNvSpPr/>
+          <p:nvPr/>
+        </p:nvSpPr>
+        <p:spPr>
+          <a:xfrm>
+            <a:off x="548640" y="3063240"/>
+            <a:ext cx="2743200" cy="457200"/>
+          </a:xfrm>
+          <a:prstGeom prst="rect">
+            <a:avLst/>
+          </a:prstGeom>
+          <a:noFill/>
+          <a:ln/>
+        </p:spPr>
+        <p:txBody>
+          <a:bodyPr wrap="square" lIns="0" tIns="0" rIns="0" bIns="0" rtlCol="0" anchor="ctr"/>
+          <a:lstStyle/>
+          <a:p>
+            <a:pPr indent="0" marL="0">
+              <a:buNone/>
+            </a:pPr>
+            <a:r>
+              <a:rPr lang="en-US" sz="1400" b="1" dirty="0">
                 <a:solidFill>
                   <a:srgbClr val="E8EDF2"/>
+                </a:solidFill>
+                <a:latin typeface="Malgun Gothic" pitchFamily="34" charset="0"/>
+                <a:ea typeface="Malgun Gothic" pitchFamily="34" charset="-122"/>
+                <a:cs typeface="Malgun Gothic" pitchFamily="34" charset="-120"/>
+              </a:rPr>
+              <a:t>1단계: if(A) 실행</a:t>
+            </a:r>
+            <a:endParaRPr lang="en-US" sz="1400" dirty="0"/>
+          </a:p>
+        </p:txBody>
+      </p:sp>
+      <p:sp>
+        <p:nvSpPr>
+          <p:cNvPr id="9" name="Shape 7"/>
+          <p:cNvSpPr/>
+          <p:nvPr/>
+        </p:nvSpPr>
+        <p:spPr>
+          <a:xfrm>
+            <a:off x="3383280" y="3017520"/>
+            <a:ext cx="566928" cy="548640"/>
+          </a:xfrm>
+          <a:prstGeom prst="roundRect">
+            <a:avLst>
+              <a:gd name="adj" fmla="val 8333"/>
+            </a:avLst>
+          </a:prstGeom>
+          <a:solidFill>
+            <a:srgbClr val="8CC63F"/>
+          </a:solidFill>
+          <a:ln w="12700">
+            <a:solidFill>
+              <a:srgbClr val="8CC63F"/>
+            </a:solidFill>
+            <a:prstDash val="solid"/>
+          </a:ln>
+        </p:spPr>
+      </p:sp>
+      <p:sp>
+        <p:nvSpPr>
+          <p:cNvPr id="10" name="Text 8"/>
+          <p:cNvSpPr/>
+          <p:nvPr/>
+        </p:nvSpPr>
+        <p:spPr>
+          <a:xfrm>
+            <a:off x="3383280" y="3017520"/>
+            <a:ext cx="566928" cy="548640"/>
+          </a:xfrm>
+          <a:prstGeom prst="rect">
+            <a:avLst/>
+          </a:prstGeom>
+          <a:noFill/>
+          <a:ln/>
+        </p:spPr>
+        <p:txBody>
+          <a:bodyPr wrap="square" lIns="0" tIns="0" rIns="0" bIns="0" rtlCol="0" anchor="ctr"/>
+          <a:lstStyle/>
+          <a:p>
+            <a:pPr algn="ctr" indent="0" marL="0">
+              <a:buNone/>
+            </a:pPr>
+            <a:r>
+              <a:rPr lang="en-US" sz="1400" b="1" dirty="0">
+                <a:solidFill>
+                  <a:srgbClr val="13161C"/>
                 </a:solidFill>
                 <a:latin typeface="Courier New" pitchFamily="34" charset="0"/>
                 <a:ea typeface="Courier New" pitchFamily="34" charset="-122"/>
                 <a:cs typeface="Courier New" pitchFamily="34" charset="-120"/>
               </a:rPr>
-              <a:t>cudaEventRecord(start, stream);</a:t>
-            </a:r>
-            <a:endParaRPr lang="en-US" sz="1300" dirty="0"/>
-          </a:p>
-          <a:p>
-            <a:pPr algn="l" indent="0" marL="0">
-              <a:lnSpc>
-                <a:spcPct val="108000"/>
-              </a:lnSpc>
-              <a:buNone/>
-            </a:pPr>
-            <a:r>
-              <a:rPr lang="en-US" sz="1300" dirty="0">
-                <a:solidFill>
-                  <a:srgbClr val="8CC63F"/>
+              <a:t>A</a:t>
+            </a:r>
+            <a:endParaRPr lang="en-US" sz="1400" dirty="0"/>
+          </a:p>
+        </p:txBody>
+      </p:sp>
+      <p:sp>
+        <p:nvSpPr>
+          <p:cNvPr id="11" name="Shape 9"/>
+          <p:cNvSpPr/>
+          <p:nvPr/>
+        </p:nvSpPr>
+        <p:spPr>
+          <a:xfrm>
+            <a:off x="4059936" y="3017520"/>
+            <a:ext cx="566928" cy="548640"/>
+          </a:xfrm>
+          <a:prstGeom prst="roundRect">
+            <a:avLst>
+              <a:gd name="adj" fmla="val 8333"/>
+            </a:avLst>
+          </a:prstGeom>
+          <a:solidFill>
+            <a:srgbClr val="0E1116"/>
+          </a:solidFill>
+          <a:ln w="12700">
+            <a:solidFill>
+              <a:srgbClr val="2C3440"/>
+            </a:solidFill>
+            <a:prstDash val="solid"/>
+          </a:ln>
+        </p:spPr>
+      </p:sp>
+      <p:sp>
+        <p:nvSpPr>
+          <p:cNvPr id="12" name="Text 10"/>
+          <p:cNvSpPr/>
+          <p:nvPr/>
+        </p:nvSpPr>
+        <p:spPr>
+          <a:xfrm>
+            <a:off x="4059936" y="3017520"/>
+            <a:ext cx="566928" cy="548640"/>
+          </a:xfrm>
+          <a:prstGeom prst="rect">
+            <a:avLst/>
+          </a:prstGeom>
+          <a:noFill/>
+          <a:ln/>
+        </p:spPr>
+        <p:txBody>
+          <a:bodyPr wrap="square" lIns="0" tIns="0" rIns="0" bIns="0" rtlCol="0" anchor="ctr"/>
+          <a:lstStyle/>
+          <a:p>
+            <a:pPr algn="ctr" indent="0" marL="0">
+              <a:buNone/>
+            </a:pPr>
+            <a:r>
+              <a:rPr lang="en-US" sz="1400" b="1" dirty="0">
+                <a:solidFill>
+                  <a:srgbClr val="9AA6B2"/>
                 </a:solidFill>
                 <a:latin typeface="Courier New" pitchFamily="34" charset="0"/>
                 <a:ea typeface="Courier New" pitchFamily="34" charset="-122"/>
                 <a:cs typeface="Courier New" pitchFamily="34" charset="-120"/>
               </a:rPr>
-              <a:t>test10_kernel_write&lt;&lt;&lt;...&gt;&gt;&gt;(...);          // 쓰기</a:t>
-            </a:r>
-            <a:endParaRPr lang="en-US" sz="1300" dirty="0"/>
-          </a:p>
-          <a:p>
-            <a:pPr algn="l" indent="0" marL="0">
-              <a:lnSpc>
-                <a:spcPct val="108000"/>
-              </a:lnSpc>
-              <a:buNone/>
-            </a:pPr>
-            <a:r>
-              <a:rPr lang="en-US" sz="1300" dirty="0">
-                <a:solidFill>
-                  <a:srgbClr val="8CC63F"/>
+              <a:t>B</a:t>
+            </a:r>
+            <a:endParaRPr lang="en-US" sz="1400" dirty="0"/>
+          </a:p>
+        </p:txBody>
+      </p:sp>
+      <p:sp>
+        <p:nvSpPr>
+          <p:cNvPr id="13" name="Shape 11"/>
+          <p:cNvSpPr/>
+          <p:nvPr/>
+        </p:nvSpPr>
+        <p:spPr>
+          <a:xfrm>
+            <a:off x="4736592" y="3017520"/>
+            <a:ext cx="566928" cy="548640"/>
+          </a:xfrm>
+          <a:prstGeom prst="roundRect">
+            <a:avLst>
+              <a:gd name="adj" fmla="val 8333"/>
+            </a:avLst>
+          </a:prstGeom>
+          <a:solidFill>
+            <a:srgbClr val="8CC63F"/>
+          </a:solidFill>
+          <a:ln w="12700">
+            <a:solidFill>
+              <a:srgbClr val="8CC63F"/>
+            </a:solidFill>
+            <a:prstDash val="solid"/>
+          </a:ln>
+        </p:spPr>
+      </p:sp>
+      <p:sp>
+        <p:nvSpPr>
+          <p:cNvPr id="14" name="Text 12"/>
+          <p:cNvSpPr/>
+          <p:nvPr/>
+        </p:nvSpPr>
+        <p:spPr>
+          <a:xfrm>
+            <a:off x="4736592" y="3017520"/>
+            <a:ext cx="566928" cy="548640"/>
+          </a:xfrm>
+          <a:prstGeom prst="rect">
+            <a:avLst/>
+          </a:prstGeom>
+          <a:noFill/>
+          <a:ln/>
+        </p:spPr>
+        <p:txBody>
+          <a:bodyPr wrap="square" lIns="0" tIns="0" rIns="0" bIns="0" rtlCol="0" anchor="ctr"/>
+          <a:lstStyle/>
+          <a:p>
+            <a:pPr algn="ctr" indent="0" marL="0">
+              <a:buNone/>
+            </a:pPr>
+            <a:r>
+              <a:rPr lang="en-US" sz="1400" b="1" dirty="0">
+                <a:solidFill>
+                  <a:srgbClr val="13161C"/>
                 </a:solidFill>
                 <a:latin typeface="Courier New" pitchFamily="34" charset="0"/>
                 <a:ea typeface="Courier New" pitchFamily="34" charset="-122"/>
                 <a:cs typeface="Courier New" pitchFamily="34" charset="-120"/>
               </a:rPr>
-              <a:t>for (i=0;i&lt;n;i++) test10_kernel_readwrite&lt;&lt;&lt;...&gt;&gt;&gt;(...); // 읽고쓰기 n회</a:t>
-            </a:r>
-            <a:endParaRPr lang="en-US" sz="1300" dirty="0"/>
-          </a:p>
-          <a:p>
-            <a:pPr algn="l" indent="0" marL="0">
-              <a:lnSpc>
-                <a:spcPct val="108000"/>
-              </a:lnSpc>
-              <a:buNone/>
-            </a:pPr>
-            <a:r>
-              <a:rPr lang="en-US" sz="1300" dirty="0">
-                <a:solidFill>
-                  <a:srgbClr val="E8EDF2"/>
+              <a:t>A</a:t>
+            </a:r>
+            <a:endParaRPr lang="en-US" sz="1400" dirty="0"/>
+          </a:p>
+        </p:txBody>
+      </p:sp>
+      <p:sp>
+        <p:nvSpPr>
+          <p:cNvPr id="15" name="Shape 13"/>
+          <p:cNvSpPr/>
+          <p:nvPr/>
+        </p:nvSpPr>
+        <p:spPr>
+          <a:xfrm>
+            <a:off x="5413248" y="3017520"/>
+            <a:ext cx="566928" cy="548640"/>
+          </a:xfrm>
+          <a:prstGeom prst="roundRect">
+            <a:avLst>
+              <a:gd name="adj" fmla="val 8333"/>
+            </a:avLst>
+          </a:prstGeom>
+          <a:solidFill>
+            <a:srgbClr val="8CC63F"/>
+          </a:solidFill>
+          <a:ln w="12700">
+            <a:solidFill>
+              <a:srgbClr val="8CC63F"/>
+            </a:solidFill>
+            <a:prstDash val="solid"/>
+          </a:ln>
+        </p:spPr>
+      </p:sp>
+      <p:sp>
+        <p:nvSpPr>
+          <p:cNvPr id="16" name="Text 14"/>
+          <p:cNvSpPr/>
+          <p:nvPr/>
+        </p:nvSpPr>
+        <p:spPr>
+          <a:xfrm>
+            <a:off x="5413248" y="3017520"/>
+            <a:ext cx="566928" cy="548640"/>
+          </a:xfrm>
+          <a:prstGeom prst="rect">
+            <a:avLst/>
+          </a:prstGeom>
+          <a:noFill/>
+          <a:ln/>
+        </p:spPr>
+        <p:txBody>
+          <a:bodyPr wrap="square" lIns="0" tIns="0" rIns="0" bIns="0" rtlCol="0" anchor="ctr"/>
+          <a:lstStyle/>
+          <a:p>
+            <a:pPr algn="ctr" indent="0" marL="0">
+              <a:buNone/>
+            </a:pPr>
+            <a:r>
+              <a:rPr lang="en-US" sz="1400" b="1" dirty="0">
+                <a:solidFill>
+                  <a:srgbClr val="13161C"/>
                 </a:solidFill>
                 <a:latin typeface="Courier New" pitchFamily="34" charset="0"/>
                 <a:ea typeface="Courier New" pitchFamily="34" charset="-122"/>
                 <a:cs typeface="Courier New" pitchFamily="34" charset="-120"/>
               </a:rPr>
-              <a:t>cudaEventRecord(stop, stream);</a:t>
-            </a:r>
-            <a:endParaRPr lang="en-US" sz="1300" dirty="0"/>
-          </a:p>
-          <a:p>
-            <a:pPr algn="l" indent="0" marL="0">
-              <a:lnSpc>
-                <a:spcPct val="108000"/>
-              </a:lnSpc>
-              <a:buNone/>
-            </a:pPr>
-            <a:r>
-              <a:rPr lang="en-US" sz="1300" dirty="0">
-                <a:solidFill>
-                  <a:srgbClr val="E0A458"/>
+              <a:t>A</a:t>
+            </a:r>
+            <a:endParaRPr lang="en-US" sz="1400" dirty="0"/>
+          </a:p>
+        </p:txBody>
+      </p:sp>
+      <p:sp>
+        <p:nvSpPr>
+          <p:cNvPr id="17" name="Shape 15"/>
+          <p:cNvSpPr/>
+          <p:nvPr/>
+        </p:nvSpPr>
+        <p:spPr>
+          <a:xfrm>
+            <a:off x="6089904" y="3017520"/>
+            <a:ext cx="566928" cy="548640"/>
+          </a:xfrm>
+          <a:prstGeom prst="roundRect">
+            <a:avLst>
+              <a:gd name="adj" fmla="val 8333"/>
+            </a:avLst>
+          </a:prstGeom>
+          <a:solidFill>
+            <a:srgbClr val="0E1116"/>
+          </a:solidFill>
+          <a:ln w="12700">
+            <a:solidFill>
+              <a:srgbClr val="2C3440"/>
+            </a:solidFill>
+            <a:prstDash val="solid"/>
+          </a:ln>
+        </p:spPr>
+      </p:sp>
+      <p:sp>
+        <p:nvSpPr>
+          <p:cNvPr id="18" name="Text 16"/>
+          <p:cNvSpPr/>
+          <p:nvPr/>
+        </p:nvSpPr>
+        <p:spPr>
+          <a:xfrm>
+            <a:off x="6089904" y="3017520"/>
+            <a:ext cx="566928" cy="548640"/>
+          </a:xfrm>
+          <a:prstGeom prst="rect">
+            <a:avLst/>
+          </a:prstGeom>
+          <a:noFill/>
+          <a:ln/>
+        </p:spPr>
+        <p:txBody>
+          <a:bodyPr wrap="square" lIns="0" tIns="0" rIns="0" bIns="0" rtlCol="0" anchor="ctr"/>
+          <a:lstStyle/>
+          <a:p>
+            <a:pPr algn="ctr" indent="0" marL="0">
+              <a:buNone/>
+            </a:pPr>
+            <a:r>
+              <a:rPr lang="en-US" sz="1400" b="1" dirty="0">
+                <a:solidFill>
+                  <a:srgbClr val="9AA6B2"/>
                 </a:solidFill>
                 <a:latin typeface="Courier New" pitchFamily="34" charset="0"/>
                 <a:ea typeface="Courier New" pitchFamily="34" charset="-122"/>
                 <a:cs typeface="Courier New" pitchFamily="34" charset="-120"/>
               </a:rPr>
-              <a:t>cudaEventSynchronize(stop);                 // GPU가 끝날 때까지 대기</a:t>
-            </a:r>
-            <a:endParaRPr lang="en-US" sz="1300" dirty="0"/>
-          </a:p>
-          <a:p>
-            <a:pPr algn="l" indent="0" marL="0">
-              <a:lnSpc>
-                <a:spcPct val="108000"/>
-              </a:lnSpc>
-              <a:buNone/>
-            </a:pPr>
-            <a:r>
-              <a:rPr lang="en-US" sz="1300" dirty="0">
-                <a:solidFill>
-                  <a:srgbClr val="4FB0C6"/>
+              <a:t>B</a:t>
+            </a:r>
+            <a:endParaRPr lang="en-US" sz="1400" dirty="0"/>
+          </a:p>
+        </p:txBody>
+      </p:sp>
+      <p:sp>
+        <p:nvSpPr>
+          <p:cNvPr id="19" name="Shape 17"/>
+          <p:cNvSpPr/>
+          <p:nvPr/>
+        </p:nvSpPr>
+        <p:spPr>
+          <a:xfrm>
+            <a:off x="6766560" y="3017520"/>
+            <a:ext cx="566928" cy="548640"/>
+          </a:xfrm>
+          <a:prstGeom prst="roundRect">
+            <a:avLst>
+              <a:gd name="adj" fmla="val 8333"/>
+            </a:avLst>
+          </a:prstGeom>
+          <a:solidFill>
+            <a:srgbClr val="8CC63F"/>
+          </a:solidFill>
+          <a:ln w="12700">
+            <a:solidFill>
+              <a:srgbClr val="8CC63F"/>
+            </a:solidFill>
+            <a:prstDash val="solid"/>
+          </a:ln>
+        </p:spPr>
+      </p:sp>
+      <p:sp>
+        <p:nvSpPr>
+          <p:cNvPr id="20" name="Text 18"/>
+          <p:cNvSpPr/>
+          <p:nvPr/>
+        </p:nvSpPr>
+        <p:spPr>
+          <a:xfrm>
+            <a:off x="6766560" y="3017520"/>
+            <a:ext cx="566928" cy="548640"/>
+          </a:xfrm>
+          <a:prstGeom prst="rect">
+            <a:avLst/>
+          </a:prstGeom>
+          <a:noFill/>
+          <a:ln/>
+        </p:spPr>
+        <p:txBody>
+          <a:bodyPr wrap="square" lIns="0" tIns="0" rIns="0" bIns="0" rtlCol="0" anchor="ctr"/>
+          <a:lstStyle/>
+          <a:p>
+            <a:pPr algn="ctr" indent="0" marL="0">
+              <a:buNone/>
+            </a:pPr>
+            <a:r>
+              <a:rPr lang="en-US" sz="1400" b="1" dirty="0">
+                <a:solidFill>
+                  <a:srgbClr val="13161C"/>
                 </a:solidFill>
                 <a:latin typeface="Courier New" pitchFamily="34" charset="0"/>
                 <a:ea typeface="Courier New" pitchFamily="34" charset="-122"/>
                 <a:cs typeface="Courier New" pitchFamily="34" charset="-120"/>
               </a:rPr>
-              <a:t>cudaEventElapsedTime(&amp;elapsedtime, start, stop); // 밀리초 경과시간</a:t>
-            </a:r>
-            <a:endParaRPr lang="en-US" sz="1300" dirty="0"/>
-          </a:p>
-        </p:txBody>
-      </p:sp>
-      <p:sp>
-        <p:nvSpPr>
-          <p:cNvPr id="6" name="Text 4"/>
-          <p:cNvSpPr/>
-          <p:nvPr/>
-        </p:nvSpPr>
-        <p:spPr>
-          <a:xfrm>
-            <a:off x="548640" y="4572000"/>
-            <a:ext cx="11064240" cy="1371600"/>
-          </a:xfrm>
-          <a:prstGeom prst="rect">
-            <a:avLst/>
-          </a:prstGeom>
-          <a:noFill/>
-          <a:ln/>
-        </p:spPr>
-        <p:txBody>
-          <a:bodyPr wrap="square" lIns="0" tIns="0" rIns="0" bIns="0" rtlCol="0" anchor="t"/>
+              <a:t>A</a:t>
+            </a:r>
+            <a:endParaRPr lang="en-US" sz="1400" dirty="0"/>
+          </a:p>
+        </p:txBody>
+      </p:sp>
+      <p:sp>
+        <p:nvSpPr>
+          <p:cNvPr id="21" name="Shape 19"/>
+          <p:cNvSpPr/>
+          <p:nvPr/>
+        </p:nvSpPr>
+        <p:spPr>
+          <a:xfrm>
+            <a:off x="7443216" y="3017520"/>
+            <a:ext cx="566928" cy="548640"/>
+          </a:xfrm>
+          <a:prstGeom prst="roundRect">
+            <a:avLst>
+              <a:gd name="adj" fmla="val 8333"/>
+            </a:avLst>
+          </a:prstGeom>
+          <a:solidFill>
+            <a:srgbClr val="0E1116"/>
+          </a:solidFill>
+          <a:ln w="12700">
+            <a:solidFill>
+              <a:srgbClr val="2C3440"/>
+            </a:solidFill>
+            <a:prstDash val="solid"/>
+          </a:ln>
+        </p:spPr>
+      </p:sp>
+      <p:sp>
+        <p:nvSpPr>
+          <p:cNvPr id="22" name="Text 20"/>
+          <p:cNvSpPr/>
+          <p:nvPr/>
+        </p:nvSpPr>
+        <p:spPr>
+          <a:xfrm>
+            <a:off x="7443216" y="3017520"/>
+            <a:ext cx="566928" cy="548640"/>
+          </a:xfrm>
+          <a:prstGeom prst="rect">
+            <a:avLst/>
+          </a:prstGeom>
+          <a:noFill/>
+          <a:ln/>
+        </p:spPr>
+        <p:txBody>
+          <a:bodyPr wrap="square" lIns="0" tIns="0" rIns="0" bIns="0" rtlCol="0" anchor="ctr"/>
+          <a:lstStyle/>
+          <a:p>
+            <a:pPr algn="ctr" indent="0" marL="0">
+              <a:buNone/>
+            </a:pPr>
+            <a:r>
+              <a:rPr lang="en-US" sz="1400" b="1" dirty="0">
+                <a:solidFill>
+                  <a:srgbClr val="9AA6B2"/>
+                </a:solidFill>
+                <a:latin typeface="Courier New" pitchFamily="34" charset="0"/>
+                <a:ea typeface="Courier New" pitchFamily="34" charset="-122"/>
+                <a:cs typeface="Courier New" pitchFamily="34" charset="-120"/>
+              </a:rPr>
+              <a:t>B</a:t>
+            </a:r>
+            <a:endParaRPr lang="en-US" sz="1400" dirty="0"/>
+          </a:p>
+        </p:txBody>
+      </p:sp>
+      <p:sp>
+        <p:nvSpPr>
+          <p:cNvPr id="23" name="Shape 21"/>
+          <p:cNvSpPr/>
+          <p:nvPr/>
+        </p:nvSpPr>
+        <p:spPr>
+          <a:xfrm>
+            <a:off x="8119872" y="3017520"/>
+            <a:ext cx="566928" cy="548640"/>
+          </a:xfrm>
+          <a:prstGeom prst="roundRect">
+            <a:avLst>
+              <a:gd name="adj" fmla="val 8333"/>
+            </a:avLst>
+          </a:prstGeom>
+          <a:solidFill>
+            <a:srgbClr val="0E1116"/>
+          </a:solidFill>
+          <a:ln w="12700">
+            <a:solidFill>
+              <a:srgbClr val="2C3440"/>
+            </a:solidFill>
+            <a:prstDash val="solid"/>
+          </a:ln>
+        </p:spPr>
+      </p:sp>
+      <p:sp>
+        <p:nvSpPr>
+          <p:cNvPr id="24" name="Text 22"/>
+          <p:cNvSpPr/>
+          <p:nvPr/>
+        </p:nvSpPr>
+        <p:spPr>
+          <a:xfrm>
+            <a:off x="8119872" y="3017520"/>
+            <a:ext cx="566928" cy="548640"/>
+          </a:xfrm>
+          <a:prstGeom prst="rect">
+            <a:avLst/>
+          </a:prstGeom>
+          <a:noFill/>
+          <a:ln/>
+        </p:spPr>
+        <p:txBody>
+          <a:bodyPr wrap="square" lIns="0" tIns="0" rIns="0" bIns="0" rtlCol="0" anchor="ctr"/>
+          <a:lstStyle/>
+          <a:p>
+            <a:pPr algn="ctr" indent="0" marL="0">
+              <a:buNone/>
+            </a:pPr>
+            <a:r>
+              <a:rPr lang="en-US" sz="1400" b="1" dirty="0">
+                <a:solidFill>
+                  <a:srgbClr val="9AA6B2"/>
+                </a:solidFill>
+                <a:latin typeface="Courier New" pitchFamily="34" charset="0"/>
+                <a:ea typeface="Courier New" pitchFamily="34" charset="-122"/>
+                <a:cs typeface="Courier New" pitchFamily="34" charset="-120"/>
+              </a:rPr>
+              <a:t>B</a:t>
+            </a:r>
+            <a:endParaRPr lang="en-US" sz="1400" dirty="0"/>
+          </a:p>
+        </p:txBody>
+      </p:sp>
+      <p:sp>
+        <p:nvSpPr>
+          <p:cNvPr id="25" name="Text 23"/>
+          <p:cNvSpPr/>
+          <p:nvPr/>
+        </p:nvSpPr>
+        <p:spPr>
+          <a:xfrm>
+            <a:off x="8933688" y="3063240"/>
+            <a:ext cx="3108960" cy="457200"/>
+          </a:xfrm>
+          <a:prstGeom prst="rect">
+            <a:avLst/>
+          </a:prstGeom>
+          <a:noFill/>
+          <a:ln/>
+        </p:spPr>
+        <p:txBody>
+          <a:bodyPr wrap="square" lIns="0" tIns="0" rIns="0" bIns="0" rtlCol="0" anchor="ctr"/>
           <a:lstStyle/>
           <a:p>
             <a:pPr indent="0" marL="0">
-              <a:spcAft>
-                <a:spcPts val="600"/>
-              </a:spcAft>
-              <a:buNone/>
-            </a:pPr>
-            <a:r>
-              <a:rPr lang="en-US" sz="1600" b="1" dirty="0">
-                <a:solidFill>
-                  <a:srgbClr val="E8EDF2"/>
+              <a:buNone/>
+            </a:pPr>
+            <a:r>
+              <a:rPr lang="en-US" sz="1200" dirty="0">
+                <a:solidFill>
+                  <a:srgbClr val="9AA6B2"/>
                 </a:solidFill>
                 <a:latin typeface="Malgun Gothic" pitchFamily="34" charset="0"/>
                 <a:ea typeface="Malgun Gothic" pitchFamily="34" charset="-122"/>
                 <a:cs typeface="Malgun Gothic" pitchFamily="34" charset="-120"/>
               </a:rPr>
-              <a:t>왜 CPU 타이머가 아니라 GPU 이벤트?</a:t>
-            </a:r>
-            <a:endParaRPr lang="en-US" sz="1600" dirty="0"/>
-          </a:p>
+              <a:t>← A 스레드만 활성, B는 대기</a:t>
+            </a:r>
+            <a:endParaRPr lang="en-US" sz="1200" dirty="0"/>
+          </a:p>
+        </p:txBody>
+      </p:sp>
+      <p:sp>
+        <p:nvSpPr>
+          <p:cNvPr id="26" name="Text 24"/>
+          <p:cNvSpPr/>
+          <p:nvPr/>
+        </p:nvSpPr>
+        <p:spPr>
+          <a:xfrm>
+            <a:off x="548640" y="3840480"/>
+            <a:ext cx="2743200" cy="457200"/>
+          </a:xfrm>
+          <a:prstGeom prst="rect">
+            <a:avLst/>
+          </a:prstGeom>
+          <a:noFill/>
+          <a:ln/>
+        </p:spPr>
+        <p:txBody>
+          <a:bodyPr wrap="square" lIns="0" tIns="0" rIns="0" bIns="0" rtlCol="0" anchor="ctr"/>
+          <a:lstStyle/>
           <a:p>
             <a:pPr indent="0" marL="0">
               <a:buNone/>
             </a:pPr>
             <a:r>
-              <a:rPr lang="en-US" sz="1600" dirty="0">
-                <a:solidFill>
-                  <a:srgbClr val="9AA6B2"/>
+              <a:rPr lang="en-US" sz="1400" b="1" dirty="0">
+                <a:solidFill>
+                  <a:srgbClr val="E8EDF2"/>
                 </a:solidFill>
                 <a:latin typeface="Malgun Gothic" pitchFamily="34" charset="0"/>
                 <a:ea typeface="Malgun Gothic" pitchFamily="34" charset="-122"/>
                 <a:cs typeface="Malgun Gothic" pitchFamily="34" charset="-120"/>
               </a:rPr>
-              <a:t>커널은 비동기(asynchronous) 실행 — CPU는 커널을 던지고 바로 다음 줄로 갑니다. GPU 타임라인 위에 </a:t>
-            </a:r>
+              <a:t>2단계: else(B) 실행</a:t>
+            </a:r>
+            <a:endParaRPr lang="en-US" sz="1400" dirty="0"/>
+          </a:p>
+        </p:txBody>
+      </p:sp>
+      <p:sp>
+        <p:nvSpPr>
+          <p:cNvPr id="27" name="Shape 25"/>
+          <p:cNvSpPr/>
+          <p:nvPr/>
+        </p:nvSpPr>
+        <p:spPr>
+          <a:xfrm>
+            <a:off x="3383280" y="3794760"/>
+            <a:ext cx="566928" cy="548640"/>
+          </a:xfrm>
+          <a:prstGeom prst="roundRect">
+            <a:avLst>
+              <a:gd name="adj" fmla="val 8333"/>
+            </a:avLst>
+          </a:prstGeom>
+          <a:solidFill>
+            <a:srgbClr val="0E1116"/>
+          </a:solidFill>
+          <a:ln w="12700">
+            <a:solidFill>
+              <a:srgbClr val="2C3440"/>
+            </a:solidFill>
+            <a:prstDash val="solid"/>
+          </a:ln>
+        </p:spPr>
+      </p:sp>
+      <p:sp>
+        <p:nvSpPr>
+          <p:cNvPr id="28" name="Text 26"/>
+          <p:cNvSpPr/>
+          <p:nvPr/>
+        </p:nvSpPr>
+        <p:spPr>
+          <a:xfrm>
+            <a:off x="3383280" y="3794760"/>
+            <a:ext cx="566928" cy="548640"/>
+          </a:xfrm>
+          <a:prstGeom prst="rect">
+            <a:avLst/>
+          </a:prstGeom>
+          <a:noFill/>
+          <a:ln/>
+        </p:spPr>
+        <p:txBody>
+          <a:bodyPr wrap="square" lIns="0" tIns="0" rIns="0" bIns="0" rtlCol="0" anchor="ctr"/>
+          <a:lstStyle/>
+          <a:p>
+            <a:pPr algn="ctr" indent="0" marL="0">
+              <a:buNone/>
+            </a:pPr>
+            <a:r>
+              <a:rPr lang="en-US" sz="1400" b="1" dirty="0">
+                <a:solidFill>
+                  <a:srgbClr val="9AA6B2"/>
+                </a:solidFill>
+                <a:latin typeface="Courier New" pitchFamily="34" charset="0"/>
+                <a:ea typeface="Courier New" pitchFamily="34" charset="-122"/>
+                <a:cs typeface="Courier New" pitchFamily="34" charset="-120"/>
+              </a:rPr>
+              <a:t>A</a:t>
+            </a:r>
+            <a:endParaRPr lang="en-US" sz="1400" dirty="0"/>
+          </a:p>
+        </p:txBody>
+      </p:sp>
+      <p:sp>
+        <p:nvSpPr>
+          <p:cNvPr id="29" name="Shape 27"/>
+          <p:cNvSpPr/>
+          <p:nvPr/>
+        </p:nvSpPr>
+        <p:spPr>
+          <a:xfrm>
+            <a:off x="4059936" y="3794760"/>
+            <a:ext cx="566928" cy="548640"/>
+          </a:xfrm>
+          <a:prstGeom prst="roundRect">
+            <a:avLst>
+              <a:gd name="adj" fmla="val 8333"/>
+            </a:avLst>
+          </a:prstGeom>
+          <a:solidFill>
+            <a:srgbClr val="E0A458"/>
+          </a:solidFill>
+          <a:ln w="12700">
+            <a:solidFill>
+              <a:srgbClr val="E0A458"/>
+            </a:solidFill>
+            <a:prstDash val="solid"/>
+          </a:ln>
+        </p:spPr>
+      </p:sp>
+      <p:sp>
+        <p:nvSpPr>
+          <p:cNvPr id="30" name="Text 28"/>
+          <p:cNvSpPr/>
+          <p:nvPr/>
+        </p:nvSpPr>
+        <p:spPr>
+          <a:xfrm>
+            <a:off x="4059936" y="3794760"/>
+            <a:ext cx="566928" cy="548640"/>
+          </a:xfrm>
+          <a:prstGeom prst="rect">
+            <a:avLst/>
+          </a:prstGeom>
+          <a:noFill/>
+          <a:ln/>
+        </p:spPr>
+        <p:txBody>
+          <a:bodyPr wrap="square" lIns="0" tIns="0" rIns="0" bIns="0" rtlCol="0" anchor="ctr"/>
+          <a:lstStyle/>
+          <a:p>
+            <a:pPr algn="ctr" indent="0" marL="0">
+              <a:buNone/>
+            </a:pPr>
+            <a:r>
+              <a:rPr lang="en-US" sz="1400" b="1" dirty="0">
+                <a:solidFill>
+                  <a:srgbClr val="13161C"/>
+                </a:solidFill>
+                <a:latin typeface="Courier New" pitchFamily="34" charset="0"/>
+                <a:ea typeface="Courier New" pitchFamily="34" charset="-122"/>
+                <a:cs typeface="Courier New" pitchFamily="34" charset="-120"/>
+              </a:rPr>
+              <a:t>B</a:t>
+            </a:r>
+            <a:endParaRPr lang="en-US" sz="1400" dirty="0"/>
+          </a:p>
+        </p:txBody>
+      </p:sp>
+      <p:sp>
+        <p:nvSpPr>
+          <p:cNvPr id="31" name="Shape 29"/>
+          <p:cNvSpPr/>
+          <p:nvPr/>
+        </p:nvSpPr>
+        <p:spPr>
+          <a:xfrm>
+            <a:off x="4736592" y="3794760"/>
+            <a:ext cx="566928" cy="548640"/>
+          </a:xfrm>
+          <a:prstGeom prst="roundRect">
+            <a:avLst>
+              <a:gd name="adj" fmla="val 8333"/>
+            </a:avLst>
+          </a:prstGeom>
+          <a:solidFill>
+            <a:srgbClr val="0E1116"/>
+          </a:solidFill>
+          <a:ln w="12700">
+            <a:solidFill>
+              <a:srgbClr val="2C3440"/>
+            </a:solidFill>
+            <a:prstDash val="solid"/>
+          </a:ln>
+        </p:spPr>
+      </p:sp>
+      <p:sp>
+        <p:nvSpPr>
+          <p:cNvPr id="32" name="Text 30"/>
+          <p:cNvSpPr/>
+          <p:nvPr/>
+        </p:nvSpPr>
+        <p:spPr>
+          <a:xfrm>
+            <a:off x="4736592" y="3794760"/>
+            <a:ext cx="566928" cy="548640"/>
+          </a:xfrm>
+          <a:prstGeom prst="rect">
+            <a:avLst/>
+          </a:prstGeom>
+          <a:noFill/>
+          <a:ln/>
+        </p:spPr>
+        <p:txBody>
+          <a:bodyPr wrap="square" lIns="0" tIns="0" rIns="0" bIns="0" rtlCol="0" anchor="ctr"/>
+          <a:lstStyle/>
+          <a:p>
+            <a:pPr algn="ctr" indent="0" marL="0">
+              <a:buNone/>
+            </a:pPr>
+            <a:r>
+              <a:rPr lang="en-US" sz="1400" b="1" dirty="0">
+                <a:solidFill>
+                  <a:srgbClr val="9AA6B2"/>
+                </a:solidFill>
+                <a:latin typeface="Courier New" pitchFamily="34" charset="0"/>
+                <a:ea typeface="Courier New" pitchFamily="34" charset="-122"/>
+                <a:cs typeface="Courier New" pitchFamily="34" charset="-120"/>
+              </a:rPr>
+              <a:t>A</a:t>
+            </a:r>
+            <a:endParaRPr lang="en-US" sz="1400" dirty="0"/>
+          </a:p>
+        </p:txBody>
+      </p:sp>
+      <p:sp>
+        <p:nvSpPr>
+          <p:cNvPr id="33" name="Shape 31"/>
+          <p:cNvSpPr/>
+          <p:nvPr/>
+        </p:nvSpPr>
+        <p:spPr>
+          <a:xfrm>
+            <a:off x="5413248" y="3794760"/>
+            <a:ext cx="566928" cy="548640"/>
+          </a:xfrm>
+          <a:prstGeom prst="roundRect">
+            <a:avLst>
+              <a:gd name="adj" fmla="val 8333"/>
+            </a:avLst>
+          </a:prstGeom>
+          <a:solidFill>
+            <a:srgbClr val="0E1116"/>
+          </a:solidFill>
+          <a:ln w="12700">
+            <a:solidFill>
+              <a:srgbClr val="2C3440"/>
+            </a:solidFill>
+            <a:prstDash val="solid"/>
+          </a:ln>
+        </p:spPr>
+      </p:sp>
+      <p:sp>
+        <p:nvSpPr>
+          <p:cNvPr id="34" name="Text 32"/>
+          <p:cNvSpPr/>
+          <p:nvPr/>
+        </p:nvSpPr>
+        <p:spPr>
+          <a:xfrm>
+            <a:off x="5413248" y="3794760"/>
+            <a:ext cx="566928" cy="548640"/>
+          </a:xfrm>
+          <a:prstGeom prst="rect">
+            <a:avLst/>
+          </a:prstGeom>
+          <a:noFill/>
+          <a:ln/>
+        </p:spPr>
+        <p:txBody>
+          <a:bodyPr wrap="square" lIns="0" tIns="0" rIns="0" bIns="0" rtlCol="0" anchor="ctr"/>
+          <a:lstStyle/>
+          <a:p>
+            <a:pPr algn="ctr" indent="0" marL="0">
+              <a:buNone/>
+            </a:pPr>
+            <a:r>
+              <a:rPr lang="en-US" sz="1400" b="1" dirty="0">
+                <a:solidFill>
+                  <a:srgbClr val="9AA6B2"/>
+                </a:solidFill>
+                <a:latin typeface="Courier New" pitchFamily="34" charset="0"/>
+                <a:ea typeface="Courier New" pitchFamily="34" charset="-122"/>
+                <a:cs typeface="Courier New" pitchFamily="34" charset="-120"/>
+              </a:rPr>
+              <a:t>A</a:t>
+            </a:r>
+            <a:endParaRPr lang="en-US" sz="1400" dirty="0"/>
+          </a:p>
+        </p:txBody>
+      </p:sp>
+      <p:sp>
+        <p:nvSpPr>
+          <p:cNvPr id="35" name="Shape 33"/>
+          <p:cNvSpPr/>
+          <p:nvPr/>
+        </p:nvSpPr>
+        <p:spPr>
+          <a:xfrm>
+            <a:off x="6089904" y="3794760"/>
+            <a:ext cx="566928" cy="548640"/>
+          </a:xfrm>
+          <a:prstGeom prst="roundRect">
+            <a:avLst>
+              <a:gd name="adj" fmla="val 8333"/>
+            </a:avLst>
+          </a:prstGeom>
+          <a:solidFill>
+            <a:srgbClr val="E0A458"/>
+          </a:solidFill>
+          <a:ln w="12700">
+            <a:solidFill>
+              <a:srgbClr val="E0A458"/>
+            </a:solidFill>
+            <a:prstDash val="solid"/>
+          </a:ln>
+        </p:spPr>
+      </p:sp>
+      <p:sp>
+        <p:nvSpPr>
+          <p:cNvPr id="36" name="Text 34"/>
+          <p:cNvSpPr/>
+          <p:nvPr/>
+        </p:nvSpPr>
+        <p:spPr>
+          <a:xfrm>
+            <a:off x="6089904" y="3794760"/>
+            <a:ext cx="566928" cy="548640"/>
+          </a:xfrm>
+          <a:prstGeom prst="rect">
+            <a:avLst/>
+          </a:prstGeom>
+          <a:noFill/>
+          <a:ln/>
+        </p:spPr>
+        <p:txBody>
+          <a:bodyPr wrap="square" lIns="0" tIns="0" rIns="0" bIns="0" rtlCol="0" anchor="ctr"/>
+          <a:lstStyle/>
+          <a:p>
+            <a:pPr algn="ctr" indent="0" marL="0">
+              <a:buNone/>
+            </a:pPr>
+            <a:r>
+              <a:rPr lang="en-US" sz="1400" b="1" dirty="0">
+                <a:solidFill>
+                  <a:srgbClr val="13161C"/>
+                </a:solidFill>
+                <a:latin typeface="Courier New" pitchFamily="34" charset="0"/>
+                <a:ea typeface="Courier New" pitchFamily="34" charset="-122"/>
+                <a:cs typeface="Courier New" pitchFamily="34" charset="-120"/>
+              </a:rPr>
+              <a:t>B</a:t>
+            </a:r>
+            <a:endParaRPr lang="en-US" sz="1400" dirty="0"/>
+          </a:p>
+        </p:txBody>
+      </p:sp>
+      <p:sp>
+        <p:nvSpPr>
+          <p:cNvPr id="37" name="Shape 35"/>
+          <p:cNvSpPr/>
+          <p:nvPr/>
+        </p:nvSpPr>
+        <p:spPr>
+          <a:xfrm>
+            <a:off x="6766560" y="3794760"/>
+            <a:ext cx="566928" cy="548640"/>
+          </a:xfrm>
+          <a:prstGeom prst="roundRect">
+            <a:avLst>
+              <a:gd name="adj" fmla="val 8333"/>
+            </a:avLst>
+          </a:prstGeom>
+          <a:solidFill>
+            <a:srgbClr val="0E1116"/>
+          </a:solidFill>
+          <a:ln w="12700">
+            <a:solidFill>
+              <a:srgbClr val="2C3440"/>
+            </a:solidFill>
+            <a:prstDash val="solid"/>
+          </a:ln>
+        </p:spPr>
+      </p:sp>
+      <p:sp>
+        <p:nvSpPr>
+          <p:cNvPr id="38" name="Text 36"/>
+          <p:cNvSpPr/>
+          <p:nvPr/>
+        </p:nvSpPr>
+        <p:spPr>
+          <a:xfrm>
+            <a:off x="6766560" y="3794760"/>
+            <a:ext cx="566928" cy="548640"/>
+          </a:xfrm>
+          <a:prstGeom prst="rect">
+            <a:avLst/>
+          </a:prstGeom>
+          <a:noFill/>
+          <a:ln/>
+        </p:spPr>
+        <p:txBody>
+          <a:bodyPr wrap="square" lIns="0" tIns="0" rIns="0" bIns="0" rtlCol="0" anchor="ctr"/>
+          <a:lstStyle/>
+          <a:p>
+            <a:pPr algn="ctr" indent="0" marL="0">
+              <a:buNone/>
+            </a:pPr>
+            <a:r>
+              <a:rPr lang="en-US" sz="1400" b="1" dirty="0">
+                <a:solidFill>
+                  <a:srgbClr val="9AA6B2"/>
+                </a:solidFill>
+                <a:latin typeface="Courier New" pitchFamily="34" charset="0"/>
+                <a:ea typeface="Courier New" pitchFamily="34" charset="-122"/>
+                <a:cs typeface="Courier New" pitchFamily="34" charset="-120"/>
+              </a:rPr>
+              <a:t>A</a:t>
+            </a:r>
+            <a:endParaRPr lang="en-US" sz="1400" dirty="0"/>
+          </a:p>
+        </p:txBody>
+      </p:sp>
+      <p:sp>
+        <p:nvSpPr>
+          <p:cNvPr id="39" name="Shape 37"/>
+          <p:cNvSpPr/>
+          <p:nvPr/>
+        </p:nvSpPr>
+        <p:spPr>
+          <a:xfrm>
+            <a:off x="7443216" y="3794760"/>
+            <a:ext cx="566928" cy="548640"/>
+          </a:xfrm>
+          <a:prstGeom prst="roundRect">
+            <a:avLst>
+              <a:gd name="adj" fmla="val 8333"/>
+            </a:avLst>
+          </a:prstGeom>
+          <a:solidFill>
+            <a:srgbClr val="E0A458"/>
+          </a:solidFill>
+          <a:ln w="12700">
+            <a:solidFill>
+              <a:srgbClr val="E0A458"/>
+            </a:solidFill>
+            <a:prstDash val="solid"/>
+          </a:ln>
+        </p:spPr>
+      </p:sp>
+      <p:sp>
+        <p:nvSpPr>
+          <p:cNvPr id="40" name="Text 38"/>
+          <p:cNvSpPr/>
+          <p:nvPr/>
+        </p:nvSpPr>
+        <p:spPr>
+          <a:xfrm>
+            <a:off x="7443216" y="3794760"/>
+            <a:ext cx="566928" cy="548640"/>
+          </a:xfrm>
+          <a:prstGeom prst="rect">
+            <a:avLst/>
+          </a:prstGeom>
+          <a:noFill/>
+          <a:ln/>
+        </p:spPr>
+        <p:txBody>
+          <a:bodyPr wrap="square" lIns="0" tIns="0" rIns="0" bIns="0" rtlCol="0" anchor="ctr"/>
+          <a:lstStyle/>
+          <a:p>
+            <a:pPr algn="ctr" indent="0" marL="0">
+              <a:buNone/>
+            </a:pPr>
+            <a:r>
+              <a:rPr lang="en-US" sz="1400" b="1" dirty="0">
+                <a:solidFill>
+                  <a:srgbClr val="13161C"/>
+                </a:solidFill>
+                <a:latin typeface="Courier New" pitchFamily="34" charset="0"/>
+                <a:ea typeface="Courier New" pitchFamily="34" charset="-122"/>
+                <a:cs typeface="Courier New" pitchFamily="34" charset="-120"/>
+              </a:rPr>
+              <a:t>B</a:t>
+            </a:r>
+            <a:endParaRPr lang="en-US" sz="1400" dirty="0"/>
+          </a:p>
+        </p:txBody>
+      </p:sp>
+      <p:sp>
+        <p:nvSpPr>
+          <p:cNvPr id="41" name="Shape 39"/>
+          <p:cNvSpPr/>
+          <p:nvPr/>
+        </p:nvSpPr>
+        <p:spPr>
+          <a:xfrm>
+            <a:off x="8119872" y="3794760"/>
+            <a:ext cx="566928" cy="548640"/>
+          </a:xfrm>
+          <a:prstGeom prst="roundRect">
+            <a:avLst>
+              <a:gd name="adj" fmla="val 8333"/>
+            </a:avLst>
+          </a:prstGeom>
+          <a:solidFill>
+            <a:srgbClr val="E0A458"/>
+          </a:solidFill>
+          <a:ln w="12700">
+            <a:solidFill>
+              <a:srgbClr val="E0A458"/>
+            </a:solidFill>
+            <a:prstDash val="solid"/>
+          </a:ln>
+        </p:spPr>
+      </p:sp>
+      <p:sp>
+        <p:nvSpPr>
+          <p:cNvPr id="42" name="Text 40"/>
+          <p:cNvSpPr/>
+          <p:nvPr/>
+        </p:nvSpPr>
+        <p:spPr>
+          <a:xfrm>
+            <a:off x="8119872" y="3794760"/>
+            <a:ext cx="566928" cy="548640"/>
+          </a:xfrm>
+          <a:prstGeom prst="rect">
+            <a:avLst/>
+          </a:prstGeom>
+          <a:noFill/>
+          <a:ln/>
+        </p:spPr>
+        <p:txBody>
+          <a:bodyPr wrap="square" lIns="0" tIns="0" rIns="0" bIns="0" rtlCol="0" anchor="ctr"/>
+          <a:lstStyle/>
+          <a:p>
+            <a:pPr algn="ctr" indent="0" marL="0">
+              <a:buNone/>
+            </a:pPr>
+            <a:r>
+              <a:rPr lang="en-US" sz="1400" b="1" dirty="0">
+                <a:solidFill>
+                  <a:srgbClr val="13161C"/>
+                </a:solidFill>
+                <a:latin typeface="Courier New" pitchFamily="34" charset="0"/>
+                <a:ea typeface="Courier New" pitchFamily="34" charset="-122"/>
+                <a:cs typeface="Courier New" pitchFamily="34" charset="-120"/>
+              </a:rPr>
+              <a:t>B</a:t>
+            </a:r>
+            <a:endParaRPr lang="en-US" sz="1400" dirty="0"/>
+          </a:p>
+        </p:txBody>
+      </p:sp>
+      <p:sp>
+        <p:nvSpPr>
+          <p:cNvPr id="43" name="Text 41"/>
+          <p:cNvSpPr/>
+          <p:nvPr/>
+        </p:nvSpPr>
+        <p:spPr>
+          <a:xfrm>
+            <a:off x="8933688" y="3840480"/>
+            <a:ext cx="3108960" cy="457200"/>
+          </a:xfrm>
+          <a:prstGeom prst="rect">
+            <a:avLst/>
+          </a:prstGeom>
+          <a:noFill/>
+          <a:ln/>
+        </p:spPr>
+        <p:txBody>
+          <a:bodyPr wrap="square" lIns="0" tIns="0" rIns="0" bIns="0" rtlCol="0" anchor="ctr"/>
+          <a:lstStyle/>
+          <a:p>
             <a:pPr indent="0" marL="0">
               <a:buNone/>
             </a:pPr>
             <a:r>
-              <a:rPr lang="en-US" sz="1600" b="1" dirty="0">
-                <a:solidFill>
-                  <a:srgbClr val="4FB0C6"/>
+              <a:rPr lang="en-US" sz="1200" dirty="0">
+                <a:solidFill>
+                  <a:srgbClr val="9AA6B2"/>
                 </a:solidFill>
                 <a:latin typeface="Malgun Gothic" pitchFamily="34" charset="0"/>
                 <a:ea typeface="Malgun Gothic" pitchFamily="34" charset="-122"/>
                 <a:cs typeface="Malgun Gothic" pitchFamily="34" charset="-120"/>
               </a:rPr>
-              <a:t>이벤트를 찍어야</a:t>
-            </a:r>
+              <a:t>← B 스레드만 활성, A는 대기</a:t>
+            </a:r>
+            <a:endParaRPr lang="en-US" sz="1200" dirty="0"/>
+          </a:p>
+        </p:txBody>
+      </p:sp>
+      <p:sp>
+        <p:nvSpPr>
+          <p:cNvPr id="44" name="Shape 42"/>
+          <p:cNvSpPr/>
+          <p:nvPr/>
+        </p:nvSpPr>
+        <p:spPr>
+          <a:xfrm>
+            <a:off x="548640" y="4709160"/>
+            <a:ext cx="5349240" cy="1051560"/>
+          </a:xfrm>
+          <a:prstGeom prst="roundRect">
+            <a:avLst>
+              <a:gd name="adj" fmla="val 6957"/>
+            </a:avLst>
+          </a:prstGeom>
+          <a:solidFill>
+            <a:srgbClr val="2A1618"/>
+          </a:solidFill>
+          <a:ln w="12700">
+            <a:solidFill>
+              <a:srgbClr val="E0645B"/>
+            </a:solidFill>
+            <a:prstDash val="solid"/>
+          </a:ln>
+        </p:spPr>
+      </p:sp>
+      <p:sp>
+        <p:nvSpPr>
+          <p:cNvPr id="45" name="Text 43"/>
+          <p:cNvSpPr/>
+          <p:nvPr/>
+        </p:nvSpPr>
+        <p:spPr>
+          <a:xfrm>
+            <a:off x="777240" y="4864608"/>
+            <a:ext cx="4892040" cy="777240"/>
+          </a:xfrm>
+          <a:prstGeom prst="rect">
+            <a:avLst/>
+          </a:prstGeom>
+          <a:noFill/>
+          <a:ln/>
+        </p:spPr>
+        <p:txBody>
+          <a:bodyPr wrap="square" lIns="0" tIns="0" rIns="0" bIns="0" rtlCol="0" anchor="t"/>
+          <a:lstStyle/>
+          <a:p>
             <a:pPr indent="0" marL="0">
-              <a:buNone/>
-            </a:pPr>
-            <a:r>
-              <a:rPr lang="en-US" sz="1600" dirty="0">
-                <a:solidFill>
-                  <a:srgbClr val="9AA6B2"/>
+              <a:spcAft>
+                <a:spcPts val="400"/>
+              </a:spcAft>
+              <a:buNone/>
+            </a:pPr>
+            <a:r>
+              <a:rPr lang="en-US" sz="1300" b="1" dirty="0">
+                <a:solidFill>
+                  <a:srgbClr val="E0645B"/>
                 </a:solidFill>
                 <a:latin typeface="Malgun Gothic" pitchFamily="34" charset="0"/>
                 <a:ea typeface="Malgun Gothic" pitchFamily="34" charset="-122"/>
                 <a:cs typeface="Malgun Gothic" pitchFamily="34" charset="-120"/>
               </a:rPr>
-              <a:t> 진짜 커널 시간을 잴 수 있습니다.</a:t>
-            </a:r>
-            <a:endParaRPr lang="en-US" sz="1600" dirty="0"/>
+              <a:t>결과: 두 경로를 순차 실행 → 최대 2배 느림</a:t>
+            </a:r>
+            <a:endParaRPr lang="en-US" sz="1300" dirty="0"/>
+          </a:p>
+          <a:p>
+            <a:pPr indent="0" marL="0">
+              <a:buNone/>
+            </a:pPr>
+            <a:r>
+              <a:rPr lang="en-US" sz="1300" dirty="0">
+                <a:solidFill>
+                  <a:srgbClr val="E8EDF2"/>
+                </a:solidFill>
+                <a:latin typeface="Malgun Gothic" pitchFamily="34" charset="0"/>
+                <a:ea typeface="Malgun Gothic" pitchFamily="34" charset="-122"/>
+                <a:cs typeface="Malgun Gothic" pitchFamily="34" charset="-120"/>
+              </a:rPr>
+              <a:t>대기하는 스레드는 그 시간에 아무 일도 못 함</a:t>
+            </a:r>
+            <a:endParaRPr lang="en-US" sz="1300" dirty="0"/>
+          </a:p>
+        </p:txBody>
+      </p:sp>
+      <p:sp>
+        <p:nvSpPr>
+          <p:cNvPr id="46" name="Shape 44"/>
+          <p:cNvSpPr/>
+          <p:nvPr/>
+        </p:nvSpPr>
+        <p:spPr>
+          <a:xfrm>
+            <a:off x="6263640" y="4709160"/>
+            <a:ext cx="5349240" cy="1051560"/>
+          </a:xfrm>
+          <a:prstGeom prst="roundRect">
+            <a:avLst>
+              <a:gd name="adj" fmla="val 6957"/>
+            </a:avLst>
+          </a:prstGeom>
+          <a:solidFill>
+            <a:srgbClr val="16240F"/>
+          </a:solidFill>
+          <a:ln w="12700">
+            <a:solidFill>
+              <a:srgbClr val="8CC63F"/>
+            </a:solidFill>
+            <a:prstDash val="solid"/>
+          </a:ln>
+        </p:spPr>
+      </p:sp>
+      <p:sp>
+        <p:nvSpPr>
+          <p:cNvPr id="47" name="Text 45"/>
+          <p:cNvSpPr/>
+          <p:nvPr/>
+        </p:nvSpPr>
+        <p:spPr>
+          <a:xfrm>
+            <a:off x="6492240" y="4864608"/>
+            <a:ext cx="4892040" cy="777240"/>
+          </a:xfrm>
+          <a:prstGeom prst="rect">
+            <a:avLst/>
+          </a:prstGeom>
+          <a:noFill/>
+          <a:ln/>
+        </p:spPr>
+        <p:txBody>
+          <a:bodyPr wrap="square" lIns="0" tIns="0" rIns="0" bIns="0" rtlCol="0" anchor="t"/>
+          <a:lstStyle/>
+          <a:p>
+            <a:pPr indent="0" marL="0">
+              <a:spcAft>
+                <a:spcPts val="400"/>
+              </a:spcAft>
+              <a:buNone/>
+            </a:pPr>
+            <a:r>
+              <a:rPr lang="en-US" sz="1250" b="1" dirty="0">
+                <a:solidFill>
+                  <a:srgbClr val="8CC63F"/>
+                </a:solidFill>
+                <a:latin typeface="Malgun Gothic" pitchFamily="34" charset="0"/>
+                <a:ea typeface="Malgun Gothic" pitchFamily="34" charset="-122"/>
+                <a:cs typeface="Malgun Gothic" pitchFamily="34" charset="-120"/>
+              </a:rPr>
+              <a:t>피하는 법: 워프 내 스레드가 같은 경로를 타게</a:t>
+            </a:r>
+            <a:endParaRPr lang="en-US" sz="1250" dirty="0"/>
+          </a:p>
+          <a:p>
+            <a:pPr indent="0" marL="0">
+              <a:buNone/>
+            </a:pPr>
+            <a:r>
+              <a:rPr lang="en-US" sz="1250" dirty="0">
+                <a:solidFill>
+                  <a:srgbClr val="E8EDF2"/>
+                </a:solidFill>
+                <a:latin typeface="Malgun Gothic" pitchFamily="34" charset="0"/>
+                <a:ea typeface="Malgun Gothic" pitchFamily="34" charset="-122"/>
+                <a:cs typeface="Malgun Gothic" pitchFamily="34" charset="-120"/>
+              </a:rPr>
+              <a:t>이 저장소의 커널은 if(ptr&gt;=end_ptr) return; 정도라 분기가 거의 균일 → 다이버전스 최소</a:t>
+            </a:r>
+            <a:endParaRPr lang="en-US" sz="1250" dirty="0"/>
           </a:p>
         </p:txBody>
       </p:sp>
@@ -9258,7 +11104,7 @@
                 <a:ea typeface="Courier New" pitchFamily="34" charset="-122"/>
                 <a:cs typeface="Courier New" pitchFamily="34" charset="-120"/>
               </a:rPr>
-              <a:t>6</a:t>
+              <a:t>5</a:t>
             </a:r>
             <a:endParaRPr lang="en-US" sz="2200" dirty="0"/>
           </a:p>
@@ -9297,7 +11143,7 @@
                 <a:ea typeface="Malgun Gothic" pitchFamily="34" charset="-122"/>
                 <a:cs typeface="Malgun Gothic" pitchFamily="34" charset="-120"/>
               </a:rPr>
-              <a:t>대역폭(bandwidth) 계산 뜯어보기</a:t>
+              <a:t>CUDA 이벤트로 시간 재기</a:t>
             </a:r>
             <a:endParaRPr lang="en-US" sz="3000" dirty="0"/>
           </a:p>
@@ -9312,11 +11158,11 @@
         <p:spPr>
           <a:xfrm>
             <a:off x="548640" y="1554480"/>
-            <a:ext cx="11064240" cy="1188720"/>
-          </a:xfrm>
-          <a:prstGeom prst="roundRect">
-            <a:avLst>
-              <a:gd name="adj" fmla="val 4615"/>
+            <a:ext cx="11064240" cy="2743200"/>
+          </a:xfrm>
+          <a:prstGeom prst="roundRect">
+            <a:avLst>
+              <a:gd name="adj" fmla="val 2000"/>
             </a:avLst>
           </a:prstGeom>
           <a:solidFill>
@@ -9339,7 +11185,7 @@
         <p:spPr>
           <a:xfrm>
             <a:off x="749808" y="1700784"/>
-            <a:ext cx="10661904" cy="896112"/>
+            <a:ext cx="10661904" cy="2450592"/>
           </a:xfrm>
           <a:prstGeom prst="rect">
             <a:avLst/>
@@ -9358,17 +11204,17 @@
               <a:buNone/>
             </a:pPr>
             <a:r>
-              <a:rPr lang="en-US" sz="1400" dirty="0">
-                <a:solidFill>
-                  <a:srgbClr val="8CC63F"/>
+              <a:rPr lang="en-US" sz="1300" dirty="0">
+                <a:solidFill>
+                  <a:srgbClr val="9AA6B2"/>
                 </a:solidFill>
                 <a:latin typeface="Courier New" pitchFamily="34" charset="0"/>
                 <a:ea typeface="Courier New" pitchFamily="34" charset="-122"/>
                 <a:cs typeface="Courier New" pitchFamily="34" charset="-120"/>
               </a:rPr>
-              <a:t>bandwidth = (2*n + 1) * tot_num_blocks / elapsedtime   // GB/s</a:t>
-            </a:r>
-            <a:endParaRPr lang="en-US" sz="1400" dirty="0"/>
+              <a:t>// test10   tests.cpp:1510~1524</a:t>
+            </a:r>
+            <a:endParaRPr lang="en-US" sz="1300" dirty="0"/>
           </a:p>
           <a:p>
             <a:pPr algn="l" indent="0" marL="0">
@@ -9378,68 +11224,27 @@
               <a:buNone/>
             </a:pPr>
             <a:r>
-              <a:rPr lang="en-US" sz="1400" dirty="0">
-                <a:solidFill>
-                  <a:srgbClr val="9AA6B2"/>
+              <a:rPr lang="en-US" sz="1300" dirty="0">
+                <a:solidFill>
+                  <a:srgbClr val="E8EDF2"/>
                 </a:solidFill>
                 <a:latin typeface="Courier New" pitchFamily="34" charset="0"/>
                 <a:ea typeface="Courier New" pitchFamily="34" charset="-122"/>
                 <a:cs typeface="Courier New" pitchFamily="34" charset="-120"/>
               </a:rPr>
-              <a:t>//           └ 접근 횟수 ┘   └ MB 단위 ┘   └ ms 단위 ┘</a:t>
-            </a:r>
-            <a:endParaRPr lang="en-US" sz="1400" dirty="0"/>
-          </a:p>
-        </p:txBody>
-      </p:sp>
-      <p:sp>
-        <p:nvSpPr>
-          <p:cNvPr id="6" name="Shape 4"/>
-          <p:cNvSpPr/>
-          <p:nvPr/>
-        </p:nvSpPr>
-        <p:spPr>
-          <a:xfrm>
-            <a:off x="548640" y="3017520"/>
-            <a:ext cx="3444240" cy="2194560"/>
-          </a:xfrm>
-          <a:prstGeom prst="roundRect">
-            <a:avLst>
-              <a:gd name="adj" fmla="val 3333"/>
-            </a:avLst>
-          </a:prstGeom>
-          <a:solidFill>
-            <a:srgbClr val="1E232C"/>
-          </a:solidFill>
-          <a:ln/>
-        </p:spPr>
-      </p:sp>
-      <p:sp>
-        <p:nvSpPr>
-          <p:cNvPr id="7" name="Text 5"/>
-          <p:cNvSpPr/>
-          <p:nvPr/>
-        </p:nvSpPr>
-        <p:spPr>
-          <a:xfrm>
-            <a:off x="777240" y="3200400"/>
-            <a:ext cx="2987040" cy="457200"/>
-          </a:xfrm>
-          <a:prstGeom prst="rect">
-            <a:avLst/>
-          </a:prstGeom>
-          <a:noFill/>
-          <a:ln/>
-        </p:spPr>
-        <p:txBody>
-          <a:bodyPr wrap="square" lIns="0" tIns="0" rIns="0" bIns="0" rtlCol="0" anchor="ctr"/>
-          <a:lstStyle/>
-          <a:p>
-            <a:pPr indent="0" marL="0">
-              <a:buNone/>
-            </a:pPr>
-            <a:r>
-              <a:rPr lang="en-US" sz="1700" b="1" dirty="0">
+              <a:t>cudaEventRecord(start, stream);</a:t>
+            </a:r>
+            <a:endParaRPr lang="en-US" sz="1300" dirty="0"/>
+          </a:p>
+          <a:p>
+            <a:pPr algn="l" indent="0" marL="0">
+              <a:lnSpc>
+                <a:spcPct val="108000"/>
+              </a:lnSpc>
+              <a:buNone/>
+            </a:pPr>
+            <a:r>
+              <a:rPr lang="en-US" sz="1300" dirty="0">
                 <a:solidFill>
                   <a:srgbClr val="8CC63F"/>
                 </a:solidFill>
@@ -9447,38 +11252,121 @@
                 <a:ea typeface="Courier New" pitchFamily="34" charset="-122"/>
                 <a:cs typeface="Courier New" pitchFamily="34" charset="-120"/>
               </a:rPr>
-              <a:t>(2n + 1)</a:t>
-            </a:r>
-            <a:endParaRPr lang="en-US" sz="1700" dirty="0"/>
-          </a:p>
-        </p:txBody>
-      </p:sp>
-      <p:sp>
-        <p:nvSpPr>
-          <p:cNvPr id="8" name="Text 6"/>
-          <p:cNvSpPr/>
-          <p:nvPr/>
-        </p:nvSpPr>
-        <p:spPr>
-          <a:xfrm>
-            <a:off x="777240" y="3703320"/>
-            <a:ext cx="2987040" cy="411480"/>
-          </a:xfrm>
-          <a:prstGeom prst="rect">
-            <a:avLst/>
-          </a:prstGeom>
-          <a:noFill/>
-          <a:ln/>
-        </p:spPr>
-        <p:txBody>
-          <a:bodyPr wrap="square" lIns="0" tIns="0" rIns="0" bIns="0" rtlCol="0" anchor="ctr"/>
+              <a:t>test10_kernel_write&lt;&lt;&lt;...&gt;&gt;&gt;(...);          // 쓰기</a:t>
+            </a:r>
+            <a:endParaRPr lang="en-US" sz="1300" dirty="0"/>
+          </a:p>
+          <a:p>
+            <a:pPr algn="l" indent="0" marL="0">
+              <a:lnSpc>
+                <a:spcPct val="108000"/>
+              </a:lnSpc>
+              <a:buNone/>
+            </a:pPr>
+            <a:r>
+              <a:rPr lang="en-US" sz="1300" dirty="0">
+                <a:solidFill>
+                  <a:srgbClr val="8CC63F"/>
+                </a:solidFill>
+                <a:latin typeface="Courier New" pitchFamily="34" charset="0"/>
+                <a:ea typeface="Courier New" pitchFamily="34" charset="-122"/>
+                <a:cs typeface="Courier New" pitchFamily="34" charset="-120"/>
+              </a:rPr>
+              <a:t>for (i=0;i&lt;n;i++) test10_kernel_readwrite&lt;&lt;&lt;...&gt;&gt;&gt;(...); // 읽고쓰기 n회</a:t>
+            </a:r>
+            <a:endParaRPr lang="en-US" sz="1300" dirty="0"/>
+          </a:p>
+          <a:p>
+            <a:pPr algn="l" indent="0" marL="0">
+              <a:lnSpc>
+                <a:spcPct val="108000"/>
+              </a:lnSpc>
+              <a:buNone/>
+            </a:pPr>
+            <a:r>
+              <a:rPr lang="en-US" sz="1300" dirty="0">
+                <a:solidFill>
+                  <a:srgbClr val="E8EDF2"/>
+                </a:solidFill>
+                <a:latin typeface="Courier New" pitchFamily="34" charset="0"/>
+                <a:ea typeface="Courier New" pitchFamily="34" charset="-122"/>
+                <a:cs typeface="Courier New" pitchFamily="34" charset="-120"/>
+              </a:rPr>
+              <a:t>cudaEventRecord(stop, stream);</a:t>
+            </a:r>
+            <a:endParaRPr lang="en-US" sz="1300" dirty="0"/>
+          </a:p>
+          <a:p>
+            <a:pPr algn="l" indent="0" marL="0">
+              <a:lnSpc>
+                <a:spcPct val="108000"/>
+              </a:lnSpc>
+              <a:buNone/>
+            </a:pPr>
+            <a:r>
+              <a:rPr lang="en-US" sz="1300" dirty="0">
+                <a:solidFill>
+                  <a:srgbClr val="E0A458"/>
+                </a:solidFill>
+                <a:latin typeface="Courier New" pitchFamily="34" charset="0"/>
+                <a:ea typeface="Courier New" pitchFamily="34" charset="-122"/>
+                <a:cs typeface="Courier New" pitchFamily="34" charset="-120"/>
+              </a:rPr>
+              <a:t>cudaEventSynchronize(stop);                 // GPU가 끝날 때까지 대기</a:t>
+            </a:r>
+            <a:endParaRPr lang="en-US" sz="1300" dirty="0"/>
+          </a:p>
+          <a:p>
+            <a:pPr algn="l" indent="0" marL="0">
+              <a:lnSpc>
+                <a:spcPct val="108000"/>
+              </a:lnSpc>
+              <a:buNone/>
+            </a:pPr>
+            <a:r>
+              <a:rPr lang="en-US" sz="1300" dirty="0">
+                <a:solidFill>
+                  <a:srgbClr val="4FB0C6"/>
+                </a:solidFill>
+                <a:latin typeface="Courier New" pitchFamily="34" charset="0"/>
+                <a:ea typeface="Courier New" pitchFamily="34" charset="-122"/>
+                <a:cs typeface="Courier New" pitchFamily="34" charset="-120"/>
+              </a:rPr>
+              <a:t>cudaEventElapsedTime(&amp;elapsedtime, start, stop); // 밀리초 경과시간</a:t>
+            </a:r>
+            <a:endParaRPr lang="en-US" sz="1300" dirty="0"/>
+          </a:p>
+        </p:txBody>
+      </p:sp>
+      <p:sp>
+        <p:nvSpPr>
+          <p:cNvPr id="6" name="Text 4"/>
+          <p:cNvSpPr/>
+          <p:nvPr/>
+        </p:nvSpPr>
+        <p:spPr>
+          <a:xfrm>
+            <a:off x="548640" y="4572000"/>
+            <a:ext cx="11064240" cy="1371600"/>
+          </a:xfrm>
+          <a:prstGeom prst="rect">
+            <a:avLst/>
+          </a:prstGeom>
+          <a:noFill/>
+          <a:ln/>
+        </p:spPr>
+        <p:txBody>
+          <a:bodyPr wrap="square" lIns="0" tIns="0" rIns="0" bIns="0" rtlCol="0" anchor="t"/>
           <a:lstStyle/>
           <a:p>
             <a:pPr indent="0" marL="0">
-              <a:buNone/>
-            </a:pPr>
-            <a:r>
-              <a:rPr lang="en-US" sz="1500" b="1" dirty="0">
+              <a:spcAft>
+                <a:spcPts val="600"/>
+              </a:spcAft>
+              <a:buNone/>
+            </a:pPr>
+            <a:r>
+              <a:rPr lang="en-US" sz="1600" b="1" dirty="0">
                 <a:solidFill>
                   <a:srgbClr val="E8EDF2"/>
                 </a:solidFill>
@@ -9486,41 +11374,16 @@
                 <a:ea typeface="Malgun Gothic" pitchFamily="34" charset="-122"/>
                 <a:cs typeface="Malgun Gothic" pitchFamily="34" charset="-120"/>
               </a:rPr>
-              <a:t>접근 패스 수</a:t>
-            </a:r>
-            <a:endParaRPr lang="en-US" sz="1500" dirty="0"/>
-          </a:p>
-        </p:txBody>
-      </p:sp>
-      <p:sp>
-        <p:nvSpPr>
-          <p:cNvPr id="9" name="Text 7"/>
-          <p:cNvSpPr/>
-          <p:nvPr/>
-        </p:nvSpPr>
-        <p:spPr>
-          <a:xfrm>
-            <a:off x="777240" y="4160520"/>
-            <a:ext cx="2987040" cy="914400"/>
-          </a:xfrm>
-          <a:prstGeom prst="rect">
-            <a:avLst/>
-          </a:prstGeom>
-          <a:noFill/>
-          <a:ln/>
-        </p:spPr>
-        <p:txBody>
-          <a:bodyPr wrap="square" lIns="0" tIns="0" rIns="0" bIns="0" rtlCol="0" anchor="t"/>
-          <a:lstStyle/>
+              <a:t>왜 CPU 타이머가 아니라 GPU 이벤트?</a:t>
+            </a:r>
+            <a:endParaRPr lang="en-US" sz="1600" dirty="0"/>
+          </a:p>
           <a:p>
             <a:pPr indent="0" marL="0">
-              <a:lnSpc>
-                <a:spcPct val="115000"/>
-              </a:lnSpc>
-              <a:buNone/>
-            </a:pPr>
-            <a:r>
-              <a:rPr lang="en-US" sz="1400" dirty="0">
+              <a:buNone/>
+            </a:pPr>
+            <a:r>
+              <a:rPr lang="en-US" sz="1600" dirty="0">
                 <a:solidFill>
                   <a:srgbClr val="9AA6B2"/>
                 </a:solidFill>
@@ -9528,141 +11391,27 @@
                 <a:ea typeface="Malgun Gothic" pitchFamily="34" charset="-122"/>
                 <a:cs typeface="Malgun Gothic" pitchFamily="34" charset="-120"/>
               </a:rPr>
-              <a:t>쓰기 1회 + 읽고쓰기 n회(각 읽기+쓰기=2)</a:t>
-            </a:r>
-            <a:endParaRPr lang="en-US" sz="1400" dirty="0"/>
-          </a:p>
-        </p:txBody>
-      </p:sp>
-      <p:sp>
-        <p:nvSpPr>
-          <p:cNvPr id="10" name="Shape 8"/>
-          <p:cNvSpPr/>
-          <p:nvPr/>
-        </p:nvSpPr>
-        <p:spPr>
-          <a:xfrm>
-            <a:off x="4358640" y="3017520"/>
-            <a:ext cx="3444240" cy="2194560"/>
-          </a:xfrm>
-          <a:prstGeom prst="roundRect">
-            <a:avLst>
-              <a:gd name="adj" fmla="val 3333"/>
-            </a:avLst>
-          </a:prstGeom>
-          <a:solidFill>
-            <a:srgbClr val="1E232C"/>
-          </a:solidFill>
-          <a:ln/>
-        </p:spPr>
-      </p:sp>
-      <p:sp>
-        <p:nvSpPr>
-          <p:cNvPr id="11" name="Text 9"/>
-          <p:cNvSpPr/>
-          <p:nvPr/>
-        </p:nvSpPr>
-        <p:spPr>
-          <a:xfrm>
-            <a:off x="4587240" y="3200400"/>
-            <a:ext cx="2987040" cy="457200"/>
-          </a:xfrm>
-          <a:prstGeom prst="rect">
-            <a:avLst/>
-          </a:prstGeom>
-          <a:noFill/>
-          <a:ln/>
-        </p:spPr>
-        <p:txBody>
-          <a:bodyPr wrap="square" lIns="0" tIns="0" rIns="0" bIns="0" rtlCol="0" anchor="ctr"/>
-          <a:lstStyle/>
-          <a:p>
+              <a:t>커널은 비동기(asynchronous) 실행 — CPU는 커널을 던지고 바로 다음 줄로 갑니다. GPU 타임라인 위에 </a:t>
+            </a:r>
             <a:pPr indent="0" marL="0">
               <a:buNone/>
             </a:pPr>
             <a:r>
-              <a:rPr lang="en-US" sz="1700" b="1" dirty="0">
+              <a:rPr lang="en-US" sz="1600" b="1" dirty="0">
                 <a:solidFill>
                   <a:srgbClr val="4FB0C6"/>
-                </a:solidFill>
-                <a:latin typeface="Courier New" pitchFamily="34" charset="0"/>
-                <a:ea typeface="Courier New" pitchFamily="34" charset="-122"/>
-                <a:cs typeface="Courier New" pitchFamily="34" charset="-120"/>
-              </a:rPr>
-              <a:t>tot_num_blocks</a:t>
-            </a:r>
-            <a:endParaRPr lang="en-US" sz="1700" dirty="0"/>
-          </a:p>
-        </p:txBody>
-      </p:sp>
-      <p:sp>
-        <p:nvSpPr>
-          <p:cNvPr id="12" name="Text 10"/>
-          <p:cNvSpPr/>
-          <p:nvPr/>
-        </p:nvSpPr>
-        <p:spPr>
-          <a:xfrm>
-            <a:off x="4587240" y="3703320"/>
-            <a:ext cx="2987040" cy="411480"/>
-          </a:xfrm>
-          <a:prstGeom prst="rect">
-            <a:avLst/>
-          </a:prstGeom>
-          <a:noFill/>
-          <a:ln/>
-        </p:spPr>
-        <p:txBody>
-          <a:bodyPr wrap="square" lIns="0" tIns="0" rIns="0" bIns="0" rtlCol="0" anchor="ctr"/>
-          <a:lstStyle/>
-          <a:p>
-            <a:pPr indent="0" marL="0">
-              <a:buNone/>
-            </a:pPr>
-            <a:r>
-              <a:rPr lang="en-US" sz="1500" b="1" dirty="0">
-                <a:solidFill>
-                  <a:srgbClr val="E8EDF2"/>
                 </a:solidFill>
                 <a:latin typeface="Malgun Gothic" pitchFamily="34" charset="0"/>
                 <a:ea typeface="Malgun Gothic" pitchFamily="34" charset="-122"/>
                 <a:cs typeface="Malgun Gothic" pitchFamily="34" charset="-120"/>
               </a:rPr>
-              <a:t>전송량 (MB)</a:t>
-            </a:r>
-            <a:endParaRPr lang="en-US" sz="1500" dirty="0"/>
-          </a:p>
-        </p:txBody>
-      </p:sp>
-      <p:sp>
-        <p:nvSpPr>
-          <p:cNvPr id="13" name="Text 11"/>
-          <p:cNvSpPr/>
-          <p:nvPr/>
-        </p:nvSpPr>
-        <p:spPr>
-          <a:xfrm>
-            <a:off x="4587240" y="4160520"/>
-            <a:ext cx="2987040" cy="914400"/>
-          </a:xfrm>
-          <a:prstGeom prst="rect">
-            <a:avLst/>
-          </a:prstGeom>
-          <a:noFill/>
-          <a:ln/>
-        </p:spPr>
-        <p:txBody>
-          <a:bodyPr wrap="square" lIns="0" tIns="0" rIns="0" bIns="0" rtlCol="0" anchor="t"/>
-          <a:lstStyle/>
-          <a:p>
+              <a:t>이벤트를 찍어야</a:t>
+            </a:r>
             <a:pPr indent="0" marL="0">
-              <a:lnSpc>
-                <a:spcPct val="115000"/>
-              </a:lnSpc>
-              <a:buNone/>
-            </a:pPr>
-            <a:r>
-              <a:rPr lang="en-US" sz="1400" dirty="0">
+              <a:buNone/>
+            </a:pPr>
+            <a:r>
+              <a:rPr lang="en-US" sz="1600" dirty="0">
                 <a:solidFill>
                   <a:srgbClr val="9AA6B2"/>
                 </a:solidFill>
@@ -9670,190 +11419,9 @@
                 <a:ea typeface="Malgun Gothic" pitchFamily="34" charset="-122"/>
                 <a:cs typeface="Malgun Gothic" pitchFamily="34" charset="-120"/>
               </a:rPr>
-              <a:t>블록 하나 = BLOCKSIZE = 1 MB</a:t>
-            </a:r>
-            <a:endParaRPr lang="en-US" sz="1400" dirty="0"/>
-          </a:p>
-        </p:txBody>
-      </p:sp>
-      <p:sp>
-        <p:nvSpPr>
-          <p:cNvPr id="14" name="Shape 12"/>
-          <p:cNvSpPr/>
-          <p:nvPr/>
-        </p:nvSpPr>
-        <p:spPr>
-          <a:xfrm>
-            <a:off x="8168640" y="3017520"/>
-            <a:ext cx="3444240" cy="2194560"/>
-          </a:xfrm>
-          <a:prstGeom prst="roundRect">
-            <a:avLst>
-              <a:gd name="adj" fmla="val 3333"/>
-            </a:avLst>
-          </a:prstGeom>
-          <a:solidFill>
-            <a:srgbClr val="1E232C"/>
-          </a:solidFill>
-          <a:ln/>
-        </p:spPr>
-      </p:sp>
-      <p:sp>
-        <p:nvSpPr>
-          <p:cNvPr id="15" name="Text 13"/>
-          <p:cNvSpPr/>
-          <p:nvPr/>
-        </p:nvSpPr>
-        <p:spPr>
-          <a:xfrm>
-            <a:off x="8397240" y="3200400"/>
-            <a:ext cx="2987040" cy="457200"/>
-          </a:xfrm>
-          <a:prstGeom prst="rect">
-            <a:avLst/>
-          </a:prstGeom>
-          <a:noFill/>
-          <a:ln/>
-        </p:spPr>
-        <p:txBody>
-          <a:bodyPr wrap="square" lIns="0" tIns="0" rIns="0" bIns="0" rtlCol="0" anchor="ctr"/>
-          <a:lstStyle/>
-          <a:p>
-            <a:pPr indent="0" marL="0">
-              <a:buNone/>
-            </a:pPr>
-            <a:r>
-              <a:rPr lang="en-US" sz="1700" b="1" dirty="0">
-                <a:solidFill>
-                  <a:srgbClr val="E0A458"/>
-                </a:solidFill>
-                <a:latin typeface="Courier New" pitchFamily="34" charset="0"/>
-                <a:ea typeface="Courier New" pitchFamily="34" charset="-122"/>
-                <a:cs typeface="Courier New" pitchFamily="34" charset="-120"/>
-              </a:rPr>
-              <a:t>elapsedtime</a:t>
-            </a:r>
-            <a:endParaRPr lang="en-US" sz="1700" dirty="0"/>
-          </a:p>
-        </p:txBody>
-      </p:sp>
-      <p:sp>
-        <p:nvSpPr>
-          <p:cNvPr id="16" name="Text 14"/>
-          <p:cNvSpPr/>
-          <p:nvPr/>
-        </p:nvSpPr>
-        <p:spPr>
-          <a:xfrm>
-            <a:off x="8397240" y="3703320"/>
-            <a:ext cx="2987040" cy="411480"/>
-          </a:xfrm>
-          <a:prstGeom prst="rect">
-            <a:avLst/>
-          </a:prstGeom>
-          <a:noFill/>
-          <a:ln/>
-        </p:spPr>
-        <p:txBody>
-          <a:bodyPr wrap="square" lIns="0" tIns="0" rIns="0" bIns="0" rtlCol="0" anchor="ctr"/>
-          <a:lstStyle/>
-          <a:p>
-            <a:pPr indent="0" marL="0">
-              <a:buNone/>
-            </a:pPr>
-            <a:r>
-              <a:rPr lang="en-US" sz="1500" b="1" dirty="0">
-                <a:solidFill>
-                  <a:srgbClr val="E8EDF2"/>
-                </a:solidFill>
-                <a:latin typeface="Malgun Gothic" pitchFamily="34" charset="0"/>
-                <a:ea typeface="Malgun Gothic" pitchFamily="34" charset="-122"/>
-                <a:cs typeface="Malgun Gothic" pitchFamily="34" charset="-120"/>
-              </a:rPr>
-              <a:t>경과 시간 (ms)</a:t>
-            </a:r>
-            <a:endParaRPr lang="en-US" sz="1500" dirty="0"/>
-          </a:p>
-        </p:txBody>
-      </p:sp>
-      <p:sp>
-        <p:nvSpPr>
-          <p:cNvPr id="17" name="Text 15"/>
-          <p:cNvSpPr/>
-          <p:nvPr/>
-        </p:nvSpPr>
-        <p:spPr>
-          <a:xfrm>
-            <a:off x="8397240" y="4160520"/>
-            <a:ext cx="2987040" cy="914400"/>
-          </a:xfrm>
-          <a:prstGeom prst="rect">
-            <a:avLst/>
-          </a:prstGeom>
-          <a:noFill/>
-          <a:ln/>
-        </p:spPr>
-        <p:txBody>
-          <a:bodyPr wrap="square" lIns="0" tIns="0" rIns="0" bIns="0" rtlCol="0" anchor="t"/>
-          <a:lstStyle/>
-          <a:p>
-            <a:pPr indent="0" marL="0">
-              <a:lnSpc>
-                <a:spcPct val="115000"/>
-              </a:lnSpc>
-              <a:buNone/>
-            </a:pPr>
-            <a:r>
-              <a:rPr lang="en-US" sz="1400" dirty="0">
-                <a:solidFill>
-                  <a:srgbClr val="9AA6B2"/>
-                </a:solidFill>
-                <a:latin typeface="Malgun Gothic" pitchFamily="34" charset="0"/>
-                <a:ea typeface="Malgun Gothic" pitchFamily="34" charset="-122"/>
-                <a:cs typeface="Malgun Gothic" pitchFamily="34" charset="-120"/>
-              </a:rPr>
-              <a:t>이벤트로 잰 밀리초</a:t>
-            </a:r>
-            <a:endParaRPr lang="en-US" sz="1400" dirty="0"/>
-          </a:p>
-        </p:txBody>
-      </p:sp>
-      <p:sp>
-        <p:nvSpPr>
-          <p:cNvPr id="18" name="Text 16"/>
-          <p:cNvSpPr/>
-          <p:nvPr/>
-        </p:nvSpPr>
-        <p:spPr>
-          <a:xfrm>
-            <a:off x="548640" y="5440680"/>
-            <a:ext cx="11064240" cy="457200"/>
-          </a:xfrm>
-          <a:prstGeom prst="rect">
-            <a:avLst/>
-          </a:prstGeom>
-          <a:noFill/>
-          <a:ln/>
-        </p:spPr>
-        <p:txBody>
-          <a:bodyPr wrap="square" lIns="0" tIns="0" rIns="0" bIns="0" rtlCol="0" anchor="ctr"/>
-          <a:lstStyle/>
-          <a:p>
-            <a:pPr indent="0" marL="0">
-              <a:buNone/>
-            </a:pPr>
-            <a:r>
-              <a:rPr lang="en-US" sz="1400" i="1" dirty="0">
-                <a:solidFill>
-                  <a:srgbClr val="9AA6B2"/>
-                </a:solidFill>
-                <a:latin typeface="Malgun Gothic" pitchFamily="34" charset="0"/>
-                <a:ea typeface="Malgun Gothic" pitchFamily="34" charset="-122"/>
-                <a:cs typeface="Malgun Gothic" pitchFamily="34" charset="-120"/>
-              </a:rPr>
-              <a:t>MB ÷ ms = GB/s. 실측값을 GPU 스펙의 이론 대역폭과 비교하면 보통 60~90% 수준입니다.</a:t>
-            </a:r>
-            <a:endParaRPr lang="en-US" sz="1400" dirty="0"/>
+              <a:t> 진짜 커널 시간을 잴 수 있습니다.</a:t>
+            </a:r>
+            <a:endParaRPr lang="en-US" sz="1600" dirty="0"/>
           </a:p>
         </p:txBody>
       </p:sp>
@@ -9926,7 +11494,7 @@
                 <a:ea typeface="Courier New" pitchFamily="34" charset="-122"/>
                 <a:cs typeface="Courier New" pitchFamily="34" charset="-120"/>
               </a:rPr>
-              <a:t>7</a:t>
+              <a:t>6</a:t>
             </a:r>
             <a:endParaRPr lang="en-US" sz="2200" dirty="0"/>
           </a:p>
@@ -9965,7 +11533,7 @@
                 <a:ea typeface="Malgun Gothic" pitchFamily="34" charset="-122"/>
                 <a:cs typeface="Malgun Gothic" pitchFamily="34" charset="-120"/>
               </a:rPr>
-              <a:t>스트림(stream) 맛보기</a:t>
+              <a:t>대역폭(bandwidth) 계산 뜯어보기</a:t>
             </a:r>
             <a:endParaRPr lang="en-US" sz="3000" dirty="0"/>
           </a:p>
@@ -9980,11 +11548,11 @@
         <p:spPr>
           <a:xfrm>
             <a:off x="548640" y="1554480"/>
-            <a:ext cx="11064240" cy="1371600"/>
-          </a:xfrm>
-          <a:prstGeom prst="roundRect">
-            <a:avLst>
-              <a:gd name="adj" fmla="val 4000"/>
+            <a:ext cx="11064240" cy="1188720"/>
+          </a:xfrm>
+          <a:prstGeom prst="roundRect">
+            <a:avLst>
+              <a:gd name="adj" fmla="val 4615"/>
             </a:avLst>
           </a:prstGeom>
           <a:solidFill>
@@ -10007,7 +11575,7 @@
         <p:spPr>
           <a:xfrm>
             <a:off x="749808" y="1700784"/>
-            <a:ext cx="10661904" cy="1078992"/>
+            <a:ext cx="10661904" cy="896112"/>
           </a:xfrm>
           <a:prstGeom prst="rect">
             <a:avLst/>
@@ -10026,17 +11594,17 @@
               <a:buNone/>
             </a:pPr>
             <a:r>
-              <a:rPr lang="en-US" sz="1350" dirty="0">
-                <a:solidFill>
-                  <a:srgbClr val="E8EDF2"/>
+              <a:rPr lang="en-US" sz="1400" dirty="0">
+                <a:solidFill>
+                  <a:srgbClr val="8CC63F"/>
                 </a:solidFill>
                 <a:latin typeface="Courier New" pitchFamily="34" charset="0"/>
                 <a:ea typeface="Courier New" pitchFamily="34" charset="-122"/>
                 <a:cs typeface="Courier New" pitchFamily="34" charset="-120"/>
               </a:rPr>
-              <a:t>cudaStreamCreate(&amp;stream);</a:t>
-            </a:r>
-            <a:endParaRPr lang="en-US" sz="1350" dirty="0"/>
+              <a:t>bandwidth = (2*n + 1) * tot_num_blocks / elapsedtime   // GB/s</a:t>
+            </a:r>
+            <a:endParaRPr lang="en-US" sz="1400" dirty="0"/>
           </a:p>
           <a:p>
             <a:pPr algn="l" indent="0" marL="0">
@@ -10046,171 +11614,117 @@
               <a:buNone/>
             </a:pPr>
             <a:r>
-              <a:rPr lang="en-US" sz="1350" dirty="0">
-                <a:solidFill>
-                  <a:srgbClr val="8CC63F"/>
+              <a:rPr lang="en-US" sz="1400" dirty="0">
+                <a:solidFill>
+                  <a:srgbClr val="9AA6B2"/>
                 </a:solidFill>
                 <a:latin typeface="Courier New" pitchFamily="34" charset="0"/>
                 <a:ea typeface="Courier New" pitchFamily="34" charset="-122"/>
                 <a:cs typeface="Courier New" pitchFamily="34" charset="-120"/>
               </a:rPr>
-              <a:t>test10_kernel_write&lt;&lt;&lt;gridDim, blockDim, 0, stream&gt;&gt;&gt;(...);</a:t>
-            </a:r>
-            <a:endParaRPr lang="en-US" sz="1350" dirty="0"/>
-          </a:p>
-          <a:p>
-            <a:pPr algn="l" indent="0" marL="0">
-              <a:lnSpc>
-                <a:spcPct val="108000"/>
-              </a:lnSpc>
-              <a:buNone/>
-            </a:pPr>
-            <a:r>
-              <a:rPr lang="en-US" sz="1350" dirty="0">
-                <a:solidFill>
-                  <a:srgbClr val="9AA6B2"/>
+              <a:t>//           └ 접근 횟수 ┘   └ MB 단위 ┘   └ ms 단위 ┘</a:t>
+            </a:r>
+            <a:endParaRPr lang="en-US" sz="1400" dirty="0"/>
+          </a:p>
+        </p:txBody>
+      </p:sp>
+      <p:sp>
+        <p:nvSpPr>
+          <p:cNvPr id="6" name="Shape 4"/>
+          <p:cNvSpPr/>
+          <p:nvPr/>
+        </p:nvSpPr>
+        <p:spPr>
+          <a:xfrm>
+            <a:off x="548640" y="3017520"/>
+            <a:ext cx="3444240" cy="2194560"/>
+          </a:xfrm>
+          <a:prstGeom prst="roundRect">
+            <a:avLst>
+              <a:gd name="adj" fmla="val 3333"/>
+            </a:avLst>
+          </a:prstGeom>
+          <a:solidFill>
+            <a:srgbClr val="1E232C"/>
+          </a:solidFill>
+          <a:ln/>
+        </p:spPr>
+      </p:sp>
+      <p:sp>
+        <p:nvSpPr>
+          <p:cNvPr id="7" name="Text 5"/>
+          <p:cNvSpPr/>
+          <p:nvPr/>
+        </p:nvSpPr>
+        <p:spPr>
+          <a:xfrm>
+            <a:off x="777240" y="3200400"/>
+            <a:ext cx="2987040" cy="457200"/>
+          </a:xfrm>
+          <a:prstGeom prst="rect">
+            <a:avLst/>
+          </a:prstGeom>
+          <a:noFill/>
+          <a:ln/>
+        </p:spPr>
+        <p:txBody>
+          <a:bodyPr wrap="square" lIns="0" tIns="0" rIns="0" bIns="0" rtlCol="0" anchor="ctr"/>
+          <a:lstStyle/>
+          <a:p>
+            <a:pPr indent="0" marL="0">
+              <a:buNone/>
+            </a:pPr>
+            <a:r>
+              <a:rPr lang="en-US" sz="1700" b="1" dirty="0">
+                <a:solidFill>
+                  <a:srgbClr val="8CC63F"/>
                 </a:solidFill>
                 <a:latin typeface="Courier New" pitchFamily="34" charset="0"/>
                 <a:ea typeface="Courier New" pitchFamily="34" charset="-122"/>
                 <a:cs typeface="Courier New" pitchFamily="34" charset="-120"/>
               </a:rPr>
-              <a:t>//                                    ▲          ▲</a:t>
-            </a:r>
-            <a:endParaRPr lang="en-US" sz="1350" dirty="0"/>
-          </a:p>
-          <a:p>
-            <a:pPr algn="l" indent="0" marL="0">
-              <a:lnSpc>
-                <a:spcPct val="108000"/>
-              </a:lnSpc>
-              <a:buNone/>
-            </a:pPr>
-            <a:r>
-              <a:rPr lang="en-US" sz="1350" dirty="0">
-                <a:solidFill>
-                  <a:srgbClr val="9AA6B2"/>
-                </a:solidFill>
-                <a:latin typeface="Courier New" pitchFamily="34" charset="0"/>
-                <a:ea typeface="Courier New" pitchFamily="34" charset="-122"/>
-                <a:cs typeface="Courier New" pitchFamily="34" charset="-120"/>
-              </a:rPr>
-              <a:t>//                          공유메모리 크기   스트림</a:t>
-            </a:r>
-            <a:endParaRPr lang="en-US" sz="1350" dirty="0"/>
-          </a:p>
-        </p:txBody>
-      </p:sp>
-      <p:sp>
-        <p:nvSpPr>
-          <p:cNvPr id="6" name="Text 4"/>
-          <p:cNvSpPr/>
-          <p:nvPr/>
-        </p:nvSpPr>
-        <p:spPr>
-          <a:xfrm>
-            <a:off x="548640" y="3108960"/>
-            <a:ext cx="11064240" cy="914400"/>
-          </a:xfrm>
-          <a:prstGeom prst="rect">
-            <a:avLst/>
-          </a:prstGeom>
-          <a:noFill/>
-          <a:ln/>
-        </p:spPr>
-        <p:txBody>
-          <a:bodyPr wrap="square" lIns="0" tIns="0" rIns="0" bIns="0" rtlCol="0" anchor="t"/>
+              <a:t>(2n + 1)</a:t>
+            </a:r>
+            <a:endParaRPr lang="en-US" sz="1700" dirty="0"/>
+          </a:p>
+        </p:txBody>
+      </p:sp>
+      <p:sp>
+        <p:nvSpPr>
+          <p:cNvPr id="8" name="Text 6"/>
+          <p:cNvSpPr/>
+          <p:nvPr/>
+        </p:nvSpPr>
+        <p:spPr>
+          <a:xfrm>
+            <a:off x="777240" y="3703320"/>
+            <a:ext cx="2987040" cy="411480"/>
+          </a:xfrm>
+          <a:prstGeom prst="rect">
+            <a:avLst/>
+          </a:prstGeom>
+          <a:noFill/>
+          <a:ln/>
+        </p:spPr>
+        <p:txBody>
+          <a:bodyPr wrap="square" lIns="0" tIns="0" rIns="0" bIns="0" rtlCol="0" anchor="ctr"/>
           <a:lstStyle/>
           <a:p>
             <a:pPr indent="0" marL="0">
               <a:buNone/>
             </a:pPr>
             <a:r>
-              <a:rPr lang="en-US" sz="1700" b="1" dirty="0">
-                <a:solidFill>
-                  <a:srgbClr val="4FB0C6"/>
+              <a:rPr lang="en-US" sz="1500" b="1" dirty="0">
+                <a:solidFill>
+                  <a:srgbClr val="E8EDF2"/>
                 </a:solidFill>
                 <a:latin typeface="Malgun Gothic" pitchFamily="34" charset="0"/>
                 <a:ea typeface="Malgun Gothic" pitchFamily="34" charset="-122"/>
                 <a:cs typeface="Malgun Gothic" pitchFamily="34" charset="-120"/>
               </a:rPr>
-              <a:t>스트림(stream)</a:t>
-            </a:r>
-            <a:pPr indent="0" marL="0">
-              <a:buNone/>
-            </a:pPr>
-            <a:r>
-              <a:rPr lang="en-US" sz="1700" dirty="0">
-                <a:solidFill>
-                  <a:srgbClr val="E8EDF2"/>
-                </a:solidFill>
-                <a:latin typeface="Malgun Gothic" pitchFamily="34" charset="0"/>
-                <a:ea typeface="Malgun Gothic" pitchFamily="34" charset="-122"/>
-                <a:cs typeface="Malgun Gothic" pitchFamily="34" charset="-120"/>
-              </a:rPr>
-              <a:t>은 GPU 작업을 순서대로 처리하는 "작업 큐"입니다. Test 10은 하나의 스트림에 쓰기·읽기 커널을 순서대로 넣습니다.</a:t>
-            </a:r>
-            <a:endParaRPr lang="en-US" sz="1700" dirty="0"/>
-          </a:p>
-        </p:txBody>
-      </p:sp>
-      <p:sp>
-        <p:nvSpPr>
-          <p:cNvPr id="7" name="Shape 5"/>
-          <p:cNvSpPr/>
-          <p:nvPr/>
-        </p:nvSpPr>
-        <p:spPr>
-          <a:xfrm>
-            <a:off x="548640" y="4114800"/>
-            <a:ext cx="5349240" cy="1554480"/>
-          </a:xfrm>
-          <a:prstGeom prst="roundRect">
-            <a:avLst>
-              <a:gd name="adj" fmla="val 4706"/>
-            </a:avLst>
-          </a:prstGeom>
-          <a:solidFill>
-            <a:srgbClr val="1E232C"/>
-          </a:solidFill>
-          <a:ln/>
-        </p:spPr>
-      </p:sp>
-      <p:sp>
-        <p:nvSpPr>
-          <p:cNvPr id="8" name="Text 6"/>
-          <p:cNvSpPr/>
-          <p:nvPr/>
-        </p:nvSpPr>
-        <p:spPr>
-          <a:xfrm>
-            <a:off x="777240" y="4297680"/>
-            <a:ext cx="4892040" cy="457200"/>
-          </a:xfrm>
-          <a:prstGeom prst="rect">
-            <a:avLst/>
-          </a:prstGeom>
-          <a:noFill/>
-          <a:ln/>
-        </p:spPr>
-        <p:txBody>
-          <a:bodyPr wrap="square" lIns="0" tIns="0" rIns="0" bIns="0" rtlCol="0" anchor="ctr"/>
-          <a:lstStyle/>
-          <a:p>
-            <a:pPr indent="0" marL="0">
-              <a:buNone/>
-            </a:pPr>
-            <a:r>
-              <a:rPr lang="en-US" sz="1400" b="1" dirty="0">
-                <a:solidFill>
-                  <a:srgbClr val="8CC63F"/>
-                </a:solidFill>
-                <a:latin typeface="Courier New" pitchFamily="34" charset="0"/>
-                <a:ea typeface="Courier New" pitchFamily="34" charset="-122"/>
-                <a:cs typeface="Courier New" pitchFamily="34" charset="-120"/>
-              </a:rPr>
-              <a:t>&lt;&lt;&lt;grid, block, 0, stream&gt;&gt;&gt;</a:t>
-            </a:r>
-            <a:endParaRPr lang="en-US" sz="1400" dirty="0"/>
+              <a:t>접근 패스 수</a:t>
+            </a:r>
+            <a:endParaRPr lang="en-US" sz="1500" dirty="0"/>
           </a:p>
         </p:txBody>
       </p:sp>
@@ -10222,8 +11736,8 @@
         </p:nvSpPr>
         <p:spPr>
           <a:xfrm>
-            <a:off x="777240" y="4754880"/>
-            <a:ext cx="4892040" cy="822960"/>
+            <a:off x="777240" y="4160520"/>
+            <a:ext cx="2987040" cy="914400"/>
           </a:xfrm>
           <a:prstGeom prst="rect">
             <a:avLst/>
@@ -10244,13 +11758,13 @@
             <a:r>
               <a:rPr lang="en-US" sz="1400" dirty="0">
                 <a:solidFill>
-                  <a:srgbClr val="E8EDF2"/>
+                  <a:srgbClr val="9AA6B2"/>
                 </a:solidFill>
                 <a:latin typeface="Malgun Gothic" pitchFamily="34" charset="0"/>
                 <a:ea typeface="Malgun Gothic" pitchFamily="34" charset="-122"/>
                 <a:cs typeface="Malgun Gothic" pitchFamily="34" charset="-120"/>
               </a:rPr>
-              <a:t>실행 구성의 3·4번째 인자: 공유 메모리 크기(0), 스트림. 세션 1에선 생략했던 부분입니다.</a:t>
+              <a:t>쓰기 1회 + 읽고쓰기 n회(각 읽기+쓰기=2)</a:t>
             </a:r>
             <a:endParaRPr lang="en-US" sz="1400" dirty="0"/>
           </a:p>
@@ -10264,12 +11778,12 @@
         </p:nvSpPr>
         <p:spPr>
           <a:xfrm>
-            <a:off x="6263640" y="4114800"/>
-            <a:ext cx="5349240" cy="1554480"/>
-          </a:xfrm>
-          <a:prstGeom prst="roundRect">
-            <a:avLst>
-              <a:gd name="adj" fmla="val 4706"/>
+            <a:off x="4358640" y="3017520"/>
+            <a:ext cx="3444240" cy="2194560"/>
+          </a:xfrm>
+          <a:prstGeom prst="roundRect">
+            <a:avLst>
+              <a:gd name="adj" fmla="val 3333"/>
             </a:avLst>
           </a:prstGeom>
           <a:solidFill>
@@ -10286,8 +11800,8 @@
         </p:nvSpPr>
         <p:spPr>
           <a:xfrm>
-            <a:off x="6492240" y="4297680"/>
-            <a:ext cx="4892040" cy="457200"/>
+            <a:off x="4587240" y="3200400"/>
+            <a:ext cx="2987040" cy="457200"/>
           </a:xfrm>
           <a:prstGeom prst="rect">
             <a:avLst/>
@@ -10303,15 +11817,54 @@
               <a:buNone/>
             </a:pPr>
             <a:r>
+              <a:rPr lang="en-US" sz="1700" b="1" dirty="0">
+                <a:solidFill>
+                  <a:srgbClr val="4FB0C6"/>
+                </a:solidFill>
+                <a:latin typeface="Courier New" pitchFamily="34" charset="0"/>
+                <a:ea typeface="Courier New" pitchFamily="34" charset="-122"/>
+                <a:cs typeface="Courier New" pitchFamily="34" charset="-120"/>
+              </a:rPr>
+              <a:t>tot_num_blocks</a:t>
+            </a:r>
+            <a:endParaRPr lang="en-US" sz="1700" dirty="0"/>
+          </a:p>
+        </p:txBody>
+      </p:sp>
+      <p:sp>
+        <p:nvSpPr>
+          <p:cNvPr id="12" name="Text 10"/>
+          <p:cNvSpPr/>
+          <p:nvPr/>
+        </p:nvSpPr>
+        <p:spPr>
+          <a:xfrm>
+            <a:off x="4587240" y="3703320"/>
+            <a:ext cx="2987040" cy="411480"/>
+          </a:xfrm>
+          <a:prstGeom prst="rect">
+            <a:avLst/>
+          </a:prstGeom>
+          <a:noFill/>
+          <a:ln/>
+        </p:spPr>
+        <p:txBody>
+          <a:bodyPr wrap="square" lIns="0" tIns="0" rIns="0" bIns="0" rtlCol="0" anchor="ctr"/>
+          <a:lstStyle/>
+          <a:p>
+            <a:pPr indent="0" marL="0">
+              <a:buNone/>
+            </a:pPr>
+            <a:r>
               <a:rPr lang="en-US" sz="1500" b="1" dirty="0">
                 <a:solidFill>
-                  <a:srgbClr val="4FB0C6"/>
+                  <a:srgbClr val="E8EDF2"/>
                 </a:solidFill>
                 <a:latin typeface="Malgun Gothic" pitchFamily="34" charset="0"/>
                 <a:ea typeface="Malgun Gothic" pitchFamily="34" charset="-122"/>
                 <a:cs typeface="Malgun Gothic" pitchFamily="34" charset="-120"/>
               </a:rPr>
-              <a:t>왜 이벤트도 스트림에?</a:t>
+              <a:t>전송량 (MB)</a:t>
             </a:r>
             <a:endParaRPr lang="en-US" sz="1500" dirty="0"/>
           </a:p>
@@ -10319,14 +11872,14 @@
       </p:sp>
       <p:sp>
         <p:nvSpPr>
-          <p:cNvPr id="12" name="Text 10"/>
-          <p:cNvSpPr/>
-          <p:nvPr/>
-        </p:nvSpPr>
-        <p:spPr>
-          <a:xfrm>
-            <a:off x="6492240" y="4754880"/>
-            <a:ext cx="4892040" cy="822960"/>
+          <p:cNvPr id="13" name="Text 11"/>
+          <p:cNvSpPr/>
+          <p:nvPr/>
+        </p:nvSpPr>
+        <p:spPr>
+          <a:xfrm>
+            <a:off x="4587240" y="4160520"/>
+            <a:ext cx="2987040" cy="914400"/>
           </a:xfrm>
           <a:prstGeom prst="rect">
             <a:avLst/>
@@ -10347,13 +11900,194 @@
             <a:r>
               <a:rPr lang="en-US" sz="1400" dirty="0">
                 <a:solidFill>
-                  <a:srgbClr val="E8EDF2"/>
+                  <a:srgbClr val="9AA6B2"/>
                 </a:solidFill>
                 <a:latin typeface="Malgun Gothic" pitchFamily="34" charset="0"/>
                 <a:ea typeface="Malgun Gothic" pitchFamily="34" charset="-122"/>
                 <a:cs typeface="Malgun Gothic" pitchFamily="34" charset="-120"/>
               </a:rPr>
-              <a:t>이벤트를 같은 스트림에 기록해야 그 스트림의 커널들 시간을 정확히 잽니다.</a:t>
+              <a:t>블록 하나 = BLOCKSIZE = 1 MB</a:t>
+            </a:r>
+            <a:endParaRPr lang="en-US" sz="1400" dirty="0"/>
+          </a:p>
+        </p:txBody>
+      </p:sp>
+      <p:sp>
+        <p:nvSpPr>
+          <p:cNvPr id="14" name="Shape 12"/>
+          <p:cNvSpPr/>
+          <p:nvPr/>
+        </p:nvSpPr>
+        <p:spPr>
+          <a:xfrm>
+            <a:off x="8168640" y="3017520"/>
+            <a:ext cx="3444240" cy="2194560"/>
+          </a:xfrm>
+          <a:prstGeom prst="roundRect">
+            <a:avLst>
+              <a:gd name="adj" fmla="val 3333"/>
+            </a:avLst>
+          </a:prstGeom>
+          <a:solidFill>
+            <a:srgbClr val="1E232C"/>
+          </a:solidFill>
+          <a:ln/>
+        </p:spPr>
+      </p:sp>
+      <p:sp>
+        <p:nvSpPr>
+          <p:cNvPr id="15" name="Text 13"/>
+          <p:cNvSpPr/>
+          <p:nvPr/>
+        </p:nvSpPr>
+        <p:spPr>
+          <a:xfrm>
+            <a:off x="8397240" y="3200400"/>
+            <a:ext cx="2987040" cy="457200"/>
+          </a:xfrm>
+          <a:prstGeom prst="rect">
+            <a:avLst/>
+          </a:prstGeom>
+          <a:noFill/>
+          <a:ln/>
+        </p:spPr>
+        <p:txBody>
+          <a:bodyPr wrap="square" lIns="0" tIns="0" rIns="0" bIns="0" rtlCol="0" anchor="ctr"/>
+          <a:lstStyle/>
+          <a:p>
+            <a:pPr indent="0" marL="0">
+              <a:buNone/>
+            </a:pPr>
+            <a:r>
+              <a:rPr lang="en-US" sz="1700" b="1" dirty="0">
+                <a:solidFill>
+                  <a:srgbClr val="E0A458"/>
+                </a:solidFill>
+                <a:latin typeface="Courier New" pitchFamily="34" charset="0"/>
+                <a:ea typeface="Courier New" pitchFamily="34" charset="-122"/>
+                <a:cs typeface="Courier New" pitchFamily="34" charset="-120"/>
+              </a:rPr>
+              <a:t>elapsedtime</a:t>
+            </a:r>
+            <a:endParaRPr lang="en-US" sz="1700" dirty="0"/>
+          </a:p>
+        </p:txBody>
+      </p:sp>
+      <p:sp>
+        <p:nvSpPr>
+          <p:cNvPr id="16" name="Text 14"/>
+          <p:cNvSpPr/>
+          <p:nvPr/>
+        </p:nvSpPr>
+        <p:spPr>
+          <a:xfrm>
+            <a:off x="8397240" y="3703320"/>
+            <a:ext cx="2987040" cy="411480"/>
+          </a:xfrm>
+          <a:prstGeom prst="rect">
+            <a:avLst/>
+          </a:prstGeom>
+          <a:noFill/>
+          <a:ln/>
+        </p:spPr>
+        <p:txBody>
+          <a:bodyPr wrap="square" lIns="0" tIns="0" rIns="0" bIns="0" rtlCol="0" anchor="ctr"/>
+          <a:lstStyle/>
+          <a:p>
+            <a:pPr indent="0" marL="0">
+              <a:buNone/>
+            </a:pPr>
+            <a:r>
+              <a:rPr lang="en-US" sz="1500" b="1" dirty="0">
+                <a:solidFill>
+                  <a:srgbClr val="E8EDF2"/>
+                </a:solidFill>
+                <a:latin typeface="Malgun Gothic" pitchFamily="34" charset="0"/>
+                <a:ea typeface="Malgun Gothic" pitchFamily="34" charset="-122"/>
+                <a:cs typeface="Malgun Gothic" pitchFamily="34" charset="-120"/>
+              </a:rPr>
+              <a:t>경과 시간 (ms)</a:t>
+            </a:r>
+            <a:endParaRPr lang="en-US" sz="1500" dirty="0"/>
+          </a:p>
+        </p:txBody>
+      </p:sp>
+      <p:sp>
+        <p:nvSpPr>
+          <p:cNvPr id="17" name="Text 15"/>
+          <p:cNvSpPr/>
+          <p:nvPr/>
+        </p:nvSpPr>
+        <p:spPr>
+          <a:xfrm>
+            <a:off x="8397240" y="4160520"/>
+            <a:ext cx="2987040" cy="914400"/>
+          </a:xfrm>
+          <a:prstGeom prst="rect">
+            <a:avLst/>
+          </a:prstGeom>
+          <a:noFill/>
+          <a:ln/>
+        </p:spPr>
+        <p:txBody>
+          <a:bodyPr wrap="square" lIns="0" tIns="0" rIns="0" bIns="0" rtlCol="0" anchor="t"/>
+          <a:lstStyle/>
+          <a:p>
+            <a:pPr indent="0" marL="0">
+              <a:lnSpc>
+                <a:spcPct val="115000"/>
+              </a:lnSpc>
+              <a:buNone/>
+            </a:pPr>
+            <a:r>
+              <a:rPr lang="en-US" sz="1400" dirty="0">
+                <a:solidFill>
+                  <a:srgbClr val="9AA6B2"/>
+                </a:solidFill>
+                <a:latin typeface="Malgun Gothic" pitchFamily="34" charset="0"/>
+                <a:ea typeface="Malgun Gothic" pitchFamily="34" charset="-122"/>
+                <a:cs typeface="Malgun Gothic" pitchFamily="34" charset="-120"/>
+              </a:rPr>
+              <a:t>이벤트로 잰 밀리초</a:t>
+            </a:r>
+            <a:endParaRPr lang="en-US" sz="1400" dirty="0"/>
+          </a:p>
+        </p:txBody>
+      </p:sp>
+      <p:sp>
+        <p:nvSpPr>
+          <p:cNvPr id="18" name="Text 16"/>
+          <p:cNvSpPr/>
+          <p:nvPr/>
+        </p:nvSpPr>
+        <p:spPr>
+          <a:xfrm>
+            <a:off x="548640" y="5440680"/>
+            <a:ext cx="11064240" cy="457200"/>
+          </a:xfrm>
+          <a:prstGeom prst="rect">
+            <a:avLst/>
+          </a:prstGeom>
+          <a:noFill/>
+          <a:ln/>
+        </p:spPr>
+        <p:txBody>
+          <a:bodyPr wrap="square" lIns="0" tIns="0" rIns="0" bIns="0" rtlCol="0" anchor="ctr"/>
+          <a:lstStyle/>
+          <a:p>
+            <a:pPr indent="0" marL="0">
+              <a:buNone/>
+            </a:pPr>
+            <a:r>
+              <a:rPr lang="en-US" sz="1400" i="1" dirty="0">
+                <a:solidFill>
+                  <a:srgbClr val="9AA6B2"/>
+                </a:solidFill>
+                <a:latin typeface="Malgun Gothic" pitchFamily="34" charset="0"/>
+                <a:ea typeface="Malgun Gothic" pitchFamily="34" charset="-122"/>
+                <a:cs typeface="Malgun Gothic" pitchFamily="34" charset="-120"/>
+              </a:rPr>
+              <a:t>MB ÷ ms = GB/s. 실측값을 GPU 스펙의 이론 대역폭과 비교하면 보통 60~90% 수준입니다.</a:t>
             </a:r>
             <a:endParaRPr lang="en-US" sz="1400" dirty="0"/>
           </a:p>

--- a/seminar/slides/세션3_병렬성설계와_성능.pptx
+++ b/seminar/slides/세션3_병렬성설계와_성능.pptx
@@ -18,9 +18,11 @@
     <p:sldId id="266" r:id="rId12"/>
     <p:sldId id="267" r:id="rId13"/>
     <p:sldId id="268" r:id="rId14"/>
+    <p:sldId id="269" r:id="rId15"/>
+    <p:sldId id="270" r:id="rId16"/>
   </p:sldIdLst>
   <p:notesMasterIdLst>
-    <p:notesMasterId r:id="rId15"/>
+    <p:notesMasterId r:id="rId17"/>
   </p:notesMasterIdLst>
   <p:sldSz cx="12192000" cy="6858000"/>
   <p:notesSz cx="6858000" cy="12192000"/>
@@ -602,7 +604,7 @@
           <a:p>
             <a:r>
               <a:rPr lang="en-US" dirty="0"/>
-              <a:t>스트림은 심화 주제라 개념만. 여러 스트림으로 겹쳐 실행(overlap)하는 건 향후 주제로 남깁니다.</a:t>
+              <a:t>단위 변환(MB/ms=GB/s)을 칠판에서 한 번 유도하면 학생들이 확실히 이해합니다.</a:t>
             </a:r>
             <a:endParaRPr lang="en-US" dirty="0"/>
           </a:p>
@@ -690,7 +692,7 @@
           <a:p>
             <a:r>
               <a:rPr lang="en-US" dirty="0"/>
-              <a:t>Ex 3의 블록 크기 스윕을 그래프로 그리게 하면 '최적점'을 스스로 발견합니다. 정답을 미리 주지 마세요.</a:t>
+              <a:t>스트림은 심화 주제라 개념만. 여러 스트림으로 겹쳐 실행(overlap)하는 건 향후 주제로 남깁니다.</a:t>
             </a:r>
             <a:endParaRPr lang="en-US" dirty="0"/>
           </a:p>
@@ -778,7 +780,7 @@
           <a:p>
             <a:r>
               <a:rPr lang="en-US" dirty="0"/>
-              <a:t>네 가지 목표(슬라이드 2)로 돌아가 자가 점검을 유도하세요.</a:t>
+              <a:t>개념도. 복사엔진과 연산엔진이 별개라 겹침이 가능. test10은 복사가 없어 단일 스트림으로 충분하다는 점을 정직하게 전달.</a:t>
             </a:r>
             <a:endParaRPr lang="en-US" dirty="0"/>
           </a:p>
@@ -866,7 +868,7 @@
           <a:p>
             <a:r>
               <a:rPr lang="en-US" dirty="0"/>
-              <a:t>오늘 본 병렬 커널에서 여러 스레드가 하나의 카운터를 건드리는 문제가 세션 4의 출발점.</a:t>
+              <a:t>Ex 3의 블록 크기 스윕을 그래프로 그리게 하면 '최적점'을 스스로 발견합니다. 정답을 미리 주지 마세요.</a:t>
             </a:r>
             <a:endParaRPr lang="en-US" dirty="0"/>
           </a:p>
@@ -890,6 +892,182 @@
             <a:fld id="{F7021451-1387-4CA6-816F-3879F97B5CBC}" type="slidenum">
               <a:rPr lang="en-US"/>
               <a:t>13</a:t>
+            </a:fld>
+            <a:endParaRPr lang="en-US"/>
+          </a:p>
+        </p:txBody>
+      </p:sp>
+    </p:spTree>
+    <p:extLst>
+      <p:ext uri="{BB962C8B-B14F-4D97-AF65-F5344CB8AC3E}">
+        <p14:creationId xmlns:p14="http://schemas.microsoft.com/office/powerpoint/2010/main" val="1024086991"/>
+      </p:ext>
+    </p:extLst>
+  </p:cSld>
+  <p:clrMapOvr>
+    <a:masterClrMapping/>
+  </p:clrMapOvr>
+</p:notes>
+</file>
+
+<file path=ppt/notesSlides/notesSlide14.xml><?xml version="1.0" encoding="utf-8"?>
+<p:notes xmlns:a="http://schemas.openxmlformats.org/drawingml/2006/main" xmlns:r="http://schemas.openxmlformats.org/officeDocument/2006/relationships" xmlns:p="http://schemas.openxmlformats.org/presentationml/2006/main">
+  <p:cSld>
+    <p:spTree>
+      <p:nvGrpSpPr>
+        <p:cNvPr id="1" name=""/>
+        <p:cNvGrpSpPr/>
+        <p:nvPr/>
+      </p:nvGrpSpPr>
+      <p:grpSpPr>
+        <a:xfrm>
+          <a:off x="0" y="0"/>
+          <a:ext cx="0" cy="0"/>
+          <a:chOff x="0" y="0"/>
+          <a:chExt cx="0" cy="0"/>
+        </a:xfrm>
+      </p:grpSpPr>
+      <p:sp>
+        <p:nvSpPr>
+          <p:cNvPr id="2" name="Slide Image Placeholder 1"/>
+          <p:cNvSpPr>
+            <a:spLocks noGrp="1" noRot="1" noChangeAspect="1"/>
+          </p:cNvSpPr>
+          <p:nvPr>
+            <p:ph type="sldImg"/>
+          </p:nvPr>
+        </p:nvSpPr>
+        <p:spPr/>
+      </p:sp>
+      <p:sp>
+        <p:nvSpPr>
+          <p:cNvPr id="3" name="Notes Placeholder 2"/>
+          <p:cNvSpPr>
+            <a:spLocks noGrp="1"/>
+          </p:cNvSpPr>
+          <p:nvPr>
+            <p:ph type="body" idx="1"/>
+          </p:nvPr>
+        </p:nvSpPr>
+        <p:spPr/>
+        <p:txBody>
+          <a:bodyPr/>
+          <a:lstStyle/>
+          <a:p>
+            <a:r>
+              <a:rPr lang="en-US" dirty="0"/>
+              <a:t>네 가지 목표(슬라이드 2)로 돌아가 자가 점검을 유도하세요.</a:t>
+            </a:r>
+            <a:endParaRPr lang="en-US" dirty="0"/>
+          </a:p>
+        </p:txBody>
+      </p:sp>
+      <p:sp>
+        <p:nvSpPr>
+          <p:cNvPr id="4" name="Slide Number Placeholder 3"/>
+          <p:cNvSpPr>
+            <a:spLocks noGrp="1"/>
+          </p:cNvSpPr>
+          <p:nvPr>
+            <p:ph type="sldNum" sz="quarter" idx="10"/>
+          </p:nvPr>
+        </p:nvSpPr>
+        <p:spPr/>
+        <p:txBody>
+          <a:bodyPr/>
+          <a:lstStyle/>
+          <a:p>
+            <a:fld id="{F7021451-1387-4CA6-816F-3879F97B5CBC}" type="slidenum">
+              <a:rPr lang="en-US"/>
+              <a:t>14</a:t>
+            </a:fld>
+            <a:endParaRPr lang="en-US"/>
+          </a:p>
+        </p:txBody>
+      </p:sp>
+    </p:spTree>
+    <p:extLst>
+      <p:ext uri="{BB962C8B-B14F-4D97-AF65-F5344CB8AC3E}">
+        <p14:creationId xmlns:p14="http://schemas.microsoft.com/office/powerpoint/2010/main" val="1024086991"/>
+      </p:ext>
+    </p:extLst>
+  </p:cSld>
+  <p:clrMapOvr>
+    <a:masterClrMapping/>
+  </p:clrMapOvr>
+</p:notes>
+</file>
+
+<file path=ppt/notesSlides/notesSlide15.xml><?xml version="1.0" encoding="utf-8"?>
+<p:notes xmlns:a="http://schemas.openxmlformats.org/drawingml/2006/main" xmlns:r="http://schemas.openxmlformats.org/officeDocument/2006/relationships" xmlns:p="http://schemas.openxmlformats.org/presentationml/2006/main">
+  <p:cSld>
+    <p:spTree>
+      <p:nvGrpSpPr>
+        <p:cNvPr id="1" name=""/>
+        <p:cNvGrpSpPr/>
+        <p:nvPr/>
+      </p:nvGrpSpPr>
+      <p:grpSpPr>
+        <a:xfrm>
+          <a:off x="0" y="0"/>
+          <a:ext cx="0" cy="0"/>
+          <a:chOff x="0" y="0"/>
+          <a:chExt cx="0" cy="0"/>
+        </a:xfrm>
+      </p:grpSpPr>
+      <p:sp>
+        <p:nvSpPr>
+          <p:cNvPr id="2" name="Slide Image Placeholder 1"/>
+          <p:cNvSpPr>
+            <a:spLocks noGrp="1" noRot="1" noChangeAspect="1"/>
+          </p:cNvSpPr>
+          <p:nvPr>
+            <p:ph type="sldImg"/>
+          </p:nvPr>
+        </p:nvSpPr>
+        <p:spPr/>
+      </p:sp>
+      <p:sp>
+        <p:nvSpPr>
+          <p:cNvPr id="3" name="Notes Placeholder 2"/>
+          <p:cNvSpPr>
+            <a:spLocks noGrp="1"/>
+          </p:cNvSpPr>
+          <p:nvPr>
+            <p:ph type="body" idx="1"/>
+          </p:nvPr>
+        </p:nvSpPr>
+        <p:spPr/>
+        <p:txBody>
+          <a:bodyPr/>
+          <a:lstStyle/>
+          <a:p>
+            <a:r>
+              <a:rPr lang="en-US" dirty="0"/>
+              <a:t>오늘 본 병렬 커널에서 여러 스레드가 하나의 카운터를 건드리는 문제가 세션 4의 출발점.</a:t>
+            </a:r>
+            <a:endParaRPr lang="en-US" dirty="0"/>
+          </a:p>
+        </p:txBody>
+      </p:sp>
+      <p:sp>
+        <p:nvSpPr>
+          <p:cNvPr id="4" name="Slide Number Placeholder 3"/>
+          <p:cNvSpPr>
+            <a:spLocks noGrp="1"/>
+          </p:cNvSpPr>
+          <p:nvPr>
+            <p:ph type="sldNum" sz="quarter" idx="10"/>
+          </p:nvPr>
+        </p:nvSpPr>
+        <p:spPr/>
+        <p:txBody>
+          <a:bodyPr/>
+          <a:lstStyle/>
+          <a:p>
+            <a:fld id="{F7021451-1387-4CA6-816F-3879F97B5CBC}" type="slidenum">
+              <a:rPr lang="en-US"/>
+              <a:t>15</a:t>
             </a:fld>
             <a:endParaRPr lang="en-US"/>
           </a:p>
@@ -1482,7 +1660,7 @@
           <a:p>
             <a:r>
               <a:rPr lang="en-US" dirty="0"/>
-              <a:t>비동기 실행 개념이 핵심. cudaEventSynchronize가 왜 필요한지(GPU 완료 대기) 짚어주세요.</a:t>
+              <a:t>심화/선택 슬라이드. 공유 메모리 32뱅크, 같은 뱅크 다른 주소 접근 시 충돌. 이 저장소엔 없지만 성능 3종 세트 완성용.</a:t>
             </a:r>
             <a:endParaRPr lang="en-US" dirty="0"/>
           </a:p>
@@ -1570,7 +1748,7 @@
           <a:p>
             <a:r>
               <a:rPr lang="en-US" dirty="0"/>
-              <a:t>단위 변환(MB/ms=GB/s)을 칠판에서 한 번 유도하면 학생들이 확실히 이해합니다.</a:t>
+              <a:t>비동기 실행 개념이 핵심. cudaEventSynchronize가 왜 필요한지(GPU 완료 대기) 짚어주세요.</a:t>
             </a:r>
             <a:endParaRPr lang="en-US" dirty="0"/>
           </a:p>
@@ -2280,7 +2458,7 @@
                 <a:ea typeface="Courier New" pitchFamily="34" charset="-122"/>
                 <a:cs typeface="Courier New" pitchFamily="34" charset="-120"/>
               </a:rPr>
-              <a:t>7</a:t>
+              <a:t>6</a:t>
             </a:r>
             <a:endParaRPr lang="en-US" sz="2200" dirty="0"/>
           </a:p>
@@ -2319,7 +2497,7 @@
                 <a:ea typeface="Malgun Gothic" pitchFamily="34" charset="-122"/>
                 <a:cs typeface="Malgun Gothic" pitchFamily="34" charset="-120"/>
               </a:rPr>
-              <a:t>스트림(stream) 맛보기</a:t>
+              <a:t>대역폭(bandwidth) 계산 뜯어보기</a:t>
             </a:r>
             <a:endParaRPr lang="en-US" sz="3000" dirty="0"/>
           </a:p>
@@ -2334,11 +2512,11 @@
         <p:spPr>
           <a:xfrm>
             <a:off x="548640" y="1554480"/>
-            <a:ext cx="11064240" cy="1371600"/>
+            <a:ext cx="11064240" cy="1188720"/>
           </a:xfrm>
           <a:prstGeom prst="roundRect">
             <a:avLst>
-              <a:gd name="adj" fmla="val 4000"/>
+              <a:gd name="adj" fmla="val 4615"/>
             </a:avLst>
           </a:prstGeom>
           <a:solidFill>
@@ -2361,7 +2539,7 @@
         <p:spPr>
           <a:xfrm>
             <a:off x="749808" y="1700784"/>
-            <a:ext cx="10661904" cy="1078992"/>
+            <a:ext cx="10661904" cy="896112"/>
           </a:xfrm>
           <a:prstGeom prst="rect">
             <a:avLst/>
@@ -2380,17 +2558,17 @@
               <a:buNone/>
             </a:pPr>
             <a:r>
-              <a:rPr lang="en-US" sz="1350" dirty="0">
-                <a:solidFill>
-                  <a:srgbClr val="E8EDF2"/>
+              <a:rPr lang="en-US" sz="1400" dirty="0">
+                <a:solidFill>
+                  <a:srgbClr val="8CC63F"/>
                 </a:solidFill>
                 <a:latin typeface="Courier New" pitchFamily="34" charset="0"/>
                 <a:ea typeface="Courier New" pitchFamily="34" charset="-122"/>
                 <a:cs typeface="Courier New" pitchFamily="34" charset="-120"/>
               </a:rPr>
-              <a:t>cudaStreamCreate(&amp;stream);</a:t>
-            </a:r>
-            <a:endParaRPr lang="en-US" sz="1350" dirty="0"/>
+              <a:t>bandwidth = (2*n + 1) * tot_num_blocks / elapsedtime   // GB/s</a:t>
+            </a:r>
+            <a:endParaRPr lang="en-US" sz="1400" dirty="0"/>
           </a:p>
           <a:p>
             <a:pPr algn="l" indent="0" marL="0">
@@ -2400,100 +2578,107 @@
               <a:buNone/>
             </a:pPr>
             <a:r>
-              <a:rPr lang="en-US" sz="1350" dirty="0">
-                <a:solidFill>
-                  <a:srgbClr val="8CC63F"/>
+              <a:rPr lang="en-US" sz="1400" dirty="0">
+                <a:solidFill>
+                  <a:srgbClr val="9AA6B2"/>
                 </a:solidFill>
                 <a:latin typeface="Courier New" pitchFamily="34" charset="0"/>
                 <a:ea typeface="Courier New" pitchFamily="34" charset="-122"/>
                 <a:cs typeface="Courier New" pitchFamily="34" charset="-120"/>
               </a:rPr>
-              <a:t>test10_kernel_write&lt;&lt;&lt;gridDim, blockDim, 0, stream&gt;&gt;&gt;(...);</a:t>
-            </a:r>
-            <a:endParaRPr lang="en-US" sz="1350" dirty="0"/>
-          </a:p>
-          <a:p>
-            <a:pPr algn="l" indent="0" marL="0">
-              <a:lnSpc>
-                <a:spcPct val="108000"/>
-              </a:lnSpc>
-              <a:buNone/>
-            </a:pPr>
-            <a:r>
-              <a:rPr lang="en-US" sz="1350" dirty="0">
-                <a:solidFill>
-                  <a:srgbClr val="9AA6B2"/>
+              <a:t>//           └ 접근 횟수 ┘   └ MB 단위 ┘   └ ms 단위 ┘</a:t>
+            </a:r>
+            <a:endParaRPr lang="en-US" sz="1400" dirty="0"/>
+          </a:p>
+        </p:txBody>
+      </p:sp>
+      <p:sp>
+        <p:nvSpPr>
+          <p:cNvPr id="6" name="Shape 4"/>
+          <p:cNvSpPr/>
+          <p:nvPr/>
+        </p:nvSpPr>
+        <p:spPr>
+          <a:xfrm>
+            <a:off x="548640" y="3017520"/>
+            <a:ext cx="3444240" cy="2194560"/>
+          </a:xfrm>
+          <a:prstGeom prst="roundRect">
+            <a:avLst>
+              <a:gd name="adj" fmla="val 3333"/>
+            </a:avLst>
+          </a:prstGeom>
+          <a:solidFill>
+            <a:srgbClr val="1E232C"/>
+          </a:solidFill>
+          <a:ln/>
+        </p:spPr>
+      </p:sp>
+      <p:sp>
+        <p:nvSpPr>
+          <p:cNvPr id="7" name="Text 5"/>
+          <p:cNvSpPr/>
+          <p:nvPr/>
+        </p:nvSpPr>
+        <p:spPr>
+          <a:xfrm>
+            <a:off x="777240" y="3200400"/>
+            <a:ext cx="2987040" cy="457200"/>
+          </a:xfrm>
+          <a:prstGeom prst="rect">
+            <a:avLst/>
+          </a:prstGeom>
+          <a:noFill/>
+          <a:ln/>
+        </p:spPr>
+        <p:txBody>
+          <a:bodyPr wrap="square" lIns="0" tIns="0" rIns="0" bIns="0" rtlCol="0" anchor="ctr"/>
+          <a:lstStyle/>
+          <a:p>
+            <a:pPr indent="0" marL="0">
+              <a:buNone/>
+            </a:pPr>
+            <a:r>
+              <a:rPr lang="en-US" sz="1700" b="1" dirty="0">
+                <a:solidFill>
+                  <a:srgbClr val="8CC63F"/>
                 </a:solidFill>
                 <a:latin typeface="Courier New" pitchFamily="34" charset="0"/>
                 <a:ea typeface="Courier New" pitchFamily="34" charset="-122"/>
                 <a:cs typeface="Courier New" pitchFamily="34" charset="-120"/>
               </a:rPr>
-              <a:t>//                                    ▲          ▲</a:t>
-            </a:r>
-            <a:endParaRPr lang="en-US" sz="1350" dirty="0"/>
-          </a:p>
-          <a:p>
-            <a:pPr algn="l" indent="0" marL="0">
-              <a:lnSpc>
-                <a:spcPct val="108000"/>
-              </a:lnSpc>
-              <a:buNone/>
-            </a:pPr>
-            <a:r>
-              <a:rPr lang="en-US" sz="1350" dirty="0">
-                <a:solidFill>
-                  <a:srgbClr val="9AA6B2"/>
-                </a:solidFill>
-                <a:latin typeface="Courier New" pitchFamily="34" charset="0"/>
-                <a:ea typeface="Courier New" pitchFamily="34" charset="-122"/>
-                <a:cs typeface="Courier New" pitchFamily="34" charset="-120"/>
-              </a:rPr>
-              <a:t>//                          공유메모리 크기   스트림</a:t>
-            </a:r>
-            <a:endParaRPr lang="en-US" sz="1350" dirty="0"/>
-          </a:p>
-        </p:txBody>
-      </p:sp>
-      <p:sp>
-        <p:nvSpPr>
-          <p:cNvPr id="6" name="Text 4"/>
-          <p:cNvSpPr/>
-          <p:nvPr/>
-        </p:nvSpPr>
-        <p:spPr>
-          <a:xfrm>
-            <a:off x="548640" y="3108960"/>
-            <a:ext cx="11064240" cy="914400"/>
-          </a:xfrm>
-          <a:prstGeom prst="rect">
-            <a:avLst/>
-          </a:prstGeom>
-          <a:noFill/>
-          <a:ln/>
-        </p:spPr>
-        <p:txBody>
-          <a:bodyPr wrap="square" lIns="0" tIns="0" rIns="0" bIns="0" rtlCol="0" anchor="t"/>
+              <a:t>(2n + 1)</a:t>
+            </a:r>
+            <a:endParaRPr lang="en-US" sz="1700" dirty="0"/>
+          </a:p>
+        </p:txBody>
+      </p:sp>
+      <p:sp>
+        <p:nvSpPr>
+          <p:cNvPr id="8" name="Text 6"/>
+          <p:cNvSpPr/>
+          <p:nvPr/>
+        </p:nvSpPr>
+        <p:spPr>
+          <a:xfrm>
+            <a:off x="777240" y="3703320"/>
+            <a:ext cx="2987040" cy="411480"/>
+          </a:xfrm>
+          <a:prstGeom prst="rect">
+            <a:avLst/>
+          </a:prstGeom>
+          <a:noFill/>
+          <a:ln/>
+        </p:spPr>
+        <p:txBody>
+          <a:bodyPr wrap="square" lIns="0" tIns="0" rIns="0" bIns="0" rtlCol="0" anchor="ctr"/>
           <a:lstStyle/>
           <a:p>
             <a:pPr indent="0" marL="0">
               <a:buNone/>
             </a:pPr>
             <a:r>
-              <a:rPr lang="en-US" sz="1700" b="1" dirty="0">
-                <a:solidFill>
-                  <a:srgbClr val="4FB0C6"/>
-                </a:solidFill>
-                <a:latin typeface="Malgun Gothic" pitchFamily="34" charset="0"/>
-                <a:ea typeface="Malgun Gothic" pitchFamily="34" charset="-122"/>
-                <a:cs typeface="Malgun Gothic" pitchFamily="34" charset="-120"/>
-              </a:rPr>
-              <a:t>스트림(stream)</a:t>
-            </a:r>
-            <a:pPr indent="0" marL="0">
-              <a:buNone/>
-            </a:pPr>
-            <a:r>
-              <a:rPr lang="en-US" sz="1700" dirty="0">
+              <a:rPr lang="en-US" sz="1500" b="1" dirty="0">
                 <a:solidFill>
                   <a:srgbClr val="E8EDF2"/>
                 </a:solidFill>
@@ -2501,70 +2686,9 @@
                 <a:ea typeface="Malgun Gothic" pitchFamily="34" charset="-122"/>
                 <a:cs typeface="Malgun Gothic" pitchFamily="34" charset="-120"/>
               </a:rPr>
-              <a:t>은 GPU 작업을 순서대로 처리하는 "작업 큐"입니다. Test 10은 하나의 스트림에 쓰기·읽기 커널을 순서대로 넣습니다.</a:t>
-            </a:r>
-            <a:endParaRPr lang="en-US" sz="1700" dirty="0"/>
-          </a:p>
-        </p:txBody>
-      </p:sp>
-      <p:sp>
-        <p:nvSpPr>
-          <p:cNvPr id="7" name="Shape 5"/>
-          <p:cNvSpPr/>
-          <p:nvPr/>
-        </p:nvSpPr>
-        <p:spPr>
-          <a:xfrm>
-            <a:off x="548640" y="4114800"/>
-            <a:ext cx="5349240" cy="1554480"/>
-          </a:xfrm>
-          <a:prstGeom prst="roundRect">
-            <a:avLst>
-              <a:gd name="adj" fmla="val 4706"/>
-            </a:avLst>
-          </a:prstGeom>
-          <a:solidFill>
-            <a:srgbClr val="1E232C"/>
-          </a:solidFill>
-          <a:ln/>
-        </p:spPr>
-      </p:sp>
-      <p:sp>
-        <p:nvSpPr>
-          <p:cNvPr id="8" name="Text 6"/>
-          <p:cNvSpPr/>
-          <p:nvPr/>
-        </p:nvSpPr>
-        <p:spPr>
-          <a:xfrm>
-            <a:off x="777240" y="4297680"/>
-            <a:ext cx="4892040" cy="457200"/>
-          </a:xfrm>
-          <a:prstGeom prst="rect">
-            <a:avLst/>
-          </a:prstGeom>
-          <a:noFill/>
-          <a:ln/>
-        </p:spPr>
-        <p:txBody>
-          <a:bodyPr wrap="square" lIns="0" tIns="0" rIns="0" bIns="0" rtlCol="0" anchor="ctr"/>
-          <a:lstStyle/>
-          <a:p>
-            <a:pPr indent="0" marL="0">
-              <a:buNone/>
-            </a:pPr>
-            <a:r>
-              <a:rPr lang="en-US" sz="1400" b="1" dirty="0">
-                <a:solidFill>
-                  <a:srgbClr val="8CC63F"/>
-                </a:solidFill>
-                <a:latin typeface="Courier New" pitchFamily="34" charset="0"/>
-                <a:ea typeface="Courier New" pitchFamily="34" charset="-122"/>
-                <a:cs typeface="Courier New" pitchFamily="34" charset="-120"/>
-              </a:rPr>
-              <a:t>&lt;&lt;&lt;grid, block, 0, stream&gt;&gt;&gt;</a:t>
-            </a:r>
-            <a:endParaRPr lang="en-US" sz="1400" dirty="0"/>
+              <a:t>접근 패스 수</a:t>
+            </a:r>
+            <a:endParaRPr lang="en-US" sz="1500" dirty="0"/>
           </a:p>
         </p:txBody>
       </p:sp>
@@ -2576,8 +2700,8 @@
         </p:nvSpPr>
         <p:spPr>
           <a:xfrm>
-            <a:off x="777240" y="4754880"/>
-            <a:ext cx="4892040" cy="822960"/>
+            <a:off x="777240" y="4160520"/>
+            <a:ext cx="2987040" cy="914400"/>
           </a:xfrm>
           <a:prstGeom prst="rect">
             <a:avLst/>
@@ -2598,13 +2722,13 @@
             <a:r>
               <a:rPr lang="en-US" sz="1400" dirty="0">
                 <a:solidFill>
-                  <a:srgbClr val="E8EDF2"/>
-                </a:solidFill>
-                <a:latin typeface="Malgun Gothic" pitchFamily="34" charset="0"/>
-                <a:ea typeface="Malgun Gothic" pitchFamily="34" charset="-122"/>
-                <a:cs typeface="Malgun Gothic" pitchFamily="34" charset="-120"/>
-              </a:rPr>
-              <a:t>실행 구성의 3·4번째 인자: 공유 메모리 크기(0), 스트림. 세션 1에선 생략했던 부분입니다.</a:t>
+                  <a:srgbClr val="9AA6B2"/>
+                </a:solidFill>
+                <a:latin typeface="Malgun Gothic" pitchFamily="34" charset="0"/>
+                <a:ea typeface="Malgun Gothic" pitchFamily="34" charset="-122"/>
+                <a:cs typeface="Malgun Gothic" pitchFamily="34" charset="-120"/>
+              </a:rPr>
+              <a:t>쓰기 1회 + 읽고쓰기 n회(각 읽기+쓰기=2)</a:t>
             </a:r>
             <a:endParaRPr lang="en-US" sz="1400" dirty="0"/>
           </a:p>
@@ -2618,12 +2742,12 @@
         </p:nvSpPr>
         <p:spPr>
           <a:xfrm>
-            <a:off x="6263640" y="4114800"/>
-            <a:ext cx="5349240" cy="1554480"/>
+            <a:off x="4358640" y="3017520"/>
+            <a:ext cx="3444240" cy="2194560"/>
           </a:xfrm>
           <a:prstGeom prst="roundRect">
             <a:avLst>
-              <a:gd name="adj" fmla="val 4706"/>
+              <a:gd name="adj" fmla="val 3333"/>
             </a:avLst>
           </a:prstGeom>
           <a:solidFill>
@@ -2640,8 +2764,8 @@
         </p:nvSpPr>
         <p:spPr>
           <a:xfrm>
-            <a:off x="6492240" y="4297680"/>
-            <a:ext cx="4892040" cy="457200"/>
+            <a:off x="4587240" y="3200400"/>
+            <a:ext cx="2987040" cy="457200"/>
           </a:xfrm>
           <a:prstGeom prst="rect">
             <a:avLst/>
@@ -2657,15 +2781,54 @@
               <a:buNone/>
             </a:pPr>
             <a:r>
+              <a:rPr lang="en-US" sz="1700" b="1" dirty="0">
+                <a:solidFill>
+                  <a:srgbClr val="4FB0C6"/>
+                </a:solidFill>
+                <a:latin typeface="Courier New" pitchFamily="34" charset="0"/>
+                <a:ea typeface="Courier New" pitchFamily="34" charset="-122"/>
+                <a:cs typeface="Courier New" pitchFamily="34" charset="-120"/>
+              </a:rPr>
+              <a:t>tot_num_blocks</a:t>
+            </a:r>
+            <a:endParaRPr lang="en-US" sz="1700" dirty="0"/>
+          </a:p>
+        </p:txBody>
+      </p:sp>
+      <p:sp>
+        <p:nvSpPr>
+          <p:cNvPr id="12" name="Text 10"/>
+          <p:cNvSpPr/>
+          <p:nvPr/>
+        </p:nvSpPr>
+        <p:spPr>
+          <a:xfrm>
+            <a:off x="4587240" y="3703320"/>
+            <a:ext cx="2987040" cy="411480"/>
+          </a:xfrm>
+          <a:prstGeom prst="rect">
+            <a:avLst/>
+          </a:prstGeom>
+          <a:noFill/>
+          <a:ln/>
+        </p:spPr>
+        <p:txBody>
+          <a:bodyPr wrap="square" lIns="0" tIns="0" rIns="0" bIns="0" rtlCol="0" anchor="ctr"/>
+          <a:lstStyle/>
+          <a:p>
+            <a:pPr indent="0" marL="0">
+              <a:buNone/>
+            </a:pPr>
+            <a:r>
               <a:rPr lang="en-US" sz="1500" b="1" dirty="0">
                 <a:solidFill>
-                  <a:srgbClr val="4FB0C6"/>
-                </a:solidFill>
-                <a:latin typeface="Malgun Gothic" pitchFamily="34" charset="0"/>
-                <a:ea typeface="Malgun Gothic" pitchFamily="34" charset="-122"/>
-                <a:cs typeface="Malgun Gothic" pitchFamily="34" charset="-120"/>
-              </a:rPr>
-              <a:t>왜 이벤트도 스트림에?</a:t>
+                  <a:srgbClr val="E8EDF2"/>
+                </a:solidFill>
+                <a:latin typeface="Malgun Gothic" pitchFamily="34" charset="0"/>
+                <a:ea typeface="Malgun Gothic" pitchFamily="34" charset="-122"/>
+                <a:cs typeface="Malgun Gothic" pitchFamily="34" charset="-120"/>
+              </a:rPr>
+              <a:t>전송량 (MB)</a:t>
             </a:r>
             <a:endParaRPr lang="en-US" sz="1500" dirty="0"/>
           </a:p>
@@ -2673,14 +2836,14 @@
       </p:sp>
       <p:sp>
         <p:nvSpPr>
-          <p:cNvPr id="12" name="Text 10"/>
-          <p:cNvSpPr/>
-          <p:nvPr/>
-        </p:nvSpPr>
-        <p:spPr>
-          <a:xfrm>
-            <a:off x="6492240" y="4754880"/>
-            <a:ext cx="4892040" cy="822960"/>
+          <p:cNvPr id="13" name="Text 11"/>
+          <p:cNvSpPr/>
+          <p:nvPr/>
+        </p:nvSpPr>
+        <p:spPr>
+          <a:xfrm>
+            <a:off x="4587240" y="4160520"/>
+            <a:ext cx="2987040" cy="914400"/>
           </a:xfrm>
           <a:prstGeom prst="rect">
             <a:avLst/>
@@ -2701,13 +2864,194 @@
             <a:r>
               <a:rPr lang="en-US" sz="1400" dirty="0">
                 <a:solidFill>
+                  <a:srgbClr val="9AA6B2"/>
+                </a:solidFill>
+                <a:latin typeface="Malgun Gothic" pitchFamily="34" charset="0"/>
+                <a:ea typeface="Malgun Gothic" pitchFamily="34" charset="-122"/>
+                <a:cs typeface="Malgun Gothic" pitchFamily="34" charset="-120"/>
+              </a:rPr>
+              <a:t>블록 하나 = BLOCKSIZE = 1 MB</a:t>
+            </a:r>
+            <a:endParaRPr lang="en-US" sz="1400" dirty="0"/>
+          </a:p>
+        </p:txBody>
+      </p:sp>
+      <p:sp>
+        <p:nvSpPr>
+          <p:cNvPr id="14" name="Shape 12"/>
+          <p:cNvSpPr/>
+          <p:nvPr/>
+        </p:nvSpPr>
+        <p:spPr>
+          <a:xfrm>
+            <a:off x="8168640" y="3017520"/>
+            <a:ext cx="3444240" cy="2194560"/>
+          </a:xfrm>
+          <a:prstGeom prst="roundRect">
+            <a:avLst>
+              <a:gd name="adj" fmla="val 3333"/>
+            </a:avLst>
+          </a:prstGeom>
+          <a:solidFill>
+            <a:srgbClr val="1E232C"/>
+          </a:solidFill>
+          <a:ln/>
+        </p:spPr>
+      </p:sp>
+      <p:sp>
+        <p:nvSpPr>
+          <p:cNvPr id="15" name="Text 13"/>
+          <p:cNvSpPr/>
+          <p:nvPr/>
+        </p:nvSpPr>
+        <p:spPr>
+          <a:xfrm>
+            <a:off x="8397240" y="3200400"/>
+            <a:ext cx="2987040" cy="457200"/>
+          </a:xfrm>
+          <a:prstGeom prst="rect">
+            <a:avLst/>
+          </a:prstGeom>
+          <a:noFill/>
+          <a:ln/>
+        </p:spPr>
+        <p:txBody>
+          <a:bodyPr wrap="square" lIns="0" tIns="0" rIns="0" bIns="0" rtlCol="0" anchor="ctr"/>
+          <a:lstStyle/>
+          <a:p>
+            <a:pPr indent="0" marL="0">
+              <a:buNone/>
+            </a:pPr>
+            <a:r>
+              <a:rPr lang="en-US" sz="1700" b="1" dirty="0">
+                <a:solidFill>
+                  <a:srgbClr val="E0A458"/>
+                </a:solidFill>
+                <a:latin typeface="Courier New" pitchFamily="34" charset="0"/>
+                <a:ea typeface="Courier New" pitchFamily="34" charset="-122"/>
+                <a:cs typeface="Courier New" pitchFamily="34" charset="-120"/>
+              </a:rPr>
+              <a:t>elapsedtime</a:t>
+            </a:r>
+            <a:endParaRPr lang="en-US" sz="1700" dirty="0"/>
+          </a:p>
+        </p:txBody>
+      </p:sp>
+      <p:sp>
+        <p:nvSpPr>
+          <p:cNvPr id="16" name="Text 14"/>
+          <p:cNvSpPr/>
+          <p:nvPr/>
+        </p:nvSpPr>
+        <p:spPr>
+          <a:xfrm>
+            <a:off x="8397240" y="3703320"/>
+            <a:ext cx="2987040" cy="411480"/>
+          </a:xfrm>
+          <a:prstGeom prst="rect">
+            <a:avLst/>
+          </a:prstGeom>
+          <a:noFill/>
+          <a:ln/>
+        </p:spPr>
+        <p:txBody>
+          <a:bodyPr wrap="square" lIns="0" tIns="0" rIns="0" bIns="0" rtlCol="0" anchor="ctr"/>
+          <a:lstStyle/>
+          <a:p>
+            <a:pPr indent="0" marL="0">
+              <a:buNone/>
+            </a:pPr>
+            <a:r>
+              <a:rPr lang="en-US" sz="1500" b="1" dirty="0">
+                <a:solidFill>
                   <a:srgbClr val="E8EDF2"/>
                 </a:solidFill>
                 <a:latin typeface="Malgun Gothic" pitchFamily="34" charset="0"/>
                 <a:ea typeface="Malgun Gothic" pitchFamily="34" charset="-122"/>
                 <a:cs typeface="Malgun Gothic" pitchFamily="34" charset="-120"/>
               </a:rPr>
-              <a:t>이벤트를 같은 스트림에 기록해야 그 스트림의 커널들 시간을 정확히 잽니다.</a:t>
+              <a:t>경과 시간 (ms)</a:t>
+            </a:r>
+            <a:endParaRPr lang="en-US" sz="1500" dirty="0"/>
+          </a:p>
+        </p:txBody>
+      </p:sp>
+      <p:sp>
+        <p:nvSpPr>
+          <p:cNvPr id="17" name="Text 15"/>
+          <p:cNvSpPr/>
+          <p:nvPr/>
+        </p:nvSpPr>
+        <p:spPr>
+          <a:xfrm>
+            <a:off x="8397240" y="4160520"/>
+            <a:ext cx="2987040" cy="914400"/>
+          </a:xfrm>
+          <a:prstGeom prst="rect">
+            <a:avLst/>
+          </a:prstGeom>
+          <a:noFill/>
+          <a:ln/>
+        </p:spPr>
+        <p:txBody>
+          <a:bodyPr wrap="square" lIns="0" tIns="0" rIns="0" bIns="0" rtlCol="0" anchor="t"/>
+          <a:lstStyle/>
+          <a:p>
+            <a:pPr indent="0" marL="0">
+              <a:lnSpc>
+                <a:spcPct val="115000"/>
+              </a:lnSpc>
+              <a:buNone/>
+            </a:pPr>
+            <a:r>
+              <a:rPr lang="en-US" sz="1400" dirty="0">
+                <a:solidFill>
+                  <a:srgbClr val="9AA6B2"/>
+                </a:solidFill>
+                <a:latin typeface="Malgun Gothic" pitchFamily="34" charset="0"/>
+                <a:ea typeface="Malgun Gothic" pitchFamily="34" charset="-122"/>
+                <a:cs typeface="Malgun Gothic" pitchFamily="34" charset="-120"/>
+              </a:rPr>
+              <a:t>이벤트로 잰 밀리초</a:t>
+            </a:r>
+            <a:endParaRPr lang="en-US" sz="1400" dirty="0"/>
+          </a:p>
+        </p:txBody>
+      </p:sp>
+      <p:sp>
+        <p:nvSpPr>
+          <p:cNvPr id="18" name="Text 16"/>
+          <p:cNvSpPr/>
+          <p:nvPr/>
+        </p:nvSpPr>
+        <p:spPr>
+          <a:xfrm>
+            <a:off x="548640" y="5440680"/>
+            <a:ext cx="11064240" cy="457200"/>
+          </a:xfrm>
+          <a:prstGeom prst="rect">
+            <a:avLst/>
+          </a:prstGeom>
+          <a:noFill/>
+          <a:ln/>
+        </p:spPr>
+        <p:txBody>
+          <a:bodyPr wrap="square" lIns="0" tIns="0" rIns="0" bIns="0" rtlCol="0" anchor="ctr"/>
+          <a:lstStyle/>
+          <a:p>
+            <a:pPr indent="0" marL="0">
+              <a:buNone/>
+            </a:pPr>
+            <a:r>
+              <a:rPr lang="en-US" sz="1400" i="1" dirty="0">
+                <a:solidFill>
+                  <a:srgbClr val="9AA6B2"/>
+                </a:solidFill>
+                <a:latin typeface="Malgun Gothic" pitchFamily="34" charset="0"/>
+                <a:ea typeface="Malgun Gothic" pitchFamily="34" charset="-122"/>
+                <a:cs typeface="Malgun Gothic" pitchFamily="34" charset="-120"/>
+              </a:rPr>
+              <a:t>MB ÷ ms = GB/s. 실측값을 GPU 스펙의 이론 대역폭과 비교하면 보통 60~90% 수준입니다.</a:t>
             </a:r>
             <a:endParaRPr lang="en-US" sz="1400" dirty="0"/>
           </a:p>
@@ -2782,7 +3126,7 @@
                 <a:ea typeface="Courier New" pitchFamily="34" charset="-122"/>
                 <a:cs typeface="Courier New" pitchFamily="34" charset="-120"/>
               </a:rPr>
-              <a:t>8</a:t>
+              <a:t>7</a:t>
             </a:r>
             <a:endParaRPr lang="en-US" sz="2200" dirty="0"/>
           </a:p>
@@ -2821,7 +3165,7 @@
                 <a:ea typeface="Malgun Gothic" pitchFamily="34" charset="-122"/>
                 <a:cs typeface="Malgun Gothic" pitchFamily="34" charset="-120"/>
               </a:rPr>
-              <a:t>실습 미리보기 · Lab 3</a:t>
+              <a:t>스트림(stream) 맛보기</a:t>
             </a:r>
             <a:endParaRPr lang="en-US" sz="3000" dirty="0"/>
           </a:p>
@@ -2836,17 +3180,22 @@
         <p:spPr>
           <a:xfrm>
             <a:off x="548640" y="1554480"/>
-            <a:ext cx="5303520" cy="1965960"/>
+            <a:ext cx="11064240" cy="1371600"/>
           </a:xfrm>
           <a:prstGeom prst="roundRect">
             <a:avLst>
-              <a:gd name="adj" fmla="val 3721"/>
+              <a:gd name="adj" fmla="val 4000"/>
             </a:avLst>
           </a:prstGeom>
           <a:solidFill>
-            <a:srgbClr val="1E232C"/>
-          </a:solidFill>
-          <a:ln/>
+            <a:srgbClr val="0E1116"/>
+          </a:solidFill>
+          <a:ln w="12700">
+            <a:solidFill>
+              <a:srgbClr val="2C3440"/>
+            </a:solidFill>
+            <a:prstDash val="solid"/>
+          </a:ln>
         </p:spPr>
       </p:sp>
       <p:sp>
@@ -2857,474 +3206,148 @@
         </p:nvSpPr>
         <p:spPr>
           <a:xfrm>
-            <a:off x="804672" y="1755648"/>
-            <a:ext cx="1188720" cy="502920"/>
-          </a:xfrm>
-          <a:prstGeom prst="roundRect">
-            <a:avLst>
-              <a:gd name="adj" fmla="val 14545"/>
-            </a:avLst>
-          </a:prstGeom>
-          <a:solidFill>
-            <a:srgbClr val="8CC63F"/>
-          </a:solidFill>
-          <a:ln/>
-        </p:spPr>
-        <p:txBody>
-          <a:bodyPr wrap="square" rtlCol="0" anchor="ctr"/>
-          <a:lstStyle/>
-          <a:p>
-            <a:pPr algn="ctr" indent="0" marL="0">
-              <a:buNone/>
-            </a:pPr>
-            <a:r>
-              <a:rPr lang="en-US" sz="1700" b="1" dirty="0">
-                <a:solidFill>
-                  <a:srgbClr val="13161C"/>
+            <a:off x="749808" y="1700784"/>
+            <a:ext cx="10661904" cy="1078992"/>
+          </a:xfrm>
+          <a:prstGeom prst="rect">
+            <a:avLst/>
+          </a:prstGeom>
+          <a:noFill/>
+          <a:ln/>
+        </p:spPr>
+        <p:txBody>
+          <a:bodyPr wrap="square" lIns="0" tIns="0" rIns="0" bIns="0" rtlCol="0" anchor="t"/>
+          <a:lstStyle/>
+          <a:p>
+            <a:pPr algn="l" indent="0" marL="0">
+              <a:lnSpc>
+                <a:spcPct val="108000"/>
+              </a:lnSpc>
+              <a:buNone/>
+            </a:pPr>
+            <a:r>
+              <a:rPr lang="en-US" sz="1350" dirty="0">
+                <a:solidFill>
+                  <a:srgbClr val="E8EDF2"/>
                 </a:solidFill>
                 <a:latin typeface="Courier New" pitchFamily="34" charset="0"/>
                 <a:ea typeface="Courier New" pitchFamily="34" charset="-122"/>
                 <a:cs typeface="Courier New" pitchFamily="34" charset="-120"/>
               </a:rPr>
-              <a:t>Ex 1</a:t>
-            </a:r>
-            <a:endParaRPr lang="en-US" sz="1700" dirty="0"/>
-          </a:p>
-        </p:txBody>
-      </p:sp>
-      <p:sp>
-        <p:nvSpPr>
-          <p:cNvPr id="6" name="Text 4"/>
-          <p:cNvSpPr/>
-          <p:nvPr/>
-        </p:nvSpPr>
-        <p:spPr>
-          <a:xfrm>
-            <a:off x="2148840" y="1773936"/>
-            <a:ext cx="3474720" cy="822960"/>
-          </a:xfrm>
-          <a:prstGeom prst="rect">
-            <a:avLst/>
-          </a:prstGeom>
-          <a:noFill/>
-          <a:ln/>
-        </p:spPr>
-        <p:txBody>
-          <a:bodyPr wrap="square" lIns="0" tIns="0" rIns="0" bIns="0" rtlCol="0" anchor="t"/>
-          <a:lstStyle/>
-          <a:p>
-            <a:pPr indent="0" marL="0">
-              <a:buNone/>
-            </a:pPr>
-            <a:r>
-              <a:rPr lang="en-US" sz="1700" b="1" dirty="0">
-                <a:solidFill>
-                  <a:srgbClr val="E8EDF2"/>
-                </a:solidFill>
-                <a:latin typeface="Malgun Gothic" pitchFamily="34" charset="0"/>
-                <a:ea typeface="Malgun Gothic" pitchFamily="34" charset="-122"/>
-                <a:cs typeface="Malgun Gothic" pitchFamily="34" charset="-120"/>
-              </a:rPr>
-              <a:t>느린 커널 vs 빠른 커널</a:t>
-            </a:r>
-            <a:endParaRPr lang="en-US" sz="1700" dirty="0"/>
-          </a:p>
-        </p:txBody>
-      </p:sp>
-      <p:sp>
-        <p:nvSpPr>
-          <p:cNvPr id="7" name="Text 5"/>
-          <p:cNvSpPr/>
-          <p:nvPr/>
-        </p:nvSpPr>
-        <p:spPr>
-          <a:xfrm>
-            <a:off x="804672" y="2651760"/>
-            <a:ext cx="4791456" cy="731520"/>
-          </a:xfrm>
-          <a:prstGeom prst="rect">
-            <a:avLst/>
-          </a:prstGeom>
-          <a:noFill/>
-          <a:ln/>
-        </p:spPr>
-        <p:txBody>
-          <a:bodyPr wrap="square" lIns="0" tIns="0" rIns="0" bIns="0" rtlCol="0" anchor="t"/>
-          <a:lstStyle/>
-          <a:p>
-            <a:pPr indent="0" marL="0">
+              <a:t>cudaStreamCreate(&amp;stream);</a:t>
+            </a:r>
+            <a:endParaRPr lang="en-US" sz="1350" dirty="0"/>
+          </a:p>
+          <a:p>
+            <a:pPr algn="l" indent="0" marL="0">
               <a:lnSpc>
-                <a:spcPct val="110000"/>
+                <a:spcPct val="108000"/>
               </a:lnSpc>
               <a:buNone/>
             </a:pPr>
             <a:r>
-              <a:rPr lang="en-US" sz="1400" dirty="0">
-                <a:solidFill>
-                  <a:srgbClr val="9AA6B2"/>
-                </a:solidFill>
-                <a:latin typeface="Malgun Gothic" pitchFamily="34" charset="0"/>
-                <a:ea typeface="Malgun Gothic" pitchFamily="34" charset="-122"/>
-                <a:cs typeface="Malgun Gothic" pitchFamily="34" charset="-120"/>
-              </a:rPr>
-              <a:t>time으로 Test 3와 Test 10 실행 시간 비교</a:t>
-            </a:r>
-            <a:endParaRPr lang="en-US" sz="1400" dirty="0"/>
-          </a:p>
-        </p:txBody>
-      </p:sp>
-      <p:sp>
-        <p:nvSpPr>
-          <p:cNvPr id="8" name="Shape 6"/>
-          <p:cNvSpPr/>
-          <p:nvPr/>
-        </p:nvSpPr>
-        <p:spPr>
-          <a:xfrm>
-            <a:off x="6309360" y="1554480"/>
-            <a:ext cx="5303520" cy="1965960"/>
-          </a:xfrm>
-          <a:prstGeom prst="roundRect">
-            <a:avLst>
-              <a:gd name="adj" fmla="val 3721"/>
-            </a:avLst>
-          </a:prstGeom>
-          <a:solidFill>
-            <a:srgbClr val="1E232C"/>
-          </a:solidFill>
-          <a:ln/>
-        </p:spPr>
-      </p:sp>
-      <p:sp>
-        <p:nvSpPr>
-          <p:cNvPr id="9" name="Text 7"/>
-          <p:cNvSpPr/>
-          <p:nvPr/>
-        </p:nvSpPr>
-        <p:spPr>
-          <a:xfrm>
-            <a:off x="6565392" y="1755648"/>
-            <a:ext cx="1188720" cy="502920"/>
-          </a:xfrm>
-          <a:prstGeom prst="roundRect">
-            <a:avLst>
-              <a:gd name="adj" fmla="val 14545"/>
-            </a:avLst>
-          </a:prstGeom>
-          <a:solidFill>
-            <a:srgbClr val="4FB0C6"/>
-          </a:solidFill>
-          <a:ln/>
-        </p:spPr>
-        <p:txBody>
-          <a:bodyPr wrap="square" rtlCol="0" anchor="ctr"/>
-          <a:lstStyle/>
-          <a:p>
-            <a:pPr algn="ctr" indent="0" marL="0">
-              <a:buNone/>
-            </a:pPr>
-            <a:r>
-              <a:rPr lang="en-US" sz="1700" b="1" dirty="0">
-                <a:solidFill>
-                  <a:srgbClr val="13161C"/>
+              <a:rPr lang="en-US" sz="1350" dirty="0">
+                <a:solidFill>
+                  <a:srgbClr val="8CC63F"/>
                 </a:solidFill>
                 <a:latin typeface="Courier New" pitchFamily="34" charset="0"/>
                 <a:ea typeface="Courier New" pitchFamily="34" charset="-122"/>
                 <a:cs typeface="Courier New" pitchFamily="34" charset="-120"/>
               </a:rPr>
-              <a:t>Ex 2</a:t>
-            </a:r>
-            <a:endParaRPr lang="en-US" sz="1700" dirty="0"/>
-          </a:p>
-        </p:txBody>
-      </p:sp>
-      <p:sp>
-        <p:nvSpPr>
-          <p:cNvPr id="10" name="Text 8"/>
-          <p:cNvSpPr/>
-          <p:nvPr/>
-        </p:nvSpPr>
-        <p:spPr>
-          <a:xfrm>
-            <a:off x="7909560" y="1773936"/>
-            <a:ext cx="3474720" cy="822960"/>
-          </a:xfrm>
-          <a:prstGeom prst="rect">
-            <a:avLst/>
-          </a:prstGeom>
-          <a:noFill/>
-          <a:ln/>
-        </p:spPr>
-        <p:txBody>
-          <a:bodyPr wrap="square" lIns="0" tIns="0" rIns="0" bIns="0" rtlCol="0" anchor="t"/>
-          <a:lstStyle/>
-          <a:p>
-            <a:pPr indent="0" marL="0">
-              <a:buNone/>
-            </a:pPr>
-            <a:r>
-              <a:rPr lang="en-US" sz="1700" b="1" dirty="0">
-                <a:solidFill>
-                  <a:srgbClr val="E8EDF2"/>
-                </a:solidFill>
-                <a:latin typeface="Malgun Gothic" pitchFamily="34" charset="0"/>
-                <a:ea typeface="Malgun Gothic" pitchFamily="34" charset="-122"/>
-                <a:cs typeface="Malgun Gothic" pitchFamily="34" charset="-120"/>
-              </a:rPr>
-              <a:t>대역폭을 눈으로 보기</a:t>
-            </a:r>
-            <a:endParaRPr lang="en-US" sz="1700" dirty="0"/>
-          </a:p>
-        </p:txBody>
-      </p:sp>
-      <p:sp>
-        <p:nvSpPr>
-          <p:cNvPr id="11" name="Text 9"/>
-          <p:cNvSpPr/>
-          <p:nvPr/>
-        </p:nvSpPr>
-        <p:spPr>
-          <a:xfrm>
-            <a:off x="6565392" y="2651760"/>
-            <a:ext cx="4791456" cy="731520"/>
-          </a:xfrm>
-          <a:prstGeom prst="rect">
-            <a:avLst/>
-          </a:prstGeom>
-          <a:noFill/>
-          <a:ln/>
-        </p:spPr>
-        <p:txBody>
-          <a:bodyPr wrap="square" lIns="0" tIns="0" rIns="0" bIns="0" rtlCol="0" anchor="t"/>
-          <a:lstStyle/>
-          <a:p>
-            <a:pPr indent="0" marL="0">
+              <a:t>test10_kernel_write&lt;&lt;&lt;gridDim, blockDim, 0, stream&gt;&gt;&gt;(...);</a:t>
+            </a:r>
+            <a:endParaRPr lang="en-US" sz="1350" dirty="0"/>
+          </a:p>
+          <a:p>
+            <a:pPr algn="l" indent="0" marL="0">
               <a:lnSpc>
-                <a:spcPct val="110000"/>
+                <a:spcPct val="108000"/>
               </a:lnSpc>
               <a:buNone/>
             </a:pPr>
             <a:r>
-              <a:rPr lang="en-US" sz="1400" dirty="0">
+              <a:rPr lang="en-US" sz="1350" dirty="0">
                 <a:solidFill>
                   <a:srgbClr val="9AA6B2"/>
-                </a:solidFill>
-                <a:latin typeface="Malgun Gothic" pitchFamily="34" charset="0"/>
-                <a:ea typeface="Malgun Gothic" pitchFamily="34" charset="-122"/>
-                <a:cs typeface="Malgun Gothic" pitchFamily="34" charset="-120"/>
-              </a:rPr>
-              <a:t>--verbose 로 test10의 bandwidth 로그 확인</a:t>
-            </a:r>
-            <a:endParaRPr lang="en-US" sz="1400" dirty="0"/>
-          </a:p>
-        </p:txBody>
-      </p:sp>
-      <p:sp>
-        <p:nvSpPr>
-          <p:cNvPr id="12" name="Shape 10"/>
-          <p:cNvSpPr/>
-          <p:nvPr/>
-        </p:nvSpPr>
-        <p:spPr>
-          <a:xfrm>
-            <a:off x="548640" y="3840480"/>
-            <a:ext cx="5303520" cy="1965960"/>
-          </a:xfrm>
-          <a:prstGeom prst="roundRect">
-            <a:avLst>
-              <a:gd name="adj" fmla="val 3721"/>
-            </a:avLst>
-          </a:prstGeom>
-          <a:solidFill>
-            <a:srgbClr val="1E232C"/>
-          </a:solidFill>
-          <a:ln/>
-        </p:spPr>
-      </p:sp>
-      <p:sp>
-        <p:nvSpPr>
-          <p:cNvPr id="13" name="Text 11"/>
-          <p:cNvSpPr/>
-          <p:nvPr/>
-        </p:nvSpPr>
-        <p:spPr>
-          <a:xfrm>
-            <a:off x="804672" y="4041648"/>
-            <a:ext cx="1188720" cy="502920"/>
-          </a:xfrm>
-          <a:prstGeom prst="roundRect">
-            <a:avLst>
-              <a:gd name="adj" fmla="val 14545"/>
-            </a:avLst>
-          </a:prstGeom>
-          <a:solidFill>
-            <a:srgbClr val="E0A458"/>
-          </a:solidFill>
-          <a:ln/>
-        </p:spPr>
-        <p:txBody>
-          <a:bodyPr wrap="square" rtlCol="0" anchor="ctr"/>
-          <a:lstStyle/>
-          <a:p>
-            <a:pPr algn="ctr" indent="0" marL="0">
-              <a:buNone/>
-            </a:pPr>
-            <a:r>
-              <a:rPr lang="en-US" sz="1700" b="1" dirty="0">
-                <a:solidFill>
-                  <a:srgbClr val="13161C"/>
                 </a:solidFill>
                 <a:latin typeface="Courier New" pitchFamily="34" charset="0"/>
                 <a:ea typeface="Courier New" pitchFamily="34" charset="-122"/>
                 <a:cs typeface="Courier New" pitchFamily="34" charset="-120"/>
               </a:rPr>
-              <a:t>Ex 3</a:t>
-            </a:r>
-            <a:endParaRPr lang="en-US" sz="1700" dirty="0"/>
-          </a:p>
-        </p:txBody>
-      </p:sp>
-      <p:sp>
-        <p:nvSpPr>
-          <p:cNvPr id="14" name="Text 12"/>
-          <p:cNvSpPr/>
-          <p:nvPr/>
-        </p:nvSpPr>
-        <p:spPr>
-          <a:xfrm>
-            <a:off x="2148840" y="4059936"/>
-            <a:ext cx="3474720" cy="822960"/>
-          </a:xfrm>
-          <a:prstGeom prst="rect">
-            <a:avLst/>
-          </a:prstGeom>
-          <a:noFill/>
-          <a:ln/>
-        </p:spPr>
-        <p:txBody>
-          <a:bodyPr wrap="square" lIns="0" tIns="0" rIns="0" bIns="0" rtlCol="0" anchor="t"/>
-          <a:lstStyle/>
-          <a:p>
-            <a:pPr indent="0" marL="0">
-              <a:buNone/>
-            </a:pPr>
-            <a:r>
-              <a:rPr lang="en-US" sz="1700" b="1" dirty="0">
-                <a:solidFill>
-                  <a:srgbClr val="E8EDF2"/>
-                </a:solidFill>
-                <a:latin typeface="Malgun Gothic" pitchFamily="34" charset="0"/>
-                <a:ea typeface="Malgun Gothic" pitchFamily="34" charset="-122"/>
-                <a:cs typeface="Malgun Gothic" pitchFamily="34" charset="-120"/>
-              </a:rPr>
-              <a:t>블록 크기를 바꿔 측정</a:t>
-            </a:r>
-            <a:endParaRPr lang="en-US" sz="1700" dirty="0"/>
-          </a:p>
-        </p:txBody>
-      </p:sp>
-      <p:sp>
-        <p:nvSpPr>
-          <p:cNvPr id="15" name="Text 13"/>
-          <p:cNvSpPr/>
-          <p:nvPr/>
-        </p:nvSpPr>
-        <p:spPr>
-          <a:xfrm>
-            <a:off x="804672" y="4937760"/>
-            <a:ext cx="4791456" cy="731520"/>
-          </a:xfrm>
-          <a:prstGeom prst="rect">
-            <a:avLst/>
-          </a:prstGeom>
-          <a:noFill/>
-          <a:ln/>
-        </p:spPr>
-        <p:txBody>
-          <a:bodyPr wrap="square" lIns="0" tIns="0" rIns="0" bIns="0" rtlCol="0" anchor="t"/>
-          <a:lstStyle/>
-          <a:p>
-            <a:pPr indent="0" marL="0">
+              <a:t>//                                    ▲          ▲</a:t>
+            </a:r>
+            <a:endParaRPr lang="en-US" sz="1350" dirty="0"/>
+          </a:p>
+          <a:p>
+            <a:pPr algn="l" indent="0" marL="0">
               <a:lnSpc>
-                <a:spcPct val="110000"/>
+                <a:spcPct val="108000"/>
               </a:lnSpc>
               <a:buNone/>
             </a:pPr>
             <a:r>
-              <a:rPr lang="en-US" sz="1400" dirty="0">
+              <a:rPr lang="en-US" sz="1350" dirty="0">
                 <a:solidFill>
                   <a:srgbClr val="9AA6B2"/>
-                </a:solidFill>
-                <a:latin typeface="Malgun Gothic" pitchFamily="34" charset="0"/>
-                <a:ea typeface="Malgun Gothic" pitchFamily="34" charset="-122"/>
-                <a:cs typeface="Malgun Gothic" pitchFamily="34" charset="-120"/>
-              </a:rPr>
-              <a:t>STRESS_BLOCKSIZE 32~256 별 대역폭 표 작성</a:t>
-            </a:r>
-            <a:endParaRPr lang="en-US" sz="1400" dirty="0"/>
-          </a:p>
-        </p:txBody>
-      </p:sp>
-      <p:sp>
-        <p:nvSpPr>
-          <p:cNvPr id="16" name="Shape 14"/>
-          <p:cNvSpPr/>
-          <p:nvPr/>
-        </p:nvSpPr>
-        <p:spPr>
-          <a:xfrm>
-            <a:off x="6309360" y="3840480"/>
-            <a:ext cx="5303520" cy="1965960"/>
-          </a:xfrm>
-          <a:prstGeom prst="roundRect">
-            <a:avLst>
-              <a:gd name="adj" fmla="val 3721"/>
-            </a:avLst>
-          </a:prstGeom>
-          <a:solidFill>
-            <a:srgbClr val="1E232C"/>
-          </a:solidFill>
-          <a:ln/>
-        </p:spPr>
-      </p:sp>
-      <p:sp>
-        <p:nvSpPr>
-          <p:cNvPr id="17" name="Text 15"/>
-          <p:cNvSpPr/>
-          <p:nvPr/>
-        </p:nvSpPr>
-        <p:spPr>
-          <a:xfrm>
-            <a:off x="6565392" y="4041648"/>
-            <a:ext cx="1188720" cy="502920"/>
-          </a:xfrm>
-          <a:prstGeom prst="roundRect">
-            <a:avLst>
-              <a:gd name="adj" fmla="val 14545"/>
-            </a:avLst>
-          </a:prstGeom>
-          <a:solidFill>
-            <a:srgbClr val="8CC63F"/>
-          </a:solidFill>
-          <a:ln/>
-        </p:spPr>
-        <p:txBody>
-          <a:bodyPr wrap="square" rtlCol="0" anchor="ctr"/>
-          <a:lstStyle/>
-          <a:p>
-            <a:pPr algn="ctr" indent="0" marL="0">
-              <a:buNone/>
-            </a:pPr>
-            <a:r>
-              <a:rPr lang="en-US" sz="1700" b="1" dirty="0">
-                <a:solidFill>
-                  <a:srgbClr val="13161C"/>
                 </a:solidFill>
                 <a:latin typeface="Courier New" pitchFamily="34" charset="0"/>
                 <a:ea typeface="Courier New" pitchFamily="34" charset="-122"/>
                 <a:cs typeface="Courier New" pitchFamily="34" charset="-120"/>
               </a:rPr>
-              <a:t>Ex 4</a:t>
+              <a:t>//                          공유메모리 크기   스트림</a:t>
+            </a:r>
+            <a:endParaRPr lang="en-US" sz="1350" dirty="0"/>
+          </a:p>
+        </p:txBody>
+      </p:sp>
+      <p:sp>
+        <p:nvSpPr>
+          <p:cNvPr id="6" name="Text 4"/>
+          <p:cNvSpPr/>
+          <p:nvPr/>
+        </p:nvSpPr>
+        <p:spPr>
+          <a:xfrm>
+            <a:off x="548640" y="3108960"/>
+            <a:ext cx="11064240" cy="914400"/>
+          </a:xfrm>
+          <a:prstGeom prst="rect">
+            <a:avLst/>
+          </a:prstGeom>
+          <a:noFill/>
+          <a:ln/>
+        </p:spPr>
+        <p:txBody>
+          <a:bodyPr wrap="square" lIns="0" tIns="0" rIns="0" bIns="0" rtlCol="0" anchor="t"/>
+          <a:lstStyle/>
+          <a:p>
+            <a:pPr indent="0" marL="0">
+              <a:buNone/>
+            </a:pPr>
+            <a:r>
+              <a:rPr lang="en-US" sz="1700" b="1" dirty="0">
+                <a:solidFill>
+                  <a:srgbClr val="4FB0C6"/>
+                </a:solidFill>
+                <a:latin typeface="Malgun Gothic" pitchFamily="34" charset="0"/>
+                <a:ea typeface="Malgun Gothic" pitchFamily="34" charset="-122"/>
+                <a:cs typeface="Malgun Gothic" pitchFamily="34" charset="-120"/>
+              </a:rPr>
+              <a:t>스트림(stream)</a:t>
+            </a:r>
+            <a:pPr indent="0" marL="0">
+              <a:buNone/>
+            </a:pPr>
+            <a:r>
+              <a:rPr lang="en-US" sz="1700" dirty="0">
+                <a:solidFill>
+                  <a:srgbClr val="E8EDF2"/>
+                </a:solidFill>
+                <a:latin typeface="Malgun Gothic" pitchFamily="34" charset="0"/>
+                <a:ea typeface="Malgun Gothic" pitchFamily="34" charset="-122"/>
+                <a:cs typeface="Malgun Gothic" pitchFamily="34" charset="-120"/>
+              </a:rPr>
+              <a:t>은 GPU 작업을 순서대로 처리하는 "작업 큐"입니다. Test 10은 하나의 스트림에 쓰기·읽기 커널을 순서대로 넣습니다.</a:t>
             </a:r>
             <a:endParaRPr lang="en-US" sz="1700" dirty="0"/>
           </a:p>
@@ -3332,53 +3355,75 @@
       </p:sp>
       <p:sp>
         <p:nvSpPr>
-          <p:cNvPr id="18" name="Text 16"/>
-          <p:cNvSpPr/>
-          <p:nvPr/>
-        </p:nvSpPr>
-        <p:spPr>
-          <a:xfrm>
-            <a:off x="7909560" y="4059936"/>
-            <a:ext cx="3474720" cy="822960"/>
-          </a:xfrm>
-          <a:prstGeom prst="rect">
-            <a:avLst/>
-          </a:prstGeom>
-          <a:noFill/>
-          <a:ln/>
-        </p:spPr>
-        <p:txBody>
-          <a:bodyPr wrap="square" lIns="0" tIns="0" rIns="0" bIns="0" rtlCol="0" anchor="t"/>
+          <p:cNvPr id="7" name="Shape 5"/>
+          <p:cNvSpPr/>
+          <p:nvPr/>
+        </p:nvSpPr>
+        <p:spPr>
+          <a:xfrm>
+            <a:off x="548640" y="4114800"/>
+            <a:ext cx="5349240" cy="1554480"/>
+          </a:xfrm>
+          <a:prstGeom prst="roundRect">
+            <a:avLst>
+              <a:gd name="adj" fmla="val 4706"/>
+            </a:avLst>
+          </a:prstGeom>
+          <a:solidFill>
+            <a:srgbClr val="1E232C"/>
+          </a:solidFill>
+          <a:ln/>
+        </p:spPr>
+      </p:sp>
+      <p:sp>
+        <p:nvSpPr>
+          <p:cNvPr id="8" name="Text 6"/>
+          <p:cNvSpPr/>
+          <p:nvPr/>
+        </p:nvSpPr>
+        <p:spPr>
+          <a:xfrm>
+            <a:off x="777240" y="4297680"/>
+            <a:ext cx="4892040" cy="457200"/>
+          </a:xfrm>
+          <a:prstGeom prst="rect">
+            <a:avLst/>
+          </a:prstGeom>
+          <a:noFill/>
+          <a:ln/>
+        </p:spPr>
+        <p:txBody>
+          <a:bodyPr wrap="square" lIns="0" tIns="0" rIns="0" bIns="0" rtlCol="0" anchor="ctr"/>
           <a:lstStyle/>
           <a:p>
             <a:pPr indent="0" marL="0">
               <a:buNone/>
             </a:pPr>
             <a:r>
-              <a:rPr lang="en-US" sz="1700" b="1" dirty="0">
-                <a:solidFill>
-                  <a:srgbClr val="E8EDF2"/>
-                </a:solidFill>
-                <a:latin typeface="Malgun Gothic" pitchFamily="34" charset="0"/>
-                <a:ea typeface="Malgun Gothic" pitchFamily="34" charset="-122"/>
-                <a:cs typeface="Malgun Gothic" pitchFamily="34" charset="-120"/>
-              </a:rPr>
-              <a:t>메모리 병합 깨뜨리기</a:t>
-            </a:r>
-            <a:endParaRPr lang="en-US" sz="1700" dirty="0"/>
-          </a:p>
-        </p:txBody>
-      </p:sp>
-      <p:sp>
-        <p:nvSpPr>
-          <p:cNvPr id="19" name="Text 17"/>
-          <p:cNvSpPr/>
-          <p:nvPr/>
-        </p:nvSpPr>
-        <p:spPr>
-          <a:xfrm>
-            <a:off x="6565392" y="4937760"/>
-            <a:ext cx="4791456" cy="731520"/>
+              <a:rPr lang="en-US" sz="1400" b="1" dirty="0">
+                <a:solidFill>
+                  <a:srgbClr val="8CC63F"/>
+                </a:solidFill>
+                <a:latin typeface="Courier New" pitchFamily="34" charset="0"/>
+                <a:ea typeface="Courier New" pitchFamily="34" charset="-122"/>
+                <a:cs typeface="Courier New" pitchFamily="34" charset="-120"/>
+              </a:rPr>
+              <a:t>&lt;&lt;&lt;grid, block, 0, stream&gt;&gt;&gt;</a:t>
+            </a:r>
+            <a:endParaRPr lang="en-US" sz="1400" dirty="0"/>
+          </a:p>
+        </p:txBody>
+      </p:sp>
+      <p:sp>
+        <p:nvSpPr>
+          <p:cNvPr id="9" name="Text 7"/>
+          <p:cNvSpPr/>
+          <p:nvPr/>
+        </p:nvSpPr>
+        <p:spPr>
+          <a:xfrm>
+            <a:off x="777240" y="4754880"/>
+            <a:ext cx="4892040" cy="822960"/>
           </a:xfrm>
           <a:prstGeom prst="rect">
             <a:avLst/>
@@ -3392,20 +3437,20 @@
           <a:p>
             <a:pPr indent="0" marL="0">
               <a:lnSpc>
-                <a:spcPct val="110000"/>
+                <a:spcPct val="115000"/>
               </a:lnSpc>
               <a:buNone/>
             </a:pPr>
             <a:r>
               <a:rPr lang="en-US" sz="1400" dirty="0">
                 <a:solidFill>
-                  <a:srgbClr val="9AA6B2"/>
-                </a:solidFill>
-                <a:latin typeface="Malgun Gothic" pitchFamily="34" charset="0"/>
-                <a:ea typeface="Malgun Gothic" pitchFamily="34" charset="-122"/>
-                <a:cs typeface="Malgun Gothic" pitchFamily="34" charset="-120"/>
-              </a:rPr>
-              <a:t>인덱스를 비병합으로 바꿔 대역폭 급락 관찰</a:t>
+                  <a:srgbClr val="E8EDF2"/>
+                </a:solidFill>
+                <a:latin typeface="Malgun Gothic" pitchFamily="34" charset="0"/>
+                <a:ea typeface="Malgun Gothic" pitchFamily="34" charset="-122"/>
+                <a:cs typeface="Malgun Gothic" pitchFamily="34" charset="-120"/>
+              </a:rPr>
+              <a:t>실행 구성의 3·4번째 인자: 공유 메모리 크기(0), 스트림. 세션 1에선 생략했던 부분입니다.</a:t>
             </a:r>
             <a:endParaRPr lang="en-US" sz="1400" dirty="0"/>
           </a:p>
@@ -3413,14 +3458,36 @@
       </p:sp>
       <p:sp>
         <p:nvSpPr>
-          <p:cNvPr id="20" name="Text 18"/>
-          <p:cNvSpPr/>
-          <p:nvPr/>
-        </p:nvSpPr>
-        <p:spPr>
-          <a:xfrm>
-            <a:off x="548640" y="5943600"/>
-            <a:ext cx="11064240" cy="365760"/>
+          <p:cNvPr id="10" name="Shape 8"/>
+          <p:cNvSpPr/>
+          <p:nvPr/>
+        </p:nvSpPr>
+        <p:spPr>
+          <a:xfrm>
+            <a:off x="6263640" y="4114800"/>
+            <a:ext cx="5349240" cy="1554480"/>
+          </a:xfrm>
+          <a:prstGeom prst="roundRect">
+            <a:avLst>
+              <a:gd name="adj" fmla="val 4706"/>
+            </a:avLst>
+          </a:prstGeom>
+          <a:solidFill>
+            <a:srgbClr val="1E232C"/>
+          </a:solidFill>
+          <a:ln/>
+        </p:spPr>
+      </p:sp>
+      <p:sp>
+        <p:nvSpPr>
+          <p:cNvPr id="11" name="Text 9"/>
+          <p:cNvSpPr/>
+          <p:nvPr/>
+        </p:nvSpPr>
+        <p:spPr>
+          <a:xfrm>
+            <a:off x="6492240" y="4297680"/>
+            <a:ext cx="4892040" cy="457200"/>
           </a:xfrm>
           <a:prstGeom prst="rect">
             <a:avLst/>
@@ -3432,21 +3499,63 @@
           <a:bodyPr wrap="square" lIns="0" tIns="0" rIns="0" bIns="0" rtlCol="0" anchor="ctr"/>
           <a:lstStyle/>
           <a:p>
-            <a:pPr algn="ctr" indent="0" marL="0">
-              <a:buNone/>
-            </a:pPr>
-            <a:r>
-              <a:rPr lang="en-US" sz="1300" i="1" dirty="0">
-                <a:solidFill>
-                  <a:srgbClr val="9AA6B2"/>
-                </a:solidFill>
-                <a:latin typeface="Malgun Gothic" pitchFamily="34" charset="0"/>
-                <a:ea typeface="Malgun Gothic" pitchFamily="34" charset="-122"/>
-                <a:cs typeface="Malgun Gothic" pitchFamily="34" charset="-120"/>
-              </a:rPr>
-              <a:t>측정이 핵심입니다 — 대역폭 로그는 --verbose 없이는 출력되지 않습니다.</a:t>
-            </a:r>
-            <a:endParaRPr lang="en-US" sz="1300" dirty="0"/>
+            <a:pPr indent="0" marL="0">
+              <a:buNone/>
+            </a:pPr>
+            <a:r>
+              <a:rPr lang="en-US" sz="1500" b="1" dirty="0">
+                <a:solidFill>
+                  <a:srgbClr val="4FB0C6"/>
+                </a:solidFill>
+                <a:latin typeface="Malgun Gothic" pitchFamily="34" charset="0"/>
+                <a:ea typeface="Malgun Gothic" pitchFamily="34" charset="-122"/>
+                <a:cs typeface="Malgun Gothic" pitchFamily="34" charset="-120"/>
+              </a:rPr>
+              <a:t>왜 이벤트도 스트림에?</a:t>
+            </a:r>
+            <a:endParaRPr lang="en-US" sz="1500" dirty="0"/>
+          </a:p>
+        </p:txBody>
+      </p:sp>
+      <p:sp>
+        <p:nvSpPr>
+          <p:cNvPr id="12" name="Text 10"/>
+          <p:cNvSpPr/>
+          <p:nvPr/>
+        </p:nvSpPr>
+        <p:spPr>
+          <a:xfrm>
+            <a:off x="6492240" y="4754880"/>
+            <a:ext cx="4892040" cy="822960"/>
+          </a:xfrm>
+          <a:prstGeom prst="rect">
+            <a:avLst/>
+          </a:prstGeom>
+          <a:noFill/>
+          <a:ln/>
+        </p:spPr>
+        <p:txBody>
+          <a:bodyPr wrap="square" lIns="0" tIns="0" rIns="0" bIns="0" rtlCol="0" anchor="t"/>
+          <a:lstStyle/>
+          <a:p>
+            <a:pPr indent="0" marL="0">
+              <a:lnSpc>
+                <a:spcPct val="115000"/>
+              </a:lnSpc>
+              <a:buNone/>
+            </a:pPr>
+            <a:r>
+              <a:rPr lang="en-US" sz="1400" dirty="0">
+                <a:solidFill>
+                  <a:srgbClr val="E8EDF2"/>
+                </a:solidFill>
+                <a:latin typeface="Malgun Gothic" pitchFamily="34" charset="0"/>
+                <a:ea typeface="Malgun Gothic" pitchFamily="34" charset="-122"/>
+                <a:cs typeface="Malgun Gothic" pitchFamily="34" charset="-120"/>
+              </a:rPr>
+              <a:t>이벤트를 같은 스트림에 기록해야 그 스트림의 커널들 시간을 정확히 잽니다.</a:t>
+            </a:r>
+            <a:endParaRPr lang="en-US" sz="1400" dirty="0"/>
           </a:p>
         </p:txBody>
       </p:sp>
@@ -3519,7 +3628,7 @@
                 <a:ea typeface="Courier New" pitchFamily="34" charset="-122"/>
                 <a:cs typeface="Courier New" pitchFamily="34" charset="-120"/>
               </a:rPr>
-              <a:t>9</a:t>
+              <a:t>7</a:t>
             </a:r>
             <a:endParaRPr lang="en-US" sz="2200" dirty="0"/>
           </a:p>
@@ -3558,7 +3667,7 @@
                 <a:ea typeface="Malgun Gothic" pitchFamily="34" charset="-122"/>
                 <a:cs typeface="Malgun Gothic" pitchFamily="34" charset="-120"/>
               </a:rPr>
-              <a:t>핵심 정리 &amp; 자주 하는 실수</a:t>
+              <a:t>스트림 겹침(overlap) · 개념도</a:t>
             </a:r>
             <a:endParaRPr lang="en-US" sz="3000" dirty="0"/>
           </a:p>
@@ -3566,36 +3675,153 @@
       </p:sp>
       <p:sp>
         <p:nvSpPr>
-          <p:cNvPr id="4" name="Shape 2"/>
-          <p:cNvSpPr/>
-          <p:nvPr/>
-        </p:nvSpPr>
-        <p:spPr>
-          <a:xfrm>
-            <a:off x="548640" y="1600200"/>
-            <a:ext cx="5349240" cy="4114800"/>
+          <p:cNvPr id="4" name="Text 2"/>
+          <p:cNvSpPr/>
+          <p:nvPr/>
+        </p:nvSpPr>
+        <p:spPr>
+          <a:xfrm>
+            <a:off x="548640" y="1371600"/>
+            <a:ext cx="11064240" cy="411480"/>
+          </a:xfrm>
+          <a:prstGeom prst="rect">
+            <a:avLst/>
+          </a:prstGeom>
+          <a:noFill/>
+          <a:ln/>
+        </p:spPr>
+        <p:txBody>
+          <a:bodyPr wrap="square" lIns="0" tIns="0" rIns="0" bIns="0" rtlCol="0" anchor="ctr"/>
+          <a:lstStyle/>
+          <a:p>
+            <a:pPr indent="0" marL="0">
+              <a:buNone/>
+            </a:pPr>
+            <a:r>
+              <a:rPr lang="en-US" sz="1500" dirty="0">
+                <a:solidFill>
+                  <a:srgbClr val="9AA6B2"/>
+                </a:solidFill>
+                <a:latin typeface="Malgun Gothic" pitchFamily="34" charset="0"/>
+                <a:ea typeface="Malgun Gothic" pitchFamily="34" charset="-122"/>
+                <a:cs typeface="Malgun Gothic" pitchFamily="34" charset="-120"/>
+              </a:rPr>
+              <a:t>여러 스트림을 쓰면 한 스트림의 복사와 다른 스트림의 연산을 겹쳐 전체 시간을 줄일 수 있습니다.</a:t>
+            </a:r>
+            <a:endParaRPr lang="en-US" sz="1500" dirty="0"/>
+          </a:p>
+        </p:txBody>
+      </p:sp>
+      <p:sp>
+        <p:nvSpPr>
+          <p:cNvPr id="5" name="Text 3"/>
+          <p:cNvSpPr/>
+          <p:nvPr/>
+        </p:nvSpPr>
+        <p:spPr>
+          <a:xfrm>
+            <a:off x="548640" y="2148840"/>
+            <a:ext cx="2286000" cy="502920"/>
+          </a:xfrm>
+          <a:prstGeom prst="rect">
+            <a:avLst/>
+          </a:prstGeom>
+          <a:noFill/>
+          <a:ln/>
+        </p:spPr>
+        <p:txBody>
+          <a:bodyPr wrap="square" lIns="0" tIns="0" rIns="0" bIns="0" rtlCol="0" anchor="ctr"/>
+          <a:lstStyle/>
+          <a:p>
+            <a:pPr indent="0" marL="0">
+              <a:buNone/>
+            </a:pPr>
+            <a:r>
+              <a:rPr lang="en-US" sz="1400" b="1" dirty="0">
+                <a:solidFill>
+                  <a:srgbClr val="4FB0C6"/>
+                </a:solidFill>
+                <a:latin typeface="Malgun Gothic" pitchFamily="34" charset="0"/>
+                <a:ea typeface="Malgun Gothic" pitchFamily="34" charset="-122"/>
+                <a:cs typeface="Malgun Gothic" pitchFamily="34" charset="-120"/>
+              </a:rPr>
+              <a:t>① 단일 스트림</a:t>
+            </a:r>
+            <a:endParaRPr lang="en-US" sz="1400" dirty="0"/>
+          </a:p>
+        </p:txBody>
+      </p:sp>
+      <p:sp>
+        <p:nvSpPr>
+          <p:cNvPr id="6" name="Text 4"/>
+          <p:cNvSpPr/>
+          <p:nvPr/>
+        </p:nvSpPr>
+        <p:spPr>
+          <a:xfrm>
+            <a:off x="548640" y="2542032"/>
+            <a:ext cx="2286000" cy="365760"/>
+          </a:xfrm>
+          <a:prstGeom prst="rect">
+            <a:avLst/>
+          </a:prstGeom>
+          <a:noFill/>
+          <a:ln/>
+        </p:spPr>
+        <p:txBody>
+          <a:bodyPr wrap="square" lIns="0" tIns="0" rIns="0" bIns="0" rtlCol="0" anchor="ctr"/>
+          <a:lstStyle/>
+          <a:p>
+            <a:pPr indent="0" marL="0">
+              <a:buNone/>
+            </a:pPr>
+            <a:r>
+              <a:rPr lang="en-US" sz="1100" dirty="0">
+                <a:solidFill>
+                  <a:srgbClr val="9AA6B2"/>
+                </a:solidFill>
+                <a:latin typeface="Malgun Gothic" pitchFamily="34" charset="0"/>
+                <a:ea typeface="Malgun Gothic" pitchFamily="34" charset="-122"/>
+                <a:cs typeface="Malgun Gothic" pitchFamily="34" charset="-120"/>
+              </a:rPr>
+              <a:t>(청크 2개 순차)</a:t>
+            </a:r>
+            <a:endParaRPr lang="en-US" sz="1100" dirty="0"/>
+          </a:p>
+        </p:txBody>
+      </p:sp>
+      <p:sp>
+        <p:nvSpPr>
+          <p:cNvPr id="7" name="Shape 5"/>
+          <p:cNvSpPr/>
+          <p:nvPr/>
+        </p:nvSpPr>
+        <p:spPr>
+          <a:xfrm>
+            <a:off x="3017520" y="2103120"/>
+            <a:ext cx="713232" cy="502920"/>
           </a:xfrm>
           <a:prstGeom prst="roundRect">
             <a:avLst>
-              <a:gd name="adj" fmla="val 1778"/>
+              <a:gd name="adj" fmla="val 7273"/>
             </a:avLst>
           </a:prstGeom>
           <a:solidFill>
-            <a:srgbClr val="1E232C"/>
-          </a:solidFill>
-          <a:ln/>
-        </p:spPr>
-      </p:sp>
-      <p:sp>
-        <p:nvSpPr>
-          <p:cNvPr id="5" name="Text 3"/>
-          <p:cNvSpPr/>
-          <p:nvPr/>
-        </p:nvSpPr>
-        <p:spPr>
-          <a:xfrm>
-            <a:off x="822960" y="1828800"/>
-            <a:ext cx="4800600" cy="457200"/>
+            <a:srgbClr val="4FB0C6"/>
+          </a:solidFill>
+          <a:ln/>
+        </p:spPr>
+      </p:sp>
+      <p:sp>
+        <p:nvSpPr>
+          <p:cNvPr id="8" name="Text 6"/>
+          <p:cNvSpPr/>
+          <p:nvPr/>
+        </p:nvSpPr>
+        <p:spPr>
+          <a:xfrm>
+            <a:off x="3017520" y="2103120"/>
+            <a:ext cx="713232" cy="502920"/>
           </a:xfrm>
           <a:prstGeom prst="rect">
             <a:avLst/>
@@ -3607,144 +3833,893 @@
           <a:bodyPr wrap="square" lIns="0" tIns="0" rIns="0" bIns="0" rtlCol="0" anchor="ctr"/>
           <a:lstStyle/>
           <a:p>
-            <a:pPr indent="0" marL="0">
-              <a:buNone/>
-            </a:pPr>
-            <a:r>
-              <a:rPr lang="en-US" sz="2000" b="1" dirty="0">
-                <a:solidFill>
-                  <a:srgbClr val="8CC63F"/>
-                </a:solidFill>
-                <a:latin typeface="Malgun Gothic" pitchFamily="34" charset="0"/>
-                <a:ea typeface="Malgun Gothic" pitchFamily="34" charset="-122"/>
-                <a:cs typeface="Malgun Gothic" pitchFamily="34" charset="-120"/>
-              </a:rPr>
-              <a:t>기억할 것</a:t>
-            </a:r>
-            <a:endParaRPr lang="en-US" sz="2000" dirty="0"/>
-          </a:p>
-        </p:txBody>
-      </p:sp>
-      <p:sp>
-        <p:nvSpPr>
-          <p:cNvPr id="6" name="Text 4"/>
-          <p:cNvSpPr/>
-          <p:nvPr/>
-        </p:nvSpPr>
-        <p:spPr>
-          <a:xfrm>
-            <a:off x="822960" y="2423160"/>
-            <a:ext cx="4800600" cy="3108960"/>
-          </a:xfrm>
-          <a:prstGeom prst="rect">
-            <a:avLst/>
-          </a:prstGeom>
-          <a:noFill/>
-          <a:ln/>
-        </p:spPr>
-        <p:txBody>
-          <a:bodyPr wrap="square" lIns="0" tIns="0" rIns="0" bIns="0" rtlCol="0" anchor="t"/>
-          <a:lstStyle/>
-          <a:p>
-            <a:pPr marL="342900" indent="-342900">
-              <a:spcAft>
-                <a:spcPts val="1200"/>
-              </a:spcAft>
-              <a:buSzPct val="100000"/>
-              <a:buChar char="✓"/>
-            </a:pPr>
-            <a:r>
-              <a:rPr lang="en-US" sz="1550" dirty="0">
-                <a:solidFill>
-                  <a:srgbClr val="E8EDF2"/>
-                </a:solidFill>
-                <a:latin typeface="Malgun Gothic" pitchFamily="34" charset="0"/>
-                <a:ea typeface="Malgun Gothic" pitchFamily="34" charset="-122"/>
-                <a:cs typeface="Malgun Gothic" pitchFamily="34" charset="-120"/>
-              </a:rPr>
-              <a:t>총 스레드 = 블록수 × 블록당 스레드</a:t>
-            </a:r>
-            <a:endParaRPr lang="en-US" sz="1550" dirty="0"/>
-          </a:p>
-          <a:p>
-            <a:pPr marL="342900" indent="-342900">
-              <a:spcAft>
-                <a:spcPts val="1200"/>
-              </a:spcAft>
-              <a:buSzPct val="100000"/>
-              <a:buChar char="✓"/>
-            </a:pPr>
-            <a:r>
-              <a:rPr lang="en-US" sz="1550" dirty="0">
-                <a:solidFill>
-                  <a:srgbClr val="E8EDF2"/>
-                </a:solidFill>
-                <a:latin typeface="Malgun Gothic" pitchFamily="34" charset="0"/>
-                <a:ea typeface="Malgun Gothic" pitchFamily="34" charset="-122"/>
-                <a:cs typeface="Malgun Gothic" pitchFamily="34" charset="-120"/>
-              </a:rPr>
-              <a:t>index = i*blockDim.x + threadIdx.x → 병합</a:t>
-            </a:r>
-            <a:endParaRPr lang="en-US" sz="1550" dirty="0"/>
-          </a:p>
-          <a:p>
-            <a:pPr marL="342900" indent="-342900">
-              <a:spcAft>
-                <a:spcPts val="1200"/>
-              </a:spcAft>
-              <a:buSzPct val="100000"/>
-              <a:buChar char="✓"/>
-            </a:pPr>
-            <a:r>
-              <a:rPr lang="en-US" sz="1550" dirty="0">
-                <a:solidFill>
-                  <a:srgbClr val="E8EDF2"/>
-                </a:solidFill>
-                <a:latin typeface="Malgun Gothic" pitchFamily="34" charset="0"/>
-                <a:ea typeface="Malgun Gothic" pitchFamily="34" charset="-122"/>
-                <a:cs typeface="Malgun Gothic" pitchFamily="34" charset="-120"/>
-              </a:rPr>
-              <a:t>커널은 비동기 → 이벤트로 시간 측정</a:t>
-            </a:r>
-            <a:endParaRPr lang="en-US" sz="1550" dirty="0"/>
-          </a:p>
-          <a:p>
-            <a:pPr marL="342900" indent="-342900">
-              <a:buSzPct val="100000"/>
-              <a:buChar char="✓"/>
-            </a:pPr>
-            <a:r>
-              <a:rPr lang="en-US" sz="1550" dirty="0">
-                <a:solidFill>
-                  <a:srgbClr val="E8EDF2"/>
-                </a:solidFill>
-                <a:latin typeface="Malgun Gothic" pitchFamily="34" charset="0"/>
-                <a:ea typeface="Malgun Gothic" pitchFamily="34" charset="-122"/>
-                <a:cs typeface="Malgun Gothic" pitchFamily="34" charset="-120"/>
-              </a:rPr>
-              <a:t>대역폭 = 전송량 ÷ 시간 (GB/s)</a:t>
-            </a:r>
-            <a:endParaRPr lang="en-US" sz="1550" dirty="0"/>
-          </a:p>
-        </p:txBody>
-      </p:sp>
-      <p:sp>
-        <p:nvSpPr>
-          <p:cNvPr id="7" name="Shape 5"/>
-          <p:cNvSpPr/>
-          <p:nvPr/>
-        </p:nvSpPr>
-        <p:spPr>
-          <a:xfrm>
-            <a:off x="6263640" y="1600200"/>
-            <a:ext cx="5349240" cy="4114800"/>
+            <a:pPr algn="ctr" indent="0" marL="0">
+              <a:buNone/>
+            </a:pPr>
+            <a:r>
+              <a:rPr lang="en-US" sz="1100" b="1" dirty="0">
+                <a:solidFill>
+                  <a:srgbClr val="13161C"/>
+                </a:solidFill>
+                <a:latin typeface="Malgun Gothic" pitchFamily="34" charset="0"/>
+                <a:ea typeface="Malgun Gothic" pitchFamily="34" charset="-122"/>
+                <a:cs typeface="Malgun Gothic" pitchFamily="34" charset="-120"/>
+              </a:rPr>
+              <a:t>복사</a:t>
+            </a:r>
+            <a:endParaRPr lang="en-US" sz="1100" dirty="0"/>
+          </a:p>
+        </p:txBody>
+      </p:sp>
+      <p:sp>
+        <p:nvSpPr>
+          <p:cNvPr id="9" name="Shape 7"/>
+          <p:cNvSpPr/>
+          <p:nvPr/>
+        </p:nvSpPr>
+        <p:spPr>
+          <a:xfrm>
+            <a:off x="3767328" y="2103120"/>
+            <a:ext cx="1463040" cy="502920"/>
           </a:xfrm>
           <a:prstGeom prst="roundRect">
             <a:avLst>
-              <a:gd name="adj" fmla="val 1778"/>
+              <a:gd name="adj" fmla="val 7273"/>
             </a:avLst>
           </a:prstGeom>
           <a:solidFill>
+            <a:srgbClr val="8CC63F"/>
+          </a:solidFill>
+          <a:ln/>
+        </p:spPr>
+      </p:sp>
+      <p:sp>
+        <p:nvSpPr>
+          <p:cNvPr id="10" name="Text 8"/>
+          <p:cNvSpPr/>
+          <p:nvPr/>
+        </p:nvSpPr>
+        <p:spPr>
+          <a:xfrm>
+            <a:off x="3767328" y="2103120"/>
+            <a:ext cx="1463040" cy="502920"/>
+          </a:xfrm>
+          <a:prstGeom prst="rect">
+            <a:avLst/>
+          </a:prstGeom>
+          <a:noFill/>
+          <a:ln/>
+        </p:spPr>
+        <p:txBody>
+          <a:bodyPr wrap="square" lIns="0" tIns="0" rIns="0" bIns="0" rtlCol="0" anchor="ctr"/>
+          <a:lstStyle/>
+          <a:p>
+            <a:pPr algn="ctr" indent="0" marL="0">
+              <a:buNone/>
+            </a:pPr>
+            <a:r>
+              <a:rPr lang="en-US" sz="1100" b="1" dirty="0">
+                <a:solidFill>
+                  <a:srgbClr val="13161C"/>
+                </a:solidFill>
+                <a:latin typeface="Malgun Gothic" pitchFamily="34" charset="0"/>
+                <a:ea typeface="Malgun Gothic" pitchFamily="34" charset="-122"/>
+                <a:cs typeface="Malgun Gothic" pitchFamily="34" charset="-120"/>
+              </a:rPr>
+              <a:t>커널</a:t>
+            </a:r>
+            <a:endParaRPr lang="en-US" sz="1100" dirty="0"/>
+          </a:p>
+        </p:txBody>
+      </p:sp>
+      <p:sp>
+        <p:nvSpPr>
+          <p:cNvPr id="11" name="Shape 9"/>
+          <p:cNvSpPr/>
+          <p:nvPr/>
+        </p:nvSpPr>
+        <p:spPr>
+          <a:xfrm>
+            <a:off x="5266944" y="2103120"/>
+            <a:ext cx="713232" cy="502920"/>
+          </a:xfrm>
+          <a:prstGeom prst="roundRect">
+            <a:avLst>
+              <a:gd name="adj" fmla="val 7273"/>
+            </a:avLst>
+          </a:prstGeom>
+          <a:solidFill>
+            <a:srgbClr val="4FB0C6"/>
+          </a:solidFill>
+          <a:ln/>
+        </p:spPr>
+      </p:sp>
+      <p:sp>
+        <p:nvSpPr>
+          <p:cNvPr id="12" name="Text 10"/>
+          <p:cNvSpPr/>
+          <p:nvPr/>
+        </p:nvSpPr>
+        <p:spPr>
+          <a:xfrm>
+            <a:off x="5266944" y="2103120"/>
+            <a:ext cx="713232" cy="502920"/>
+          </a:xfrm>
+          <a:prstGeom prst="rect">
+            <a:avLst/>
+          </a:prstGeom>
+          <a:noFill/>
+          <a:ln/>
+        </p:spPr>
+        <p:txBody>
+          <a:bodyPr wrap="square" lIns="0" tIns="0" rIns="0" bIns="0" rtlCol="0" anchor="ctr"/>
+          <a:lstStyle/>
+          <a:p>
+            <a:pPr algn="ctr" indent="0" marL="0">
+              <a:buNone/>
+            </a:pPr>
+            <a:r>
+              <a:rPr lang="en-US" sz="1100" b="1" dirty="0">
+                <a:solidFill>
+                  <a:srgbClr val="13161C"/>
+                </a:solidFill>
+                <a:latin typeface="Malgun Gothic" pitchFamily="34" charset="0"/>
+                <a:ea typeface="Malgun Gothic" pitchFamily="34" charset="-122"/>
+                <a:cs typeface="Malgun Gothic" pitchFamily="34" charset="-120"/>
+              </a:rPr>
+              <a:t>복사</a:t>
+            </a:r>
+            <a:endParaRPr lang="en-US" sz="1100" dirty="0"/>
+          </a:p>
+        </p:txBody>
+      </p:sp>
+      <p:sp>
+        <p:nvSpPr>
+          <p:cNvPr id="13" name="Shape 11"/>
+          <p:cNvSpPr/>
+          <p:nvPr/>
+        </p:nvSpPr>
+        <p:spPr>
+          <a:xfrm>
+            <a:off x="6016752" y="2103120"/>
+            <a:ext cx="713232" cy="502920"/>
+          </a:xfrm>
+          <a:prstGeom prst="roundRect">
+            <a:avLst>
+              <a:gd name="adj" fmla="val 7273"/>
+            </a:avLst>
+          </a:prstGeom>
+          <a:solidFill>
+            <a:srgbClr val="4FB0C6"/>
+          </a:solidFill>
+          <a:ln/>
+        </p:spPr>
+      </p:sp>
+      <p:sp>
+        <p:nvSpPr>
+          <p:cNvPr id="14" name="Text 12"/>
+          <p:cNvSpPr/>
+          <p:nvPr/>
+        </p:nvSpPr>
+        <p:spPr>
+          <a:xfrm>
+            <a:off x="6016752" y="2103120"/>
+            <a:ext cx="713232" cy="502920"/>
+          </a:xfrm>
+          <a:prstGeom prst="rect">
+            <a:avLst/>
+          </a:prstGeom>
+          <a:noFill/>
+          <a:ln/>
+        </p:spPr>
+        <p:txBody>
+          <a:bodyPr wrap="square" lIns="0" tIns="0" rIns="0" bIns="0" rtlCol="0" anchor="ctr"/>
+          <a:lstStyle/>
+          <a:p>
+            <a:pPr algn="ctr" indent="0" marL="0">
+              <a:buNone/>
+            </a:pPr>
+            <a:r>
+              <a:rPr lang="en-US" sz="1100" b="1" dirty="0">
+                <a:solidFill>
+                  <a:srgbClr val="13161C"/>
+                </a:solidFill>
+                <a:latin typeface="Malgun Gothic" pitchFamily="34" charset="0"/>
+                <a:ea typeface="Malgun Gothic" pitchFamily="34" charset="-122"/>
+                <a:cs typeface="Malgun Gothic" pitchFamily="34" charset="-120"/>
+              </a:rPr>
+              <a:t>복사</a:t>
+            </a:r>
+            <a:endParaRPr lang="en-US" sz="1100" dirty="0"/>
+          </a:p>
+        </p:txBody>
+      </p:sp>
+      <p:sp>
+        <p:nvSpPr>
+          <p:cNvPr id="15" name="Shape 13"/>
+          <p:cNvSpPr/>
+          <p:nvPr/>
+        </p:nvSpPr>
+        <p:spPr>
+          <a:xfrm>
+            <a:off x="6766560" y="2103120"/>
+            <a:ext cx="1463040" cy="502920"/>
+          </a:xfrm>
+          <a:prstGeom prst="roundRect">
+            <a:avLst>
+              <a:gd name="adj" fmla="val 7273"/>
+            </a:avLst>
+          </a:prstGeom>
+          <a:solidFill>
+            <a:srgbClr val="8CC63F"/>
+          </a:solidFill>
+          <a:ln/>
+        </p:spPr>
+      </p:sp>
+      <p:sp>
+        <p:nvSpPr>
+          <p:cNvPr id="16" name="Text 14"/>
+          <p:cNvSpPr/>
+          <p:nvPr/>
+        </p:nvSpPr>
+        <p:spPr>
+          <a:xfrm>
+            <a:off x="6766560" y="2103120"/>
+            <a:ext cx="1463040" cy="502920"/>
+          </a:xfrm>
+          <a:prstGeom prst="rect">
+            <a:avLst/>
+          </a:prstGeom>
+          <a:noFill/>
+          <a:ln/>
+        </p:spPr>
+        <p:txBody>
+          <a:bodyPr wrap="square" lIns="0" tIns="0" rIns="0" bIns="0" rtlCol="0" anchor="ctr"/>
+          <a:lstStyle/>
+          <a:p>
+            <a:pPr algn="ctr" indent="0" marL="0">
+              <a:buNone/>
+            </a:pPr>
+            <a:r>
+              <a:rPr lang="en-US" sz="1100" b="1" dirty="0">
+                <a:solidFill>
+                  <a:srgbClr val="13161C"/>
+                </a:solidFill>
+                <a:latin typeface="Malgun Gothic" pitchFamily="34" charset="0"/>
+                <a:ea typeface="Malgun Gothic" pitchFamily="34" charset="-122"/>
+                <a:cs typeface="Malgun Gothic" pitchFamily="34" charset="-120"/>
+              </a:rPr>
+              <a:t>커널</a:t>
+            </a:r>
+            <a:endParaRPr lang="en-US" sz="1100" dirty="0"/>
+          </a:p>
+        </p:txBody>
+      </p:sp>
+      <p:sp>
+        <p:nvSpPr>
+          <p:cNvPr id="17" name="Shape 15"/>
+          <p:cNvSpPr/>
+          <p:nvPr/>
+        </p:nvSpPr>
+        <p:spPr>
+          <a:xfrm>
+            <a:off x="8266176" y="2103120"/>
+            <a:ext cx="713232" cy="502920"/>
+          </a:xfrm>
+          <a:prstGeom prst="roundRect">
+            <a:avLst>
+              <a:gd name="adj" fmla="val 7273"/>
+            </a:avLst>
+          </a:prstGeom>
+          <a:solidFill>
+            <a:srgbClr val="4FB0C6"/>
+          </a:solidFill>
+          <a:ln/>
+        </p:spPr>
+      </p:sp>
+      <p:sp>
+        <p:nvSpPr>
+          <p:cNvPr id="18" name="Text 16"/>
+          <p:cNvSpPr/>
+          <p:nvPr/>
+        </p:nvSpPr>
+        <p:spPr>
+          <a:xfrm>
+            <a:off x="8266176" y="2103120"/>
+            <a:ext cx="713232" cy="502920"/>
+          </a:xfrm>
+          <a:prstGeom prst="rect">
+            <a:avLst/>
+          </a:prstGeom>
+          <a:noFill/>
+          <a:ln/>
+        </p:spPr>
+        <p:txBody>
+          <a:bodyPr wrap="square" lIns="0" tIns="0" rIns="0" bIns="0" rtlCol="0" anchor="ctr"/>
+          <a:lstStyle/>
+          <a:p>
+            <a:pPr algn="ctr" indent="0" marL="0">
+              <a:buNone/>
+            </a:pPr>
+            <a:r>
+              <a:rPr lang="en-US" sz="1100" b="1" dirty="0">
+                <a:solidFill>
+                  <a:srgbClr val="13161C"/>
+                </a:solidFill>
+                <a:latin typeface="Malgun Gothic" pitchFamily="34" charset="0"/>
+                <a:ea typeface="Malgun Gothic" pitchFamily="34" charset="-122"/>
+                <a:cs typeface="Malgun Gothic" pitchFamily="34" charset="-120"/>
+              </a:rPr>
+              <a:t>복사</a:t>
+            </a:r>
+            <a:endParaRPr lang="en-US" sz="1100" dirty="0"/>
+          </a:p>
+        </p:txBody>
+      </p:sp>
+      <p:sp>
+        <p:nvSpPr>
+          <p:cNvPr id="19" name="Text 17"/>
+          <p:cNvSpPr/>
+          <p:nvPr/>
+        </p:nvSpPr>
+        <p:spPr>
+          <a:xfrm>
+            <a:off x="548640" y="3429000"/>
+            <a:ext cx="2286000" cy="457200"/>
+          </a:xfrm>
+          <a:prstGeom prst="rect">
+            <a:avLst/>
+          </a:prstGeom>
+          <a:noFill/>
+          <a:ln/>
+        </p:spPr>
+        <p:txBody>
+          <a:bodyPr wrap="square" lIns="0" tIns="0" rIns="0" bIns="0" rtlCol="0" anchor="ctr"/>
+          <a:lstStyle/>
+          <a:p>
+            <a:pPr indent="0" marL="0">
+              <a:buNone/>
+            </a:pPr>
+            <a:r>
+              <a:rPr lang="en-US" sz="1400" b="1" dirty="0">
+                <a:solidFill>
+                  <a:srgbClr val="8CC63F"/>
+                </a:solidFill>
+                <a:latin typeface="Malgun Gothic" pitchFamily="34" charset="0"/>
+                <a:ea typeface="Malgun Gothic" pitchFamily="34" charset="-122"/>
+                <a:cs typeface="Malgun Gothic" pitchFamily="34" charset="-120"/>
+              </a:rPr>
+              <a:t>② 2 스트림</a:t>
+            </a:r>
+            <a:endParaRPr lang="en-US" sz="1400" dirty="0"/>
+          </a:p>
+        </p:txBody>
+      </p:sp>
+      <p:sp>
+        <p:nvSpPr>
+          <p:cNvPr id="20" name="Text 18"/>
+          <p:cNvSpPr/>
+          <p:nvPr/>
+        </p:nvSpPr>
+        <p:spPr>
+          <a:xfrm>
+            <a:off x="548640" y="3794760"/>
+            <a:ext cx="2286000" cy="365760"/>
+          </a:xfrm>
+          <a:prstGeom prst="rect">
+            <a:avLst/>
+          </a:prstGeom>
+          <a:noFill/>
+          <a:ln/>
+        </p:spPr>
+        <p:txBody>
+          <a:bodyPr wrap="square" lIns="0" tIns="0" rIns="0" bIns="0" rtlCol="0" anchor="ctr"/>
+          <a:lstStyle/>
+          <a:p>
+            <a:pPr indent="0" marL="0">
+              <a:buNone/>
+            </a:pPr>
+            <a:r>
+              <a:rPr lang="en-US" sz="1100" dirty="0">
+                <a:solidFill>
+                  <a:srgbClr val="9AA6B2"/>
+                </a:solidFill>
+                <a:latin typeface="Malgun Gothic" pitchFamily="34" charset="0"/>
+                <a:ea typeface="Malgun Gothic" pitchFamily="34" charset="-122"/>
+                <a:cs typeface="Malgun Gothic" pitchFamily="34" charset="-120"/>
+              </a:rPr>
+              <a:t>(겹침 overlap)</a:t>
+            </a:r>
+            <a:endParaRPr lang="en-US" sz="1100" dirty="0"/>
+          </a:p>
+        </p:txBody>
+      </p:sp>
+      <p:sp>
+        <p:nvSpPr>
+          <p:cNvPr id="21" name="Shape 19"/>
+          <p:cNvSpPr/>
+          <p:nvPr/>
+        </p:nvSpPr>
+        <p:spPr>
+          <a:xfrm>
+            <a:off x="3017520" y="3566160"/>
+            <a:ext cx="713232" cy="502920"/>
+          </a:xfrm>
+          <a:prstGeom prst="roundRect">
+            <a:avLst>
+              <a:gd name="adj" fmla="val 7273"/>
+            </a:avLst>
+          </a:prstGeom>
+          <a:solidFill>
+            <a:srgbClr val="4FB0C6"/>
+          </a:solidFill>
+          <a:ln/>
+        </p:spPr>
+      </p:sp>
+      <p:sp>
+        <p:nvSpPr>
+          <p:cNvPr id="22" name="Text 20"/>
+          <p:cNvSpPr/>
+          <p:nvPr/>
+        </p:nvSpPr>
+        <p:spPr>
+          <a:xfrm>
+            <a:off x="3017520" y="3566160"/>
+            <a:ext cx="713232" cy="502920"/>
+          </a:xfrm>
+          <a:prstGeom prst="rect">
+            <a:avLst/>
+          </a:prstGeom>
+          <a:noFill/>
+          <a:ln/>
+        </p:spPr>
+        <p:txBody>
+          <a:bodyPr wrap="square" lIns="0" tIns="0" rIns="0" bIns="0" rtlCol="0" anchor="ctr"/>
+          <a:lstStyle/>
+          <a:p>
+            <a:pPr algn="ctr" indent="0" marL="0">
+              <a:buNone/>
+            </a:pPr>
+            <a:r>
+              <a:rPr lang="en-US" sz="1100" b="1" dirty="0">
+                <a:solidFill>
+                  <a:srgbClr val="13161C"/>
+                </a:solidFill>
+                <a:latin typeface="Malgun Gothic" pitchFamily="34" charset="0"/>
+                <a:ea typeface="Malgun Gothic" pitchFamily="34" charset="-122"/>
+                <a:cs typeface="Malgun Gothic" pitchFamily="34" charset="-120"/>
+              </a:rPr>
+              <a:t>복사</a:t>
+            </a:r>
+            <a:endParaRPr lang="en-US" sz="1100" dirty="0"/>
+          </a:p>
+        </p:txBody>
+      </p:sp>
+      <p:sp>
+        <p:nvSpPr>
+          <p:cNvPr id="23" name="Shape 21"/>
+          <p:cNvSpPr/>
+          <p:nvPr/>
+        </p:nvSpPr>
+        <p:spPr>
+          <a:xfrm>
+            <a:off x="3767328" y="3566160"/>
+            <a:ext cx="1463040" cy="502920"/>
+          </a:xfrm>
+          <a:prstGeom prst="roundRect">
+            <a:avLst>
+              <a:gd name="adj" fmla="val 7273"/>
+            </a:avLst>
+          </a:prstGeom>
+          <a:solidFill>
+            <a:srgbClr val="8CC63F"/>
+          </a:solidFill>
+          <a:ln/>
+        </p:spPr>
+      </p:sp>
+      <p:sp>
+        <p:nvSpPr>
+          <p:cNvPr id="24" name="Text 22"/>
+          <p:cNvSpPr/>
+          <p:nvPr/>
+        </p:nvSpPr>
+        <p:spPr>
+          <a:xfrm>
+            <a:off x="3767328" y="3566160"/>
+            <a:ext cx="1463040" cy="502920"/>
+          </a:xfrm>
+          <a:prstGeom prst="rect">
+            <a:avLst/>
+          </a:prstGeom>
+          <a:noFill/>
+          <a:ln/>
+        </p:spPr>
+        <p:txBody>
+          <a:bodyPr wrap="square" lIns="0" tIns="0" rIns="0" bIns="0" rtlCol="0" anchor="ctr"/>
+          <a:lstStyle/>
+          <a:p>
+            <a:pPr algn="ctr" indent="0" marL="0">
+              <a:buNone/>
+            </a:pPr>
+            <a:r>
+              <a:rPr lang="en-US" sz="1100" b="1" dirty="0">
+                <a:solidFill>
+                  <a:srgbClr val="13161C"/>
+                </a:solidFill>
+                <a:latin typeface="Malgun Gothic" pitchFamily="34" charset="0"/>
+                <a:ea typeface="Malgun Gothic" pitchFamily="34" charset="-122"/>
+                <a:cs typeface="Malgun Gothic" pitchFamily="34" charset="-120"/>
+              </a:rPr>
+              <a:t>커널</a:t>
+            </a:r>
+            <a:endParaRPr lang="en-US" sz="1100" dirty="0"/>
+          </a:p>
+        </p:txBody>
+      </p:sp>
+      <p:sp>
+        <p:nvSpPr>
+          <p:cNvPr id="25" name="Shape 23"/>
+          <p:cNvSpPr/>
+          <p:nvPr/>
+        </p:nvSpPr>
+        <p:spPr>
+          <a:xfrm>
+            <a:off x="5266944" y="3566160"/>
+            <a:ext cx="713232" cy="502920"/>
+          </a:xfrm>
+          <a:prstGeom prst="roundRect">
+            <a:avLst>
+              <a:gd name="adj" fmla="val 7273"/>
+            </a:avLst>
+          </a:prstGeom>
+          <a:solidFill>
+            <a:srgbClr val="4FB0C6"/>
+          </a:solidFill>
+          <a:ln/>
+        </p:spPr>
+      </p:sp>
+      <p:sp>
+        <p:nvSpPr>
+          <p:cNvPr id="26" name="Text 24"/>
+          <p:cNvSpPr/>
+          <p:nvPr/>
+        </p:nvSpPr>
+        <p:spPr>
+          <a:xfrm>
+            <a:off x="5266944" y="3566160"/>
+            <a:ext cx="713232" cy="502920"/>
+          </a:xfrm>
+          <a:prstGeom prst="rect">
+            <a:avLst/>
+          </a:prstGeom>
+          <a:noFill/>
+          <a:ln/>
+        </p:spPr>
+        <p:txBody>
+          <a:bodyPr wrap="square" lIns="0" tIns="0" rIns="0" bIns="0" rtlCol="0" anchor="ctr"/>
+          <a:lstStyle/>
+          <a:p>
+            <a:pPr algn="ctr" indent="0" marL="0">
+              <a:buNone/>
+            </a:pPr>
+            <a:r>
+              <a:rPr lang="en-US" sz="1100" b="1" dirty="0">
+                <a:solidFill>
+                  <a:srgbClr val="13161C"/>
+                </a:solidFill>
+                <a:latin typeface="Malgun Gothic" pitchFamily="34" charset="0"/>
+                <a:ea typeface="Malgun Gothic" pitchFamily="34" charset="-122"/>
+                <a:cs typeface="Malgun Gothic" pitchFamily="34" charset="-120"/>
+              </a:rPr>
+              <a:t>복사</a:t>
+            </a:r>
+            <a:endParaRPr lang="en-US" sz="1100" dirty="0"/>
+          </a:p>
+        </p:txBody>
+      </p:sp>
+      <p:sp>
+        <p:nvSpPr>
+          <p:cNvPr id="27" name="Shape 25"/>
+          <p:cNvSpPr/>
+          <p:nvPr/>
+        </p:nvSpPr>
+        <p:spPr>
+          <a:xfrm>
+            <a:off x="3767328" y="4160520"/>
+            <a:ext cx="713232" cy="502920"/>
+          </a:xfrm>
+          <a:prstGeom prst="roundRect">
+            <a:avLst>
+              <a:gd name="adj" fmla="val 7273"/>
+            </a:avLst>
+          </a:prstGeom>
+          <a:solidFill>
+            <a:srgbClr val="4FB0C6"/>
+          </a:solidFill>
+          <a:ln/>
+        </p:spPr>
+      </p:sp>
+      <p:sp>
+        <p:nvSpPr>
+          <p:cNvPr id="28" name="Text 26"/>
+          <p:cNvSpPr/>
+          <p:nvPr/>
+        </p:nvSpPr>
+        <p:spPr>
+          <a:xfrm>
+            <a:off x="3767328" y="4160520"/>
+            <a:ext cx="713232" cy="502920"/>
+          </a:xfrm>
+          <a:prstGeom prst="rect">
+            <a:avLst/>
+          </a:prstGeom>
+          <a:noFill/>
+          <a:ln/>
+        </p:spPr>
+        <p:txBody>
+          <a:bodyPr wrap="square" lIns="0" tIns="0" rIns="0" bIns="0" rtlCol="0" anchor="ctr"/>
+          <a:lstStyle/>
+          <a:p>
+            <a:pPr algn="ctr" indent="0" marL="0">
+              <a:buNone/>
+            </a:pPr>
+            <a:r>
+              <a:rPr lang="en-US" sz="1100" b="1" dirty="0">
+                <a:solidFill>
+                  <a:srgbClr val="13161C"/>
+                </a:solidFill>
+                <a:latin typeface="Malgun Gothic" pitchFamily="34" charset="0"/>
+                <a:ea typeface="Malgun Gothic" pitchFamily="34" charset="-122"/>
+                <a:cs typeface="Malgun Gothic" pitchFamily="34" charset="-120"/>
+              </a:rPr>
+              <a:t>복사</a:t>
+            </a:r>
+            <a:endParaRPr lang="en-US" sz="1100" dirty="0"/>
+          </a:p>
+        </p:txBody>
+      </p:sp>
+      <p:sp>
+        <p:nvSpPr>
+          <p:cNvPr id="29" name="Shape 27"/>
+          <p:cNvSpPr/>
+          <p:nvPr/>
+        </p:nvSpPr>
+        <p:spPr>
+          <a:xfrm>
+            <a:off x="5266944" y="4160520"/>
+            <a:ext cx="1463040" cy="502920"/>
+          </a:xfrm>
+          <a:prstGeom prst="roundRect">
+            <a:avLst>
+              <a:gd name="adj" fmla="val 7273"/>
+            </a:avLst>
+          </a:prstGeom>
+          <a:solidFill>
+            <a:srgbClr val="8CC63F"/>
+          </a:solidFill>
+          <a:ln/>
+        </p:spPr>
+      </p:sp>
+      <p:sp>
+        <p:nvSpPr>
+          <p:cNvPr id="30" name="Text 28"/>
+          <p:cNvSpPr/>
+          <p:nvPr/>
+        </p:nvSpPr>
+        <p:spPr>
+          <a:xfrm>
+            <a:off x="5266944" y="4160520"/>
+            <a:ext cx="1463040" cy="502920"/>
+          </a:xfrm>
+          <a:prstGeom prst="rect">
+            <a:avLst/>
+          </a:prstGeom>
+          <a:noFill/>
+          <a:ln/>
+        </p:spPr>
+        <p:txBody>
+          <a:bodyPr wrap="square" lIns="0" tIns="0" rIns="0" bIns="0" rtlCol="0" anchor="ctr"/>
+          <a:lstStyle/>
+          <a:p>
+            <a:pPr algn="ctr" indent="0" marL="0">
+              <a:buNone/>
+            </a:pPr>
+            <a:r>
+              <a:rPr lang="en-US" sz="1100" b="1" dirty="0">
+                <a:solidFill>
+                  <a:srgbClr val="13161C"/>
+                </a:solidFill>
+                <a:latin typeface="Malgun Gothic" pitchFamily="34" charset="0"/>
+                <a:ea typeface="Malgun Gothic" pitchFamily="34" charset="-122"/>
+                <a:cs typeface="Malgun Gothic" pitchFamily="34" charset="-120"/>
+              </a:rPr>
+              <a:t>커널</a:t>
+            </a:r>
+            <a:endParaRPr lang="en-US" sz="1100" dirty="0"/>
+          </a:p>
+        </p:txBody>
+      </p:sp>
+      <p:sp>
+        <p:nvSpPr>
+          <p:cNvPr id="31" name="Shape 29"/>
+          <p:cNvSpPr/>
+          <p:nvPr/>
+        </p:nvSpPr>
+        <p:spPr>
+          <a:xfrm>
+            <a:off x="6766560" y="4160520"/>
+            <a:ext cx="713232" cy="502920"/>
+          </a:xfrm>
+          <a:prstGeom prst="roundRect">
+            <a:avLst>
+              <a:gd name="adj" fmla="val 7273"/>
+            </a:avLst>
+          </a:prstGeom>
+          <a:solidFill>
+            <a:srgbClr val="4FB0C6"/>
+          </a:solidFill>
+          <a:ln/>
+        </p:spPr>
+      </p:sp>
+      <p:sp>
+        <p:nvSpPr>
+          <p:cNvPr id="32" name="Text 30"/>
+          <p:cNvSpPr/>
+          <p:nvPr/>
+        </p:nvSpPr>
+        <p:spPr>
+          <a:xfrm>
+            <a:off x="6766560" y="4160520"/>
+            <a:ext cx="713232" cy="502920"/>
+          </a:xfrm>
+          <a:prstGeom prst="rect">
+            <a:avLst/>
+          </a:prstGeom>
+          <a:noFill/>
+          <a:ln/>
+        </p:spPr>
+        <p:txBody>
+          <a:bodyPr wrap="square" lIns="0" tIns="0" rIns="0" bIns="0" rtlCol="0" anchor="ctr"/>
+          <a:lstStyle/>
+          <a:p>
+            <a:pPr algn="ctr" indent="0" marL="0">
+              <a:buNone/>
+            </a:pPr>
+            <a:r>
+              <a:rPr lang="en-US" sz="1100" b="1" dirty="0">
+                <a:solidFill>
+                  <a:srgbClr val="13161C"/>
+                </a:solidFill>
+                <a:latin typeface="Malgun Gothic" pitchFamily="34" charset="0"/>
+                <a:ea typeface="Malgun Gothic" pitchFamily="34" charset="-122"/>
+                <a:cs typeface="Malgun Gothic" pitchFamily="34" charset="-120"/>
+              </a:rPr>
+              <a:t>복사</a:t>
+            </a:r>
+            <a:endParaRPr lang="en-US" sz="1100" dirty="0"/>
+          </a:p>
+        </p:txBody>
+      </p:sp>
+      <p:sp>
+        <p:nvSpPr>
+          <p:cNvPr id="33" name="Shape 31"/>
+          <p:cNvSpPr/>
+          <p:nvPr/>
+        </p:nvSpPr>
+        <p:spPr>
+          <a:xfrm>
+            <a:off x="7516368" y="4846320"/>
+            <a:ext cx="1499616" cy="0"/>
+          </a:xfrm>
+          <a:prstGeom prst="line">
+            <a:avLst/>
+          </a:prstGeom>
+          <a:noFill/>
+          <a:ln w="25400">
+            <a:solidFill>
+              <a:srgbClr val="E0A458"/>
+            </a:solidFill>
+            <a:prstDash val="solid"/>
+            <a:headEnd type="triangle"/>
+            <a:tailEnd type="triangle"/>
+          </a:ln>
+        </p:spPr>
+      </p:sp>
+      <p:sp>
+        <p:nvSpPr>
+          <p:cNvPr id="34" name="Text 32"/>
+          <p:cNvSpPr/>
+          <p:nvPr/>
+        </p:nvSpPr>
+        <p:spPr>
+          <a:xfrm>
+            <a:off x="7150608" y="4892040"/>
+            <a:ext cx="2231136" cy="320040"/>
+          </a:xfrm>
+          <a:prstGeom prst="rect">
+            <a:avLst/>
+          </a:prstGeom>
+          <a:noFill/>
+          <a:ln/>
+        </p:spPr>
+        <p:txBody>
+          <a:bodyPr wrap="square" lIns="0" tIns="0" rIns="0" bIns="0" rtlCol="0" anchor="ctr"/>
+          <a:lstStyle/>
+          <a:p>
+            <a:pPr algn="ctr" indent="0" marL="0">
+              <a:buNone/>
+            </a:pPr>
+            <a:r>
+              <a:rPr lang="en-US" sz="1100" b="1" dirty="0">
+                <a:solidFill>
+                  <a:srgbClr val="E0A458"/>
+                </a:solidFill>
+                <a:latin typeface="Malgun Gothic" pitchFamily="34" charset="0"/>
+                <a:ea typeface="Malgun Gothic" pitchFamily="34" charset="-122"/>
+                <a:cs typeface="Malgun Gothic" pitchFamily="34" charset="-120"/>
+              </a:rPr>
+              <a:t>절약된 시간</a:t>
+            </a:r>
+            <a:endParaRPr lang="en-US" sz="1100" dirty="0"/>
+          </a:p>
+        </p:txBody>
+      </p:sp>
+      <p:sp>
+        <p:nvSpPr>
+          <p:cNvPr id="35" name="Text 33"/>
+          <p:cNvSpPr/>
+          <p:nvPr/>
+        </p:nvSpPr>
+        <p:spPr>
+          <a:xfrm>
+            <a:off x="9107424" y="2103120"/>
+            <a:ext cx="1097280" cy="365760"/>
+          </a:xfrm>
+          <a:prstGeom prst="rect">
+            <a:avLst/>
+          </a:prstGeom>
+          <a:noFill/>
+          <a:ln/>
+        </p:spPr>
+        <p:txBody>
+          <a:bodyPr wrap="square" lIns="0" tIns="0" rIns="0" bIns="0" rtlCol="0" anchor="ctr"/>
+          <a:lstStyle/>
+          <a:p>
+            <a:pPr indent="0" marL="0">
+              <a:buNone/>
+            </a:pPr>
+            <a:r>
+              <a:rPr lang="en-US" sz="1100" i="1" dirty="0">
+                <a:solidFill>
+                  <a:srgbClr val="9AA6B2"/>
+                </a:solidFill>
+                <a:latin typeface="Malgun Gothic" pitchFamily="34" charset="0"/>
+                <a:ea typeface="Malgun Gothic" pitchFamily="34" charset="-122"/>
+                <a:cs typeface="Malgun Gothic" pitchFamily="34" charset="-120"/>
+              </a:rPr>
+              <a:t>→ 시간</a:t>
+            </a:r>
+            <a:endParaRPr lang="en-US" sz="1100" dirty="0"/>
+          </a:p>
+        </p:txBody>
+      </p:sp>
+      <p:sp>
+        <p:nvSpPr>
+          <p:cNvPr id="36" name="Shape 34"/>
+          <p:cNvSpPr/>
+          <p:nvPr/>
+        </p:nvSpPr>
+        <p:spPr>
+          <a:xfrm>
+            <a:off x="548640" y="5349240"/>
+            <a:ext cx="11064240" cy="1005840"/>
+          </a:xfrm>
+          <a:prstGeom prst="roundRect">
+            <a:avLst>
+              <a:gd name="adj" fmla="val 7273"/>
+            </a:avLst>
+          </a:prstGeom>
+          <a:solidFill>
             <a:srgbClr val="1E232C"/>
           </a:solidFill>
           <a:ln/>
@@ -3752,14 +4727,14 @@
       </p:sp>
       <p:sp>
         <p:nvSpPr>
-          <p:cNvPr id="8" name="Text 6"/>
-          <p:cNvSpPr/>
-          <p:nvPr/>
-        </p:nvSpPr>
-        <p:spPr>
-          <a:xfrm>
-            <a:off x="6537960" y="1828800"/>
-            <a:ext cx="4800600" cy="457200"/>
+          <p:cNvPr id="37" name="Text 35"/>
+          <p:cNvSpPr/>
+          <p:nvPr/>
+        </p:nvSpPr>
+        <p:spPr>
+          <a:xfrm>
+            <a:off x="822960" y="5532120"/>
+            <a:ext cx="10515600" cy="731520"/>
           </a:xfrm>
           <a:prstGeom prst="rect">
             <a:avLst/>
@@ -3772,10 +4747,13 @@
           <a:lstStyle/>
           <a:p>
             <a:pPr indent="0" marL="0">
-              <a:buNone/>
-            </a:pPr>
-            <a:r>
-              <a:rPr lang="en-US" sz="2000" b="1" dirty="0">
+              <a:lnSpc>
+                <a:spcPct val="115000"/>
+              </a:lnSpc>
+              <a:buNone/>
+            </a:pPr>
+            <a:r>
+              <a:rPr lang="en-US" sz="1400" b="1" dirty="0">
                 <a:solidFill>
                   <a:srgbClr val="E0A458"/>
                 </a:solidFill>
@@ -3783,42 +4761,16 @@
                 <a:ea typeface="Malgun Gothic" pitchFamily="34" charset="-122"/>
                 <a:cs typeface="Malgun Gothic" pitchFamily="34" charset="-120"/>
               </a:rPr>
-              <a:t>입문자 함정</a:t>
-            </a:r>
-            <a:endParaRPr lang="en-US" sz="2000" dirty="0"/>
-          </a:p>
-        </p:txBody>
-      </p:sp>
-      <p:sp>
-        <p:nvSpPr>
-          <p:cNvPr id="9" name="Text 7"/>
-          <p:cNvSpPr/>
-          <p:nvPr/>
-        </p:nvSpPr>
-        <p:spPr>
-          <a:xfrm>
-            <a:off x="6537960" y="2423160"/>
-            <a:ext cx="4800600" cy="3108960"/>
-          </a:xfrm>
-          <a:prstGeom prst="rect">
-            <a:avLst/>
-          </a:prstGeom>
-          <a:noFill/>
-          <a:ln/>
-        </p:spPr>
-        <p:txBody>
-          <a:bodyPr wrap="square" lIns="0" tIns="0" rIns="0" bIns="0" rtlCol="0" anchor="t"/>
-          <a:lstStyle/>
-          <a:p>
-            <a:pPr marL="342900" indent="-342900">
-              <a:spcAft>
-                <a:spcPts val="1200"/>
-              </a:spcAft>
-              <a:buSzPct val="100000"/>
-              <a:buChar char="✗"/>
-            </a:pPr>
-            <a:r>
-              <a:rPr lang="en-US" sz="1550" dirty="0">
+              <a:t>이 저장소: </a:t>
+            </a:r>
+            <a:pPr indent="0" marL="0">
+              <a:lnSpc>
+                <a:spcPct val="115000"/>
+              </a:lnSpc>
+              <a:buNone/>
+            </a:pPr>
+            <a:r>
+              <a:rPr lang="en-US" sz="1400" dirty="0">
                 <a:solidFill>
                   <a:srgbClr val="E8EDF2"/>
                 </a:solidFill>
@@ -3826,69 +4778,9 @@
                 <a:ea typeface="Malgun Gothic" pitchFamily="34" charset="-122"/>
                 <a:cs typeface="Malgun Gothic" pitchFamily="34" charset="-120"/>
               </a:rPr>
-              <a:t>스레드만 늘리면 무한히 빨라진다고 착각 → 포화점 존재</a:t>
-            </a:r>
-            <a:endParaRPr lang="en-US" sz="1550" dirty="0"/>
-          </a:p>
-          <a:p>
-            <a:pPr marL="342900" indent="-342900">
-              <a:spcAft>
-                <a:spcPts val="1200"/>
-              </a:spcAft>
-              <a:buSzPct val="100000"/>
-              <a:buChar char="✗"/>
-            </a:pPr>
-            <a:r>
-              <a:rPr lang="en-US" sz="1550" dirty="0">
-                <a:solidFill>
-                  <a:srgbClr val="E8EDF2"/>
-                </a:solidFill>
-                <a:latin typeface="Malgun Gothic" pitchFamily="34" charset="0"/>
-                <a:ea typeface="Malgun Gothic" pitchFamily="34" charset="-122"/>
-                <a:cs typeface="Malgun Gothic" pitchFamily="34" charset="-120"/>
-              </a:rPr>
-              <a:t>CPU 타이머로 커널 시간 측정 → 비동기라 부정확</a:t>
-            </a:r>
-            <a:endParaRPr lang="en-US" sz="1550" dirty="0"/>
-          </a:p>
-          <a:p>
-            <a:pPr marL="342900" indent="-342900">
-              <a:spcAft>
-                <a:spcPts val="1200"/>
-              </a:spcAft>
-              <a:buSzPct val="100000"/>
-              <a:buChar char="✗"/>
-            </a:pPr>
-            <a:r>
-              <a:rPr lang="en-US" sz="1550" dirty="0">
-                <a:solidFill>
-                  <a:srgbClr val="E8EDF2"/>
-                </a:solidFill>
-                <a:latin typeface="Malgun Gothic" pitchFamily="34" charset="0"/>
-                <a:ea typeface="Malgun Gothic" pitchFamily="34" charset="-122"/>
-                <a:cs typeface="Malgun Gothic" pitchFamily="34" charset="-120"/>
-              </a:rPr>
-              <a:t>접근 패턴을 흩뜨림 → 병합 깨져 대역폭 급락</a:t>
-            </a:r>
-            <a:endParaRPr lang="en-US" sz="1550" dirty="0"/>
-          </a:p>
-          <a:p>
-            <a:pPr marL="342900" indent="-342900">
-              <a:buSzPct val="100000"/>
-              <a:buChar char="✗"/>
-            </a:pPr>
-            <a:r>
-              <a:rPr lang="en-US" sz="1550" dirty="0">
-                <a:solidFill>
-                  <a:srgbClr val="E8EDF2"/>
-                </a:solidFill>
-                <a:latin typeface="Malgun Gothic" pitchFamily="34" charset="0"/>
-                <a:ea typeface="Malgun Gothic" pitchFamily="34" charset="-122"/>
-                <a:cs typeface="Malgun Gothic" pitchFamily="34" charset="-120"/>
-              </a:rPr>
-              <a:t>--verbose 안 줘서 대역폭 로그가 안 보임</a:t>
-            </a:r>
-            <a:endParaRPr lang="en-US" sz="1550" dirty="0"/>
+              <a:t>test10은 데이터가 이미 GPU에 있어 복사(H2D/D2H)가 없습니다 → 단일 스트림으로 충분합니다. 겹침은 복사와 연산이 섞이는 워크로드에서 빛을 봅니다.</a:t>
+            </a:r>
+            <a:endParaRPr lang="en-US" sz="1400" dirty="0"/>
           </a:p>
         </p:txBody>
       </p:sp>
@@ -3932,6 +4824,1185 @@
         </p:nvSpPr>
         <p:spPr>
           <a:xfrm>
+            <a:off x="548640" y="411480"/>
+            <a:ext cx="640080" cy="640080"/>
+          </a:xfrm>
+          <a:prstGeom prst="roundRect">
+            <a:avLst>
+              <a:gd name="adj" fmla="val 12857"/>
+            </a:avLst>
+          </a:prstGeom>
+          <a:solidFill>
+            <a:srgbClr val="8CC63F"/>
+          </a:solidFill>
+          <a:ln/>
+        </p:spPr>
+        <p:txBody>
+          <a:bodyPr wrap="square" rtlCol="0" anchor="ctr"/>
+          <a:lstStyle/>
+          <a:p>
+            <a:pPr algn="ctr" indent="0" marL="0">
+              <a:buNone/>
+            </a:pPr>
+            <a:r>
+              <a:rPr lang="en-US" sz="2200" b="1" dirty="0">
+                <a:solidFill>
+                  <a:srgbClr val="13161C"/>
+                </a:solidFill>
+                <a:latin typeface="Courier New" pitchFamily="34" charset="0"/>
+                <a:ea typeface="Courier New" pitchFamily="34" charset="-122"/>
+                <a:cs typeface="Courier New" pitchFamily="34" charset="-120"/>
+              </a:rPr>
+              <a:t>8</a:t>
+            </a:r>
+            <a:endParaRPr lang="en-US" sz="2200" dirty="0"/>
+          </a:p>
+        </p:txBody>
+      </p:sp>
+      <p:sp>
+        <p:nvSpPr>
+          <p:cNvPr id="3" name="Text 1"/>
+          <p:cNvSpPr/>
+          <p:nvPr/>
+        </p:nvSpPr>
+        <p:spPr>
+          <a:xfrm>
+            <a:off x="1325880" y="384048"/>
+            <a:ext cx="10287000" cy="694944"/>
+          </a:xfrm>
+          <a:prstGeom prst="rect">
+            <a:avLst/>
+          </a:prstGeom>
+          <a:noFill/>
+          <a:ln/>
+        </p:spPr>
+        <p:txBody>
+          <a:bodyPr wrap="square" lIns="0" tIns="0" rIns="0" bIns="0" rtlCol="0" anchor="ctr"/>
+          <a:lstStyle/>
+          <a:p>
+            <a:pPr algn="l" indent="0" marL="0">
+              <a:buNone/>
+            </a:pPr>
+            <a:r>
+              <a:rPr lang="en-US" sz="3000" b="1" dirty="0">
+                <a:solidFill>
+                  <a:srgbClr val="E8EDF2"/>
+                </a:solidFill>
+                <a:latin typeface="Malgun Gothic" pitchFamily="34" charset="0"/>
+                <a:ea typeface="Malgun Gothic" pitchFamily="34" charset="-122"/>
+                <a:cs typeface="Malgun Gothic" pitchFamily="34" charset="-120"/>
+              </a:rPr>
+              <a:t>실습 미리보기 · Lab 3</a:t>
+            </a:r>
+            <a:endParaRPr lang="en-US" sz="3000" dirty="0"/>
+          </a:p>
+        </p:txBody>
+      </p:sp>
+      <p:sp>
+        <p:nvSpPr>
+          <p:cNvPr id="4" name="Shape 2"/>
+          <p:cNvSpPr/>
+          <p:nvPr/>
+        </p:nvSpPr>
+        <p:spPr>
+          <a:xfrm>
+            <a:off x="548640" y="1554480"/>
+            <a:ext cx="5303520" cy="1965960"/>
+          </a:xfrm>
+          <a:prstGeom prst="roundRect">
+            <a:avLst>
+              <a:gd name="adj" fmla="val 3721"/>
+            </a:avLst>
+          </a:prstGeom>
+          <a:solidFill>
+            <a:srgbClr val="1E232C"/>
+          </a:solidFill>
+          <a:ln/>
+        </p:spPr>
+      </p:sp>
+      <p:sp>
+        <p:nvSpPr>
+          <p:cNvPr id="5" name="Text 3"/>
+          <p:cNvSpPr/>
+          <p:nvPr/>
+        </p:nvSpPr>
+        <p:spPr>
+          <a:xfrm>
+            <a:off x="804672" y="1755648"/>
+            <a:ext cx="1188720" cy="502920"/>
+          </a:xfrm>
+          <a:prstGeom prst="roundRect">
+            <a:avLst>
+              <a:gd name="adj" fmla="val 14545"/>
+            </a:avLst>
+          </a:prstGeom>
+          <a:solidFill>
+            <a:srgbClr val="8CC63F"/>
+          </a:solidFill>
+          <a:ln/>
+        </p:spPr>
+        <p:txBody>
+          <a:bodyPr wrap="square" rtlCol="0" anchor="ctr"/>
+          <a:lstStyle/>
+          <a:p>
+            <a:pPr algn="ctr" indent="0" marL="0">
+              <a:buNone/>
+            </a:pPr>
+            <a:r>
+              <a:rPr lang="en-US" sz="1700" b="1" dirty="0">
+                <a:solidFill>
+                  <a:srgbClr val="13161C"/>
+                </a:solidFill>
+                <a:latin typeface="Courier New" pitchFamily="34" charset="0"/>
+                <a:ea typeface="Courier New" pitchFamily="34" charset="-122"/>
+                <a:cs typeface="Courier New" pitchFamily="34" charset="-120"/>
+              </a:rPr>
+              <a:t>Ex 1</a:t>
+            </a:r>
+            <a:endParaRPr lang="en-US" sz="1700" dirty="0"/>
+          </a:p>
+        </p:txBody>
+      </p:sp>
+      <p:sp>
+        <p:nvSpPr>
+          <p:cNvPr id="6" name="Text 4"/>
+          <p:cNvSpPr/>
+          <p:nvPr/>
+        </p:nvSpPr>
+        <p:spPr>
+          <a:xfrm>
+            <a:off x="2148840" y="1773936"/>
+            <a:ext cx="3474720" cy="822960"/>
+          </a:xfrm>
+          <a:prstGeom prst="rect">
+            <a:avLst/>
+          </a:prstGeom>
+          <a:noFill/>
+          <a:ln/>
+        </p:spPr>
+        <p:txBody>
+          <a:bodyPr wrap="square" lIns="0" tIns="0" rIns="0" bIns="0" rtlCol="0" anchor="t"/>
+          <a:lstStyle/>
+          <a:p>
+            <a:pPr indent="0" marL="0">
+              <a:buNone/>
+            </a:pPr>
+            <a:r>
+              <a:rPr lang="en-US" sz="1700" b="1" dirty="0">
+                <a:solidFill>
+                  <a:srgbClr val="E8EDF2"/>
+                </a:solidFill>
+                <a:latin typeface="Malgun Gothic" pitchFamily="34" charset="0"/>
+                <a:ea typeface="Malgun Gothic" pitchFamily="34" charset="-122"/>
+                <a:cs typeface="Malgun Gothic" pitchFamily="34" charset="-120"/>
+              </a:rPr>
+              <a:t>느린 커널 vs 빠른 커널</a:t>
+            </a:r>
+            <a:endParaRPr lang="en-US" sz="1700" dirty="0"/>
+          </a:p>
+        </p:txBody>
+      </p:sp>
+      <p:sp>
+        <p:nvSpPr>
+          <p:cNvPr id="7" name="Text 5"/>
+          <p:cNvSpPr/>
+          <p:nvPr/>
+        </p:nvSpPr>
+        <p:spPr>
+          <a:xfrm>
+            <a:off x="804672" y="2651760"/>
+            <a:ext cx="4791456" cy="731520"/>
+          </a:xfrm>
+          <a:prstGeom prst="rect">
+            <a:avLst/>
+          </a:prstGeom>
+          <a:noFill/>
+          <a:ln/>
+        </p:spPr>
+        <p:txBody>
+          <a:bodyPr wrap="square" lIns="0" tIns="0" rIns="0" bIns="0" rtlCol="0" anchor="t"/>
+          <a:lstStyle/>
+          <a:p>
+            <a:pPr indent="0" marL="0">
+              <a:lnSpc>
+                <a:spcPct val="110000"/>
+              </a:lnSpc>
+              <a:buNone/>
+            </a:pPr>
+            <a:r>
+              <a:rPr lang="en-US" sz="1400" dirty="0">
+                <a:solidFill>
+                  <a:srgbClr val="9AA6B2"/>
+                </a:solidFill>
+                <a:latin typeface="Malgun Gothic" pitchFamily="34" charset="0"/>
+                <a:ea typeface="Malgun Gothic" pitchFamily="34" charset="-122"/>
+                <a:cs typeface="Malgun Gothic" pitchFamily="34" charset="-120"/>
+              </a:rPr>
+              <a:t>time으로 Test 3와 Test 10 실행 시간 비교</a:t>
+            </a:r>
+            <a:endParaRPr lang="en-US" sz="1400" dirty="0"/>
+          </a:p>
+        </p:txBody>
+      </p:sp>
+      <p:sp>
+        <p:nvSpPr>
+          <p:cNvPr id="8" name="Shape 6"/>
+          <p:cNvSpPr/>
+          <p:nvPr/>
+        </p:nvSpPr>
+        <p:spPr>
+          <a:xfrm>
+            <a:off x="6309360" y="1554480"/>
+            <a:ext cx="5303520" cy="1965960"/>
+          </a:xfrm>
+          <a:prstGeom prst="roundRect">
+            <a:avLst>
+              <a:gd name="adj" fmla="val 3721"/>
+            </a:avLst>
+          </a:prstGeom>
+          <a:solidFill>
+            <a:srgbClr val="1E232C"/>
+          </a:solidFill>
+          <a:ln/>
+        </p:spPr>
+      </p:sp>
+      <p:sp>
+        <p:nvSpPr>
+          <p:cNvPr id="9" name="Text 7"/>
+          <p:cNvSpPr/>
+          <p:nvPr/>
+        </p:nvSpPr>
+        <p:spPr>
+          <a:xfrm>
+            <a:off x="6565392" y="1755648"/>
+            <a:ext cx="1188720" cy="502920"/>
+          </a:xfrm>
+          <a:prstGeom prst="roundRect">
+            <a:avLst>
+              <a:gd name="adj" fmla="val 14545"/>
+            </a:avLst>
+          </a:prstGeom>
+          <a:solidFill>
+            <a:srgbClr val="4FB0C6"/>
+          </a:solidFill>
+          <a:ln/>
+        </p:spPr>
+        <p:txBody>
+          <a:bodyPr wrap="square" rtlCol="0" anchor="ctr"/>
+          <a:lstStyle/>
+          <a:p>
+            <a:pPr algn="ctr" indent="0" marL="0">
+              <a:buNone/>
+            </a:pPr>
+            <a:r>
+              <a:rPr lang="en-US" sz="1700" b="1" dirty="0">
+                <a:solidFill>
+                  <a:srgbClr val="13161C"/>
+                </a:solidFill>
+                <a:latin typeface="Courier New" pitchFamily="34" charset="0"/>
+                <a:ea typeface="Courier New" pitchFamily="34" charset="-122"/>
+                <a:cs typeface="Courier New" pitchFamily="34" charset="-120"/>
+              </a:rPr>
+              <a:t>Ex 2</a:t>
+            </a:r>
+            <a:endParaRPr lang="en-US" sz="1700" dirty="0"/>
+          </a:p>
+        </p:txBody>
+      </p:sp>
+      <p:sp>
+        <p:nvSpPr>
+          <p:cNvPr id="10" name="Text 8"/>
+          <p:cNvSpPr/>
+          <p:nvPr/>
+        </p:nvSpPr>
+        <p:spPr>
+          <a:xfrm>
+            <a:off x="7909560" y="1773936"/>
+            <a:ext cx="3474720" cy="822960"/>
+          </a:xfrm>
+          <a:prstGeom prst="rect">
+            <a:avLst/>
+          </a:prstGeom>
+          <a:noFill/>
+          <a:ln/>
+        </p:spPr>
+        <p:txBody>
+          <a:bodyPr wrap="square" lIns="0" tIns="0" rIns="0" bIns="0" rtlCol="0" anchor="t"/>
+          <a:lstStyle/>
+          <a:p>
+            <a:pPr indent="0" marL="0">
+              <a:buNone/>
+            </a:pPr>
+            <a:r>
+              <a:rPr lang="en-US" sz="1700" b="1" dirty="0">
+                <a:solidFill>
+                  <a:srgbClr val="E8EDF2"/>
+                </a:solidFill>
+                <a:latin typeface="Malgun Gothic" pitchFamily="34" charset="0"/>
+                <a:ea typeface="Malgun Gothic" pitchFamily="34" charset="-122"/>
+                <a:cs typeface="Malgun Gothic" pitchFamily="34" charset="-120"/>
+              </a:rPr>
+              <a:t>대역폭을 눈으로 보기</a:t>
+            </a:r>
+            <a:endParaRPr lang="en-US" sz="1700" dirty="0"/>
+          </a:p>
+        </p:txBody>
+      </p:sp>
+      <p:sp>
+        <p:nvSpPr>
+          <p:cNvPr id="11" name="Text 9"/>
+          <p:cNvSpPr/>
+          <p:nvPr/>
+        </p:nvSpPr>
+        <p:spPr>
+          <a:xfrm>
+            <a:off x="6565392" y="2651760"/>
+            <a:ext cx="4791456" cy="731520"/>
+          </a:xfrm>
+          <a:prstGeom prst="rect">
+            <a:avLst/>
+          </a:prstGeom>
+          <a:noFill/>
+          <a:ln/>
+        </p:spPr>
+        <p:txBody>
+          <a:bodyPr wrap="square" lIns="0" tIns="0" rIns="0" bIns="0" rtlCol="0" anchor="t"/>
+          <a:lstStyle/>
+          <a:p>
+            <a:pPr indent="0" marL="0">
+              <a:lnSpc>
+                <a:spcPct val="110000"/>
+              </a:lnSpc>
+              <a:buNone/>
+            </a:pPr>
+            <a:r>
+              <a:rPr lang="en-US" sz="1400" dirty="0">
+                <a:solidFill>
+                  <a:srgbClr val="9AA6B2"/>
+                </a:solidFill>
+                <a:latin typeface="Malgun Gothic" pitchFamily="34" charset="0"/>
+                <a:ea typeface="Malgun Gothic" pitchFamily="34" charset="-122"/>
+                <a:cs typeface="Malgun Gothic" pitchFamily="34" charset="-120"/>
+              </a:rPr>
+              <a:t>--verbose 로 test10의 bandwidth 로그 확인</a:t>
+            </a:r>
+            <a:endParaRPr lang="en-US" sz="1400" dirty="0"/>
+          </a:p>
+        </p:txBody>
+      </p:sp>
+      <p:sp>
+        <p:nvSpPr>
+          <p:cNvPr id="12" name="Shape 10"/>
+          <p:cNvSpPr/>
+          <p:nvPr/>
+        </p:nvSpPr>
+        <p:spPr>
+          <a:xfrm>
+            <a:off x="548640" y="3840480"/>
+            <a:ext cx="5303520" cy="1965960"/>
+          </a:xfrm>
+          <a:prstGeom prst="roundRect">
+            <a:avLst>
+              <a:gd name="adj" fmla="val 3721"/>
+            </a:avLst>
+          </a:prstGeom>
+          <a:solidFill>
+            <a:srgbClr val="1E232C"/>
+          </a:solidFill>
+          <a:ln/>
+        </p:spPr>
+      </p:sp>
+      <p:sp>
+        <p:nvSpPr>
+          <p:cNvPr id="13" name="Text 11"/>
+          <p:cNvSpPr/>
+          <p:nvPr/>
+        </p:nvSpPr>
+        <p:spPr>
+          <a:xfrm>
+            <a:off x="804672" y="4041648"/>
+            <a:ext cx="1188720" cy="502920"/>
+          </a:xfrm>
+          <a:prstGeom prst="roundRect">
+            <a:avLst>
+              <a:gd name="adj" fmla="val 14545"/>
+            </a:avLst>
+          </a:prstGeom>
+          <a:solidFill>
+            <a:srgbClr val="E0A458"/>
+          </a:solidFill>
+          <a:ln/>
+        </p:spPr>
+        <p:txBody>
+          <a:bodyPr wrap="square" rtlCol="0" anchor="ctr"/>
+          <a:lstStyle/>
+          <a:p>
+            <a:pPr algn="ctr" indent="0" marL="0">
+              <a:buNone/>
+            </a:pPr>
+            <a:r>
+              <a:rPr lang="en-US" sz="1700" b="1" dirty="0">
+                <a:solidFill>
+                  <a:srgbClr val="13161C"/>
+                </a:solidFill>
+                <a:latin typeface="Courier New" pitchFamily="34" charset="0"/>
+                <a:ea typeface="Courier New" pitchFamily="34" charset="-122"/>
+                <a:cs typeface="Courier New" pitchFamily="34" charset="-120"/>
+              </a:rPr>
+              <a:t>Ex 3</a:t>
+            </a:r>
+            <a:endParaRPr lang="en-US" sz="1700" dirty="0"/>
+          </a:p>
+        </p:txBody>
+      </p:sp>
+      <p:sp>
+        <p:nvSpPr>
+          <p:cNvPr id="14" name="Text 12"/>
+          <p:cNvSpPr/>
+          <p:nvPr/>
+        </p:nvSpPr>
+        <p:spPr>
+          <a:xfrm>
+            <a:off x="2148840" y="4059936"/>
+            <a:ext cx="3474720" cy="822960"/>
+          </a:xfrm>
+          <a:prstGeom prst="rect">
+            <a:avLst/>
+          </a:prstGeom>
+          <a:noFill/>
+          <a:ln/>
+        </p:spPr>
+        <p:txBody>
+          <a:bodyPr wrap="square" lIns="0" tIns="0" rIns="0" bIns="0" rtlCol="0" anchor="t"/>
+          <a:lstStyle/>
+          <a:p>
+            <a:pPr indent="0" marL="0">
+              <a:buNone/>
+            </a:pPr>
+            <a:r>
+              <a:rPr lang="en-US" sz="1700" b="1" dirty="0">
+                <a:solidFill>
+                  <a:srgbClr val="E8EDF2"/>
+                </a:solidFill>
+                <a:latin typeface="Malgun Gothic" pitchFamily="34" charset="0"/>
+                <a:ea typeface="Malgun Gothic" pitchFamily="34" charset="-122"/>
+                <a:cs typeface="Malgun Gothic" pitchFamily="34" charset="-120"/>
+              </a:rPr>
+              <a:t>블록 크기를 바꿔 측정</a:t>
+            </a:r>
+            <a:endParaRPr lang="en-US" sz="1700" dirty="0"/>
+          </a:p>
+        </p:txBody>
+      </p:sp>
+      <p:sp>
+        <p:nvSpPr>
+          <p:cNvPr id="15" name="Text 13"/>
+          <p:cNvSpPr/>
+          <p:nvPr/>
+        </p:nvSpPr>
+        <p:spPr>
+          <a:xfrm>
+            <a:off x="804672" y="4937760"/>
+            <a:ext cx="4791456" cy="731520"/>
+          </a:xfrm>
+          <a:prstGeom prst="rect">
+            <a:avLst/>
+          </a:prstGeom>
+          <a:noFill/>
+          <a:ln/>
+        </p:spPr>
+        <p:txBody>
+          <a:bodyPr wrap="square" lIns="0" tIns="0" rIns="0" bIns="0" rtlCol="0" anchor="t"/>
+          <a:lstStyle/>
+          <a:p>
+            <a:pPr indent="0" marL="0">
+              <a:lnSpc>
+                <a:spcPct val="110000"/>
+              </a:lnSpc>
+              <a:buNone/>
+            </a:pPr>
+            <a:r>
+              <a:rPr lang="en-US" sz="1400" dirty="0">
+                <a:solidFill>
+                  <a:srgbClr val="9AA6B2"/>
+                </a:solidFill>
+                <a:latin typeface="Malgun Gothic" pitchFamily="34" charset="0"/>
+                <a:ea typeface="Malgun Gothic" pitchFamily="34" charset="-122"/>
+                <a:cs typeface="Malgun Gothic" pitchFamily="34" charset="-120"/>
+              </a:rPr>
+              <a:t>STRESS_BLOCKSIZE 32~256 별 대역폭 표 작성</a:t>
+            </a:r>
+            <a:endParaRPr lang="en-US" sz="1400" dirty="0"/>
+          </a:p>
+        </p:txBody>
+      </p:sp>
+      <p:sp>
+        <p:nvSpPr>
+          <p:cNvPr id="16" name="Shape 14"/>
+          <p:cNvSpPr/>
+          <p:nvPr/>
+        </p:nvSpPr>
+        <p:spPr>
+          <a:xfrm>
+            <a:off x="6309360" y="3840480"/>
+            <a:ext cx="5303520" cy="1965960"/>
+          </a:xfrm>
+          <a:prstGeom prst="roundRect">
+            <a:avLst>
+              <a:gd name="adj" fmla="val 3721"/>
+            </a:avLst>
+          </a:prstGeom>
+          <a:solidFill>
+            <a:srgbClr val="1E232C"/>
+          </a:solidFill>
+          <a:ln/>
+        </p:spPr>
+      </p:sp>
+      <p:sp>
+        <p:nvSpPr>
+          <p:cNvPr id="17" name="Text 15"/>
+          <p:cNvSpPr/>
+          <p:nvPr/>
+        </p:nvSpPr>
+        <p:spPr>
+          <a:xfrm>
+            <a:off x="6565392" y="4041648"/>
+            <a:ext cx="1188720" cy="502920"/>
+          </a:xfrm>
+          <a:prstGeom prst="roundRect">
+            <a:avLst>
+              <a:gd name="adj" fmla="val 14545"/>
+            </a:avLst>
+          </a:prstGeom>
+          <a:solidFill>
+            <a:srgbClr val="8CC63F"/>
+          </a:solidFill>
+          <a:ln/>
+        </p:spPr>
+        <p:txBody>
+          <a:bodyPr wrap="square" rtlCol="0" anchor="ctr"/>
+          <a:lstStyle/>
+          <a:p>
+            <a:pPr algn="ctr" indent="0" marL="0">
+              <a:buNone/>
+            </a:pPr>
+            <a:r>
+              <a:rPr lang="en-US" sz="1700" b="1" dirty="0">
+                <a:solidFill>
+                  <a:srgbClr val="13161C"/>
+                </a:solidFill>
+                <a:latin typeface="Courier New" pitchFamily="34" charset="0"/>
+                <a:ea typeface="Courier New" pitchFamily="34" charset="-122"/>
+                <a:cs typeface="Courier New" pitchFamily="34" charset="-120"/>
+              </a:rPr>
+              <a:t>Ex 4</a:t>
+            </a:r>
+            <a:endParaRPr lang="en-US" sz="1700" dirty="0"/>
+          </a:p>
+        </p:txBody>
+      </p:sp>
+      <p:sp>
+        <p:nvSpPr>
+          <p:cNvPr id="18" name="Text 16"/>
+          <p:cNvSpPr/>
+          <p:nvPr/>
+        </p:nvSpPr>
+        <p:spPr>
+          <a:xfrm>
+            <a:off x="7909560" y="4059936"/>
+            <a:ext cx="3474720" cy="822960"/>
+          </a:xfrm>
+          <a:prstGeom prst="rect">
+            <a:avLst/>
+          </a:prstGeom>
+          <a:noFill/>
+          <a:ln/>
+        </p:spPr>
+        <p:txBody>
+          <a:bodyPr wrap="square" lIns="0" tIns="0" rIns="0" bIns="0" rtlCol="0" anchor="t"/>
+          <a:lstStyle/>
+          <a:p>
+            <a:pPr indent="0" marL="0">
+              <a:buNone/>
+            </a:pPr>
+            <a:r>
+              <a:rPr lang="en-US" sz="1700" b="1" dirty="0">
+                <a:solidFill>
+                  <a:srgbClr val="E8EDF2"/>
+                </a:solidFill>
+                <a:latin typeface="Malgun Gothic" pitchFamily="34" charset="0"/>
+                <a:ea typeface="Malgun Gothic" pitchFamily="34" charset="-122"/>
+                <a:cs typeface="Malgun Gothic" pitchFamily="34" charset="-120"/>
+              </a:rPr>
+              <a:t>메모리 병합 깨뜨리기</a:t>
+            </a:r>
+            <a:endParaRPr lang="en-US" sz="1700" dirty="0"/>
+          </a:p>
+        </p:txBody>
+      </p:sp>
+      <p:sp>
+        <p:nvSpPr>
+          <p:cNvPr id="19" name="Text 17"/>
+          <p:cNvSpPr/>
+          <p:nvPr/>
+        </p:nvSpPr>
+        <p:spPr>
+          <a:xfrm>
+            <a:off x="6565392" y="4937760"/>
+            <a:ext cx="4791456" cy="731520"/>
+          </a:xfrm>
+          <a:prstGeom prst="rect">
+            <a:avLst/>
+          </a:prstGeom>
+          <a:noFill/>
+          <a:ln/>
+        </p:spPr>
+        <p:txBody>
+          <a:bodyPr wrap="square" lIns="0" tIns="0" rIns="0" bIns="0" rtlCol="0" anchor="t"/>
+          <a:lstStyle/>
+          <a:p>
+            <a:pPr indent="0" marL="0">
+              <a:lnSpc>
+                <a:spcPct val="110000"/>
+              </a:lnSpc>
+              <a:buNone/>
+            </a:pPr>
+            <a:r>
+              <a:rPr lang="en-US" sz="1400" dirty="0">
+                <a:solidFill>
+                  <a:srgbClr val="9AA6B2"/>
+                </a:solidFill>
+                <a:latin typeface="Malgun Gothic" pitchFamily="34" charset="0"/>
+                <a:ea typeface="Malgun Gothic" pitchFamily="34" charset="-122"/>
+                <a:cs typeface="Malgun Gothic" pitchFamily="34" charset="-120"/>
+              </a:rPr>
+              <a:t>인덱스를 비병합으로 바꿔 대역폭 급락 관찰</a:t>
+            </a:r>
+            <a:endParaRPr lang="en-US" sz="1400" dirty="0"/>
+          </a:p>
+        </p:txBody>
+      </p:sp>
+      <p:sp>
+        <p:nvSpPr>
+          <p:cNvPr id="20" name="Text 18"/>
+          <p:cNvSpPr/>
+          <p:nvPr/>
+        </p:nvSpPr>
+        <p:spPr>
+          <a:xfrm>
+            <a:off x="548640" y="5943600"/>
+            <a:ext cx="11064240" cy="365760"/>
+          </a:xfrm>
+          <a:prstGeom prst="rect">
+            <a:avLst/>
+          </a:prstGeom>
+          <a:noFill/>
+          <a:ln/>
+        </p:spPr>
+        <p:txBody>
+          <a:bodyPr wrap="square" lIns="0" tIns="0" rIns="0" bIns="0" rtlCol="0" anchor="ctr"/>
+          <a:lstStyle/>
+          <a:p>
+            <a:pPr algn="ctr" indent="0" marL="0">
+              <a:buNone/>
+            </a:pPr>
+            <a:r>
+              <a:rPr lang="en-US" sz="1300" i="1" dirty="0">
+                <a:solidFill>
+                  <a:srgbClr val="9AA6B2"/>
+                </a:solidFill>
+                <a:latin typeface="Malgun Gothic" pitchFamily="34" charset="0"/>
+                <a:ea typeface="Malgun Gothic" pitchFamily="34" charset="-122"/>
+                <a:cs typeface="Malgun Gothic" pitchFamily="34" charset="-120"/>
+              </a:rPr>
+              <a:t>측정이 핵심입니다 — 대역폭 로그는 --verbose 없이는 출력되지 않습니다.</a:t>
+            </a:r>
+            <a:endParaRPr lang="en-US" sz="1300" dirty="0"/>
+          </a:p>
+        </p:txBody>
+      </p:sp>
+    </p:spTree>
+  </p:cSld>
+  <p:clrMapOvr>
+    <a:masterClrMapping/>
+  </p:clrMapOvr>
+</p:sld>
+</file>
+
+<file path=ppt/slides/slide14.xml><?xml version="1.0" encoding="utf-8"?>
+<p:sld xmlns:a="http://schemas.openxmlformats.org/drawingml/2006/main" xmlns:r="http://schemas.openxmlformats.org/officeDocument/2006/relationships" xmlns:p="http://schemas.openxmlformats.org/presentationml/2006/main">
+  <p:cSld name="Slide 14">
+    <p:bg>
+      <p:bgPr>
+        <a:solidFill>
+          <a:srgbClr val="13161C"/>
+        </a:solidFill>
+      </p:bgPr>
+    </p:bg>
+    <p:spTree>
+      <p:nvGrpSpPr>
+        <p:cNvPr id="1" name=""/>
+        <p:cNvGrpSpPr/>
+        <p:nvPr/>
+      </p:nvGrpSpPr>
+      <p:grpSpPr>
+        <a:xfrm>
+          <a:off x="0" y="0"/>
+          <a:ext cx="0" cy="0"/>
+          <a:chOff x="0" y="0"/>
+          <a:chExt cx="0" cy="0"/>
+        </a:xfrm>
+      </p:grpSpPr>
+      <p:sp>
+        <p:nvSpPr>
+          <p:cNvPr id="2" name="Text 0"/>
+          <p:cNvSpPr/>
+          <p:nvPr/>
+        </p:nvSpPr>
+        <p:spPr>
+          <a:xfrm>
+            <a:off x="548640" y="411480"/>
+            <a:ext cx="640080" cy="640080"/>
+          </a:xfrm>
+          <a:prstGeom prst="roundRect">
+            <a:avLst>
+              <a:gd name="adj" fmla="val 12857"/>
+            </a:avLst>
+          </a:prstGeom>
+          <a:solidFill>
+            <a:srgbClr val="8CC63F"/>
+          </a:solidFill>
+          <a:ln/>
+        </p:spPr>
+        <p:txBody>
+          <a:bodyPr wrap="square" rtlCol="0" anchor="ctr"/>
+          <a:lstStyle/>
+          <a:p>
+            <a:pPr algn="ctr" indent="0" marL="0">
+              <a:buNone/>
+            </a:pPr>
+            <a:r>
+              <a:rPr lang="en-US" sz="2200" b="1" dirty="0">
+                <a:solidFill>
+                  <a:srgbClr val="13161C"/>
+                </a:solidFill>
+                <a:latin typeface="Courier New" pitchFamily="34" charset="0"/>
+                <a:ea typeface="Courier New" pitchFamily="34" charset="-122"/>
+                <a:cs typeface="Courier New" pitchFamily="34" charset="-120"/>
+              </a:rPr>
+              <a:t>9</a:t>
+            </a:r>
+            <a:endParaRPr lang="en-US" sz="2200" dirty="0"/>
+          </a:p>
+        </p:txBody>
+      </p:sp>
+      <p:sp>
+        <p:nvSpPr>
+          <p:cNvPr id="3" name="Text 1"/>
+          <p:cNvSpPr/>
+          <p:nvPr/>
+        </p:nvSpPr>
+        <p:spPr>
+          <a:xfrm>
+            <a:off x="1325880" y="384048"/>
+            <a:ext cx="10287000" cy="694944"/>
+          </a:xfrm>
+          <a:prstGeom prst="rect">
+            <a:avLst/>
+          </a:prstGeom>
+          <a:noFill/>
+          <a:ln/>
+        </p:spPr>
+        <p:txBody>
+          <a:bodyPr wrap="square" lIns="0" tIns="0" rIns="0" bIns="0" rtlCol="0" anchor="ctr"/>
+          <a:lstStyle/>
+          <a:p>
+            <a:pPr algn="l" indent="0" marL="0">
+              <a:buNone/>
+            </a:pPr>
+            <a:r>
+              <a:rPr lang="en-US" sz="3000" b="1" dirty="0">
+                <a:solidFill>
+                  <a:srgbClr val="E8EDF2"/>
+                </a:solidFill>
+                <a:latin typeface="Malgun Gothic" pitchFamily="34" charset="0"/>
+                <a:ea typeface="Malgun Gothic" pitchFamily="34" charset="-122"/>
+                <a:cs typeface="Malgun Gothic" pitchFamily="34" charset="-120"/>
+              </a:rPr>
+              <a:t>핵심 정리 &amp; 자주 하는 실수</a:t>
+            </a:r>
+            <a:endParaRPr lang="en-US" sz="3000" dirty="0"/>
+          </a:p>
+        </p:txBody>
+      </p:sp>
+      <p:sp>
+        <p:nvSpPr>
+          <p:cNvPr id="4" name="Shape 2"/>
+          <p:cNvSpPr/>
+          <p:nvPr/>
+        </p:nvSpPr>
+        <p:spPr>
+          <a:xfrm>
+            <a:off x="548640" y="1600200"/>
+            <a:ext cx="5349240" cy="4114800"/>
+          </a:xfrm>
+          <a:prstGeom prst="roundRect">
+            <a:avLst>
+              <a:gd name="adj" fmla="val 1778"/>
+            </a:avLst>
+          </a:prstGeom>
+          <a:solidFill>
+            <a:srgbClr val="1E232C"/>
+          </a:solidFill>
+          <a:ln/>
+        </p:spPr>
+      </p:sp>
+      <p:sp>
+        <p:nvSpPr>
+          <p:cNvPr id="5" name="Text 3"/>
+          <p:cNvSpPr/>
+          <p:nvPr/>
+        </p:nvSpPr>
+        <p:spPr>
+          <a:xfrm>
+            <a:off x="822960" y="1828800"/>
+            <a:ext cx="4800600" cy="457200"/>
+          </a:xfrm>
+          <a:prstGeom prst="rect">
+            <a:avLst/>
+          </a:prstGeom>
+          <a:noFill/>
+          <a:ln/>
+        </p:spPr>
+        <p:txBody>
+          <a:bodyPr wrap="square" lIns="0" tIns="0" rIns="0" bIns="0" rtlCol="0" anchor="ctr"/>
+          <a:lstStyle/>
+          <a:p>
+            <a:pPr indent="0" marL="0">
+              <a:buNone/>
+            </a:pPr>
+            <a:r>
+              <a:rPr lang="en-US" sz="2000" b="1" dirty="0">
+                <a:solidFill>
+                  <a:srgbClr val="8CC63F"/>
+                </a:solidFill>
+                <a:latin typeface="Malgun Gothic" pitchFamily="34" charset="0"/>
+                <a:ea typeface="Malgun Gothic" pitchFamily="34" charset="-122"/>
+                <a:cs typeface="Malgun Gothic" pitchFamily="34" charset="-120"/>
+              </a:rPr>
+              <a:t>기억할 것</a:t>
+            </a:r>
+            <a:endParaRPr lang="en-US" sz="2000" dirty="0"/>
+          </a:p>
+        </p:txBody>
+      </p:sp>
+      <p:sp>
+        <p:nvSpPr>
+          <p:cNvPr id="6" name="Text 4"/>
+          <p:cNvSpPr/>
+          <p:nvPr/>
+        </p:nvSpPr>
+        <p:spPr>
+          <a:xfrm>
+            <a:off x="822960" y="2423160"/>
+            <a:ext cx="4800600" cy="3108960"/>
+          </a:xfrm>
+          <a:prstGeom prst="rect">
+            <a:avLst/>
+          </a:prstGeom>
+          <a:noFill/>
+          <a:ln/>
+        </p:spPr>
+        <p:txBody>
+          <a:bodyPr wrap="square" lIns="0" tIns="0" rIns="0" bIns="0" rtlCol="0" anchor="t"/>
+          <a:lstStyle/>
+          <a:p>
+            <a:pPr marL="342900" indent="-342900">
+              <a:spcAft>
+                <a:spcPts val="1200"/>
+              </a:spcAft>
+              <a:buSzPct val="100000"/>
+              <a:buChar char="✓"/>
+            </a:pPr>
+            <a:r>
+              <a:rPr lang="en-US" sz="1550" dirty="0">
+                <a:solidFill>
+                  <a:srgbClr val="E8EDF2"/>
+                </a:solidFill>
+                <a:latin typeface="Malgun Gothic" pitchFamily="34" charset="0"/>
+                <a:ea typeface="Malgun Gothic" pitchFamily="34" charset="-122"/>
+                <a:cs typeface="Malgun Gothic" pitchFamily="34" charset="-120"/>
+              </a:rPr>
+              <a:t>총 스레드 = 블록수 × 블록당 스레드</a:t>
+            </a:r>
+            <a:endParaRPr lang="en-US" sz="1550" dirty="0"/>
+          </a:p>
+          <a:p>
+            <a:pPr marL="342900" indent="-342900">
+              <a:spcAft>
+                <a:spcPts val="1200"/>
+              </a:spcAft>
+              <a:buSzPct val="100000"/>
+              <a:buChar char="✓"/>
+            </a:pPr>
+            <a:r>
+              <a:rPr lang="en-US" sz="1550" dirty="0">
+                <a:solidFill>
+                  <a:srgbClr val="E8EDF2"/>
+                </a:solidFill>
+                <a:latin typeface="Malgun Gothic" pitchFamily="34" charset="0"/>
+                <a:ea typeface="Malgun Gothic" pitchFamily="34" charset="-122"/>
+                <a:cs typeface="Malgun Gothic" pitchFamily="34" charset="-120"/>
+              </a:rPr>
+              <a:t>index = i*blockDim.x + threadIdx.x → 병합</a:t>
+            </a:r>
+            <a:endParaRPr lang="en-US" sz="1550" dirty="0"/>
+          </a:p>
+          <a:p>
+            <a:pPr marL="342900" indent="-342900">
+              <a:spcAft>
+                <a:spcPts val="1200"/>
+              </a:spcAft>
+              <a:buSzPct val="100000"/>
+              <a:buChar char="✓"/>
+            </a:pPr>
+            <a:r>
+              <a:rPr lang="en-US" sz="1550" dirty="0">
+                <a:solidFill>
+                  <a:srgbClr val="E8EDF2"/>
+                </a:solidFill>
+                <a:latin typeface="Malgun Gothic" pitchFamily="34" charset="0"/>
+                <a:ea typeface="Malgun Gothic" pitchFamily="34" charset="-122"/>
+                <a:cs typeface="Malgun Gothic" pitchFamily="34" charset="-120"/>
+              </a:rPr>
+              <a:t>커널은 비동기 → 이벤트로 시간 측정</a:t>
+            </a:r>
+            <a:endParaRPr lang="en-US" sz="1550" dirty="0"/>
+          </a:p>
+          <a:p>
+            <a:pPr marL="342900" indent="-342900">
+              <a:buSzPct val="100000"/>
+              <a:buChar char="✓"/>
+            </a:pPr>
+            <a:r>
+              <a:rPr lang="en-US" sz="1550" dirty="0">
+                <a:solidFill>
+                  <a:srgbClr val="E8EDF2"/>
+                </a:solidFill>
+                <a:latin typeface="Malgun Gothic" pitchFamily="34" charset="0"/>
+                <a:ea typeface="Malgun Gothic" pitchFamily="34" charset="-122"/>
+                <a:cs typeface="Malgun Gothic" pitchFamily="34" charset="-120"/>
+              </a:rPr>
+              <a:t>대역폭 = 전송량 ÷ 시간 (GB/s)</a:t>
+            </a:r>
+            <a:endParaRPr lang="en-US" sz="1550" dirty="0"/>
+          </a:p>
+        </p:txBody>
+      </p:sp>
+      <p:sp>
+        <p:nvSpPr>
+          <p:cNvPr id="7" name="Shape 5"/>
+          <p:cNvSpPr/>
+          <p:nvPr/>
+        </p:nvSpPr>
+        <p:spPr>
+          <a:xfrm>
+            <a:off x="6263640" y="1600200"/>
+            <a:ext cx="5349240" cy="4114800"/>
+          </a:xfrm>
+          <a:prstGeom prst="roundRect">
+            <a:avLst>
+              <a:gd name="adj" fmla="val 1778"/>
+            </a:avLst>
+          </a:prstGeom>
+          <a:solidFill>
+            <a:srgbClr val="1E232C"/>
+          </a:solidFill>
+          <a:ln/>
+        </p:spPr>
+      </p:sp>
+      <p:sp>
+        <p:nvSpPr>
+          <p:cNvPr id="8" name="Text 6"/>
+          <p:cNvSpPr/>
+          <p:nvPr/>
+        </p:nvSpPr>
+        <p:spPr>
+          <a:xfrm>
+            <a:off x="6537960" y="1828800"/>
+            <a:ext cx="4800600" cy="457200"/>
+          </a:xfrm>
+          <a:prstGeom prst="rect">
+            <a:avLst/>
+          </a:prstGeom>
+          <a:noFill/>
+          <a:ln/>
+        </p:spPr>
+        <p:txBody>
+          <a:bodyPr wrap="square" lIns="0" tIns="0" rIns="0" bIns="0" rtlCol="0" anchor="ctr"/>
+          <a:lstStyle/>
+          <a:p>
+            <a:pPr indent="0" marL="0">
+              <a:buNone/>
+            </a:pPr>
+            <a:r>
+              <a:rPr lang="en-US" sz="2000" b="1" dirty="0">
+                <a:solidFill>
+                  <a:srgbClr val="E0A458"/>
+                </a:solidFill>
+                <a:latin typeface="Malgun Gothic" pitchFamily="34" charset="0"/>
+                <a:ea typeface="Malgun Gothic" pitchFamily="34" charset="-122"/>
+                <a:cs typeface="Malgun Gothic" pitchFamily="34" charset="-120"/>
+              </a:rPr>
+              <a:t>입문자 함정</a:t>
+            </a:r>
+            <a:endParaRPr lang="en-US" sz="2000" dirty="0"/>
+          </a:p>
+        </p:txBody>
+      </p:sp>
+      <p:sp>
+        <p:nvSpPr>
+          <p:cNvPr id="9" name="Text 7"/>
+          <p:cNvSpPr/>
+          <p:nvPr/>
+        </p:nvSpPr>
+        <p:spPr>
+          <a:xfrm>
+            <a:off x="6537960" y="2423160"/>
+            <a:ext cx="4800600" cy="3108960"/>
+          </a:xfrm>
+          <a:prstGeom prst="rect">
+            <a:avLst/>
+          </a:prstGeom>
+          <a:noFill/>
+          <a:ln/>
+        </p:spPr>
+        <p:txBody>
+          <a:bodyPr wrap="square" lIns="0" tIns="0" rIns="0" bIns="0" rtlCol="0" anchor="t"/>
+          <a:lstStyle/>
+          <a:p>
+            <a:pPr marL="342900" indent="-342900">
+              <a:spcAft>
+                <a:spcPts val="1200"/>
+              </a:spcAft>
+              <a:buSzPct val="100000"/>
+              <a:buChar char="✗"/>
+            </a:pPr>
+            <a:r>
+              <a:rPr lang="en-US" sz="1550" dirty="0">
+                <a:solidFill>
+                  <a:srgbClr val="E8EDF2"/>
+                </a:solidFill>
+                <a:latin typeface="Malgun Gothic" pitchFamily="34" charset="0"/>
+                <a:ea typeface="Malgun Gothic" pitchFamily="34" charset="-122"/>
+                <a:cs typeface="Malgun Gothic" pitchFamily="34" charset="-120"/>
+              </a:rPr>
+              <a:t>스레드만 늘리면 무한히 빨라진다고 착각 → 포화점 존재</a:t>
+            </a:r>
+            <a:endParaRPr lang="en-US" sz="1550" dirty="0"/>
+          </a:p>
+          <a:p>
+            <a:pPr marL="342900" indent="-342900">
+              <a:spcAft>
+                <a:spcPts val="1200"/>
+              </a:spcAft>
+              <a:buSzPct val="100000"/>
+              <a:buChar char="✗"/>
+            </a:pPr>
+            <a:r>
+              <a:rPr lang="en-US" sz="1550" dirty="0">
+                <a:solidFill>
+                  <a:srgbClr val="E8EDF2"/>
+                </a:solidFill>
+                <a:latin typeface="Malgun Gothic" pitchFamily="34" charset="0"/>
+                <a:ea typeface="Malgun Gothic" pitchFamily="34" charset="-122"/>
+                <a:cs typeface="Malgun Gothic" pitchFamily="34" charset="-120"/>
+              </a:rPr>
+              <a:t>CPU 타이머로 커널 시간 측정 → 비동기라 부정확</a:t>
+            </a:r>
+            <a:endParaRPr lang="en-US" sz="1550" dirty="0"/>
+          </a:p>
+          <a:p>
+            <a:pPr marL="342900" indent="-342900">
+              <a:spcAft>
+                <a:spcPts val="1200"/>
+              </a:spcAft>
+              <a:buSzPct val="100000"/>
+              <a:buChar char="✗"/>
+            </a:pPr>
+            <a:r>
+              <a:rPr lang="en-US" sz="1550" dirty="0">
+                <a:solidFill>
+                  <a:srgbClr val="E8EDF2"/>
+                </a:solidFill>
+                <a:latin typeface="Malgun Gothic" pitchFamily="34" charset="0"/>
+                <a:ea typeface="Malgun Gothic" pitchFamily="34" charset="-122"/>
+                <a:cs typeface="Malgun Gothic" pitchFamily="34" charset="-120"/>
+              </a:rPr>
+              <a:t>접근 패턴을 흩뜨림 → 병합 깨져 대역폭 급락</a:t>
+            </a:r>
+            <a:endParaRPr lang="en-US" sz="1550" dirty="0"/>
+          </a:p>
+          <a:p>
+            <a:pPr marL="342900" indent="-342900">
+              <a:buSzPct val="100000"/>
+              <a:buChar char="✗"/>
+            </a:pPr>
+            <a:r>
+              <a:rPr lang="en-US" sz="1550" dirty="0">
+                <a:solidFill>
+                  <a:srgbClr val="E8EDF2"/>
+                </a:solidFill>
+                <a:latin typeface="Malgun Gothic" pitchFamily="34" charset="0"/>
+                <a:ea typeface="Malgun Gothic" pitchFamily="34" charset="-122"/>
+                <a:cs typeface="Malgun Gothic" pitchFamily="34" charset="-120"/>
+              </a:rPr>
+              <a:t>--verbose 안 줘서 대역폭 로그가 안 보임</a:t>
+            </a:r>
+            <a:endParaRPr lang="en-US" sz="1550" dirty="0"/>
+          </a:p>
+        </p:txBody>
+      </p:sp>
+    </p:spTree>
+  </p:cSld>
+  <p:clrMapOvr>
+    <a:masterClrMapping/>
+  </p:clrMapOvr>
+</p:sld>
+</file>
+
+<file path=ppt/slides/slide15.xml><?xml version="1.0" encoding="utf-8"?>
+<p:sld xmlns:a="http://schemas.openxmlformats.org/drawingml/2006/main" xmlns:r="http://schemas.openxmlformats.org/officeDocument/2006/relationships" xmlns:p="http://schemas.openxmlformats.org/presentationml/2006/main">
+  <p:cSld name="Slide 15">
+    <p:bg>
+      <p:bgPr>
+        <a:solidFill>
+          <a:srgbClr val="13161C"/>
+        </a:solidFill>
+      </p:bgPr>
+    </p:bg>
+    <p:spTree>
+      <p:nvGrpSpPr>
+        <p:cNvPr id="1" name=""/>
+        <p:cNvGrpSpPr/>
+        <p:nvPr/>
+      </p:nvGrpSpPr>
+      <p:grpSpPr>
+        <a:xfrm>
+          <a:off x="0" y="0"/>
+          <a:ext cx="0" cy="0"/>
+          <a:chOff x="0" y="0"/>
+          <a:chExt cx="0" cy="0"/>
+        </a:xfrm>
+      </p:grpSpPr>
+      <p:sp>
+        <p:nvSpPr>
+          <p:cNvPr id="2" name="Text 0"/>
+          <p:cNvSpPr/>
+          <p:nvPr/>
+        </p:nvSpPr>
+        <p:spPr>
+          <a:xfrm>
             <a:off x="548640" y="1463040"/>
             <a:ext cx="9144000" cy="457200"/>
           </a:xfrm>
@@ -11104,7 +13175,7 @@
                 <a:ea typeface="Courier New" pitchFamily="34" charset="-122"/>
                 <a:cs typeface="Courier New" pitchFamily="34" charset="-120"/>
               </a:rPr>
-              <a:t>5</a:t>
+              <a:t>4</a:t>
             </a:r>
             <a:endParaRPr lang="en-US" sz="2200" dirty="0"/>
           </a:p>
@@ -11143,7 +13214,7 @@
                 <a:ea typeface="Malgun Gothic" pitchFamily="34" charset="-122"/>
                 <a:cs typeface="Malgun Gothic" pitchFamily="34" charset="-120"/>
               </a:rPr>
-              <a:t>CUDA 이벤트로 시간 재기</a:t>
+              <a:t>공유 메모리 뱅크 충돌(bank conflict)</a:t>
             </a:r>
             <a:endParaRPr lang="en-US" sz="3000" dirty="0"/>
           </a:p>
@@ -11151,18 +13222,149 @@
       </p:sp>
       <p:sp>
         <p:nvSpPr>
-          <p:cNvPr id="4" name="Shape 2"/>
-          <p:cNvSpPr/>
-          <p:nvPr/>
-        </p:nvSpPr>
-        <p:spPr>
-          <a:xfrm>
-            <a:off x="548640" y="1554480"/>
-            <a:ext cx="11064240" cy="2743200"/>
+          <p:cNvPr id="4" name="Text 2"/>
+          <p:cNvSpPr/>
+          <p:nvPr/>
+        </p:nvSpPr>
+        <p:spPr>
+          <a:xfrm>
+            <a:off x="548640" y="1371600"/>
+            <a:ext cx="11064240" cy="548640"/>
+          </a:xfrm>
+          <a:prstGeom prst="rect">
+            <a:avLst/>
+          </a:prstGeom>
+          <a:noFill/>
+          <a:ln/>
+        </p:spPr>
+        <p:txBody>
+          <a:bodyPr wrap="square" lIns="0" tIns="0" rIns="0" bIns="0" rtlCol="0" anchor="t"/>
+          <a:lstStyle/>
+          <a:p>
+            <a:pPr indent="0" marL="0">
+              <a:buNone/>
+            </a:pPr>
+            <a:r>
+              <a:rPr lang="en-US" sz="1350" b="1" dirty="0">
+                <a:solidFill>
+                  <a:srgbClr val="E0A458"/>
+                </a:solidFill>
+                <a:latin typeface="Malgun Gothic" pitchFamily="34" charset="0"/>
+                <a:ea typeface="Malgun Gothic" pitchFamily="34" charset="-122"/>
+                <a:cs typeface="Malgun Gothic" pitchFamily="34" charset="-120"/>
+              </a:rPr>
+              <a:t>심화 참고 — </a:t>
+            </a:r>
+            <a:pPr indent="0" marL="0">
+              <a:buNone/>
+            </a:pPr>
+            <a:r>
+              <a:rPr lang="en-US" sz="1350" dirty="0">
+                <a:solidFill>
+                  <a:srgbClr val="9AA6B2"/>
+                </a:solidFill>
+                <a:latin typeface="Malgun Gothic" pitchFamily="34" charset="0"/>
+                <a:ea typeface="Malgun Gothic" pitchFamily="34" charset="-122"/>
+                <a:cs typeface="Malgun Gothic" pitchFamily="34" charset="-120"/>
+              </a:rPr>
+              <a:t>공유 메모리(shared) 접근 패턴 이야기입니다. 이 저장소는 공유 메모리를 거의 쓰지 않지만, 코얼레싱과 짝을 이루는 개념이라 소개합니다.</a:t>
+            </a:r>
+            <a:endParaRPr lang="en-US" sz="1350" dirty="0"/>
+          </a:p>
+        </p:txBody>
+      </p:sp>
+      <p:sp>
+        <p:nvSpPr>
+          <p:cNvPr id="5" name="Text 3"/>
+          <p:cNvSpPr/>
+          <p:nvPr/>
+        </p:nvSpPr>
+        <p:spPr>
+          <a:xfrm>
+            <a:off x="548640" y="1965960"/>
+            <a:ext cx="11064240" cy="365760"/>
+          </a:xfrm>
+          <a:prstGeom prst="rect">
+            <a:avLst/>
+          </a:prstGeom>
+          <a:noFill/>
+          <a:ln/>
+        </p:spPr>
+        <p:txBody>
+          <a:bodyPr wrap="square" lIns="0" tIns="0" rIns="0" bIns="0" rtlCol="0" anchor="ctr"/>
+          <a:lstStyle/>
+          <a:p>
+            <a:pPr indent="0" marL="0">
+              <a:buNone/>
+            </a:pPr>
+            <a:r>
+              <a:rPr lang="en-US" sz="1400" dirty="0">
+                <a:solidFill>
+                  <a:srgbClr val="9AA6B2"/>
+                </a:solidFill>
+                <a:latin typeface="Malgun Gothic" pitchFamily="34" charset="0"/>
+                <a:ea typeface="Malgun Gothic" pitchFamily="34" charset="-122"/>
+                <a:cs typeface="Malgun Gothic" pitchFamily="34" charset="-120"/>
+              </a:rPr>
+              <a:t>공유 메모리는 32개 뱅크(bank)로 나뉩니다. 한 워프가 같은 뱅크의 서로 다른 주소에 접근하면 순차화됩니다.</a:t>
+            </a:r>
+            <a:endParaRPr lang="en-US" sz="1400" dirty="0"/>
+          </a:p>
+        </p:txBody>
+      </p:sp>
+      <p:sp>
+        <p:nvSpPr>
+          <p:cNvPr id="6" name="Text 4"/>
+          <p:cNvSpPr/>
+          <p:nvPr/>
+        </p:nvSpPr>
+        <p:spPr>
+          <a:xfrm>
+            <a:off x="548640" y="2514600"/>
+            <a:ext cx="2194560" cy="502920"/>
+          </a:xfrm>
+          <a:prstGeom prst="rect">
+            <a:avLst/>
+          </a:prstGeom>
+          <a:noFill/>
+          <a:ln/>
+        </p:spPr>
+        <p:txBody>
+          <a:bodyPr wrap="square" lIns="0" tIns="0" rIns="0" bIns="0" rtlCol="0" anchor="ctr"/>
+          <a:lstStyle/>
+          <a:p>
+            <a:pPr indent="0" marL="0">
+              <a:buNone/>
+            </a:pPr>
+            <a:r>
+              <a:rPr lang="en-US" sz="1400" b="1" dirty="0">
+                <a:solidFill>
+                  <a:srgbClr val="8CC63F"/>
+                </a:solidFill>
+                <a:latin typeface="Malgun Gothic" pitchFamily="34" charset="0"/>
+                <a:ea typeface="Malgun Gothic" pitchFamily="34" charset="-122"/>
+                <a:cs typeface="Malgun Gothic" pitchFamily="34" charset="-120"/>
+              </a:rPr>
+              <a:t>충돌 없음</a:t>
+            </a:r>
+            <a:endParaRPr lang="en-US" sz="1400" dirty="0"/>
+          </a:p>
+        </p:txBody>
+      </p:sp>
+      <p:sp>
+        <p:nvSpPr>
+          <p:cNvPr id="7" name="Shape 5"/>
+          <p:cNvSpPr/>
+          <p:nvPr/>
+        </p:nvSpPr>
+        <p:spPr>
+          <a:xfrm>
+            <a:off x="3017520" y="2468880"/>
+            <a:ext cx="548640" cy="566928"/>
           </a:xfrm>
           <a:prstGeom prst="roundRect">
             <a:avLst>
-              <a:gd name="adj" fmla="val 2000"/>
+              <a:gd name="adj" fmla="val 8333"/>
             </a:avLst>
           </a:prstGeom>
           <a:solidFill>
@@ -11178,73 +13380,609 @@
       </p:sp>
       <p:sp>
         <p:nvSpPr>
-          <p:cNvPr id="5" name="Text 3"/>
-          <p:cNvSpPr/>
-          <p:nvPr/>
-        </p:nvSpPr>
-        <p:spPr>
-          <a:xfrm>
-            <a:off x="749808" y="1700784"/>
-            <a:ext cx="10661904" cy="2450592"/>
-          </a:xfrm>
-          <a:prstGeom prst="rect">
-            <a:avLst/>
-          </a:prstGeom>
-          <a:noFill/>
-          <a:ln/>
-        </p:spPr>
-        <p:txBody>
-          <a:bodyPr wrap="square" lIns="0" tIns="0" rIns="0" bIns="0" rtlCol="0" anchor="t"/>
-          <a:lstStyle/>
-          <a:p>
-            <a:pPr algn="l" indent="0" marL="0">
-              <a:lnSpc>
-                <a:spcPct val="108000"/>
-              </a:lnSpc>
-              <a:buNone/>
-            </a:pPr>
-            <a:r>
-              <a:rPr lang="en-US" sz="1300" dirty="0">
+          <p:cNvPr id="8" name="Text 6"/>
+          <p:cNvSpPr/>
+          <p:nvPr/>
+        </p:nvSpPr>
+        <p:spPr>
+          <a:xfrm>
+            <a:off x="3017520" y="2505456"/>
+            <a:ext cx="548640" cy="256032"/>
+          </a:xfrm>
+          <a:prstGeom prst="rect">
+            <a:avLst/>
+          </a:prstGeom>
+          <a:noFill/>
+          <a:ln/>
+        </p:spPr>
+        <p:txBody>
+          <a:bodyPr wrap="square" lIns="0" tIns="0" rIns="0" bIns="0" rtlCol="0" anchor="ctr"/>
+          <a:lstStyle/>
+          <a:p>
+            <a:pPr algn="ctr" indent="0" marL="0">
+              <a:buNone/>
+            </a:pPr>
+            <a:r>
+              <a:rPr lang="en-US" sz="900" dirty="0">
                 <a:solidFill>
                   <a:srgbClr val="9AA6B2"/>
+                </a:solidFill>
+                <a:latin typeface="Malgun Gothic" pitchFamily="34" charset="0"/>
+                <a:ea typeface="Malgun Gothic" pitchFamily="34" charset="-122"/>
+                <a:cs typeface="Malgun Gothic" pitchFamily="34" charset="-120"/>
+              </a:rPr>
+              <a:t>B0</a:t>
+            </a:r>
+            <a:endParaRPr lang="en-US" sz="900" dirty="0"/>
+          </a:p>
+        </p:txBody>
+      </p:sp>
+      <p:sp>
+        <p:nvSpPr>
+          <p:cNvPr id="9" name="Shape 7"/>
+          <p:cNvSpPr/>
+          <p:nvPr/>
+        </p:nvSpPr>
+        <p:spPr>
+          <a:xfrm>
+            <a:off x="3657600" y="2468880"/>
+            <a:ext cx="548640" cy="566928"/>
+          </a:xfrm>
+          <a:prstGeom prst="roundRect">
+            <a:avLst>
+              <a:gd name="adj" fmla="val 8333"/>
+            </a:avLst>
+          </a:prstGeom>
+          <a:solidFill>
+            <a:srgbClr val="0E1116"/>
+          </a:solidFill>
+          <a:ln w="12700">
+            <a:solidFill>
+              <a:srgbClr val="2C3440"/>
+            </a:solidFill>
+            <a:prstDash val="solid"/>
+          </a:ln>
+        </p:spPr>
+      </p:sp>
+      <p:sp>
+        <p:nvSpPr>
+          <p:cNvPr id="10" name="Text 8"/>
+          <p:cNvSpPr/>
+          <p:nvPr/>
+        </p:nvSpPr>
+        <p:spPr>
+          <a:xfrm>
+            <a:off x="3657600" y="2505456"/>
+            <a:ext cx="548640" cy="256032"/>
+          </a:xfrm>
+          <a:prstGeom prst="rect">
+            <a:avLst/>
+          </a:prstGeom>
+          <a:noFill/>
+          <a:ln/>
+        </p:spPr>
+        <p:txBody>
+          <a:bodyPr wrap="square" lIns="0" tIns="0" rIns="0" bIns="0" rtlCol="0" anchor="ctr"/>
+          <a:lstStyle/>
+          <a:p>
+            <a:pPr algn="ctr" indent="0" marL="0">
+              <a:buNone/>
+            </a:pPr>
+            <a:r>
+              <a:rPr lang="en-US" sz="900" dirty="0">
+                <a:solidFill>
+                  <a:srgbClr val="9AA6B2"/>
+                </a:solidFill>
+                <a:latin typeface="Malgun Gothic" pitchFamily="34" charset="0"/>
+                <a:ea typeface="Malgun Gothic" pitchFamily="34" charset="-122"/>
+                <a:cs typeface="Malgun Gothic" pitchFamily="34" charset="-120"/>
+              </a:rPr>
+              <a:t>B1</a:t>
+            </a:r>
+            <a:endParaRPr lang="en-US" sz="900" dirty="0"/>
+          </a:p>
+        </p:txBody>
+      </p:sp>
+      <p:sp>
+        <p:nvSpPr>
+          <p:cNvPr id="11" name="Shape 9"/>
+          <p:cNvSpPr/>
+          <p:nvPr/>
+        </p:nvSpPr>
+        <p:spPr>
+          <a:xfrm>
+            <a:off x="4297680" y="2468880"/>
+            <a:ext cx="548640" cy="566928"/>
+          </a:xfrm>
+          <a:prstGeom prst="roundRect">
+            <a:avLst>
+              <a:gd name="adj" fmla="val 8333"/>
+            </a:avLst>
+          </a:prstGeom>
+          <a:solidFill>
+            <a:srgbClr val="0E1116"/>
+          </a:solidFill>
+          <a:ln w="12700">
+            <a:solidFill>
+              <a:srgbClr val="2C3440"/>
+            </a:solidFill>
+            <a:prstDash val="solid"/>
+          </a:ln>
+        </p:spPr>
+      </p:sp>
+      <p:sp>
+        <p:nvSpPr>
+          <p:cNvPr id="12" name="Text 10"/>
+          <p:cNvSpPr/>
+          <p:nvPr/>
+        </p:nvSpPr>
+        <p:spPr>
+          <a:xfrm>
+            <a:off x="4297680" y="2505456"/>
+            <a:ext cx="548640" cy="256032"/>
+          </a:xfrm>
+          <a:prstGeom prst="rect">
+            <a:avLst/>
+          </a:prstGeom>
+          <a:noFill/>
+          <a:ln/>
+        </p:spPr>
+        <p:txBody>
+          <a:bodyPr wrap="square" lIns="0" tIns="0" rIns="0" bIns="0" rtlCol="0" anchor="ctr"/>
+          <a:lstStyle/>
+          <a:p>
+            <a:pPr algn="ctr" indent="0" marL="0">
+              <a:buNone/>
+            </a:pPr>
+            <a:r>
+              <a:rPr lang="en-US" sz="900" dirty="0">
+                <a:solidFill>
+                  <a:srgbClr val="9AA6B2"/>
+                </a:solidFill>
+                <a:latin typeface="Malgun Gothic" pitchFamily="34" charset="0"/>
+                <a:ea typeface="Malgun Gothic" pitchFamily="34" charset="-122"/>
+                <a:cs typeface="Malgun Gothic" pitchFamily="34" charset="-120"/>
+              </a:rPr>
+              <a:t>B2</a:t>
+            </a:r>
+            <a:endParaRPr lang="en-US" sz="900" dirty="0"/>
+          </a:p>
+        </p:txBody>
+      </p:sp>
+      <p:sp>
+        <p:nvSpPr>
+          <p:cNvPr id="13" name="Shape 11"/>
+          <p:cNvSpPr/>
+          <p:nvPr/>
+        </p:nvSpPr>
+        <p:spPr>
+          <a:xfrm>
+            <a:off x="4937760" y="2468880"/>
+            <a:ext cx="548640" cy="566928"/>
+          </a:xfrm>
+          <a:prstGeom prst="roundRect">
+            <a:avLst>
+              <a:gd name="adj" fmla="val 8333"/>
+            </a:avLst>
+          </a:prstGeom>
+          <a:solidFill>
+            <a:srgbClr val="0E1116"/>
+          </a:solidFill>
+          <a:ln w="12700">
+            <a:solidFill>
+              <a:srgbClr val="2C3440"/>
+            </a:solidFill>
+            <a:prstDash val="solid"/>
+          </a:ln>
+        </p:spPr>
+      </p:sp>
+      <p:sp>
+        <p:nvSpPr>
+          <p:cNvPr id="14" name="Text 12"/>
+          <p:cNvSpPr/>
+          <p:nvPr/>
+        </p:nvSpPr>
+        <p:spPr>
+          <a:xfrm>
+            <a:off x="4937760" y="2505456"/>
+            <a:ext cx="548640" cy="256032"/>
+          </a:xfrm>
+          <a:prstGeom prst="rect">
+            <a:avLst/>
+          </a:prstGeom>
+          <a:noFill/>
+          <a:ln/>
+        </p:spPr>
+        <p:txBody>
+          <a:bodyPr wrap="square" lIns="0" tIns="0" rIns="0" bIns="0" rtlCol="0" anchor="ctr"/>
+          <a:lstStyle/>
+          <a:p>
+            <a:pPr algn="ctr" indent="0" marL="0">
+              <a:buNone/>
+            </a:pPr>
+            <a:r>
+              <a:rPr lang="en-US" sz="900" dirty="0">
+                <a:solidFill>
+                  <a:srgbClr val="9AA6B2"/>
+                </a:solidFill>
+                <a:latin typeface="Malgun Gothic" pitchFamily="34" charset="0"/>
+                <a:ea typeface="Malgun Gothic" pitchFamily="34" charset="-122"/>
+                <a:cs typeface="Malgun Gothic" pitchFamily="34" charset="-120"/>
+              </a:rPr>
+              <a:t>B3</a:t>
+            </a:r>
+            <a:endParaRPr lang="en-US" sz="900" dirty="0"/>
+          </a:p>
+        </p:txBody>
+      </p:sp>
+      <p:sp>
+        <p:nvSpPr>
+          <p:cNvPr id="15" name="Shape 13"/>
+          <p:cNvSpPr/>
+          <p:nvPr/>
+        </p:nvSpPr>
+        <p:spPr>
+          <a:xfrm>
+            <a:off x="5577840" y="2468880"/>
+            <a:ext cx="548640" cy="566928"/>
+          </a:xfrm>
+          <a:prstGeom prst="roundRect">
+            <a:avLst>
+              <a:gd name="adj" fmla="val 8333"/>
+            </a:avLst>
+          </a:prstGeom>
+          <a:solidFill>
+            <a:srgbClr val="0E1116"/>
+          </a:solidFill>
+          <a:ln w="12700">
+            <a:solidFill>
+              <a:srgbClr val="2C3440"/>
+            </a:solidFill>
+            <a:prstDash val="solid"/>
+          </a:ln>
+        </p:spPr>
+      </p:sp>
+      <p:sp>
+        <p:nvSpPr>
+          <p:cNvPr id="16" name="Text 14"/>
+          <p:cNvSpPr/>
+          <p:nvPr/>
+        </p:nvSpPr>
+        <p:spPr>
+          <a:xfrm>
+            <a:off x="5577840" y="2505456"/>
+            <a:ext cx="548640" cy="256032"/>
+          </a:xfrm>
+          <a:prstGeom prst="rect">
+            <a:avLst/>
+          </a:prstGeom>
+          <a:noFill/>
+          <a:ln/>
+        </p:spPr>
+        <p:txBody>
+          <a:bodyPr wrap="square" lIns="0" tIns="0" rIns="0" bIns="0" rtlCol="0" anchor="ctr"/>
+          <a:lstStyle/>
+          <a:p>
+            <a:pPr algn="ctr" indent="0" marL="0">
+              <a:buNone/>
+            </a:pPr>
+            <a:r>
+              <a:rPr lang="en-US" sz="900" dirty="0">
+                <a:solidFill>
+                  <a:srgbClr val="9AA6B2"/>
+                </a:solidFill>
+                <a:latin typeface="Malgun Gothic" pitchFamily="34" charset="0"/>
+                <a:ea typeface="Malgun Gothic" pitchFamily="34" charset="-122"/>
+                <a:cs typeface="Malgun Gothic" pitchFamily="34" charset="-120"/>
+              </a:rPr>
+              <a:t>B4</a:t>
+            </a:r>
+            <a:endParaRPr lang="en-US" sz="900" dirty="0"/>
+          </a:p>
+        </p:txBody>
+      </p:sp>
+      <p:sp>
+        <p:nvSpPr>
+          <p:cNvPr id="17" name="Shape 15"/>
+          <p:cNvSpPr/>
+          <p:nvPr/>
+        </p:nvSpPr>
+        <p:spPr>
+          <a:xfrm>
+            <a:off x="6217920" y="2468880"/>
+            <a:ext cx="548640" cy="566928"/>
+          </a:xfrm>
+          <a:prstGeom prst="roundRect">
+            <a:avLst>
+              <a:gd name="adj" fmla="val 8333"/>
+            </a:avLst>
+          </a:prstGeom>
+          <a:solidFill>
+            <a:srgbClr val="0E1116"/>
+          </a:solidFill>
+          <a:ln w="12700">
+            <a:solidFill>
+              <a:srgbClr val="2C3440"/>
+            </a:solidFill>
+            <a:prstDash val="solid"/>
+          </a:ln>
+        </p:spPr>
+      </p:sp>
+      <p:sp>
+        <p:nvSpPr>
+          <p:cNvPr id="18" name="Text 16"/>
+          <p:cNvSpPr/>
+          <p:nvPr/>
+        </p:nvSpPr>
+        <p:spPr>
+          <a:xfrm>
+            <a:off x="6217920" y="2505456"/>
+            <a:ext cx="548640" cy="256032"/>
+          </a:xfrm>
+          <a:prstGeom prst="rect">
+            <a:avLst/>
+          </a:prstGeom>
+          <a:noFill/>
+          <a:ln/>
+        </p:spPr>
+        <p:txBody>
+          <a:bodyPr wrap="square" lIns="0" tIns="0" rIns="0" bIns="0" rtlCol="0" anchor="ctr"/>
+          <a:lstStyle/>
+          <a:p>
+            <a:pPr algn="ctr" indent="0" marL="0">
+              <a:buNone/>
+            </a:pPr>
+            <a:r>
+              <a:rPr lang="en-US" sz="900" dirty="0">
+                <a:solidFill>
+                  <a:srgbClr val="9AA6B2"/>
+                </a:solidFill>
+                <a:latin typeface="Malgun Gothic" pitchFamily="34" charset="0"/>
+                <a:ea typeface="Malgun Gothic" pitchFamily="34" charset="-122"/>
+                <a:cs typeface="Malgun Gothic" pitchFamily="34" charset="-120"/>
+              </a:rPr>
+              <a:t>B5</a:t>
+            </a:r>
+            <a:endParaRPr lang="en-US" sz="900" dirty="0"/>
+          </a:p>
+        </p:txBody>
+      </p:sp>
+      <p:sp>
+        <p:nvSpPr>
+          <p:cNvPr id="19" name="Shape 17"/>
+          <p:cNvSpPr/>
+          <p:nvPr/>
+        </p:nvSpPr>
+        <p:spPr>
+          <a:xfrm>
+            <a:off x="6858000" y="2468880"/>
+            <a:ext cx="548640" cy="566928"/>
+          </a:xfrm>
+          <a:prstGeom prst="roundRect">
+            <a:avLst>
+              <a:gd name="adj" fmla="val 8333"/>
+            </a:avLst>
+          </a:prstGeom>
+          <a:solidFill>
+            <a:srgbClr val="0E1116"/>
+          </a:solidFill>
+          <a:ln w="12700">
+            <a:solidFill>
+              <a:srgbClr val="2C3440"/>
+            </a:solidFill>
+            <a:prstDash val="solid"/>
+          </a:ln>
+        </p:spPr>
+      </p:sp>
+      <p:sp>
+        <p:nvSpPr>
+          <p:cNvPr id="20" name="Text 18"/>
+          <p:cNvSpPr/>
+          <p:nvPr/>
+        </p:nvSpPr>
+        <p:spPr>
+          <a:xfrm>
+            <a:off x="6858000" y="2505456"/>
+            <a:ext cx="548640" cy="256032"/>
+          </a:xfrm>
+          <a:prstGeom prst="rect">
+            <a:avLst/>
+          </a:prstGeom>
+          <a:noFill/>
+          <a:ln/>
+        </p:spPr>
+        <p:txBody>
+          <a:bodyPr wrap="square" lIns="0" tIns="0" rIns="0" bIns="0" rtlCol="0" anchor="ctr"/>
+          <a:lstStyle/>
+          <a:p>
+            <a:pPr algn="ctr" indent="0" marL="0">
+              <a:buNone/>
+            </a:pPr>
+            <a:r>
+              <a:rPr lang="en-US" sz="900" dirty="0">
+                <a:solidFill>
+                  <a:srgbClr val="9AA6B2"/>
+                </a:solidFill>
+                <a:latin typeface="Malgun Gothic" pitchFamily="34" charset="0"/>
+                <a:ea typeface="Malgun Gothic" pitchFamily="34" charset="-122"/>
+                <a:cs typeface="Malgun Gothic" pitchFamily="34" charset="-120"/>
+              </a:rPr>
+              <a:t>B6</a:t>
+            </a:r>
+            <a:endParaRPr lang="en-US" sz="900" dirty="0"/>
+          </a:p>
+        </p:txBody>
+      </p:sp>
+      <p:sp>
+        <p:nvSpPr>
+          <p:cNvPr id="21" name="Shape 19"/>
+          <p:cNvSpPr/>
+          <p:nvPr/>
+        </p:nvSpPr>
+        <p:spPr>
+          <a:xfrm>
+            <a:off x="7498080" y="2468880"/>
+            <a:ext cx="548640" cy="566928"/>
+          </a:xfrm>
+          <a:prstGeom prst="roundRect">
+            <a:avLst>
+              <a:gd name="adj" fmla="val 8333"/>
+            </a:avLst>
+          </a:prstGeom>
+          <a:solidFill>
+            <a:srgbClr val="0E1116"/>
+          </a:solidFill>
+          <a:ln w="12700">
+            <a:solidFill>
+              <a:srgbClr val="2C3440"/>
+            </a:solidFill>
+            <a:prstDash val="solid"/>
+          </a:ln>
+        </p:spPr>
+      </p:sp>
+      <p:sp>
+        <p:nvSpPr>
+          <p:cNvPr id="22" name="Text 20"/>
+          <p:cNvSpPr/>
+          <p:nvPr/>
+        </p:nvSpPr>
+        <p:spPr>
+          <a:xfrm>
+            <a:off x="7498080" y="2505456"/>
+            <a:ext cx="548640" cy="256032"/>
+          </a:xfrm>
+          <a:prstGeom prst="rect">
+            <a:avLst/>
+          </a:prstGeom>
+          <a:noFill/>
+          <a:ln/>
+        </p:spPr>
+        <p:txBody>
+          <a:bodyPr wrap="square" lIns="0" tIns="0" rIns="0" bIns="0" rtlCol="0" anchor="ctr"/>
+          <a:lstStyle/>
+          <a:p>
+            <a:pPr algn="ctr" indent="0" marL="0">
+              <a:buNone/>
+            </a:pPr>
+            <a:r>
+              <a:rPr lang="en-US" sz="900" dirty="0">
+                <a:solidFill>
+                  <a:srgbClr val="9AA6B2"/>
+                </a:solidFill>
+                <a:latin typeface="Malgun Gothic" pitchFamily="34" charset="0"/>
+                <a:ea typeface="Malgun Gothic" pitchFamily="34" charset="-122"/>
+                <a:cs typeface="Malgun Gothic" pitchFamily="34" charset="-120"/>
+              </a:rPr>
+              <a:t>B7</a:t>
+            </a:r>
+            <a:endParaRPr lang="en-US" sz="900" dirty="0"/>
+          </a:p>
+        </p:txBody>
+      </p:sp>
+      <p:sp>
+        <p:nvSpPr>
+          <p:cNvPr id="23" name="Text 21"/>
+          <p:cNvSpPr/>
+          <p:nvPr/>
+        </p:nvSpPr>
+        <p:spPr>
+          <a:xfrm>
+            <a:off x="3017520" y="2743200"/>
+            <a:ext cx="548640" cy="274320"/>
+          </a:xfrm>
+          <a:prstGeom prst="rect">
+            <a:avLst/>
+          </a:prstGeom>
+          <a:noFill/>
+          <a:ln/>
+        </p:spPr>
+        <p:txBody>
+          <a:bodyPr wrap="square" lIns="0" tIns="0" rIns="0" bIns="0" rtlCol="0" anchor="ctr"/>
+          <a:lstStyle/>
+          <a:p>
+            <a:pPr algn="ctr" indent="0" marL="0">
+              <a:buNone/>
+            </a:pPr>
+            <a:r>
+              <a:rPr lang="en-US" sz="1000" b="1" dirty="0">
+                <a:solidFill>
+                  <a:srgbClr val="8CC63F"/>
                 </a:solidFill>
                 <a:latin typeface="Courier New" pitchFamily="34" charset="0"/>
                 <a:ea typeface="Courier New" pitchFamily="34" charset="-122"/>
                 <a:cs typeface="Courier New" pitchFamily="34" charset="-120"/>
               </a:rPr>
-              <a:t>// test10   tests.cpp:1510~1524</a:t>
-            </a:r>
-            <a:endParaRPr lang="en-US" sz="1300" dirty="0"/>
-          </a:p>
-          <a:p>
-            <a:pPr algn="l" indent="0" marL="0">
-              <a:lnSpc>
-                <a:spcPct val="108000"/>
-              </a:lnSpc>
-              <a:buNone/>
-            </a:pPr>
-            <a:r>
-              <a:rPr lang="en-US" sz="1300" dirty="0">
-                <a:solidFill>
-                  <a:srgbClr val="E8EDF2"/>
+              <a:t>T0</a:t>
+            </a:r>
+            <a:endParaRPr lang="en-US" sz="1000" dirty="0"/>
+          </a:p>
+        </p:txBody>
+      </p:sp>
+      <p:sp>
+        <p:nvSpPr>
+          <p:cNvPr id="24" name="Text 22"/>
+          <p:cNvSpPr/>
+          <p:nvPr/>
+        </p:nvSpPr>
+        <p:spPr>
+          <a:xfrm>
+            <a:off x="3657600" y="2743200"/>
+            <a:ext cx="548640" cy="274320"/>
+          </a:xfrm>
+          <a:prstGeom prst="rect">
+            <a:avLst/>
+          </a:prstGeom>
+          <a:noFill/>
+          <a:ln/>
+        </p:spPr>
+        <p:txBody>
+          <a:bodyPr wrap="square" lIns="0" tIns="0" rIns="0" bIns="0" rtlCol="0" anchor="ctr"/>
+          <a:lstStyle/>
+          <a:p>
+            <a:pPr algn="ctr" indent="0" marL="0">
+              <a:buNone/>
+            </a:pPr>
+            <a:r>
+              <a:rPr lang="en-US" sz="1000" b="1" dirty="0">
+                <a:solidFill>
+                  <a:srgbClr val="8CC63F"/>
                 </a:solidFill>
                 <a:latin typeface="Courier New" pitchFamily="34" charset="0"/>
                 <a:ea typeface="Courier New" pitchFamily="34" charset="-122"/>
                 <a:cs typeface="Courier New" pitchFamily="34" charset="-120"/>
               </a:rPr>
-              <a:t>cudaEventRecord(start, stream);</a:t>
-            </a:r>
-            <a:endParaRPr lang="en-US" sz="1300" dirty="0"/>
-          </a:p>
-          <a:p>
-            <a:pPr algn="l" indent="0" marL="0">
-              <a:lnSpc>
-                <a:spcPct val="108000"/>
-              </a:lnSpc>
-              <a:buNone/>
-            </a:pPr>
-            <a:r>
-              <a:rPr lang="en-US" sz="1300" dirty="0">
+              <a:t>T1</a:t>
+            </a:r>
+            <a:endParaRPr lang="en-US" sz="1000" dirty="0"/>
+          </a:p>
+        </p:txBody>
+      </p:sp>
+      <p:sp>
+        <p:nvSpPr>
+          <p:cNvPr id="25" name="Text 23"/>
+          <p:cNvSpPr/>
+          <p:nvPr/>
+        </p:nvSpPr>
+        <p:spPr>
+          <a:xfrm>
+            <a:off x="4297680" y="2743200"/>
+            <a:ext cx="548640" cy="274320"/>
+          </a:xfrm>
+          <a:prstGeom prst="rect">
+            <a:avLst/>
+          </a:prstGeom>
+          <a:noFill/>
+          <a:ln/>
+        </p:spPr>
+        <p:txBody>
+          <a:bodyPr wrap="square" lIns="0" tIns="0" rIns="0" bIns="0" rtlCol="0" anchor="ctr"/>
+          <a:lstStyle/>
+          <a:p>
+            <a:pPr algn="ctr" indent="0" marL="0">
+              <a:buNone/>
+            </a:pPr>
+            <a:r>
+              <a:rPr lang="en-US" sz="1000" b="1" dirty="0">
                 <a:solidFill>
                   <a:srgbClr val="8CC63F"/>
                 </a:solidFill>
@@ -11252,19 +13990,38 @@
                 <a:ea typeface="Courier New" pitchFamily="34" charset="-122"/>
                 <a:cs typeface="Courier New" pitchFamily="34" charset="-120"/>
               </a:rPr>
-              <a:t>test10_kernel_write&lt;&lt;&lt;...&gt;&gt;&gt;(...);          // 쓰기</a:t>
-            </a:r>
-            <a:endParaRPr lang="en-US" sz="1300" dirty="0"/>
-          </a:p>
-          <a:p>
-            <a:pPr algn="l" indent="0" marL="0">
-              <a:lnSpc>
-                <a:spcPct val="108000"/>
-              </a:lnSpc>
-              <a:buNone/>
-            </a:pPr>
-            <a:r>
-              <a:rPr lang="en-US" sz="1300" dirty="0">
+              <a:t>T2</a:t>
+            </a:r>
+            <a:endParaRPr lang="en-US" sz="1000" dirty="0"/>
+          </a:p>
+        </p:txBody>
+      </p:sp>
+      <p:sp>
+        <p:nvSpPr>
+          <p:cNvPr id="26" name="Text 24"/>
+          <p:cNvSpPr/>
+          <p:nvPr/>
+        </p:nvSpPr>
+        <p:spPr>
+          <a:xfrm>
+            <a:off x="4937760" y="2743200"/>
+            <a:ext cx="548640" cy="274320"/>
+          </a:xfrm>
+          <a:prstGeom prst="rect">
+            <a:avLst/>
+          </a:prstGeom>
+          <a:noFill/>
+          <a:ln/>
+        </p:spPr>
+        <p:txBody>
+          <a:bodyPr wrap="square" lIns="0" tIns="0" rIns="0" bIns="0" rtlCol="0" anchor="ctr"/>
+          <a:lstStyle/>
+          <a:p>
+            <a:pPr algn="ctr" indent="0" marL="0">
+              <a:buNone/>
+            </a:pPr>
+            <a:r>
+              <a:rPr lang="en-US" sz="1000" b="1" dirty="0">
                 <a:solidFill>
                   <a:srgbClr val="8CC63F"/>
                 </a:solidFill>
@@ -11272,82 +14029,1001 @@
                 <a:ea typeface="Courier New" pitchFamily="34" charset="-122"/>
                 <a:cs typeface="Courier New" pitchFamily="34" charset="-120"/>
               </a:rPr>
-              <a:t>for (i=0;i&lt;n;i++) test10_kernel_readwrite&lt;&lt;&lt;...&gt;&gt;&gt;(...); // 읽고쓰기 n회</a:t>
-            </a:r>
-            <a:endParaRPr lang="en-US" sz="1300" dirty="0"/>
-          </a:p>
-          <a:p>
-            <a:pPr algn="l" indent="0" marL="0">
-              <a:lnSpc>
-                <a:spcPct val="108000"/>
-              </a:lnSpc>
-              <a:buNone/>
-            </a:pPr>
-            <a:r>
-              <a:rPr lang="en-US" sz="1300" dirty="0">
-                <a:solidFill>
-                  <a:srgbClr val="E8EDF2"/>
+              <a:t>T3</a:t>
+            </a:r>
+            <a:endParaRPr lang="en-US" sz="1000" dirty="0"/>
+          </a:p>
+        </p:txBody>
+      </p:sp>
+      <p:sp>
+        <p:nvSpPr>
+          <p:cNvPr id="27" name="Text 25"/>
+          <p:cNvSpPr/>
+          <p:nvPr/>
+        </p:nvSpPr>
+        <p:spPr>
+          <a:xfrm>
+            <a:off x="5577840" y="2743200"/>
+            <a:ext cx="548640" cy="274320"/>
+          </a:xfrm>
+          <a:prstGeom prst="rect">
+            <a:avLst/>
+          </a:prstGeom>
+          <a:noFill/>
+          <a:ln/>
+        </p:spPr>
+        <p:txBody>
+          <a:bodyPr wrap="square" lIns="0" tIns="0" rIns="0" bIns="0" rtlCol="0" anchor="ctr"/>
+          <a:lstStyle/>
+          <a:p>
+            <a:pPr algn="ctr" indent="0" marL="0">
+              <a:buNone/>
+            </a:pPr>
+            <a:r>
+              <a:rPr lang="en-US" sz="1000" b="1" dirty="0">
+                <a:solidFill>
+                  <a:srgbClr val="8CC63F"/>
                 </a:solidFill>
                 <a:latin typeface="Courier New" pitchFamily="34" charset="0"/>
                 <a:ea typeface="Courier New" pitchFamily="34" charset="-122"/>
                 <a:cs typeface="Courier New" pitchFamily="34" charset="-120"/>
               </a:rPr>
-              <a:t>cudaEventRecord(stop, stream);</a:t>
-            </a:r>
-            <a:endParaRPr lang="en-US" sz="1300" dirty="0"/>
-          </a:p>
-          <a:p>
-            <a:pPr algn="l" indent="0" marL="0">
-              <a:lnSpc>
-                <a:spcPct val="108000"/>
-              </a:lnSpc>
-              <a:buNone/>
-            </a:pPr>
-            <a:r>
-              <a:rPr lang="en-US" sz="1300" dirty="0">
-                <a:solidFill>
-                  <a:srgbClr val="E0A458"/>
+              <a:t>T4</a:t>
+            </a:r>
+            <a:endParaRPr lang="en-US" sz="1000" dirty="0"/>
+          </a:p>
+        </p:txBody>
+      </p:sp>
+      <p:sp>
+        <p:nvSpPr>
+          <p:cNvPr id="28" name="Text 26"/>
+          <p:cNvSpPr/>
+          <p:nvPr/>
+        </p:nvSpPr>
+        <p:spPr>
+          <a:xfrm>
+            <a:off x="6217920" y="2743200"/>
+            <a:ext cx="548640" cy="274320"/>
+          </a:xfrm>
+          <a:prstGeom prst="rect">
+            <a:avLst/>
+          </a:prstGeom>
+          <a:noFill/>
+          <a:ln/>
+        </p:spPr>
+        <p:txBody>
+          <a:bodyPr wrap="square" lIns="0" tIns="0" rIns="0" bIns="0" rtlCol="0" anchor="ctr"/>
+          <a:lstStyle/>
+          <a:p>
+            <a:pPr algn="ctr" indent="0" marL="0">
+              <a:buNone/>
+            </a:pPr>
+            <a:r>
+              <a:rPr lang="en-US" sz="1000" b="1" dirty="0">
+                <a:solidFill>
+                  <a:srgbClr val="8CC63F"/>
                 </a:solidFill>
                 <a:latin typeface="Courier New" pitchFamily="34" charset="0"/>
                 <a:ea typeface="Courier New" pitchFamily="34" charset="-122"/>
                 <a:cs typeface="Courier New" pitchFamily="34" charset="-120"/>
               </a:rPr>
-              <a:t>cudaEventSynchronize(stop);                 // GPU가 끝날 때까지 대기</a:t>
-            </a:r>
-            <a:endParaRPr lang="en-US" sz="1300" dirty="0"/>
-          </a:p>
-          <a:p>
-            <a:pPr algn="l" indent="0" marL="0">
-              <a:lnSpc>
-                <a:spcPct val="108000"/>
-              </a:lnSpc>
-              <a:buNone/>
-            </a:pPr>
-            <a:r>
-              <a:rPr lang="en-US" sz="1300" dirty="0">
-                <a:solidFill>
-                  <a:srgbClr val="4FB0C6"/>
+              <a:t>T5</a:t>
+            </a:r>
+            <a:endParaRPr lang="en-US" sz="1000" dirty="0"/>
+          </a:p>
+        </p:txBody>
+      </p:sp>
+      <p:sp>
+        <p:nvSpPr>
+          <p:cNvPr id="29" name="Text 27"/>
+          <p:cNvSpPr/>
+          <p:nvPr/>
+        </p:nvSpPr>
+        <p:spPr>
+          <a:xfrm>
+            <a:off x="6858000" y="2743200"/>
+            <a:ext cx="548640" cy="274320"/>
+          </a:xfrm>
+          <a:prstGeom prst="rect">
+            <a:avLst/>
+          </a:prstGeom>
+          <a:noFill/>
+          <a:ln/>
+        </p:spPr>
+        <p:txBody>
+          <a:bodyPr wrap="square" lIns="0" tIns="0" rIns="0" bIns="0" rtlCol="0" anchor="ctr"/>
+          <a:lstStyle/>
+          <a:p>
+            <a:pPr algn="ctr" indent="0" marL="0">
+              <a:buNone/>
+            </a:pPr>
+            <a:r>
+              <a:rPr lang="en-US" sz="1000" b="1" dirty="0">
+                <a:solidFill>
+                  <a:srgbClr val="8CC63F"/>
                 </a:solidFill>
                 <a:latin typeface="Courier New" pitchFamily="34" charset="0"/>
                 <a:ea typeface="Courier New" pitchFamily="34" charset="-122"/>
                 <a:cs typeface="Courier New" pitchFamily="34" charset="-120"/>
               </a:rPr>
-              <a:t>cudaEventElapsedTime(&amp;elapsedtime, start, stop); // 밀리초 경과시간</a:t>
-            </a:r>
-            <a:endParaRPr lang="en-US" sz="1300" dirty="0"/>
-          </a:p>
-        </p:txBody>
-      </p:sp>
-      <p:sp>
-        <p:nvSpPr>
-          <p:cNvPr id="6" name="Text 4"/>
-          <p:cNvSpPr/>
-          <p:nvPr/>
-        </p:nvSpPr>
-        <p:spPr>
-          <a:xfrm>
-            <a:off x="548640" y="4572000"/>
-            <a:ext cx="11064240" cy="1371600"/>
+              <a:t>T6</a:t>
+            </a:r>
+            <a:endParaRPr lang="en-US" sz="1000" dirty="0"/>
+          </a:p>
+        </p:txBody>
+      </p:sp>
+      <p:sp>
+        <p:nvSpPr>
+          <p:cNvPr id="30" name="Text 28"/>
+          <p:cNvSpPr/>
+          <p:nvPr/>
+        </p:nvSpPr>
+        <p:spPr>
+          <a:xfrm>
+            <a:off x="7498080" y="2743200"/>
+            <a:ext cx="548640" cy="274320"/>
+          </a:xfrm>
+          <a:prstGeom prst="rect">
+            <a:avLst/>
+          </a:prstGeom>
+          <a:noFill/>
+          <a:ln/>
+        </p:spPr>
+        <p:txBody>
+          <a:bodyPr wrap="square" lIns="0" tIns="0" rIns="0" bIns="0" rtlCol="0" anchor="ctr"/>
+          <a:lstStyle/>
+          <a:p>
+            <a:pPr algn="ctr" indent="0" marL="0">
+              <a:buNone/>
+            </a:pPr>
+            <a:r>
+              <a:rPr lang="en-US" sz="1000" b="1" dirty="0">
+                <a:solidFill>
+                  <a:srgbClr val="8CC63F"/>
+                </a:solidFill>
+                <a:latin typeface="Courier New" pitchFamily="34" charset="0"/>
+                <a:ea typeface="Courier New" pitchFamily="34" charset="-122"/>
+                <a:cs typeface="Courier New" pitchFamily="34" charset="-120"/>
+              </a:rPr>
+              <a:t>T7</a:t>
+            </a:r>
+            <a:endParaRPr lang="en-US" sz="1000" dirty="0"/>
+          </a:p>
+        </p:txBody>
+      </p:sp>
+      <p:sp>
+        <p:nvSpPr>
+          <p:cNvPr id="31" name="Text 29"/>
+          <p:cNvSpPr/>
+          <p:nvPr/>
+        </p:nvSpPr>
+        <p:spPr>
+          <a:xfrm>
+            <a:off x="8229600" y="2514600"/>
+            <a:ext cx="3383280" cy="502920"/>
+          </a:xfrm>
+          <a:prstGeom prst="rect">
+            <a:avLst/>
+          </a:prstGeom>
+          <a:noFill/>
+          <a:ln/>
+        </p:spPr>
+        <p:txBody>
+          <a:bodyPr wrap="square" lIns="0" tIns="0" rIns="0" bIns="0" rtlCol="0" anchor="ctr"/>
+          <a:lstStyle/>
+          <a:p>
+            <a:pPr indent="0" marL="0">
+              <a:buNone/>
+            </a:pPr>
+            <a:r>
+              <a:rPr lang="en-US" sz="1150" dirty="0">
+                <a:solidFill>
+                  <a:srgbClr val="8CC63F"/>
+                </a:solidFill>
+                <a:latin typeface="Malgun Gothic" pitchFamily="34" charset="0"/>
+                <a:ea typeface="Malgun Gothic" pitchFamily="34" charset="-122"/>
+                <a:cs typeface="Malgun Gothic" pitchFamily="34" charset="-120"/>
+              </a:rPr>
+              <a:t>각 스레드가 다른 뱅크 → 1회에 처리</a:t>
+            </a:r>
+            <a:endParaRPr lang="en-US" sz="1150" dirty="0"/>
+          </a:p>
+        </p:txBody>
+      </p:sp>
+      <p:sp>
+        <p:nvSpPr>
+          <p:cNvPr id="32" name="Text 30"/>
+          <p:cNvSpPr/>
+          <p:nvPr/>
+        </p:nvSpPr>
+        <p:spPr>
+          <a:xfrm>
+            <a:off x="548640" y="3474720"/>
+            <a:ext cx="2194560" cy="502920"/>
+          </a:xfrm>
+          <a:prstGeom prst="rect">
+            <a:avLst/>
+          </a:prstGeom>
+          <a:noFill/>
+          <a:ln/>
+        </p:spPr>
+        <p:txBody>
+          <a:bodyPr wrap="square" lIns="0" tIns="0" rIns="0" bIns="0" rtlCol="0" anchor="ctr"/>
+          <a:lstStyle/>
+          <a:p>
+            <a:pPr indent="0" marL="0">
+              <a:buNone/>
+            </a:pPr>
+            <a:r>
+              <a:rPr lang="en-US" sz="1400" b="1" dirty="0">
+                <a:solidFill>
+                  <a:srgbClr val="E0645B"/>
+                </a:solidFill>
+                <a:latin typeface="Malgun Gothic" pitchFamily="34" charset="0"/>
+                <a:ea typeface="Malgun Gothic" pitchFamily="34" charset="-122"/>
+                <a:cs typeface="Malgun Gothic" pitchFamily="34" charset="-120"/>
+              </a:rPr>
+              <a:t>2-way 충돌</a:t>
+            </a:r>
+            <a:endParaRPr lang="en-US" sz="1400" dirty="0"/>
+          </a:p>
+        </p:txBody>
+      </p:sp>
+      <p:sp>
+        <p:nvSpPr>
+          <p:cNvPr id="33" name="Shape 31"/>
+          <p:cNvSpPr/>
+          <p:nvPr/>
+        </p:nvSpPr>
+        <p:spPr>
+          <a:xfrm>
+            <a:off x="3017520" y="3429000"/>
+            <a:ext cx="548640" cy="566928"/>
+          </a:xfrm>
+          <a:prstGeom prst="roundRect">
+            <a:avLst>
+              <a:gd name="adj" fmla="val 8333"/>
+            </a:avLst>
+          </a:prstGeom>
+          <a:solidFill>
+            <a:srgbClr val="0E1116"/>
+          </a:solidFill>
+          <a:ln w="12700">
+            <a:solidFill>
+              <a:srgbClr val="2C3440"/>
+            </a:solidFill>
+            <a:prstDash val="solid"/>
+          </a:ln>
+        </p:spPr>
+      </p:sp>
+      <p:sp>
+        <p:nvSpPr>
+          <p:cNvPr id="34" name="Text 32"/>
+          <p:cNvSpPr/>
+          <p:nvPr/>
+        </p:nvSpPr>
+        <p:spPr>
+          <a:xfrm>
+            <a:off x="3017520" y="3465576"/>
+            <a:ext cx="548640" cy="256032"/>
+          </a:xfrm>
+          <a:prstGeom prst="rect">
+            <a:avLst/>
+          </a:prstGeom>
+          <a:noFill/>
+          <a:ln/>
+        </p:spPr>
+        <p:txBody>
+          <a:bodyPr wrap="square" lIns="0" tIns="0" rIns="0" bIns="0" rtlCol="0" anchor="ctr"/>
+          <a:lstStyle/>
+          <a:p>
+            <a:pPr algn="ctr" indent="0" marL="0">
+              <a:buNone/>
+            </a:pPr>
+            <a:r>
+              <a:rPr lang="en-US" sz="900" dirty="0">
+                <a:solidFill>
+                  <a:srgbClr val="9AA6B2"/>
+                </a:solidFill>
+                <a:latin typeface="Malgun Gothic" pitchFamily="34" charset="0"/>
+                <a:ea typeface="Malgun Gothic" pitchFamily="34" charset="-122"/>
+                <a:cs typeface="Malgun Gothic" pitchFamily="34" charset="-120"/>
+              </a:rPr>
+              <a:t>B0</a:t>
+            </a:r>
+            <a:endParaRPr lang="en-US" sz="900" dirty="0"/>
+          </a:p>
+        </p:txBody>
+      </p:sp>
+      <p:sp>
+        <p:nvSpPr>
+          <p:cNvPr id="35" name="Shape 33"/>
+          <p:cNvSpPr/>
+          <p:nvPr/>
+        </p:nvSpPr>
+        <p:spPr>
+          <a:xfrm>
+            <a:off x="3657600" y="3429000"/>
+            <a:ext cx="548640" cy="566928"/>
+          </a:xfrm>
+          <a:prstGeom prst="roundRect">
+            <a:avLst>
+              <a:gd name="adj" fmla="val 8333"/>
+            </a:avLst>
+          </a:prstGeom>
+          <a:solidFill>
+            <a:srgbClr val="0E1116"/>
+          </a:solidFill>
+          <a:ln w="12700">
+            <a:solidFill>
+              <a:srgbClr val="2C3440"/>
+            </a:solidFill>
+            <a:prstDash val="solid"/>
+          </a:ln>
+        </p:spPr>
+      </p:sp>
+      <p:sp>
+        <p:nvSpPr>
+          <p:cNvPr id="36" name="Text 34"/>
+          <p:cNvSpPr/>
+          <p:nvPr/>
+        </p:nvSpPr>
+        <p:spPr>
+          <a:xfrm>
+            <a:off x="3657600" y="3465576"/>
+            <a:ext cx="548640" cy="256032"/>
+          </a:xfrm>
+          <a:prstGeom prst="rect">
+            <a:avLst/>
+          </a:prstGeom>
+          <a:noFill/>
+          <a:ln/>
+        </p:spPr>
+        <p:txBody>
+          <a:bodyPr wrap="square" lIns="0" tIns="0" rIns="0" bIns="0" rtlCol="0" anchor="ctr"/>
+          <a:lstStyle/>
+          <a:p>
+            <a:pPr algn="ctr" indent="0" marL="0">
+              <a:buNone/>
+            </a:pPr>
+            <a:r>
+              <a:rPr lang="en-US" sz="900" dirty="0">
+                <a:solidFill>
+                  <a:srgbClr val="9AA6B2"/>
+                </a:solidFill>
+                <a:latin typeface="Malgun Gothic" pitchFamily="34" charset="0"/>
+                <a:ea typeface="Malgun Gothic" pitchFamily="34" charset="-122"/>
+                <a:cs typeface="Malgun Gothic" pitchFamily="34" charset="-120"/>
+              </a:rPr>
+              <a:t>B1</a:t>
+            </a:r>
+            <a:endParaRPr lang="en-US" sz="900" dirty="0"/>
+          </a:p>
+        </p:txBody>
+      </p:sp>
+      <p:sp>
+        <p:nvSpPr>
+          <p:cNvPr id="37" name="Shape 35"/>
+          <p:cNvSpPr/>
+          <p:nvPr/>
+        </p:nvSpPr>
+        <p:spPr>
+          <a:xfrm>
+            <a:off x="4297680" y="3429000"/>
+            <a:ext cx="548640" cy="566928"/>
+          </a:xfrm>
+          <a:prstGeom prst="roundRect">
+            <a:avLst>
+              <a:gd name="adj" fmla="val 8333"/>
+            </a:avLst>
+          </a:prstGeom>
+          <a:solidFill>
+            <a:srgbClr val="0E1116"/>
+          </a:solidFill>
+          <a:ln w="12700">
+            <a:solidFill>
+              <a:srgbClr val="2C3440"/>
+            </a:solidFill>
+            <a:prstDash val="solid"/>
+          </a:ln>
+        </p:spPr>
+      </p:sp>
+      <p:sp>
+        <p:nvSpPr>
+          <p:cNvPr id="38" name="Text 36"/>
+          <p:cNvSpPr/>
+          <p:nvPr/>
+        </p:nvSpPr>
+        <p:spPr>
+          <a:xfrm>
+            <a:off x="4297680" y="3465576"/>
+            <a:ext cx="548640" cy="256032"/>
+          </a:xfrm>
+          <a:prstGeom prst="rect">
+            <a:avLst/>
+          </a:prstGeom>
+          <a:noFill/>
+          <a:ln/>
+        </p:spPr>
+        <p:txBody>
+          <a:bodyPr wrap="square" lIns="0" tIns="0" rIns="0" bIns="0" rtlCol="0" anchor="ctr"/>
+          <a:lstStyle/>
+          <a:p>
+            <a:pPr algn="ctr" indent="0" marL="0">
+              <a:buNone/>
+            </a:pPr>
+            <a:r>
+              <a:rPr lang="en-US" sz="900" dirty="0">
+                <a:solidFill>
+                  <a:srgbClr val="9AA6B2"/>
+                </a:solidFill>
+                <a:latin typeface="Malgun Gothic" pitchFamily="34" charset="0"/>
+                <a:ea typeface="Malgun Gothic" pitchFamily="34" charset="-122"/>
+                <a:cs typeface="Malgun Gothic" pitchFamily="34" charset="-120"/>
+              </a:rPr>
+              <a:t>B2</a:t>
+            </a:r>
+            <a:endParaRPr lang="en-US" sz="900" dirty="0"/>
+          </a:p>
+        </p:txBody>
+      </p:sp>
+      <p:sp>
+        <p:nvSpPr>
+          <p:cNvPr id="39" name="Shape 37"/>
+          <p:cNvSpPr/>
+          <p:nvPr/>
+        </p:nvSpPr>
+        <p:spPr>
+          <a:xfrm>
+            <a:off x="4937760" y="3429000"/>
+            <a:ext cx="548640" cy="566928"/>
+          </a:xfrm>
+          <a:prstGeom prst="roundRect">
+            <a:avLst>
+              <a:gd name="adj" fmla="val 8333"/>
+            </a:avLst>
+          </a:prstGeom>
+          <a:solidFill>
+            <a:srgbClr val="0E1116"/>
+          </a:solidFill>
+          <a:ln w="12700">
+            <a:solidFill>
+              <a:srgbClr val="2C3440"/>
+            </a:solidFill>
+            <a:prstDash val="solid"/>
+          </a:ln>
+        </p:spPr>
+      </p:sp>
+      <p:sp>
+        <p:nvSpPr>
+          <p:cNvPr id="40" name="Text 38"/>
+          <p:cNvSpPr/>
+          <p:nvPr/>
+        </p:nvSpPr>
+        <p:spPr>
+          <a:xfrm>
+            <a:off x="4937760" y="3465576"/>
+            <a:ext cx="548640" cy="256032"/>
+          </a:xfrm>
+          <a:prstGeom prst="rect">
+            <a:avLst/>
+          </a:prstGeom>
+          <a:noFill/>
+          <a:ln/>
+        </p:spPr>
+        <p:txBody>
+          <a:bodyPr wrap="square" lIns="0" tIns="0" rIns="0" bIns="0" rtlCol="0" anchor="ctr"/>
+          <a:lstStyle/>
+          <a:p>
+            <a:pPr algn="ctr" indent="0" marL="0">
+              <a:buNone/>
+            </a:pPr>
+            <a:r>
+              <a:rPr lang="en-US" sz="900" dirty="0">
+                <a:solidFill>
+                  <a:srgbClr val="9AA6B2"/>
+                </a:solidFill>
+                <a:latin typeface="Malgun Gothic" pitchFamily="34" charset="0"/>
+                <a:ea typeface="Malgun Gothic" pitchFamily="34" charset="-122"/>
+                <a:cs typeface="Malgun Gothic" pitchFamily="34" charset="-120"/>
+              </a:rPr>
+              <a:t>B3</a:t>
+            </a:r>
+            <a:endParaRPr lang="en-US" sz="900" dirty="0"/>
+          </a:p>
+        </p:txBody>
+      </p:sp>
+      <p:sp>
+        <p:nvSpPr>
+          <p:cNvPr id="41" name="Shape 39"/>
+          <p:cNvSpPr/>
+          <p:nvPr/>
+        </p:nvSpPr>
+        <p:spPr>
+          <a:xfrm>
+            <a:off x="5577840" y="3429000"/>
+            <a:ext cx="548640" cy="566928"/>
+          </a:xfrm>
+          <a:prstGeom prst="roundRect">
+            <a:avLst>
+              <a:gd name="adj" fmla="val 8333"/>
+            </a:avLst>
+          </a:prstGeom>
+          <a:solidFill>
+            <a:srgbClr val="0E1116"/>
+          </a:solidFill>
+          <a:ln w="12700">
+            <a:solidFill>
+              <a:srgbClr val="2C3440"/>
+            </a:solidFill>
+            <a:prstDash val="solid"/>
+          </a:ln>
+        </p:spPr>
+      </p:sp>
+      <p:sp>
+        <p:nvSpPr>
+          <p:cNvPr id="42" name="Text 40"/>
+          <p:cNvSpPr/>
+          <p:nvPr/>
+        </p:nvSpPr>
+        <p:spPr>
+          <a:xfrm>
+            <a:off x="5577840" y="3465576"/>
+            <a:ext cx="548640" cy="256032"/>
+          </a:xfrm>
+          <a:prstGeom prst="rect">
+            <a:avLst/>
+          </a:prstGeom>
+          <a:noFill/>
+          <a:ln/>
+        </p:spPr>
+        <p:txBody>
+          <a:bodyPr wrap="square" lIns="0" tIns="0" rIns="0" bIns="0" rtlCol="0" anchor="ctr"/>
+          <a:lstStyle/>
+          <a:p>
+            <a:pPr algn="ctr" indent="0" marL="0">
+              <a:buNone/>
+            </a:pPr>
+            <a:r>
+              <a:rPr lang="en-US" sz="900" dirty="0">
+                <a:solidFill>
+                  <a:srgbClr val="9AA6B2"/>
+                </a:solidFill>
+                <a:latin typeface="Malgun Gothic" pitchFamily="34" charset="0"/>
+                <a:ea typeface="Malgun Gothic" pitchFamily="34" charset="-122"/>
+                <a:cs typeface="Malgun Gothic" pitchFamily="34" charset="-120"/>
+              </a:rPr>
+              <a:t>B4</a:t>
+            </a:r>
+            <a:endParaRPr lang="en-US" sz="900" dirty="0"/>
+          </a:p>
+        </p:txBody>
+      </p:sp>
+      <p:sp>
+        <p:nvSpPr>
+          <p:cNvPr id="43" name="Shape 41"/>
+          <p:cNvSpPr/>
+          <p:nvPr/>
+        </p:nvSpPr>
+        <p:spPr>
+          <a:xfrm>
+            <a:off x="6217920" y="3429000"/>
+            <a:ext cx="548640" cy="566928"/>
+          </a:xfrm>
+          <a:prstGeom prst="roundRect">
+            <a:avLst>
+              <a:gd name="adj" fmla="val 8333"/>
+            </a:avLst>
+          </a:prstGeom>
+          <a:solidFill>
+            <a:srgbClr val="0E1116"/>
+          </a:solidFill>
+          <a:ln w="12700">
+            <a:solidFill>
+              <a:srgbClr val="2C3440"/>
+            </a:solidFill>
+            <a:prstDash val="solid"/>
+          </a:ln>
+        </p:spPr>
+      </p:sp>
+      <p:sp>
+        <p:nvSpPr>
+          <p:cNvPr id="44" name="Text 42"/>
+          <p:cNvSpPr/>
+          <p:nvPr/>
+        </p:nvSpPr>
+        <p:spPr>
+          <a:xfrm>
+            <a:off x="6217920" y="3465576"/>
+            <a:ext cx="548640" cy="256032"/>
+          </a:xfrm>
+          <a:prstGeom prst="rect">
+            <a:avLst/>
+          </a:prstGeom>
+          <a:noFill/>
+          <a:ln/>
+        </p:spPr>
+        <p:txBody>
+          <a:bodyPr wrap="square" lIns="0" tIns="0" rIns="0" bIns="0" rtlCol="0" anchor="ctr"/>
+          <a:lstStyle/>
+          <a:p>
+            <a:pPr algn="ctr" indent="0" marL="0">
+              <a:buNone/>
+            </a:pPr>
+            <a:r>
+              <a:rPr lang="en-US" sz="900" dirty="0">
+                <a:solidFill>
+                  <a:srgbClr val="9AA6B2"/>
+                </a:solidFill>
+                <a:latin typeface="Malgun Gothic" pitchFamily="34" charset="0"/>
+                <a:ea typeface="Malgun Gothic" pitchFamily="34" charset="-122"/>
+                <a:cs typeface="Malgun Gothic" pitchFamily="34" charset="-120"/>
+              </a:rPr>
+              <a:t>B5</a:t>
+            </a:r>
+            <a:endParaRPr lang="en-US" sz="900" dirty="0"/>
+          </a:p>
+        </p:txBody>
+      </p:sp>
+      <p:sp>
+        <p:nvSpPr>
+          <p:cNvPr id="45" name="Shape 43"/>
+          <p:cNvSpPr/>
+          <p:nvPr/>
+        </p:nvSpPr>
+        <p:spPr>
+          <a:xfrm>
+            <a:off x="6858000" y="3429000"/>
+            <a:ext cx="548640" cy="566928"/>
+          </a:xfrm>
+          <a:prstGeom prst="roundRect">
+            <a:avLst>
+              <a:gd name="adj" fmla="val 8333"/>
+            </a:avLst>
+          </a:prstGeom>
+          <a:solidFill>
+            <a:srgbClr val="0E1116"/>
+          </a:solidFill>
+          <a:ln w="12700">
+            <a:solidFill>
+              <a:srgbClr val="2C3440"/>
+            </a:solidFill>
+            <a:prstDash val="solid"/>
+          </a:ln>
+        </p:spPr>
+      </p:sp>
+      <p:sp>
+        <p:nvSpPr>
+          <p:cNvPr id="46" name="Text 44"/>
+          <p:cNvSpPr/>
+          <p:nvPr/>
+        </p:nvSpPr>
+        <p:spPr>
+          <a:xfrm>
+            <a:off x="6858000" y="3465576"/>
+            <a:ext cx="548640" cy="256032"/>
+          </a:xfrm>
+          <a:prstGeom prst="rect">
+            <a:avLst/>
+          </a:prstGeom>
+          <a:noFill/>
+          <a:ln/>
+        </p:spPr>
+        <p:txBody>
+          <a:bodyPr wrap="square" lIns="0" tIns="0" rIns="0" bIns="0" rtlCol="0" anchor="ctr"/>
+          <a:lstStyle/>
+          <a:p>
+            <a:pPr algn="ctr" indent="0" marL="0">
+              <a:buNone/>
+            </a:pPr>
+            <a:r>
+              <a:rPr lang="en-US" sz="900" dirty="0">
+                <a:solidFill>
+                  <a:srgbClr val="9AA6B2"/>
+                </a:solidFill>
+                <a:latin typeface="Malgun Gothic" pitchFamily="34" charset="0"/>
+                <a:ea typeface="Malgun Gothic" pitchFamily="34" charset="-122"/>
+                <a:cs typeface="Malgun Gothic" pitchFamily="34" charset="-120"/>
+              </a:rPr>
+              <a:t>B6</a:t>
+            </a:r>
+            <a:endParaRPr lang="en-US" sz="900" dirty="0"/>
+          </a:p>
+        </p:txBody>
+      </p:sp>
+      <p:sp>
+        <p:nvSpPr>
+          <p:cNvPr id="47" name="Shape 45"/>
+          <p:cNvSpPr/>
+          <p:nvPr/>
+        </p:nvSpPr>
+        <p:spPr>
+          <a:xfrm>
+            <a:off x="7498080" y="3429000"/>
+            <a:ext cx="548640" cy="566928"/>
+          </a:xfrm>
+          <a:prstGeom prst="roundRect">
+            <a:avLst>
+              <a:gd name="adj" fmla="val 8333"/>
+            </a:avLst>
+          </a:prstGeom>
+          <a:solidFill>
+            <a:srgbClr val="0E1116"/>
+          </a:solidFill>
+          <a:ln w="12700">
+            <a:solidFill>
+              <a:srgbClr val="2C3440"/>
+            </a:solidFill>
+            <a:prstDash val="solid"/>
+          </a:ln>
+        </p:spPr>
+      </p:sp>
+      <p:sp>
+        <p:nvSpPr>
+          <p:cNvPr id="48" name="Text 46"/>
+          <p:cNvSpPr/>
+          <p:nvPr/>
+        </p:nvSpPr>
+        <p:spPr>
+          <a:xfrm>
+            <a:off x="7498080" y="3465576"/>
+            <a:ext cx="548640" cy="256032"/>
+          </a:xfrm>
+          <a:prstGeom prst="rect">
+            <a:avLst/>
+          </a:prstGeom>
+          <a:noFill/>
+          <a:ln/>
+        </p:spPr>
+        <p:txBody>
+          <a:bodyPr wrap="square" lIns="0" tIns="0" rIns="0" bIns="0" rtlCol="0" anchor="ctr"/>
+          <a:lstStyle/>
+          <a:p>
+            <a:pPr algn="ctr" indent="0" marL="0">
+              <a:buNone/>
+            </a:pPr>
+            <a:r>
+              <a:rPr lang="en-US" sz="900" dirty="0">
+                <a:solidFill>
+                  <a:srgbClr val="9AA6B2"/>
+                </a:solidFill>
+                <a:latin typeface="Malgun Gothic" pitchFamily="34" charset="0"/>
+                <a:ea typeface="Malgun Gothic" pitchFamily="34" charset="-122"/>
+                <a:cs typeface="Malgun Gothic" pitchFamily="34" charset="-120"/>
+              </a:rPr>
+              <a:t>B7</a:t>
+            </a:r>
+            <a:endParaRPr lang="en-US" sz="900" dirty="0"/>
+          </a:p>
+        </p:txBody>
+      </p:sp>
+      <p:sp>
+        <p:nvSpPr>
+          <p:cNvPr id="49" name="Text 47"/>
+          <p:cNvSpPr/>
+          <p:nvPr/>
+        </p:nvSpPr>
+        <p:spPr>
+          <a:xfrm>
+            <a:off x="3017520" y="3703320"/>
+            <a:ext cx="548640" cy="274320"/>
+          </a:xfrm>
+          <a:prstGeom prst="rect">
+            <a:avLst/>
+          </a:prstGeom>
+          <a:noFill/>
+          <a:ln/>
+        </p:spPr>
+        <p:txBody>
+          <a:bodyPr wrap="square" lIns="0" tIns="0" rIns="0" bIns="0" rtlCol="0" anchor="ctr"/>
+          <a:lstStyle/>
+          <a:p>
+            <a:pPr algn="ctr" indent="0" marL="0">
+              <a:buNone/>
+            </a:pPr>
+            <a:r>
+              <a:rPr lang="en-US" sz="1000" b="1" dirty="0">
+                <a:solidFill>
+                  <a:srgbClr val="E0645B"/>
+                </a:solidFill>
+                <a:latin typeface="Courier New" pitchFamily="34" charset="0"/>
+                <a:ea typeface="Courier New" pitchFamily="34" charset="-122"/>
+                <a:cs typeface="Courier New" pitchFamily="34" charset="-120"/>
+              </a:rPr>
+              <a:t>T0·T1</a:t>
+            </a:r>
+            <a:endParaRPr lang="en-US" sz="1000" dirty="0"/>
+          </a:p>
+        </p:txBody>
+      </p:sp>
+      <p:sp>
+        <p:nvSpPr>
+          <p:cNvPr id="50" name="Text 48"/>
+          <p:cNvSpPr/>
+          <p:nvPr/>
+        </p:nvSpPr>
+        <p:spPr>
+          <a:xfrm>
+            <a:off x="4297680" y="3703320"/>
+            <a:ext cx="548640" cy="274320"/>
+          </a:xfrm>
+          <a:prstGeom prst="rect">
+            <a:avLst/>
+          </a:prstGeom>
+          <a:noFill/>
+          <a:ln/>
+        </p:spPr>
+        <p:txBody>
+          <a:bodyPr wrap="square" lIns="0" tIns="0" rIns="0" bIns="0" rtlCol="0" anchor="ctr"/>
+          <a:lstStyle/>
+          <a:p>
+            <a:pPr algn="ctr" indent="0" marL="0">
+              <a:buNone/>
+            </a:pPr>
+            <a:r>
+              <a:rPr lang="en-US" sz="1000" b="1" dirty="0">
+                <a:solidFill>
+                  <a:srgbClr val="E0645B"/>
+                </a:solidFill>
+                <a:latin typeface="Courier New" pitchFamily="34" charset="0"/>
+                <a:ea typeface="Courier New" pitchFamily="34" charset="-122"/>
+                <a:cs typeface="Courier New" pitchFamily="34" charset="-120"/>
+              </a:rPr>
+              <a:t>T2·T3</a:t>
+            </a:r>
+            <a:endParaRPr lang="en-US" sz="1000" dirty="0"/>
+          </a:p>
+        </p:txBody>
+      </p:sp>
+      <p:sp>
+        <p:nvSpPr>
+          <p:cNvPr id="51" name="Text 49"/>
+          <p:cNvSpPr/>
+          <p:nvPr/>
+        </p:nvSpPr>
+        <p:spPr>
+          <a:xfrm>
+            <a:off x="5577840" y="3703320"/>
+            <a:ext cx="548640" cy="274320"/>
+          </a:xfrm>
+          <a:prstGeom prst="rect">
+            <a:avLst/>
+          </a:prstGeom>
+          <a:noFill/>
+          <a:ln/>
+        </p:spPr>
+        <p:txBody>
+          <a:bodyPr wrap="square" lIns="0" tIns="0" rIns="0" bIns="0" rtlCol="0" anchor="ctr"/>
+          <a:lstStyle/>
+          <a:p>
+            <a:pPr algn="ctr" indent="0" marL="0">
+              <a:buNone/>
+            </a:pPr>
+            <a:r>
+              <a:rPr lang="en-US" sz="1000" b="1" dirty="0">
+                <a:solidFill>
+                  <a:srgbClr val="E0645B"/>
+                </a:solidFill>
+                <a:latin typeface="Courier New" pitchFamily="34" charset="0"/>
+                <a:ea typeface="Courier New" pitchFamily="34" charset="-122"/>
+                <a:cs typeface="Courier New" pitchFamily="34" charset="-120"/>
+              </a:rPr>
+              <a:t>T4·T5</a:t>
+            </a:r>
+            <a:endParaRPr lang="en-US" sz="1000" dirty="0"/>
+          </a:p>
+        </p:txBody>
+      </p:sp>
+      <p:sp>
+        <p:nvSpPr>
+          <p:cNvPr id="52" name="Text 50"/>
+          <p:cNvSpPr/>
+          <p:nvPr/>
+        </p:nvSpPr>
+        <p:spPr>
+          <a:xfrm>
+            <a:off x="6858000" y="3703320"/>
+            <a:ext cx="548640" cy="274320"/>
+          </a:xfrm>
+          <a:prstGeom prst="rect">
+            <a:avLst/>
+          </a:prstGeom>
+          <a:noFill/>
+          <a:ln/>
+        </p:spPr>
+        <p:txBody>
+          <a:bodyPr wrap="square" lIns="0" tIns="0" rIns="0" bIns="0" rtlCol="0" anchor="ctr"/>
+          <a:lstStyle/>
+          <a:p>
+            <a:pPr algn="ctr" indent="0" marL="0">
+              <a:buNone/>
+            </a:pPr>
+            <a:r>
+              <a:rPr lang="en-US" sz="1000" b="1" dirty="0">
+                <a:solidFill>
+                  <a:srgbClr val="E0645B"/>
+                </a:solidFill>
+                <a:latin typeface="Courier New" pitchFamily="34" charset="0"/>
+                <a:ea typeface="Courier New" pitchFamily="34" charset="-122"/>
+                <a:cs typeface="Courier New" pitchFamily="34" charset="-120"/>
+              </a:rPr>
+              <a:t>T6·T7</a:t>
+            </a:r>
+            <a:endParaRPr lang="en-US" sz="1000" dirty="0"/>
+          </a:p>
+        </p:txBody>
+      </p:sp>
+      <p:sp>
+        <p:nvSpPr>
+          <p:cNvPr id="53" name="Text 51"/>
+          <p:cNvSpPr/>
+          <p:nvPr/>
+        </p:nvSpPr>
+        <p:spPr>
+          <a:xfrm>
+            <a:off x="8229600" y="3474720"/>
+            <a:ext cx="3383280" cy="502920"/>
+          </a:xfrm>
+          <a:prstGeom prst="rect">
+            <a:avLst/>
+          </a:prstGeom>
+          <a:noFill/>
+          <a:ln/>
+        </p:spPr>
+        <p:txBody>
+          <a:bodyPr wrap="square" lIns="0" tIns="0" rIns="0" bIns="0" rtlCol="0" anchor="ctr"/>
+          <a:lstStyle/>
+          <a:p>
+            <a:pPr indent="0" marL="0">
+              <a:buNone/>
+            </a:pPr>
+            <a:r>
+              <a:rPr lang="en-US" sz="1150" dirty="0">
+                <a:solidFill>
+                  <a:srgbClr val="E0645B"/>
+                </a:solidFill>
+                <a:latin typeface="Malgun Gothic" pitchFamily="34" charset="0"/>
+                <a:ea typeface="Malgun Gothic" pitchFamily="34" charset="-122"/>
+                <a:cs typeface="Malgun Gothic" pitchFamily="34" charset="-120"/>
+              </a:rPr>
+              <a:t>둘씩 같은 뱅크 → 2회로 순차화</a:t>
+            </a:r>
+            <a:endParaRPr lang="en-US" sz="1150" dirty="0"/>
+          </a:p>
+        </p:txBody>
+      </p:sp>
+      <p:sp>
+        <p:nvSpPr>
+          <p:cNvPr id="54" name="Shape 52"/>
+          <p:cNvSpPr/>
+          <p:nvPr/>
+        </p:nvSpPr>
+        <p:spPr>
+          <a:xfrm>
+            <a:off x="548640" y="4480560"/>
+            <a:ext cx="11064240" cy="1234440"/>
+          </a:xfrm>
+          <a:prstGeom prst="roundRect">
+            <a:avLst>
+              <a:gd name="adj" fmla="val 5926"/>
+            </a:avLst>
+          </a:prstGeom>
+          <a:solidFill>
+            <a:srgbClr val="1E232C"/>
+          </a:solidFill>
+          <a:ln/>
+        </p:spPr>
+      </p:sp>
+      <p:sp>
+        <p:nvSpPr>
+          <p:cNvPr id="55" name="Text 53"/>
+          <p:cNvSpPr/>
+          <p:nvPr/>
+        </p:nvSpPr>
+        <p:spPr>
+          <a:xfrm>
+            <a:off x="822960" y="4617720"/>
+            <a:ext cx="10515600" cy="1005840"/>
           </a:xfrm>
           <a:prstGeom prst="rect">
             <a:avLst/>
@@ -11360,13 +15036,16 @@
           <a:lstStyle/>
           <a:p>
             <a:pPr indent="0" marL="0">
+              <a:lnSpc>
+                <a:spcPct val="115000"/>
+              </a:lnSpc>
               <a:spcAft>
                 <a:spcPts val="600"/>
               </a:spcAft>
               <a:buNone/>
             </a:pPr>
             <a:r>
-              <a:rPr lang="en-US" sz="1600" b="1" dirty="0">
+              <a:rPr lang="en-US" sz="1400" dirty="0">
                 <a:solidFill>
                   <a:srgbClr val="E8EDF2"/>
                 </a:solidFill>
@@ -11374,16 +15053,58 @@
                 <a:ea typeface="Malgun Gothic" pitchFamily="34" charset="-122"/>
                 <a:cs typeface="Malgun Gothic" pitchFamily="34" charset="-120"/>
               </a:rPr>
-              <a:t>왜 CPU 타이머가 아니라 GPU 이벤트?</a:t>
-            </a:r>
-            <a:endParaRPr lang="en-US" sz="1600" dirty="0"/>
+              <a:t>핵심: 워프의 스레드들이 서로 다른 뱅크에 접근하면 한 번에, 같은 뱅크의 다른 주소면 충돌 수만큼 순차 처리됩니다.</a:t>
+            </a:r>
+            <a:endParaRPr lang="en-US" sz="1400" dirty="0"/>
           </a:p>
           <a:p>
             <a:pPr indent="0" marL="0">
-              <a:buNone/>
-            </a:pPr>
-            <a:r>
-              <a:rPr lang="en-US" sz="1600" dirty="0">
+              <a:lnSpc>
+                <a:spcPct val="115000"/>
+              </a:lnSpc>
+              <a:buNone/>
+            </a:pPr>
+            <a:r>
+              <a:rPr lang="en-US" sz="1400" dirty="0">
+                <a:solidFill>
+                  <a:srgbClr val="8CC63F"/>
+                </a:solidFill>
+                <a:latin typeface="Malgun Gothic" pitchFamily="34" charset="0"/>
+                <a:ea typeface="Malgun Gothic" pitchFamily="34" charset="-122"/>
+                <a:cs typeface="Malgun Gothic" pitchFamily="34" charset="-120"/>
+              </a:rPr>
+              <a:t>코얼레싱(전역 메모리) · 뱅크 충돌(공유 메모리) · 다이버전스(분기) — 워프 단위 성능의 3대 주제입니다.</a:t>
+            </a:r>
+            <a:endParaRPr lang="en-US" sz="1400" dirty="0"/>
+          </a:p>
+        </p:txBody>
+      </p:sp>
+      <p:sp>
+        <p:nvSpPr>
+          <p:cNvPr id="56" name="Text 54"/>
+          <p:cNvSpPr/>
+          <p:nvPr/>
+        </p:nvSpPr>
+        <p:spPr>
+          <a:xfrm>
+            <a:off x="548640" y="5852160"/>
+            <a:ext cx="11064240" cy="365760"/>
+          </a:xfrm>
+          <a:prstGeom prst="rect">
+            <a:avLst/>
+          </a:prstGeom>
+          <a:noFill/>
+          <a:ln/>
+        </p:spPr>
+        <p:txBody>
+          <a:bodyPr wrap="square" lIns="0" tIns="0" rIns="0" bIns="0" rtlCol="0" anchor="ctr"/>
+          <a:lstStyle/>
+          <a:p>
+            <a:pPr algn="ctr" indent="0" marL="0">
+              <a:buNone/>
+            </a:pPr>
+            <a:r>
+              <a:rPr lang="en-US" sz="1250" i="1" dirty="0">
                 <a:solidFill>
                   <a:srgbClr val="9AA6B2"/>
                 </a:solidFill>
@@ -11391,37 +15112,9 @@
                 <a:ea typeface="Malgun Gothic" pitchFamily="34" charset="-122"/>
                 <a:cs typeface="Malgun Gothic" pitchFamily="34" charset="-120"/>
               </a:rPr>
-              <a:t>커널은 비동기(asynchronous) 실행 — CPU는 커널을 던지고 바로 다음 줄로 갑니다. GPU 타임라인 위에 </a:t>
-            </a:r>
-            <a:pPr indent="0" marL="0">
-              <a:buNone/>
-            </a:pPr>
-            <a:r>
-              <a:rPr lang="en-US" sz="1600" b="1" dirty="0">
-                <a:solidFill>
-                  <a:srgbClr val="4FB0C6"/>
-                </a:solidFill>
-                <a:latin typeface="Malgun Gothic" pitchFamily="34" charset="0"/>
-                <a:ea typeface="Malgun Gothic" pitchFamily="34" charset="-122"/>
-                <a:cs typeface="Malgun Gothic" pitchFamily="34" charset="-120"/>
-              </a:rPr>
-              <a:t>이벤트를 찍어야</a:t>
-            </a:r>
-            <a:pPr indent="0" marL="0">
-              <a:buNone/>
-            </a:pPr>
-            <a:r>
-              <a:rPr lang="en-US" sz="1600" dirty="0">
-                <a:solidFill>
-                  <a:srgbClr val="9AA6B2"/>
-                </a:solidFill>
-                <a:latin typeface="Malgun Gothic" pitchFamily="34" charset="0"/>
-                <a:ea typeface="Malgun Gothic" pitchFamily="34" charset="-122"/>
-                <a:cs typeface="Malgun Gothic" pitchFamily="34" charset="-120"/>
-              </a:rPr>
-              <a:t> 진짜 커널 시간을 잴 수 있습니다.</a:t>
-            </a:r>
-            <a:endParaRPr lang="en-US" sz="1600" dirty="0"/>
+              <a:t>cuda_memtest는 공유 메모리를 쓰지 않으므로 실제로는 해당 없음 — 향후 공유 메모리 최적화 학습을 위한 참고입니다.</a:t>
+            </a:r>
+            <a:endParaRPr lang="en-US" sz="1250" dirty="0"/>
           </a:p>
         </p:txBody>
       </p:sp>
@@ -11494,7 +15187,7 @@
                 <a:ea typeface="Courier New" pitchFamily="34" charset="-122"/>
                 <a:cs typeface="Courier New" pitchFamily="34" charset="-120"/>
               </a:rPr>
-              <a:t>6</a:t>
+              <a:t>5</a:t>
             </a:r>
             <a:endParaRPr lang="en-US" sz="2200" dirty="0"/>
           </a:p>
@@ -11533,7 +15226,7 @@
                 <a:ea typeface="Malgun Gothic" pitchFamily="34" charset="-122"/>
                 <a:cs typeface="Malgun Gothic" pitchFamily="34" charset="-120"/>
               </a:rPr>
-              <a:t>대역폭(bandwidth) 계산 뜯어보기</a:t>
+              <a:t>CUDA 이벤트로 시간 재기</a:t>
             </a:r>
             <a:endParaRPr lang="en-US" sz="3000" dirty="0"/>
           </a:p>
@@ -11548,11 +15241,11 @@
         <p:spPr>
           <a:xfrm>
             <a:off x="548640" y="1554480"/>
-            <a:ext cx="11064240" cy="1188720"/>
+            <a:ext cx="11064240" cy="2743200"/>
           </a:xfrm>
           <a:prstGeom prst="roundRect">
             <a:avLst>
-              <a:gd name="adj" fmla="val 4615"/>
+              <a:gd name="adj" fmla="val 2000"/>
             </a:avLst>
           </a:prstGeom>
           <a:solidFill>
@@ -11575,7 +15268,7 @@
         <p:spPr>
           <a:xfrm>
             <a:off x="749808" y="1700784"/>
-            <a:ext cx="10661904" cy="896112"/>
+            <a:ext cx="10661904" cy="2450592"/>
           </a:xfrm>
           <a:prstGeom prst="rect">
             <a:avLst/>
@@ -11594,17 +15287,17 @@
               <a:buNone/>
             </a:pPr>
             <a:r>
-              <a:rPr lang="en-US" sz="1400" dirty="0">
-                <a:solidFill>
-                  <a:srgbClr val="8CC63F"/>
+              <a:rPr lang="en-US" sz="1300" dirty="0">
+                <a:solidFill>
+                  <a:srgbClr val="9AA6B2"/>
                 </a:solidFill>
                 <a:latin typeface="Courier New" pitchFamily="34" charset="0"/>
                 <a:ea typeface="Courier New" pitchFamily="34" charset="-122"/>
                 <a:cs typeface="Courier New" pitchFamily="34" charset="-120"/>
               </a:rPr>
-              <a:t>bandwidth = (2*n + 1) * tot_num_blocks / elapsedtime   // GB/s</a:t>
-            </a:r>
-            <a:endParaRPr lang="en-US" sz="1400" dirty="0"/>
+              <a:t>// test10   tests.cpp:1510~1524</a:t>
+            </a:r>
+            <a:endParaRPr lang="en-US" sz="1300" dirty="0"/>
           </a:p>
           <a:p>
             <a:pPr algn="l" indent="0" marL="0">
@@ -11614,68 +15307,27 @@
               <a:buNone/>
             </a:pPr>
             <a:r>
-              <a:rPr lang="en-US" sz="1400" dirty="0">
-                <a:solidFill>
-                  <a:srgbClr val="9AA6B2"/>
+              <a:rPr lang="en-US" sz="1300" dirty="0">
+                <a:solidFill>
+                  <a:srgbClr val="E8EDF2"/>
                 </a:solidFill>
                 <a:latin typeface="Courier New" pitchFamily="34" charset="0"/>
                 <a:ea typeface="Courier New" pitchFamily="34" charset="-122"/>
                 <a:cs typeface="Courier New" pitchFamily="34" charset="-120"/>
               </a:rPr>
-              <a:t>//           └ 접근 횟수 ┘   └ MB 단위 ┘   └ ms 단위 ┘</a:t>
-            </a:r>
-            <a:endParaRPr lang="en-US" sz="1400" dirty="0"/>
-          </a:p>
-        </p:txBody>
-      </p:sp>
-      <p:sp>
-        <p:nvSpPr>
-          <p:cNvPr id="6" name="Shape 4"/>
-          <p:cNvSpPr/>
-          <p:nvPr/>
-        </p:nvSpPr>
-        <p:spPr>
-          <a:xfrm>
-            <a:off x="548640" y="3017520"/>
-            <a:ext cx="3444240" cy="2194560"/>
-          </a:xfrm>
-          <a:prstGeom prst="roundRect">
-            <a:avLst>
-              <a:gd name="adj" fmla="val 3333"/>
-            </a:avLst>
-          </a:prstGeom>
-          <a:solidFill>
-            <a:srgbClr val="1E232C"/>
-          </a:solidFill>
-          <a:ln/>
-        </p:spPr>
-      </p:sp>
-      <p:sp>
-        <p:nvSpPr>
-          <p:cNvPr id="7" name="Text 5"/>
-          <p:cNvSpPr/>
-          <p:nvPr/>
-        </p:nvSpPr>
-        <p:spPr>
-          <a:xfrm>
-            <a:off x="777240" y="3200400"/>
-            <a:ext cx="2987040" cy="457200"/>
-          </a:xfrm>
-          <a:prstGeom prst="rect">
-            <a:avLst/>
-          </a:prstGeom>
-          <a:noFill/>
-          <a:ln/>
-        </p:spPr>
-        <p:txBody>
-          <a:bodyPr wrap="square" lIns="0" tIns="0" rIns="0" bIns="0" rtlCol="0" anchor="ctr"/>
-          <a:lstStyle/>
-          <a:p>
-            <a:pPr indent="0" marL="0">
-              <a:buNone/>
-            </a:pPr>
-            <a:r>
-              <a:rPr lang="en-US" sz="1700" b="1" dirty="0">
+              <a:t>cudaEventRecord(start, stream);</a:t>
+            </a:r>
+            <a:endParaRPr lang="en-US" sz="1300" dirty="0"/>
+          </a:p>
+          <a:p>
+            <a:pPr algn="l" indent="0" marL="0">
+              <a:lnSpc>
+                <a:spcPct val="108000"/>
+              </a:lnSpc>
+              <a:buNone/>
+            </a:pPr>
+            <a:r>
+              <a:rPr lang="en-US" sz="1300" dirty="0">
                 <a:solidFill>
                   <a:srgbClr val="8CC63F"/>
                 </a:solidFill>
@@ -11683,322 +15335,121 @@
                 <a:ea typeface="Courier New" pitchFamily="34" charset="-122"/>
                 <a:cs typeface="Courier New" pitchFamily="34" charset="-120"/>
               </a:rPr>
-              <a:t>(2n + 1)</a:t>
-            </a:r>
-            <a:endParaRPr lang="en-US" sz="1700" dirty="0"/>
-          </a:p>
-        </p:txBody>
-      </p:sp>
-      <p:sp>
-        <p:nvSpPr>
-          <p:cNvPr id="8" name="Text 6"/>
-          <p:cNvSpPr/>
-          <p:nvPr/>
-        </p:nvSpPr>
-        <p:spPr>
-          <a:xfrm>
-            <a:off x="777240" y="3703320"/>
-            <a:ext cx="2987040" cy="411480"/>
-          </a:xfrm>
-          <a:prstGeom prst="rect">
-            <a:avLst/>
-          </a:prstGeom>
-          <a:noFill/>
-          <a:ln/>
-        </p:spPr>
-        <p:txBody>
-          <a:bodyPr wrap="square" lIns="0" tIns="0" rIns="0" bIns="0" rtlCol="0" anchor="ctr"/>
-          <a:lstStyle/>
-          <a:p>
-            <a:pPr indent="0" marL="0">
-              <a:buNone/>
-            </a:pPr>
-            <a:r>
-              <a:rPr lang="en-US" sz="1500" b="1" dirty="0">
-                <a:solidFill>
-                  <a:srgbClr val="E8EDF2"/>
-                </a:solidFill>
-                <a:latin typeface="Malgun Gothic" pitchFamily="34" charset="0"/>
-                <a:ea typeface="Malgun Gothic" pitchFamily="34" charset="-122"/>
-                <a:cs typeface="Malgun Gothic" pitchFamily="34" charset="-120"/>
-              </a:rPr>
-              <a:t>접근 패스 수</a:t>
-            </a:r>
-            <a:endParaRPr lang="en-US" sz="1500" dirty="0"/>
-          </a:p>
-        </p:txBody>
-      </p:sp>
-      <p:sp>
-        <p:nvSpPr>
-          <p:cNvPr id="9" name="Text 7"/>
-          <p:cNvSpPr/>
-          <p:nvPr/>
-        </p:nvSpPr>
-        <p:spPr>
-          <a:xfrm>
-            <a:off x="777240" y="4160520"/>
-            <a:ext cx="2987040" cy="914400"/>
-          </a:xfrm>
-          <a:prstGeom prst="rect">
-            <a:avLst/>
-          </a:prstGeom>
-          <a:noFill/>
-          <a:ln/>
-        </p:spPr>
-        <p:txBody>
-          <a:bodyPr wrap="square" lIns="0" tIns="0" rIns="0" bIns="0" rtlCol="0" anchor="t"/>
-          <a:lstStyle/>
-          <a:p>
-            <a:pPr indent="0" marL="0">
+              <a:t>test10_kernel_write&lt;&lt;&lt;...&gt;&gt;&gt;(...);          // 쓰기</a:t>
+            </a:r>
+            <a:endParaRPr lang="en-US" sz="1300" dirty="0"/>
+          </a:p>
+          <a:p>
+            <a:pPr algn="l" indent="0" marL="0">
               <a:lnSpc>
-                <a:spcPct val="115000"/>
+                <a:spcPct val="108000"/>
               </a:lnSpc>
               <a:buNone/>
             </a:pPr>
             <a:r>
-              <a:rPr lang="en-US" sz="1400" dirty="0">
-                <a:solidFill>
-                  <a:srgbClr val="9AA6B2"/>
-                </a:solidFill>
-                <a:latin typeface="Malgun Gothic" pitchFamily="34" charset="0"/>
-                <a:ea typeface="Malgun Gothic" pitchFamily="34" charset="-122"/>
-                <a:cs typeface="Malgun Gothic" pitchFamily="34" charset="-120"/>
-              </a:rPr>
-              <a:t>쓰기 1회 + 읽고쓰기 n회(각 읽기+쓰기=2)</a:t>
-            </a:r>
-            <a:endParaRPr lang="en-US" sz="1400" dirty="0"/>
-          </a:p>
-        </p:txBody>
-      </p:sp>
-      <p:sp>
-        <p:nvSpPr>
-          <p:cNvPr id="10" name="Shape 8"/>
-          <p:cNvSpPr/>
-          <p:nvPr/>
-        </p:nvSpPr>
-        <p:spPr>
-          <a:xfrm>
-            <a:off x="4358640" y="3017520"/>
-            <a:ext cx="3444240" cy="2194560"/>
-          </a:xfrm>
-          <a:prstGeom prst="roundRect">
-            <a:avLst>
-              <a:gd name="adj" fmla="val 3333"/>
-            </a:avLst>
-          </a:prstGeom>
-          <a:solidFill>
-            <a:srgbClr val="1E232C"/>
-          </a:solidFill>
-          <a:ln/>
-        </p:spPr>
-      </p:sp>
-      <p:sp>
-        <p:nvSpPr>
-          <p:cNvPr id="11" name="Text 9"/>
-          <p:cNvSpPr/>
-          <p:nvPr/>
-        </p:nvSpPr>
-        <p:spPr>
-          <a:xfrm>
-            <a:off x="4587240" y="3200400"/>
-            <a:ext cx="2987040" cy="457200"/>
-          </a:xfrm>
-          <a:prstGeom prst="rect">
-            <a:avLst/>
-          </a:prstGeom>
-          <a:noFill/>
-          <a:ln/>
-        </p:spPr>
-        <p:txBody>
-          <a:bodyPr wrap="square" lIns="0" tIns="0" rIns="0" bIns="0" rtlCol="0" anchor="ctr"/>
-          <a:lstStyle/>
-          <a:p>
-            <a:pPr indent="0" marL="0">
-              <a:buNone/>
-            </a:pPr>
-            <a:r>
-              <a:rPr lang="en-US" sz="1700" b="1" dirty="0">
-                <a:solidFill>
-                  <a:srgbClr val="4FB0C6"/>
+              <a:rPr lang="en-US" sz="1300" dirty="0">
+                <a:solidFill>
+                  <a:srgbClr val="8CC63F"/>
                 </a:solidFill>
                 <a:latin typeface="Courier New" pitchFamily="34" charset="0"/>
                 <a:ea typeface="Courier New" pitchFamily="34" charset="-122"/>
                 <a:cs typeface="Courier New" pitchFamily="34" charset="-120"/>
               </a:rPr>
-              <a:t>tot_num_blocks</a:t>
-            </a:r>
-            <a:endParaRPr lang="en-US" sz="1700" dirty="0"/>
-          </a:p>
-        </p:txBody>
-      </p:sp>
-      <p:sp>
-        <p:nvSpPr>
-          <p:cNvPr id="12" name="Text 10"/>
-          <p:cNvSpPr/>
-          <p:nvPr/>
-        </p:nvSpPr>
-        <p:spPr>
-          <a:xfrm>
-            <a:off x="4587240" y="3703320"/>
-            <a:ext cx="2987040" cy="411480"/>
-          </a:xfrm>
-          <a:prstGeom prst="rect">
-            <a:avLst/>
-          </a:prstGeom>
-          <a:noFill/>
-          <a:ln/>
-        </p:spPr>
-        <p:txBody>
-          <a:bodyPr wrap="square" lIns="0" tIns="0" rIns="0" bIns="0" rtlCol="0" anchor="ctr"/>
-          <a:lstStyle/>
-          <a:p>
-            <a:pPr indent="0" marL="0">
-              <a:buNone/>
-            </a:pPr>
-            <a:r>
-              <a:rPr lang="en-US" sz="1500" b="1" dirty="0">
+              <a:t>for (i=0;i&lt;n;i++) test10_kernel_readwrite&lt;&lt;&lt;...&gt;&gt;&gt;(...); // 읽고쓰기 n회</a:t>
+            </a:r>
+            <a:endParaRPr lang="en-US" sz="1300" dirty="0"/>
+          </a:p>
+          <a:p>
+            <a:pPr algn="l" indent="0" marL="0">
+              <a:lnSpc>
+                <a:spcPct val="108000"/>
+              </a:lnSpc>
+              <a:buNone/>
+            </a:pPr>
+            <a:r>
+              <a:rPr lang="en-US" sz="1300" dirty="0">
                 <a:solidFill>
                   <a:srgbClr val="E8EDF2"/>
-                </a:solidFill>
-                <a:latin typeface="Malgun Gothic" pitchFamily="34" charset="0"/>
-                <a:ea typeface="Malgun Gothic" pitchFamily="34" charset="-122"/>
-                <a:cs typeface="Malgun Gothic" pitchFamily="34" charset="-120"/>
-              </a:rPr>
-              <a:t>전송량 (MB)</a:t>
-            </a:r>
-            <a:endParaRPr lang="en-US" sz="1500" dirty="0"/>
-          </a:p>
-        </p:txBody>
-      </p:sp>
-      <p:sp>
-        <p:nvSpPr>
-          <p:cNvPr id="13" name="Text 11"/>
-          <p:cNvSpPr/>
-          <p:nvPr/>
-        </p:nvSpPr>
-        <p:spPr>
-          <a:xfrm>
-            <a:off x="4587240" y="4160520"/>
-            <a:ext cx="2987040" cy="914400"/>
-          </a:xfrm>
-          <a:prstGeom prst="rect">
-            <a:avLst/>
-          </a:prstGeom>
-          <a:noFill/>
-          <a:ln/>
-        </p:spPr>
-        <p:txBody>
-          <a:bodyPr wrap="square" lIns="0" tIns="0" rIns="0" bIns="0" rtlCol="0" anchor="t"/>
-          <a:lstStyle/>
-          <a:p>
-            <a:pPr indent="0" marL="0">
-              <a:lnSpc>
-                <a:spcPct val="115000"/>
-              </a:lnSpc>
-              <a:buNone/>
-            </a:pPr>
-            <a:r>
-              <a:rPr lang="en-US" sz="1400" dirty="0">
-                <a:solidFill>
-                  <a:srgbClr val="9AA6B2"/>
-                </a:solidFill>
-                <a:latin typeface="Malgun Gothic" pitchFamily="34" charset="0"/>
-                <a:ea typeface="Malgun Gothic" pitchFamily="34" charset="-122"/>
-                <a:cs typeface="Malgun Gothic" pitchFamily="34" charset="-120"/>
-              </a:rPr>
-              <a:t>블록 하나 = BLOCKSIZE = 1 MB</a:t>
-            </a:r>
-            <a:endParaRPr lang="en-US" sz="1400" dirty="0"/>
-          </a:p>
-        </p:txBody>
-      </p:sp>
-      <p:sp>
-        <p:nvSpPr>
-          <p:cNvPr id="14" name="Shape 12"/>
-          <p:cNvSpPr/>
-          <p:nvPr/>
-        </p:nvSpPr>
-        <p:spPr>
-          <a:xfrm>
-            <a:off x="8168640" y="3017520"/>
-            <a:ext cx="3444240" cy="2194560"/>
-          </a:xfrm>
-          <a:prstGeom prst="roundRect">
-            <a:avLst>
-              <a:gd name="adj" fmla="val 3333"/>
-            </a:avLst>
-          </a:prstGeom>
-          <a:solidFill>
-            <a:srgbClr val="1E232C"/>
-          </a:solidFill>
-          <a:ln/>
-        </p:spPr>
-      </p:sp>
-      <p:sp>
-        <p:nvSpPr>
-          <p:cNvPr id="15" name="Text 13"/>
-          <p:cNvSpPr/>
-          <p:nvPr/>
-        </p:nvSpPr>
-        <p:spPr>
-          <a:xfrm>
-            <a:off x="8397240" y="3200400"/>
-            <a:ext cx="2987040" cy="457200"/>
-          </a:xfrm>
-          <a:prstGeom prst="rect">
-            <a:avLst/>
-          </a:prstGeom>
-          <a:noFill/>
-          <a:ln/>
-        </p:spPr>
-        <p:txBody>
-          <a:bodyPr wrap="square" lIns="0" tIns="0" rIns="0" bIns="0" rtlCol="0" anchor="ctr"/>
-          <a:lstStyle/>
-          <a:p>
-            <a:pPr indent="0" marL="0">
-              <a:buNone/>
-            </a:pPr>
-            <a:r>
-              <a:rPr lang="en-US" sz="1700" b="1" dirty="0">
-                <a:solidFill>
-                  <a:srgbClr val="E0A458"/>
                 </a:solidFill>
                 <a:latin typeface="Courier New" pitchFamily="34" charset="0"/>
                 <a:ea typeface="Courier New" pitchFamily="34" charset="-122"/>
                 <a:cs typeface="Courier New" pitchFamily="34" charset="-120"/>
               </a:rPr>
-              <a:t>elapsedtime</a:t>
-            </a:r>
-            <a:endParaRPr lang="en-US" sz="1700" dirty="0"/>
-          </a:p>
-        </p:txBody>
-      </p:sp>
-      <p:sp>
-        <p:nvSpPr>
-          <p:cNvPr id="16" name="Text 14"/>
-          <p:cNvSpPr/>
-          <p:nvPr/>
-        </p:nvSpPr>
-        <p:spPr>
-          <a:xfrm>
-            <a:off x="8397240" y="3703320"/>
-            <a:ext cx="2987040" cy="411480"/>
-          </a:xfrm>
-          <a:prstGeom prst="rect">
-            <a:avLst/>
-          </a:prstGeom>
-          <a:noFill/>
-          <a:ln/>
-        </p:spPr>
-        <p:txBody>
-          <a:bodyPr wrap="square" lIns="0" tIns="0" rIns="0" bIns="0" rtlCol="0" anchor="ctr"/>
+              <a:t>cudaEventRecord(stop, stream);</a:t>
+            </a:r>
+            <a:endParaRPr lang="en-US" sz="1300" dirty="0"/>
+          </a:p>
+          <a:p>
+            <a:pPr algn="l" indent="0" marL="0">
+              <a:lnSpc>
+                <a:spcPct val="108000"/>
+              </a:lnSpc>
+              <a:buNone/>
+            </a:pPr>
+            <a:r>
+              <a:rPr lang="en-US" sz="1300" dirty="0">
+                <a:solidFill>
+                  <a:srgbClr val="E0A458"/>
+                </a:solidFill>
+                <a:latin typeface="Courier New" pitchFamily="34" charset="0"/>
+                <a:ea typeface="Courier New" pitchFamily="34" charset="-122"/>
+                <a:cs typeface="Courier New" pitchFamily="34" charset="-120"/>
+              </a:rPr>
+              <a:t>cudaEventSynchronize(stop);                 // GPU가 끝날 때까지 대기</a:t>
+            </a:r>
+            <a:endParaRPr lang="en-US" sz="1300" dirty="0"/>
+          </a:p>
+          <a:p>
+            <a:pPr algn="l" indent="0" marL="0">
+              <a:lnSpc>
+                <a:spcPct val="108000"/>
+              </a:lnSpc>
+              <a:buNone/>
+            </a:pPr>
+            <a:r>
+              <a:rPr lang="en-US" sz="1300" dirty="0">
+                <a:solidFill>
+                  <a:srgbClr val="4FB0C6"/>
+                </a:solidFill>
+                <a:latin typeface="Courier New" pitchFamily="34" charset="0"/>
+                <a:ea typeface="Courier New" pitchFamily="34" charset="-122"/>
+                <a:cs typeface="Courier New" pitchFamily="34" charset="-120"/>
+              </a:rPr>
+              <a:t>cudaEventElapsedTime(&amp;elapsedtime, start, stop); // 밀리초 경과시간</a:t>
+            </a:r>
+            <a:endParaRPr lang="en-US" sz="1300" dirty="0"/>
+          </a:p>
+        </p:txBody>
+      </p:sp>
+      <p:sp>
+        <p:nvSpPr>
+          <p:cNvPr id="6" name="Text 4"/>
+          <p:cNvSpPr/>
+          <p:nvPr/>
+        </p:nvSpPr>
+        <p:spPr>
+          <a:xfrm>
+            <a:off x="548640" y="4572000"/>
+            <a:ext cx="11064240" cy="1371600"/>
+          </a:xfrm>
+          <a:prstGeom prst="rect">
+            <a:avLst/>
+          </a:prstGeom>
+          <a:noFill/>
+          <a:ln/>
+        </p:spPr>
+        <p:txBody>
+          <a:bodyPr wrap="square" lIns="0" tIns="0" rIns="0" bIns="0" rtlCol="0" anchor="t"/>
           <a:lstStyle/>
           <a:p>
             <a:pPr indent="0" marL="0">
-              <a:buNone/>
-            </a:pPr>
-            <a:r>
-              <a:rPr lang="en-US" sz="1500" b="1" dirty="0">
+              <a:spcAft>
+                <a:spcPts val="600"/>
+              </a:spcAft>
+              <a:buNone/>
+            </a:pPr>
+            <a:r>
+              <a:rPr lang="en-US" sz="1600" b="1" dirty="0">
                 <a:solidFill>
                   <a:srgbClr val="E8EDF2"/>
                 </a:solidFill>
@@ -12006,41 +15457,16 @@
                 <a:ea typeface="Malgun Gothic" pitchFamily="34" charset="-122"/>
                 <a:cs typeface="Malgun Gothic" pitchFamily="34" charset="-120"/>
               </a:rPr>
-              <a:t>경과 시간 (ms)</a:t>
-            </a:r>
-            <a:endParaRPr lang="en-US" sz="1500" dirty="0"/>
-          </a:p>
-        </p:txBody>
-      </p:sp>
-      <p:sp>
-        <p:nvSpPr>
-          <p:cNvPr id="17" name="Text 15"/>
-          <p:cNvSpPr/>
-          <p:nvPr/>
-        </p:nvSpPr>
-        <p:spPr>
-          <a:xfrm>
-            <a:off x="8397240" y="4160520"/>
-            <a:ext cx="2987040" cy="914400"/>
-          </a:xfrm>
-          <a:prstGeom prst="rect">
-            <a:avLst/>
-          </a:prstGeom>
-          <a:noFill/>
-          <a:ln/>
-        </p:spPr>
-        <p:txBody>
-          <a:bodyPr wrap="square" lIns="0" tIns="0" rIns="0" bIns="0" rtlCol="0" anchor="t"/>
-          <a:lstStyle/>
+              <a:t>왜 CPU 타이머가 아니라 GPU 이벤트?</a:t>
+            </a:r>
+            <a:endParaRPr lang="en-US" sz="1600" dirty="0"/>
+          </a:p>
           <a:p>
             <a:pPr indent="0" marL="0">
-              <a:lnSpc>
-                <a:spcPct val="115000"/>
-              </a:lnSpc>
-              <a:buNone/>
-            </a:pPr>
-            <a:r>
-              <a:rPr lang="en-US" sz="1400" dirty="0">
+              <a:buNone/>
+            </a:pPr>
+            <a:r>
+              <a:rPr lang="en-US" sz="1600" dirty="0">
                 <a:solidFill>
                   <a:srgbClr val="9AA6B2"/>
                 </a:solidFill>
@@ -12048,38 +15474,27 @@
                 <a:ea typeface="Malgun Gothic" pitchFamily="34" charset="-122"/>
                 <a:cs typeface="Malgun Gothic" pitchFamily="34" charset="-120"/>
               </a:rPr>
-              <a:t>이벤트로 잰 밀리초</a:t>
-            </a:r>
-            <a:endParaRPr lang="en-US" sz="1400" dirty="0"/>
-          </a:p>
-        </p:txBody>
-      </p:sp>
-      <p:sp>
-        <p:nvSpPr>
-          <p:cNvPr id="18" name="Text 16"/>
-          <p:cNvSpPr/>
-          <p:nvPr/>
-        </p:nvSpPr>
-        <p:spPr>
-          <a:xfrm>
-            <a:off x="548640" y="5440680"/>
-            <a:ext cx="11064240" cy="457200"/>
-          </a:xfrm>
-          <a:prstGeom prst="rect">
-            <a:avLst/>
-          </a:prstGeom>
-          <a:noFill/>
-          <a:ln/>
-        </p:spPr>
-        <p:txBody>
-          <a:bodyPr wrap="square" lIns="0" tIns="0" rIns="0" bIns="0" rtlCol="0" anchor="ctr"/>
-          <a:lstStyle/>
-          <a:p>
+              <a:t>커널은 비동기(asynchronous) 실행 — CPU는 커널을 던지고 바로 다음 줄로 갑니다. GPU 타임라인 위에 </a:t>
+            </a:r>
             <a:pPr indent="0" marL="0">
               <a:buNone/>
             </a:pPr>
             <a:r>
-              <a:rPr lang="en-US" sz="1400" i="1" dirty="0">
+              <a:rPr lang="en-US" sz="1600" b="1" dirty="0">
+                <a:solidFill>
+                  <a:srgbClr val="4FB0C6"/>
+                </a:solidFill>
+                <a:latin typeface="Malgun Gothic" pitchFamily="34" charset="0"/>
+                <a:ea typeface="Malgun Gothic" pitchFamily="34" charset="-122"/>
+                <a:cs typeface="Malgun Gothic" pitchFamily="34" charset="-120"/>
+              </a:rPr>
+              <a:t>이벤트를 찍어야</a:t>
+            </a:r>
+            <a:pPr indent="0" marL="0">
+              <a:buNone/>
+            </a:pPr>
+            <a:r>
+              <a:rPr lang="en-US" sz="1600" dirty="0">
                 <a:solidFill>
                   <a:srgbClr val="9AA6B2"/>
                 </a:solidFill>
@@ -12087,9 +15502,9 @@
                 <a:ea typeface="Malgun Gothic" pitchFamily="34" charset="-122"/>
                 <a:cs typeface="Malgun Gothic" pitchFamily="34" charset="-120"/>
               </a:rPr>
-              <a:t>MB ÷ ms = GB/s. 실측값을 GPU 스펙의 이론 대역폭과 비교하면 보통 60~90% 수준입니다.</a:t>
-            </a:r>
-            <a:endParaRPr lang="en-US" sz="1400" dirty="0"/>
+              <a:t> 진짜 커널 시간을 잴 수 있습니다.</a:t>
+            </a:r>
+            <a:endParaRPr lang="en-US" sz="1600" dirty="0"/>
           </a:p>
         </p:txBody>
       </p:sp>
